--- a/Panduan Korlas dan Admin Pizza Snack Play/Panduan Korlas dan Admin Pizza Snack Play.pptx
+++ b/Panduan Korlas dan Admin Pizza Snack Play/Panduan Korlas dan Admin Pizza Snack Play.pptx
@@ -5,7 +5,7 @@
     <p:sldMasterId id="2147483648" r:id="rId0"/>
   </p:sldMasterIdLst>
   <p:notesMasterIdLst>
-    <p:notesMasterId r:id="rId16"/>
+    <p:notesMasterId r:id="rId17"/>
   </p:notesMasterIdLst>
   <p:sldIdLst>
     <p:sldId id="256" r:id="rId1"/>
@@ -23,6 +23,7 @@
     <p:sldId id="268" r:id="rId13"/>
     <p:sldId id="269" r:id="rId14"/>
     <p:sldId id="270" r:id="rId15"/>
+    <p:sldId id="271" r:id="rId16"/>
   </p:sldIdLst>
   <p:sldSz cx="12192000" cy="6858000"/>
   <p:notesSz cx="6858000" cy="12192000"/>
@@ -1400,7 +1401,7 @@
   <p:cSld>
     <p:spTree>
       <p:nvGrpSpPr>
-        <p:cNvPr id="16" name="" descr="&lt;Slide&#10;    style={{&#10;        width: '1280px',&#10;        height: '720px',&#10;        background: '#FAF7F2',&#10;        paddingTop: 20,&#10;        paddingBottom: 20,&#10;        paddingLeft: 64,&#10;        paddingRight: 64,&#10;    }}&#10;&gt;&#10;    {/* ── A · blok judul ── */}&#10;    &lt;Box style={{ height: 110, justifyContent: 'center' }}&gt;&#10;        &lt;Text&#10;            style={{&#10;                fontSize: 34,&#10;                fontWeight: 'bold',&#10;                color: '#51277C',&#10;                fontFamily: 'Trebuchet MS',&#10;                lineHeight: 1.3,&#10;            }}&#10;        &gt;&#10;            Petugas piket: siapa yang ambil snack&#10;        &lt;/Text&gt;&#10;        &lt;Box style={{ marginTop: 10, width: 72, height: 6, borderRadius: 3, background: '#51277C' }} /&gt;&#10;    &lt;/Box&gt;&#10;&#10;    {/* ── B · area konten ── */}&#10;    &lt;Box style={{ height: 530, flexDirection: 'row', gap: 26 }}&gt;&#10;        {/* kiri 30% · penanda */}&#10;        &lt;Box&#10;            style={{&#10;                width: '30%',&#10;                height: '100%',&#10;                background: 'linear-gradient(135deg, #51277C 0%, #7A45A8 100%)',&#10;                borderRadius: 18,&#10;                padding: 26,&#10;                justifyContent: 'space-between',&#10;            }}&#10;        &gt;&#10;            &lt;Box&gt;&#10;                &lt;Text&#10;                    style={{&#10;                        fontSize: 30,&#10;                        fontWeight: 'bold',&#10;                        color: '#FFFFFF',&#10;                        fontFamily: 'Trebuchet MS',&#10;                        lineHeight: 1.25,&#10;                    }}&#10;                &gt;&#10;                    Satu tanggal,{'\n'}satu petugas&#10;                &lt;/Text&gt;&#10;                &lt;Box style={{ marginTop: 16, width: 64, height: 5, borderRadius: 3, background: '#F3B26C' }} /&gt;&#10;            &lt;/Box&gt;&#10;            &lt;Text&#10;                style={{&#10;                    fontSize: 17,&#10;                    color: 'rgba(255,255,255,0.88)',&#10;                    fontFamily: 'Verdana',&#10;                    lineHeight: 1.5,&#10;                }}&#10;            &gt;&#10;                Nama petugas yang Anda isi akan tampil ke orang tua sekalian nama orang tuanya.&#10;            &lt;/Text&gt;&#10;        &lt;/Box&gt;&#10;&#10;        {/* kanan 70% · tiga poin + ilustrasi dropdown */}&#10;        &lt;Box style={{ width: '70%', height: '100%', flexDirection: 'row', gap: 22 }}&gt;&#10;            &lt;Box style={{ flex: 1, height: '100%', justifyContent: 'space-between' }}&gt;&#10;                {[&#10;                    {&#10;                        t: 'Pilih dari daftar siswa',&#10;                        d: 'Kolom petugas berisi nama siswa di kelas Anda. Nama orang tuanya terisi sendiri.',&#10;                    },&#10;                    {&#10;                        t: 'Biarkan kosong bila perlu',&#10;                        d: 'Tanggal tanpa petugas bisa diambil sendiri orang tua — siapa cepat dia dapat.',&#10;                    },&#10;                    {&#10;                        t: 'Tidak ikut direbut orang tua',&#10;                        d: 'Ditandai &quot;Ditetapkan korlas&quot;, jadi tidak ada dua orang merasa sudah dapat.',&#10;                    },&#10;                ].map((it, i) =&gt; (&#10;                    &lt;Box&#10;                        key={i}&#10;                        style={{&#10;                            height: 165,&#10;                            background: '#FFFFFF',&#10;                            borderRadius: 16,&#10;                            boxShadow: '0 4px 20px rgba(0,0,0,0.08)',&#10;                            padding: 22,&#10;                            borderLeft: '8px solid #AFC440',&#10;                        }}&#10;                    &gt;&#10;                        &lt;Text&#10;                            style={{&#10;                                fontSize: 23,&#10;                                fontWeight: 'bold',&#10;                                color: '#51277C',&#10;                                fontFamily: 'Trebuchet MS',&#10;                                lineHeight: 1.3,&#10;                            }}&#10;                        &gt;&#10;                            {it.t}&#10;                        &lt;/Text&gt;&#10;                        &lt;Text&#10;                            style={{&#10;                                marginTop: 9,&#10;                                fontSize: 17,&#10;                                color: '#6B6478',&#10;                                fontFamily: 'Verdana',&#10;                                lineHeight: 1.5,&#10;                            }}&#10;                        &gt;&#10;                            {it.d}&#10;                        &lt;/Text&gt;&#10;                    &lt;/Box&gt;&#10;                ))}&#10;            &lt;/Box&gt;&#10;&#10;            &lt;Box&#10;                style={{&#10;                    width: 300,&#10;                    height: '100%',&#10;                    background: 'rgba(81,39,124,0.06)',&#10;                    borderRadius: 18,&#10;                    justifyContent: 'center',&#10;                    alignItems: 'center',&#10;                }}&#10;            &gt;&#10;                &lt;svg width={276} height={300} viewBox='0 0 276 300'&gt;&#10;                    &lt;text x='14' y='26' fontFamily='Verdana' fontSize='14' fill='#6B6478'&gt;Petugas&lt;/text&gt;&#10;                    &lt;rect x='14' y='38' width='248' height='48' rx='10' fill='#FFFFFF' stroke='#51277C' strokeWidth='2' /&gt;&#10;                    &lt;text x='34' y='68' fontFamily='Verdana' fontSize='16' fill='#51277C'&gt;Rafa Aditya&lt;/text&gt;&#10;                    &lt;path d='M232 58l16 12-16 12z' fill='#51277C' /&gt;&#10;&#10;                    &lt;rect x='14' y='94' width='248' height='112' rx='10' fill='#FFFFFF' stroke='#E6DFD2' strokeWidth='2' /&gt;&#10;                    &lt;rect x='14' y='94' width='248' height='36' rx='10' fill='rgba(81,39,124,0.10)' /&gt;&#10;                    &lt;text x='34' y='117' fontFamily='Verdana' fontSize='15' fontWeight='bold' fill='#51277C'&gt;Rafa Aditya&lt;/text&gt;&#10;                    &lt;text x='34' y='148' fontFamily='Verdana' fontSize='15' fill='#2A2333'&gt;Dinda&lt;/text&gt;&#10;                    &lt;text x='34' y='178' fontFamily='Verdana' fontSize='15' fill='#2A2333'&gt;Bayu&lt;/text&gt;&#10;&#10;                    &lt;text x='14' y='234' fontFamily='Verdana' fontSize='14' fill='#6B6478'&gt;Orang tua (terisi sendiri)&lt;/text&gt;&#10;                    &lt;rect x='14' y='246' width='248' height='44' rx='10' fill='#EFEAE1' /&gt;&#10;                    &lt;text x='34' y='274' fontFamily='Verdana' fontSize='15' fill='#6B6478'&gt;Ibu Rina&lt;/text&gt;&#10;                &lt;/svg&gt;&#10;            &lt;/Box&gt;&#10;        &lt;/Box&gt;&#10;    &lt;/Box&gt;&#10;&#10;    {/* ── C · bilah kaki ── */}&#10;    &lt;Box&#10;        style={{&#10;            height: 40,&#10;            flexDirection: 'row',&#10;            alignItems: 'center',&#10;            justifyContent: 'space-between',&#10;        }}&#10;    &gt;&#10;        &lt;Text style={{ fontSize: 14, color: '#6B6478', fontFamily: 'Verdana' }}&gt;&#10;            Pizza Snack Play · Panduan Korlas &amp;amp; Admin&#10;        &lt;/Text&gt;&#10;        &lt;Text style={{ fontSize: 14, color: '#6B6478', fontFamily: 'Verdana' }}&gt;10 / 15&lt;/Text&gt;&#10;    &lt;/Box&gt;&#10;&lt;/Slide&gt;&#10;"/>
+        <p:cNvPr id="16" name="" descr="&lt;Slide&#10;    style={{&#10;        width: '1280px',&#10;        height: '720px',&#10;        background: '#FAF7F2',&#10;        paddingTop: 20,&#10;        paddingBottom: 20,&#10;        paddingLeft: 64,&#10;        paddingRight: 64,&#10;    }}&#10;&gt;&#10;    {/* ── A · blok judul ── */}&#10;    &lt;Box style={{ height: 110, justifyContent: 'center' }}&gt;&#10;        &lt;Text&#10;            style={{&#10;                fontSize: 34,&#10;                fontWeight: 'bold',&#10;                color: '#51277C',&#10;                fontFamily: 'Trebuchet MS',&#10;                lineHeight: 1.3,&#10;            }}&#10;        &gt;&#10;            Petugas piket: siapa yang ambil snack&#10;        &lt;/Text&gt;&#10;        &lt;Box style={{ marginTop: 10, width: 72, height: 6, borderRadius: 3, background: '#51277C' }} /&gt;&#10;    &lt;/Box&gt;&#10;&#10;    {/* ── B · area konten ── */}&#10;    &lt;Box style={{ height: 530, flexDirection: 'row', gap: 26 }}&gt;&#10;        {/* kiri 30% · penanda */}&#10;        &lt;Box&#10;            style={{&#10;                width: '30%',&#10;                height: '100%',&#10;                background: 'linear-gradient(135deg, #51277C 0%, #7A45A8 100%)',&#10;                borderRadius: 18,&#10;                padding: 26,&#10;                justifyContent: 'space-between',&#10;            }}&#10;        &gt;&#10;            &lt;Box&gt;&#10;                &lt;Text&#10;                    style={{&#10;                        fontSize: 30,&#10;                        fontWeight: 'bold',&#10;                        color: '#FFFFFF',&#10;                        fontFamily: 'Trebuchet MS',&#10;                        lineHeight: 1.25,&#10;                    }}&#10;                &gt;&#10;                    Satu tanggal,{'\n'}satu petugas&#10;                &lt;/Text&gt;&#10;                &lt;Box style={{ marginTop: 16, width: 64, height: 5, borderRadius: 3, background: '#F3B26C' }} /&gt;&#10;            &lt;/Box&gt;&#10;            &lt;Text&#10;                style={{&#10;                    fontSize: 17,&#10;                    color: 'rgba(255,255,255,0.88)',&#10;                    fontFamily: 'Verdana',&#10;                    lineHeight: 1.5,&#10;                }}&#10;            &gt;&#10;                Nama petugas yang Anda isi akan tampil ke orang tua sekalian nama orang tuanya.&#10;            &lt;/Text&gt;&#10;        &lt;/Box&gt;&#10;&#10;        {/* kanan 70% · tiga poin + ilustrasi dropdown */}&#10;        &lt;Box style={{ width: '70%', height: '100%', flexDirection: 'row', gap: 22 }}&gt;&#10;            &lt;Box style={{ flex: 1, height: '100%', justifyContent: 'space-between' }}&gt;&#10;                {[&#10;                    {&#10;                        t: 'Pilih dari daftar siswa',&#10;                        d: 'Kolom petugas berisi nama siswa di kelas Anda. Nama orang tuanya terisi sendiri.',&#10;                    },&#10;                    {&#10;                        t: 'Biarkan kosong bila perlu',&#10;                        d: 'Tanggal tanpa petugas bisa diambil sendiri orang tua — siapa cepat dia dapat.',&#10;                    },&#10;                    {&#10;                        t: 'Tidak ikut direbut orang tua',&#10;                        d: 'Ditandai &quot;Ditetapkan korlas&quot;, jadi tidak ada dua orang merasa sudah dapat.',&#10;                    },&#10;                ].map((it, i) =&gt; (&#10;                    &lt;Box&#10;                        key={i}&#10;                        style={{&#10;                            height: 165,&#10;                            background: '#FFFFFF',&#10;                            borderRadius: 16,&#10;                            boxShadow: '0 4px 20px rgba(0,0,0,0.08)',&#10;                            padding: 22,&#10;                            borderLeft: '8px solid #AFC440',&#10;                        }}&#10;                    &gt;&#10;                        &lt;Text&#10;                            style={{&#10;                                fontSize: 23,&#10;                                fontWeight: 'bold',&#10;                                color: '#51277C',&#10;                                fontFamily: 'Trebuchet MS',&#10;                                lineHeight: 1.3,&#10;                            }}&#10;                        &gt;&#10;                            {it.t}&#10;                        &lt;/Text&gt;&#10;                        &lt;Text&#10;                            style={{&#10;                                marginTop: 9,&#10;                                fontSize: 17,&#10;                                color: '#6B6478',&#10;                                fontFamily: 'Verdana',&#10;                                lineHeight: 1.5,&#10;                            }}&#10;                        &gt;&#10;                            {it.d}&#10;                        &lt;/Text&gt;&#10;                    &lt;/Box&gt;&#10;                ))}&#10;            &lt;/Box&gt;&#10;&#10;            &lt;Box&#10;                style={{&#10;                    width: 300,&#10;                    height: '100%',&#10;                    background: 'rgba(81,39,124,0.06)',&#10;                    borderRadius: 18,&#10;                    justifyContent: 'center',&#10;                    alignItems: 'center',&#10;                }}&#10;            &gt;&#10;                &lt;svg width={276} height={300} viewBox='0 0 276 300'&gt;&#10;                    &lt;text x='14' y='26' fontFamily='Verdana' fontSize='14' fill='#6B6478'&gt;Petugas&lt;/text&gt;&#10;                    &lt;rect x='14' y='38' width='248' height='48' rx='10' fill='#FFFFFF' stroke='#51277C' strokeWidth='2' /&gt;&#10;                    &lt;text x='34' y='68' fontFamily='Verdana' fontSize='16' fill='#51277C'&gt;Rafa Aditya&lt;/text&gt;&#10;                    &lt;path d='M232 58l16 12-16 12z' fill='#51277C' /&gt;&#10;&#10;                    &lt;rect x='14' y='94' width='248' height='112' rx='10' fill='#FFFFFF' stroke='#E6DFD2' strokeWidth='2' /&gt;&#10;                    &lt;rect x='14' y='94' width='248' height='36' rx='10' fill='rgba(81,39,124,0.10)' /&gt;&#10;                    &lt;text x='34' y='117' fontFamily='Verdana' fontSize='15' fontWeight='bold' fill='#51277C'&gt;Rafa Aditya&lt;/text&gt;&#10;                    &lt;text x='34' y='148' fontFamily='Verdana' fontSize='15' fill='#2A2333'&gt;Dinda&lt;/text&gt;&#10;                    &lt;text x='34' y='178' fontFamily='Verdana' fontSize='15' fill='#2A2333'&gt;Bayu&lt;/text&gt;&#10;&#10;                    &lt;text x='14' y='234' fontFamily='Verdana' fontSize='14' fill='#6B6478'&gt;Orang tua (terisi sendiri)&lt;/text&gt;&#10;                    &lt;rect x='14' y='246' width='248' height='44' rx='10' fill='#EFEAE1' /&gt;&#10;                    &lt;text x='34' y='274' fontFamily='Verdana' fontSize='15' fill='#6B6478'&gt;Ibu Rina&lt;/text&gt;&#10;                &lt;/svg&gt;&#10;            &lt;/Box&gt;&#10;        &lt;/Box&gt;&#10;    &lt;/Box&gt;&#10;&#10;    {/* ── C · bilah kaki ── */}&#10;    &lt;Box&#10;        style={{&#10;            height: 40,&#10;            flexDirection: 'row',&#10;            alignItems: 'center',&#10;            justifyContent: 'space-between',&#10;        }}&#10;    &gt;&#10;        &lt;Text style={{ fontSize: 14, color: '#6B6478', fontFamily: 'Verdana' }}&gt;&#10;            Pizza Snack Play · Panduan Korlas &amp;amp; Admin&#10;        &lt;/Text&gt;&#10;        &lt;Text style={{ fontSize: 14, color: '#6B6478', fontFamily: 'Verdana' }}&gt;10 / 16&lt;/Text&gt;&#10;    &lt;/Box&gt;&#10;&lt;/Slide&gt;&#10;"/>
         <p:cNvGrpSpPr/>
         <p:nvPr/>
       </p:nvGrpSpPr>
@@ -2258,7 +2259,7 @@
                 <a:latin typeface="Verdana"/>
                 <a:ea typeface="Verdana"/>
               </a:rPr>
-              <a:t>10 / 15</a:t>
+              <a:t>10 / 16</a:t>
             </a:r>
             <a:endParaRPr/>
           </a:p>
@@ -2944,7 +2945,7 @@
   <p:cSld>
     <p:spTree>
       <p:nvGrpSpPr>
-        <p:cNvPr id="49" name="" descr="&lt;Slide&#10;    style={{&#10;        width: '1280px',&#10;        height: '720px',&#10;        background: '#FAF7F2',&#10;        paddingTop: 20,&#10;        paddingBottom: 20,&#10;        paddingLeft: 64,&#10;        paddingRight: 64,&#10;        position: 'relative',&#10;        overflow: 'hidden',&#10;    }}&#10;&gt;&#10;    &lt;Box&#10;        style={{&#10;            position: 'absolute',&#10;            bottom: -140,&#10;            right: -110,&#10;            width: 460,&#10;            height: 460,&#10;            borderRadius: 230,&#10;            background: 'linear-gradient(135deg, #51277C 0%, #7A45A8 100%)',&#10;            opacity: 0.09,&#10;        }}&#10;    /&gt;&#10;&#10;    {/* ── A · blok judul ── */}&#10;    &lt;Box style={{ height: 110, justifyContent: 'center' }}&gt;&#10;        &lt;Text&#10;            style={{&#10;                fontSize: 34,&#10;                fontWeight: 'bold',&#10;                color: '#51277C',&#10;                fontFamily: 'Trebuchet MS',&#10;                lineHeight: 1.3,&#10;            }}&#10;        &gt;&#10;            Terkunci, lalu terbit&#10;        &lt;/Text&gt;&#10;        &lt;Box style={{ marginTop: 10, width: 72, height: 6, borderRadius: 3, background: '#F3B26C' }} /&gt;&#10;    &lt;/Box&gt;&#10;&#10;    {/* ── B · area konten ── */}&#10;    &lt;Box style={{ height: 530, flexDirection: 'row', gap: 34, position: 'relative', zIndex: 1 }}&gt;&#10;        {/* kiri 55% · frasa raksasa */}&#10;        &lt;Box style={{ width: '55%', height: '100%', justifyContent: 'center' }}&gt;&#10;            &lt;Text&#10;                style={{&#10;                    fontSize: 64,&#10;                    fontWeight: 'bold',&#10;                    color: '#51277C',&#10;                    fontFamily: 'Trebuchet MS',&#10;                    lineHeight: 1.1,&#10;                }}&#10;            &gt;&#10;                Kunci dulu,{'\n'}baru terbit.&#10;            &lt;/Text&gt;&#10;&#10;            &lt;Text&#10;                style={{&#10;                    marginTop: 22,&#10;                    fontSize: 19,&#10;                    color: '#2A2333',&#10;                    fontFamily: 'Verdana',&#10;                    lineHeight: 1.55,&#10;                }}&#10;            &gt;&#10;                Orang tua baru melihat jadwal setelah diterbitkan. Selama belum, jadwalnya&#10;                tetap tersimpan — hanya belum diumumkan.&#10;            &lt;/Text&gt;&#10;&#10;            &lt;Box&#10;                style={{&#10;                    marginTop: 24,&#10;                    background: 'rgba(243,178,108,0.22)',&#10;                    borderRadius: 14,&#10;                    borderLeft: '8px solid #F3B26C',&#10;                    padding: 18,&#10;                }}&#10;            &gt;&#10;                &lt;Text&#10;                    style={{&#10;                        fontSize: 18,&#10;                        color: '#2A2333',&#10;                        fontFamily: 'Verdana',&#10;                        lineHeight: 1.5,&#10;                    }}&#10;                &gt;&#10;                    Publikasi menolak selama masih ada hari yang belum dikunci. Selesaikan&#10;                    semuanya lebih dulu, baru tekan Publikasi.&#10;                &lt;/Text&gt;&#10;            &lt;/Box&gt;&#10;        &lt;/Box&gt;&#10;&#10;        {/* kanan 45% · tiga status */}&#10;        &lt;Box&#10;            style={{&#10;                width: '45%',&#10;                height: '100%',&#10;                background: 'rgba(81,39,124,0.06)',&#10;                borderRadius: 20,&#10;                justifyContent: 'center',&#10;                alignItems: 'center',&#10;            }}&#10;        &gt;&#10;            &lt;svg width={430} height={430} viewBox='0 0 430 430'&gt;&#10;                {/* 1 · masih bisa diubah */}&#10;                &lt;rect x='18' y='14' width='394' height='112' rx='16' fill='#FFFFFF' stroke='#DED7CB' strokeWidth='2' /&gt;&#10;                &lt;circle cx='66' cy='70' r='26' fill='#DED7CB' /&gt;&#10;                &lt;text x='66' y='80' fontFamily='Trebuchet MS' fontSize='24' fontWeight='bold' fill='#FFFFFF' textAnchor='middle'&gt;&#10;                    1&#10;                &lt;/text&gt;&#10;                &lt;text x='110' y='62' fontFamily='Trebuchet MS' fontSize='22' fontWeight='bold' fill='#51277C'&gt;&#10;                    Masih bisa diubah&#10;                &lt;/text&gt;&#10;                &lt;text x='110' y='94' fontFamily='Verdana' fontSize='15' fill='#6B6478'&gt;&#10;                    disusun korlas&#10;                &lt;/text&gt;&#10;&#10;                {/* 2 · dikunci */}&#10;                &lt;rect x='18' y='152' width='394' height='112' rx='16' fill='#FFFFFF' stroke='#AFC440' strokeWidth='3' /&gt;&#10;                &lt;circle cx='66' cy='208' r='26' fill='#AFC440' /&gt;&#10;                &lt;text x='66' y='218' fontFamily='Trebuchet MS' fontSize='24' fontWeight='bold' fill='#FFFFFF' textAnchor='middle'&gt;&#10;                    2&#10;                &lt;/text&gt;&#10;                &lt;text x='110' y='200' fontFamily='Trebuchet MS' fontSize='22' fontWeight='bold' fill='#51277C'&gt;&#10;                    Dikunci&#10;                &lt;/text&gt;&#10;                &lt;text x='110' y='232' fontFamily='Verdana' fontSize='15' fill='#6B6478'&gt;&#10;                    sudah tidak bisa diedit&#10;                &lt;/text&gt;&#10;&#10;                {/* 3 · terbit */}&#10;                &lt;rect x='18' y='290' width='394' height='126' rx='16' fill='#51277C' /&gt;&#10;                &lt;circle cx='66' cy='352' r='26' fill='#F3B26C' /&gt;&#10;                &lt;text x='66' y='362' fontFamily='Trebuchet MS' fontSize='24' fontWeight='bold' fill='#51277C' textAnchor='middle'&gt;&#10;                    3&#10;                &lt;/text&gt;&#10;                &lt;text x='110' y='344' fontFamily='Trebuchet MS' fontSize='22' fontWeight='bold' fill='#FFFFFF'&gt;&#10;                    Terbit ke orang tua&#10;                &lt;/text&gt;&#10;                &lt;text x='110' y='376' fontFamily='Verdana' fontSize='15' fill='#EFEAE1'&gt;&#10;                    tampil di HP mereka&#10;                &lt;/text&gt;&#10;                &lt;text x='110' y='400' fontFamily='Verdana' fontSize='14' fill='#F3B26C'&gt;&#10;                    revisi? minta admin membuka kunci&#10;                &lt;/text&gt;&#10;            &lt;/svg&gt;&#10;        &lt;/Box&gt;&#10;    &lt;/Box&gt;&#10;&#10;    {/* ── C · bilah kaki ── */}&#10;    &lt;Box&#10;        style={{&#10;            height: 40,&#10;            flexDirection: 'row',&#10;            alignItems: 'center',&#10;            justifyContent: 'space-between',&#10;        }}&#10;    &gt;&#10;        &lt;Text style={{ fontSize: 14, color: '#6B6478', fontFamily: 'Verdana' }}&gt;&#10;            Pizza Snack Play · Panduan Korlas &amp;amp; Admin&#10;        &lt;/Text&gt;&#10;        &lt;Text style={{ fontSize: 14, color: '#6B6478', fontFamily: 'Verdana' }}&gt;12 / 15&lt;/Text&gt;&#10;    &lt;/Box&gt;&#10;&lt;/Slide&gt;&#10;"/>
+        <p:cNvPr id="49" name="" descr="&lt;Slide&#10;    style={{&#10;        width: '1280px',&#10;        height: '720px',&#10;        background: '#FAF7F2',&#10;        paddingTop: 20,&#10;        paddingBottom: 20,&#10;        paddingLeft: 64,&#10;        paddingRight: 64,&#10;        position: 'relative',&#10;        overflow: 'hidden',&#10;    }}&#10;&gt;&#10;    &lt;Box&#10;        style={{&#10;            position: 'absolute',&#10;            bottom: -140,&#10;            right: -110,&#10;            width: 460,&#10;            height: 460,&#10;            borderRadius: 230,&#10;            background: 'linear-gradient(135deg, #51277C 0%, #7A45A8 100%)',&#10;            opacity: 0.09,&#10;        }}&#10;    /&gt;&#10;&#10;    {/* ── A · blok judul ── */}&#10;    &lt;Box style={{ height: 110, justifyContent: 'center' }}&gt;&#10;        &lt;Text&#10;            style={{&#10;                fontSize: 34,&#10;                fontWeight: 'bold',&#10;                color: '#51277C',&#10;                fontFamily: 'Trebuchet MS',&#10;                lineHeight: 1.3,&#10;            }}&#10;        &gt;&#10;            Terkunci, lalu terbit&#10;        &lt;/Text&gt;&#10;        &lt;Box style={{ marginTop: 10, width: 72, height: 6, borderRadius: 3, background: '#F3B26C' }} /&gt;&#10;    &lt;/Box&gt;&#10;&#10;    {/* ── B · area konten ── */}&#10;    &lt;Box style={{ height: 530, flexDirection: 'row', gap: 34, position: 'relative', zIndex: 1 }}&gt;&#10;        {/* kiri 55% · frasa raksasa */}&#10;        &lt;Box style={{ width: '55%', height: '100%', justifyContent: 'center' }}&gt;&#10;            &lt;Text&#10;                style={{&#10;                    fontSize: 64,&#10;                    fontWeight: 'bold',&#10;                    color: '#51277C',&#10;                    fontFamily: 'Trebuchet MS',&#10;                    lineHeight: 1.1,&#10;                }}&#10;            &gt;&#10;                Kunci dulu,{'\n'}baru terbit.&#10;            &lt;/Text&gt;&#10;&#10;            &lt;Text&#10;                style={{&#10;                    marginTop: 22,&#10;                    fontSize: 19,&#10;                    color: '#2A2333',&#10;                    fontFamily: 'Verdana',&#10;                    lineHeight: 1.55,&#10;                }}&#10;            &gt;&#10;                Orang tua baru melihat jadwal setelah diterbitkan. Selama belum, jadwalnya&#10;                tetap tersimpan — hanya belum diumumkan.&#10;            &lt;/Text&gt;&#10;&#10;            &lt;Box&#10;                style={{&#10;                    marginTop: 24,&#10;                    background: 'rgba(243,178,108,0.22)',&#10;                    borderRadius: 14,&#10;                    borderLeft: '8px solid #F3B26C',&#10;                    padding: 18,&#10;                }}&#10;            &gt;&#10;                &lt;Text&#10;                    style={{&#10;                        fontSize: 18,&#10;                        color: '#2A2333',&#10;                        fontFamily: 'Verdana',&#10;                        lineHeight: 1.5,&#10;                    }}&#10;                &gt;&#10;                    Publikasi menolak selama masih ada hari yang belum dikunci. Selesaikan&#10;                    semuanya lebih dulu, baru tekan Publikasi.&#10;                &lt;/Text&gt;&#10;            &lt;/Box&gt;&#10;        &lt;/Box&gt;&#10;&#10;        {/* kanan 45% · tiga status */}&#10;        &lt;Box&#10;            style={{&#10;                width: '45%',&#10;                height: '100%',&#10;                background: 'rgba(81,39,124,0.06)',&#10;                borderRadius: 20,&#10;                justifyContent: 'center',&#10;                alignItems: 'center',&#10;            }}&#10;        &gt;&#10;            &lt;svg width={430} height={430} viewBox='0 0 430 430'&gt;&#10;                {/* 1 · masih bisa diubah */}&#10;                &lt;rect x='18' y='14' width='394' height='112' rx='16' fill='#FFFFFF' stroke='#DED7CB' strokeWidth='2' /&gt;&#10;                &lt;circle cx='66' cy='70' r='26' fill='#DED7CB' /&gt;&#10;                &lt;text x='66' y='80' fontFamily='Trebuchet MS' fontSize='24' fontWeight='bold' fill='#FFFFFF' textAnchor='middle'&gt;&#10;                    1&#10;                &lt;/text&gt;&#10;                &lt;text x='110' y='62' fontFamily='Trebuchet MS' fontSize='22' fontWeight='bold' fill='#51277C'&gt;&#10;                    Masih bisa diubah&#10;                &lt;/text&gt;&#10;                &lt;text x='110' y='94' fontFamily='Verdana' fontSize='15' fill='#6B6478'&gt;&#10;                    disusun korlas&#10;                &lt;/text&gt;&#10;&#10;                {/* 2 · dikunci */}&#10;                &lt;rect x='18' y='152' width='394' height='112' rx='16' fill='#FFFFFF' stroke='#AFC440' strokeWidth='3' /&gt;&#10;                &lt;circle cx='66' cy='208' r='26' fill='#AFC440' /&gt;&#10;                &lt;text x='66' y='218' fontFamily='Trebuchet MS' fontSize='24' fontWeight='bold' fill='#FFFFFF' textAnchor='middle'&gt;&#10;                    2&#10;                &lt;/text&gt;&#10;                &lt;text x='110' y='200' fontFamily='Trebuchet MS' fontSize='22' fontWeight='bold' fill='#51277C'&gt;&#10;                    Dikunci&#10;                &lt;/text&gt;&#10;                &lt;text x='110' y='232' fontFamily='Verdana' fontSize='15' fill='#6B6478'&gt;&#10;                    sudah tidak bisa diedit&#10;                &lt;/text&gt;&#10;&#10;                {/* 3 · terbit */}&#10;                &lt;rect x='18' y='290' width='394' height='126' rx='16' fill='#51277C' /&gt;&#10;                &lt;circle cx='66' cy='352' r='26' fill='#F3B26C' /&gt;&#10;                &lt;text x='66' y='362' fontFamily='Trebuchet MS' fontSize='24' fontWeight='bold' fill='#51277C' textAnchor='middle'&gt;&#10;                    3&#10;                &lt;/text&gt;&#10;                &lt;text x='110' y='344' fontFamily='Trebuchet MS' fontSize='22' fontWeight='bold' fill='#FFFFFF'&gt;&#10;                    Terbit ke orang tua&#10;                &lt;/text&gt;&#10;                &lt;text x='110' y='376' fontFamily='Verdana' fontSize='15' fill='#EFEAE1'&gt;&#10;                    tampil di HP mereka&#10;                &lt;/text&gt;&#10;                &lt;text x='110' y='400' fontFamily='Verdana' fontSize='14' fill='#F3B26C'&gt;&#10;                    revisi? minta admin membuka kunci&#10;                &lt;/text&gt;&#10;            &lt;/svg&gt;&#10;        &lt;/Box&gt;&#10;    &lt;/Box&gt;&#10;&#10;    {/* ── C · bilah kaki ── */}&#10;    &lt;Box&#10;        style={{&#10;            height: 40,&#10;            flexDirection: 'row',&#10;            alignItems: 'center',&#10;            justifyContent: 'space-between',&#10;        }}&#10;    &gt;&#10;        &lt;Text style={{ fontSize: 14, color: '#6B6478', fontFamily: 'Verdana' }}&gt;&#10;            Pizza Snack Play · Panduan Korlas &amp;amp; Admin&#10;        &lt;/Text&gt;&#10;        &lt;Text style={{ fontSize: 14, color: '#6B6478', fontFamily: 'Verdana' }}&gt;12 / 16&lt;/Text&gt;&#10;    &lt;/Box&gt;&#10;&lt;/Slide&gt;&#10;"/>
         <p:cNvGrpSpPr/>
         <p:nvPr/>
       </p:nvGrpSpPr>
@@ -3105,7 +3106,7 @@
                 <a:latin typeface="Verdana"/>
                 <a:ea typeface="Verdana"/>
               </a:rPr>
-              <a:t>12 / 15</a:t>
+              <a:t>12 / 16</a:t>
             </a:r>
             <a:endParaRPr/>
           </a:p>
@@ -3750,7 +3751,7 @@
   <p:cSld>
     <p:spTree>
       <p:nvGrpSpPr>
-        <p:cNvPr id="63" name="" descr="&lt;Slide&#10;    style={{&#10;        width: '1280px',&#10;        height: '720px',&#10;        background: '#FAF7F2',&#10;        paddingTop: 20,&#10;        paddingBottom: 20,&#10;        paddingLeft: 64,&#10;        paddingRight: 64,&#10;    }}&#10;&gt;&#10;    {/* ── A · blok judul ── */}&#10;    &lt;Box style={{ height: 110, justifyContent: 'center' }}&gt;&#10;        &lt;Text&#10;            style={{&#10;                fontSize: 34,&#10;                fontWeight: 'bold',&#10;                color: '#51277C',&#10;                fontFamily: 'Trebuchet MS',&#10;                lineHeight: 1.3,&#10;            }}&#10;        &gt;&#10;            Aksi massal: satu klik untuk banyak hari&#10;        &lt;/Text&gt;&#10;        &lt;Box style={{ marginTop: 10, width: 72, height: 6, borderRadius: 3, background: '#51277C' }} /&gt;&#10;    &lt;/Box&gt;&#10;&#10;    {/* ── B · area konten ── */}&#10;    &lt;Box style={{ height: 530, flexDirection: 'row', gap: 30 }}&gt;&#10;        {/* kiri 55% · tabel dengan kotak centang */}&#10;        &lt;Box&#10;            style={{&#10;                width: '55%',&#10;                height: '100%',&#10;                background: 'rgba(81,39,124,0.06)',&#10;                borderRadius: 20,&#10;                justifyContent: 'center',&#10;                alignItems: 'center',&#10;            }}&#10;        &gt;&#10;            &lt;svg width={560} height={440} viewBox='0 0 560 440'&gt;&#10;                {/* baris header minggu */}&#10;                &lt;rect x='10' y='8' width='540' height='44' rx='10' fill='#51277C' /&gt;&#10;                &lt;rect x='26' y='22' width='20' height='20' rx='5' fill='#F3B26C' /&gt;&#10;                &lt;path d='M31 32l4 4 8-9' fill='none' stroke='#51277C' strokeWidth='3' strokeLinecap='round' strokeLinejoin='round' /&gt;&#10;                &lt;text x='62' y='38' fontFamily='Verdana' fontSize='15' fill='#FFFFFF'&gt;Pilih minggu ini&lt;/text&gt;&#10;&#10;                {/* Senin — dicentang */}&#10;                &lt;rect x='10' y='62' width='540' height='46' rx='10' fill='#FFFFFF' stroke='#E6DFD2' strokeWidth='2' /&gt;&#10;                &lt;rect x='26' y='75' width='20' height='20' rx='5' fill='#51277C' stroke='#51277C' strokeWidth='2' /&gt;&#10;                &lt;path d='M31 85l4 4 8-9' fill='none' stroke='#FFFFFF' strokeWidth='3' strokeLinecap='round' strokeLinejoin='round' /&gt;&#10;                &lt;text x='62' y='92' fontFamily='Verdana' fontSize='15' fill='#2A2333'&gt;Senin, 5&lt;/text&gt;&#10;                &lt;rect x='436' y='73' width='98' height='24' rx='12' fill='#DED7CB' /&gt;&#10;&#10;                {/* Selasa — dicentang */}&#10;                &lt;rect x='10' y='116' width='540' height='46' rx='10' fill='#FFFFFF' stroke='#E6DFD2' strokeWidth='2' /&gt;&#10;                &lt;rect x='26' y='129' width='20' height='20' rx='5' fill='#51277C' stroke='#51277C' strokeWidth='2' /&gt;&#10;                &lt;path d='M31 139l4 4 8-9' fill='none' stroke='#FFFFFF' strokeWidth='3' strokeLinecap='round' strokeLinejoin='round' /&gt;&#10;                &lt;text x='62' y='146' fontFamily='Verdana' fontSize='15' fill='#2A2333'&gt;Selasa, 6&lt;/text&gt;&#10;                &lt;rect x='436' y='127' width='98' height='24' rx='12' fill='#DED7CB' /&gt;&#10;&#10;                {/* Rabu — dicentang */}&#10;                &lt;rect x='10' y='170' width='540' height='46' rx='10' fill='#FFFFFF' stroke='#E6DFD2' strokeWidth='2' /&gt;&#10;                &lt;rect x='26' y='183' width='20' height='20' rx='5' fill='#51277C' stroke='#51277C' strokeWidth='2' /&gt;&#10;                &lt;path d='M31 193l4 4 8-9' fill='none' stroke='#FFFFFF' strokeWidth='3' strokeLinecap='round' strokeLinejoin='round' /&gt;&#10;                &lt;text x='62' y='200' fontFamily='Verdana' fontSize='15' fill='#2A2333'&gt;Rabu, 7&lt;/text&gt;&#10;                &lt;rect x='436' y='181' width='98' height='24' rx='12' fill='#DED7CB' /&gt;&#10;&#10;                {/* Kamis — tidak dicentang */}&#10;                &lt;rect x='10' y='224' width='540' height='46' rx='10' fill='#FFFFFF' stroke='#E6DFD2' strokeWidth='2' /&gt;&#10;                &lt;rect x='26' y='237' width='20' height='20' rx='5' fill='#FFFFFF' stroke='#DED7CB' strokeWidth='2' /&gt;&#10;                &lt;text x='62' y='254' fontFamily='Verdana' fontSize='15' fill='#2A2333'&gt;Kamis, 8&lt;/text&gt;&#10;                &lt;rect x='436' y='235' width='98' height='24' rx='12' fill='#DED7CB' /&gt;&#10;&#10;                {/* Jumat — tidak dicentang */}&#10;                &lt;rect x='10' y='278' width='540' height='46' rx='10' fill='#FFFFFF' stroke='#E6DFD2' strokeWidth='2' /&gt;&#10;                &lt;rect x='26' y='291' width='20' height='20' rx='5' fill='#FFFFFF' stroke='#DED7CB' strokeWidth='2' /&gt;&#10;                &lt;text x='62' y='308' fontFamily='Verdana' fontSize='15' fill='#2A2333'&gt;Jumat, 9&lt;/text&gt;&#10;                &lt;rect x='436' y='289' width='98' height='24' rx='12' fill='#DED7CB' /&gt;&#10;&#10;                {/* bilah aksi */}&#10;                &lt;rect x='10' y='344' width='540' height='78' rx='14' fill='#51277C' /&gt;&#10;                &lt;rect x='28' y='364' width='120' height='38' rx='10' fill='#FFFFFF' /&gt;&#10;                &lt;text x='88' y='389' fontFamily='Verdana' fontSize='15' fontWeight='bold' fill='#51277C' textAnchor='middle'&gt;Kunci&lt;/text&gt;&#10;                &lt;rect x='160' y='364' width='120' height='38' rx='10' fill='rgba(255,255,255,0.25)' /&gt;&#10;                &lt;text x='220' y='389' fontFamily='Verdana' fontSize='15' fill='#EFEAE1' textAnchor='middle'&gt;Publikasi&lt;/text&gt;&#10;                &lt;rect x='292' y='364' width='120' height='38' rx='10' fill='rgba(255,255,255,0.25)' /&gt;&#10;                &lt;text x='352' y='389' fontFamily='Verdana' fontSize='15' fill='#EFEAE1' textAnchor='middle'&gt;Buka kunci&lt;/text&gt;&#10;                &lt;text x='470' y='389' fontFamily='Verdana' fontSize='14' fill='#F3B26C'&gt;3 dipilih&lt;/text&gt;&#10;            &lt;/svg&gt;&#10;        &lt;/Box&gt;&#10;&#10;        {/* kanan 45% · tiga keterangan */}&#10;        &lt;Box style={{ width: '45%', height: '100%', justifyContent: 'space-between' }}&gt;&#10;            {[&#10;                {&#10;                    t: 'Centang dulu, lalu pilih aksinya',&#10;                    d: 'Ada &quot;Pilih minggu ini&quot; di setiap blok minggu dan &quot;Pilih semua&quot; di bagian atas tabel.',&#10;                    g: 'Tidak satu per satu',&#10;                },&#10;                {&#10;                    t: 'Tombol menyesuaikan pilihan Anda',&#10;                    d: 'Bilah aksi di bawah layar hanya menghidupkan tombol yang cocok dengan status hari yang dicentang.',&#10;                    g: 'Tidak bisa salah klik',&#10;                },&#10;                {&#10;                    t: 'Buka kunci massal hanya admin',&#10;                    d: 'Korlas tetap terbatas kelasnya sendiri — hari dari kelas lain tidak ikut tersentuh.',&#10;                    g: 'Aman lintas kelas',&#10;                },&#10;            ].map((it, i) =&gt; (&#10;                &lt;Box&#10;                    key={i}&#10;                    style={{&#10;                        height: 166,&#10;                        background: '#FFFFFF',&#10;                        borderRadius: 16,&#10;                        boxShadow: '0 4px 20px rgba(0,0,0,0.08)',&#10;                        padding: 22,&#10;                        borderLeft: '8px solid #AFC440',&#10;                    }}&#10;                &gt;&#10;                    &lt;Text&#10;                        style={{&#10;                            fontSize: 24,&#10;                            fontWeight: 'bold',&#10;                            color: '#51277C',&#10;                            fontFamily: 'Trebuchet MS',&#10;                            lineHeight: 1.3,&#10;                        }}&#10;                    &gt;&#10;                        {it.t}&#10;                    &lt;/Text&gt;&#10;                    &lt;Text&#10;                        style={{&#10;                            marginTop: 10,&#10;                            fontSize: 17,&#10;                            color: '#6B6478',&#10;                            fontFamily: 'Verdana',&#10;                            lineHeight: 1.5,&#10;                        }}&#10;                    &gt;&#10;                        {it.d}&#10;                    &lt;/Text&gt;&#10;                    &lt;Box style={{ marginTop: 'auto' }}&gt;&#10;                        &lt;Text&#10;                            style={{&#10;                                fontSize: 16,&#10;                                color: '#51277C',&#10;                                fontFamily: 'Verdana',&#10;                                fontWeight: 'bold',&#10;                            }}&#10;                        &gt;&#10;                            {it.g}&#10;                        &lt;/Text&gt;&#10;                    &lt;/Box&gt;&#10;                &lt;/Box&gt;&#10;            ))}&#10;        &lt;/Box&gt;&#10;    &lt;/Box&gt;&#10;&#10;    {/* ── C · bilah kaki ── */}&#10;    &lt;Box&#10;        style={{&#10;            height: 40,&#10;            flexDirection: 'row',&#10;            alignItems: 'center',&#10;            justifyContent: 'space-between',&#10;        }}&#10;    &gt;&#10;        &lt;Text style={{ fontSize: 14, color: '#6B6478', fontFamily: 'Verdana' }}&gt;&#10;            Pizza Snack Play · Panduan Korlas &amp;amp; Admin&#10;        &lt;/Text&gt;&#10;        &lt;Text style={{ fontSize: 14, color: '#6B6478', fontFamily: 'Verdana' }}&gt;13 / 15&lt;/Text&gt;&#10;    &lt;/Box&gt;&#10;&lt;/Slide&gt;&#10;"/>
+        <p:cNvPr id="63" name="" descr="&lt;Slide&#10;    style={{&#10;        width: '1280px',&#10;        height: '720px',&#10;        background: '#FAF7F2',&#10;        paddingTop: 20,&#10;        paddingBottom: 20,&#10;        paddingLeft: 64,&#10;        paddingRight: 64,&#10;    }}&#10;&gt;&#10;    {/* ── A · blok judul ── */}&#10;    &lt;Box style={{ height: 110, justifyContent: 'center' }}&gt;&#10;        &lt;Text&#10;            style={{&#10;                fontSize: 34,&#10;                fontWeight: 'bold',&#10;                color: '#51277C',&#10;                fontFamily: 'Trebuchet MS',&#10;                lineHeight: 1.3,&#10;            }}&#10;        &gt;&#10;            Aksi massal: satu klik untuk banyak hari&#10;        &lt;/Text&gt;&#10;        &lt;Box style={{ marginTop: 10, width: 72, height: 6, borderRadius: 3, background: '#51277C' }} /&gt;&#10;    &lt;/Box&gt;&#10;&#10;    {/* ── B · area konten ── */}&#10;    &lt;Box style={{ height: 530, flexDirection: 'row', gap: 30 }}&gt;&#10;        {/* kiri 55% · tabel dengan kotak centang */}&#10;        &lt;Box&#10;            style={{&#10;                width: '55%',&#10;                height: '100%',&#10;                background: 'rgba(81,39,124,0.06)',&#10;                borderRadius: 20,&#10;                justifyContent: 'center',&#10;                alignItems: 'center',&#10;            }}&#10;        &gt;&#10;            &lt;svg width={560} height={440} viewBox='0 0 560 440'&gt;&#10;                {/* baris header minggu */}&#10;                &lt;rect x='10' y='8' width='540' height='44' rx='10' fill='#51277C' /&gt;&#10;                &lt;rect x='26' y='22' width='20' height='20' rx='5' fill='#F3B26C' /&gt;&#10;                &lt;path d='M31 32l4 4 8-9' fill='none' stroke='#51277C' strokeWidth='3' strokeLinecap='round' strokeLinejoin='round' /&gt;&#10;                &lt;text x='62' y='38' fontFamily='Verdana' fontSize='15' fill='#FFFFFF'&gt;Pilih minggu ini&lt;/text&gt;&#10;&#10;                {/* Senin — dicentang */}&#10;                &lt;rect x='10' y='62' width='540' height='46' rx='10' fill='#FFFFFF' stroke='#E6DFD2' strokeWidth='2' /&gt;&#10;                &lt;rect x='26' y='75' width='20' height='20' rx='5' fill='#51277C' stroke='#51277C' strokeWidth='2' /&gt;&#10;                &lt;path d='M31 85l4 4 8-9' fill='none' stroke='#FFFFFF' strokeWidth='3' strokeLinecap='round' strokeLinejoin='round' /&gt;&#10;                &lt;text x='62' y='92' fontFamily='Verdana' fontSize='15' fill='#2A2333'&gt;Senin, 5&lt;/text&gt;&#10;                &lt;rect x='436' y='73' width='98' height='24' rx='12' fill='#DED7CB' /&gt;&#10;&#10;                {/* Selasa — dicentang */}&#10;                &lt;rect x='10' y='116' width='540' height='46' rx='10' fill='#FFFFFF' stroke='#E6DFD2' strokeWidth='2' /&gt;&#10;                &lt;rect x='26' y='129' width='20' height='20' rx='5' fill='#51277C' stroke='#51277C' strokeWidth='2' /&gt;&#10;                &lt;path d='M31 139l4 4 8-9' fill='none' stroke='#FFFFFF' strokeWidth='3' strokeLinecap='round' strokeLinejoin='round' /&gt;&#10;                &lt;text x='62' y='146' fontFamily='Verdana' fontSize='15' fill='#2A2333'&gt;Selasa, 6&lt;/text&gt;&#10;                &lt;rect x='436' y='127' width='98' height='24' rx='12' fill='#DED7CB' /&gt;&#10;&#10;                {/* Rabu — dicentang */}&#10;                &lt;rect x='10' y='170' width='540' height='46' rx='10' fill='#FFFFFF' stroke='#E6DFD2' strokeWidth='2' /&gt;&#10;                &lt;rect x='26' y='183' width='20' height='20' rx='5' fill='#51277C' stroke='#51277C' strokeWidth='2' /&gt;&#10;                &lt;path d='M31 193l4 4 8-9' fill='none' stroke='#FFFFFF' strokeWidth='3' strokeLinecap='round' strokeLinejoin='round' /&gt;&#10;                &lt;text x='62' y='200' fontFamily='Verdana' fontSize='15' fill='#2A2333'&gt;Rabu, 7&lt;/text&gt;&#10;                &lt;rect x='436' y='181' width='98' height='24' rx='12' fill='#DED7CB' /&gt;&#10;&#10;                {/* Kamis — tidak dicentang */}&#10;                &lt;rect x='10' y='224' width='540' height='46' rx='10' fill='#FFFFFF' stroke='#E6DFD2' strokeWidth='2' /&gt;&#10;                &lt;rect x='26' y='237' width='20' height='20' rx='5' fill='#FFFFFF' stroke='#DED7CB' strokeWidth='2' /&gt;&#10;                &lt;text x='62' y='254' fontFamily='Verdana' fontSize='15' fill='#2A2333'&gt;Kamis, 8&lt;/text&gt;&#10;                &lt;rect x='436' y='235' width='98' height='24' rx='12' fill='#DED7CB' /&gt;&#10;&#10;                {/* Jumat — tidak dicentang */}&#10;                &lt;rect x='10' y='278' width='540' height='46' rx='10' fill='#FFFFFF' stroke='#E6DFD2' strokeWidth='2' /&gt;&#10;                &lt;rect x='26' y='291' width='20' height='20' rx='5' fill='#FFFFFF' stroke='#DED7CB' strokeWidth='2' /&gt;&#10;                &lt;text x='62' y='308' fontFamily='Verdana' fontSize='15' fill='#2A2333'&gt;Jumat, 9&lt;/text&gt;&#10;                &lt;rect x='436' y='289' width='98' height='24' rx='12' fill='#DED7CB' /&gt;&#10;&#10;                {/* bilah aksi */}&#10;                &lt;rect x='10' y='344' width='540' height='78' rx='14' fill='#51277C' /&gt;&#10;                &lt;rect x='28' y='364' width='120' height='38' rx='10' fill='#FFFFFF' /&gt;&#10;                &lt;text x='88' y='389' fontFamily='Verdana' fontSize='15' fontWeight='bold' fill='#51277C' textAnchor='middle'&gt;Kunci&lt;/text&gt;&#10;                &lt;rect x='160' y='364' width='120' height='38' rx='10' fill='rgba(255,255,255,0.25)' /&gt;&#10;                &lt;text x='220' y='389' fontFamily='Verdana' fontSize='15' fill='#EFEAE1' textAnchor='middle'&gt;Publikasi&lt;/text&gt;&#10;                &lt;rect x='292' y='364' width='120' height='38' rx='10' fill='rgba(255,255,255,0.25)' /&gt;&#10;                &lt;text x='352' y='389' fontFamily='Verdana' fontSize='15' fill='#EFEAE1' textAnchor='middle'&gt;Buka kunci&lt;/text&gt;&#10;                &lt;text x='470' y='389' fontFamily='Verdana' fontSize='14' fill='#F3B26C'&gt;3 dipilih&lt;/text&gt;&#10;            &lt;/svg&gt;&#10;        &lt;/Box&gt;&#10;&#10;        {/* kanan 45% · tiga keterangan */}&#10;        &lt;Box style={{ width: '45%', height: '100%', justifyContent: 'space-between' }}&gt;&#10;            {[&#10;                {&#10;                    t: 'Centang dulu, lalu pilih aksinya',&#10;                    d: 'Ada &quot;Pilih minggu ini&quot; di setiap blok minggu dan &quot;Pilih semua&quot; di bagian atas tabel.',&#10;                    g: 'Tidak satu per satu',&#10;                },&#10;                {&#10;                    t: 'Tombol menyesuaikan pilihan Anda',&#10;                    d: 'Bilah aksi di bawah layar hanya menghidupkan tombol yang cocok dengan status hari yang dicentang.',&#10;                    g: 'Tidak bisa salah klik',&#10;                },&#10;                {&#10;                    t: 'Buka kunci massal hanya admin',&#10;                    d: 'Korlas tetap terbatas kelasnya sendiri — hari dari kelas lain tidak ikut tersentuh.',&#10;                    g: 'Aman lintas kelas',&#10;                },&#10;            ].map((it, i) =&gt; (&#10;                &lt;Box&#10;                    key={i}&#10;                    style={{&#10;                        height: 166,&#10;                        background: '#FFFFFF',&#10;                        borderRadius: 16,&#10;                        boxShadow: '0 4px 20px rgba(0,0,0,0.08)',&#10;                        padding: 22,&#10;                        borderLeft: '8px solid #AFC440',&#10;                    }}&#10;                &gt;&#10;                    &lt;Text&#10;                        style={{&#10;                            fontSize: 24,&#10;                            fontWeight: 'bold',&#10;                            color: '#51277C',&#10;                            fontFamily: 'Trebuchet MS',&#10;                            lineHeight: 1.3,&#10;                        }}&#10;                    &gt;&#10;                        {it.t}&#10;                    &lt;/Text&gt;&#10;                    &lt;Text&#10;                        style={{&#10;                            marginTop: 10,&#10;                            fontSize: 17,&#10;                            color: '#6B6478',&#10;                            fontFamily: 'Verdana',&#10;                            lineHeight: 1.5,&#10;                        }}&#10;                    &gt;&#10;                        {it.d}&#10;                    &lt;/Text&gt;&#10;                    &lt;Box style={{ marginTop: 'auto' }}&gt;&#10;                        &lt;Text&#10;                            style={{&#10;                                fontSize: 16,&#10;                                color: '#51277C',&#10;                                fontFamily: 'Verdana',&#10;                                fontWeight: 'bold',&#10;                            }}&#10;                        &gt;&#10;                            {it.g}&#10;                        &lt;/Text&gt;&#10;                    &lt;/Box&gt;&#10;                &lt;/Box&gt;&#10;            ))}&#10;        &lt;/Box&gt;&#10;    &lt;/Box&gt;&#10;&#10;    {/* ── C · bilah kaki ── */}&#10;    &lt;Box&#10;        style={{&#10;            height: 40,&#10;            flexDirection: 'row',&#10;            alignItems: 'center',&#10;            justifyContent: 'space-between',&#10;        }}&#10;    &gt;&#10;        &lt;Text style={{ fontSize: 14, color: '#6B6478', fontFamily: 'Verdana' }}&gt;&#10;            Pizza Snack Play · Panduan Korlas &amp;amp; Admin&#10;        &lt;/Text&gt;&#10;        &lt;Text style={{ fontSize: 14, color: '#6B6478', fontFamily: 'Verdana' }}&gt;13 / 16&lt;/Text&gt;&#10;    &lt;/Box&gt;&#10;&lt;/Slide&gt;&#10;"/>
         <p:cNvGrpSpPr/>
         <p:nvPr/>
       </p:nvGrpSpPr>
@@ -4561,7 +4562,7 @@
                 <a:latin typeface="Verdana"/>
                 <a:ea typeface="Verdana"/>
               </a:rPr>
-              <a:t>13 / 15</a:t>
+              <a:t>13 / 16</a:t>
             </a:r>
             <a:endParaRPr/>
           </a:p>
@@ -4577,7 +4578,7 @@
   <p:cSld>
     <p:spTree>
       <p:nvGrpSpPr>
-        <p:cNvPr id="86" name="" descr="&lt;Slide&#10;    style={{&#10;        width: '1280px',&#10;        height: '720px',&#10;        background: '#FAF7F2',&#10;        paddingTop: 20,&#10;        paddingBottom: 20,&#10;        paddingLeft: 64,&#10;        paddingRight: 64,&#10;    }}&#10;&gt;&#10;    {/* ── A · blok judul ── */}&#10;    &lt;Box style={{ height: 110, justifyContent: 'center' }}&gt;&#10;        &lt;Text&#10;            style={{&#10;                fontSize: 34,&#10;                fontWeight: 'bold',&#10;                color: '#51277C',&#10;                fontFamily: 'Trebuchet MS',&#10;                lineHeight: 1.3,&#10;            }}&#10;        &gt;&#10;            Empat hal yang perlu diingat&#10;        &lt;/Text&gt;&#10;        &lt;Box style={{ marginTop: 10, width: 72, height: 6, borderRadius: 3, background: '#51277C' }} /&gt;&#10;    &lt;/Box&gt;&#10;&#10;    {/* ── B · area konten ── */}&#10;    &lt;Box style={{ height: 530 }}&gt;&#10;        &lt;Box style={{ height: 470, flexDirection: 'row', gap: 18 }}&gt;&#10;            {[&#10;                {&#10;                    d: 'M7 2v3M17 2v3M3 9h18M5 5h14a2 2 0 0 1 2 2v12a2 2 0 0 1-2 2H5a2 2 0 0 1-2-2V7a2 2 0 0 1 2-2zM8 13h8',&#10;                    t: 'Kosongkan petugas sebelum terbit',&#10;                    d: 'Bila tanggalnya ingin direbut orang tua, biarkan petugas kosong sebelum dipublikasikan. Setelah terbit, tidak bisa diubah lagi.',&#10;                    g: 'Tentukan sebelum kunci',&#10;                },&#10;                {&#10;                    d: 'M7 4h10a3 3 0 0 1 3 3v10a3 3 0 0 1-3 3H7a3 3 0 0 1-3-3V7a3 3 0 0 1 3-3zM7 11l2 2 3-4M8 16h7',&#10;                    t: 'Selesaikan semua dulu',&#10;                    d: 'Publikasi menolak selama masih ada hari yang belum dikunci. Periksa kartu status per kelas sebelum menekan tombolnya.',&#10;                    g: 'Jangan separuh jadi',&#10;                },&#10;                {&#10;                    d: 'M7 11h10a2 2 0 0 1 2 2v6a2 2 0 0 1-2 2H7a2 2 0 0 1-2-2v-6a2 2 0 0 1 2-2zM8 11V8a4 4 0 0 1 7.5-2',&#10;                    t: 'Revisi sesudah terbit: minta admin',&#10;                    d: 'Membuka kunci jadwal wewenang admin. Korlas tidak bisa mencairkan jadwal yang sudah dikunci atau terbit.',&#10;                    g: 'Sampaikan ke admin',&#10;                },&#10;                {&#10;                    d: 'M7 2v3M17 2v3M3 9h18M5 5h14a2 2 0 0 1 2 2v12a2 2 0 0 1-2 2H5a2 2 0 0 1-2-2V7a2 2 0 0 1 2-2zM9 14l6 6M15 14l-6 6',&#10;                    t: 'Hari libur sekolah wewenang admin',&#10;                    d: 'Korlas bisa menandai libur pada jadwal kelasnya sendiri. Hari libur yang berlaku untuk semua kelas ditambahkan admin.',&#10;                    g: 'Berlaku sekolah',&#10;                },&#10;            ].map((c, idx) =&gt; (&#10;                &lt;Box&#10;                    key={idx}&#10;                    style={{&#10;                        flex: 1,&#10;                        height: '100%',&#10;                        background: '#FFFFFF',&#10;                        borderRadius: 16,&#10;                        boxShadow: '0 4px 20px rgba(0,0,0,0.08)',&#10;                        padding: 24,&#10;                        borderTop: '8px solid #AFC440',&#10;                    }}&#10;                &gt;&#10;                    &lt;Box&#10;                        style={{&#10;                            width: 60,&#10;                            height: 60,&#10;                            borderRadius: 30,&#10;                            background: 'rgba(81,39,124,0.10)',&#10;                            justifyContent: 'center',&#10;                            alignItems: 'center',&#10;                        }}&#10;                    &gt;&#10;                        &lt;svg width={30} height={30} viewBox='0 0 24 24' xmlns=&quot;http://www.w3.org/2000/svg&quot;&gt;&#10;                            &lt;path&#10;                                fill='none'&#10;                                stroke='#51277C'&#10;                                strokeWidth='2'&#10;                                strokeLinecap='round'&#10;                                strokeLinejoin='round'&#10;                                d={c.d}&#10;                            /&gt;&#10;                        &lt;/svg&gt;&#10;                    &lt;/Box&gt;&#10;&#10;                    &lt;Text&#10;                        style={{&#10;                            marginTop: 16,&#10;                            fontSize: 23,&#10;                            fontWeight: 'bold',&#10;                            color: '#51277C',&#10;                            fontFamily: 'Trebuchet MS',&#10;                            lineHeight: 1.32,&#10;                        }}&#10;                    &gt;&#10;                        {c.t}&#10;                    &lt;/Text&gt;&#10;&#10;                    &lt;Box style={{ marginTop: 12, width: 44, height: 3, borderRadius: 2, background: '#AFC440' }} /&gt;&#10;&#10;                    &lt;Text&#10;                        style={{&#10;                            marginTop: 12,&#10;                            fontSize: 17,&#10;                            color: '#6B6478',&#10;                            fontFamily: 'Verdana',&#10;                            lineHeight: 1.5,&#10;                        }}&#10;                    &gt;&#10;                        {c.d}&#10;                    &lt;/Text&gt;&#10;&#10;                    &lt;Box style={{ marginTop: 'auto' }}&gt;&#10;                        &lt;Text&#10;                            style={{&#10;                                fontSize: 16,&#10;                                color: '#51277C',&#10;                                fontFamily: 'Verdana',&#10;                                fontWeight: 'bold',&#10;                            }}&#10;                        &gt;&#10;                            {c.g}&#10;                        &lt;/Text&gt;&#10;                    &lt;/Box&gt;&#10;                &lt;/Box&gt;&#10;            ))}&#10;        &lt;/Box&gt;&#10;&#10;        {/* simpulan */}&#10;        &lt;Box&#10;            style={{&#10;                marginTop: 14,&#10;                height: 46,&#10;                background: '#51277C',&#10;                borderRadius: 14,&#10;                justifyContent: 'center',&#10;                alignItems: 'center',&#10;            }}&#10;        &gt;&#10;            &lt;Text&#10;                style={{&#10;                    fontSize: 19,&#10;                    color: '#FFFFFF',&#10;                    fontFamily: 'Verdana',&#10;                    fontWeight: 'bold',&#10;                }}&#10;            &gt;&#10;                Intinya: susun, tentukan petugas, kunci, lalu terbitkan.&#10;            &lt;/Text&gt;&#10;        &lt;/Box&gt;&#10;    &lt;/Box&gt;&#10;&#10;    {/* ── C · bilah kaki ── */}&#10;    &lt;Box&#10;        style={{&#10;            height: 40,&#10;            flexDirection: 'row',&#10;            alignItems: 'center',&#10;            justifyContent: 'space-between',&#10;        }}&#10;    &gt;&#10;        &lt;Text style={{ fontSize: 14, color: '#6B6478', fontFamily: 'Verdana' }}&gt;&#10;            Pizza Snack Play · Panduan Korlas &amp;amp; Admin&#10;        &lt;/Text&gt;&#10;        &lt;Text style={{ fontSize: 14, color: '#6B6478', fontFamily: 'Verdana' }}&gt;14 / 15&lt;/Text&gt;&#10;    &lt;/Box&gt;&#10;&lt;/Slide&gt;&#10;"/>
+        <p:cNvPr id="86" name="" descr="&lt;Slide&#10;    style={{&#10;        width: '1280px',&#10;        height: '720px',&#10;        background: '#FAF7F2',&#10;        paddingTop: 20,&#10;        paddingBottom: 20,&#10;        paddingLeft: 64,&#10;        paddingRight: 64,&#10;        position: 'relative',&#10;        overflow: 'hidden',&#10;    }}&#10;&gt;&#10;    &lt;Box&#10;        style={{&#10;            position: 'absolute',&#10;            top: -150,&#10;            left: -120,&#10;            width: 440,&#10;            height: 440,&#10;            borderRadius: 220,&#10;            background: 'linear-gradient(135deg, #AFC440 0%, #F3B26C 100%)',&#10;            opacity: 0.14,&#10;        }}&#10;    /&gt;&#10;&#10;    {/* ── A · blok judul ── */}&#10;    &lt;Box style={{ height: 110, justifyContent: 'center' }}&gt;&#10;        &lt;Text&#10;            style={{&#10;                fontSize: 34,&#10;                fontWeight: 'bold',&#10;                color: '#51277C',&#10;                fontFamily: 'Trebuchet MS',&#10;                lineHeight: 1.3,&#10;            }}&#10;        &gt;&#10;            Laporan piket: sudah merata?&#10;        &lt;/Text&gt;&#10;        &lt;Box style={{ marginTop: 10, width: 72, height: 6, borderRadius: 3, background: '#F3B26C' }} /&gt;&#10;    &lt;/Box&gt;&#10;&#10;    {/* ── B · area konten ── */}&#10;    &lt;Box style={{ height: 530, flexDirection: 'row', gap: 34, position: 'relative', zIndex: 1 }}&gt;&#10;        {/* kiri 55% · frasa raksasa */}&#10;        &lt;Box style={{ width: '55%', height: '100%', justifyContent: 'center' }}&gt;&#10;            &lt;Text&#10;                style={{&#10;                    fontSize: 62,&#10;                    fontWeight: 'bold',&#10;                    color: '#51277C',&#10;                    fontFamily: 'Trebuchet MS',&#10;                    lineHeight: 1.1,&#10;                }}&#10;            &gt;&#10;                Merata,{'\n'}bukan sekadar penuh.&#10;            &lt;/Text&gt;&#10;&#10;            &lt;Text&#10;                style={{&#10;                    marginTop: 22,&#10;                    fontSize: 19,&#10;                    color: '#2A2333',&#10;                    fontFamily: 'Verdana',&#10;                    lineHeight: 1.55,&#10;                }}&#10;            &gt;&#10;                Menu Laporan menghitung berapa kali setiap orang tua sudah mengambil piket,&#10;                lengkap dengan tanggal dan menunya. Angkanya diambil dari tempat yang sama&#10;                dengan yang dipakai orang tua saat mengambil tanggal.&#10;            &lt;/Text&gt;&#10;&#10;            &lt;Box&#10;                style={{&#10;                    marginTop: 24,&#10;                    background: 'rgba(243,178,108,0.22)',&#10;                    borderRadius: 14,&#10;                    borderLeft: '8px solid #F3B26C',&#10;                    padding: 18,&#10;                }}&#10;            &gt;&#10;                &lt;Text&#10;                    style={{&#10;                        fontSize: 18,&#10;                        color: '#2A2333',&#10;                        fontFamily: 'Verdana',&#10;                        lineHeight: 1.5,&#10;                    }}&#10;                &gt;&#10;                    Yang paling berguna justru satu daftar ini:&#10;                &lt;/Text&gt;&#10;                &lt;Text&#10;                    style={{&#10;                        marginTop: 10,&#10;                        fontSize: 19,&#10;                        fontWeight: 'bold',&#10;                        color: '#51277C',&#10;                        fontFamily: 'Trebuchet MS',&#10;                        lineHeight: 1.35,&#10;                    }}&#10;                &gt;&#10;                    Belum pernah ambil&#10;                &lt;/Text&gt;&#10;                &lt;Text&#10;                    style={{&#10;                        marginTop: 4,&#10;                        fontSize: 17,&#10;                        color: '#2A2333',&#10;                        fontFamily: 'Verdana',&#10;                        lineHeight: 1.5,&#10;                    }}&#10;                &gt;&#10;                    merekalah yang bisa diajak lebih dulu bulan depan.&#10;                &lt;/Text&gt;&#10;            &lt;/Box&gt;&#10;        &lt;/Box&gt;&#10;&#10;        {/* kanan 45% · rekap per orang tua */}&#10;        &lt;Box&#10;            style={{&#10;                width: '45%',&#10;                height: '100%',&#10;                background: 'rgba(81,39,124,0.06)',&#10;                borderRadius: 20,&#10;                justifyContent: 'center',&#10;                alignItems: 'center',&#10;            }}&#10;        &gt;&#10;            &lt;svg width={430} height={430} viewBox='0 0 430 430'&gt;&#10;                &lt;text x='18' y='38' fontFamily='Trebuchet MS' fontSize='21' fontWeight='bold' fill='#51277C'&gt;&#10;                    Rekap ambil piket&#10;                &lt;/text&gt;&#10;                &lt;text x='18' y='62' fontFamily='Verdana' fontSize='14' fill='#6B6478'&gt;&#10;                    1 – 31 Oktober · Kelas 1&#10;                &lt;/text&gt;&#10;&#10;                {/* Sari · 4 */}&#10;                &lt;text x='18' y='120' fontFamily='Verdana' fontSize='15' fill='#2A2333'&gt;Sari&lt;/text&gt;&#10;                &lt;rect x='110' y='104' width='250' height='22' rx='11' fill='#EFEAE1' /&gt;&#10;                &lt;rect x='110' y='104' width='250' height='22' rx='11' fill='#51277C' /&gt;&#10;                &lt;text x='372' y='120' fontFamily='Trebuchet MS' fontSize='16' fontWeight='bold' fill='#51277C'&gt;4&lt;/text&gt;&#10;&#10;                {/* Budi · 3 */}&#10;                &lt;text x='18' y='176' fontFamily='Verdana' fontSize='15' fill='#2A2333'&gt;Budi&lt;/text&gt;&#10;                &lt;rect x='110' y='160' width='250' height='22' rx='11' fill='#EFEAE1' /&gt;&#10;                &lt;rect x='110' y='160' width='188' height='22' rx='11' fill='#51277C' /&gt;&#10;                &lt;text x='372' y='176' fontFamily='Trebuchet MS' fontSize='16' fontWeight='bold' fill='#51277C'&gt;3&lt;/text&gt;&#10;&#10;                {/* Dewi · 2 */}&#10;                &lt;text x='18' y='232' fontFamily='Verdana' fontSize='15' fill='#2A2333'&gt;Dewi&lt;/text&gt;&#10;                &lt;rect x='110' y='216' width='250' height='22' rx='11' fill='#EFEAE1' /&gt;&#10;                &lt;rect x='110' y='216' width='125' height='22' rx='11' fill='#51277C' /&gt;&#10;                &lt;text x='372' y='232' fontFamily='Trebuchet MS' fontSize='16' fontWeight='bold' fill='#51277C'&gt;2&lt;/text&gt;&#10;&#10;                {/* Rina · 1 */}&#10;                &lt;text x='18' y='288' fontFamily='Verdana' fontSize='15' fill='#2A2333'&gt;Rina&lt;/text&gt;&#10;                &lt;rect x='110' y='272' width='250' height='22' rx='11' fill='#EFEAE1' /&gt;&#10;                &lt;rect x='110' y='272' width='63' height='22' rx='11' fill='#51277C' /&gt;&#10;                &lt;text x='372' y='288' fontFamily='Trebuchet MS' fontSize='16' fontWeight='bold' fill='#51277C'&gt;1&lt;/text&gt;&#10;&#10;                {/* Anto · 0 — belum pernah */}&#10;                &lt;text x='18' y='344' fontFamily='Verdana' fontSize='15' fill='#2A2333'&gt;Anto&lt;/text&gt;&#10;                &lt;rect x='110' y='328' width='250' height='22' rx='11' fill='#EFEAE1' /&gt;&#10;                &lt;rect x='110' y='328' width='250' height='22' rx='11' fill='#F3B26C' opacity='0.35' /&gt;&#10;                &lt;text x='372' y='344' fontFamily='Trebuchet MS' fontSize='16' fontWeight='bold' fill='#F3B26C'&gt;0&lt;/text&gt;&#10;&#10;                {/* simpulan */}&#10;                &lt;rect x='18' y='374' width='394' height='48' rx='14' fill='#51277C' /&gt;&#10;                &lt;text x='38' y='396' fontFamily='Verdana' fontSize='15' fill='#F3B26C' fontWeight='bold'&gt;&#10;                    Belum pernah ambil: Anto&#10;                &lt;/text&gt;&#10;                &lt;text x='38' y='414' fontFamily='Verdana' fontSize='13' fill='#EFEAE1'&gt;&#10;                    ajak lebih dulu saat menyusun bulan depan&#10;                &lt;/text&gt;&#10;            &lt;/svg&gt;&#10;        &lt;/Box&gt;&#10;    &lt;/Box&gt;&#10;&#10;    {/* ── C · bilah kaki ── */}&#10;    &lt;Box&#10;        style={{&#10;            height: 40,&#10;            flexDirection: 'row',&#10;            alignItems: 'center',&#10;            justifyContent: 'space-between',&#10;        }}&#10;    &gt;&#10;        &lt;Text style={{ fontSize: 14, color: '#6B6478', fontFamily: 'Verdana' }}&gt;&#10;            Pizza Snack Play · Panduan Korlas &amp;amp; Admin&#10;        &lt;/Text&gt;&#10;        &lt;Text style={{ fontSize: 14, color: '#6B6478', fontFamily: 'Verdana' }}&gt;14 / 16&lt;/Text&gt;&#10;    &lt;/Box&gt;&#10;&lt;/Slide&gt;&#10;"/>
         <p:cNvGrpSpPr/>
         <p:nvPr/>
       </p:nvGrpSpPr>
@@ -4642,6 +4643,858 @@
                 <a:latin typeface="Trebuchet MS"/>
                 <a:ea typeface="Trebuchet MS"/>
               </a:rPr>
+              <a:t>Laporan piket: sudah merata?</a:t>
+            </a:r>
+            <a:endParaRPr/>
+          </a:p>
+        </p:txBody>
+      </p:sp>
+      <p:sp>
+        <p:nvSpPr>
+          <p:cNvPr id="89" name=""/>
+          <p:cNvSpPr/>
+          <p:nvPr/>
+        </p:nvSpPr>
+        <p:spPr>
+          <a:xfrm rot="0" flipH="0" flipV="0">
+            <a:off x="609600" y="990600"/>
+            <a:ext cx="685800" cy="57150"/>
+          </a:xfrm>
+          <a:prstGeom prst="roundRect">
+            <a:avLst>
+              <a:gd name="adj" fmla="val 50000"/>
+            </a:avLst>
+          </a:prstGeom>
+          <a:solidFill>
+            <a:srgbClr val="F3B26C"/>
+          </a:solidFill>
+          <a:ln/>
+        </p:spPr>
+        <p:txBody>
+          <a:bodyPr/>
+          <a:p/>
+        </p:txBody>
+      </p:sp>
+      <p:sp>
+        <p:nvSpPr>
+          <p:cNvPr id="90" name="" descr="{&quot;isTemplate&quot;:true,&quot;type&quot;:&quot;text&quot;}"/>
+          <p:cNvSpPr txBox="1"/>
+          <p:nvPr/>
+        </p:nvSpPr>
+        <p:spPr>
+          <a:xfrm rot="0" flipH="0" flipV="0">
+            <a:off x="609600" y="6400800"/>
+            <a:ext cx="2905125" cy="161925"/>
+          </a:xfrm>
+          <a:prstGeom prst="rect"/>
+        </p:spPr>
+        <p:txBody>
+          <a:bodyPr wrap="none" lIns="0" tIns="0" rIns="0" bIns="0"/>
+          <a:p>
+            <a:pPr>
+              <a:lnSpc>
+                <a:spcPct val="100000"/>
+              </a:lnSpc>
+            </a:pPr>
+            <a:r>
+              <a:rPr lang="en-US" sz="1050">
+                <a:solidFill>
+                  <a:srgbClr val="6B6478"/>
+                </a:solidFill>
+                <a:latin typeface="Verdana"/>
+                <a:ea typeface="Verdana"/>
+              </a:rPr>
+              <a:t>Pizza Snack Play · Panduan Korlas &amp; Admin</a:t>
+            </a:r>
+            <a:endParaRPr/>
+          </a:p>
+        </p:txBody>
+      </p:sp>
+      <p:sp>
+        <p:nvSpPr>
+          <p:cNvPr id="91" name="" descr="{&quot;isTemplate&quot;:true,&quot;type&quot;:&quot;text&quot;}"/>
+          <p:cNvSpPr txBox="1"/>
+          <p:nvPr/>
+        </p:nvSpPr>
+        <p:spPr>
+          <a:xfrm rot="0" flipH="0" flipV="0">
+            <a:off x="11087100" y="6400800"/>
+            <a:ext cx="495300" cy="161925"/>
+          </a:xfrm>
+          <a:prstGeom prst="rect"/>
+        </p:spPr>
+        <p:txBody>
+          <a:bodyPr wrap="none" lIns="0" tIns="0" rIns="0" bIns="0"/>
+          <a:p>
+            <a:pPr>
+              <a:lnSpc>
+                <a:spcPct val="100000"/>
+              </a:lnSpc>
+            </a:pPr>
+            <a:r>
+              <a:rPr lang="en-US" sz="1050">
+                <a:solidFill>
+                  <a:srgbClr val="6B6478"/>
+                </a:solidFill>
+                <a:latin typeface="Verdana"/>
+                <a:ea typeface="Verdana"/>
+              </a:rPr>
+              <a:t>14 / 16</a:t>
+            </a:r>
+            <a:endParaRPr/>
+          </a:p>
+        </p:txBody>
+      </p:sp>
+      <p:sp>
+        <p:nvSpPr>
+          <p:cNvPr id="92" name=""/>
+          <p:cNvSpPr/>
+          <p:nvPr/>
+        </p:nvSpPr>
+        <p:spPr>
+          <a:xfrm rot="0" flipH="0" flipV="0">
+            <a:off x="-1143000" y="-1428750"/>
+            <a:ext cx="4191000" cy="4191000"/>
+          </a:xfrm>
+          <a:custGeom>
+            <a:pathLst>
+              <a:path w="440" h="440">
+                <a:moveTo>
+                  <a:pt x="430" y="155"/>
+                </a:moveTo>
+                <a:lnTo>
+                  <a:pt x="432" y="160"/>
+                </a:lnTo>
+                <a:lnTo>
+                  <a:pt x="433" y="165"/>
+                </a:lnTo>
+                <a:lnTo>
+                  <a:pt x="434" y="170"/>
+                </a:lnTo>
+                <a:lnTo>
+                  <a:pt x="436" y="176"/>
+                </a:lnTo>
+                <a:lnTo>
+                  <a:pt x="437" y="181"/>
+                </a:lnTo>
+                <a:lnTo>
+                  <a:pt x="437" y="187"/>
+                </a:lnTo>
+                <a:lnTo>
+                  <a:pt x="438" y="192"/>
+                </a:lnTo>
+                <a:lnTo>
+                  <a:pt x="439" y="198"/>
+                </a:lnTo>
+                <a:lnTo>
+                  <a:pt x="439" y="203"/>
+                </a:lnTo>
+                <a:lnTo>
+                  <a:pt x="440" y="209"/>
+                </a:lnTo>
+                <a:lnTo>
+                  <a:pt x="440" y="214"/>
+                </a:lnTo>
+                <a:lnTo>
+                  <a:pt x="440" y="220"/>
+                </a:lnTo>
+                <a:lnTo>
+                  <a:pt x="440" y="226"/>
+                </a:lnTo>
+                <a:lnTo>
+                  <a:pt x="440" y="231"/>
+                </a:lnTo>
+                <a:lnTo>
+                  <a:pt x="439" y="237"/>
+                </a:lnTo>
+                <a:lnTo>
+                  <a:pt x="439" y="242"/>
+                </a:lnTo>
+                <a:lnTo>
+                  <a:pt x="438" y="248"/>
+                </a:lnTo>
+                <a:lnTo>
+                  <a:pt x="437" y="253"/>
+                </a:lnTo>
+                <a:lnTo>
+                  <a:pt x="437" y="259"/>
+                </a:lnTo>
+                <a:lnTo>
+                  <a:pt x="436" y="264"/>
+                </a:lnTo>
+                <a:lnTo>
+                  <a:pt x="434" y="270"/>
+                </a:lnTo>
+                <a:lnTo>
+                  <a:pt x="433" y="275"/>
+                </a:lnTo>
+                <a:lnTo>
+                  <a:pt x="432" y="280"/>
+                </a:lnTo>
+                <a:lnTo>
+                  <a:pt x="430" y="285"/>
+                </a:lnTo>
+                <a:lnTo>
+                  <a:pt x="428" y="291"/>
+                </a:lnTo>
+                <a:lnTo>
+                  <a:pt x="427" y="296"/>
+                </a:lnTo>
+                <a:lnTo>
+                  <a:pt x="425" y="301"/>
+                </a:lnTo>
+                <a:lnTo>
+                  <a:pt x="423" y="306"/>
+                </a:lnTo>
+                <a:lnTo>
+                  <a:pt x="421" y="311"/>
+                </a:lnTo>
+                <a:lnTo>
+                  <a:pt x="418" y="315"/>
+                </a:lnTo>
+                <a:lnTo>
+                  <a:pt x="416" y="320"/>
+                </a:lnTo>
+                <a:lnTo>
+                  <a:pt x="413" y="325"/>
+                </a:lnTo>
+                <a:lnTo>
+                  <a:pt x="411" y="329"/>
+                </a:lnTo>
+                <a:lnTo>
+                  <a:pt x="408" y="334"/>
+                </a:lnTo>
+                <a:lnTo>
+                  <a:pt x="405" y="339"/>
+                </a:lnTo>
+                <a:lnTo>
+                  <a:pt x="402" y="343"/>
+                </a:lnTo>
+                <a:lnTo>
+                  <a:pt x="399" y="347"/>
+                </a:lnTo>
+                <a:lnTo>
+                  <a:pt x="396" y="352"/>
+                </a:lnTo>
+                <a:lnTo>
+                  <a:pt x="393" y="356"/>
+                </a:lnTo>
+                <a:lnTo>
+                  <a:pt x="390" y="360"/>
+                </a:lnTo>
+                <a:lnTo>
+                  <a:pt x="386" y="364"/>
+                </a:lnTo>
+                <a:lnTo>
+                  <a:pt x="383" y="368"/>
+                </a:lnTo>
+                <a:lnTo>
+                  <a:pt x="379" y="372"/>
+                </a:lnTo>
+                <a:lnTo>
+                  <a:pt x="376" y="376"/>
+                </a:lnTo>
+                <a:lnTo>
+                  <a:pt x="372" y="379"/>
+                </a:lnTo>
+                <a:lnTo>
+                  <a:pt x="368" y="383"/>
+                </a:lnTo>
+                <a:lnTo>
+                  <a:pt x="364" y="386"/>
+                </a:lnTo>
+                <a:lnTo>
+                  <a:pt x="360" y="390"/>
+                </a:lnTo>
+                <a:lnTo>
+                  <a:pt x="356" y="393"/>
+                </a:lnTo>
+                <a:lnTo>
+                  <a:pt x="352" y="396"/>
+                </a:lnTo>
+                <a:lnTo>
+                  <a:pt x="347" y="399"/>
+                </a:lnTo>
+                <a:lnTo>
+                  <a:pt x="343" y="402"/>
+                </a:lnTo>
+                <a:lnTo>
+                  <a:pt x="339" y="405"/>
+                </a:lnTo>
+                <a:lnTo>
+                  <a:pt x="334" y="408"/>
+                </a:lnTo>
+                <a:lnTo>
+                  <a:pt x="329" y="411"/>
+                </a:lnTo>
+                <a:lnTo>
+                  <a:pt x="325" y="413"/>
+                </a:lnTo>
+                <a:lnTo>
+                  <a:pt x="320" y="416"/>
+                </a:lnTo>
+                <a:lnTo>
+                  <a:pt x="315" y="418"/>
+                </a:lnTo>
+                <a:lnTo>
+                  <a:pt x="311" y="421"/>
+                </a:lnTo>
+                <a:lnTo>
+                  <a:pt x="306" y="423"/>
+                </a:lnTo>
+                <a:lnTo>
+                  <a:pt x="301" y="425"/>
+                </a:lnTo>
+                <a:lnTo>
+                  <a:pt x="296" y="427"/>
+                </a:lnTo>
+                <a:lnTo>
+                  <a:pt x="291" y="428"/>
+                </a:lnTo>
+                <a:lnTo>
+                  <a:pt x="285" y="430"/>
+                </a:lnTo>
+                <a:lnTo>
+                  <a:pt x="280" y="432"/>
+                </a:lnTo>
+                <a:lnTo>
+                  <a:pt x="275" y="433"/>
+                </a:lnTo>
+                <a:lnTo>
+                  <a:pt x="270" y="434"/>
+                </a:lnTo>
+                <a:lnTo>
+                  <a:pt x="264" y="436"/>
+                </a:lnTo>
+                <a:lnTo>
+                  <a:pt x="259" y="437"/>
+                </a:lnTo>
+                <a:lnTo>
+                  <a:pt x="253" y="437"/>
+                </a:lnTo>
+                <a:lnTo>
+                  <a:pt x="248" y="438"/>
+                </a:lnTo>
+                <a:lnTo>
+                  <a:pt x="242" y="439"/>
+                </a:lnTo>
+                <a:lnTo>
+                  <a:pt x="237" y="439"/>
+                </a:lnTo>
+                <a:lnTo>
+                  <a:pt x="231" y="440"/>
+                </a:lnTo>
+                <a:lnTo>
+                  <a:pt x="226" y="440"/>
+                </a:lnTo>
+                <a:lnTo>
+                  <a:pt x="220" y="440"/>
+                </a:lnTo>
+                <a:lnTo>
+                  <a:pt x="214" y="440"/>
+                </a:lnTo>
+                <a:lnTo>
+                  <a:pt x="209" y="440"/>
+                </a:lnTo>
+                <a:lnTo>
+                  <a:pt x="203" y="439"/>
+                </a:lnTo>
+                <a:lnTo>
+                  <a:pt x="198" y="439"/>
+                </a:lnTo>
+                <a:lnTo>
+                  <a:pt x="192" y="438"/>
+                </a:lnTo>
+                <a:lnTo>
+                  <a:pt x="187" y="437"/>
+                </a:lnTo>
+                <a:lnTo>
+                  <a:pt x="181" y="437"/>
+                </a:lnTo>
+                <a:lnTo>
+                  <a:pt x="176" y="436"/>
+                </a:lnTo>
+                <a:lnTo>
+                  <a:pt x="170" y="434"/>
+                </a:lnTo>
+                <a:lnTo>
+                  <a:pt x="165" y="433"/>
+                </a:lnTo>
+                <a:lnTo>
+                  <a:pt x="160" y="432"/>
+                </a:lnTo>
+                <a:lnTo>
+                  <a:pt x="155" y="430"/>
+                </a:lnTo>
+                <a:lnTo>
+                  <a:pt x="149" y="428"/>
+                </a:lnTo>
+                <a:lnTo>
+                  <a:pt x="144" y="427"/>
+                </a:lnTo>
+                <a:lnTo>
+                  <a:pt x="139" y="425"/>
+                </a:lnTo>
+                <a:lnTo>
+                  <a:pt x="134" y="423"/>
+                </a:lnTo>
+                <a:lnTo>
+                  <a:pt x="129" y="421"/>
+                </a:lnTo>
+                <a:lnTo>
+                  <a:pt x="125" y="418"/>
+                </a:lnTo>
+                <a:lnTo>
+                  <a:pt x="120" y="416"/>
+                </a:lnTo>
+                <a:lnTo>
+                  <a:pt x="120" y="150"/>
+                </a:lnTo>
+                <a:lnTo>
+                  <a:pt x="429" y="150"/>
+                </a:lnTo>
+                <a:close/>
+              </a:path>
+            </a:pathLst>
+          </a:custGeom>
+          <a:gradFill>
+            <a:gsLst>
+              <a:gs pos="0">
+                <a:srgbClr val="AFC440">
+                  <a:alpha val="14000"/>
+                </a:srgbClr>
+              </a:gs>
+              <a:gs pos="100000">
+                <a:srgbClr val="F3B26C">
+                  <a:alpha val="14000"/>
+                </a:srgbClr>
+              </a:gs>
+            </a:gsLst>
+            <a:lin ang="2700000" scaled="1"/>
+          </a:gradFill>
+          <a:ln/>
+        </p:spPr>
+        <p:txBody>
+          <a:bodyPr/>
+          <a:p/>
+        </p:txBody>
+      </p:sp>
+      <p:sp>
+        <p:nvSpPr>
+          <p:cNvPr id="93" name="" descr="{&quot;isTemplate&quot;:true,&quot;type&quot;:&quot;text&quot;}"/>
+          <p:cNvSpPr txBox="1"/>
+          <p:nvPr/>
+        </p:nvSpPr>
+        <p:spPr>
+          <a:xfrm rot="0" flipH="0" flipV="0">
+            <a:off x="609600" y="1009650"/>
+            <a:ext cx="5857875" cy="2343150"/>
+          </a:xfrm>
+          <a:prstGeom prst="rect"/>
+        </p:spPr>
+        <p:txBody>
+          <a:bodyPr wrap="square" lIns="0" tIns="0" rIns="0" bIns="0">
+            <a:normAutofit/>
+          </a:bodyPr>
+          <a:p>
+            <a:pPr>
+              <a:lnSpc>
+                <a:spcPct val="110000"/>
+              </a:lnSpc>
+            </a:pPr>
+            <a:r>
+              <a:rPr lang="en-US" sz="4650" b="1">
+                <a:solidFill>
+                  <a:srgbClr val="51277C"/>
+                </a:solidFill>
+                <a:latin typeface="Trebuchet MS"/>
+                <a:ea typeface="Trebuchet MS"/>
+              </a:rPr>
+              <a:t>Merata,</a:t>
+            </a:r>
+            <a:endParaRPr/>
+          </a:p>
+          <a:p>
+            <a:pPr>
+              <a:lnSpc>
+                <a:spcPct val="110000"/>
+              </a:lnSpc>
+            </a:pPr>
+            <a:r>
+              <a:rPr lang="en-US" sz="4650" b="1">
+                <a:solidFill>
+                  <a:srgbClr val="51277C"/>
+                </a:solidFill>
+                <a:latin typeface="Trebuchet MS"/>
+                <a:ea typeface="Trebuchet MS"/>
+              </a:rPr>
+              <a:t>bukan sekadar penuh.</a:t>
+            </a:r>
+            <a:endParaRPr/>
+          </a:p>
+        </p:txBody>
+      </p:sp>
+      <p:sp>
+        <p:nvSpPr>
+          <p:cNvPr id="94" name="" descr="{&quot;isTemplate&quot;:true,&quot;type&quot;:&quot;text&quot;}"/>
+          <p:cNvSpPr txBox="1"/>
+          <p:nvPr/>
+        </p:nvSpPr>
+        <p:spPr>
+          <a:xfrm rot="0" flipH="0" flipV="0">
+            <a:off x="609600" y="3562350"/>
+            <a:ext cx="5857875" cy="1352550"/>
+          </a:xfrm>
+          <a:prstGeom prst="rect"/>
+        </p:spPr>
+        <p:txBody>
+          <a:bodyPr wrap="square" lIns="0" tIns="0" rIns="0" bIns="0">
+            <a:normAutofit/>
+          </a:bodyPr>
+          <a:p>
+            <a:pPr>
+              <a:lnSpc>
+                <a:spcPct val="155000"/>
+              </a:lnSpc>
+            </a:pPr>
+            <a:r>
+              <a:rPr lang="en-US" sz="1425">
+                <a:solidFill>
+                  <a:srgbClr val="2A2333"/>
+                </a:solidFill>
+                <a:latin typeface="Verdana"/>
+                <a:ea typeface="Verdana"/>
+              </a:rPr>
+              <a:t>Menu Laporan menghitung berapa kali setiap orang tua sudah mengambil piket, lengkap dengan tanggal dan menunya. Angkanya diambil dari tempat yang sama dengan yang dipakai orang tua saat mengambil tanggal.</a:t>
+            </a:r>
+            <a:endParaRPr/>
+          </a:p>
+        </p:txBody>
+      </p:sp>
+      <p:sp>
+        <p:nvSpPr>
+          <p:cNvPr id="95" name=""/>
+          <p:cNvSpPr/>
+          <p:nvPr/>
+        </p:nvSpPr>
+        <p:spPr>
+          <a:xfrm rot="0" flipH="0" flipV="0">
+            <a:off x="685800" y="5143500"/>
+            <a:ext cx="5857875" cy="1381125"/>
+          </a:xfrm>
+          <a:prstGeom prst="roundRect">
+            <a:avLst>
+              <a:gd name="adj" fmla="val 9655"/>
+            </a:avLst>
+          </a:prstGeom>
+          <a:solidFill>
+            <a:srgbClr val="F3B26C">
+              <a:alpha val="22000"/>
+            </a:srgbClr>
+          </a:solidFill>
+          <a:ln/>
+        </p:spPr>
+        <p:txBody>
+          <a:bodyPr/>
+          <a:p/>
+        </p:txBody>
+      </p:sp>
+      <p:sp>
+        <p:nvSpPr>
+          <p:cNvPr id="96" name=""/>
+          <p:cNvSpPr/>
+          <p:nvPr/>
+        </p:nvSpPr>
+        <p:spPr>
+          <a:xfrm rot="0" flipH="0" flipV="0">
+            <a:off x="685800" y="5143500"/>
+            <a:ext cx="5857875" cy="1381125"/>
+          </a:xfrm>
+          <a:custGeom>
+            <a:pathLst>
+              <a:path w="615" h="145">
+                <a:moveTo>
+                  <a:pt x="13" y="0"/>
+                </a:moveTo>
+                <a:cubicBezTo>
+                  <a:pt x="10" y="0"/>
+                  <a:pt x="8" y="3"/>
+                  <a:pt x="8" y="6"/>
+                </a:cubicBezTo>
+                <a:lnTo>
+                  <a:pt x="8" y="139"/>
+                </a:lnTo>
+                <a:cubicBezTo>
+                  <a:pt x="8" y="142"/>
+                  <a:pt x="10" y="145"/>
+                  <a:pt x="13" y="145"/>
+                </a:cubicBezTo>
+                <a:cubicBezTo>
+                  <a:pt x="6" y="145"/>
+                  <a:pt x="0" y="138"/>
+                  <a:pt x="0" y="131"/>
+                </a:cubicBezTo>
+                <a:lnTo>
+                  <a:pt x="0" y="14"/>
+                </a:lnTo>
+                <a:cubicBezTo>
+                  <a:pt x="0" y="6"/>
+                  <a:pt x="6" y="0"/>
+                  <a:pt x="14" y="0"/>
+                </a:cubicBezTo>
+                <a:close/>
+              </a:path>
+            </a:pathLst>
+          </a:custGeom>
+          <a:solidFill>
+            <a:srgbClr val="F3B26C"/>
+          </a:solidFill>
+          <a:ln/>
+        </p:spPr>
+        <p:txBody>
+          <a:bodyPr/>
+          <a:p/>
+        </p:txBody>
+      </p:sp>
+      <p:sp>
+        <p:nvSpPr>
+          <p:cNvPr id="97" name="" descr="{&quot;isTemplate&quot;:true,&quot;type&quot;:&quot;text&quot;}"/>
+          <p:cNvSpPr txBox="1"/>
+          <p:nvPr/>
+        </p:nvSpPr>
+        <p:spPr>
+          <a:xfrm rot="0" flipH="0" flipV="0">
+            <a:off x="857250" y="5314950"/>
+            <a:ext cx="5438775" cy="314325"/>
+          </a:xfrm>
+          <a:prstGeom prst="rect"/>
+        </p:spPr>
+        <p:txBody>
+          <a:bodyPr wrap="none" lIns="0" tIns="0" rIns="0" bIns="0"/>
+          <a:p>
+            <a:pPr>
+              <a:lnSpc>
+                <a:spcPct val="150000"/>
+              </a:lnSpc>
+            </a:pPr>
+            <a:r>
+              <a:rPr lang="en-US" sz="1350">
+                <a:solidFill>
+                  <a:srgbClr val="2A2333"/>
+                </a:solidFill>
+                <a:latin typeface="Verdana"/>
+                <a:ea typeface="Verdana"/>
+              </a:rPr>
+              <a:t>Yang paling berguna justru satu daftar ini:</a:t>
+            </a:r>
+            <a:endParaRPr/>
+          </a:p>
+        </p:txBody>
+      </p:sp>
+      <p:sp>
+        <p:nvSpPr>
+          <p:cNvPr id="98" name="" descr="{&quot;isTemplate&quot;:true,&quot;type&quot;:&quot;text&quot;}"/>
+          <p:cNvSpPr txBox="1"/>
+          <p:nvPr/>
+        </p:nvSpPr>
+        <p:spPr>
+          <a:xfrm rot="0" flipH="0" flipV="0">
+            <a:off x="857250" y="5724525"/>
+            <a:ext cx="5438775" cy="295275"/>
+          </a:xfrm>
+          <a:prstGeom prst="rect"/>
+        </p:spPr>
+        <p:txBody>
+          <a:bodyPr wrap="none" lIns="0" tIns="0" rIns="0" bIns="0"/>
+          <a:p>
+            <a:pPr>
+              <a:lnSpc>
+                <a:spcPct val="135000"/>
+              </a:lnSpc>
+            </a:pPr>
+            <a:r>
+              <a:rPr lang="en-US" sz="1425" b="1">
+                <a:solidFill>
+                  <a:srgbClr val="51277C"/>
+                </a:solidFill>
+                <a:latin typeface="Trebuchet MS"/>
+                <a:ea typeface="Trebuchet MS"/>
+              </a:rPr>
+              <a:t>Belum pernah ambil</a:t>
+            </a:r>
+            <a:endParaRPr/>
+          </a:p>
+        </p:txBody>
+      </p:sp>
+      <p:sp>
+        <p:nvSpPr>
+          <p:cNvPr id="99" name="" descr="{&quot;isTemplate&quot;:true,&quot;type&quot;:&quot;text&quot;}"/>
+          <p:cNvSpPr txBox="1"/>
+          <p:nvPr/>
+        </p:nvSpPr>
+        <p:spPr>
+          <a:xfrm rot="0" flipH="0" flipV="0">
+            <a:off x="857250" y="6057900"/>
+            <a:ext cx="5438775" cy="295275"/>
+          </a:xfrm>
+          <a:prstGeom prst="rect"/>
+        </p:spPr>
+        <p:txBody>
+          <a:bodyPr wrap="none" lIns="0" tIns="0" rIns="0" bIns="0"/>
+          <a:p>
+            <a:pPr>
+              <a:lnSpc>
+                <a:spcPct val="150000"/>
+              </a:lnSpc>
+            </a:pPr>
+            <a:r>
+              <a:rPr lang="en-US" sz="1275">
+                <a:solidFill>
+                  <a:srgbClr val="2A2333"/>
+                </a:solidFill>
+                <a:latin typeface="Verdana"/>
+                <a:ea typeface="Verdana"/>
+              </a:rPr>
+              <a:t>merekalah yang bisa diajak lebih dulu bulan depan.</a:t>
+            </a:r>
+            <a:endParaRPr/>
+          </a:p>
+        </p:txBody>
+      </p:sp>
+      <p:sp>
+        <p:nvSpPr>
+          <p:cNvPr id="100" name=""/>
+          <p:cNvSpPr/>
+          <p:nvPr/>
+        </p:nvSpPr>
+        <p:spPr>
+          <a:xfrm rot="0" flipH="0" flipV="0">
+            <a:off x="6791325" y="1238250"/>
+            <a:ext cx="4791075" cy="5048250"/>
+          </a:xfrm>
+          <a:prstGeom prst="roundRect">
+            <a:avLst>
+              <a:gd name="adj" fmla="val 3976"/>
+            </a:avLst>
+          </a:prstGeom>
+          <a:solidFill>
+            <a:srgbClr val="51277C">
+              <a:alpha val="6000"/>
+            </a:srgbClr>
+          </a:solidFill>
+          <a:ln/>
+        </p:spPr>
+        <p:txBody>
+          <a:bodyPr/>
+          <a:p/>
+        </p:txBody>
+      </p:sp>
+      <p:pic>
+        <p:nvPicPr>
+          <p:cNvPr id="101" name=""/>
+          <p:cNvPicPr>
+            <a:picLocks noChangeAspect="1"/>
+          </p:cNvPicPr>
+          <p:nvPr/>
+        </p:nvPicPr>
+        <p:blipFill>
+          <a:blip r:embed="rId1">
+            <a:extLst>
+              <a:ext uri="{96DAC541-7B7A-43D3-8B79-37D633B846F1}">
+                <asvg:svgBlip r:embed="rId1"/>
+              </a:ext>
+            </a:extLst>
+          </a:blip>
+          <a:stretch>
+            <a:fillRect/>
+          </a:stretch>
+        </p:blipFill>
+        <p:spPr>
+          <a:xfrm rot="0" flipH="0" flipV="0">
+            <a:off x="7143750" y="1714500"/>
+            <a:ext cx="4095750" cy="4095750"/>
+          </a:xfrm>
+          <a:prstGeom prst="rect">
+            <a:avLst/>
+          </a:prstGeom>
+          <a:ln/>
+        </p:spPr>
+      </p:pic>
+    </p:spTree>
+  </p:cSld>
+</p:sld>
+</file>
+
+<file path=ppt/slides/slide15.xml><?xml version="1.0" encoding="utf-8"?>
+<p:sld xmlns:p="http://schemas.openxmlformats.org/presentationml/2006/main" xmlns:a="http://schemas.openxmlformats.org/drawingml/2006/main" xmlns:asvg="http://schemas.microsoft.com/office/drawing/2016/SVG/main" xmlns:r="http://schemas.openxmlformats.org/officeDocument/2006/relationships" xmlns:mc="http://schemas.openxmlformats.org/markup-compatibility/2006" mc:Ignorable="asvg">
+  <p:cSld>
+    <p:spTree>
+      <p:nvGrpSpPr>
+        <p:cNvPr id="102" name="" descr="&lt;Slide&#10;    style={{&#10;        width: '1280px',&#10;        height: '720px',&#10;        background: '#FAF7F2',&#10;        paddingTop: 20,&#10;        paddingBottom: 20,&#10;        paddingLeft: 64,&#10;        paddingRight: 64,&#10;    }}&#10;&gt;&#10;    {/* ── A · blok judul ── */}&#10;    &lt;Box style={{ height: 110, justifyContent: 'center' }}&gt;&#10;        &lt;Text&#10;            style={{&#10;                fontSize: 34,&#10;                fontWeight: 'bold',&#10;                color: '#51277C',&#10;                fontFamily: 'Trebuchet MS',&#10;                lineHeight: 1.3,&#10;            }}&#10;        &gt;&#10;            Empat hal yang perlu diingat&#10;        &lt;/Text&gt;&#10;        &lt;Box style={{ marginTop: 10, width: 72, height: 6, borderRadius: 3, background: '#51277C' }} /&gt;&#10;    &lt;/Box&gt;&#10;&#10;    {/* ── B · area konten ── */}&#10;    &lt;Box style={{ height: 530 }}&gt;&#10;        &lt;Box style={{ height: 470, flexDirection: 'row', gap: 18 }}&gt;&#10;            {[&#10;                {&#10;                    d: 'M7 2v3M17 2v3M3 9h18M5 5h14a2 2 0 0 1 2 2v12a2 2 0 0 1-2 2H5a2 2 0 0 1-2-2V7a2 2 0 0 1 2-2zM8 13h8',&#10;                    t: 'Kosongkan petugas sebelum terbit',&#10;                    d: 'Bila tanggalnya ingin direbut orang tua, biarkan petugas kosong sebelum dipublikasikan. Setelah terbit, yang masih bisa diisi hanya petugas — menu &amp; catatan tetap terkunci.',&#10;                    g: 'Tentukan sebelum kunci',&#10;                },&#10;                {&#10;                    d: 'M7 4h10a3 3 0 0 1 3 3v10a3 3 0 0 1-3 3H7a3 3 0 0 1-3-3V7a3 3 0 0 1 3-3zM7 11l2 2 3-4M8 16h7',&#10;                    t: 'Selesaikan semua dulu',&#10;                    d: 'Publikasi menolak selama masih ada hari yang belum dikunci. Periksa kartu status per kelas sebelum menekan tombolnya.',&#10;                    g: 'Jangan separuh jadi',&#10;                },&#10;                {&#10;                    d: 'M7 11h10a2 2 0 0 1 2 2v6a2 2 0 0 1-2 2H7a2 2 0 0 1-2-2v-6a2 2 0 0 1 2-2zM8 11V8a4 4 0 0 1 7.5-2',&#10;                    t: 'Revisi sesudah terbit: minta admin',&#10;                    d: 'Membuka kunci jadwal wewenang admin. Korlas tidak bisa mencairkan jadwal yang sudah dikunci atau terbit.',&#10;                    g: 'Sampaikan ke admin',&#10;                },&#10;                {&#10;                    d: 'M7 2v3M17 2v3M3 9h18M5 5h14a2 2 0 0 1 2 2v12a2 2 0 0 1-2 2H5a2 2 0 0 1-2-2V7a2 2 0 0 1 2-2zM9 14l6 6M15 14l-6 6',&#10;                    t: 'Hari libur sekolah wewenang admin',&#10;                    d: 'Korlas bisa menandai libur pada jadwal kelasnya sendiri. Hari libur yang berlaku untuk semua kelas ditambahkan admin.',&#10;                    g: 'Berlaku sekolah',&#10;                },&#10;            ].map((c, idx) =&gt; (&#10;                &lt;Box&#10;                    key={idx}&#10;                    style={{&#10;                        flex: 1,&#10;                        height: '100%',&#10;                        background: '#FFFFFF',&#10;                        borderRadius: 16,&#10;                        boxShadow: '0 4px 20px rgba(0,0,0,0.08)',&#10;                        padding: 24,&#10;                        borderTop: '8px solid #AFC440',&#10;                    }}&#10;                &gt;&#10;                    &lt;Box&#10;                        style={{&#10;                            width: 60,&#10;                            height: 60,&#10;                            borderRadius: 30,&#10;                            background: 'rgba(81,39,124,0.10)',&#10;                            justifyContent: 'center',&#10;                            alignItems: 'center',&#10;                        }}&#10;                    &gt;&#10;                        &lt;svg width={30} height={30} viewBox='0 0 24 24' xmlns=&quot;http://www.w3.org/2000/svg&quot;&gt;&#10;                            &lt;path&#10;                                fill='none'&#10;                                stroke='#51277C'&#10;                                strokeWidth='2'&#10;                                strokeLinecap='round'&#10;                                strokeLinejoin='round'&#10;                                d={c.d}&#10;                            /&gt;&#10;                        &lt;/svg&gt;&#10;                    &lt;/Box&gt;&#10;&#10;                    &lt;Text&#10;                        style={{&#10;                            marginTop: 16,&#10;                            fontSize: 23,&#10;                            fontWeight: 'bold',&#10;                            color: '#51277C',&#10;                            fontFamily: 'Trebuchet MS',&#10;                            lineHeight: 1.32,&#10;                        }}&#10;                    &gt;&#10;                        {c.t}&#10;                    &lt;/Text&gt;&#10;&#10;                    &lt;Box style={{ marginTop: 12, width: 44, height: 3, borderRadius: 2, background: '#AFC440' }} /&gt;&#10;&#10;                    &lt;Text&#10;                        style={{&#10;                            marginTop: 12,&#10;                            fontSize: 17,&#10;                            color: '#6B6478',&#10;                            fontFamily: 'Verdana',&#10;                            lineHeight: 1.5,&#10;                        }}&#10;                    &gt;&#10;                        {c.d}&#10;                    &lt;/Text&gt;&#10;&#10;                    &lt;Box style={{ marginTop: 'auto' }}&gt;&#10;                        &lt;Text&#10;                            style={{&#10;                                fontSize: 16,&#10;                                color: '#51277C',&#10;                                fontFamily: 'Verdana',&#10;                                fontWeight: 'bold',&#10;                            }}&#10;                        &gt;&#10;                            {c.g}&#10;                        &lt;/Text&gt;&#10;                    &lt;/Box&gt;&#10;                &lt;/Box&gt;&#10;            ))}&#10;        &lt;/Box&gt;&#10;&#10;        {/* simpulan */}&#10;        &lt;Box&#10;            style={{&#10;                marginTop: 14,&#10;                height: 46,&#10;                background: '#51277C',&#10;                borderRadius: 14,&#10;                justifyContent: 'center',&#10;                alignItems: 'center',&#10;            }}&#10;        &gt;&#10;            &lt;Text&#10;                style={{&#10;                    fontSize: 19,&#10;                    color: '#FFFFFF',&#10;                    fontFamily: 'Verdana',&#10;                    fontWeight: 'bold',&#10;                }}&#10;            &gt;&#10;                Intinya: susun, tentukan petugas, kunci, lalu terbitkan.&#10;            &lt;/Text&gt;&#10;        &lt;/Box&gt;&#10;    &lt;/Box&gt;&#10;&#10;    {/* ── C · bilah kaki ── */}&#10;    &lt;Box&#10;        style={{&#10;            height: 40,&#10;            flexDirection: 'row',&#10;            alignItems: 'center',&#10;            justifyContent: 'space-between',&#10;        }}&#10;    &gt;&#10;        &lt;Text style={{ fontSize: 14, color: '#6B6478', fontFamily: 'Verdana' }}&gt;&#10;            Pizza Snack Play · Panduan Korlas &amp;amp; Admin&#10;        &lt;/Text&gt;&#10;        &lt;Text style={{ fontSize: 14, color: '#6B6478', fontFamily: 'Verdana' }}&gt;15 / 16&lt;/Text&gt;&#10;    &lt;/Box&gt;&#10;&lt;/Slide&gt;&#10;"/>
+        <p:cNvGrpSpPr/>
+        <p:nvPr/>
+      </p:nvGrpSpPr>
+      <p:grpSpPr>
+        <a:xfrm>
+          <a:off x="0" y="0"/>
+          <a:ext cx="0" cy="0"/>
+          <a:chOff x="0" y="0"/>
+          <a:chExt cx="0" cy="0"/>
+        </a:xfrm>
+      </p:grpSpPr>
+      <p:sp>
+        <p:nvSpPr>
+          <p:cNvPr id="103" name=""/>
+          <p:cNvSpPr/>
+          <p:nvPr/>
+        </p:nvSpPr>
+        <p:spPr>
+          <a:xfrm rot="0" flipH="0" flipV="0">
+            <a:off x="0" y="0"/>
+            <a:ext cx="12192000" cy="6858000"/>
+          </a:xfrm>
+          <a:prstGeom prst="rect">
+            <a:avLst/>
+          </a:prstGeom>
+          <a:solidFill>
+            <a:srgbClr val="FAF7F2"/>
+          </a:solidFill>
+          <a:ln/>
+        </p:spPr>
+        <p:txBody>
+          <a:bodyPr/>
+          <a:p/>
+        </p:txBody>
+      </p:sp>
+      <p:sp>
+        <p:nvSpPr>
+          <p:cNvPr id="104" name="" descr="{&quot;isTemplate&quot;:true,&quot;type&quot;:&quot;text&quot;}"/>
+          <p:cNvSpPr txBox="1"/>
+          <p:nvPr/>
+        </p:nvSpPr>
+        <p:spPr>
+          <a:xfrm rot="0" flipH="0" flipV="0">
+            <a:off x="609600" y="381000"/>
+            <a:ext cx="10972800" cy="514350"/>
+          </a:xfrm>
+          <a:prstGeom prst="rect"/>
+        </p:spPr>
+        <p:txBody>
+          <a:bodyPr wrap="none" lIns="0" tIns="0" rIns="0" bIns="0"/>
+          <a:p>
+            <a:pPr>
+              <a:lnSpc>
+                <a:spcPct val="130000"/>
+              </a:lnSpc>
+            </a:pPr>
+            <a:r>
+              <a:rPr lang="en-US" sz="2550" b="1">
+                <a:solidFill>
+                  <a:srgbClr val="51277C"/>
+                </a:solidFill>
+                <a:latin typeface="Trebuchet MS"/>
+                <a:ea typeface="Trebuchet MS"/>
+              </a:rPr>
               <a:t>Empat hal yang perlu diingat</a:t>
             </a:r>
             <a:endParaRPr/>
@@ -4650,7 +5503,7 @@
       </p:sp>
       <p:sp>
         <p:nvSpPr>
-          <p:cNvPr id="89" name=""/>
+          <p:cNvPr id="105" name=""/>
           <p:cNvSpPr/>
           <p:nvPr/>
         </p:nvSpPr>
@@ -4676,7 +5529,7 @@
       </p:sp>
       <p:sp>
         <p:nvSpPr>
-          <p:cNvPr id="90" name=""/>
+          <p:cNvPr id="106" name=""/>
           <p:cNvSpPr/>
           <p:nvPr/>
         </p:nvSpPr>
@@ -4709,7 +5562,7 @@
       </p:sp>
       <p:sp>
         <p:nvSpPr>
-          <p:cNvPr id="91" name=""/>
+          <p:cNvPr id="107" name=""/>
           <p:cNvSpPr/>
           <p:nvPr/>
         </p:nvSpPr>
@@ -4766,7 +5619,7 @@
       </p:sp>
       <p:sp>
         <p:nvSpPr>
-          <p:cNvPr id="92" name=""/>
+          <p:cNvPr id="108" name=""/>
           <p:cNvSpPr/>
           <p:nvPr/>
         </p:nvSpPr>
@@ -4794,7 +5647,7 @@
       </p:sp>
       <p:pic>
         <p:nvPicPr>
-          <p:cNvPr id="93" name=""/>
+          <p:cNvPr id="109" name=""/>
           <p:cNvPicPr>
             <a:picLocks noChangeAspect="1"/>
           </p:cNvPicPr>
@@ -4825,7 +5678,7 @@
       </p:pic>
       <p:sp>
         <p:nvSpPr>
-          <p:cNvPr id="94" name="" descr="{&quot;isTemplate&quot;:true,&quot;type&quot;:&quot;text&quot;}"/>
+          <p:cNvPr id="110" name="" descr="{&quot;isTemplate&quot;:true,&quot;type&quot;:&quot;text&quot;}"/>
           <p:cNvSpPr txBox="1"/>
           <p:nvPr/>
         </p:nvSpPr>
@@ -4862,7 +5715,7 @@
       </p:sp>
       <p:sp>
         <p:nvSpPr>
-          <p:cNvPr id="95" name=""/>
+          <p:cNvPr id="111" name=""/>
           <p:cNvSpPr/>
           <p:nvPr/>
         </p:nvSpPr>
@@ -4888,14 +5741,14 @@
       </p:sp>
       <p:sp>
         <p:nvSpPr>
-          <p:cNvPr id="96" name="" descr="{&quot;isTemplate&quot;:true,&quot;type&quot;:&quot;text&quot;}"/>
+          <p:cNvPr id="112" name="" descr="{&quot;isTemplate&quot;:true,&quot;type&quot;:&quot;text&quot;}"/>
           <p:cNvSpPr txBox="1"/>
           <p:nvPr/>
         </p:nvSpPr>
         <p:spPr>
           <a:xfrm rot="0" flipH="0" flipV="0">
             <a:off x="838200" y="3219450"/>
-            <a:ext cx="2162175" cy="1752600"/>
+            <a:ext cx="2162175" cy="2333625"/>
           </a:xfrm>
           <a:prstGeom prst="rect"/>
         </p:spPr>
@@ -4917,15 +5770,15 @@
                 <a:latin typeface="Verdana"/>
                 <a:ea typeface="Verdana"/>
               </a:rPr>
-              <a:t>Bila tanggalnya ingin direbut orang tua, biarkan petugas kosong sebelum dipublikasikan. Setelah terbit, tidak bisa diubah lagi.</a:t>
-            </a:r>
-            <a:endParaRPr/>
-          </a:p>
-        </p:txBody>
-      </p:sp>
-      <p:sp>
-        <p:nvSpPr>
-          <p:cNvPr id="97" name="" descr="{&quot;isTemplate&quot;:true,&quot;type&quot;:&quot;text&quot;}"/>
+              <a:t>Bila tanggalnya ingin direbut orang tua, biarkan petugas kosong sebelum dipublikasikan. Setelah terbit, yang masih bisa diisi hanya petugas — menu &amp; catatan tetap terkunci.</a:t>
+            </a:r>
+            <a:endParaRPr/>
+          </a:p>
+        </p:txBody>
+      </p:sp>
+      <p:sp>
+        <p:nvSpPr>
+          <p:cNvPr id="113" name="" descr="{&quot;isTemplate&quot;:true,&quot;type&quot;:&quot;text&quot;}"/>
           <p:cNvSpPr txBox="1"/>
           <p:nvPr/>
         </p:nvSpPr>
@@ -4960,7 +5813,7 @@
       </p:sp>
       <p:sp>
         <p:nvSpPr>
-          <p:cNvPr id="98" name=""/>
+          <p:cNvPr id="114" name=""/>
           <p:cNvSpPr/>
           <p:nvPr/>
         </p:nvSpPr>
@@ -4993,7 +5846,7 @@
       </p:sp>
       <p:sp>
         <p:nvSpPr>
-          <p:cNvPr id="99" name=""/>
+          <p:cNvPr id="115" name=""/>
           <p:cNvSpPr/>
           <p:nvPr/>
         </p:nvSpPr>
@@ -5050,7 +5903,7 @@
       </p:sp>
       <p:sp>
         <p:nvSpPr>
-          <p:cNvPr id="100" name=""/>
+          <p:cNvPr id="116" name=""/>
           <p:cNvSpPr/>
           <p:nvPr/>
         </p:nvSpPr>
@@ -5078,7 +5931,7 @@
       </p:sp>
       <p:pic>
         <p:nvPicPr>
-          <p:cNvPr id="101" name=""/>
+          <p:cNvPr id="117" name=""/>
           <p:cNvPicPr>
             <a:picLocks noChangeAspect="1"/>
           </p:cNvPicPr>
@@ -5109,7 +5962,7 @@
       </p:pic>
       <p:sp>
         <p:nvSpPr>
-          <p:cNvPr id="102" name="" descr="{&quot;isTemplate&quot;:true,&quot;type&quot;:&quot;text&quot;}"/>
+          <p:cNvPr id="118" name="" descr="{&quot;isTemplate&quot;:true,&quot;type&quot;:&quot;text&quot;}"/>
           <p:cNvSpPr txBox="1"/>
           <p:nvPr/>
         </p:nvSpPr>
@@ -5146,7 +5999,7 @@
       </p:sp>
       <p:sp>
         <p:nvSpPr>
-          <p:cNvPr id="103" name=""/>
+          <p:cNvPr id="119" name=""/>
           <p:cNvSpPr/>
           <p:nvPr/>
         </p:nvSpPr>
@@ -5172,7 +6025,7 @@
       </p:sp>
       <p:sp>
         <p:nvSpPr>
-          <p:cNvPr id="104" name="" descr="{&quot;isTemplate&quot;:true,&quot;type&quot;:&quot;text&quot;}"/>
+          <p:cNvPr id="120" name="" descr="{&quot;isTemplate&quot;:true,&quot;type&quot;:&quot;text&quot;}"/>
           <p:cNvSpPr txBox="1"/>
           <p:nvPr/>
         </p:nvSpPr>
@@ -5209,7 +6062,7 @@
       </p:sp>
       <p:sp>
         <p:nvSpPr>
-          <p:cNvPr id="105" name="" descr="{&quot;isTemplate&quot;:true,&quot;type&quot;:&quot;text&quot;}"/>
+          <p:cNvPr id="121" name="" descr="{&quot;isTemplate&quot;:true,&quot;type&quot;:&quot;text&quot;}"/>
           <p:cNvSpPr txBox="1"/>
           <p:nvPr/>
         </p:nvSpPr>
@@ -5244,7 +6097,7 @@
       </p:sp>
       <p:sp>
         <p:nvSpPr>
-          <p:cNvPr id="106" name=""/>
+          <p:cNvPr id="122" name=""/>
           <p:cNvSpPr/>
           <p:nvPr/>
         </p:nvSpPr>
@@ -5277,7 +6130,7 @@
       </p:sp>
       <p:sp>
         <p:nvSpPr>
-          <p:cNvPr id="107" name=""/>
+          <p:cNvPr id="123" name=""/>
           <p:cNvSpPr/>
           <p:nvPr/>
         </p:nvSpPr>
@@ -5334,7 +6187,7 @@
       </p:sp>
       <p:sp>
         <p:nvSpPr>
-          <p:cNvPr id="108" name=""/>
+          <p:cNvPr id="124" name=""/>
           <p:cNvSpPr/>
           <p:nvPr/>
         </p:nvSpPr>
@@ -5362,7 +6215,7 @@
       </p:sp>
       <p:pic>
         <p:nvPicPr>
-          <p:cNvPr id="109" name=""/>
+          <p:cNvPr id="125" name=""/>
           <p:cNvPicPr>
             <a:picLocks noChangeAspect="1"/>
           </p:cNvPicPr>
@@ -5393,7 +6246,7 @@
       </p:pic>
       <p:sp>
         <p:nvSpPr>
-          <p:cNvPr id="110" name="" descr="{&quot;isTemplate&quot;:true,&quot;type&quot;:&quot;text&quot;}"/>
+          <p:cNvPr id="126" name="" descr="{&quot;isTemplate&quot;:true,&quot;type&quot;:&quot;text&quot;}"/>
           <p:cNvSpPr txBox="1"/>
           <p:nvPr/>
         </p:nvSpPr>
@@ -5430,7 +6283,7 @@
       </p:sp>
       <p:sp>
         <p:nvSpPr>
-          <p:cNvPr id="111" name=""/>
+          <p:cNvPr id="127" name=""/>
           <p:cNvSpPr/>
           <p:nvPr/>
         </p:nvSpPr>
@@ -5456,7 +6309,7 @@
       </p:sp>
       <p:sp>
         <p:nvSpPr>
-          <p:cNvPr id="112" name="" descr="{&quot;isTemplate&quot;:true,&quot;type&quot;:&quot;text&quot;}"/>
+          <p:cNvPr id="128" name="" descr="{&quot;isTemplate&quot;:true,&quot;type&quot;:&quot;text&quot;}"/>
           <p:cNvSpPr txBox="1"/>
           <p:nvPr/>
         </p:nvSpPr>
@@ -5493,7 +6346,7 @@
       </p:sp>
       <p:sp>
         <p:nvSpPr>
-          <p:cNvPr id="113" name="" descr="{&quot;isTemplate&quot;:true,&quot;type&quot;:&quot;text&quot;}"/>
+          <p:cNvPr id="129" name="" descr="{&quot;isTemplate&quot;:true,&quot;type&quot;:&quot;text&quot;}"/>
           <p:cNvSpPr txBox="1"/>
           <p:nvPr/>
         </p:nvSpPr>
@@ -5528,7 +6381,7 @@
       </p:sp>
       <p:sp>
         <p:nvSpPr>
-          <p:cNvPr id="114" name=""/>
+          <p:cNvPr id="130" name=""/>
           <p:cNvSpPr/>
           <p:nvPr/>
         </p:nvSpPr>
@@ -5561,7 +6414,7 @@
       </p:sp>
       <p:sp>
         <p:nvSpPr>
-          <p:cNvPr id="115" name=""/>
+          <p:cNvPr id="131" name=""/>
           <p:cNvSpPr/>
           <p:nvPr/>
         </p:nvSpPr>
@@ -5618,7 +6471,7 @@
       </p:sp>
       <p:sp>
         <p:nvSpPr>
-          <p:cNvPr id="116" name=""/>
+          <p:cNvPr id="132" name=""/>
           <p:cNvSpPr/>
           <p:nvPr/>
         </p:nvSpPr>
@@ -5646,7 +6499,7 @@
       </p:sp>
       <p:pic>
         <p:nvPicPr>
-          <p:cNvPr id="117" name=""/>
+          <p:cNvPr id="133" name=""/>
           <p:cNvPicPr>
             <a:picLocks noChangeAspect="1"/>
           </p:cNvPicPr>
@@ -5677,7 +6530,7 @@
       </p:pic>
       <p:sp>
         <p:nvSpPr>
-          <p:cNvPr id="118" name="" descr="{&quot;isTemplate&quot;:true,&quot;type&quot;:&quot;text&quot;}"/>
+          <p:cNvPr id="134" name="" descr="{&quot;isTemplate&quot;:true,&quot;type&quot;:&quot;text&quot;}"/>
           <p:cNvSpPr txBox="1"/>
           <p:nvPr/>
         </p:nvSpPr>
@@ -5714,7 +6567,7 @@
       </p:sp>
       <p:sp>
         <p:nvSpPr>
-          <p:cNvPr id="119" name=""/>
+          <p:cNvPr id="135" name=""/>
           <p:cNvSpPr/>
           <p:nvPr/>
         </p:nvSpPr>
@@ -5740,7 +6593,7 @@
       </p:sp>
       <p:sp>
         <p:nvSpPr>
-          <p:cNvPr id="120" name="" descr="{&quot;isTemplate&quot;:true,&quot;type&quot;:&quot;text&quot;}"/>
+          <p:cNvPr id="136" name="" descr="{&quot;isTemplate&quot;:true,&quot;type&quot;:&quot;text&quot;}"/>
           <p:cNvSpPr txBox="1"/>
           <p:nvPr/>
         </p:nvSpPr>
@@ -5777,7 +6630,7 @@
       </p:sp>
       <p:sp>
         <p:nvSpPr>
-          <p:cNvPr id="121" name="" descr="{&quot;isTemplate&quot;:true,&quot;type&quot;:&quot;text&quot;}"/>
+          <p:cNvPr id="137" name="" descr="{&quot;isTemplate&quot;:true,&quot;type&quot;:&quot;text&quot;}"/>
           <p:cNvSpPr txBox="1"/>
           <p:nvPr/>
         </p:nvSpPr>
@@ -5812,7 +6665,7 @@
       </p:sp>
       <p:sp>
         <p:nvSpPr>
-          <p:cNvPr id="122" name=""/>
+          <p:cNvPr id="138" name=""/>
           <p:cNvSpPr/>
           <p:nvPr/>
         </p:nvSpPr>
@@ -5838,7 +6691,7 @@
       </p:sp>
       <p:sp>
         <p:nvSpPr>
-          <p:cNvPr id="123" name="" descr="{&quot;isTemplate&quot;:true,&quot;type&quot;:&quot;text&quot;}"/>
+          <p:cNvPr id="139" name="" descr="{&quot;isTemplate&quot;:true,&quot;type&quot;:&quot;text&quot;}"/>
           <p:cNvSpPr txBox="1"/>
           <p:nvPr/>
         </p:nvSpPr>
@@ -5873,7 +6726,7 @@
       </p:sp>
       <p:sp>
         <p:nvSpPr>
-          <p:cNvPr id="124" name="" descr="{&quot;isTemplate&quot;:true,&quot;type&quot;:&quot;text&quot;}"/>
+          <p:cNvPr id="140" name="" descr="{&quot;isTemplate&quot;:true,&quot;type&quot;:&quot;text&quot;}"/>
           <p:cNvSpPr txBox="1"/>
           <p:nvPr/>
         </p:nvSpPr>
@@ -5908,7 +6761,7 @@
       </p:sp>
       <p:sp>
         <p:nvSpPr>
-          <p:cNvPr id="125" name="" descr="{&quot;isTemplate&quot;:true,&quot;type&quot;:&quot;text&quot;}"/>
+          <p:cNvPr id="141" name="" descr="{&quot;isTemplate&quot;:true,&quot;type&quot;:&quot;text&quot;}"/>
           <p:cNvSpPr txBox="1"/>
           <p:nvPr/>
         </p:nvSpPr>
@@ -5935,7 +6788,7 @@
                 <a:latin typeface="Verdana"/>
                 <a:ea typeface="Verdana"/>
               </a:rPr>
-              <a:t>14 / 15</a:t>
+              <a:t>15 / 16</a:t>
             </a:r>
             <a:endParaRPr/>
           </a:p>
@@ -5946,12 +6799,12 @@
 </p:sld>
 </file>
 
-<file path=ppt/slides/slide15.xml><?xml version="1.0" encoding="utf-8"?>
+<file path=ppt/slides/slide16.xml><?xml version="1.0" encoding="utf-8"?>
 <p:sld xmlns:p="http://schemas.openxmlformats.org/presentationml/2006/main" xmlns:a="http://schemas.openxmlformats.org/drawingml/2006/main" xmlns:asvg="http://schemas.microsoft.com/office/drawing/2016/SVG/main" xmlns:r="http://schemas.openxmlformats.org/officeDocument/2006/relationships" xmlns:mc="http://schemas.openxmlformats.org/markup-compatibility/2006" mc:Ignorable="asvg">
   <p:cSld>
     <p:spTree>
       <p:nvGrpSpPr>
-        <p:cNvPr id="126" name="" descr="&lt;Slide&#10;    style={{&#10;        width: '1280px',&#10;        height: '720px',&#10;        background: '#FAF7F2',&#10;        justifyContent: 'center',&#10;        alignItems: 'center',&#10;        position: 'relative',&#10;        overflow: 'hidden',&#10;    }}&#10;&gt;&#10;    &lt;Box&#10;        style={{&#10;            position: 'absolute',&#10;            top: 90,&#10;            width: 520,&#10;            height: 520,&#10;            borderRadius: 260,&#10;            background: 'linear-gradient(135deg, #51277C 0%, #7A45A8 100%)',&#10;            opacity: 0.10,&#10;        }}&#10;    /&gt;&#10;    &lt;Box&#10;        style={{&#10;            position: 'absolute',&#10;            bottom: -80,&#10;            left: -80,&#10;            width: 320,&#10;            height: 320,&#10;            borderRadius: 160,&#10;            background: 'linear-gradient(135deg, #AFC440 0%, #F3B26C 100%)',&#10;            opacity: 0.18,&#10;        }}&#10;    /&gt;&#10;&#10;    &lt;Box style={{ position: 'relative', zIndex: 1, alignItems: 'center', paddingLeft: 72, paddingRight: 72 }}&gt;&#10;        &lt;Image src=&quot;assets/app_logo.png&quot; style={{ width: 200, height: 194, objectFit: 'contain' }} /&gt;&#10;&#10;        &lt;Text&#10;            style={{&#10;                marginTop: 26,&#10;                fontSize: 60,&#10;                fontWeight: 'bold',&#10;                color: '#51277C',&#10;                fontFamily: 'Trebuchet MS',&#10;                lineHeight: 1.15,&#10;            }}&#10;        &gt;&#10;            Terima kasih&#10;        &lt;/Text&gt;&#10;&#10;        &lt;Box style={{ marginTop: 18, width: 96, height: 7, borderRadius: 4, background: '#AFC440' }} /&gt;&#10;&#10;        &lt;Text&#10;            style={{&#10;                marginTop: 22,&#10;                fontSize: 22,&#10;                color: '#2A2333',&#10;                fontFamily: 'Verdana',&#10;                lineHeight: 1.5,&#10;                textAlign: 'center',&#10;            }}&#10;        &gt;&#10;            Coba tempel jadwal dari teks sekolah minggu ini.&#10;        &lt;/Text&gt;&#10;&#10;        &lt;Text&#10;            style={{&#10;                marginTop: 14,&#10;                fontSize: 19,&#10;                color: '#6B6478',&#10;                fontFamily: 'Verdana',&#10;                lineHeight: 1.5,&#10;                textAlign: 'center',&#10;            }}&#10;        &gt;&#10;            Ada yang tidak beres? Sampaikan kepada admin sekolah.&#10;        &lt;/Text&gt;&#10;&#10;        &lt;Box&#10;            style={{&#10;                marginTop: 26,&#10;                flexDirection: 'row',&#10;                alignItems: 'center',&#10;                gap: 12,&#10;                background: '#F3B26C',&#10;                borderRadius: 999,&#10;                paddingTop: 13,&#10;                paddingBottom: 13,&#10;                paddingLeft: 28,&#10;                paddingRight: 30,&#10;            }}&#10;        &gt;&#10;            &lt;svg width={22} height={22} viewBox=&quot;0 0 576 512&quot; xmlns=&quot;http://www.w3.org/2000/svg&quot;&gt;&lt;path fill=&quot;#51277C&quot; d=&quot;M316.9 18C311.6 7 300.4 0 288.1 0s-23.4 7-28.8 18L195 150.3 51.4 171.5c-12 1.8-22 10.2-25.7 21.7s-.7 24.2 7.9 32.7L137.8 329 113.2 474.7c-2 12 3 24.2 12.9 31.3s23 8 33.8 2.3l128.3-68.5 128.3 68.5c10.8 5.7 23.9 4.9 33.8-2.3s14.9-19.3 12.9-31.3L438.5 329 542.7 225.9c8.6-8.5 11.7-21.2 7.9-32.7s-13.7-19.9-25.7-21.7L381.2 150.3 316.9 18z&quot; /&gt;&lt;/svg&gt;&#10;            &lt;Text style={{ fontSize: 19, color: '#51277C', fontFamily: 'Trebuchet MS', fontWeight: 'bold' }}&gt;&#10;                Pizza Snack Play&#10;            &lt;/Text&gt;&#10;        &lt;/Box&gt;&#10;    &lt;/Box&gt;&#10;&lt;/Slide&gt;&#10;"/>
+        <p:cNvPr id="142" name="" descr="&lt;Slide&#10;    style={{&#10;        width: '1280px',&#10;        height: '720px',&#10;        background: '#FAF7F2',&#10;        justifyContent: 'center',&#10;        alignItems: 'center',&#10;        position: 'relative',&#10;        overflow: 'hidden',&#10;    }}&#10;&gt;&#10;    &lt;Box&#10;        style={{&#10;            position: 'absolute',&#10;            top: 90,&#10;            width: 520,&#10;            height: 520,&#10;            borderRadius: 260,&#10;            background: 'linear-gradient(135deg, #51277C 0%, #7A45A8 100%)',&#10;            opacity: 0.10,&#10;        }}&#10;    /&gt;&#10;    &lt;Box&#10;        style={{&#10;            position: 'absolute',&#10;            bottom: -80,&#10;            left: -80,&#10;            width: 320,&#10;            height: 320,&#10;            borderRadius: 160,&#10;            background: 'linear-gradient(135deg, #AFC440 0%, #F3B26C 100%)',&#10;            opacity: 0.18,&#10;        }}&#10;    /&gt;&#10;&#10;    &lt;Box style={{ position: 'relative', zIndex: 1, alignItems: 'center', paddingLeft: 72, paddingRight: 72 }}&gt;&#10;        &lt;Image src=&quot;assets/app_logo.png&quot; style={{ width: 200, height: 194, objectFit: 'contain' }} /&gt;&#10;&#10;        &lt;Text&#10;            style={{&#10;                marginTop: 26,&#10;                fontSize: 60,&#10;                fontWeight: 'bold',&#10;                color: '#51277C',&#10;                fontFamily: 'Trebuchet MS',&#10;                lineHeight: 1.15,&#10;            }}&#10;        &gt;&#10;            Terima kasih&#10;        &lt;/Text&gt;&#10;&#10;        &lt;Box style={{ marginTop: 18, width: 96, height: 7, borderRadius: 4, background: '#AFC440' }} /&gt;&#10;&#10;        &lt;Text&#10;            style={{&#10;                marginTop: 22,&#10;                fontSize: 22,&#10;                color: '#2A2333',&#10;                fontFamily: 'Verdana',&#10;                lineHeight: 1.5,&#10;                textAlign: 'center',&#10;            }}&#10;        &gt;&#10;            Coba tempel jadwal dari teks sekolah minggu ini, lalu periksa Laporannya.&#10;        &lt;/Text&gt;&#10;&#10;        &lt;Text&#10;            style={{&#10;                marginTop: 14,&#10;                fontSize: 19,&#10;                color: '#6B6478',&#10;                fontFamily: 'Verdana',&#10;                lineHeight: 1.5,&#10;                textAlign: 'center',&#10;            }}&#10;        &gt;&#10;            Ada yang tidak beres? Sampaikan kepada admin sekolah.&#10;        &lt;/Text&gt;&#10;&#10;        &lt;Box&#10;            style={{&#10;                marginTop: 26,&#10;                flexDirection: 'row',&#10;                alignItems: 'center',&#10;                gap: 12,&#10;                background: '#F3B26C',&#10;                borderRadius: 999,&#10;                paddingTop: 13,&#10;                paddingBottom: 13,&#10;                paddingLeft: 28,&#10;                paddingRight: 30,&#10;            }}&#10;        &gt;&#10;            &lt;svg width={22} height={22} viewBox=&quot;0 0 576 512&quot; xmlns=&quot;http://www.w3.org/2000/svg&quot;&gt;&lt;path fill=&quot;#51277C&quot; d=&quot;M316.9 18C311.6 7 300.4 0 288.1 0s-23.4 7-28.8 18L195 150.3 51.4 171.5c-12 1.8-22 10.2-25.7 21.7s-.7 24.2 7.9 32.7L137.8 329 113.2 474.7c-2 12 3 24.2 12.9 31.3s23 8 33.8 2.3l128.3-68.5 128.3 68.5c10.8 5.7 23.9 4.9 33.8-2.3s14.9-19.3 12.9-31.3L438.5 329 542.7 225.9c8.6-8.5 11.7-21.2 7.9-32.7s-13.7-19.9-25.7-21.7L381.2 150.3 316.9 18z&quot; /&gt;&lt;/svg&gt;&#10;            &lt;Text style={{ fontSize: 19, color: '#51277C', fontFamily: 'Trebuchet MS', fontWeight: 'bold' }}&gt;&#10;                Pizza Snack Play&#10;            &lt;/Text&gt;&#10;        &lt;/Box&gt;&#10;    &lt;/Box&gt;&#10;&lt;/Slide&gt;&#10;"/>
         <p:cNvGrpSpPr/>
         <p:nvPr/>
       </p:nvGrpSpPr>
@@ -5965,7 +6818,7 @@
       </p:grpSpPr>
       <p:sp>
         <p:nvSpPr>
-          <p:cNvPr id="127" name=""/>
+          <p:cNvPr id="143" name=""/>
           <p:cNvSpPr/>
           <p:nvPr/>
         </p:nvSpPr>
@@ -5989,7 +6842,7 @@
       </p:sp>
       <p:sp>
         <p:nvSpPr>
-          <p:cNvPr id="128" name=""/>
+          <p:cNvPr id="144" name=""/>
           <p:cNvSpPr/>
           <p:nvPr/>
         </p:nvSpPr>
@@ -6027,7 +6880,7 @@
       </p:sp>
       <p:sp>
         <p:nvSpPr>
-          <p:cNvPr id="129" name=""/>
+          <p:cNvPr id="145" name=""/>
           <p:cNvSpPr/>
           <p:nvPr/>
         </p:nvSpPr>
@@ -6091,7 +6944,7 @@
       </p:sp>
       <p:pic>
         <p:nvPicPr>
-          <p:cNvPr id="130" name=""/>
+          <p:cNvPr id="146" name=""/>
           <p:cNvPicPr>
             <a:picLocks noChangeAspect="1"/>
           </p:cNvPicPr>
@@ -6106,7 +6959,7 @@
         </p:blipFill>
         <p:spPr>
           <a:xfrm rot="0" flipH="0" flipV="0">
-            <a:off x="5153025" y="981075"/>
+            <a:off x="5143500" y="981075"/>
             <a:ext cx="1905000" cy="1847850"/>
           </a:xfrm>
           <a:prstGeom prst="rect">
@@ -6117,13 +6970,13 @@
       </p:pic>
       <p:sp>
         <p:nvSpPr>
-          <p:cNvPr id="131" name="" descr="{&quot;isTemplate&quot;:true,&quot;type&quot;:&quot;text&quot;}"/>
+          <p:cNvPr id="147" name="" descr="{&quot;isTemplate&quot;:true,&quot;type&quot;:&quot;text&quot;}"/>
           <p:cNvSpPr txBox="1"/>
           <p:nvPr/>
         </p:nvSpPr>
         <p:spPr>
           <a:xfrm rot="0" flipH="0" flipV="0">
-            <a:off x="4429125" y="3076575"/>
+            <a:off x="4419600" y="3076575"/>
             <a:ext cx="3352800" cy="790575"/>
           </a:xfrm>
           <a:prstGeom prst="rect"/>
@@ -6152,13 +7005,13 @@
       </p:sp>
       <p:sp>
         <p:nvSpPr>
-          <p:cNvPr id="132" name=""/>
+          <p:cNvPr id="148" name=""/>
           <p:cNvSpPr/>
           <p:nvPr/>
         </p:nvSpPr>
         <p:spPr>
           <a:xfrm rot="0" flipH="0" flipV="0">
-            <a:off x="5648325" y="4038600"/>
+            <a:off x="5638800" y="4038600"/>
             <a:ext cx="914400" cy="66675"/>
           </a:xfrm>
           <a:prstGeom prst="roundRect">
@@ -6178,14 +7031,14 @@
       </p:sp>
       <p:sp>
         <p:nvSpPr>
-          <p:cNvPr id="133" name="" descr="{&quot;isTemplate&quot;:true,&quot;type&quot;:&quot;text&quot;}"/>
+          <p:cNvPr id="149" name="" descr="{&quot;isTemplate&quot;:true,&quot;type&quot;:&quot;text&quot;}"/>
           <p:cNvSpPr txBox="1"/>
           <p:nvPr/>
         </p:nvSpPr>
         <p:spPr>
           <a:xfrm rot="0" flipH="0" flipV="0">
-            <a:off x="3495675" y="4314825"/>
-            <a:ext cx="5210175" cy="381000"/>
+            <a:off x="2162175" y="4314825"/>
+            <a:ext cx="7867650" cy="381000"/>
           </a:xfrm>
           <a:prstGeom prst="rect"/>
         </p:spPr>
@@ -6205,15 +7058,15 @@
                 <a:latin typeface="Verdana"/>
                 <a:ea typeface="Verdana"/>
               </a:rPr>
-              <a:t>Coba tempel jadwal dari teks sekolah minggu ini.</a:t>
-            </a:r>
-            <a:endParaRPr/>
-          </a:p>
-        </p:txBody>
-      </p:sp>
-      <p:sp>
-        <p:nvSpPr>
-          <p:cNvPr id="134" name="" descr="{&quot;isTemplate&quot;:true,&quot;type&quot;:&quot;text&quot;}"/>
+              <a:t>Coba tempel jadwal dari teks sekolah minggu ini, lalu periksa Laporannya.</a:t>
+            </a:r>
+            <a:endParaRPr/>
+          </a:p>
+        </p:txBody>
+      </p:sp>
+      <p:sp>
+        <p:nvSpPr>
+          <p:cNvPr id="150" name="" descr="{&quot;isTemplate&quot;:true,&quot;type&quot;:&quot;text&quot;}"/>
           <p:cNvSpPr txBox="1"/>
           <p:nvPr/>
         </p:nvSpPr>
@@ -6248,7 +7101,7 @@
       </p:sp>
       <p:sp>
         <p:nvSpPr>
-          <p:cNvPr id="135" name=""/>
+          <p:cNvPr id="151" name=""/>
           <p:cNvSpPr/>
           <p:nvPr/>
         </p:nvSpPr>
@@ -6274,7 +7127,7 @@
       </p:sp>
       <p:pic>
         <p:nvPicPr>
-          <p:cNvPr id="136" name=""/>
+          <p:cNvPr id="152" name=""/>
           <p:cNvPicPr>
             <a:picLocks noChangeAspect="1"/>
           </p:cNvPicPr>
@@ -6305,7 +7158,7 @@
       </p:pic>
       <p:sp>
         <p:nvSpPr>
-          <p:cNvPr id="137" name="" descr="{&quot;isTemplate&quot;:true,&quot;type&quot;:&quot;text&quot;}"/>
+          <p:cNvPr id="153" name="" descr="{&quot;isTemplate&quot;:true,&quot;type&quot;:&quot;text&quot;}"/>
           <p:cNvSpPr txBox="1"/>
           <p:nvPr/>
         </p:nvSpPr>
@@ -6348,7 +7201,7 @@
   <p:cSld>
     <p:spTree>
       <p:nvGrpSpPr>
-        <p:cNvPr id="138" name="" descr="&lt;Slide&#13;&#10;    style={{&#13;&#10;        width: '1280px',&#13;&#10;        height: '720px',&#13;&#10;        background: '#FAF7F2',&#13;&#10;        paddingTop: 20,&#13;&#10;        paddingBottom: 20,&#13;&#10;        paddingLeft: 64,&#13;&#10;        paddingRight: 64,&#13;&#10;    }}&#13;&#10;&gt;&#13;&#10;    {/* ── A · blok judul ── */}&#13;&#10;    &lt;Box style={{ height: 110, justifyContent: 'center' }}&gt;&#13;&#10;        &lt;Text&#13;&#10;            style={{&#13;&#10;                fontSize: 34,&#13;&#10;                fontWeight: 'bold',&#13;&#10;                color: '#51277C',&#13;&#10;                fontFamily: 'Trebuchet MS',&#13;&#10;                lineHeight: 1.3,&#13;&#10;            }}&#13;&#10;        &gt;&#13;&#10;            Isi panduan ini&#13;&#10;        &lt;/Text&gt;&#13;&#10;        &lt;Box style={{ marginTop: 10, width: 72, height: 6, borderRadius: 3, background: '#51277C' }} /&gt;&#13;&#10;    &lt;/Box&gt;&#13;&#10;&#13;&#10;    {/* ── B · area konten ── */}&#13;&#10;    &lt;Box style={{ height: 530, flexDirection: 'row', gap: 28 }}&gt;&#13;&#10;        &lt;Box&#13;&#10;            style={{&#13;&#10;                width: '32%',&#13;&#10;                height: '100%',&#13;&#10;                background: 'linear-gradient(135deg, #51277C 0%, #7A45A8 100%)',&#13;&#10;                borderRadius: 18,&#13;&#10;                padding: 28,&#13;&#10;                justifyContent: 'space-between',&#13;&#10;            }}&#13;&#10;        &gt;&#13;&#10;            &lt;Box&gt;&#13;&#10;                &lt;Text&#13;&#10;                    style={{&#13;&#10;                        fontSize: 96,&#13;&#10;                        fontWeight: 'bold',&#13;&#10;                        color: '#FFFFFF',&#13;&#10;                        fontFamily: 'Trebuchet MS',&#13;&#10;                        lineHeight: 1,&#13;&#10;                    }}&#13;&#10;                &gt;&#13;&#10;                    4&#13;&#10;                &lt;/Text&gt;&#13;&#10;                &lt;Text&#13;&#10;                    style={{&#13;&#10;                        marginTop: 6,&#13;&#10;                        fontSize: 24,&#13;&#10;                        fontWeight: 'bold',&#13;&#10;                        color: '#F3B26C',&#13;&#10;                        fontFamily: 'Trebuchet MS',&#13;&#10;                    }}&#13;&#10;                &gt;&#13;&#10;                    bagian&#13;&#10;                &lt;/Text&gt;&#13;&#10;            &lt;/Box&gt;&#13;&#10;            &lt;Text&#13;&#10;                style={{&#13;&#10;                    fontSize: 17,&#13;&#10;                    color: 'rgba(255,255,255,0.88)',&#13;&#10;                    fontFamily: 'Verdana',&#13;&#10;                    lineHeight: 1.5,&#13;&#10;                }}&#13;&#10;            &gt;&#13;&#10;                Bagian 3 dan 4 yang dipakai setiap bulan, menjelang jadwal baru.&#13;&#10;            &lt;/Text&gt;&#13;&#10;        &lt;/Box&gt;&#13;&#10;&#13;&#10;        &lt;Box style={{ width: '68%', height: '100%', justifyContent: 'space-between' }}&gt;&#13;&#10;            {[&#13;&#10;                {&#13;&#10;                    n: '01',&#13;&#10;                    t: 'Peran Anda',&#13;&#10;                    d: 'Tiga tugas korlas, sesuai urutan mengerjakannya.',&#13;&#10;                    p: '4',&#13;&#10;                },&#13;&#10;                {&#13;&#10;                    n: '02',&#13;&#10;                    t: 'Akun &amp; wewenang',&#13;&#10;                    d: 'Apa yang boleh korlas, dan mana wewenang admin.',&#13;&#10;                    p: '6',&#13;&#10;                },&#13;&#10;                {&#13;&#10;                    n: '03',&#13;&#10;                    t: 'Menyusun jadwal',&#13;&#10;                    d: 'Isi menu, salin Sepekan, atau tempel teks sekolah.',&#13;&#10;                    p: '8–10',&#13;&#10;                },&#13;&#10;                {&#13;&#10;                    n: '04',&#13;&#10;                    t: 'Kunci &amp; publikasi',&#13;&#10;                    d: 'Urutan yang tidak bisa dibalik, plus aksi massal.',&#13;&#10;                    p: '12–14',&#13;&#10;                },&#13;&#10;            ].map((it, i) =&gt; (&#13;&#10;                &lt;Box&#13;&#10;                    key={i}&#13;&#10;                    style={{&#13;&#10;                        flexDirection: 'row',&#13;&#10;                        alignItems: 'center',&#13;&#10;                        gap: 20,&#13;&#10;                        height: 122,&#13;&#10;                        background: '#FFFFFF',&#13;&#10;                        borderRadius: 16,&#13;&#10;                        boxShadow: '0 4px 20px rgba(0,0,0,0.08)',&#13;&#10;                        paddingLeft: 24,&#13;&#10;                        paddingRight: 28,&#13;&#10;                        borderLeft: '8px solid #AFC440',&#13;&#10;                    }}&#13;&#10;                &gt;&#13;&#10;                    &lt;Box&#13;&#10;                        style={{&#13;&#10;                            width: 56,&#13;&#10;                            height: 56,&#13;&#10;                            borderRadius: 28,&#13;&#10;                            background: 'rgba(81,39,124,0.09)',&#13;&#10;                            justifyContent: 'center',&#13;&#10;                            alignItems: 'center',&#13;&#10;                        }}&#13;&#10;                    &gt;&#13;&#10;                        &lt;Text&#13;&#10;                            style={{&#13;&#10;                                fontSize: 24,&#13;&#10;                                fontWeight: 'bold',&#13;&#10;                                color: '#51277C',&#13;&#10;                                fontFamily: 'Trebuchet MS',&#13;&#10;                            }}&#13;&#10;                        &gt;&#13;&#10;                            {it.n}&#13;&#10;                        &lt;/Text&gt;&#13;&#10;                    &lt;/Box&gt;&#13;&#10;                    &lt;Box style={{ flex: 1 }}&gt;&#13;&#10;                        &lt;Text&#13;&#10;                            style={{&#13;&#10;                                fontSize: 25,&#13;&#10;                                fontWeight: 'bold',&#13;&#10;                                color: '#2A2333',&#13;&#10;                                fontFamily: 'Trebuchet MS',&#13;&#10;                                lineHeight: 1.3,&#13;&#10;                            }}&#13;&#10;                        &gt;&#13;&#10;                            {it.t}&#13;&#10;                        &lt;/Text&gt;&#13;&#10;                        &lt;Text&#13;&#10;                            style={{&#13;&#10;                                marginTop: 5,&#13;&#10;                                fontSize: 18,&#13;&#10;                                color: '#6B6478',&#13;&#10;                                fontFamily: 'Verdana',&#13;&#10;                                lineHeight: 1.45,&#13;&#10;                            }}&#13;&#10;                        &gt;&#13;&#10;                            {it.d}&#13;&#10;                        &lt;/Text&gt;&#13;&#10;                    &lt;/Box&gt;&#13;&#10;                    &lt;Text&#13;&#10;                        style={{&#13;&#10;                            fontSize: 17,&#13;&#10;                            color: '#51277C',&#13;&#10;                            fontFamily: 'Verdana',&#13;&#10;                            fontWeight: 'bold',&#13;&#10;                        }}&#13;&#10;                    &gt;&#13;&#10;                        {it.p}&#13;&#10;                    &lt;/Text&gt;&#13;&#10;                &lt;/Box&gt;&#13;&#10;            ))}&#13;&#10;        &lt;/Box&gt;&#13;&#10;    &lt;/Box&gt;&#13;&#10;&#13;&#10;    {/* ── C · bilah kaki ── */}&#13;&#10;    &lt;Box&#13;&#10;        style={{&#13;&#10;            height: 40,&#13;&#10;            flexDirection: 'row',&#13;&#10;            alignItems: 'center',&#13;&#10;            justifyContent: 'space-between',&#13;&#10;        }}&#13;&#10;    &gt;&#13;&#10;        &lt;Text style={{ fontSize: 14, color: '#6B6478', fontFamily: 'Verdana' }}&gt;&#13;&#10;            Pizza Snack Play · Panduan Korlas &amp;amp; Admin&#13;&#10;        &lt;/Text&gt;&#13;&#10;        &lt;Text style={{ fontSize: 14, color: '#6B6478', fontFamily: 'Verdana' }}&gt;02 / 15&lt;/Text&gt;&#13;&#10;    &lt;/Box&gt;&#13;&#10;&lt;/Slide&gt;&#13;&#10;"/>
+        <p:cNvPr id="154" name="" descr="&lt;Slide&#10;    style={{&#10;        width: '1280px',&#10;        height: '720px',&#10;        background: '#FAF7F2',&#10;        paddingTop: 20,&#10;        paddingBottom: 20,&#10;        paddingLeft: 64,&#10;        paddingRight: 64,&#10;    }}&#10;&gt;&#10;    {/* ── A · blok judul ── */}&#10;    &lt;Box style={{ height: 110, justifyContent: 'center' }}&gt;&#10;        &lt;Text&#10;            style={{&#10;                fontSize: 34,&#10;                fontWeight: 'bold',&#10;                color: '#51277C',&#10;                fontFamily: 'Trebuchet MS',&#10;                lineHeight: 1.3,&#10;            }}&#10;        &gt;&#10;            Isi panduan ini&#10;        &lt;/Text&gt;&#10;        &lt;Box style={{ marginTop: 10, width: 72, height: 6, borderRadius: 3, background: '#51277C' }} /&gt;&#10;    &lt;/Box&gt;&#10;&#10;    {/* ── B · area konten ── */}&#10;    &lt;Box style={{ height: 530, flexDirection: 'row', gap: 28 }}&gt;&#10;        &lt;Box&#10;            style={{&#10;                width: '32%',&#10;                height: '100%',&#10;                background: 'linear-gradient(135deg, #51277C 0%, #7A45A8 100%)',&#10;                borderRadius: 18,&#10;                padding: 28,&#10;                justifyContent: 'space-between',&#10;            }}&#10;        &gt;&#10;            &lt;Box&gt;&#10;                &lt;Text&#10;                    style={{&#10;                        fontSize: 96,&#10;                        fontWeight: 'bold',&#10;                        color: '#FFFFFF',&#10;                        fontFamily: 'Trebuchet MS',&#10;                        lineHeight: 1,&#10;                    }}&#10;                &gt;&#10;                    4&#10;                &lt;/Text&gt;&#10;                &lt;Text&#10;                    style={{&#10;                        marginTop: 6,&#10;                        fontSize: 24,&#10;                        fontWeight: 'bold',&#10;                        color: '#F3B26C',&#10;                        fontFamily: 'Trebuchet MS',&#10;                    }}&#10;                &gt;&#10;                    bagian&#10;                &lt;/Text&gt;&#10;            &lt;/Box&gt;&#10;            &lt;Text&#10;                style={{&#10;                    fontSize: 17,&#10;                    color: 'rgba(255,255,255,0.88)',&#10;                    fontFamily: 'Verdana',&#10;                    lineHeight: 1.5,&#10;                }}&#10;            &gt;&#10;                Bagian 3 dan 4 yang dipakai setiap bulan, menjelang jadwal baru.&#10;            &lt;/Text&gt;&#10;        &lt;/Box&gt;&#10;&#10;        &lt;Box style={{ width: '68%', height: '100%', justifyContent: 'space-between' }}&gt;&#10;            {[&#10;                {&#10;                    n: '01',&#10;                    t: 'Peran Anda',&#10;                    d: 'Tiga tugas korlas, sesuai urutan mengerjakannya.',&#10;                    p: '4',&#10;                },&#10;                {&#10;                    n: '02',&#10;                    t: 'Akun &amp; wewenang',&#10;                    d: 'Apa yang boleh korlas, dan mana wewenang admin.',&#10;                    p: '6',&#10;                },&#10;                {&#10;                    n: '03',&#10;                    t: 'Menyusun jadwal',&#10;                    d: 'Isi menu, salin Sepekan, atau tempel teks sekolah.',&#10;                    p: '8–10',&#10;                },&#10;                {&#10;                    n: '04',&#10;                    t: 'Kunci, publikasi &amp; laporan',&#10;                    d: 'Urutan yang tidak bisa dibalik, aksi massal, lalu rekap piket.',&#10;                    p: '12–15',&#10;                },&#10;            ].map((it, i) =&gt; (&#10;                &lt;Box&#10;                    key={i}&#10;                    style={{&#10;                        flexDirection: 'row',&#10;                        alignItems: 'center',&#10;                        gap: 20,&#10;                        height: 122,&#10;                        background: '#FFFFFF',&#10;                        borderRadius: 16,&#10;                        boxShadow: '0 4px 20px rgba(0,0,0,0.08)',&#10;                        paddingLeft: 24,&#10;                        paddingRight: 28,&#10;                        borderLeft: '8px solid #AFC440',&#10;                    }}&#10;                &gt;&#10;                    &lt;Box&#10;                        style={{&#10;                            width: 56,&#10;                            height: 56,&#10;                            borderRadius: 28,&#10;                            background: 'rgba(81,39,124,0.09)',&#10;                            justifyContent: 'center',&#10;                            alignItems: 'center',&#10;                        }}&#10;                    &gt;&#10;                        &lt;Text&#10;                            style={{&#10;                                fontSize: 24,&#10;                                fontWeight: 'bold',&#10;                                color: '#51277C',&#10;                                fontFamily: 'Trebuchet MS',&#10;                            }}&#10;                        &gt;&#10;                            {it.n}&#10;                        &lt;/Text&gt;&#10;                    &lt;/Box&gt;&#10;                    &lt;Box style={{ flex: 1 }}&gt;&#10;                        &lt;Text&#10;                            style={{&#10;                                fontSize: 25,&#10;                                fontWeight: 'bold',&#10;                                color: '#2A2333',&#10;                                fontFamily: 'Trebuchet MS',&#10;                                lineHeight: 1.3,&#10;                            }}&#10;                        &gt;&#10;                            {it.t}&#10;                        &lt;/Text&gt;&#10;                        &lt;Text&#10;                            style={{&#10;                                marginTop: 5,&#10;                                fontSize: 18,&#10;                                color: '#6B6478',&#10;                                fontFamily: 'Verdana',&#10;                                lineHeight: 1.45,&#10;                            }}&#10;                        &gt;&#10;                            {it.d}&#10;                        &lt;/Text&gt;&#10;                    &lt;/Box&gt;&#10;                    &lt;Text&#10;                        style={{&#10;                            fontSize: 17,&#10;                            color: '#51277C',&#10;                            fontFamily: 'Verdana',&#10;                            fontWeight: 'bold',&#10;                        }}&#10;                    &gt;&#10;                        {it.p}&#10;                    &lt;/Text&gt;&#10;                &lt;/Box&gt;&#10;            ))}&#10;        &lt;/Box&gt;&#10;    &lt;/Box&gt;&#10;&#10;    {/* ── C · bilah kaki ── */}&#10;    &lt;Box&#10;        style={{&#10;            height: 40,&#10;            flexDirection: 'row',&#10;            alignItems: 'center',&#10;            justifyContent: 'space-between',&#10;        }}&#10;    &gt;&#10;        &lt;Text style={{ fontSize: 14, color: '#6B6478', fontFamily: 'Verdana' }}&gt;&#10;            Pizza Snack Play · Panduan Korlas &amp;amp; Admin&#10;        &lt;/Text&gt;&#10;        &lt;Text style={{ fontSize: 14, color: '#6B6478', fontFamily: 'Verdana' }}&gt;02 / 16&lt;/Text&gt;&#10;    &lt;/Box&gt;&#10;&lt;/Slide&gt;&#10;"/>
         <p:cNvGrpSpPr/>
         <p:nvPr/>
       </p:nvGrpSpPr>
@@ -6362,7 +7215,7 @@
       </p:grpSpPr>
       <p:sp>
         <p:nvSpPr>
-          <p:cNvPr id="139" name=""/>
+          <p:cNvPr id="155" name=""/>
           <p:cNvSpPr/>
           <p:nvPr/>
         </p:nvSpPr>
@@ -6386,7 +7239,7 @@
       </p:sp>
       <p:sp>
         <p:nvSpPr>
-          <p:cNvPr id="140" name="" descr="{&quot;isTemplate&quot;:true,&quot;type&quot;:&quot;text&quot;}"/>
+          <p:cNvPr id="156" name="" descr="{&quot;isTemplate&quot;:true,&quot;type&quot;:&quot;text&quot;}"/>
           <p:cNvSpPr txBox="1"/>
           <p:nvPr/>
         </p:nvSpPr>
@@ -6421,7 +7274,7 @@
       </p:sp>
       <p:sp>
         <p:nvSpPr>
-          <p:cNvPr id="141" name=""/>
+          <p:cNvPr id="157" name=""/>
           <p:cNvSpPr/>
           <p:nvPr/>
         </p:nvSpPr>
@@ -6447,7 +7300,7 @@
       </p:sp>
       <p:sp>
         <p:nvSpPr>
-          <p:cNvPr id="142" name=""/>
+          <p:cNvPr id="158" name=""/>
           <p:cNvSpPr/>
           <p:nvPr/>
         </p:nvSpPr>
@@ -6481,7 +7334,7 @@
       </p:sp>
       <p:sp>
         <p:nvSpPr>
-          <p:cNvPr id="143" name="" descr="{&quot;isTemplate&quot;:true,&quot;type&quot;:&quot;text&quot;}"/>
+          <p:cNvPr id="159" name="" descr="{&quot;isTemplate&quot;:true,&quot;type&quot;:&quot;text&quot;}"/>
           <p:cNvSpPr txBox="1"/>
           <p:nvPr/>
         </p:nvSpPr>
@@ -6516,7 +7369,7 @@
       </p:sp>
       <p:sp>
         <p:nvSpPr>
-          <p:cNvPr id="144" name="" descr="{&quot;isTemplate&quot;:true,&quot;type&quot;:&quot;text&quot;}"/>
+          <p:cNvPr id="160" name="" descr="{&quot;isTemplate&quot;:true,&quot;type&quot;:&quot;text&quot;}"/>
           <p:cNvSpPr txBox="1"/>
           <p:nvPr/>
         </p:nvSpPr>
@@ -6551,7 +7404,7 @@
       </p:sp>
       <p:sp>
         <p:nvSpPr>
-          <p:cNvPr id="145" name="" descr="{&quot;isTemplate&quot;:true,&quot;type&quot;:&quot;text&quot;}"/>
+          <p:cNvPr id="161" name="" descr="{&quot;isTemplate&quot;:true,&quot;type&quot;:&quot;text&quot;}"/>
           <p:cNvSpPr txBox="1"/>
           <p:nvPr/>
         </p:nvSpPr>
@@ -6590,7 +7443,7 @@
       </p:sp>
       <p:sp>
         <p:nvSpPr>
-          <p:cNvPr id="146" name=""/>
+          <p:cNvPr id="162" name=""/>
           <p:cNvSpPr/>
           <p:nvPr/>
         </p:nvSpPr>
@@ -6623,7 +7476,7 @@
       </p:sp>
       <p:sp>
         <p:nvSpPr>
-          <p:cNvPr id="147" name=""/>
+          <p:cNvPr id="163" name=""/>
           <p:cNvSpPr/>
           <p:nvPr/>
         </p:nvSpPr>
@@ -6680,7 +7533,7 @@
       </p:sp>
       <p:sp>
         <p:nvSpPr>
-          <p:cNvPr id="148" name=""/>
+          <p:cNvPr id="164" name=""/>
           <p:cNvSpPr/>
           <p:nvPr/>
         </p:nvSpPr>
@@ -6708,7 +7561,7 @@
       </p:sp>
       <p:sp>
         <p:nvSpPr>
-          <p:cNvPr id="149" name="" descr="{&quot;isTemplate&quot;:true,&quot;type&quot;:&quot;text&quot;}"/>
+          <p:cNvPr id="165" name="" descr="{&quot;isTemplate&quot;:true,&quot;type&quot;:&quot;text&quot;}"/>
           <p:cNvSpPr txBox="1"/>
           <p:nvPr/>
         </p:nvSpPr>
@@ -6743,7 +7596,7 @@
       </p:sp>
       <p:sp>
         <p:nvSpPr>
-          <p:cNvPr id="150" name="" descr="{&quot;isTemplate&quot;:true,&quot;type&quot;:&quot;text&quot;}"/>
+          <p:cNvPr id="166" name="" descr="{&quot;isTemplate&quot;:true,&quot;type&quot;:&quot;text&quot;}"/>
           <p:cNvSpPr txBox="1"/>
           <p:nvPr/>
         </p:nvSpPr>
@@ -6778,7 +7631,7 @@
       </p:sp>
       <p:sp>
         <p:nvSpPr>
-          <p:cNvPr id="151" name="" descr="{&quot;isTemplate&quot;:true,&quot;type&quot;:&quot;text&quot;}"/>
+          <p:cNvPr id="167" name="" descr="{&quot;isTemplate&quot;:true,&quot;type&quot;:&quot;text&quot;}"/>
           <p:cNvSpPr txBox="1"/>
           <p:nvPr/>
         </p:nvSpPr>
@@ -6813,7 +7666,7 @@
       </p:sp>
       <p:sp>
         <p:nvSpPr>
-          <p:cNvPr id="152" name="" descr="{&quot;isTemplate&quot;:true,&quot;type&quot;:&quot;text&quot;}"/>
+          <p:cNvPr id="168" name="" descr="{&quot;isTemplate&quot;:true,&quot;type&quot;:&quot;text&quot;}"/>
           <p:cNvSpPr txBox="1"/>
           <p:nvPr/>
         </p:nvSpPr>
@@ -6848,7 +7701,7 @@
       </p:sp>
       <p:sp>
         <p:nvSpPr>
-          <p:cNvPr id="153" name=""/>
+          <p:cNvPr id="169" name=""/>
           <p:cNvSpPr/>
           <p:nvPr/>
         </p:nvSpPr>
@@ -6881,7 +7734,7 @@
       </p:sp>
       <p:sp>
         <p:nvSpPr>
-          <p:cNvPr id="154" name=""/>
+          <p:cNvPr id="170" name=""/>
           <p:cNvSpPr/>
           <p:nvPr/>
         </p:nvSpPr>
@@ -6938,7 +7791,7 @@
       </p:sp>
       <p:sp>
         <p:nvSpPr>
-          <p:cNvPr id="155" name=""/>
+          <p:cNvPr id="171" name=""/>
           <p:cNvSpPr/>
           <p:nvPr/>
         </p:nvSpPr>
@@ -6966,7 +7819,7 @@
       </p:sp>
       <p:sp>
         <p:nvSpPr>
-          <p:cNvPr id="156" name="" descr="{&quot;isTemplate&quot;:true,&quot;type&quot;:&quot;text&quot;}"/>
+          <p:cNvPr id="172" name="" descr="{&quot;isTemplate&quot;:true,&quot;type&quot;:&quot;text&quot;}"/>
           <p:cNvSpPr txBox="1"/>
           <p:nvPr/>
         </p:nvSpPr>
@@ -7001,7 +7854,7 @@
       </p:sp>
       <p:sp>
         <p:nvSpPr>
-          <p:cNvPr id="157" name="" descr="{&quot;isTemplate&quot;:true,&quot;type&quot;:&quot;text&quot;}"/>
+          <p:cNvPr id="173" name="" descr="{&quot;isTemplate&quot;:true,&quot;type&quot;:&quot;text&quot;}"/>
           <p:cNvSpPr txBox="1"/>
           <p:nvPr/>
         </p:nvSpPr>
@@ -7036,7 +7889,7 @@
       </p:sp>
       <p:sp>
         <p:nvSpPr>
-          <p:cNvPr id="158" name="" descr="{&quot;isTemplate&quot;:true,&quot;type&quot;:&quot;text&quot;}"/>
+          <p:cNvPr id="174" name="" descr="{&quot;isTemplate&quot;:true,&quot;type&quot;:&quot;text&quot;}"/>
           <p:cNvSpPr txBox="1"/>
           <p:nvPr/>
         </p:nvSpPr>
@@ -7071,7 +7924,7 @@
       </p:sp>
       <p:sp>
         <p:nvSpPr>
-          <p:cNvPr id="159" name="" descr="{&quot;isTemplate&quot;:true,&quot;type&quot;:&quot;text&quot;}"/>
+          <p:cNvPr id="175" name="" descr="{&quot;isTemplate&quot;:true,&quot;type&quot;:&quot;text&quot;}"/>
           <p:cNvSpPr txBox="1"/>
           <p:nvPr/>
         </p:nvSpPr>
@@ -7106,7 +7959,7 @@
       </p:sp>
       <p:sp>
         <p:nvSpPr>
-          <p:cNvPr id="160" name=""/>
+          <p:cNvPr id="176" name=""/>
           <p:cNvSpPr/>
           <p:nvPr/>
         </p:nvSpPr>
@@ -7139,7 +7992,7 @@
       </p:sp>
       <p:sp>
         <p:nvSpPr>
-          <p:cNvPr id="161" name=""/>
+          <p:cNvPr id="177" name=""/>
           <p:cNvSpPr/>
           <p:nvPr/>
         </p:nvSpPr>
@@ -7196,7 +8049,7 @@
       </p:sp>
       <p:sp>
         <p:nvSpPr>
-          <p:cNvPr id="162" name=""/>
+          <p:cNvPr id="178" name=""/>
           <p:cNvSpPr/>
           <p:nvPr/>
         </p:nvSpPr>
@@ -7224,7 +8077,7 @@
       </p:sp>
       <p:sp>
         <p:nvSpPr>
-          <p:cNvPr id="163" name="" descr="{&quot;isTemplate&quot;:true,&quot;type&quot;:&quot;text&quot;}"/>
+          <p:cNvPr id="179" name="" descr="{&quot;isTemplate&quot;:true,&quot;type&quot;:&quot;text&quot;}"/>
           <p:cNvSpPr txBox="1"/>
           <p:nvPr/>
         </p:nvSpPr>
@@ -7259,7 +8112,7 @@
       </p:sp>
       <p:sp>
         <p:nvSpPr>
-          <p:cNvPr id="164" name="" descr="{&quot;isTemplate&quot;:true,&quot;type&quot;:&quot;text&quot;}"/>
+          <p:cNvPr id="180" name="" descr="{&quot;isTemplate&quot;:true,&quot;type&quot;:&quot;text&quot;}"/>
           <p:cNvSpPr txBox="1"/>
           <p:nvPr/>
         </p:nvSpPr>
@@ -7294,7 +8147,7 @@
       </p:sp>
       <p:sp>
         <p:nvSpPr>
-          <p:cNvPr id="165" name="" descr="{&quot;isTemplate&quot;:true,&quot;type&quot;:&quot;text&quot;}"/>
+          <p:cNvPr id="181" name="" descr="{&quot;isTemplate&quot;:true,&quot;type&quot;:&quot;text&quot;}"/>
           <p:cNvSpPr txBox="1"/>
           <p:nvPr/>
         </p:nvSpPr>
@@ -7329,7 +8182,7 @@
       </p:sp>
       <p:sp>
         <p:nvSpPr>
-          <p:cNvPr id="166" name="" descr="{&quot;isTemplate&quot;:true,&quot;type&quot;:&quot;text&quot;}"/>
+          <p:cNvPr id="182" name="" descr="{&quot;isTemplate&quot;:true,&quot;type&quot;:&quot;text&quot;}"/>
           <p:cNvSpPr txBox="1"/>
           <p:nvPr/>
         </p:nvSpPr>
@@ -7364,7 +8217,7 @@
       </p:sp>
       <p:sp>
         <p:nvSpPr>
-          <p:cNvPr id="167" name=""/>
+          <p:cNvPr id="183" name=""/>
           <p:cNvSpPr/>
           <p:nvPr/>
         </p:nvSpPr>
@@ -7397,7 +8250,7 @@
       </p:sp>
       <p:sp>
         <p:nvSpPr>
-          <p:cNvPr id="168" name=""/>
+          <p:cNvPr id="184" name=""/>
           <p:cNvSpPr/>
           <p:nvPr/>
         </p:nvSpPr>
@@ -7454,7 +8307,7 @@
       </p:sp>
       <p:sp>
         <p:nvSpPr>
-          <p:cNvPr id="169" name=""/>
+          <p:cNvPr id="185" name=""/>
           <p:cNvSpPr/>
           <p:nvPr/>
         </p:nvSpPr>
@@ -7482,7 +8335,7 @@
       </p:sp>
       <p:sp>
         <p:nvSpPr>
-          <p:cNvPr id="170" name="" descr="{&quot;isTemplate&quot;:true,&quot;type&quot;:&quot;text&quot;}"/>
+          <p:cNvPr id="186" name="" descr="{&quot;isTemplate&quot;:true,&quot;type&quot;:&quot;text&quot;}"/>
           <p:cNvSpPr txBox="1"/>
           <p:nvPr/>
         </p:nvSpPr>
@@ -7517,7 +8370,7 @@
       </p:sp>
       <p:sp>
         <p:nvSpPr>
-          <p:cNvPr id="171" name="" descr="{&quot;isTemplate&quot;:true,&quot;type&quot;:&quot;text&quot;}"/>
+          <p:cNvPr id="187" name="" descr="{&quot;isTemplate&quot;:true,&quot;type&quot;:&quot;text&quot;}"/>
           <p:cNvSpPr txBox="1"/>
           <p:nvPr/>
         </p:nvSpPr>
@@ -7544,27 +8397,29 @@
                 <a:latin typeface="Trebuchet MS"/>
                 <a:ea typeface="Trebuchet MS"/>
               </a:rPr>
-              <a:t>Kunci &amp; publikasi</a:t>
-            </a:r>
-            <a:endParaRPr/>
-          </a:p>
-        </p:txBody>
-      </p:sp>
-      <p:sp>
-        <p:nvSpPr>
-          <p:cNvPr id="172" name="" descr="{&quot;isTemplate&quot;:true,&quot;type&quot;:&quot;text&quot;}"/>
+              <a:t>Kunci, publikasi &amp; laporan</a:t>
+            </a:r>
+            <a:endParaRPr/>
+          </a:p>
+        </p:txBody>
+      </p:sp>
+      <p:sp>
+        <p:nvSpPr>
+          <p:cNvPr id="188" name="" descr="{&quot;isTemplate&quot;:true,&quot;type&quot;:&quot;text&quot;}"/>
           <p:cNvSpPr txBox="1"/>
           <p:nvPr/>
         </p:nvSpPr>
         <p:spPr>
           <a:xfrm rot="0" flipH="0" flipV="0">
             <a:off x="5334000" y="5762625"/>
-            <a:ext cx="5210175" cy="304800"/>
+            <a:ext cx="5210175" cy="600075"/>
           </a:xfrm>
           <a:prstGeom prst="rect"/>
         </p:spPr>
         <p:txBody>
-          <a:bodyPr wrap="none" lIns="0" tIns="0" rIns="0" bIns="0"/>
+          <a:bodyPr wrap="square" lIns="0" tIns="0" rIns="0" bIns="0">
+            <a:normAutofit/>
+          </a:bodyPr>
           <a:p>
             <a:pPr>
               <a:lnSpc>
@@ -7579,15 +8434,15 @@
                 <a:latin typeface="Verdana"/>
                 <a:ea typeface="Verdana"/>
               </a:rPr>
-              <a:t>Urutan yang tidak bisa dibalik, plus aksi massal.</a:t>
-            </a:r>
-            <a:endParaRPr/>
-          </a:p>
-        </p:txBody>
-      </p:sp>
-      <p:sp>
-        <p:nvSpPr>
-          <p:cNvPr id="173" name="" descr="{&quot;isTemplate&quot;:true,&quot;type&quot;:&quot;text&quot;}"/>
+              <a:t>Urutan yang tidak bisa dibalik, aksi massal, lalu rekap piket.</a:t>
+            </a:r>
+            <a:endParaRPr/>
+          </a:p>
+        </p:txBody>
+      </p:sp>
+      <p:sp>
+        <p:nvSpPr>
+          <p:cNvPr id="189" name="" descr="{&quot;isTemplate&quot;:true,&quot;type&quot;:&quot;text&quot;}"/>
           <p:cNvSpPr txBox="1"/>
           <p:nvPr/>
         </p:nvSpPr>
@@ -7614,15 +8469,15 @@
                 <a:latin typeface="Verdana"/>
                 <a:ea typeface="Verdana"/>
               </a:rPr>
-              <a:t>12–14</a:t>
-            </a:r>
-            <a:endParaRPr/>
-          </a:p>
-        </p:txBody>
-      </p:sp>
-      <p:sp>
-        <p:nvSpPr>
-          <p:cNvPr id="174" name="" descr="{&quot;isTemplate&quot;:true,&quot;type&quot;:&quot;text&quot;}"/>
+              <a:t>12–15</a:t>
+            </a:r>
+            <a:endParaRPr/>
+          </a:p>
+        </p:txBody>
+      </p:sp>
+      <p:sp>
+        <p:nvSpPr>
+          <p:cNvPr id="190" name="" descr="{&quot;isTemplate&quot;:true,&quot;type&quot;:&quot;text&quot;}"/>
           <p:cNvSpPr txBox="1"/>
           <p:nvPr/>
         </p:nvSpPr>
@@ -7657,7 +8512,7 @@
       </p:sp>
       <p:sp>
         <p:nvSpPr>
-          <p:cNvPr id="175" name="" descr="{&quot;isTemplate&quot;:true,&quot;type&quot;:&quot;text&quot;}"/>
+          <p:cNvPr id="191" name="" descr="{&quot;isTemplate&quot;:true,&quot;type&quot;:&quot;text&quot;}"/>
           <p:cNvSpPr txBox="1"/>
           <p:nvPr/>
         </p:nvSpPr>
@@ -7684,7 +8539,7 @@
                 <a:latin typeface="Verdana"/>
                 <a:ea typeface="Verdana"/>
               </a:rPr>
-              <a:t>02 / 15</a:t>
+              <a:t>02 / 16</a:t>
             </a:r>
             <a:endParaRPr/>
           </a:p>
@@ -7700,7 +8555,7 @@
   <p:cSld>
     <p:spTree>
       <p:nvGrpSpPr>
-        <p:cNvPr id="176" name="" descr="&lt;Slide&#10;    style={{&#10;        width: '1280px',&#10;        height: '720px',&#10;        background: 'linear-gradient(135deg, #51277C 0%, #7A45A8 100%)',&#10;        paddingTop: 60,&#10;        paddingBottom: 60,&#10;        paddingLeft: 72,&#10;        paddingRight: 72,&#10;        justifyContent: 'center',&#10;        position: 'relative',&#10;        overflow: 'hidden',&#10;    }}&#10;&gt;&#10;    &lt;Box&#10;        style={{&#10;            position: 'absolute',&#10;            top: -100,&#10;            right: -60,&#10;            width: 420,&#10;            height: 420,&#10;            borderRadius: 210,&#10;            background: '#AFC440',&#10;            opacity: 0.14,&#10;        }}&#10;    /&gt;&#10;    &lt;Box style={{ position: 'absolute', bottom: 46, right: 78, opacity: 0.16 }}&gt;&#10;        &lt;svg width={240} height={190} viewBox='0 0 240 190'&gt;&#10;            &lt;rect x='10' y='26' width='220' height='156' rx='16' fill='none' stroke='#FFFFFF' strokeWidth='6' /&gt;&#10;            &lt;path d='M10 62h220' stroke='#FFFFFF' strokeWidth='6' /&gt;&#10;            &lt;path d='M60 8v30M180 8v30' stroke='#FFFFFF' strokeWidth='8' strokeLinecap='round' /&gt;&#10;            &lt;rect x='42' y='84' width='34' height='26' rx='6' fill='#FFFFFF' /&gt;&#10;            &lt;rect x='102' y='84' width='34' height='26' rx='6' fill='#FFFFFF' /&gt;&#10;            &lt;rect x='162' y='84' width='34' height='26' rx='6' fill='#FFFFFF' /&gt;&#10;            &lt;rect x='42' y='128' width='34' height='26' rx='6' fill='#FFFFFF' /&gt;&#10;            &lt;rect x='102' y='128' width='34' height='26' rx='6' fill='#F3B26C' /&gt;&#10;        &lt;/svg&gt;&#10;    &lt;/Box&gt;&#10;&#10;    &lt;Box style={{ position: 'relative', zIndex: 1, width: '62%' }}&gt;&#10;        &lt;Box style={{ flexDirection: 'row', alignItems: 'center', gap: 14, alignSelf: 'flex-start' }}&gt;&#10;            &lt;Text&#10;                style={{&#10;                    fontSize: 76,&#10;                    fontWeight: 'bold',&#10;                    color: '#F3B26C',&#10;                    fontFamily: 'Trebuchet MS',&#10;                    lineHeight: 1,&#10;                }}&#10;            &gt;&#10;                01&#10;            &lt;/Text&gt;&#10;            &lt;Box style={{ width: 3, height: 52, background: 'rgba(255,255,255,0.45)' }} /&gt;&#10;            &lt;Text style={{ fontSize: 19, color: 'rgba(255,255,255,0.8)', fontFamily: 'Verdana' }}&gt;&#10;                Bagian pertama&#10;            &lt;/Text&gt;&#10;        &lt;/Box&gt;&#10;&#10;        &lt;Text&#10;            style={{&#10;                marginTop: 26,&#10;                fontSize: 60,&#10;                fontWeight: 'bold',&#10;                color: '#FFFFFF',&#10;                fontFamily: 'Trebuchet MS',&#10;                lineHeight: 1.15,&#10;            }}&#10;        &gt;&#10;            Peran Anda{'\n'}di kelas&#10;        &lt;/Text&gt;&#10;&#10;        &lt;Text&#10;            style={{&#10;                marginTop: 24,&#10;                fontSize: 22,&#10;                color: 'rgba(255,255,255,0.88)',&#10;                fontFamily: 'Verdana',&#10;                lineHeight: 1.5,&#10;            }}&#10;        &gt;&#10;            Korlas mengurus jadwal satu kelas. Mulai dari yang paling sering dikerjakan.&#10;        &lt;/Text&gt;&#10;    &lt;/Box&gt;&#10;&lt;/Slide&gt;&#10;"/>
+        <p:cNvPr id="192" name="" descr="&lt;Slide&#10;    style={{&#10;        width: '1280px',&#10;        height: '720px',&#10;        background: 'linear-gradient(135deg, #51277C 0%, #7A45A8 100%)',&#10;        paddingTop: 60,&#10;        paddingBottom: 60,&#10;        paddingLeft: 72,&#10;        paddingRight: 72,&#10;        justifyContent: 'center',&#10;        position: 'relative',&#10;        overflow: 'hidden',&#10;    }}&#10;&gt;&#10;    &lt;Box&#10;        style={{&#10;            position: 'absolute',&#10;            top: -100,&#10;            right: -60,&#10;            width: 420,&#10;            height: 420,&#10;            borderRadius: 210,&#10;            background: '#AFC440',&#10;            opacity: 0.14,&#10;        }}&#10;    /&gt;&#10;    &lt;Box style={{ position: 'absolute', bottom: 46, right: 78, opacity: 0.16 }}&gt;&#10;        &lt;svg width={240} height={190} viewBox='0 0 240 190'&gt;&#10;            &lt;rect x='10' y='26' width='220' height='156' rx='16' fill='none' stroke='#FFFFFF' strokeWidth='6' /&gt;&#10;            &lt;path d='M10 62h220' stroke='#FFFFFF' strokeWidth='6' /&gt;&#10;            &lt;path d='M60 8v30M180 8v30' stroke='#FFFFFF' strokeWidth='8' strokeLinecap='round' /&gt;&#10;            &lt;rect x='42' y='84' width='34' height='26' rx='6' fill='#FFFFFF' /&gt;&#10;            &lt;rect x='102' y='84' width='34' height='26' rx='6' fill='#FFFFFF' /&gt;&#10;            &lt;rect x='162' y='84' width='34' height='26' rx='6' fill='#FFFFFF' /&gt;&#10;            &lt;rect x='42' y='128' width='34' height='26' rx='6' fill='#FFFFFF' /&gt;&#10;            &lt;rect x='102' y='128' width='34' height='26' rx='6' fill='#F3B26C' /&gt;&#10;        &lt;/svg&gt;&#10;    &lt;/Box&gt;&#10;&#10;    &lt;Box style={{ position: 'relative', zIndex: 1, width: '62%' }}&gt;&#10;        &lt;Box style={{ flexDirection: 'row', alignItems: 'center', gap: 14, alignSelf: 'flex-start' }}&gt;&#10;            &lt;Text&#10;                style={{&#10;                    fontSize: 76,&#10;                    fontWeight: 'bold',&#10;                    color: '#F3B26C',&#10;                    fontFamily: 'Trebuchet MS',&#10;                    lineHeight: 1,&#10;                }}&#10;            &gt;&#10;                01&#10;            &lt;/Text&gt;&#10;            &lt;Box style={{ width: 3, height: 52, background: 'rgba(255,255,255,0.45)' }} /&gt;&#10;            &lt;Text style={{ fontSize: 19, color: 'rgba(255,255,255,0.8)', fontFamily: 'Verdana' }}&gt;&#10;                Bagian pertama&#10;            &lt;/Text&gt;&#10;        &lt;/Box&gt;&#10;&#10;        &lt;Text&#10;            style={{&#10;                marginTop: 26,&#10;                fontSize: 60,&#10;                fontWeight: 'bold',&#10;                color: '#FFFFFF',&#10;                fontFamily: 'Trebuchet MS',&#10;                lineHeight: 1.15,&#10;            }}&#10;        &gt;&#10;            Peran Anda{'\n'}di kelas&#10;        &lt;/Text&gt;&#10;&#10;        &lt;Text&#10;            style={{&#10;                marginTop: 24,&#10;                fontSize: 22,&#10;                color: 'rgba(255,255,255,0.88)',&#10;                fontFamily: 'Verdana',&#10;                lineHeight: 1.5,&#10;            }}&#10;        &gt;&#10;            Korlas mengurus jadwal satu kelas. Mulai dari yang paling sering dikerjakan.&#10;        &lt;/Text&gt;&#10;    &lt;/Box&gt;&#10;&lt;/Slide&gt;&#10;"/>
         <p:cNvGrpSpPr/>
         <p:nvPr/>
       </p:nvGrpSpPr>
@@ -7714,7 +8569,7 @@
       </p:grpSpPr>
       <p:sp>
         <p:nvSpPr>
-          <p:cNvPr id="177" name=""/>
+          <p:cNvPr id="193" name=""/>
           <p:cNvSpPr/>
           <p:nvPr/>
         </p:nvSpPr>
@@ -7746,7 +8601,7 @@
       </p:sp>
       <p:sp>
         <p:nvSpPr>
-          <p:cNvPr id="178" name=""/>
+          <p:cNvPr id="194" name=""/>
           <p:cNvSpPr/>
           <p:nvPr/>
         </p:nvSpPr>
@@ -8142,7 +8997,7 @@
       </p:sp>
       <p:pic>
         <p:nvPicPr>
-          <p:cNvPr id="179" name=""/>
+          <p:cNvPr id="195" name=""/>
           <p:cNvPicPr>
             <a:picLocks noChangeAspect="1"/>
           </p:cNvPicPr>
@@ -8174,7 +9029,7 @@
       </p:pic>
       <p:sp>
         <p:nvSpPr>
-          <p:cNvPr id="180" name="" descr="{&quot;isTemplate&quot;:true,&quot;type&quot;:&quot;text&quot;}"/>
+          <p:cNvPr id="196" name="" descr="{&quot;isTemplate&quot;:true,&quot;type&quot;:&quot;text&quot;}"/>
           <p:cNvSpPr txBox="1"/>
           <p:nvPr/>
         </p:nvSpPr>
@@ -8209,7 +9064,7 @@
       </p:sp>
       <p:sp>
         <p:nvSpPr>
-          <p:cNvPr id="181" name=""/>
+          <p:cNvPr id="197" name=""/>
           <p:cNvSpPr/>
           <p:nvPr/>
         </p:nvSpPr>
@@ -8235,7 +9090,7 @@
       </p:sp>
       <p:sp>
         <p:nvSpPr>
-          <p:cNvPr id="182" name="" descr="{&quot;isTemplate&quot;:true,&quot;type&quot;:&quot;text&quot;}"/>
+          <p:cNvPr id="198" name="" descr="{&quot;isTemplate&quot;:true,&quot;type&quot;:&quot;text&quot;}"/>
           <p:cNvSpPr txBox="1"/>
           <p:nvPr/>
         </p:nvSpPr>
@@ -8272,7 +9127,7 @@
       </p:sp>
       <p:sp>
         <p:nvSpPr>
-          <p:cNvPr id="183" name="" descr="{&quot;isTemplate&quot;:true,&quot;type&quot;:&quot;text&quot;}"/>
+          <p:cNvPr id="199" name="" descr="{&quot;isTemplate&quot;:true,&quot;type&quot;:&quot;text&quot;}"/>
           <p:cNvSpPr txBox="1"/>
           <p:nvPr/>
         </p:nvSpPr>
@@ -8325,7 +9180,7 @@
       </p:sp>
       <p:sp>
         <p:nvSpPr>
-          <p:cNvPr id="184" name="" descr="{&quot;isTemplate&quot;:true,&quot;type&quot;:&quot;text&quot;}"/>
+          <p:cNvPr id="200" name="" descr="{&quot;isTemplate&quot;:true,&quot;type&quot;:&quot;text&quot;}"/>
           <p:cNvSpPr txBox="1"/>
           <p:nvPr/>
         </p:nvSpPr>
@@ -8372,7 +9227,7 @@
   <p:cSld>
     <p:spTree>
       <p:nvGrpSpPr>
-        <p:cNvPr id="185" name="" descr="&lt;Slide&#10;    style={{&#10;        width: '1280px',&#10;        height: '720px',&#10;        background: '#FAF7F2',&#10;        paddingTop: 20,&#10;        paddingBottom: 20,&#10;        paddingLeft: 64,&#10;        paddingRight: 64,&#10;    }}&#10;&gt;&#10;    {/* ── A · blok judul ── */}&#10;    &lt;Box style={{ height: 110, justifyContent: 'center' }}&gt;&#10;        &lt;Text&#10;            style={{&#10;                fontSize: 34,&#10;                fontWeight: 'bold',&#10;                color: '#51277C',&#10;                fontFamily: 'Trebuchet MS',&#10;                lineHeight: 1.3,&#10;            }}&#10;        &gt;&#10;            Tiga tugas Anda&#10;        &lt;/Text&gt;&#10;        &lt;Box style={{ marginTop: 10, width: 72, height: 6, borderRadius: 3, background: '#51277C' }} /&gt;&#10;    &lt;/Box&gt;&#10;&#10;    {/* ── B · area konten ── */}&#10;    &lt;Box style={{ height: 530, flexDirection: 'row', gap: 30 }}&gt;&#10;        {/* kiri 55% · alur tiga langkah */}&#10;        &lt;Box&#10;            style={{&#10;                width: '55%',&#10;                height: '100%',&#10;                background: 'rgba(81,39,124,0.06)',&#10;                borderRadius: 20,&#10;                justifyContent: 'center',&#10;                alignItems: 'center',&#10;            }}&#10;        &gt;&#10;            &lt;svg width={520} height={430} viewBox='0 0 520 430'&gt;&#10;                {/* langkah 1 */}&#10;                &lt;rect x='14' y='8' width='492' height='112' rx='16' fill='#FFFFFF' stroke='#E6DFD2' strokeWidth='2' /&gt;&#10;                &lt;circle cx='62' cy='64' r='28' fill='#51277C' /&gt;&#10;                &lt;text x='62' y='74' fontFamily='Trebuchet MS' fontSize='28' fontWeight='bold' fill='#FFFFFF' textAnchor='middle'&gt;&#10;                    1&#10;                &lt;/text&gt;&#10;                &lt;text x='112' y='54' fontFamily='Trebuchet MS' fontSize='24' fontWeight='bold' fill='#51277C'&gt;&#10;                    Susun&#10;                &lt;/text&gt;&#10;                &lt;text x='112' y='86' fontFamily='Verdana' fontSize='16' fill='#6B6478'&gt;&#10;                    Menu untuk Senin sampai Jumat&#10;                &lt;/text&gt;&#10;                {/* panah */}&#10;                &lt;path d='M260 126v30' stroke='#AFC440' strokeWidth='5' strokeLinecap='round' /&gt;&#10;                &lt;path d='M250 150l10 12 10-12' fill='none' stroke='#AFC440' strokeWidth='5' strokeLinecap='round' /&gt;&#10;&#10;                {/* langkah 2 */}&#10;                &lt;rect x='14' y='164' width='492' height='112' rx='16' fill='#FFFFFF' stroke='#E6DFD2' strokeWidth='2' /&gt;&#10;                &lt;circle cx='62' cy='220' r='28' fill='#51277C' /&gt;&#10;                &lt;text x='62' y='230' fontFamily='Trebuchet MS' fontSize='28' fontWeight='bold' fill='#FFFFFF' textAnchor='middle'&gt;&#10;                    2&#10;                &lt;/text&gt;&#10;                &lt;text x='112' y='210' fontFamily='Trebuchet MS' fontSize='24' fontWeight='bold' fill='#51277C'&gt;&#10;                    Tentukan petugas&#10;                &lt;/text&gt;&#10;                &lt;text x='112' y='242' fontFamily='Verdana' fontSize='16' fill='#6B6478'&gt;&#10;                    Atau biarkan kosong supaya direbut orang tua&#10;                &lt;/text&gt;&#10;                {/* panah */}&#10;                &lt;path d='M260 282v30' stroke='#AFC440' strokeWidth='5' strokeLinecap='round' /&gt;&#10;                &lt;path d='M250 306l10 12 10-12' fill='none' stroke='#AFC440' strokeWidth='5' strokeLinecap='round' /&gt;&#10;&#10;                {/* langkah 3 */}&#10;                &lt;rect x='14' y='320' width='492' height='104' rx='16' fill='#51277C' /&gt;&#10;                &lt;circle cx='62' cy='372' r='28' fill='#F3B26C' /&gt;&#10;                &lt;text x='62' y='382' fontFamily='Trebuchet MS' fontSize='28' fontWeight='bold' fill='#51277C' textAnchor='middle'&gt;&#10;                    3&#10;                &lt;/text&gt;&#10;                &lt;text x='112' y='362' fontFamily='Trebuchet MS' fontSize='24' fontWeight='bold' fill='#FFFFFF'&gt;&#10;                    Umumkan&#10;                &lt;/text&gt;&#10;                &lt;text x='112' y='394' fontFamily='Verdana' fontSize='16' fill='#EFEAE1'&gt;&#10;                    Kunci lebih dulu, baru terbit ke orang tua&#10;                &lt;/text&gt;&#10;            &lt;/svg&gt;&#10;        &lt;/Box&gt;&#10;&#10;        {/* kanan 45% · tiga keterangan */}&#10;        &lt;Box style={{ width: '45%', height: '100%', justifyContent: 'space-between' }}&gt;&#10;            {[&#10;                {&#10;                    t: 'Susun — isi menunya',&#10;                    d: 'Satu bulan lebih baik dikerjakan sekaligus. Tiga cara: ketik per hari, salin dari minggu lain, atau tempel teks dari sekolah.',&#10;                    g: 'Bagian 3',&#10;                },&#10;                {&#10;                    t: 'Petugas — siapa ambil snack',&#10;                    d: 'Pilih dari daftar siswa kelas Anda; nama orang tuanya terisi sendiri. Dikosongkan pun boleh.',&#10;                    g: 'Bisa dikosongkan',&#10;                },&#10;                {&#10;                    t: 'Umumkan — baru kelihatan',&#10;                    d: 'Sebelum diumumkan, orang tua tidak melihat apa pun. Jadi jangan khawatir kalau belum muncul.',&#10;                    g: 'Bagian 4',&#10;                },&#10;            ].map((it, i) =&gt; (&#10;                &lt;Box&#10;                    key={i}&#10;                    style={{&#10;                        height: 166,&#10;                        background: '#FFFFFF',&#10;                        borderRadius: 16,&#10;                        boxShadow: '0 4px 20px rgba(0,0,0,0.08)',&#10;                        padding: 22,&#10;                        borderLeft: i === 2 ? '8px solid #F3B26C' : '8px solid #AFC440',&#10;                    }}&#10;                &gt;&#10;                    &lt;Text&#10;                        style={{&#10;                            fontSize: 24,&#10;                            fontWeight: 'bold',&#10;                            color: '#51277C',&#10;                            fontFamily: 'Trebuchet MS',&#10;                            lineHeight: 1.3,&#10;                        }}&#10;                    &gt;&#10;                        {it.t}&#10;                    &lt;/Text&gt;&#10;                    &lt;Text&#10;                        style={{&#10;                            marginTop: 10,&#10;                            fontSize: 17,&#10;                            color: '#6B6478',&#10;                            fontFamily: 'Verdana',&#10;                            lineHeight: 1.5,&#10;                        }}&#10;                    &gt;&#10;                        {it.d}&#10;                    &lt;/Text&gt;&#10;                    &lt;Box style={{ marginTop: 'auto' }}&gt;&#10;                        &lt;Text&#10;                            style={{&#10;                                fontSize: 16,&#10;                                color: '#51277C',&#10;                                fontFamily: 'Verdana',&#10;                                fontWeight: 'bold',&#10;                            }}&#10;                        &gt;&#10;                            {it.g}&#10;                        &lt;/Text&gt;&#10;                    &lt;/Box&gt;&#10;                &lt;/Box&gt;&#10;            ))}&#10;        &lt;/Box&gt;&#10;    &lt;/Box&gt;&#10;&#10;    {/* ── C · bilah kaki ── */}&#10;    &lt;Box&#10;        style={{&#10;            height: 40,&#10;            flexDirection: 'row',&#10;            alignItems: 'center',&#10;            justifyContent: 'space-between',&#10;        }}&#10;    &gt;&#10;        &lt;Text style={{ fontSize: 14, color: '#6B6478', fontFamily: 'Verdana' }}&gt;&#10;            Pizza Snack Play · Panduan Korlas &amp;amp; Admin&#10;        &lt;/Text&gt;&#10;        &lt;Text style={{ fontSize: 14, color: '#6B6478', fontFamily: 'Verdana' }}&gt;04 / 15&lt;/Text&gt;&#10;    &lt;/Box&gt;&#10;&lt;/Slide&gt;&#10;"/>
+        <p:cNvPr id="201" name="" descr="&lt;Slide&#10;    style={{&#10;        width: '1280px',&#10;        height: '720px',&#10;        background: '#FAF7F2',&#10;        paddingTop: 20,&#10;        paddingBottom: 20,&#10;        paddingLeft: 64,&#10;        paddingRight: 64,&#10;    }}&#10;&gt;&#10;    {/* ── A · blok judul ── */}&#10;    &lt;Box style={{ height: 110, justifyContent: 'center' }}&gt;&#10;        &lt;Text&#10;            style={{&#10;                fontSize: 34,&#10;                fontWeight: 'bold',&#10;                color: '#51277C',&#10;                fontFamily: 'Trebuchet MS',&#10;                lineHeight: 1.3,&#10;            }}&#10;        &gt;&#10;            Tiga tugas Anda&#10;        &lt;/Text&gt;&#10;        &lt;Box style={{ marginTop: 10, width: 72, height: 6, borderRadius: 3, background: '#51277C' }} /&gt;&#10;    &lt;/Box&gt;&#10;&#10;    {/* ── B · area konten ── */}&#10;    &lt;Box style={{ height: 530, flexDirection: 'row', gap: 30 }}&gt;&#10;        {/* kiri 55% · alur tiga langkah */}&#10;        &lt;Box&#10;            style={{&#10;                width: '55%',&#10;                height: '100%',&#10;                background: 'rgba(81,39,124,0.06)',&#10;                borderRadius: 20,&#10;                justifyContent: 'center',&#10;                alignItems: 'center',&#10;            }}&#10;        &gt;&#10;            &lt;svg width={520} height={430} viewBox='0 0 520 430'&gt;&#10;                {/* langkah 1 */}&#10;                &lt;rect x='14' y='8' width='492' height='112' rx='16' fill='#FFFFFF' stroke='#E6DFD2' strokeWidth='2' /&gt;&#10;                &lt;circle cx='62' cy='64' r='28' fill='#51277C' /&gt;&#10;                &lt;text x='62' y='74' fontFamily='Trebuchet MS' fontSize='28' fontWeight='bold' fill='#FFFFFF' textAnchor='middle'&gt;&#10;                    1&#10;                &lt;/text&gt;&#10;                &lt;text x='112' y='54' fontFamily='Trebuchet MS' fontSize='24' fontWeight='bold' fill='#51277C'&gt;&#10;                    Susun&#10;                &lt;/text&gt;&#10;                &lt;text x='112' y='86' fontFamily='Verdana' fontSize='16' fill='#6B6478'&gt;&#10;                    Menu untuk Senin sampai Jumat&#10;                &lt;/text&gt;&#10;                {/* panah */}&#10;                &lt;path d='M260 126v30' stroke='#AFC440' strokeWidth='5' strokeLinecap='round' /&gt;&#10;                &lt;path d='M250 150l10 12 10-12' fill='none' stroke='#AFC440' strokeWidth='5' strokeLinecap='round' /&gt;&#10;&#10;                {/* langkah 2 */}&#10;                &lt;rect x='14' y='164' width='492' height='112' rx='16' fill='#FFFFFF' stroke='#E6DFD2' strokeWidth='2' /&gt;&#10;                &lt;circle cx='62' cy='220' r='28' fill='#51277C' /&gt;&#10;                &lt;text x='62' y='230' fontFamily='Trebuchet MS' fontSize='28' fontWeight='bold' fill='#FFFFFF' textAnchor='middle'&gt;&#10;                    2&#10;                &lt;/text&gt;&#10;                &lt;text x='112' y='210' fontFamily='Trebuchet MS' fontSize='24' fontWeight='bold' fill='#51277C'&gt;&#10;                    Tentukan petugas&#10;                &lt;/text&gt;&#10;                &lt;text x='112' y='242' fontFamily='Verdana' fontSize='16' fill='#6B6478'&gt;&#10;                    Atau biarkan kosong supaya direbut orang tua&#10;                &lt;/text&gt;&#10;                {/* panah */}&#10;                &lt;path d='M260 282v30' stroke='#AFC440' strokeWidth='5' strokeLinecap='round' /&gt;&#10;                &lt;path d='M250 306l10 12 10-12' fill='none' stroke='#AFC440' strokeWidth='5' strokeLinecap='round' /&gt;&#10;&#10;                {/* langkah 3 */}&#10;                &lt;rect x='14' y='320' width='492' height='104' rx='16' fill='#51277C' /&gt;&#10;                &lt;circle cx='62' cy='372' r='28' fill='#F3B26C' /&gt;&#10;                &lt;text x='62' y='382' fontFamily='Trebuchet MS' fontSize='28' fontWeight='bold' fill='#51277C' textAnchor='middle'&gt;&#10;                    3&#10;                &lt;/text&gt;&#10;                &lt;text x='112' y='362' fontFamily='Trebuchet MS' fontSize='24' fontWeight='bold' fill='#FFFFFF'&gt;&#10;                    Umumkan&#10;                &lt;/text&gt;&#10;                &lt;text x='112' y='394' fontFamily='Verdana' fontSize='16' fill='#EFEAE1'&gt;&#10;                    Kunci lebih dulu, baru terbit ke orang tua&#10;                &lt;/text&gt;&#10;            &lt;/svg&gt;&#10;        &lt;/Box&gt;&#10;&#10;        {/* kanan 45% · tiga keterangan */}&#10;        &lt;Box style={{ width: '45%', height: '100%', justifyContent: 'space-between' }}&gt;&#10;            {[&#10;                {&#10;                    t: 'Susun — isi menunya',&#10;                    d: 'Satu bulan lebih baik dikerjakan sekaligus. Tiga cara: ketik per hari, salin dari minggu lain, atau tempel teks dari sekolah.',&#10;                    g: 'Bagian 3',&#10;                },&#10;                {&#10;                    t: 'Petugas — siapa ambil snack',&#10;                    d: 'Pilih dari daftar siswa kelas Anda; nama orang tuanya terisi sendiri. Dikosongkan pun boleh.',&#10;                    g: 'Bisa dikosongkan',&#10;                },&#10;                {&#10;                    t: 'Umumkan — baru kelihatan',&#10;                    d: 'Sebelum diumumkan, orang tua tidak melihat apa pun. Jadi jangan khawatir kalau belum muncul.',&#10;                    g: 'Bagian 4',&#10;                },&#10;            ].map((it, i) =&gt; (&#10;                &lt;Box&#10;                    key={i}&#10;                    style={{&#10;                        height: 166,&#10;                        background: '#FFFFFF',&#10;                        borderRadius: 16,&#10;                        boxShadow: '0 4px 20px rgba(0,0,0,0.08)',&#10;                        padding: 22,&#10;                        borderLeft: i === 2 ? '8px solid #F3B26C' : '8px solid #AFC440',&#10;                    }}&#10;                &gt;&#10;                    &lt;Text&#10;                        style={{&#10;                            fontSize: 24,&#10;                            fontWeight: 'bold',&#10;                            color: '#51277C',&#10;                            fontFamily: 'Trebuchet MS',&#10;                            lineHeight: 1.3,&#10;                        }}&#10;                    &gt;&#10;                        {it.t}&#10;                    &lt;/Text&gt;&#10;                    &lt;Text&#10;                        style={{&#10;                            marginTop: 10,&#10;                            fontSize: 17,&#10;                            color: '#6B6478',&#10;                            fontFamily: 'Verdana',&#10;                            lineHeight: 1.5,&#10;                        }}&#10;                    &gt;&#10;                        {it.d}&#10;                    &lt;/Text&gt;&#10;                    &lt;Box style={{ marginTop: 'auto' }}&gt;&#10;                        &lt;Text&#10;                            style={{&#10;                                fontSize: 16,&#10;                                color: '#51277C',&#10;                                fontFamily: 'Verdana',&#10;                                fontWeight: 'bold',&#10;                            }}&#10;                        &gt;&#10;                            {it.g}&#10;                        &lt;/Text&gt;&#10;                    &lt;/Box&gt;&#10;                &lt;/Box&gt;&#10;            ))}&#10;        &lt;/Box&gt;&#10;    &lt;/Box&gt;&#10;&#10;    {/* ── C · bilah kaki ── */}&#10;    &lt;Box&#10;        style={{&#10;            height: 40,&#10;            flexDirection: 'row',&#10;            alignItems: 'center',&#10;            justifyContent: 'space-between',&#10;        }}&#10;    &gt;&#10;        &lt;Text style={{ fontSize: 14, color: '#6B6478', fontFamily: 'Verdana' }}&gt;&#10;            Pizza Snack Play · Panduan Korlas &amp;amp; Admin&#10;        &lt;/Text&gt;&#10;        &lt;Text style={{ fontSize: 14, color: '#6B6478', fontFamily: 'Verdana' }}&gt;04 / 16&lt;/Text&gt;&#10;    &lt;/Box&gt;&#10;&lt;/Slide&gt;&#10;"/>
         <p:cNvGrpSpPr/>
         <p:nvPr/>
       </p:nvGrpSpPr>
@@ -8386,7 +9241,7 @@
       </p:grpSpPr>
       <p:sp>
         <p:nvSpPr>
-          <p:cNvPr id="186" name=""/>
+          <p:cNvPr id="202" name=""/>
           <p:cNvSpPr/>
           <p:nvPr/>
         </p:nvSpPr>
@@ -8410,7 +9265,7 @@
       </p:sp>
       <p:sp>
         <p:nvSpPr>
-          <p:cNvPr id="187" name="" descr="{&quot;isTemplate&quot;:true,&quot;type&quot;:&quot;text&quot;}"/>
+          <p:cNvPr id="203" name="" descr="{&quot;isTemplate&quot;:true,&quot;type&quot;:&quot;text&quot;}"/>
           <p:cNvSpPr txBox="1"/>
           <p:nvPr/>
         </p:nvSpPr>
@@ -8445,7 +9300,7 @@
       </p:sp>
       <p:sp>
         <p:nvSpPr>
-          <p:cNvPr id="188" name=""/>
+          <p:cNvPr id="204" name=""/>
           <p:cNvSpPr/>
           <p:nvPr/>
         </p:nvSpPr>
@@ -8471,7 +9326,7 @@
       </p:sp>
       <p:sp>
         <p:nvSpPr>
-          <p:cNvPr id="189" name=""/>
+          <p:cNvPr id="205" name=""/>
           <p:cNvSpPr/>
           <p:nvPr/>
         </p:nvSpPr>
@@ -8499,7 +9354,7 @@
       </p:sp>
       <p:pic>
         <p:nvPicPr>
-          <p:cNvPr id="190" name=""/>
+          <p:cNvPr id="206" name=""/>
           <p:cNvPicPr>
             <a:picLocks noChangeAspect="1"/>
           </p:cNvPicPr>
@@ -8530,7 +9385,7 @@
       </p:pic>
       <p:sp>
         <p:nvSpPr>
-          <p:cNvPr id="191" name=""/>
+          <p:cNvPr id="207" name=""/>
           <p:cNvSpPr/>
           <p:nvPr/>
         </p:nvSpPr>
@@ -8563,7 +9418,7 @@
       </p:sp>
       <p:sp>
         <p:nvSpPr>
-          <p:cNvPr id="192" name=""/>
+          <p:cNvPr id="208" name=""/>
           <p:cNvSpPr/>
           <p:nvPr/>
         </p:nvSpPr>
@@ -8620,7 +9475,7 @@
       </p:sp>
       <p:sp>
         <p:nvSpPr>
-          <p:cNvPr id="193" name="" descr="{&quot;isTemplate&quot;:true,&quot;type&quot;:&quot;text&quot;}"/>
+          <p:cNvPr id="209" name="" descr="{&quot;isTemplate&quot;:true,&quot;type&quot;:&quot;text&quot;}"/>
           <p:cNvSpPr txBox="1"/>
           <p:nvPr/>
         </p:nvSpPr>
@@ -8655,7 +9510,7 @@
       </p:sp>
       <p:sp>
         <p:nvSpPr>
-          <p:cNvPr id="194" name="" descr="{&quot;isTemplate&quot;:true,&quot;type&quot;:&quot;text&quot;}"/>
+          <p:cNvPr id="210" name="" descr="{&quot;isTemplate&quot;:true,&quot;type&quot;:&quot;text&quot;}"/>
           <p:cNvSpPr txBox="1"/>
           <p:nvPr/>
         </p:nvSpPr>
@@ -8692,7 +9547,7 @@
       </p:sp>
       <p:sp>
         <p:nvSpPr>
-          <p:cNvPr id="195" name="" descr="{&quot;isTemplate&quot;:true,&quot;type&quot;:&quot;text&quot;}"/>
+          <p:cNvPr id="211" name="" descr="{&quot;isTemplate&quot;:true,&quot;type&quot;:&quot;text&quot;}"/>
           <p:cNvSpPr txBox="1"/>
           <p:nvPr/>
         </p:nvSpPr>
@@ -8727,7 +9582,7 @@
       </p:sp>
       <p:sp>
         <p:nvSpPr>
-          <p:cNvPr id="196" name=""/>
+          <p:cNvPr id="212" name=""/>
           <p:cNvSpPr/>
           <p:nvPr/>
         </p:nvSpPr>
@@ -8760,7 +9615,7 @@
       </p:sp>
       <p:sp>
         <p:nvSpPr>
-          <p:cNvPr id="197" name=""/>
+          <p:cNvPr id="213" name=""/>
           <p:cNvSpPr/>
           <p:nvPr/>
         </p:nvSpPr>
@@ -8817,7 +9672,7 @@
       </p:sp>
       <p:sp>
         <p:nvSpPr>
-          <p:cNvPr id="198" name="" descr="{&quot;isTemplate&quot;:true,&quot;type&quot;:&quot;text&quot;}"/>
+          <p:cNvPr id="214" name="" descr="{&quot;isTemplate&quot;:true,&quot;type&quot;:&quot;text&quot;}"/>
           <p:cNvSpPr txBox="1"/>
           <p:nvPr/>
         </p:nvSpPr>
@@ -8852,7 +9707,7 @@
       </p:sp>
       <p:sp>
         <p:nvSpPr>
-          <p:cNvPr id="199" name="" descr="{&quot;isTemplate&quot;:true,&quot;type&quot;:&quot;text&quot;}"/>
+          <p:cNvPr id="215" name="" descr="{&quot;isTemplate&quot;:true,&quot;type&quot;:&quot;text&quot;}"/>
           <p:cNvSpPr txBox="1"/>
           <p:nvPr/>
         </p:nvSpPr>
@@ -8889,7 +9744,7 @@
       </p:sp>
       <p:sp>
         <p:nvSpPr>
-          <p:cNvPr id="200" name="" descr="{&quot;isTemplate&quot;:true,&quot;type&quot;:&quot;text&quot;}"/>
+          <p:cNvPr id="216" name="" descr="{&quot;isTemplate&quot;:true,&quot;type&quot;:&quot;text&quot;}"/>
           <p:cNvSpPr txBox="1"/>
           <p:nvPr/>
         </p:nvSpPr>
@@ -8924,7 +9779,7 @@
       </p:sp>
       <p:sp>
         <p:nvSpPr>
-          <p:cNvPr id="201" name=""/>
+          <p:cNvPr id="217" name=""/>
           <p:cNvSpPr/>
           <p:nvPr/>
         </p:nvSpPr>
@@ -8957,7 +9812,7 @@
       </p:sp>
       <p:sp>
         <p:nvSpPr>
-          <p:cNvPr id="202" name=""/>
+          <p:cNvPr id="218" name=""/>
           <p:cNvSpPr/>
           <p:nvPr/>
         </p:nvSpPr>
@@ -9014,7 +9869,7 @@
       </p:sp>
       <p:sp>
         <p:nvSpPr>
-          <p:cNvPr id="203" name="" descr="{&quot;isTemplate&quot;:true,&quot;type&quot;:&quot;text&quot;}"/>
+          <p:cNvPr id="219" name="" descr="{&quot;isTemplate&quot;:true,&quot;type&quot;:&quot;text&quot;}"/>
           <p:cNvSpPr txBox="1"/>
           <p:nvPr/>
         </p:nvSpPr>
@@ -9049,7 +9904,7 @@
       </p:sp>
       <p:sp>
         <p:nvSpPr>
-          <p:cNvPr id="204" name="" descr="{&quot;isTemplate&quot;:true,&quot;type&quot;:&quot;text&quot;}"/>
+          <p:cNvPr id="220" name="" descr="{&quot;isTemplate&quot;:true,&quot;type&quot;:&quot;text&quot;}"/>
           <p:cNvSpPr txBox="1"/>
           <p:nvPr/>
         </p:nvSpPr>
@@ -9086,7 +9941,7 @@
       </p:sp>
       <p:sp>
         <p:nvSpPr>
-          <p:cNvPr id="205" name="" descr="{&quot;isTemplate&quot;:true,&quot;type&quot;:&quot;text&quot;}"/>
+          <p:cNvPr id="221" name="" descr="{&quot;isTemplate&quot;:true,&quot;type&quot;:&quot;text&quot;}"/>
           <p:cNvSpPr txBox="1"/>
           <p:nvPr/>
         </p:nvSpPr>
@@ -9121,7 +9976,7 @@
       </p:sp>
       <p:sp>
         <p:nvSpPr>
-          <p:cNvPr id="206" name="" descr="{&quot;isTemplate&quot;:true,&quot;type&quot;:&quot;text&quot;}"/>
+          <p:cNvPr id="222" name="" descr="{&quot;isTemplate&quot;:true,&quot;type&quot;:&quot;text&quot;}"/>
           <p:cNvSpPr txBox="1"/>
           <p:nvPr/>
         </p:nvSpPr>
@@ -9156,7 +10011,7 @@
       </p:sp>
       <p:sp>
         <p:nvSpPr>
-          <p:cNvPr id="207" name="" descr="{&quot;isTemplate&quot;:true,&quot;type&quot;:&quot;text&quot;}"/>
+          <p:cNvPr id="223" name="" descr="{&quot;isTemplate&quot;:true,&quot;type&quot;:&quot;text&quot;}"/>
           <p:cNvSpPr txBox="1"/>
           <p:nvPr/>
         </p:nvSpPr>
@@ -9183,7 +10038,7 @@
                 <a:latin typeface="Verdana"/>
                 <a:ea typeface="Verdana"/>
               </a:rPr>
-              <a:t>04 / 15</a:t>
+              <a:t>04 / 16</a:t>
             </a:r>
             <a:endParaRPr/>
           </a:p>
@@ -9199,7 +10054,7 @@
   <p:cSld>
     <p:spTree>
       <p:nvGrpSpPr>
-        <p:cNvPr id="208" name="" descr="&lt;Slide&#10;    style={{&#10;        width: '1280px',&#10;        height: '720px',&#10;        background: 'linear-gradient(135deg, #51277C 0%, #7A45A8 100%)',&#10;        paddingTop: 60,&#10;        paddingBottom: 60,&#10;        paddingLeft: 72,&#10;        paddingRight: 72,&#10;        justifyContent: 'center',&#10;        position: 'relative',&#10;        overflow: 'hidden',&#10;    }}&#10;&gt;&#10;    &lt;Box&#10;        style={{&#10;            position: 'absolute',&#10;            top: -100,&#10;            right: -60,&#10;            width: 420,&#10;            height: 420,&#10;            borderRadius: 210,&#10;            background: '#AFC440',&#10;            opacity: 0.14,&#10;        }}&#10;    /&gt;&#10;    &lt;Box style={{ position: 'absolute', bottom: 46, right: 78, opacity: 0.16 }}&gt;&#10;        &lt;svg width={220} height={190} viewBox='0 0 220 190'&gt;&#10;            &lt;circle cx='70' cy='70' r='44' fill='none' stroke='#FFFFFF' strokeWidth='7' /&gt;&#10;            &lt;path d='M70 114v56' stroke='#FFFFFF' strokeWidth='7' strokeLinecap='round' /&gt;&#10;            &lt;path d='M96 140h26M96 158h26' stroke='#FFFFFF' strokeWidth='7' strokeLinecap='round' /&gt;&#10;            &lt;circle cx='164' cy='52' r='30' fill='none' stroke='#F3B26C' strokeWidth='7' /&gt;&#10;            &lt;path d='M148 52h32M164 36v32' stroke='#F3B26C' strokeWidth='7' strokeLinecap='round' /&gt;&#10;        &lt;/svg&gt;&#10;    &lt;/Box&gt;&#10;&#10;    &lt;Box style={{ position: 'relative', zIndex: 1, width: '62%' }}&gt;&#10;        &lt;Box style={{ flexDirection: 'row', alignItems: 'center', gap: 14, alignSelf: 'flex-start' }}&gt;&#10;            &lt;Text&#10;                style={{&#10;                    fontSize: 76,&#10;                    fontWeight: 'bold',&#10;                    color: '#F3B26C',&#10;                    fontFamily: 'Trebuchet MS',&#10;                    lineHeight: 1,&#10;                }}&#10;            &gt;&#10;                02&#10;            &lt;/Text&gt;&#10;            &lt;Box style={{ width: 3, height: 52, background: 'rgba(255,255,255,0.45)' }} /&gt;&#10;            &lt;Text style={{ fontSize: 19, color: 'rgba(255,255,255,0.8)', fontFamily: 'Verdana' }}&gt;&#10;                Bagian kedua&#10;            &lt;/Text&gt;&#10;        &lt;/Box&gt;&#10;&#10;        &lt;Text&#10;            style={{&#10;                marginTop: 26,&#10;                fontSize: 60,&#10;                fontWeight: 'bold',&#10;                color: '#FFFFFF',&#10;                fontFamily: 'Trebuchet MS',&#10;                lineHeight: 1.15,&#10;            }}&#10;        &gt;&#10;            Akun &amp;amp;{'\n'}wewenang&#10;        &lt;/Text&gt;&#10;&#10;        &lt;Text&#10;            style={{&#10;                marginTop: 24,&#10;                fontSize: 22,&#10;                color: 'rgba(255,255,255,0.88)',&#10;                fontFamily: 'Verdana',&#10;                lineHeight: 1.5,&#10;            }}&#10;        &gt;&#10;            Supaya jelas mana yang bisa dikerjakan sendiri, mana yang minta admin.&#10;        &lt;/Text&gt;&#10;    &lt;/Box&gt;&#10;&lt;/Slide&gt;&#10;"/>
+        <p:cNvPr id="224" name="" descr="&lt;Slide&#10;    style={{&#10;        width: '1280px',&#10;        height: '720px',&#10;        background: 'linear-gradient(135deg, #51277C 0%, #7A45A8 100%)',&#10;        paddingTop: 60,&#10;        paddingBottom: 60,&#10;        paddingLeft: 72,&#10;        paddingRight: 72,&#10;        justifyContent: 'center',&#10;        position: 'relative',&#10;        overflow: 'hidden',&#10;    }}&#10;&gt;&#10;    &lt;Box&#10;        style={{&#10;            position: 'absolute',&#10;            top: -100,&#10;            right: -60,&#10;            width: 420,&#10;            height: 420,&#10;            borderRadius: 210,&#10;            background: '#AFC440',&#10;            opacity: 0.14,&#10;        }}&#10;    /&gt;&#10;    &lt;Box style={{ position: 'absolute', bottom: 46, right: 78, opacity: 0.16 }}&gt;&#10;        &lt;svg width={220} height={190} viewBox='0 0 220 190'&gt;&#10;            &lt;circle cx='70' cy='70' r='44' fill='none' stroke='#FFFFFF' strokeWidth='7' /&gt;&#10;            &lt;path d='M70 114v56' stroke='#FFFFFF' strokeWidth='7' strokeLinecap='round' /&gt;&#10;            &lt;path d='M96 140h26M96 158h26' stroke='#FFFFFF' strokeWidth='7' strokeLinecap='round' /&gt;&#10;            &lt;circle cx='164' cy='52' r='30' fill='none' stroke='#F3B26C' strokeWidth='7' /&gt;&#10;            &lt;path d='M148 52h32M164 36v32' stroke='#F3B26C' strokeWidth='7' strokeLinecap='round' /&gt;&#10;        &lt;/svg&gt;&#10;    &lt;/Box&gt;&#10;&#10;    &lt;Box style={{ position: 'relative', zIndex: 1, width: '62%' }}&gt;&#10;        &lt;Box style={{ flexDirection: 'row', alignItems: 'center', gap: 14, alignSelf: 'flex-start' }}&gt;&#10;            &lt;Text&#10;                style={{&#10;                    fontSize: 76,&#10;                    fontWeight: 'bold',&#10;                    color: '#F3B26C',&#10;                    fontFamily: 'Trebuchet MS',&#10;                    lineHeight: 1,&#10;                }}&#10;            &gt;&#10;                02&#10;            &lt;/Text&gt;&#10;            &lt;Box style={{ width: 3, height: 52, background: 'rgba(255,255,255,0.45)' }} /&gt;&#10;            &lt;Text style={{ fontSize: 19, color: 'rgba(255,255,255,0.8)', fontFamily: 'Verdana' }}&gt;&#10;                Bagian kedua&#10;            &lt;/Text&gt;&#10;        &lt;/Box&gt;&#10;&#10;        &lt;Text&#10;            style={{&#10;                marginTop: 26,&#10;                fontSize: 60,&#10;                fontWeight: 'bold',&#10;                color: '#FFFFFF',&#10;                fontFamily: 'Trebuchet MS',&#10;                lineHeight: 1.15,&#10;            }}&#10;        &gt;&#10;            Akun &amp;amp;{'\n'}wewenang&#10;        &lt;/Text&gt;&#10;&#10;        &lt;Text&#10;            style={{&#10;                marginTop: 24,&#10;                fontSize: 22,&#10;                color: 'rgba(255,255,255,0.88)',&#10;                fontFamily: 'Verdana',&#10;                lineHeight: 1.5,&#10;            }}&#10;        &gt;&#10;            Supaya jelas mana yang bisa dikerjakan sendiri, mana yang minta admin.&#10;        &lt;/Text&gt;&#10;    &lt;/Box&gt;&#10;&lt;/Slide&gt;&#10;"/>
         <p:cNvGrpSpPr/>
         <p:nvPr/>
       </p:nvGrpSpPr>
@@ -9213,7 +10068,7 @@
       </p:grpSpPr>
       <p:sp>
         <p:nvSpPr>
-          <p:cNvPr id="209" name=""/>
+          <p:cNvPr id="225" name=""/>
           <p:cNvSpPr/>
           <p:nvPr/>
         </p:nvSpPr>
@@ -9245,7 +10100,7 @@
       </p:sp>
       <p:sp>
         <p:nvSpPr>
-          <p:cNvPr id="210" name=""/>
+          <p:cNvPr id="226" name=""/>
           <p:cNvSpPr/>
           <p:nvPr/>
         </p:nvSpPr>
@@ -9641,7 +10496,7 @@
       </p:sp>
       <p:pic>
         <p:nvPicPr>
-          <p:cNvPr id="211" name=""/>
+          <p:cNvPr id="227" name=""/>
           <p:cNvPicPr>
             <a:picLocks noChangeAspect="1"/>
           </p:cNvPicPr>
@@ -9673,7 +10528,7 @@
       </p:pic>
       <p:sp>
         <p:nvSpPr>
-          <p:cNvPr id="212" name="" descr="{&quot;isTemplate&quot;:true,&quot;type&quot;:&quot;text&quot;}"/>
+          <p:cNvPr id="228" name="" descr="{&quot;isTemplate&quot;:true,&quot;type&quot;:&quot;text&quot;}"/>
           <p:cNvSpPr txBox="1"/>
           <p:nvPr/>
         </p:nvSpPr>
@@ -9708,7 +10563,7 @@
       </p:sp>
       <p:sp>
         <p:nvSpPr>
-          <p:cNvPr id="213" name=""/>
+          <p:cNvPr id="229" name=""/>
           <p:cNvSpPr/>
           <p:nvPr/>
         </p:nvSpPr>
@@ -9734,7 +10589,7 @@
       </p:sp>
       <p:sp>
         <p:nvSpPr>
-          <p:cNvPr id="214" name="" descr="{&quot;isTemplate&quot;:true,&quot;type&quot;:&quot;text&quot;}"/>
+          <p:cNvPr id="230" name="" descr="{&quot;isTemplate&quot;:true,&quot;type&quot;:&quot;text&quot;}"/>
           <p:cNvSpPr txBox="1"/>
           <p:nvPr/>
         </p:nvSpPr>
@@ -9771,7 +10626,7 @@
       </p:sp>
       <p:sp>
         <p:nvSpPr>
-          <p:cNvPr id="215" name="" descr="{&quot;isTemplate&quot;:true,&quot;type&quot;:&quot;text&quot;}"/>
+          <p:cNvPr id="231" name="" descr="{&quot;isTemplate&quot;:true,&quot;type&quot;:&quot;text&quot;}"/>
           <p:cNvSpPr txBox="1"/>
           <p:nvPr/>
         </p:nvSpPr>
@@ -9824,7 +10679,7 @@
       </p:sp>
       <p:sp>
         <p:nvSpPr>
-          <p:cNvPr id="216" name="" descr="{&quot;isTemplate&quot;:true,&quot;type&quot;:&quot;text&quot;}"/>
+          <p:cNvPr id="232" name="" descr="{&quot;isTemplate&quot;:true,&quot;type&quot;:&quot;text&quot;}"/>
           <p:cNvSpPr txBox="1"/>
           <p:nvPr/>
         </p:nvSpPr>
@@ -9871,7 +10726,7 @@
   <p:cSld>
     <p:spTree>
       <p:nvGrpSpPr>
-        <p:cNvPr id="217" name="" descr="&lt;Slide&#13;&#10;    style={{&#13;&#10;        width: '1280px',&#13;&#10;        height: '720px',&#13;&#10;        background: '#FAF7F2',&#13;&#10;        paddingTop: 20,&#13;&#10;        paddingBottom: 20,&#13;&#10;        paddingLeft: 64,&#13;&#10;        paddingRight: 64,&#13;&#10;    }}&#13;&#10;&gt;&#13;&#10;    {/* ── A · blok judul ── */}&#13;&#10;    &lt;Box style={{ height: 110, justifyContent: 'center' }}&gt;&#13;&#10;        &lt;Text&#13;&#10;            style={{&#13;&#10;                fontSize: 34,&#13;&#10;                fontWeight: 'bold',&#13;&#10;                color: '#51277C',&#13;&#10;                fontFamily: 'Trebuchet MS',&#13;&#10;                lineHeight: 1.3,&#13;&#10;            }}&#13;&#10;        &gt;&#13;&#10;            Admin &amp;amp; Korlas: bedanya di mana&#13;&#10;        &lt;/Text&gt;&#13;&#10;        &lt;Box style={{ marginTop: 10, width: 72, height: 6, borderRadius: 3, background: '#51277C' }} /&gt;&#13;&#10;    &lt;/Box&gt;&#13;&#10;&#13;&#10;    {/* ── B · area konten ── */}&#13;&#10;    &lt;Box style={{ height: 530, flexDirection: 'row', gap: 26 }}&gt;&#13;&#10;        {/* kiri 60% · dua kartu wewenang */}&#13;&#10;        &lt;Box style={{ width: '60%', height: '100%', justifyContent: 'space-between' }}&gt;&#13;&#10;            &lt;Box&#13;&#10;                style={{&#13;&#10;                    height: 258,&#13;&#10;                    background: '#FFFFFF',&#13;&#10;                    borderRadius: 16,&#13;&#10;                    boxShadow: '0 4px 20px rgba(0,0,0,0.08)',&#13;&#10;                    padding: 22,&#13;&#10;                    borderTop: '8px solid #AFC440',&#13;&#10;                }}&#13;&#10;            &gt;&#13;&#10;                &lt;Text&#13;&#10;                    style={{&#13;&#10;                        fontSize: 25,&#13;&#10;                        fontWeight: 'bold',&#13;&#10;                        color: '#51277C',&#13;&#10;                        fontFamily: 'Trebuchet MS',&#13;&#10;                    }}&#13;&#10;                &gt;&#13;&#10;                    Korlas boleh sendiri&#13;&#10;                &lt;/Text&gt;&#13;&#10;                &lt;Box style={{ marginTop: 12 }}&gt;&#13;&#10;                    {[&#13;&#10;                        'Menyusun &amp; mengubah jadwal kelasnya, selama belum dikunci',&#13;&#10;                        'Menentukan petugas, atau membiarkannya kosong',&#13;&#10;                        'Menyalin Sepekan &amp; menempel teks jadwal dari sekolah',&#13;&#10;                        'Mengunci lalu mempublikasikan jadwal kelasnya',&#13;&#10;                        'Mengambil tanggal piket seperti orang tua lainnya',&#13;&#10;                    ].map((s, i) =&gt; (&#13;&#10;                        &lt;Box key={i} style={{ flexDirection: 'row', alignItems: 'center', gap: 10, marginTop: 7 }}&gt;&#13;&#10;                            &lt;svg width={18} height={18} viewBox='0 0 24 24'&gt;&#13;&#10;                                &lt;path d='M5 13l4 4 10-11' fill='none' stroke='#AFC440' strokeWidth='3' strokeLinecap='round' strokeLinejoin='round' /&gt;&#13;&#10;                            &lt;/svg&gt;&#13;&#10;                            &lt;Text style={{ flex: 1, fontSize: 16, color: '#2A2333', fontFamily: 'Verdana', lineHeight: 1.45 }}&gt;&#13;&#10;                                {s}&#13;&#10;                            &lt;/Text&gt;&#13;&#10;                        &lt;/Box&gt;&#13;&#10;                    ))}&#13;&#10;                &lt;/Box&gt;&#13;&#10;            &lt;/Box&gt;&#13;&#10;&#13;&#10;            &lt;Box&#13;&#10;                style={{&#13;&#10;                    height: 254,&#13;&#10;                    background: '#FFFFFF',&#13;&#10;                    borderRadius: 16,&#13;&#10;                    boxShadow: '0 4px 20px rgba(0,0,0,0.08)',&#13;&#10;                    padding: 22,&#13;&#10;                    borderTop: '8px solid #F3B26C',&#13;&#10;                }}&#13;&#10;            &gt;&#13;&#10;                &lt;Text&#13;&#10;                    style={{&#13;&#10;                        fontSize: 25,&#13;&#10;                        fontWeight: 'bold',&#13;&#10;                        color: '#51277C',&#13;&#10;                        fontFamily: 'Trebuchet MS',&#13;&#10;                    }}&#13;&#10;                &gt;&#13;&#10;                    Tetap wewenang admin&#13;&#10;                &lt;/Text&gt;&#13;&#10;                &lt;Box style={{ marginTop: 12 }}&gt;&#13;&#10;                    {[&#13;&#10;                        'Mengelola katalog menu &amp; kategori',&#13;&#10;                        'Mengelola akun orang tua, termasuk mengangkat korlas',&#13;&#10;                        'Hari libur sekolah — berlaku untuk semua kelas',&#13;&#10;                        'Membuka kunci jadwal yang sudah dikunci atau terbit',&#13;&#10;                    ].map((s, i) =&gt; (&#13;&#10;                        &lt;Box key={i} style={{ flexDirection: 'row', alignItems: 'center', gap: 10, marginTop: 7 }}&gt;&#13;&#10;                            &lt;svg width={18} height={18} viewBox='0 0 24 24'&gt;&#13;&#10;                                &lt;path d='M7 7l10 10M17 7L7 17' fill='none' stroke='#F3B26C' strokeWidth='3' strokeLinecap='round' /&gt;&#13;&#10;                            &lt;/svg&gt;&#13;&#10;                            &lt;Text style={{ flex: 1, fontSize: 16, color: '#2A2333', fontFamily: 'Verdana', lineHeight: 1.45 }}&gt;&#13;&#10;                                {s}&#13;&#10;                            &lt;/Text&gt;&#13;&#10;                        &lt;/Box&gt;&#13;&#10;                    ))}&#13;&#10;                &lt;/Box&gt;&#13;&#10;            &lt;/Box&gt;&#13;&#10;        &lt;/Box&gt;&#13;&#10;&#13;&#10;        {/* kanan 40% · ilustrasi dua peran */}&#13;&#10;        &lt;Box&#13;&#10;            style={{&#13;&#10;                width: '40%',&#13;&#10;                height: '100%',&#13;&#10;                background: 'rgba(81,39,124,0.06)',&#13;&#10;                borderRadius: 20,&#13;&#10;                justifyContent: 'center',&#13;&#10;                alignItems: 'center',&#13;&#10;            }}&#13;&#10;        &gt;&#13;&#10;            &lt;svg width={360} height={400} viewBox='0 0 360 400'&gt;&#13;&#10;                {/* korlas */}&#13;&#10;                &lt;rect x='24' y='24' width='312' height='150' rx='18' fill='#FFFFFF' stroke='#AFC440' strokeWidth='3' /&gt;&#13;&#10;                &lt;circle cx='76' cy='78' r='30' fill='#AFC440' /&gt;&#13;&#10;                &lt;text x='76' y='90' fontFamily='Trebuchet MS' fontSize='30' fontWeight='bold' fill='#3F4718' textAnchor='middle'&gt;&#13;&#10;                    K&#13;&#10;                &lt;/text&gt;&#13;&#10;                &lt;text x='124' y='70' fontFamily='Trebuchet MS' fontSize='24' fontWeight='bold' fill='#51277C'&gt;&#13;&#10;                    Korlas&#13;&#10;                &lt;/text&gt;&#13;&#10;                &lt;text x='124' y='102' fontFamily='Verdana' fontSize='15' fill='#6B6478'&gt;&#13;&#10;                    satu kelas&#13;&#10;                &lt;/text&gt;&#13;&#10;                &lt;rect x='52' y='122' width='256' height='9' rx='5' fill='#DED7CB' /&gt;&#13;&#10;                &lt;rect x='52' y='140' width='196' height='9' rx='5' fill='#EDE8DF' /&gt;&#13;&#10;&#13;&#10;                {/* admin */}&#13;&#10;                &lt;rect x='24' y='196' width='312' height='150' rx='18' fill='#51277C' /&gt;&#13;&#10;                &lt;circle cx='76' cy='250' r='30' fill='#F3B26C' /&gt;&#13;&#10;                &lt;text x='76' y='262' fontFamily='Trebuchet MS' fontSize='30' fontWeight='bold' fill='#51277C' textAnchor='middle'&gt;&#13;&#10;                    A&#13;&#10;                &lt;/text&gt;&#13;&#10;                &lt;text x='124' y='242' fontFamily='Trebuchet MS' fontSize='24' fontWeight='bold' fill='#FFFFFF'&gt;&#13;&#10;                    Admin&#13;&#10;                &lt;/text&gt;&#13;&#10;                &lt;text x='124' y='274' fontFamily='Verdana' fontSize='15' fill='#EFEAE1'&gt;&#13;&#10;                    semua kelas&#13;&#10;                &lt;/text&gt;&#13;&#10;                &lt;rect x='52' y='294' width='256' height='9' rx='5' fill='rgba(255,255,255,0.5)' /&gt;&#13;&#10;                &lt;rect x='52' y='312' width='216' height='9' rx='5' fill='rgba(255,255,255,0.3)' /&gt;&#13;&#10;&#13;&#10;                &lt;text x='180' y='380' fontFamily='Verdana' fontSize='16' fill='#6B6478' textAnchor='middle'&gt;&#13;&#10;                    Admin melihat semua kelas&#13;&#10;                &lt;/text&gt;&#13;&#10;            &lt;/svg&gt;&#13;&#10;        &lt;/Box&gt;&#13;&#10;    &lt;/Box&gt;&#13;&#10;&#13;&#10;    {/* ── C · bilah kaki ── */}&#13;&#10;    &lt;Box&#13;&#10;        style={{&#13;&#10;            height: 40,&#13;&#10;            flexDirection: 'row',&#13;&#10;            alignItems: 'center',&#13;&#10;            justifyContent: 'space-between',&#13;&#10;        }}&#13;&#10;    &gt;&#13;&#10;        &lt;Text style={{ fontSize: 14, color: '#6B6478', fontFamily: 'Verdana' }}&gt;&#13;&#10;            Pizza Snack Play · Panduan Korlas &amp;amp; Admin&#13;&#10;        &lt;/Text&gt;&#13;&#10;        &lt;Text style={{ fontSize: 14, color: '#6B6478', fontFamily: 'Verdana' }}&gt;06 / 15&lt;/Text&gt;&#13;&#10;    &lt;/Box&gt;&#13;&#10;&lt;/Slide&gt;&#13;&#10;"/>
+        <p:cNvPr id="233" name="" descr="&lt;Slide&#10;    style={{&#10;        width: '1280px',&#10;        height: '720px',&#10;        background: '#FAF7F2',&#10;        paddingTop: 20,&#10;        paddingBottom: 20,&#10;        paddingLeft: 64,&#10;        paddingRight: 64,&#10;    }}&#10;&gt;&#10;    {/* ── A · blok judul ── */}&#10;    &lt;Box style={{ height: 110, justifyContent: 'center' }}&gt;&#10;        &lt;Text&#10;            style={{&#10;                fontSize: 34,&#10;                fontWeight: 'bold',&#10;                color: '#51277C',&#10;                fontFamily: 'Trebuchet MS',&#10;                lineHeight: 1.3,&#10;            }}&#10;        &gt;&#10;            Admin &amp;amp; Korlas: bedanya di mana&#10;        &lt;/Text&gt;&#10;        &lt;Box style={{ marginTop: 10, width: 72, height: 6, borderRadius: 3, background: '#51277C' }} /&gt;&#10;    &lt;/Box&gt;&#10;&#10;    {/* ── B · area konten ── */}&#10;    &lt;Box style={{ height: 530, flexDirection: 'row', gap: 26 }}&gt;&#10;        {/* kiri 60% · dua kartu wewenang */}&#10;        &lt;Box style={{ width: '60%', height: '100%', justifyContent: 'space-between' }}&gt;&#10;            &lt;Box&#10;                style={{&#10;                    height: 258,&#10;                    background: '#FFFFFF',&#10;                    borderRadius: 16,&#10;                    boxShadow: '0 4px 20px rgba(0,0,0,0.08)',&#10;                    padding: 22,&#10;                    borderTop: '8px solid #AFC440',&#10;                }}&#10;            &gt;&#10;                &lt;Text&#10;                    style={{&#10;                        fontSize: 25,&#10;                        fontWeight: 'bold',&#10;                        color: '#51277C',&#10;                        fontFamily: 'Trebuchet MS',&#10;                    }}&#10;                &gt;&#10;                    Korlas boleh sendiri&#10;                &lt;/Text&gt;&#10;                &lt;Box style={{ marginTop: 12 }}&gt;&#10;                    {[&#10;                        'Menyusun &amp; mengubah jadwal kelasnya, selama belum dikunci',&#10;                        'Menentukan petugas, atau membiarkannya kosong',&#10;                        'Menyalin Sepekan &amp; menempel teks jadwal dari sekolah',&#10;                        'Mengunci lalu mempublikasikan jadwal kelasnya',&#10;                        'Mengambil tanggal piket seperti orang tua lainnya',&#10;                    ].map((s, i) =&gt; (&#10;                        &lt;Box key={i} style={{ flexDirection: 'row', alignItems: 'center', gap: 10, marginTop: 7 }}&gt;&#10;                            &lt;svg width={18} height={18} viewBox='0 0 24 24'&gt;&#10;                                &lt;path d='M5 13l4 4 10-11' fill='none' stroke='#AFC440' strokeWidth='3' strokeLinecap='round' strokeLinejoin='round' /&gt;&#10;                            &lt;/svg&gt;&#10;                            &lt;Text style={{ flex: 1, fontSize: 16, color: '#2A2333', fontFamily: 'Verdana', lineHeight: 1.45 }}&gt;&#10;                                {s}&#10;                            &lt;/Text&gt;&#10;                        &lt;/Box&gt;&#10;                    ))}&#10;                &lt;/Box&gt;&#10;            &lt;/Box&gt;&#10;&#10;            &lt;Box&#10;                style={{&#10;                    height: 254,&#10;                    background: '#FFFFFF',&#10;                    borderRadius: 16,&#10;                    boxShadow: '0 4px 20px rgba(0,0,0,0.08)',&#10;                    padding: 22,&#10;                    borderTop: '8px solid #F3B26C',&#10;                }}&#10;            &gt;&#10;                &lt;Text&#10;                    style={{&#10;                        fontSize: 25,&#10;                        fontWeight: 'bold',&#10;                        color: '#51277C',&#10;                        fontFamily: 'Trebuchet MS',&#10;                    }}&#10;                &gt;&#10;                    Tetap wewenang admin&#10;                &lt;/Text&gt;&#10;                &lt;Box style={{ marginTop: 12 }}&gt;&#10;                    {[&#10;                        'Mengelola katalog menu &amp; kategori',&#10;                        'Mengelola akun orang tua, termasuk mengangkat korlas',&#10;                        'Hari libur sekolah — berlaku untuk semua kelas',&#10;                        'Membuka kunci jadwal yang sudah dikunci atau terbit',&#10;                    ].map((s, i) =&gt; (&#10;                        &lt;Box key={i} style={{ flexDirection: 'row', alignItems: 'center', gap: 10, marginTop: 7 }}&gt;&#10;                            &lt;svg width={18} height={18} viewBox='0 0 24 24'&gt;&#10;                                &lt;path d='M7 7l10 10M17 7L7 17' fill='none' stroke='#F3B26C' strokeWidth='3' strokeLinecap='round' /&gt;&#10;                            &lt;/svg&gt;&#10;                            &lt;Text style={{ flex: 1, fontSize: 16, color: '#2A2333', fontFamily: 'Verdana', lineHeight: 1.45 }}&gt;&#10;                                {s}&#10;                            &lt;/Text&gt;&#10;                        &lt;/Box&gt;&#10;                    ))}&#10;                &lt;/Box&gt;&#10;            &lt;/Box&gt;&#10;        &lt;/Box&gt;&#10;&#10;        {/* kanan 40% · ilustrasi dua peran */}&#10;        &lt;Box&#10;            style={{&#10;                width: '40%',&#10;                height: '100%',&#10;                background: 'rgba(81,39,124,0.06)',&#10;                borderRadius: 20,&#10;                justifyContent: 'center',&#10;                alignItems: 'center',&#10;            }}&#10;        &gt;&#10;            &lt;svg width={360} height={400} viewBox='0 0 360 400'&gt;&#10;                {/* korlas */}&#10;                &lt;rect x='24' y='24' width='312' height='150' rx='18' fill='#FFFFFF' stroke='#AFC440' strokeWidth='3' /&gt;&#10;                &lt;circle cx='76' cy='78' r='30' fill='#AFC440' /&gt;&#10;                &lt;text x='76' y='90' fontFamily='Trebuchet MS' fontSize='30' fontWeight='bold' fill='#3F4718' textAnchor='middle'&gt;&#10;                    K&#10;                &lt;/text&gt;&#10;                &lt;text x='124' y='70' fontFamily='Trebuchet MS' fontSize='24' fontWeight='bold' fill='#51277C'&gt;&#10;                    Korlas&#10;                &lt;/text&gt;&#10;                &lt;text x='124' y='102' fontFamily='Verdana' fontSize='15' fill='#6B6478'&gt;&#10;                    satu kelas&#10;                &lt;/text&gt;&#10;                &lt;rect x='52' y='122' width='256' height='9' rx='5' fill='#DED7CB' /&gt;&#10;                &lt;rect x='52' y='140' width='196' height='9' rx='5' fill='#EDE8DF' /&gt;&#10;&#10;                {/* admin */}&#10;                &lt;rect x='24' y='196' width='312' height='150' rx='18' fill='#51277C' /&gt;&#10;                &lt;circle cx='76' cy='250' r='30' fill='#F3B26C' /&gt;&#10;                &lt;text x='76' y='262' fontFamily='Trebuchet MS' fontSize='30' fontWeight='bold' fill='#51277C' textAnchor='middle'&gt;&#10;                    A&#10;                &lt;/text&gt;&#10;                &lt;text x='124' y='242' fontFamily='Trebuchet MS' fontSize='24' fontWeight='bold' fill='#FFFFFF'&gt;&#10;                    Admin&#10;                &lt;/text&gt;&#10;                &lt;text x='124' y='274' fontFamily='Verdana' fontSize='15' fill='#EFEAE1'&gt;&#10;                    semua kelas&#10;                &lt;/text&gt;&#10;                &lt;rect x='52' y='294' width='256' height='9' rx='5' fill='rgba(255,255,255,0.5)' /&gt;&#10;                &lt;rect x='52' y='312' width='216' height='9' rx='5' fill='rgba(255,255,255,0.3)' /&gt;&#10;&#10;                &lt;text x='180' y='380' fontFamily='Verdana' fontSize='16' fill='#6B6478' textAnchor='middle'&gt;&#10;                    Admin melihat semua kelas&#10;                &lt;/text&gt;&#10;            &lt;/svg&gt;&#10;        &lt;/Box&gt;&#10;    &lt;/Box&gt;&#10;&#10;    {/* ── C · bilah kaki ── */}&#10;    &lt;Box&#10;        style={{&#10;            height: 40,&#10;            flexDirection: 'row',&#10;            alignItems: 'center',&#10;            justifyContent: 'space-between',&#10;        }}&#10;    &gt;&#10;        &lt;Text style={{ fontSize: 14, color: '#6B6478', fontFamily: 'Verdana' }}&gt;&#10;            Pizza Snack Play · Panduan Korlas &amp;amp; Admin&#10;        &lt;/Text&gt;&#10;        &lt;Text style={{ fontSize: 14, color: '#6B6478', fontFamily: 'Verdana' }}&gt;06 / 16&lt;/Text&gt;&#10;    &lt;/Box&gt;&#10;&lt;/Slide&gt;&#10;"/>
         <p:cNvGrpSpPr/>
         <p:nvPr/>
       </p:nvGrpSpPr>
@@ -9885,7 +10740,7 @@
       </p:grpSpPr>
       <p:sp>
         <p:nvSpPr>
-          <p:cNvPr id="218" name=""/>
+          <p:cNvPr id="234" name=""/>
           <p:cNvSpPr/>
           <p:nvPr/>
         </p:nvSpPr>
@@ -9909,7 +10764,7 @@
       </p:sp>
       <p:sp>
         <p:nvSpPr>
-          <p:cNvPr id="219" name="" descr="{&quot;isTemplate&quot;:true,&quot;type&quot;:&quot;text&quot;}"/>
+          <p:cNvPr id="235" name="" descr="{&quot;isTemplate&quot;:true,&quot;type&quot;:&quot;text&quot;}"/>
           <p:cNvSpPr txBox="1"/>
           <p:nvPr/>
         </p:nvSpPr>
@@ -9944,7 +10799,7 @@
       </p:sp>
       <p:sp>
         <p:nvSpPr>
-          <p:cNvPr id="220" name=""/>
+          <p:cNvPr id="236" name=""/>
           <p:cNvSpPr/>
           <p:nvPr/>
         </p:nvSpPr>
@@ -9970,7 +10825,7 @@
       </p:sp>
       <p:sp>
         <p:nvSpPr>
-          <p:cNvPr id="221" name=""/>
+          <p:cNvPr id="237" name=""/>
           <p:cNvSpPr/>
           <p:nvPr/>
         </p:nvSpPr>
@@ -10003,7 +10858,7 @@
       </p:sp>
       <p:sp>
         <p:nvSpPr>
-          <p:cNvPr id="222" name=""/>
+          <p:cNvPr id="238" name=""/>
           <p:cNvSpPr/>
           <p:nvPr/>
         </p:nvSpPr>
@@ -10060,7 +10915,7 @@
       </p:sp>
       <p:sp>
         <p:nvSpPr>
-          <p:cNvPr id="223" name="" descr="{&quot;isTemplate&quot;:true,&quot;type&quot;:&quot;text&quot;}"/>
+          <p:cNvPr id="239" name="" descr="{&quot;isTemplate&quot;:true,&quot;type&quot;:&quot;text&quot;}"/>
           <p:cNvSpPr txBox="1"/>
           <p:nvPr/>
         </p:nvSpPr>
@@ -10095,7 +10950,7 @@
       </p:sp>
       <p:pic>
         <p:nvPicPr>
-          <p:cNvPr id="224" name=""/>
+          <p:cNvPr id="240" name=""/>
           <p:cNvPicPr>
             <a:picLocks noChangeAspect="1"/>
           </p:cNvPicPr>
@@ -10126,7 +10981,7 @@
       </p:pic>
       <p:sp>
         <p:nvSpPr>
-          <p:cNvPr id="225" name="" descr="{&quot;isTemplate&quot;:true,&quot;type&quot;:&quot;text&quot;}"/>
+          <p:cNvPr id="241" name="" descr="{&quot;isTemplate&quot;:true,&quot;type&quot;:&quot;text&quot;}"/>
           <p:cNvSpPr txBox="1"/>
           <p:nvPr/>
         </p:nvSpPr>
@@ -10161,7 +11016,7 @@
       </p:sp>
       <p:pic>
         <p:nvPicPr>
-          <p:cNvPr id="226" name=""/>
+          <p:cNvPr id="242" name=""/>
           <p:cNvPicPr>
             <a:picLocks noChangeAspect="1"/>
           </p:cNvPicPr>
@@ -10192,7 +11047,7 @@
       </p:pic>
       <p:sp>
         <p:nvSpPr>
-          <p:cNvPr id="227" name="" descr="{&quot;isTemplate&quot;:true,&quot;type&quot;:&quot;text&quot;}"/>
+          <p:cNvPr id="243" name="" descr="{&quot;isTemplate&quot;:true,&quot;type&quot;:&quot;text&quot;}"/>
           <p:cNvSpPr txBox="1"/>
           <p:nvPr/>
         </p:nvSpPr>
@@ -10227,7 +11082,7 @@
       </p:sp>
       <p:pic>
         <p:nvPicPr>
-          <p:cNvPr id="228" name=""/>
+          <p:cNvPr id="244" name=""/>
           <p:cNvPicPr>
             <a:picLocks noChangeAspect="1"/>
           </p:cNvPicPr>
@@ -10258,7 +11113,7 @@
       </p:pic>
       <p:sp>
         <p:nvSpPr>
-          <p:cNvPr id="229" name="" descr="{&quot;isTemplate&quot;:true,&quot;type&quot;:&quot;text&quot;}"/>
+          <p:cNvPr id="245" name="" descr="{&quot;isTemplate&quot;:true,&quot;type&quot;:&quot;text&quot;}"/>
           <p:cNvSpPr txBox="1"/>
           <p:nvPr/>
         </p:nvSpPr>
@@ -10293,7 +11148,7 @@
       </p:sp>
       <p:pic>
         <p:nvPicPr>
-          <p:cNvPr id="230" name=""/>
+          <p:cNvPr id="246" name=""/>
           <p:cNvPicPr>
             <a:picLocks noChangeAspect="1"/>
           </p:cNvPicPr>
@@ -10324,7 +11179,7 @@
       </p:pic>
       <p:sp>
         <p:nvSpPr>
-          <p:cNvPr id="231" name="" descr="{&quot;isTemplate&quot;:true,&quot;type&quot;:&quot;text&quot;}"/>
+          <p:cNvPr id="247" name="" descr="{&quot;isTemplate&quot;:true,&quot;type&quot;:&quot;text&quot;}"/>
           <p:cNvSpPr txBox="1"/>
           <p:nvPr/>
         </p:nvSpPr>
@@ -10359,7 +11214,7 @@
       </p:sp>
       <p:pic>
         <p:nvPicPr>
-          <p:cNvPr id="232" name=""/>
+          <p:cNvPr id="248" name=""/>
           <p:cNvPicPr>
             <a:picLocks noChangeAspect="1"/>
           </p:cNvPicPr>
@@ -10390,7 +11245,7 @@
       </p:pic>
       <p:sp>
         <p:nvSpPr>
-          <p:cNvPr id="233" name="" descr="{&quot;isTemplate&quot;:true,&quot;type&quot;:&quot;text&quot;}"/>
+          <p:cNvPr id="249" name="" descr="{&quot;isTemplate&quot;:true,&quot;type&quot;:&quot;text&quot;}"/>
           <p:cNvSpPr txBox="1"/>
           <p:nvPr/>
         </p:nvSpPr>
@@ -10425,7 +11280,7 @@
       </p:sp>
       <p:sp>
         <p:nvSpPr>
-          <p:cNvPr id="234" name=""/>
+          <p:cNvPr id="250" name=""/>
           <p:cNvSpPr/>
           <p:nvPr/>
         </p:nvSpPr>
@@ -10458,7 +11313,7 @@
       </p:sp>
       <p:sp>
         <p:nvSpPr>
-          <p:cNvPr id="235" name=""/>
+          <p:cNvPr id="251" name=""/>
           <p:cNvSpPr/>
           <p:nvPr/>
         </p:nvSpPr>
@@ -10515,7 +11370,7 @@
       </p:sp>
       <p:sp>
         <p:nvSpPr>
-          <p:cNvPr id="236" name="" descr="{&quot;isTemplate&quot;:true,&quot;type&quot;:&quot;text&quot;}"/>
+          <p:cNvPr id="252" name="" descr="{&quot;isTemplate&quot;:true,&quot;type&quot;:&quot;text&quot;}"/>
           <p:cNvSpPr txBox="1"/>
           <p:nvPr/>
         </p:nvSpPr>
@@ -10550,7 +11405,7 @@
       </p:sp>
       <p:pic>
         <p:nvPicPr>
-          <p:cNvPr id="237" name=""/>
+          <p:cNvPr id="253" name=""/>
           <p:cNvPicPr>
             <a:picLocks noChangeAspect="1"/>
           </p:cNvPicPr>
@@ -10581,7 +11436,7 @@
       </p:pic>
       <p:sp>
         <p:nvSpPr>
-          <p:cNvPr id="238" name="" descr="{&quot;isTemplate&quot;:true,&quot;type&quot;:&quot;text&quot;}"/>
+          <p:cNvPr id="254" name="" descr="{&quot;isTemplate&quot;:true,&quot;type&quot;:&quot;text&quot;}"/>
           <p:cNvSpPr txBox="1"/>
           <p:nvPr/>
         </p:nvSpPr>
@@ -10616,7 +11471,7 @@
       </p:sp>
       <p:pic>
         <p:nvPicPr>
-          <p:cNvPr id="239" name=""/>
+          <p:cNvPr id="255" name=""/>
           <p:cNvPicPr>
             <a:picLocks noChangeAspect="1"/>
           </p:cNvPicPr>
@@ -10647,7 +11502,7 @@
       </p:pic>
       <p:sp>
         <p:nvSpPr>
-          <p:cNvPr id="240" name="" descr="{&quot;isTemplate&quot;:true,&quot;type&quot;:&quot;text&quot;}"/>
+          <p:cNvPr id="256" name="" descr="{&quot;isTemplate&quot;:true,&quot;type&quot;:&quot;text&quot;}"/>
           <p:cNvSpPr txBox="1"/>
           <p:nvPr/>
         </p:nvSpPr>
@@ -10682,7 +11537,7 @@
       </p:sp>
       <p:pic>
         <p:nvPicPr>
-          <p:cNvPr id="241" name=""/>
+          <p:cNvPr id="257" name=""/>
           <p:cNvPicPr>
             <a:picLocks noChangeAspect="1"/>
           </p:cNvPicPr>
@@ -10713,7 +11568,7 @@
       </p:pic>
       <p:sp>
         <p:nvSpPr>
-          <p:cNvPr id="242" name="" descr="{&quot;isTemplate&quot;:true,&quot;type&quot;:&quot;text&quot;}"/>
+          <p:cNvPr id="258" name="" descr="{&quot;isTemplate&quot;:true,&quot;type&quot;:&quot;text&quot;}"/>
           <p:cNvSpPr txBox="1"/>
           <p:nvPr/>
         </p:nvSpPr>
@@ -10748,7 +11603,7 @@
       </p:sp>
       <p:pic>
         <p:nvPicPr>
-          <p:cNvPr id="243" name=""/>
+          <p:cNvPr id="259" name=""/>
           <p:cNvPicPr>
             <a:picLocks noChangeAspect="1"/>
           </p:cNvPicPr>
@@ -10779,7 +11634,7 @@
       </p:pic>
       <p:sp>
         <p:nvSpPr>
-          <p:cNvPr id="244" name="" descr="{&quot;isTemplate&quot;:true,&quot;type&quot;:&quot;text&quot;}"/>
+          <p:cNvPr id="260" name="" descr="{&quot;isTemplate&quot;:true,&quot;type&quot;:&quot;text&quot;}"/>
           <p:cNvSpPr txBox="1"/>
           <p:nvPr/>
         </p:nvSpPr>
@@ -10814,7 +11669,7 @@
       </p:sp>
       <p:sp>
         <p:nvSpPr>
-          <p:cNvPr id="245" name=""/>
+          <p:cNvPr id="261" name=""/>
           <p:cNvSpPr/>
           <p:nvPr/>
         </p:nvSpPr>
@@ -10842,7 +11697,7 @@
       </p:sp>
       <p:pic>
         <p:nvPicPr>
-          <p:cNvPr id="246" name=""/>
+          <p:cNvPr id="262" name=""/>
           <p:cNvPicPr>
             <a:picLocks noChangeAspect="1"/>
           </p:cNvPicPr>
@@ -10873,7 +11728,7 @@
       </p:pic>
       <p:sp>
         <p:nvSpPr>
-          <p:cNvPr id="247" name="" descr="{&quot;isTemplate&quot;:true,&quot;type&quot;:&quot;text&quot;}"/>
+          <p:cNvPr id="263" name="" descr="{&quot;isTemplate&quot;:true,&quot;type&quot;:&quot;text&quot;}"/>
           <p:cNvSpPr txBox="1"/>
           <p:nvPr/>
         </p:nvSpPr>
@@ -10908,7 +11763,7 @@
       </p:sp>
       <p:sp>
         <p:nvSpPr>
-          <p:cNvPr id="248" name="" descr="{&quot;isTemplate&quot;:true,&quot;type&quot;:&quot;text&quot;}"/>
+          <p:cNvPr id="264" name="" descr="{&quot;isTemplate&quot;:true,&quot;type&quot;:&quot;text&quot;}"/>
           <p:cNvSpPr txBox="1"/>
           <p:nvPr/>
         </p:nvSpPr>
@@ -10935,7 +11790,7 @@
                 <a:latin typeface="Verdana"/>
                 <a:ea typeface="Verdana"/>
               </a:rPr>
-              <a:t>06 / 15</a:t>
+              <a:t>06 / 16</a:t>
             </a:r>
             <a:endParaRPr/>
           </a:p>
@@ -10951,7 +11806,7 @@
   <p:cSld>
     <p:spTree>
       <p:nvGrpSpPr>
-        <p:cNvPr id="249" name="" descr="&lt;Slide&#10;    style={{&#10;        width: '1280px',&#10;        height: '720px',&#10;        background: 'linear-gradient(135deg, #51277C 0%, #7A45A8 100%)',&#10;        paddingTop: 60,&#10;        paddingBottom: 60,&#10;        paddingLeft: 72,&#10;        paddingRight: 72,&#10;        justifyContent: 'center',&#10;        position: 'relative',&#10;        overflow: 'hidden',&#10;    }}&#10;&gt;&#10;    &lt;Box&#10;        style={{&#10;            position: 'absolute',&#10;            top: -100,&#10;            right: -60,&#10;            width: 420,&#10;            height: 420,&#10;            borderRadius: 210,&#10;            background: '#AFC440',&#10;            opacity: 0.14,&#10;        }}&#10;    /&gt;&#10;    &lt;Box style={{ position: 'absolute', bottom: 46, right: 78, opacity: 0.16 }}&gt;&#10;        &lt;svg width={230} height={190} viewBox='0 0 230 190'&gt;&#10;            &lt;rect x='10' y='30' width='210' height='150' rx='16' fill='none' stroke='#FFFFFF' strokeWidth='6' /&gt;&#10;            &lt;path d='M10 68h210' stroke='#FFFFFF' strokeWidth='6' /&gt;&#10;            &lt;path d='M56 8v34M174 8v34' stroke='#FFFFFF' strokeWidth='8' strokeLinecap='round' /&gt;&#10;            &lt;rect x='38' y='90' width='32' height='24' rx='5' fill='#FFFFFF' /&gt;&#10;            &lt;rect x='88' y='90' width='32' height='24' rx='5' fill='#FFFFFF' /&gt;&#10;            &lt;rect x='138' y='90' width='32' height='24' rx='5' fill='#F3B26C' /&gt;&#10;            &lt;rect x='38' y='132' width='32' height='24' rx='5' fill='#FFFFFF' /&gt;&#10;            &lt;rect x='88' y='132' width='32' height='24' rx='5' fill='#FFFFFF' /&gt;&#10;            &lt;path d='M150 168l30-72 22 40 20-16 8 48z' fill='none' stroke='#FFFFFF' strokeWidth='6' strokeLinejoin='round' /&gt;&#10;        &lt;/svg&gt;&#10;    &lt;/Box&gt;&#10;&#10;    &lt;Box style={{ position: 'relative', zIndex: 1, width: '62%' }}&gt;&#10;        &lt;Box style={{ flexDirection: 'row', alignItems: 'center', gap: 14, alignSelf: 'flex-start' }}&gt;&#10;            &lt;Text&#10;                style={{&#10;                    fontSize: 76,&#10;                    fontWeight: 'bold',&#10;                    color: '#F3B26C',&#10;                    fontFamily: 'Trebuchet MS',&#10;                    lineHeight: 1,&#10;                }}&#10;            &gt;&#10;                03&#10;            &lt;/Text&gt;&#10;            &lt;Box style={{ width: 3, height: 52, background: 'rgba(255,255,255,0.45)' }} /&gt;&#10;            &lt;Text style={{ fontSize: 19, color: 'rgba(255,255,255,0.8)', fontFamily: 'Verdana' }}&gt;&#10;                Bagian ketiga&#10;            &lt;/Text&gt;&#10;        &lt;/Box&gt;&#10;&#10;        &lt;Text&#10;            style={{&#10;                marginTop: 26,&#10;                fontSize: 60,&#10;                fontWeight: 'bold',&#10;                color: '#FFFFFF',&#10;                fontFamily: 'Trebuchet MS',&#10;                lineHeight: 1.15,&#10;            }}&#10;        &gt;&#10;            Menyusun{'\n'}jadwal&#10;        &lt;/Text&gt;&#10;&#10;        &lt;Text&#10;            style={{&#10;                marginTop: 24,&#10;                fontSize: 22,&#10;                color: 'rgba(255,255,255,0.88)',&#10;                fontFamily: 'Verdana',&#10;                lineHeight: 1.5,&#10;            }}&#10;        &gt;&#10;            Tiga cara mengisi — pilih yang paling dekat dengan bahan yang Anda punya.&#10;        &lt;/Text&gt;&#10;    &lt;/Box&gt;&#10;&lt;/Slide&gt;&#10;"/>
+        <p:cNvPr id="265" name="" descr="&lt;Slide&#10;    style={{&#10;        width: '1280px',&#10;        height: '720px',&#10;        background: 'linear-gradient(135deg, #51277C 0%, #7A45A8 100%)',&#10;        paddingTop: 60,&#10;        paddingBottom: 60,&#10;        paddingLeft: 72,&#10;        paddingRight: 72,&#10;        justifyContent: 'center',&#10;        position: 'relative',&#10;        overflow: 'hidden',&#10;    }}&#10;&gt;&#10;    &lt;Box&#10;        style={{&#10;            position: 'absolute',&#10;            top: -100,&#10;            right: -60,&#10;            width: 420,&#10;            height: 420,&#10;            borderRadius: 210,&#10;            background: '#AFC440',&#10;            opacity: 0.14,&#10;        }}&#10;    /&gt;&#10;    &lt;Box style={{ position: 'absolute', bottom: 46, right: 78, opacity: 0.16 }}&gt;&#10;        &lt;svg width={230} height={190} viewBox='0 0 230 190'&gt;&#10;            &lt;rect x='10' y='30' width='210' height='150' rx='16' fill='none' stroke='#FFFFFF' strokeWidth='6' /&gt;&#10;            &lt;path d='M10 68h210' stroke='#FFFFFF' strokeWidth='6' /&gt;&#10;            &lt;path d='M56 8v34M174 8v34' stroke='#FFFFFF' strokeWidth='8' strokeLinecap='round' /&gt;&#10;            &lt;rect x='38' y='90' width='32' height='24' rx='5' fill='#FFFFFF' /&gt;&#10;            &lt;rect x='88' y='90' width='32' height='24' rx='5' fill='#FFFFFF' /&gt;&#10;            &lt;rect x='138' y='90' width='32' height='24' rx='5' fill='#F3B26C' /&gt;&#10;            &lt;rect x='38' y='132' width='32' height='24' rx='5' fill='#FFFFFF' /&gt;&#10;            &lt;rect x='88' y='132' width='32' height='24' rx='5' fill='#FFFFFF' /&gt;&#10;            &lt;path d='M150 168l30-72 22 40 20-16 8 48z' fill='none' stroke='#FFFFFF' strokeWidth='6' strokeLinejoin='round' /&gt;&#10;        &lt;/svg&gt;&#10;    &lt;/Box&gt;&#10;&#10;    &lt;Box style={{ position: 'relative', zIndex: 1, width: '62%' }}&gt;&#10;        &lt;Box style={{ flexDirection: 'row', alignItems: 'center', gap: 14, alignSelf: 'flex-start' }}&gt;&#10;            &lt;Text&#10;                style={{&#10;                    fontSize: 76,&#10;                    fontWeight: 'bold',&#10;                    color: '#F3B26C',&#10;                    fontFamily: 'Trebuchet MS',&#10;                    lineHeight: 1,&#10;                }}&#10;            &gt;&#10;                03&#10;            &lt;/Text&gt;&#10;            &lt;Box style={{ width: 3, height: 52, background: 'rgba(255,255,255,0.45)' }} /&gt;&#10;            &lt;Text style={{ fontSize: 19, color: 'rgba(255,255,255,0.8)', fontFamily: 'Verdana' }}&gt;&#10;                Bagian ketiga&#10;            &lt;/Text&gt;&#10;        &lt;/Box&gt;&#10;&#10;        &lt;Text&#10;            style={{&#10;                marginTop: 26,&#10;                fontSize: 60,&#10;                fontWeight: 'bold',&#10;                color: '#FFFFFF',&#10;                fontFamily: 'Trebuchet MS',&#10;                lineHeight: 1.15,&#10;            }}&#10;        &gt;&#10;            Menyusun{'\n'}jadwal&#10;        &lt;/Text&gt;&#10;&#10;        &lt;Text&#10;            style={{&#10;                marginTop: 24,&#10;                fontSize: 22,&#10;                color: 'rgba(255,255,255,0.88)',&#10;                fontFamily: 'Verdana',&#10;                lineHeight: 1.5,&#10;            }}&#10;        &gt;&#10;            Tiga cara mengisi — pilih yang paling dekat dengan bahan yang Anda punya.&#10;        &lt;/Text&gt;&#10;    &lt;/Box&gt;&#10;&lt;/Slide&gt;&#10;"/>
         <p:cNvGrpSpPr/>
         <p:nvPr/>
       </p:nvGrpSpPr>
@@ -10965,7 +11820,7 @@
       </p:grpSpPr>
       <p:sp>
         <p:nvSpPr>
-          <p:cNvPr id="250" name=""/>
+          <p:cNvPr id="266" name=""/>
           <p:cNvSpPr/>
           <p:nvPr/>
         </p:nvSpPr>
@@ -10997,7 +11852,7 @@
       </p:sp>
       <p:sp>
         <p:nvSpPr>
-          <p:cNvPr id="251" name=""/>
+          <p:cNvPr id="267" name=""/>
           <p:cNvSpPr/>
           <p:nvPr/>
         </p:nvSpPr>
@@ -11393,7 +12248,7 @@
       </p:sp>
       <p:pic>
         <p:nvPicPr>
-          <p:cNvPr id="252" name=""/>
+          <p:cNvPr id="268" name=""/>
           <p:cNvPicPr>
             <a:picLocks noChangeAspect="1"/>
           </p:cNvPicPr>
@@ -11425,7 +12280,7 @@
       </p:pic>
       <p:sp>
         <p:nvSpPr>
-          <p:cNvPr id="253" name="" descr="{&quot;isTemplate&quot;:true,&quot;type&quot;:&quot;text&quot;}"/>
+          <p:cNvPr id="269" name="" descr="{&quot;isTemplate&quot;:true,&quot;type&quot;:&quot;text&quot;}"/>
           <p:cNvSpPr txBox="1"/>
           <p:nvPr/>
         </p:nvSpPr>
@@ -11460,7 +12315,7 @@
       </p:sp>
       <p:sp>
         <p:nvSpPr>
-          <p:cNvPr id="254" name=""/>
+          <p:cNvPr id="270" name=""/>
           <p:cNvSpPr/>
           <p:nvPr/>
         </p:nvSpPr>
@@ -11486,7 +12341,7 @@
       </p:sp>
       <p:sp>
         <p:nvSpPr>
-          <p:cNvPr id="255" name="" descr="{&quot;isTemplate&quot;:true,&quot;type&quot;:&quot;text&quot;}"/>
+          <p:cNvPr id="271" name="" descr="{&quot;isTemplate&quot;:true,&quot;type&quot;:&quot;text&quot;}"/>
           <p:cNvSpPr txBox="1"/>
           <p:nvPr/>
         </p:nvSpPr>
@@ -11523,7 +12378,7 @@
       </p:sp>
       <p:sp>
         <p:nvSpPr>
-          <p:cNvPr id="256" name="" descr="{&quot;isTemplate&quot;:true,&quot;type&quot;:&quot;text&quot;}"/>
+          <p:cNvPr id="272" name="" descr="{&quot;isTemplate&quot;:true,&quot;type&quot;:&quot;text&quot;}"/>
           <p:cNvSpPr txBox="1"/>
           <p:nvPr/>
         </p:nvSpPr>
@@ -11576,7 +12431,7 @@
       </p:sp>
       <p:sp>
         <p:nvSpPr>
-          <p:cNvPr id="257" name="" descr="{&quot;isTemplate&quot;:true,&quot;type&quot;:&quot;text&quot;}"/>
+          <p:cNvPr id="273" name="" descr="{&quot;isTemplate&quot;:true,&quot;type&quot;:&quot;text&quot;}"/>
           <p:cNvSpPr txBox="1"/>
           <p:nvPr/>
         </p:nvSpPr>
@@ -11623,7 +12478,7 @@
   <p:cSld>
     <p:spTree>
       <p:nvGrpSpPr>
-        <p:cNvPr id="258" name="" descr="&lt;Slide&#10;    style={{&#10;        width: '1280px',&#10;        height: '720px',&#10;        background: '#FAF7F2',&#10;        paddingTop: 20,&#10;        paddingBottom: 20,&#10;        paddingLeft: 64,&#10;        paddingRight: 64,&#10;    }}&#10;&gt;&#10;    {/* ── A · blok judul ── */}&#10;    &lt;Box style={{ height: 110, justifyContent: 'center' }}&gt;&#10;        &lt;Text&#10;            style={{&#10;                fontSize: 34,&#10;                fontWeight: 'bold',&#10;                color: '#51277C',&#10;                fontFamily: 'Trebuchet MS',&#10;                lineHeight: 1.3,&#10;            }}&#10;        &gt;&#10;            Isi menu per hari&#10;        &lt;/Text&gt;&#10;        &lt;Box style={{ marginTop: 10, width: 72, height: 6, borderRadius: 3, background: '#51277C' }} /&gt;&#10;    &lt;/Box&gt;&#10;&#10;    {/* ── B · area konten ── */}&#10;    &lt;Box style={{ height: 530 }}&gt;&#10;        {/* atas · ilustrasi tabel jadwal */}&#10;        &lt;Box&#10;            style={{&#10;                height: 306,&#10;                background: 'rgba(81,39,124,0.06)',&#10;                borderRadius: 20,&#10;                justifyContent: 'center',&#10;                alignItems: 'center',&#10;            }}&#10;        &gt;&#10;            &lt;svg width={1100} height={270} viewBox='0 0 1100 270'&gt;&#10;                &lt;rect x='6' y='6' width='1088' height='46' rx='10' fill='#51277C' /&gt;&#10;                &lt;text x='46' y='37' fontFamily='Trebuchet MS' fontSize='20' fontWeight='bold' fill='#FFFFFF'&gt;&#10;                    Tanggal&#10;                &lt;/text&gt;&#10;                &lt;text x='330' y='37' fontFamily='Trebuchet MS' fontSize='20' fontWeight='bold' fill='#FFFFFF'&gt;&#10;                    Menu&#10;                &lt;/text&gt;&#10;                &lt;text x='760' y='37' fontFamily='Trebuchet MS' fontSize='20' fontWeight='bold' fill='#FFFFFF'&gt;&#10;                    Petugas&#10;                &lt;/text&gt;&#10;                &lt;text x='990' y='37' fontFamily='Trebuchet MS' fontSize='20' fontWeight='bold' fill='#FFFFFF'&gt;&#10;                    Status&#10;                &lt;/text&gt;&#10;&#10;                {/* Senin */}&#10;                &lt;rect x='6' y='60' width='1088' height='46' rx='10' fill='#FFFFFF' stroke='#E6DFD2' strokeWidth='2' /&gt;&#10;                &lt;text x='46' y='90' fontFamily='Verdana' fontSize='16' fill='#51277C'&gt;Senin, 5&lt;/text&gt;&#10;                &lt;text x='330' y='90' fontFamily='Verdana' fontSize='16' fill='#2A2333'&gt;Roti coklat + jeruk&lt;/text&gt;&#10;                &lt;text x='760' y='90' fontFamily='Verdana' fontSize='16' fill='#6B6478'&gt;Rafa&lt;/text&gt;&#10;                &lt;rect x='940' y='71' width='118' height='24' rx='12' fill='#DED7CB' /&gt;&#10;                &lt;text x='999' y='88' fontFamily='Verdana' fontSize='13' fill='#51277C' textAnchor='middle'&gt;bisa diubah&lt;/text&gt;&#10;&#10;                {/* Selasa */}&#10;                &lt;rect x='6' y='112' width='1088' height='46' rx='10' fill='#FFFFFF' stroke='#E6DFD2' strokeWidth='2' /&gt;&#10;                &lt;text x='46' y='142' fontFamily='Verdana' fontSize='16' fill='#51277C'&gt;Selasa, 6&lt;/text&gt;&#10;                &lt;text x='330' y='142' fontFamily='Verdana' fontSize='16' fill='#2A2333'&gt;Puding + pisang&lt;/text&gt;&#10;                &lt;text x='760' y='142' fontFamily='Verdana' fontSize='16' fill='#6B6478'&gt;—&lt;/text&gt;&#10;                &lt;rect x='940' y='123' width='118' height='24' rx='12' fill='#DED7CB' /&gt;&#10;                &lt;text x='999' y='140' fontFamily='Verdana' fontSize='13' fill='#51277C' textAnchor='middle'&gt;bisa diubah&lt;/text&gt;&#10;&#10;                {/* Rabu — libur */}&#10;                &lt;rect x='6' y='164' width='1088' height='46' rx='10' fill='#FFFFFF' stroke='#F3B26C' strokeWidth='2' /&gt;&#10;                &lt;text x='46' y='194' fontFamily='Verdana' fontSize='16' fill='#51277C'&gt;Rabu, 7&lt;/text&gt;&#10;                &lt;text x='330' y='194' fontFamily='Verdana' fontSize='16' fill='#2A2333'&gt;Libur&lt;/text&gt;&#10;                &lt;text x='760' y='194' fontFamily='Verdana' fontSize='16' fill='#6B6478'&gt;—&lt;/text&gt;&#10;                &lt;rect x='940' y='175' width='118' height='24' rx='12' fill='#F3B26C' /&gt;&#10;                &lt;text x='999' y='192' fontFamily='Verdana' fontSize='13' fill='#51277C' textAnchor='middle'&gt;libur&lt;/text&gt;&#10;&#10;                {/* Kamis — petugas kosong */}&#10;                &lt;rect x='6' y='216' width='1088' height='46' rx='10' fill='#FFFFFF' stroke='#AFC440' strokeWidth='3' /&gt;&#10;                &lt;text x='46' y='246' fontFamily='Verdana' fontSize='16' fill='#51277C'&gt;Kamis, 8&lt;/text&gt;&#10;                &lt;text x='330' y='246' fontFamily='Verdana' fontSize='16' fill='#2A2333'&gt;Donat + melon&lt;/text&gt;&#10;                &lt;text x='760' y='246' fontFamily='Verdana' fontSize='16' fill='#6B6478'&gt;—&lt;/text&gt;&#10;                &lt;rect x='940' y='227' width='118' height='24' rx='12' fill='#AFC440' /&gt;&#10;                &lt;text x='999' y='244' fontFamily='Verdana' fontSize='13' fill='#3F4718' textAnchor='middle'&gt;petugas kosong&lt;/text&gt;&#10;            &lt;/svg&gt;&#10;        &lt;/Box&gt;&#10;&#10;        {/* bawah · dua kartu 60:40 */}&#10;        &lt;Box style={{ marginTop: 18, height: 206, flexDirection: 'row', gap: 24 }}&gt;&#10;            &lt;Box&#10;                style={{&#10;                    width: '60%',&#10;                    background: '#FFFFFF',&#10;                    borderRadius: 16,&#10;                    boxShadow: '0 4px 20px rgba(0,0,0,0.08)',&#10;                    padding: 24,&#10;                    borderLeft: '8px solid #AFC440',&#10;                }}&#10;            &gt;&#10;                &lt;Text&#10;                    style={{&#10;                        fontSize: 26,&#10;                        fontWeight: 'bold',&#10;                        color: '#51277C',&#10;                        fontFamily: 'Trebuchet MS',&#10;                    }}&#10;                &gt;&#10;                    Pilih menu di setiap tanggal&#10;                &lt;/Text&gt;&#10;                &lt;Text&#10;                    style={{&#10;                        marginTop: 10,&#10;                        fontSize: 18,&#10;                        color: '#6B6478',&#10;                        fontFamily: 'Verdana',&#10;                        lineHeight: 1.5,&#10;                    }}&#10;                &gt;&#10;                    Satu hari berisi makanan utama dan buah pendamping. Hari yang tidak masuk&#10;                    sekolah cukup ditandai libur — menunya tidak perlu diisi.&#10;                &lt;/Text&gt;&#10;            &lt;/Box&gt;&#10;&#10;            &lt;Box&#10;                style={{&#10;                    width: '40%',&#10;                    background: '#FFFFFF',&#10;                    borderRadius: 16,&#10;                    boxShadow: '0 4px 20px rgba(0,0,0,0.08)',&#10;                    padding: 24,&#10;                    borderLeft: '8px solid #F3B26C',&#10;                }}&#10;            &gt;&#10;                &lt;Text&#10;                    style={{&#10;                        fontSize: 26,&#10;                        fontWeight: 'bold',&#10;                        color: '#51277C',&#10;                        fontFamily: 'Trebuchet MS',&#10;                    }}&#10;                &gt;&#10;                    Salin Sepekan&#10;                &lt;/Text&gt;&#10;                &lt;Text&#10;                    style={{&#10;                        marginTop: 10,&#10;                        fontSize: 18,&#10;                        color: '#6B6478',&#10;                        fontFamily: 'Verdana',&#10;                        lineHeight: 1.5,&#10;                    }}&#10;                &gt;&#10;                    Duplikasi Senin–Jumat ke minggu lain. Tanggal yang sudah terisi dilewati.&#10;                &lt;/Text&gt;&#10;            &lt;/Box&gt;&#10;        &lt;/Box&gt;&#10;    &lt;/Box&gt;&#10;&#10;    {/* ── C · bilah kaki ── */}&#10;    &lt;Box&#10;        style={{&#10;            height: 40,&#10;            flexDirection: 'row',&#10;            alignItems: 'center',&#10;            justifyContent: 'space-between',&#10;        }}&#10;    &gt;&#10;        &lt;Text style={{ fontSize: 14, color: '#6B6478', fontFamily: 'Verdana' }}&gt;&#10;            Pizza Snack Play · Panduan Korlas &amp;amp; Admin&#10;        &lt;/Text&gt;&#10;        &lt;Text style={{ fontSize: 14, color: '#6B6478', fontFamily: 'Verdana' }}&gt;08 / 15&lt;/Text&gt;&#10;    &lt;/Box&gt;&#10;&lt;/Slide&gt;&#10;"/>
+        <p:cNvPr id="274" name="" descr="&lt;Slide&#10;    style={{&#10;        width: '1280px',&#10;        height: '720px',&#10;        background: '#FAF7F2',&#10;        paddingTop: 20,&#10;        paddingBottom: 20,&#10;        paddingLeft: 64,&#10;        paddingRight: 64,&#10;    }}&#10;&gt;&#10;    {/* ── A · blok judul ── */}&#10;    &lt;Box style={{ height: 110, justifyContent: 'center' }}&gt;&#10;        &lt;Text&#10;            style={{&#10;                fontSize: 34,&#10;                fontWeight: 'bold',&#10;                color: '#51277C',&#10;                fontFamily: 'Trebuchet MS',&#10;                lineHeight: 1.3,&#10;            }}&#10;        &gt;&#10;            Isi menu per hari&#10;        &lt;/Text&gt;&#10;        &lt;Box style={{ marginTop: 10, width: 72, height: 6, borderRadius: 3, background: '#51277C' }} /&gt;&#10;    &lt;/Box&gt;&#10;&#10;    {/* ── B · area konten ── */}&#10;    &lt;Box style={{ height: 530 }}&gt;&#10;        {/* atas · ilustrasi tabel jadwal */}&#10;        &lt;Box&#10;            style={{&#10;                height: 306,&#10;                background: 'rgba(81,39,124,0.06)',&#10;                borderRadius: 20,&#10;                justifyContent: 'center',&#10;                alignItems: 'center',&#10;            }}&#10;        &gt;&#10;            &lt;svg width={1100} height={270} viewBox='0 0 1100 270'&gt;&#10;                &lt;rect x='6' y='6' width='1088' height='46' rx='10' fill='#51277C' /&gt;&#10;                &lt;text x='46' y='37' fontFamily='Trebuchet MS' fontSize='20' fontWeight='bold' fill='#FFFFFF'&gt;&#10;                    Tanggal&#10;                &lt;/text&gt;&#10;                &lt;text x='330' y='37' fontFamily='Trebuchet MS' fontSize='20' fontWeight='bold' fill='#FFFFFF'&gt;&#10;                    Menu&#10;                &lt;/text&gt;&#10;                &lt;text x='760' y='37' fontFamily='Trebuchet MS' fontSize='20' fontWeight='bold' fill='#FFFFFF'&gt;&#10;                    Petugas&#10;                &lt;/text&gt;&#10;                &lt;text x='990' y='37' fontFamily='Trebuchet MS' fontSize='20' fontWeight='bold' fill='#FFFFFF'&gt;&#10;                    Status&#10;                &lt;/text&gt;&#10;&#10;                {/* Senin */}&#10;                &lt;rect x='6' y='60' width='1088' height='46' rx='10' fill='#FFFFFF' stroke='#E6DFD2' strokeWidth='2' /&gt;&#10;                &lt;text x='46' y='90' fontFamily='Verdana' fontSize='16' fill='#51277C'&gt;Senin, 5&lt;/text&gt;&#10;                &lt;text x='330' y='90' fontFamily='Verdana' fontSize='16' fill='#2A2333'&gt;Roti coklat + jeruk&lt;/text&gt;&#10;                &lt;text x='760' y='90' fontFamily='Verdana' fontSize='16' fill='#6B6478'&gt;Rafa&lt;/text&gt;&#10;                &lt;rect x='940' y='71' width='118' height='24' rx='12' fill='#DED7CB' /&gt;&#10;                &lt;text x='999' y='88' fontFamily='Verdana' fontSize='13' fill='#51277C' textAnchor='middle'&gt;bisa diubah&lt;/text&gt;&#10;&#10;                {/* Selasa */}&#10;                &lt;rect x='6' y='112' width='1088' height='46' rx='10' fill='#FFFFFF' stroke='#E6DFD2' strokeWidth='2' /&gt;&#10;                &lt;text x='46' y='142' fontFamily='Verdana' fontSize='16' fill='#51277C'&gt;Selasa, 6&lt;/text&gt;&#10;                &lt;text x='330' y='142' fontFamily='Verdana' fontSize='16' fill='#2A2333'&gt;Puding + pisang&lt;/text&gt;&#10;                &lt;text x='760' y='142' fontFamily='Verdana' fontSize='16' fill='#6B6478'&gt;—&lt;/text&gt;&#10;                &lt;rect x='940' y='123' width='118' height='24' rx='12' fill='#DED7CB' /&gt;&#10;                &lt;text x='999' y='140' fontFamily='Verdana' fontSize='13' fill='#51277C' textAnchor='middle'&gt;bisa diubah&lt;/text&gt;&#10;&#10;                {/* Rabu — libur */}&#10;                &lt;rect x='6' y='164' width='1088' height='46' rx='10' fill='#FFFFFF' stroke='#F3B26C' strokeWidth='2' /&gt;&#10;                &lt;text x='46' y='194' fontFamily='Verdana' fontSize='16' fill='#51277C'&gt;Rabu, 7&lt;/text&gt;&#10;                &lt;text x='330' y='194' fontFamily='Verdana' fontSize='16' fill='#2A2333'&gt;Libur&lt;/text&gt;&#10;                &lt;text x='760' y='194' fontFamily='Verdana' fontSize='16' fill='#6B6478'&gt;—&lt;/text&gt;&#10;                &lt;rect x='940' y='175' width='118' height='24' rx='12' fill='#F3B26C' /&gt;&#10;                &lt;text x='999' y='192' fontFamily='Verdana' fontSize='13' fill='#51277C' textAnchor='middle'&gt;libur&lt;/text&gt;&#10;&#10;                {/* Kamis — petugas kosong */}&#10;                &lt;rect x='6' y='216' width='1088' height='46' rx='10' fill='#FFFFFF' stroke='#AFC440' strokeWidth='3' /&gt;&#10;                &lt;text x='46' y='246' fontFamily='Verdana' fontSize='16' fill='#51277C'&gt;Kamis, 8&lt;/text&gt;&#10;                &lt;text x='330' y='246' fontFamily='Verdana' fontSize='16' fill='#2A2333'&gt;Donat + melon&lt;/text&gt;&#10;                &lt;text x='760' y='246' fontFamily='Verdana' fontSize='16' fill='#6B6478'&gt;—&lt;/text&gt;&#10;                &lt;rect x='940' y='227' width='118' height='24' rx='12' fill='#AFC440' /&gt;&#10;                &lt;text x='999' y='244' fontFamily='Verdana' fontSize='13' fill='#3F4718' textAnchor='middle'&gt;petugas kosong&lt;/text&gt;&#10;            &lt;/svg&gt;&#10;        &lt;/Box&gt;&#10;&#10;        {/* bawah · dua kartu 60:40 */}&#10;        &lt;Box style={{ marginTop: 18, height: 206, flexDirection: 'row', gap: 24 }}&gt;&#10;            &lt;Box&#10;                style={{&#10;                    width: '60%',&#10;                    background: '#FFFFFF',&#10;                    borderRadius: 16,&#10;                    boxShadow: '0 4px 20px rgba(0,0,0,0.08)',&#10;                    padding: 24,&#10;                    borderLeft: '8px solid #AFC440',&#10;                }}&#10;            &gt;&#10;                &lt;Text&#10;                    style={{&#10;                        fontSize: 26,&#10;                        fontWeight: 'bold',&#10;                        color: '#51277C',&#10;                        fontFamily: 'Trebuchet MS',&#10;                    }}&#10;                &gt;&#10;                    Pilih menu di setiap tanggal&#10;                &lt;/Text&gt;&#10;                &lt;Text&#10;                    style={{&#10;                        marginTop: 10,&#10;                        fontSize: 18,&#10;                        color: '#6B6478',&#10;                        fontFamily: 'Verdana',&#10;                        lineHeight: 1.5,&#10;                    }}&#10;                &gt;&#10;                    Satu hari berisi makanan utama dan buah pendamping. Hari yang tidak masuk&#10;                    sekolah cukup ditandai libur — menunya tidak perlu diisi.&#10;                &lt;/Text&gt;&#10;            &lt;/Box&gt;&#10;&#10;            &lt;Box&#10;                style={{&#10;                    width: '40%',&#10;                    background: '#FFFFFF',&#10;                    borderRadius: 16,&#10;                    boxShadow: '0 4px 20px rgba(0,0,0,0.08)',&#10;                    padding: 24,&#10;                    borderLeft: '8px solid #F3B26C',&#10;                }}&#10;            &gt;&#10;                &lt;Text&#10;                    style={{&#10;                        fontSize: 26,&#10;                        fontWeight: 'bold',&#10;                        color: '#51277C',&#10;                        fontFamily: 'Trebuchet MS',&#10;                    }}&#10;                &gt;&#10;                    Salin Sepekan&#10;                &lt;/Text&gt;&#10;                &lt;Text&#10;                    style={{&#10;                        marginTop: 10,&#10;                        fontSize: 18,&#10;                        color: '#6B6478',&#10;                        fontFamily: 'Verdana',&#10;                        lineHeight: 1.5,&#10;                    }}&#10;                &gt;&#10;                    Duplikasi Senin–Jumat ke minggu lain. Tanggal yang sudah terisi dilewati.&#10;                &lt;/Text&gt;&#10;            &lt;/Box&gt;&#10;        &lt;/Box&gt;&#10;    &lt;/Box&gt;&#10;&#10;    {/* ── C · bilah kaki ── */}&#10;    &lt;Box&#10;        style={{&#10;            height: 40,&#10;            flexDirection: 'row',&#10;            alignItems: 'center',&#10;            justifyContent: 'space-between',&#10;        }}&#10;    &gt;&#10;        &lt;Text style={{ fontSize: 14, color: '#6B6478', fontFamily: 'Verdana' }}&gt;&#10;            Pizza Snack Play · Panduan Korlas &amp;amp; Admin&#10;        &lt;/Text&gt;&#10;        &lt;Text style={{ fontSize: 14, color: '#6B6478', fontFamily: 'Verdana' }}&gt;08 / 16&lt;/Text&gt;&#10;    &lt;/Box&gt;&#10;&lt;/Slide&gt;&#10;"/>
         <p:cNvGrpSpPr/>
         <p:nvPr/>
       </p:nvGrpSpPr>
@@ -11637,7 +12492,7 @@
       </p:grpSpPr>
       <p:sp>
         <p:nvSpPr>
-          <p:cNvPr id="259" name=""/>
+          <p:cNvPr id="275" name=""/>
           <p:cNvSpPr/>
           <p:nvPr/>
         </p:nvSpPr>
@@ -11661,7 +12516,7 @@
       </p:sp>
       <p:sp>
         <p:nvSpPr>
-          <p:cNvPr id="260" name="" descr="{&quot;isTemplate&quot;:true,&quot;type&quot;:&quot;text&quot;}"/>
+          <p:cNvPr id="276" name="" descr="{&quot;isTemplate&quot;:true,&quot;type&quot;:&quot;text&quot;}"/>
           <p:cNvSpPr txBox="1"/>
           <p:nvPr/>
         </p:nvSpPr>
@@ -11696,7 +12551,7 @@
       </p:sp>
       <p:sp>
         <p:nvSpPr>
-          <p:cNvPr id="261" name=""/>
+          <p:cNvPr id="277" name=""/>
           <p:cNvSpPr/>
           <p:nvPr/>
         </p:nvSpPr>
@@ -11722,7 +12577,7 @@
       </p:sp>
       <p:sp>
         <p:nvSpPr>
-          <p:cNvPr id="262" name=""/>
+          <p:cNvPr id="278" name=""/>
           <p:cNvSpPr/>
           <p:nvPr/>
         </p:nvSpPr>
@@ -11750,7 +12605,7 @@
       </p:sp>
       <p:pic>
         <p:nvPicPr>
-          <p:cNvPr id="263" name=""/>
+          <p:cNvPr id="279" name=""/>
           <p:cNvPicPr>
             <a:picLocks noChangeAspect="1"/>
           </p:cNvPicPr>
@@ -11781,7 +12636,7 @@
       </p:pic>
       <p:sp>
         <p:nvSpPr>
-          <p:cNvPr id="264" name=""/>
+          <p:cNvPr id="280" name=""/>
           <p:cNvSpPr/>
           <p:nvPr/>
         </p:nvSpPr>
@@ -11814,7 +12669,7 @@
       </p:sp>
       <p:sp>
         <p:nvSpPr>
-          <p:cNvPr id="265" name=""/>
+          <p:cNvPr id="281" name=""/>
           <p:cNvSpPr/>
           <p:nvPr/>
         </p:nvSpPr>
@@ -11871,7 +12726,7 @@
       </p:sp>
       <p:sp>
         <p:nvSpPr>
-          <p:cNvPr id="266" name="" descr="{&quot;isTemplate&quot;:true,&quot;type&quot;:&quot;text&quot;}"/>
+          <p:cNvPr id="282" name="" descr="{&quot;isTemplate&quot;:true,&quot;type&quot;:&quot;text&quot;}"/>
           <p:cNvSpPr txBox="1"/>
           <p:nvPr/>
         </p:nvSpPr>
@@ -11906,7 +12761,7 @@
       </p:sp>
       <p:sp>
         <p:nvSpPr>
-          <p:cNvPr id="267" name="" descr="{&quot;isTemplate&quot;:true,&quot;type&quot;:&quot;text&quot;}"/>
+          <p:cNvPr id="283" name="" descr="{&quot;isTemplate&quot;:true,&quot;type&quot;:&quot;text&quot;}"/>
           <p:cNvSpPr txBox="1"/>
           <p:nvPr/>
         </p:nvSpPr>
@@ -11943,7 +12798,7 @@
       </p:sp>
       <p:sp>
         <p:nvSpPr>
-          <p:cNvPr id="268" name=""/>
+          <p:cNvPr id="284" name=""/>
           <p:cNvSpPr/>
           <p:nvPr/>
         </p:nvSpPr>
@@ -11976,7 +12831,7 @@
       </p:sp>
       <p:sp>
         <p:nvSpPr>
-          <p:cNvPr id="269" name=""/>
+          <p:cNvPr id="285" name=""/>
           <p:cNvSpPr/>
           <p:nvPr/>
         </p:nvSpPr>
@@ -12033,7 +12888,7 @@
       </p:sp>
       <p:sp>
         <p:nvSpPr>
-          <p:cNvPr id="270" name="" descr="{&quot;isTemplate&quot;:true,&quot;type&quot;:&quot;text&quot;}"/>
+          <p:cNvPr id="286" name="" descr="{&quot;isTemplate&quot;:true,&quot;type&quot;:&quot;text&quot;}"/>
           <p:cNvSpPr txBox="1"/>
           <p:nvPr/>
         </p:nvSpPr>
@@ -12068,7 +12923,7 @@
       </p:sp>
       <p:sp>
         <p:nvSpPr>
-          <p:cNvPr id="271" name="" descr="{&quot;isTemplate&quot;:true,&quot;type&quot;:&quot;text&quot;}"/>
+          <p:cNvPr id="287" name="" descr="{&quot;isTemplate&quot;:true,&quot;type&quot;:&quot;text&quot;}"/>
           <p:cNvSpPr txBox="1"/>
           <p:nvPr/>
         </p:nvSpPr>
@@ -12105,7 +12960,7 @@
       </p:sp>
       <p:sp>
         <p:nvSpPr>
-          <p:cNvPr id="272" name="" descr="{&quot;isTemplate&quot;:true,&quot;type&quot;:&quot;text&quot;}"/>
+          <p:cNvPr id="288" name="" descr="{&quot;isTemplate&quot;:true,&quot;type&quot;:&quot;text&quot;}"/>
           <p:cNvSpPr txBox="1"/>
           <p:nvPr/>
         </p:nvSpPr>
@@ -12140,7 +12995,7 @@
       </p:sp>
       <p:sp>
         <p:nvSpPr>
-          <p:cNvPr id="273" name="" descr="{&quot;isTemplate&quot;:true,&quot;type&quot;:&quot;text&quot;}"/>
+          <p:cNvPr id="289" name="" descr="{&quot;isTemplate&quot;:true,&quot;type&quot;:&quot;text&quot;}"/>
           <p:cNvSpPr txBox="1"/>
           <p:nvPr/>
         </p:nvSpPr>
@@ -12167,7 +13022,7 @@
                 <a:latin typeface="Verdana"/>
                 <a:ea typeface="Verdana"/>
               </a:rPr>
-              <a:t>08 / 15</a:t>
+              <a:t>08 / 16</a:t>
             </a:r>
             <a:endParaRPr/>
           </a:p>
@@ -12183,7 +13038,7 @@
   <p:cSld>
     <p:spTree>
       <p:nvGrpSpPr>
-        <p:cNvPr id="274" name="" descr="&lt;Slide&#10;    style={{&#10;        width: '1280px',&#10;        height: '720px',&#10;        background: '#FAF7F2',&#10;        paddingTop: 20,&#10;        paddingBottom: 20,&#10;        paddingLeft: 64,&#10;        paddingRight: 64,&#10;        position: 'relative',&#10;        overflow: 'hidden',&#10;    }}&#10;&gt;&#10;    &lt;Box&#10;        style={{&#10;            position: 'absolute',&#10;            bottom: -130,&#10;            left: -110,&#10;            width: 380,&#10;            height: 380,&#10;            borderRadius: 190,&#10;            background: 'linear-gradient(135deg, #AFC440 0%, #F3B26C 100%)',&#10;            opacity: 0.12,&#10;        }}&#10;    /&gt;&#10;&#10;    {/* ── A · blok judul ── */}&#10;    &lt;Box style={{ height: 110, justifyContent: 'center' }}&gt;&#10;        &lt;Text&#10;            style={{&#10;                fontSize: 34,&#10;                fontWeight: 'bold',&#10;                color: '#51277C',&#10;                fontFamily: 'Trebuchet MS',&#10;                lineHeight: 1.3,&#10;            }}&#10;        &gt;&#10;            Tempel teks dari sekolah&#10;        &lt;/Text&gt;&#10;        &lt;Box style={{ marginTop: 10, width: 72, height: 6, borderRadius: 3, background: '#F3B26C' }} /&gt;&#10;    &lt;/Box&gt;&#10;&#10;    {/* ── B · area konten ── */}&#10;    &lt;Box style={{ height: 530, flexDirection: 'row', gap: 34, position: 'relative', zIndex: 1 }}&gt;&#10;        {/* kiri 45% · pesan */}&#10;        &lt;Box style={{ width: '45%', height: '100%', justifyContent: 'center' }}&gt;&#10;            &lt;Text&#10;                style={{&#10;                    fontSize: 44,&#10;                    fontWeight: 'bold',&#10;                    color: '#51277C',&#10;                    fontFamily: 'Trebuchet MS',&#10;                    lineHeight: 1.15,&#10;                }}&#10;            &gt;&#10;                Tidak perlu{'\n'}ketik ulang.&#10;            &lt;/Text&gt;&#10;&#10;            &lt;Text&#10;                style={{&#10;                    marginTop: 20,&#10;                    fontSize: 19,&#10;                    color: '#2A2333',&#10;                    fontFamily: 'Verdana',&#10;                    lineHeight: 1.55,&#10;                }}&#10;            &gt;&#10;                Jadwal yang dikirim sekolah lewat WhatsApp bisa ditempel apa adanya. Aplikasi&#10;                membaca rentang tanggal dan baris harinya sendiri.&#10;            &lt;/Text&gt;&#10;&#10;            &lt;Box style={{ marginTop: 18 }}&gt;&#10;                {[&#10;                    'Pratinjau ditampilkan lebih dulu — bisa dibatalkan',&#10;                    'Tanggal yang sudah ada jadwalnya dilewati, jadi tempel ulang aman',&#10;                    'Hasilnya masuk sebagai jadwal yang masih bisa diubah',&#10;                ].map((s, i) =&gt; (&#10;                    &lt;Box key={i} style={{ flexDirection: 'row', alignItems: 'center', gap: 10, marginTop: 9 }}&gt;&#10;                        &lt;svg width={20} height={20} viewBox='0 0 24 24'&gt;&#10;                            &lt;path d='M5 13l4 4 10-11' fill='none' stroke='#AFC440' strokeWidth='3' strokeLinecap='round' strokeLinejoin='round' /&gt;&#10;                        &lt;/svg&gt;&#10;                        &lt;Text style={{ flex: 1, fontSize: 17, color: '#6B6478', fontFamily: 'Verdana', lineHeight: 1.45 }}&gt;&#10;                            {s}&#10;                        &lt;/Text&gt;&#10;                    &lt;/Box&gt;&#10;                ))}&#10;            &lt;/Box&gt;&#10;&#10;            &lt;Box&#10;                style={{&#10;                    marginTop: 22,&#10;                    alignSelf: 'flex-start',&#10;                    flexDirection: 'row',&#10;                    alignItems: 'center',&#10;                    gap: 10,&#10;                    background: '#51277C',&#10;                    borderRadius: 12,&#10;                    paddingTop: 12,&#10;                    paddingBottom: 12,&#10;                    paddingLeft: 22,&#10;                    paddingRight: 22,&#10;                }}&#10;            &gt;&#10;                &lt;svg width={22} height={22} viewBox='0 0 24 24'&gt;&#10;                    &lt;path d='M9 3h6v3H9z' fill='#F3B26C' /&gt;&#10;                    &lt;path d='M6 5h12v16H6z' fill='none' stroke='#F3B26C' strokeWidth='2' /&gt;&#10;                &lt;/svg&gt;&#10;                &lt;Text style={{ fontSize: 18, color: '#FFFFFF', fontFamily: 'Verdana', fontWeight: 'bold' }}&gt;&#10;                    Tombol: Impor Jadwal&#10;                &lt;/Text&gt;&#10;            &lt;/Box&gt;&#10;        &lt;/Box&gt;&#10;&#10;        {/* kanan 55% · ilustrasi tempel → pratinjau */}&#10;        &lt;Box&#10;            style={{&#10;                width: '55%',&#10;                height: '100%',&#10;                background: 'rgba(81,39,124,0.06)',&#10;                borderRadius: 20,&#10;                justifyContent: 'center',&#10;                alignItems: 'center',&#10;            }}&#10;        &gt;&#10;            &lt;svg width={580} height={450} viewBox='0 0 580 450'&gt;&#10;                {/* teks asal */}&#10;                &lt;rect x='12' y='12' width='556' height='176' rx='16' fill='#FFFFFF' stroke='#E6DFD2' strokeWidth='2' /&gt;&#10;                &lt;circle cx='44' cy='44' r='14' fill='#AFC440' /&gt;&#10;                &lt;rect x='70' y='38' width='150' height='11' rx='5' fill='#DED7CB' /&gt;&#10;                &lt;rect x='34' y='80' width='160' height='10' rx='5' fill='#51277C' opacity='0.65' /&gt;&#10;                &lt;rect x='34' y='106' width='214' height='10' rx='5' fill='#DED7CB' /&gt;&#10;                &lt;rect x='34' y='132' width='188' height='10' rx='5' fill='#DED7CB' /&gt;&#10;                &lt;rect x='34' y='158' width='150' height='10' rx='5' fill='#DED7CB' /&gt;&#10;                &lt;text x='300' y='112' fontFamily='Verdana' fontSize='14' fill='#6B6478'&gt;Kamis : Puding + jeruk&lt;/text&gt;&#10;                &lt;text x='300' y='140' fontFamily='Verdana' fontSize='14' fill='#6B6478'&gt;Jumat : Donat + melon&lt;/text&gt;&#10;&#10;                {/* panah */}&#10;                &lt;path d='M290 196v46' stroke='#F3B26C' strokeWidth='6' strokeLinecap='round' /&gt;&#10;                &lt;path d='M276 234l14 16 14-16' fill='none' stroke='#F3B26C' strokeWidth='6' strokeLinecap='round' strokeLinejoin='round' /&gt;&#10;                &lt;text x='318' y='228' fontFamily='Verdana' fontSize='15' fill='#51277C'&gt;pratinjau&lt;/text&gt;&#10;&#10;                {/* pratinjau */}&#10;                &lt;rect x='12' y='258' width='556' height='180' rx='16' fill='#51277C' /&gt;&#10;                &lt;text x='40' y='294' fontFamily='Trebuchet MS' fontSize='21' fontWeight='bold' fill='#FFFFFF'&gt;&#10;                    Pratinjau — 12 baris baru&#10;                &lt;/text&gt;&#10;                &lt;rect x='40' y='312' width='500' height='34' rx='8' fill='rgba(255,255,255,0.16)' /&gt;&#10;                &lt;text x='58' y='335' fontFamily='Verdana' fontSize='14' fill='#FFFFFF'&gt;Kamis, 2 Okt&lt;/text&gt;&#10;                &lt;text x='230' y='335' fontFamily='Verdana' fontSize='14' fill='#EFEAE1'&gt;Puding + jeruk&lt;/text&gt;&#10;                &lt;rect x='40' y='354' width='500' height='34' rx='8' fill='rgba(255,255,255,0.16)' /&gt;&#10;                &lt;text x='58' y='377' fontFamily='Verdana' fontSize='14' fill='#FFFFFF'&gt;Jumat, 3 Okt&lt;/text&gt;&#10;                &lt;text x='230' y='377' fontFamily='Verdana' fontSize='14' fill='#EFEAE1'&gt;Donat + melon&lt;/text&gt;&#10;                &lt;rect x='392' y='400' width='148' height='26' rx='13' fill='#F3B26C' /&gt;&#10;                &lt;text x='466' y='419' fontFamily='Verdana' fontSize='14' fontWeight='bold' fill='#51277C' textAnchor='middle'&gt;&#10;                    Impor&#10;                &lt;/text&gt;&#10;            &lt;/svg&gt;&#10;        &lt;/Box&gt;&#10;    &lt;/Box&gt;&#10;&#10;    {/* ── C · bilah kaki ── */}&#10;    &lt;Box&#10;        style={{&#10;            height: 40,&#10;            flexDirection: 'row',&#10;            alignItems: 'center',&#10;            justifyContent: 'space-between',&#10;        }}&#10;    &gt;&#10;        &lt;Text style={{ fontSize: 14, color: '#6B6478', fontFamily: 'Verdana' }}&gt;&#10;            Pizza Snack Play · Panduan Korlas &amp;amp; Admin&#10;        &lt;/Text&gt;&#10;        &lt;Text style={{ fontSize: 14, color: '#6B6478', fontFamily: 'Verdana' }}&gt;09 / 15&lt;/Text&gt;&#10;    &lt;/Box&gt;&#10;&lt;/Slide&gt;&#10;"/>
+        <p:cNvPr id="290" name="" descr="&lt;Slide&#10;    style={{&#10;        width: '1280px',&#10;        height: '720px',&#10;        background: '#FAF7F2',&#10;        paddingTop: 20,&#10;        paddingBottom: 20,&#10;        paddingLeft: 64,&#10;        paddingRight: 64,&#10;        position: 'relative',&#10;        overflow: 'hidden',&#10;    }}&#10;&gt;&#10;    &lt;Box&#10;        style={{&#10;            position: 'absolute',&#10;            bottom: -130,&#10;            left: -110,&#10;            width: 380,&#10;            height: 380,&#10;            borderRadius: 190,&#10;            background: 'linear-gradient(135deg, #AFC440 0%, #F3B26C 100%)',&#10;            opacity: 0.12,&#10;        }}&#10;    /&gt;&#10;&#10;    {/* ── A · blok judul ── */}&#10;    &lt;Box style={{ height: 110, justifyContent: 'center' }}&gt;&#10;        &lt;Text&#10;            style={{&#10;                fontSize: 34,&#10;                fontWeight: 'bold',&#10;                color: '#51277C',&#10;                fontFamily: 'Trebuchet MS',&#10;                lineHeight: 1.3,&#10;            }}&#10;        &gt;&#10;            Tempel teks dari sekolah&#10;        &lt;/Text&gt;&#10;        &lt;Box style={{ marginTop: 10, width: 72, height: 6, borderRadius: 3, background: '#F3B26C' }} /&gt;&#10;    &lt;/Box&gt;&#10;&#10;    {/* ── B · area konten ── */}&#10;    &lt;Box style={{ height: 530, flexDirection: 'row', gap: 34, position: 'relative', zIndex: 1 }}&gt;&#10;        {/* kiri 45% · pesan */}&#10;        &lt;Box style={{ width: '45%', height: '100%', justifyContent: 'center' }}&gt;&#10;            &lt;Text&#10;                style={{&#10;                    fontSize: 44,&#10;                    fontWeight: 'bold',&#10;                    color: '#51277C',&#10;                    fontFamily: 'Trebuchet MS',&#10;                    lineHeight: 1.15,&#10;                }}&#10;            &gt;&#10;                Tidak perlu{'\n'}ketik ulang.&#10;            &lt;/Text&gt;&#10;&#10;            &lt;Text&#10;                style={{&#10;                    marginTop: 20,&#10;                    fontSize: 19,&#10;                    color: '#2A2333',&#10;                    fontFamily: 'Verdana',&#10;                    lineHeight: 1.55,&#10;                }}&#10;            &gt;&#10;                Jadwal yang dikirim sekolah lewat WhatsApp bisa ditempel apa adanya. Aplikasi&#10;                membaca rentang tanggal dan baris harinya sendiri.&#10;            &lt;/Text&gt;&#10;&#10;            &lt;Box style={{ marginTop: 18 }}&gt;&#10;                {[&#10;                    'Pratinjau ditampilkan lebih dulu — bisa dibatalkan',&#10;                    'Tanggal yang sudah ada jadwalnya dilewati, jadi tempel ulang aman',&#10;                    'Hasilnya masuk sebagai jadwal yang masih bisa diubah',&#10;                ].map((s, i) =&gt; (&#10;                    &lt;Box key={i} style={{ flexDirection: 'row', alignItems: 'center', gap: 10, marginTop: 9 }}&gt;&#10;                        &lt;svg width={20} height={20} viewBox='0 0 24 24'&gt;&#10;                            &lt;path d='M5 13l4 4 10-11' fill='none' stroke='#AFC440' strokeWidth='3' strokeLinecap='round' strokeLinejoin='round' /&gt;&#10;                        &lt;/svg&gt;&#10;                        &lt;Text style={{ flex: 1, fontSize: 17, color: '#6B6478', fontFamily: 'Verdana', lineHeight: 1.45 }}&gt;&#10;                            {s}&#10;                        &lt;/Text&gt;&#10;                    &lt;/Box&gt;&#10;                ))}&#10;            &lt;/Box&gt;&#10;&#10;            &lt;Box&#10;                style={{&#10;                    marginTop: 22,&#10;                    alignSelf: 'flex-start',&#10;                    flexDirection: 'row',&#10;                    alignItems: 'center',&#10;                    gap: 10,&#10;                    background: '#51277C',&#10;                    borderRadius: 12,&#10;                    paddingTop: 12,&#10;                    paddingBottom: 12,&#10;                    paddingLeft: 22,&#10;                    paddingRight: 22,&#10;                }}&#10;            &gt;&#10;                &lt;svg width={22} height={22} viewBox='0 0 24 24'&gt;&#10;                    &lt;path d='M9 3h6v3H9z' fill='#F3B26C' /&gt;&#10;                    &lt;path d='M6 5h12v16H6z' fill='none' stroke='#F3B26C' strokeWidth='2' /&gt;&#10;                &lt;/svg&gt;&#10;                &lt;Text style={{ fontSize: 18, color: '#FFFFFF', fontFamily: 'Verdana', fontWeight: 'bold' }}&gt;&#10;                    Tombol: Impor Jadwal&#10;                &lt;/Text&gt;&#10;            &lt;/Box&gt;&#10;        &lt;/Box&gt;&#10;&#10;        {/* kanan 55% · ilustrasi tempel → pratinjau */}&#10;        &lt;Box&#10;            style={{&#10;                width: '55%',&#10;                height: '100%',&#10;                background: 'rgba(81,39,124,0.06)',&#10;                borderRadius: 20,&#10;                justifyContent: 'center',&#10;                alignItems: 'center',&#10;            }}&#10;        &gt;&#10;            &lt;svg width={580} height={450} viewBox='0 0 580 450'&gt;&#10;                {/* teks asal */}&#10;                &lt;rect x='12' y='12' width='556' height='176' rx='16' fill='#FFFFFF' stroke='#E6DFD2' strokeWidth='2' /&gt;&#10;                &lt;circle cx='44' cy='44' r='14' fill='#AFC440' /&gt;&#10;                &lt;rect x='70' y='38' width='150' height='11' rx='5' fill='#DED7CB' /&gt;&#10;                &lt;rect x='34' y='80' width='160' height='10' rx='5' fill='#51277C' opacity='0.65' /&gt;&#10;                &lt;rect x='34' y='106' width='214' height='10' rx='5' fill='#DED7CB' /&gt;&#10;                &lt;rect x='34' y='132' width='188' height='10' rx='5' fill='#DED7CB' /&gt;&#10;                &lt;rect x='34' y='158' width='150' height='10' rx='5' fill='#DED7CB' /&gt;&#10;                &lt;text x='300' y='112' fontFamily='Verdana' fontSize='14' fill='#6B6478'&gt;Kamis : Puding + jeruk&lt;/text&gt;&#10;                &lt;text x='300' y='140' fontFamily='Verdana' fontSize='14' fill='#6B6478'&gt;Jumat : Donat + melon&lt;/text&gt;&#10;&#10;                {/* panah */}&#10;                &lt;path d='M290 196v46' stroke='#F3B26C' strokeWidth='6' strokeLinecap='round' /&gt;&#10;                &lt;path d='M276 234l14 16 14-16' fill='none' stroke='#F3B26C' strokeWidth='6' strokeLinecap='round' strokeLinejoin='round' /&gt;&#10;                &lt;text x='318' y='228' fontFamily='Verdana' fontSize='15' fill='#51277C'&gt;pratinjau&lt;/text&gt;&#10;&#10;                {/* pratinjau */}&#10;                &lt;rect x='12' y='258' width='556' height='180' rx='16' fill='#51277C' /&gt;&#10;                &lt;text x='40' y='294' fontFamily='Trebuchet MS' fontSize='21' fontWeight='bold' fill='#FFFFFF'&gt;&#10;                    Pratinjau — 12 baris baru&#10;                &lt;/text&gt;&#10;                &lt;rect x='40' y='312' width='500' height='34' rx='8' fill='rgba(255,255,255,0.16)' /&gt;&#10;                &lt;text x='58' y='335' fontFamily='Verdana' fontSize='14' fill='#FFFFFF'&gt;Kamis, 2 Okt&lt;/text&gt;&#10;                &lt;text x='230' y='335' fontFamily='Verdana' fontSize='14' fill='#EFEAE1'&gt;Puding + jeruk&lt;/text&gt;&#10;                &lt;rect x='40' y='354' width='500' height='34' rx='8' fill='rgba(255,255,255,0.16)' /&gt;&#10;                &lt;text x='58' y='377' fontFamily='Verdana' fontSize='14' fill='#FFFFFF'&gt;Jumat, 3 Okt&lt;/text&gt;&#10;                &lt;text x='230' y='377' fontFamily='Verdana' fontSize='14' fill='#EFEAE1'&gt;Donat + melon&lt;/text&gt;&#10;                &lt;rect x='392' y='400' width='148' height='26' rx='13' fill='#F3B26C' /&gt;&#10;                &lt;text x='466' y='419' fontFamily='Verdana' fontSize='14' fontWeight='bold' fill='#51277C' textAnchor='middle'&gt;&#10;                    Impor&#10;                &lt;/text&gt;&#10;            &lt;/svg&gt;&#10;        &lt;/Box&gt;&#10;    &lt;/Box&gt;&#10;&#10;    {/* ── C · bilah kaki ── */}&#10;    &lt;Box&#10;        style={{&#10;            height: 40,&#10;            flexDirection: 'row',&#10;            alignItems: 'center',&#10;            justifyContent: 'space-between',&#10;        }}&#10;    &gt;&#10;        &lt;Text style={{ fontSize: 14, color: '#6B6478', fontFamily: 'Verdana' }}&gt;&#10;            Pizza Snack Play · Panduan Korlas &amp;amp; Admin&#10;        &lt;/Text&gt;&#10;        &lt;Text style={{ fontSize: 14, color: '#6B6478', fontFamily: 'Verdana' }}&gt;09 / 16&lt;/Text&gt;&#10;    &lt;/Box&gt;&#10;&lt;/Slide&gt;&#10;"/>
         <p:cNvGrpSpPr/>
         <p:nvPr/>
       </p:nvGrpSpPr>
@@ -12197,7 +13052,7 @@
       </p:grpSpPr>
       <p:sp>
         <p:nvSpPr>
-          <p:cNvPr id="275" name=""/>
+          <p:cNvPr id="291" name=""/>
           <p:cNvSpPr/>
           <p:nvPr/>
         </p:nvSpPr>
@@ -12221,7 +13076,7 @@
       </p:sp>
       <p:sp>
         <p:nvSpPr>
-          <p:cNvPr id="276" name="" descr="{&quot;isTemplate&quot;:true,&quot;type&quot;:&quot;text&quot;}"/>
+          <p:cNvPr id="292" name="" descr="{&quot;isTemplate&quot;:true,&quot;type&quot;:&quot;text&quot;}"/>
           <p:cNvSpPr txBox="1"/>
           <p:nvPr/>
         </p:nvSpPr>
@@ -12256,7 +13111,7 @@
       </p:sp>
       <p:sp>
         <p:nvSpPr>
-          <p:cNvPr id="277" name=""/>
+          <p:cNvPr id="293" name=""/>
           <p:cNvSpPr/>
           <p:nvPr/>
         </p:nvSpPr>
@@ -12282,7 +13137,7 @@
       </p:sp>
       <p:sp>
         <p:nvSpPr>
-          <p:cNvPr id="278" name="" descr="{&quot;isTemplate&quot;:true,&quot;type&quot;:&quot;text&quot;}"/>
+          <p:cNvPr id="294" name="" descr="{&quot;isTemplate&quot;:true,&quot;type&quot;:&quot;text&quot;}"/>
           <p:cNvSpPr txBox="1"/>
           <p:nvPr/>
         </p:nvSpPr>
@@ -12317,7 +13172,7 @@
       </p:sp>
       <p:sp>
         <p:nvSpPr>
-          <p:cNvPr id="279" name="" descr="{&quot;isTemplate&quot;:true,&quot;type&quot;:&quot;text&quot;}"/>
+          <p:cNvPr id="295" name="" descr="{&quot;isTemplate&quot;:true,&quot;type&quot;:&quot;text&quot;}"/>
           <p:cNvSpPr txBox="1"/>
           <p:nvPr/>
         </p:nvSpPr>
@@ -12344,15 +13199,15 @@
                 <a:latin typeface="Verdana"/>
                 <a:ea typeface="Verdana"/>
               </a:rPr>
-              <a:t>09 / 15</a:t>
-            </a:r>
-            <a:endParaRPr/>
-          </a:p>
-        </p:txBody>
-      </p:sp>
-      <p:sp>
-        <p:nvSpPr>
-          <p:cNvPr id="280" name=""/>
+              <a:t>09 / 16</a:t>
+            </a:r>
+            <a:endParaRPr/>
+          </a:p>
+        </p:txBody>
+      </p:sp>
+      <p:sp>
+        <p:nvSpPr>
+          <p:cNvPr id="296" name=""/>
           <p:cNvSpPr/>
           <p:nvPr/>
         </p:nvSpPr>
@@ -12416,7 +13271,7 @@
       </p:sp>
       <p:sp>
         <p:nvSpPr>
-          <p:cNvPr id="281" name="" descr="{&quot;isTemplate&quot;:true,&quot;type&quot;:&quot;text&quot;}"/>
+          <p:cNvPr id="297" name="" descr="{&quot;isTemplate&quot;:true,&quot;type&quot;:&quot;text&quot;}"/>
           <p:cNvSpPr txBox="1"/>
           <p:nvPr/>
         </p:nvSpPr>
@@ -12469,7 +13324,7 @@
       </p:sp>
       <p:sp>
         <p:nvSpPr>
-          <p:cNvPr id="282" name="" descr="{&quot;isTemplate&quot;:true,&quot;type&quot;:&quot;text&quot;}"/>
+          <p:cNvPr id="298" name="" descr="{&quot;isTemplate&quot;:true,&quot;type&quot;:&quot;text&quot;}"/>
           <p:cNvSpPr txBox="1"/>
           <p:nvPr/>
         </p:nvSpPr>
@@ -12506,7 +13361,7 @@
       </p:sp>
       <p:pic>
         <p:nvPicPr>
-          <p:cNvPr id="283" name=""/>
+          <p:cNvPr id="299" name=""/>
           <p:cNvPicPr>
             <a:picLocks noChangeAspect="1"/>
           </p:cNvPicPr>
@@ -12537,7 +13392,7 @@
       </p:pic>
       <p:sp>
         <p:nvSpPr>
-          <p:cNvPr id="284" name="" descr="{&quot;isTemplate&quot;:true,&quot;type&quot;:&quot;text&quot;}"/>
+          <p:cNvPr id="300" name="" descr="{&quot;isTemplate&quot;:true,&quot;type&quot;:&quot;text&quot;}"/>
           <p:cNvSpPr txBox="1"/>
           <p:nvPr/>
         </p:nvSpPr>
@@ -12572,7 +13427,7 @@
       </p:sp>
       <p:pic>
         <p:nvPicPr>
-          <p:cNvPr id="285" name=""/>
+          <p:cNvPr id="301" name=""/>
           <p:cNvPicPr>
             <a:picLocks noChangeAspect="1"/>
           </p:cNvPicPr>
@@ -12603,7 +13458,7 @@
       </p:pic>
       <p:sp>
         <p:nvSpPr>
-          <p:cNvPr id="286" name="" descr="{&quot;isTemplate&quot;:true,&quot;type&quot;:&quot;text&quot;}"/>
+          <p:cNvPr id="302" name="" descr="{&quot;isTemplate&quot;:true,&quot;type&quot;:&quot;text&quot;}"/>
           <p:cNvSpPr txBox="1"/>
           <p:nvPr/>
         </p:nvSpPr>
@@ -12640,7 +13495,7 @@
       </p:sp>
       <p:pic>
         <p:nvPicPr>
-          <p:cNvPr id="287" name=""/>
+          <p:cNvPr id="303" name=""/>
           <p:cNvPicPr>
             <a:picLocks noChangeAspect="1"/>
           </p:cNvPicPr>
@@ -12671,7 +13526,7 @@
       </p:pic>
       <p:sp>
         <p:nvSpPr>
-          <p:cNvPr id="288" name="" descr="{&quot;isTemplate&quot;:true,&quot;type&quot;:&quot;text&quot;}"/>
+          <p:cNvPr id="304" name="" descr="{&quot;isTemplate&quot;:true,&quot;type&quot;:&quot;text&quot;}"/>
           <p:cNvSpPr txBox="1"/>
           <p:nvPr/>
         </p:nvSpPr>
@@ -12708,7 +13563,7 @@
       </p:sp>
       <p:sp>
         <p:nvSpPr>
-          <p:cNvPr id="289" name=""/>
+          <p:cNvPr id="305" name=""/>
           <p:cNvSpPr/>
           <p:nvPr/>
         </p:nvSpPr>
@@ -12734,7 +13589,7 @@
       </p:sp>
       <p:pic>
         <p:nvPicPr>
-          <p:cNvPr id="290" name=""/>
+          <p:cNvPr id="306" name=""/>
           <p:cNvPicPr>
             <a:picLocks noChangeAspect="1"/>
           </p:cNvPicPr>
@@ -12765,7 +13620,7 @@
       </p:pic>
       <p:sp>
         <p:nvSpPr>
-          <p:cNvPr id="291" name="" descr="{&quot;isTemplate&quot;:true,&quot;type&quot;:&quot;text&quot;}"/>
+          <p:cNvPr id="307" name="" descr="{&quot;isTemplate&quot;:true,&quot;type&quot;:&quot;text&quot;}"/>
           <p:cNvSpPr txBox="1"/>
           <p:nvPr/>
         </p:nvSpPr>
@@ -12800,7 +13655,7 @@
       </p:sp>
       <p:sp>
         <p:nvSpPr>
-          <p:cNvPr id="292" name=""/>
+          <p:cNvPr id="308" name=""/>
           <p:cNvSpPr/>
           <p:nvPr/>
         </p:nvSpPr>
@@ -12828,7 +13683,7 @@
       </p:sp>
       <p:pic>
         <p:nvPicPr>
-          <p:cNvPr id="293" name=""/>
+          <p:cNvPr id="309" name=""/>
           <p:cNvPicPr>
             <a:picLocks noChangeAspect="1"/>
           </p:cNvPicPr>

--- a/Panduan Korlas dan Admin Pizza Snack Play/Panduan Korlas dan Admin Pizza Snack Play.pptx
+++ b/Panduan Korlas dan Admin Pizza Snack Play/Panduan Korlas dan Admin Pizza Snack Play.pptx
@@ -5,7 +5,7 @@
     <p:sldMasterId id="2147483648" r:id="rId0"/>
   </p:sldMasterIdLst>
   <p:notesMasterIdLst>
-    <p:notesMasterId r:id="rId17"/>
+    <p:notesMasterId r:id="rId18"/>
   </p:notesMasterIdLst>
   <p:sldIdLst>
     <p:sldId id="256" r:id="rId1"/>
@@ -24,6 +24,7 @@
     <p:sldId id="269" r:id="rId14"/>
     <p:sldId id="270" r:id="rId15"/>
     <p:sldId id="271" r:id="rId16"/>
+    <p:sldId id="272" r:id="rId17"/>
   </p:sldIdLst>
   <p:sldSz cx="12192000" cy="6858000"/>
   <p:notesSz cx="6858000" cy="12192000"/>
@@ -559,7 +560,7 @@
   <p:cSld>
     <p:spTree>
       <p:nvGrpSpPr>
-        <p:cNvPr id="1" name="" descr="&lt;Slide&#10;    style={{&#10;        width: '1280px',&#10;        height: '720px',&#10;        background: '#FAF7F2',&#10;        flexDirection: 'row',&#10;        padding: 0,&#10;        position: 'relative',&#10;        overflow: 'hidden',&#10;    }}&#10;&gt;&#10;    {/* dekorasi latar */}&#10;    &lt;Box&#10;        style={{&#10;            position: 'absolute',&#10;            top: -140,&#10;            right: -120,&#10;            width: 520,&#10;            height: 520,&#10;            borderRadius: 260,&#10;            background: 'linear-gradient(135deg, #51277C 0%, #7A45A8 100%)',&#10;            opacity: 0.10,&#10;        }}&#10;    /&gt;&#10;    &lt;Box&#10;        style={{&#10;            position: 'absolute',&#10;            bottom: -90,&#10;            left: -80,&#10;            width: 360,&#10;            height: 360,&#10;            borderRadius: 180,&#10;            background: 'linear-gradient(135deg, #AFC440 0%, #F3B26C 100%)',&#10;            opacity: 0.14,&#10;        }}&#10;    /&gt;&#10;&#10;    {/* ── kolom kiri: judul ── */}&#10;    &lt;Box&#10;        style={{&#10;            position: 'relative',&#10;            zIndex: 1,&#10;            width: '56%',&#10;            paddingTop: 96,&#10;            paddingBottom: 96,&#10;            paddingLeft: 64,&#10;            paddingRight: 32,&#10;            justifyContent: 'center',&#10;        }}&#10;    &gt;&#10;        &lt;Box&#10;            style={{&#10;                flexDirection: 'row',&#10;                alignItems: 'center',&#10;                gap: 10,&#10;                alignSelf: 'flex-start',&#10;                background: '#51277C',&#10;                borderRadius: 999,&#10;                paddingTop: 9,&#10;                paddingBottom: 9,&#10;                paddingLeft: 20,&#10;                paddingRight: 22,&#10;            }}&#10;        &gt;&#10;            &lt;svg width={20} height={20} viewBox='0 0 24 24'&gt;&#10;                &lt;path d='M8 3h8v3H8z' fill='#F3B26C' /&gt;&#10;                &lt;path&#10;                    d='M6 5h12v16H6z'&#10;                    fill='none'&#10;                    stroke='#F3B26C'&#10;                    strokeWidth='2'&#10;                /&gt;&#10;                &lt;path d='M9 11h6M9 15h4' stroke='#F3B26C' strokeWidth='2' strokeLinecap='round' /&gt;&#10;            &lt;/svg&gt;&#10;            &lt;Text style={{ fontSize: 17, color: '#FFFFFF', fontFamily: 'Verdana', fontWeight: 'bold' }}&gt;&#10;                Panduan Korlas &amp;amp; Admin&#10;            &lt;/Text&gt;&#10;        &lt;/Box&gt;&#10;&#10;        &lt;Text&#10;            style={{&#10;                marginTop: 26,&#10;                fontSize: 62,&#10;                fontWeight: 'bold',&#10;                color: '#51277C',&#10;                fontFamily: 'Trebuchet MS',&#10;                lineHeight: 1.15,&#10;            }}&#10;        &gt;&#10;            Pizza Snack Play&#10;        &lt;/Text&gt;&#10;&#10;        &lt;Box style={{ marginTop: 18, width: 96, height: 7, borderRadius: 4, background: '#AFC440' }} /&gt;&#10;&#10;        &lt;Text&#10;            style={{&#10;                marginTop: 26,&#10;                fontSize: 23,&#10;                color: '#2A2333',&#10;                fontFamily: 'Verdana',&#10;                lineHeight: 1.55,&#10;            }}&#10;        &gt;&#10;            Menyusun jadwal snack kelas, menentukan petugas, lalu&#10;            &lt;span style={{ fontWeight: 'bold', color: '#51277C' }}&gt; menerbitkannya ke orang tua&lt;/span&gt;.&#10;        &lt;/Text&gt;&#10;&#10;        &lt;Text&#10;            style={{&#10;                marginTop: 22,&#10;                fontSize: 19,&#10;                color: '#6B6478',&#10;                fontFamily: 'Verdana',&#10;                lineHeight: 1.5,&#10;            }}&#10;        &gt;&#10;            Dari awal sampai terbit — bisa dikerjakan sendiri.&#10;        &lt;/Text&gt;&#10;    &lt;/Box&gt;&#10;&#10;    {/* ── kolom kanan: logo + penanda ── */}&#10;    &lt;Box&#10;        style={{&#10;            position: 'relative',&#10;            zIndex: 1,&#10;            width: '44%',&#10;            justifyContent: 'center',&#10;            alignItems: 'center',&#10;        }}&#10;    &gt;&#10;        &lt;Image src=&quot;assets/app_logo.png&quot; style={{ width: 400, height: 388, objectFit: 'contain' }} /&gt;&#10;&#10;        &lt;Box&#10;            style={{&#10;                marginTop: 18,&#10;                flexDirection: 'row',&#10;                alignItems: 'center',&#10;                gap: 12,&#10;                background: 'rgba(81,39,124,0.07)',&#10;                borderRadius: 14,&#10;                paddingTop: 12,&#10;                paddingBottom: 12,&#10;                paddingLeft: 22,&#10;                paddingRight: 22,&#10;            }}&#10;        &gt;&#10;            &lt;svg width={34} height={34} viewBox='0 0 24 24'&gt;&#10;                &lt;path&#10;                    d='M7 2v3M17 2v3M3 9h18M5 5h14a2 2 0 0 1 2 2v12a2 2 0 0 1-2 2H5a2 2 0 0 1-2-2V7a2 2 0 0 1 2-2z'&#10;                    fill='none'&#10;                    stroke='#51277C'&#10;                    strokeWidth='2'&#10;                    strokeLinecap='round'&#10;                /&gt;&#10;            &lt;/svg&gt;&#10;            &lt;Text style={{ fontSize: 18, color: '#51277C', fontFamily: 'Verdana', fontWeight: 'bold' }}&gt;&#10;                Senin sampai Jumat&#10;            &lt;/Text&gt;&#10;        &lt;/Box&gt;&#10;    &lt;/Box&gt;&#10;&lt;/Slide&gt;&#10;"/>
+        <p:cNvPr id="1" name=""/>
         <p:cNvGrpSpPr/>
         <p:nvPr/>
       </p:nvGrpSpPr>
@@ -592,7 +593,10 @@
         </p:spPr>
         <p:txBody>
           <a:bodyPr/>
-          <a:p/>
+          <a:p>
+            <a:pPr/>
+            <a:endParaRPr/>
+          </a:p>
         </p:txBody>
       </p:sp>
       <p:sp>
@@ -959,7 +963,10 @@
         </p:spPr>
         <p:txBody>
           <a:bodyPr/>
-          <a:p/>
+          <a:p>
+            <a:pPr/>
+            <a:endParaRPr/>
+          </a:p>
         </p:txBody>
       </p:sp>
       <p:sp>
@@ -1023,7 +1030,10 @@
         </p:spPr>
         <p:txBody>
           <a:bodyPr/>
-          <a:p/>
+          <a:p>
+            <a:pPr/>
+            <a:endParaRPr/>
+          </a:p>
         </p:txBody>
       </p:sp>
       <p:sp>
@@ -1049,7 +1059,10 @@
         </p:spPr>
         <p:txBody>
           <a:bodyPr/>
-          <a:p/>
+          <a:p>
+            <a:pPr/>
+            <a:endParaRPr/>
+          </a:p>
         </p:txBody>
       </p:sp>
       <p:pic>
@@ -1176,7 +1189,10 @@
         </p:spPr>
         <p:txBody>
           <a:bodyPr/>
-          <a:p/>
+          <a:p>
+            <a:pPr/>
+            <a:endParaRPr/>
+          </a:p>
         </p:txBody>
       </p:sp>
       <p:sp>
@@ -1322,7 +1338,10 @@
         </p:spPr>
         <p:txBody>
           <a:bodyPr/>
-          <a:p/>
+          <a:p>
+            <a:pPr/>
+            <a:endParaRPr/>
+          </a:p>
         </p:txBody>
       </p:sp>
       <p:pic>
@@ -1401,7 +1420,7 @@
   <p:cSld>
     <p:spTree>
       <p:nvGrpSpPr>
-        <p:cNvPr id="16" name="" descr="&lt;Slide&#10;    style={{&#10;        width: '1280px',&#10;        height: '720px',&#10;        background: '#FAF7F2',&#10;        paddingTop: 20,&#10;        paddingBottom: 20,&#10;        paddingLeft: 64,&#10;        paddingRight: 64,&#10;    }}&#10;&gt;&#10;    {/* ── A · blok judul ── */}&#10;    &lt;Box style={{ height: 110, justifyContent: 'center' }}&gt;&#10;        &lt;Text&#10;            style={{&#10;                fontSize: 34,&#10;                fontWeight: 'bold',&#10;                color: '#51277C',&#10;                fontFamily: 'Trebuchet MS',&#10;                lineHeight: 1.3,&#10;            }}&#10;        &gt;&#10;            Petugas piket: siapa yang ambil snack&#10;        &lt;/Text&gt;&#10;        &lt;Box style={{ marginTop: 10, width: 72, height: 6, borderRadius: 3, background: '#51277C' }} /&gt;&#10;    &lt;/Box&gt;&#10;&#10;    {/* ── B · area konten ── */}&#10;    &lt;Box style={{ height: 530, flexDirection: 'row', gap: 26 }}&gt;&#10;        {/* kiri 30% · penanda */}&#10;        &lt;Box&#10;            style={{&#10;                width: '30%',&#10;                height: '100%',&#10;                background: 'linear-gradient(135deg, #51277C 0%, #7A45A8 100%)',&#10;                borderRadius: 18,&#10;                padding: 26,&#10;                justifyContent: 'space-between',&#10;            }}&#10;        &gt;&#10;            &lt;Box&gt;&#10;                &lt;Text&#10;                    style={{&#10;                        fontSize: 30,&#10;                        fontWeight: 'bold',&#10;                        color: '#FFFFFF',&#10;                        fontFamily: 'Trebuchet MS',&#10;                        lineHeight: 1.25,&#10;                    }}&#10;                &gt;&#10;                    Satu tanggal,{'\n'}satu petugas&#10;                &lt;/Text&gt;&#10;                &lt;Box style={{ marginTop: 16, width: 64, height: 5, borderRadius: 3, background: '#F3B26C' }} /&gt;&#10;            &lt;/Box&gt;&#10;            &lt;Text&#10;                style={{&#10;                    fontSize: 17,&#10;                    color: 'rgba(255,255,255,0.88)',&#10;                    fontFamily: 'Verdana',&#10;                    lineHeight: 1.5,&#10;                }}&#10;            &gt;&#10;                Nama petugas yang Anda isi akan tampil ke orang tua sekalian nama orang tuanya.&#10;            &lt;/Text&gt;&#10;        &lt;/Box&gt;&#10;&#10;        {/* kanan 70% · tiga poin + ilustrasi dropdown */}&#10;        &lt;Box style={{ width: '70%', height: '100%', flexDirection: 'row', gap: 22 }}&gt;&#10;            &lt;Box style={{ flex: 1, height: '100%', justifyContent: 'space-between' }}&gt;&#10;                {[&#10;                    {&#10;                        t: 'Pilih dari daftar siswa',&#10;                        d: 'Kolom petugas berisi nama siswa di kelas Anda. Nama orang tuanya terisi sendiri.',&#10;                    },&#10;                    {&#10;                        t: 'Biarkan kosong bila perlu',&#10;                        d: 'Tanggal tanpa petugas bisa diambil sendiri orang tua — siapa cepat dia dapat.',&#10;                    },&#10;                    {&#10;                        t: 'Tidak ikut direbut orang tua',&#10;                        d: 'Ditandai &quot;Ditetapkan korlas&quot;, jadi tidak ada dua orang merasa sudah dapat.',&#10;                    },&#10;                ].map((it, i) =&gt; (&#10;                    &lt;Box&#10;                        key={i}&#10;                        style={{&#10;                            height: 165,&#10;                            background: '#FFFFFF',&#10;                            borderRadius: 16,&#10;                            boxShadow: '0 4px 20px rgba(0,0,0,0.08)',&#10;                            padding: 22,&#10;                            borderLeft: '8px solid #AFC440',&#10;                        }}&#10;                    &gt;&#10;                        &lt;Text&#10;                            style={{&#10;                                fontSize: 23,&#10;                                fontWeight: 'bold',&#10;                                color: '#51277C',&#10;                                fontFamily: 'Trebuchet MS',&#10;                                lineHeight: 1.3,&#10;                            }}&#10;                        &gt;&#10;                            {it.t}&#10;                        &lt;/Text&gt;&#10;                        &lt;Text&#10;                            style={{&#10;                                marginTop: 9,&#10;                                fontSize: 17,&#10;                                color: '#6B6478',&#10;                                fontFamily: 'Verdana',&#10;                                lineHeight: 1.5,&#10;                            }}&#10;                        &gt;&#10;                            {it.d}&#10;                        &lt;/Text&gt;&#10;                    &lt;/Box&gt;&#10;                ))}&#10;            &lt;/Box&gt;&#10;&#10;            &lt;Box&#10;                style={{&#10;                    width: 300,&#10;                    height: '100%',&#10;                    background: 'rgba(81,39,124,0.06)',&#10;                    borderRadius: 18,&#10;                    justifyContent: 'center',&#10;                    alignItems: 'center',&#10;                }}&#10;            &gt;&#10;                &lt;svg width={276} height={300} viewBox='0 0 276 300'&gt;&#10;                    &lt;text x='14' y='26' fontFamily='Verdana' fontSize='14' fill='#6B6478'&gt;Petugas&lt;/text&gt;&#10;                    &lt;rect x='14' y='38' width='248' height='48' rx='10' fill='#FFFFFF' stroke='#51277C' strokeWidth='2' /&gt;&#10;                    &lt;text x='34' y='68' fontFamily='Verdana' fontSize='16' fill='#51277C'&gt;Rafa Aditya&lt;/text&gt;&#10;                    &lt;path d='M232 58l16 12-16 12z' fill='#51277C' /&gt;&#10;&#10;                    &lt;rect x='14' y='94' width='248' height='112' rx='10' fill='#FFFFFF' stroke='#E6DFD2' strokeWidth='2' /&gt;&#10;                    &lt;rect x='14' y='94' width='248' height='36' rx='10' fill='rgba(81,39,124,0.10)' /&gt;&#10;                    &lt;text x='34' y='117' fontFamily='Verdana' fontSize='15' fontWeight='bold' fill='#51277C'&gt;Rafa Aditya&lt;/text&gt;&#10;                    &lt;text x='34' y='148' fontFamily='Verdana' fontSize='15' fill='#2A2333'&gt;Dinda&lt;/text&gt;&#10;                    &lt;text x='34' y='178' fontFamily='Verdana' fontSize='15' fill='#2A2333'&gt;Bayu&lt;/text&gt;&#10;&#10;                    &lt;text x='14' y='234' fontFamily='Verdana' fontSize='14' fill='#6B6478'&gt;Orang tua (terisi sendiri)&lt;/text&gt;&#10;                    &lt;rect x='14' y='246' width='248' height='44' rx='10' fill='#EFEAE1' /&gt;&#10;                    &lt;text x='34' y='274' fontFamily='Verdana' fontSize='15' fill='#6B6478'&gt;Ibu Rina&lt;/text&gt;&#10;                &lt;/svg&gt;&#10;            &lt;/Box&gt;&#10;        &lt;/Box&gt;&#10;    &lt;/Box&gt;&#10;&#10;    {/* ── C · bilah kaki ── */}&#10;    &lt;Box&#10;        style={{&#10;            height: 40,&#10;            flexDirection: 'row',&#10;            alignItems: 'center',&#10;            justifyContent: 'space-between',&#10;        }}&#10;    &gt;&#10;        &lt;Text style={{ fontSize: 14, color: '#6B6478', fontFamily: 'Verdana' }}&gt;&#10;            Pizza Snack Play · Panduan Korlas &amp;amp; Admin&#10;        &lt;/Text&gt;&#10;        &lt;Text style={{ fontSize: 14, color: '#6B6478', fontFamily: 'Verdana' }}&gt;10 / 16&lt;/Text&gt;&#10;    &lt;/Box&gt;&#10;&lt;/Slide&gt;&#10;"/>
+        <p:cNvPr id="16" name=""/>
         <p:cNvGrpSpPr/>
         <p:nvPr/>
       </p:nvGrpSpPr>
@@ -1434,7 +1453,10 @@
         </p:spPr>
         <p:txBody>
           <a:bodyPr/>
-          <a:p/>
+          <a:p>
+            <a:pPr/>
+            <a:endParaRPr/>
+          </a:p>
         </p:txBody>
       </p:sp>
       <p:sp>
@@ -1466,6 +1488,705 @@
                 <a:latin typeface="Trebuchet MS"/>
                 <a:ea typeface="Trebuchet MS"/>
               </a:rPr>
+              <a:t>Tempel teks dari sekolah</a:t>
+            </a:r>
+            <a:endParaRPr/>
+          </a:p>
+        </p:txBody>
+      </p:sp>
+      <p:sp>
+        <p:nvSpPr>
+          <p:cNvPr id="19" name=""/>
+          <p:cNvSpPr/>
+          <p:nvPr/>
+        </p:nvSpPr>
+        <p:spPr>
+          <a:xfrm rot="0" flipH="0" flipV="0">
+            <a:off x="609600" y="990600"/>
+            <a:ext cx="685800" cy="57150"/>
+          </a:xfrm>
+          <a:prstGeom prst="roundRect">
+            <a:avLst>
+              <a:gd name="adj" fmla="val 50000"/>
+            </a:avLst>
+          </a:prstGeom>
+          <a:solidFill>
+            <a:srgbClr val="F3B26C"/>
+          </a:solidFill>
+          <a:ln/>
+        </p:spPr>
+        <p:txBody>
+          <a:bodyPr/>
+          <a:p>
+            <a:pPr/>
+            <a:endParaRPr/>
+          </a:p>
+        </p:txBody>
+      </p:sp>
+      <p:sp>
+        <p:nvSpPr>
+          <p:cNvPr id="20" name="" descr="{&quot;isTemplate&quot;:true,&quot;type&quot;:&quot;text&quot;}"/>
+          <p:cNvSpPr txBox="1"/>
+          <p:nvPr/>
+        </p:nvSpPr>
+        <p:spPr>
+          <a:xfrm rot="0" flipH="0" flipV="0">
+            <a:off x="609600" y="6400800"/>
+            <a:ext cx="2905125" cy="161925"/>
+          </a:xfrm>
+          <a:prstGeom prst="rect"/>
+        </p:spPr>
+        <p:txBody>
+          <a:bodyPr wrap="none" lIns="0" tIns="0" rIns="0" bIns="0"/>
+          <a:p>
+            <a:pPr>
+              <a:lnSpc>
+                <a:spcPct val="100000"/>
+              </a:lnSpc>
+            </a:pPr>
+            <a:r>
+              <a:rPr lang="en-US" sz="1050">
+                <a:solidFill>
+                  <a:srgbClr val="6B6478"/>
+                </a:solidFill>
+                <a:latin typeface="Verdana"/>
+                <a:ea typeface="Verdana"/>
+              </a:rPr>
+              <a:t>Pizza Snack Play · Panduan Korlas &amp; Admin</a:t>
+            </a:r>
+            <a:endParaRPr/>
+          </a:p>
+        </p:txBody>
+      </p:sp>
+      <p:sp>
+        <p:nvSpPr>
+          <p:cNvPr id="21" name="" descr="{&quot;isTemplate&quot;:true,&quot;type&quot;:&quot;text&quot;}"/>
+          <p:cNvSpPr txBox="1"/>
+          <p:nvPr/>
+        </p:nvSpPr>
+        <p:spPr>
+          <a:xfrm rot="0" flipH="0" flipV="0">
+            <a:off x="11087100" y="6400800"/>
+            <a:ext cx="495300" cy="161925"/>
+          </a:xfrm>
+          <a:prstGeom prst="rect"/>
+        </p:spPr>
+        <p:txBody>
+          <a:bodyPr wrap="none" lIns="0" tIns="0" rIns="0" bIns="0"/>
+          <a:p>
+            <a:pPr>
+              <a:lnSpc>
+                <a:spcPct val="100000"/>
+              </a:lnSpc>
+            </a:pPr>
+            <a:r>
+              <a:rPr lang="en-US" sz="1050">
+                <a:solidFill>
+                  <a:srgbClr val="6B6478"/>
+                </a:solidFill>
+                <a:latin typeface="Verdana"/>
+                <a:ea typeface="Verdana"/>
+              </a:rPr>
+              <a:t>10 / 17</a:t>
+            </a:r>
+            <a:endParaRPr/>
+          </a:p>
+        </p:txBody>
+      </p:sp>
+      <p:sp>
+        <p:nvSpPr>
+          <p:cNvPr id="22" name=""/>
+          <p:cNvSpPr/>
+          <p:nvPr/>
+        </p:nvSpPr>
+        <p:spPr>
+          <a:xfrm rot="0" flipH="0" flipV="0">
+            <a:off x="-1047750" y="4476750"/>
+            <a:ext cx="3619500" cy="3619500"/>
+          </a:xfrm>
+          <a:custGeom>
+            <a:pathLst>
+              <a:path w="380" h="380">
+                <a:moveTo>
+                  <a:pt x="195" y="0"/>
+                </a:moveTo>
+                <a:cubicBezTo>
+                  <a:pt x="255" y="2"/>
+                  <a:pt x="311" y="32"/>
+                  <a:pt x="346" y="81"/>
+                </a:cubicBezTo>
+                <a:cubicBezTo>
+                  <a:pt x="380" y="130"/>
+                  <a:pt x="389" y="193"/>
+                  <a:pt x="370" y="250"/>
+                </a:cubicBezTo>
+                <a:lnTo>
+                  <a:pt x="110" y="250"/>
+                </a:lnTo>
+                <a:lnTo>
+                  <a:pt x="110" y="18"/>
+                </a:lnTo>
+                <a:cubicBezTo>
+                  <a:pt x="135" y="6"/>
+                  <a:pt x="162" y="0"/>
+                  <a:pt x="190" y="0"/>
+                </a:cubicBezTo>
+                <a:close/>
+              </a:path>
+            </a:pathLst>
+          </a:custGeom>
+          <a:gradFill>
+            <a:gsLst>
+              <a:gs pos="0">
+                <a:srgbClr val="AFC440">
+                  <a:alpha val="12000"/>
+                </a:srgbClr>
+              </a:gs>
+              <a:gs pos="100000">
+                <a:srgbClr val="F3B26C">
+                  <a:alpha val="12000"/>
+                </a:srgbClr>
+              </a:gs>
+            </a:gsLst>
+            <a:lin ang="2700000" scaled="1"/>
+          </a:gradFill>
+          <a:ln/>
+        </p:spPr>
+        <p:txBody>
+          <a:bodyPr/>
+          <a:p>
+            <a:pPr/>
+            <a:endParaRPr/>
+          </a:p>
+        </p:txBody>
+      </p:sp>
+      <p:sp>
+        <p:nvSpPr>
+          <p:cNvPr id="23" name="" descr="{&quot;isTemplate&quot;:true,&quot;type&quot;:&quot;text&quot;}"/>
+          <p:cNvSpPr txBox="1"/>
+          <p:nvPr/>
+        </p:nvSpPr>
+        <p:spPr>
+          <a:xfrm rot="0" flipH="0" flipV="0">
+            <a:off x="609600" y="1323975"/>
+            <a:ext cx="4791075" cy="1162050"/>
+          </a:xfrm>
+          <a:prstGeom prst="rect"/>
+        </p:spPr>
+        <p:txBody>
+          <a:bodyPr wrap="none" lIns="0" tIns="0" rIns="0" bIns="0"/>
+          <a:p>
+            <a:pPr>
+              <a:lnSpc>
+                <a:spcPct val="114999"/>
+              </a:lnSpc>
+            </a:pPr>
+            <a:r>
+              <a:rPr lang="en-US" sz="3300" b="1">
+                <a:solidFill>
+                  <a:srgbClr val="51277C"/>
+                </a:solidFill>
+                <a:latin typeface="Trebuchet MS"/>
+                <a:ea typeface="Trebuchet MS"/>
+              </a:rPr>
+              <a:t>Tidak perlu</a:t>
+            </a:r>
+            <a:endParaRPr/>
+          </a:p>
+          <a:p>
+            <a:pPr>
+              <a:lnSpc>
+                <a:spcPct val="114999"/>
+              </a:lnSpc>
+            </a:pPr>
+            <a:r>
+              <a:rPr lang="en-US" sz="3300" b="1">
+                <a:solidFill>
+                  <a:srgbClr val="51277C"/>
+                </a:solidFill>
+                <a:latin typeface="Trebuchet MS"/>
+                <a:ea typeface="Trebuchet MS"/>
+              </a:rPr>
+              <a:t>ketik ulang.</a:t>
+            </a:r>
+            <a:endParaRPr/>
+          </a:p>
+        </p:txBody>
+      </p:sp>
+      <p:sp>
+        <p:nvSpPr>
+          <p:cNvPr id="24" name="" descr="{&quot;isTemplate&quot;:true,&quot;type&quot;:&quot;text&quot;}"/>
+          <p:cNvSpPr txBox="1"/>
+          <p:nvPr/>
+        </p:nvSpPr>
+        <p:spPr>
+          <a:xfrm rot="0" flipH="0" flipV="0">
+            <a:off x="609600" y="2676525"/>
+            <a:ext cx="4791075" cy="1019175"/>
+          </a:xfrm>
+          <a:prstGeom prst="rect"/>
+        </p:spPr>
+        <p:txBody>
+          <a:bodyPr wrap="square" lIns="0" tIns="0" rIns="0" bIns="0">
+            <a:normAutofit/>
+          </a:bodyPr>
+          <a:p>
+            <a:pPr>
+              <a:lnSpc>
+                <a:spcPct val="155000"/>
+              </a:lnSpc>
+            </a:pPr>
+            <a:r>
+              <a:rPr lang="en-US" sz="1425">
+                <a:solidFill>
+                  <a:srgbClr val="2A2333"/>
+                </a:solidFill>
+                <a:latin typeface="Verdana"/>
+                <a:ea typeface="Verdana"/>
+              </a:rPr>
+              <a:t>Jadwal yang dikirim sekolah lewat WhatsApp bisa ditempel apa adanya. Aplikasi membaca rentang tanggal dan baris harinya sendiri.</a:t>
+            </a:r>
+            <a:endParaRPr/>
+          </a:p>
+        </p:txBody>
+      </p:sp>
+      <p:pic>
+        <p:nvPicPr>
+          <p:cNvPr id="25" name=""/>
+          <p:cNvPicPr>
+            <a:picLocks noChangeAspect="1"/>
+          </p:cNvPicPr>
+          <p:nvPr/>
+        </p:nvPicPr>
+        <p:blipFill>
+          <a:blip r:embed="rId1">
+            <a:extLst>
+              <a:ext uri="{96DAC541-7B7A-43D3-8B79-37D633B846F1}">
+                <asvg:svgBlip r:embed="rId1"/>
+              </a:ext>
+            </a:extLst>
+          </a:blip>
+          <a:stretch>
+            <a:fillRect/>
+          </a:stretch>
+        </p:blipFill>
+        <p:spPr>
+          <a:xfrm rot="0" flipH="0" flipV="0">
+            <a:off x="609600" y="4000500"/>
+            <a:ext cx="190500" cy="190500"/>
+          </a:xfrm>
+          <a:prstGeom prst="rect">
+            <a:avLst/>
+          </a:prstGeom>
+          <a:ln/>
+        </p:spPr>
+      </p:pic>
+      <p:sp>
+        <p:nvSpPr>
+          <p:cNvPr id="26" name="" descr="{&quot;isTemplate&quot;:true,&quot;type&quot;:&quot;text&quot;}"/>
+          <p:cNvSpPr txBox="1"/>
+          <p:nvPr/>
+        </p:nvSpPr>
+        <p:spPr>
+          <a:xfrm rot="0" flipH="0" flipV="0">
+            <a:off x="895350" y="3952875"/>
+            <a:ext cx="4505325" cy="285750"/>
+          </a:xfrm>
+          <a:prstGeom prst="rect"/>
+        </p:spPr>
+        <p:txBody>
+          <a:bodyPr wrap="none" lIns="0" tIns="0" rIns="0" bIns="0"/>
+          <a:p>
+            <a:pPr>
+              <a:lnSpc>
+                <a:spcPct val="145000"/>
+              </a:lnSpc>
+            </a:pPr>
+            <a:r>
+              <a:rPr lang="en-US" sz="1275">
+                <a:solidFill>
+                  <a:srgbClr val="6B6478"/>
+                </a:solidFill>
+                <a:latin typeface="Verdana"/>
+                <a:ea typeface="Verdana"/>
+              </a:rPr>
+              <a:t>Pratinjau ditampilkan lebih dulu — bisa dibatalkan</a:t>
+            </a:r>
+            <a:endParaRPr/>
+          </a:p>
+        </p:txBody>
+      </p:sp>
+      <p:pic>
+        <p:nvPicPr>
+          <p:cNvPr id="27" name=""/>
+          <p:cNvPicPr>
+            <a:picLocks noChangeAspect="1"/>
+          </p:cNvPicPr>
+          <p:nvPr/>
+        </p:nvPicPr>
+        <p:blipFill>
+          <a:blip r:embed="rId1">
+            <a:extLst>
+              <a:ext uri="{96DAC541-7B7A-43D3-8B79-37D633B846F1}">
+                <asvg:svgBlip r:embed="rId1"/>
+              </a:ext>
+            </a:extLst>
+          </a:blip>
+          <a:stretch>
+            <a:fillRect/>
+          </a:stretch>
+        </p:blipFill>
+        <p:spPr>
+          <a:xfrm rot="0" flipH="0" flipV="0">
+            <a:off x="609600" y="4514850"/>
+            <a:ext cx="190500" cy="190500"/>
+          </a:xfrm>
+          <a:prstGeom prst="rect">
+            <a:avLst/>
+          </a:prstGeom>
+          <a:ln/>
+        </p:spPr>
+      </p:pic>
+      <p:sp>
+        <p:nvSpPr>
+          <p:cNvPr id="28" name="" descr="{&quot;isTemplate&quot;:true,&quot;type&quot;:&quot;text&quot;}"/>
+          <p:cNvSpPr txBox="1"/>
+          <p:nvPr/>
+        </p:nvSpPr>
+        <p:spPr>
+          <a:xfrm rot="0" flipH="0" flipV="0">
+            <a:off x="895350" y="4324350"/>
+            <a:ext cx="4505325" cy="571500"/>
+          </a:xfrm>
+          <a:prstGeom prst="rect"/>
+        </p:spPr>
+        <p:txBody>
+          <a:bodyPr wrap="square" lIns="0" tIns="0" rIns="0" bIns="0">
+            <a:normAutofit/>
+          </a:bodyPr>
+          <a:p>
+            <a:pPr>
+              <a:lnSpc>
+                <a:spcPct val="145000"/>
+              </a:lnSpc>
+            </a:pPr>
+            <a:r>
+              <a:rPr lang="en-US" sz="1275">
+                <a:solidFill>
+                  <a:srgbClr val="6B6478"/>
+                </a:solidFill>
+                <a:latin typeface="Verdana"/>
+                <a:ea typeface="Verdana"/>
+              </a:rPr>
+              <a:t>Tanggal yang sudah ada jadwalnya dilewati, jadi tempel ulang aman</a:t>
+            </a:r>
+            <a:endParaRPr/>
+          </a:p>
+        </p:txBody>
+      </p:sp>
+      <p:pic>
+        <p:nvPicPr>
+          <p:cNvPr id="29" name=""/>
+          <p:cNvPicPr>
+            <a:picLocks noChangeAspect="1"/>
+          </p:cNvPicPr>
+          <p:nvPr/>
+        </p:nvPicPr>
+        <p:blipFill>
+          <a:blip r:embed="rId1">
+            <a:extLst>
+              <a:ext uri="{96DAC541-7B7A-43D3-8B79-37D633B846F1}">
+                <asvg:svgBlip r:embed="rId1"/>
+              </a:ext>
+            </a:extLst>
+          </a:blip>
+          <a:stretch>
+            <a:fillRect/>
+          </a:stretch>
+        </p:blipFill>
+        <p:spPr>
+          <a:xfrm rot="0" flipH="0" flipV="0">
+            <a:off x="609600" y="5172075"/>
+            <a:ext cx="190500" cy="190500"/>
+          </a:xfrm>
+          <a:prstGeom prst="rect">
+            <a:avLst/>
+          </a:prstGeom>
+          <a:ln/>
+        </p:spPr>
+      </p:pic>
+      <p:sp>
+        <p:nvSpPr>
+          <p:cNvPr id="30" name="" descr="{&quot;isTemplate&quot;:true,&quot;type&quot;:&quot;text&quot;}"/>
+          <p:cNvSpPr txBox="1"/>
+          <p:nvPr/>
+        </p:nvSpPr>
+        <p:spPr>
+          <a:xfrm rot="0" flipH="0" flipV="0">
+            <a:off x="895350" y="4981575"/>
+            <a:ext cx="4505325" cy="571500"/>
+          </a:xfrm>
+          <a:prstGeom prst="rect"/>
+        </p:spPr>
+        <p:txBody>
+          <a:bodyPr wrap="square" lIns="0" tIns="0" rIns="0" bIns="0">
+            <a:normAutofit/>
+          </a:bodyPr>
+          <a:p>
+            <a:pPr>
+              <a:lnSpc>
+                <a:spcPct val="145000"/>
+              </a:lnSpc>
+            </a:pPr>
+            <a:r>
+              <a:rPr lang="en-US" sz="1275">
+                <a:solidFill>
+                  <a:srgbClr val="6B6478"/>
+                </a:solidFill>
+                <a:latin typeface="Verdana"/>
+                <a:ea typeface="Verdana"/>
+              </a:rPr>
+              <a:t>Hasilnya masuk sebagai jadwal yang masih bisa diubah</a:t>
+            </a:r>
+            <a:endParaRPr/>
+          </a:p>
+        </p:txBody>
+      </p:sp>
+      <p:sp>
+        <p:nvSpPr>
+          <p:cNvPr id="31" name=""/>
+          <p:cNvSpPr/>
+          <p:nvPr/>
+        </p:nvSpPr>
+        <p:spPr>
+          <a:xfrm rot="0" flipH="0" flipV="0">
+            <a:off x="609600" y="5762625"/>
+            <a:ext cx="2895600" cy="438150"/>
+          </a:xfrm>
+          <a:prstGeom prst="roundRect">
+            <a:avLst>
+              <a:gd name="adj" fmla="val 26087"/>
+            </a:avLst>
+          </a:prstGeom>
+          <a:solidFill>
+            <a:srgbClr val="51277C"/>
+          </a:solidFill>
+          <a:ln/>
+        </p:spPr>
+        <p:txBody>
+          <a:bodyPr/>
+          <a:p>
+            <a:pPr/>
+            <a:endParaRPr/>
+          </a:p>
+        </p:txBody>
+      </p:sp>
+      <p:pic>
+        <p:nvPicPr>
+          <p:cNvPr id="32" name=""/>
+          <p:cNvPicPr>
+            <a:picLocks noChangeAspect="1"/>
+          </p:cNvPicPr>
+          <p:nvPr/>
+        </p:nvPicPr>
+        <p:blipFill>
+          <a:blip r:embed="rId2">
+            <a:extLst>
+              <a:ext uri="{96DAC541-7B7A-43D3-8B79-37D633B846F1}">
+                <asvg:svgBlip r:embed="rId2"/>
+              </a:ext>
+            </a:extLst>
+          </a:blip>
+          <a:stretch>
+            <a:fillRect/>
+          </a:stretch>
+        </p:blipFill>
+        <p:spPr>
+          <a:xfrm rot="0" flipH="0" flipV="0">
+            <a:off x="819150" y="5876925"/>
+            <a:ext cx="209550" cy="209550"/>
+          </a:xfrm>
+          <a:prstGeom prst="rect">
+            <a:avLst/>
+          </a:prstGeom>
+          <a:ln/>
+        </p:spPr>
+      </p:pic>
+      <p:sp>
+        <p:nvSpPr>
+          <p:cNvPr id="33" name="" descr="{&quot;isTemplate&quot;:true,&quot;type&quot;:&quot;text&quot;}"/>
+          <p:cNvSpPr txBox="1"/>
+          <p:nvPr/>
+        </p:nvSpPr>
+        <p:spPr>
+          <a:xfrm rot="0" flipH="0" flipV="0">
+            <a:off x="1123950" y="5876925"/>
+            <a:ext cx="2171700" cy="209550"/>
+          </a:xfrm>
+          <a:prstGeom prst="rect"/>
+        </p:spPr>
+        <p:txBody>
+          <a:bodyPr wrap="none" lIns="0" tIns="0" rIns="0" bIns="0"/>
+          <a:p>
+            <a:pPr>
+              <a:lnSpc>
+                <a:spcPct val="100000"/>
+              </a:lnSpc>
+            </a:pPr>
+            <a:r>
+              <a:rPr lang="en-US" sz="1350" b="1">
+                <a:solidFill>
+                  <a:srgbClr val="FFFFFF"/>
+                </a:solidFill>
+                <a:latin typeface="Verdana"/>
+                <a:ea typeface="Verdana"/>
+              </a:rPr>
+              <a:t>Tombol: Impor Jadwal</a:t>
+            </a:r>
+            <a:endParaRPr/>
+          </a:p>
+        </p:txBody>
+      </p:sp>
+      <p:sp>
+        <p:nvSpPr>
+          <p:cNvPr id="34" name=""/>
+          <p:cNvSpPr/>
+          <p:nvPr/>
+        </p:nvSpPr>
+        <p:spPr>
+          <a:xfrm rot="0" flipH="0" flipV="0">
+            <a:off x="5724525" y="1238250"/>
+            <a:ext cx="5857875" cy="5048250"/>
+          </a:xfrm>
+          <a:prstGeom prst="roundRect">
+            <a:avLst>
+              <a:gd name="adj" fmla="val 3774"/>
+            </a:avLst>
+          </a:prstGeom>
+          <a:solidFill>
+            <a:srgbClr val="51277C">
+              <a:alpha val="6000"/>
+            </a:srgbClr>
+          </a:solidFill>
+          <a:ln/>
+        </p:spPr>
+        <p:txBody>
+          <a:bodyPr/>
+          <a:p>
+            <a:pPr/>
+            <a:endParaRPr/>
+          </a:p>
+        </p:txBody>
+      </p:sp>
+      <p:pic>
+        <p:nvPicPr>
+          <p:cNvPr id="35" name=""/>
+          <p:cNvPicPr>
+            <a:picLocks noChangeAspect="1"/>
+          </p:cNvPicPr>
+          <p:nvPr/>
+        </p:nvPicPr>
+        <p:blipFill>
+          <a:blip r:embed="rId3">
+            <a:extLst>
+              <a:ext uri="{96DAC541-7B7A-43D3-8B79-37D633B846F1}">
+                <asvg:svgBlip r:embed="rId3"/>
+              </a:ext>
+            </a:extLst>
+          </a:blip>
+          <a:stretch>
+            <a:fillRect/>
+          </a:stretch>
+        </p:blipFill>
+        <p:spPr>
+          <a:xfrm rot="0" flipH="0" flipV="0">
+            <a:off x="5895975" y="1619250"/>
+            <a:ext cx="5524500" cy="4286250"/>
+          </a:xfrm>
+          <a:prstGeom prst="rect">
+            <a:avLst/>
+          </a:prstGeom>
+          <a:ln/>
+        </p:spPr>
+      </p:pic>
+    </p:spTree>
+  </p:cSld>
+</p:sld>
+</file>
+
+<file path=ppt/slides/slide11.xml><?xml version="1.0" encoding="utf-8"?>
+<p:sld xmlns:p="http://schemas.openxmlformats.org/presentationml/2006/main" xmlns:a="http://schemas.openxmlformats.org/drawingml/2006/main" xmlns:asvg="http://schemas.microsoft.com/office/drawing/2016/SVG/main" xmlns:r="http://schemas.openxmlformats.org/officeDocument/2006/relationships" xmlns:mc="http://schemas.openxmlformats.org/markup-compatibility/2006" mc:Ignorable="asvg">
+  <p:cSld>
+    <p:spTree>
+      <p:nvGrpSpPr>
+        <p:cNvPr id="36" name=""/>
+        <p:cNvGrpSpPr/>
+        <p:nvPr/>
+      </p:nvGrpSpPr>
+      <p:grpSpPr>
+        <a:xfrm>
+          <a:off x="0" y="0"/>
+          <a:ext cx="0" cy="0"/>
+          <a:chOff x="0" y="0"/>
+          <a:chExt cx="0" cy="0"/>
+        </a:xfrm>
+      </p:grpSpPr>
+      <p:sp>
+        <p:nvSpPr>
+          <p:cNvPr id="37" name=""/>
+          <p:cNvSpPr/>
+          <p:nvPr/>
+        </p:nvSpPr>
+        <p:spPr>
+          <a:xfrm rot="0" flipH="0" flipV="0">
+            <a:off x="0" y="0"/>
+            <a:ext cx="12192000" cy="6858000"/>
+          </a:xfrm>
+          <a:prstGeom prst="rect">
+            <a:avLst/>
+          </a:prstGeom>
+          <a:solidFill>
+            <a:srgbClr val="FAF7F2"/>
+          </a:solidFill>
+          <a:ln/>
+        </p:spPr>
+        <p:txBody>
+          <a:bodyPr/>
+          <a:p>
+            <a:pPr/>
+            <a:endParaRPr/>
+          </a:p>
+        </p:txBody>
+      </p:sp>
+      <p:sp>
+        <p:nvSpPr>
+          <p:cNvPr id="38" name="" descr="{&quot;isTemplate&quot;:true,&quot;type&quot;:&quot;text&quot;}"/>
+          <p:cNvSpPr txBox="1"/>
+          <p:nvPr/>
+        </p:nvSpPr>
+        <p:spPr>
+          <a:xfrm rot="0" flipH="0" flipV="0">
+            <a:off x="609600" y="381000"/>
+            <a:ext cx="10972800" cy="514350"/>
+          </a:xfrm>
+          <a:prstGeom prst="rect"/>
+        </p:spPr>
+        <p:txBody>
+          <a:bodyPr wrap="none" lIns="0" tIns="0" rIns="0" bIns="0"/>
+          <a:p>
+            <a:pPr>
+              <a:lnSpc>
+                <a:spcPct val="130000"/>
+              </a:lnSpc>
+            </a:pPr>
+            <a:r>
+              <a:rPr lang="en-US" sz="2550" b="1">
+                <a:solidFill>
+                  <a:srgbClr val="51277C"/>
+                </a:solidFill>
+                <a:latin typeface="Trebuchet MS"/>
+                <a:ea typeface="Trebuchet MS"/>
+              </a:rPr>
               <a:t>Petugas piket: siapa yang ambil snack</a:t>
             </a:r>
             <a:endParaRPr/>
@@ -1474,7 +2195,7 @@
       </p:sp>
       <p:sp>
         <p:nvSpPr>
-          <p:cNvPr id="19" name=""/>
+          <p:cNvPr id="39" name=""/>
           <p:cNvSpPr/>
           <p:nvPr/>
         </p:nvSpPr>
@@ -1495,12 +2216,15 @@
         </p:spPr>
         <p:txBody>
           <a:bodyPr/>
-          <a:p/>
-        </p:txBody>
-      </p:sp>
-      <p:sp>
-        <p:nvSpPr>
-          <p:cNvPr id="20" name=""/>
+          <a:p>
+            <a:pPr/>
+            <a:endParaRPr/>
+          </a:p>
+        </p:txBody>
+      </p:sp>
+      <p:sp>
+        <p:nvSpPr>
+          <p:cNvPr id="40" name=""/>
           <p:cNvSpPr/>
           <p:nvPr/>
         </p:nvSpPr>
@@ -1529,12 +2253,15 @@
         </p:spPr>
         <p:txBody>
           <a:bodyPr/>
-          <a:p/>
-        </p:txBody>
-      </p:sp>
-      <p:sp>
-        <p:nvSpPr>
-          <p:cNvPr id="21" name="" descr="{&quot;isTemplate&quot;:true,&quot;type&quot;:&quot;text&quot;}"/>
+          <a:p>
+            <a:pPr/>
+            <a:endParaRPr/>
+          </a:p>
+        </p:txBody>
+      </p:sp>
+      <p:sp>
+        <p:nvSpPr>
+          <p:cNvPr id="41" name="" descr="{&quot;isTemplate&quot;:true,&quot;type&quot;:&quot;text&quot;}"/>
           <p:cNvSpPr txBox="1"/>
           <p:nvPr/>
         </p:nvSpPr>
@@ -1587,7 +2314,7 @@
       </p:sp>
       <p:sp>
         <p:nvSpPr>
-          <p:cNvPr id="22" name=""/>
+          <p:cNvPr id="42" name=""/>
           <p:cNvSpPr/>
           <p:nvPr/>
         </p:nvSpPr>
@@ -1608,12 +2335,15 @@
         </p:spPr>
         <p:txBody>
           <a:bodyPr/>
-          <a:p/>
-        </p:txBody>
-      </p:sp>
-      <p:sp>
-        <p:nvSpPr>
-          <p:cNvPr id="23" name="" descr="{&quot;isTemplate&quot;:true,&quot;type&quot;:&quot;text&quot;}"/>
+          <a:p>
+            <a:pPr/>
+            <a:endParaRPr/>
+          </a:p>
+        </p:txBody>
+      </p:sp>
+      <p:sp>
+        <p:nvSpPr>
+          <p:cNvPr id="43" name="" descr="{&quot;isTemplate&quot;:true,&quot;type&quot;:&quot;text&quot;}"/>
           <p:cNvSpPr txBox="1"/>
           <p:nvPr/>
         </p:nvSpPr>
@@ -1652,7 +2382,7 @@
       </p:sp>
       <p:sp>
         <p:nvSpPr>
-          <p:cNvPr id="24" name=""/>
+          <p:cNvPr id="44" name=""/>
           <p:cNvSpPr/>
           <p:nvPr/>
         </p:nvSpPr>
@@ -1680,12 +2410,15 @@
         </p:spPr>
         <p:txBody>
           <a:bodyPr/>
-          <a:p/>
-        </p:txBody>
-      </p:sp>
-      <p:sp>
-        <p:nvSpPr>
-          <p:cNvPr id="25" name=""/>
+          <a:p>
+            <a:pPr/>
+            <a:endParaRPr/>
+          </a:p>
+        </p:txBody>
+      </p:sp>
+      <p:sp>
+        <p:nvSpPr>
+          <p:cNvPr id="45" name=""/>
           <p:cNvSpPr/>
           <p:nvPr/>
         </p:nvSpPr>
@@ -1737,12 +2470,15 @@
         </p:spPr>
         <p:txBody>
           <a:bodyPr/>
-          <a:p/>
-        </p:txBody>
-      </p:sp>
-      <p:sp>
-        <p:nvSpPr>
-          <p:cNvPr id="26" name="" descr="{&quot;isTemplate&quot;:true,&quot;type&quot;:&quot;text&quot;}"/>
+          <a:p>
+            <a:pPr/>
+            <a:endParaRPr/>
+          </a:p>
+        </p:txBody>
+      </p:sp>
+      <p:sp>
+        <p:nvSpPr>
+          <p:cNvPr id="46" name="" descr="{&quot;isTemplate&quot;:true,&quot;type&quot;:&quot;text&quot;}"/>
           <p:cNvSpPr txBox="1"/>
           <p:nvPr/>
         </p:nvSpPr>
@@ -1777,7 +2513,7 @@
       </p:sp>
       <p:sp>
         <p:nvSpPr>
-          <p:cNvPr id="27" name="" descr="{&quot;isTemplate&quot;:true,&quot;type&quot;:&quot;text&quot;}"/>
+          <p:cNvPr id="47" name="" descr="{&quot;isTemplate&quot;:true,&quot;type&quot;:&quot;text&quot;}"/>
           <p:cNvSpPr txBox="1"/>
           <p:nvPr/>
         </p:nvSpPr>
@@ -1814,7 +2550,7 @@
       </p:sp>
       <p:sp>
         <p:nvSpPr>
-          <p:cNvPr id="28" name=""/>
+          <p:cNvPr id="48" name=""/>
           <p:cNvSpPr/>
           <p:nvPr/>
         </p:nvSpPr>
@@ -1842,12 +2578,15 @@
         </p:spPr>
         <p:txBody>
           <a:bodyPr/>
-          <a:p/>
-        </p:txBody>
-      </p:sp>
-      <p:sp>
-        <p:nvSpPr>
-          <p:cNvPr id="29" name=""/>
+          <a:p>
+            <a:pPr/>
+            <a:endParaRPr/>
+          </a:p>
+        </p:txBody>
+      </p:sp>
+      <p:sp>
+        <p:nvSpPr>
+          <p:cNvPr id="49" name=""/>
           <p:cNvSpPr/>
           <p:nvPr/>
         </p:nvSpPr>
@@ -1899,12 +2638,15 @@
         </p:spPr>
         <p:txBody>
           <a:bodyPr/>
-          <a:p/>
-        </p:txBody>
-      </p:sp>
-      <p:sp>
-        <p:nvSpPr>
-          <p:cNvPr id="30" name="" descr="{&quot;isTemplate&quot;:true,&quot;type&quot;:&quot;text&quot;}"/>
+          <a:p>
+            <a:pPr/>
+            <a:endParaRPr/>
+          </a:p>
+        </p:txBody>
+      </p:sp>
+      <p:sp>
+        <p:nvSpPr>
+          <p:cNvPr id="50" name="" descr="{&quot;isTemplate&quot;:true,&quot;type&quot;:&quot;text&quot;}"/>
           <p:cNvSpPr txBox="1"/>
           <p:nvPr/>
         </p:nvSpPr>
@@ -1939,7 +2681,7 @@
       </p:sp>
       <p:sp>
         <p:nvSpPr>
-          <p:cNvPr id="31" name="" descr="{&quot;isTemplate&quot;:true,&quot;type&quot;:&quot;text&quot;}"/>
+          <p:cNvPr id="51" name="" descr="{&quot;isTemplate&quot;:true,&quot;type&quot;:&quot;text&quot;}"/>
           <p:cNvSpPr txBox="1"/>
           <p:nvPr/>
         </p:nvSpPr>
@@ -1976,7 +2718,7 @@
       </p:sp>
       <p:sp>
         <p:nvSpPr>
-          <p:cNvPr id="32" name=""/>
+          <p:cNvPr id="52" name=""/>
           <p:cNvSpPr/>
           <p:nvPr/>
         </p:nvSpPr>
@@ -2004,12 +2746,15 @@
         </p:spPr>
         <p:txBody>
           <a:bodyPr/>
-          <a:p/>
-        </p:txBody>
-      </p:sp>
-      <p:sp>
-        <p:nvSpPr>
-          <p:cNvPr id="33" name=""/>
+          <a:p>
+            <a:pPr/>
+            <a:endParaRPr/>
+          </a:p>
+        </p:txBody>
+      </p:sp>
+      <p:sp>
+        <p:nvSpPr>
+          <p:cNvPr id="53" name=""/>
           <p:cNvSpPr/>
           <p:nvPr/>
         </p:nvSpPr>
@@ -2061,12 +2806,15 @@
         </p:spPr>
         <p:txBody>
           <a:bodyPr/>
-          <a:p/>
-        </p:txBody>
-      </p:sp>
-      <p:sp>
-        <p:nvSpPr>
-          <p:cNvPr id="34" name="" descr="{&quot;isTemplate&quot;:true,&quot;type&quot;:&quot;text&quot;}"/>
+          <a:p>
+            <a:pPr/>
+            <a:endParaRPr/>
+          </a:p>
+        </p:txBody>
+      </p:sp>
+      <p:sp>
+        <p:nvSpPr>
+          <p:cNvPr id="54" name="" descr="{&quot;isTemplate&quot;:true,&quot;type&quot;:&quot;text&quot;}"/>
           <p:cNvSpPr txBox="1"/>
           <p:nvPr/>
         </p:nvSpPr>
@@ -2101,7 +2849,7 @@
       </p:sp>
       <p:sp>
         <p:nvSpPr>
-          <p:cNvPr id="35" name="" descr="{&quot;isTemplate&quot;:true,&quot;type&quot;:&quot;text&quot;}"/>
+          <p:cNvPr id="55" name="" descr="{&quot;isTemplate&quot;:true,&quot;type&quot;:&quot;text&quot;}"/>
           <p:cNvSpPr txBox="1"/>
           <p:nvPr/>
         </p:nvSpPr>
@@ -2138,7 +2886,7 @@
       </p:sp>
       <p:sp>
         <p:nvSpPr>
-          <p:cNvPr id="36" name=""/>
+          <p:cNvPr id="56" name=""/>
           <p:cNvSpPr/>
           <p:nvPr/>
         </p:nvSpPr>
@@ -2161,12 +2909,15 @@
         </p:spPr>
         <p:txBody>
           <a:bodyPr/>
-          <a:p/>
+          <a:p>
+            <a:pPr/>
+            <a:endParaRPr/>
+          </a:p>
         </p:txBody>
       </p:sp>
       <p:pic>
         <p:nvPicPr>
-          <p:cNvPr id="37" name=""/>
+          <p:cNvPr id="57" name=""/>
           <p:cNvPicPr>
             <a:picLocks noChangeAspect="1"/>
           </p:cNvPicPr>
@@ -2197,7 +2948,7 @@
       </p:pic>
       <p:sp>
         <p:nvSpPr>
-          <p:cNvPr id="38" name="" descr="{&quot;isTemplate&quot;:true,&quot;type&quot;:&quot;text&quot;}"/>
+          <p:cNvPr id="58" name="" descr="{&quot;isTemplate&quot;:true,&quot;type&quot;:&quot;text&quot;}"/>
           <p:cNvSpPr txBox="1"/>
           <p:nvPr/>
         </p:nvSpPr>
@@ -2232,7 +2983,7 @@
       </p:sp>
       <p:sp>
         <p:nvSpPr>
-          <p:cNvPr id="39" name="" descr="{&quot;isTemplate&quot;:true,&quot;type&quot;:&quot;text&quot;}"/>
+          <p:cNvPr id="59" name="" descr="{&quot;isTemplate&quot;:true,&quot;type&quot;:&quot;text&quot;}"/>
           <p:cNvSpPr txBox="1"/>
           <p:nvPr/>
         </p:nvSpPr>
@@ -2259,7 +3010,7 @@
                 <a:latin typeface="Verdana"/>
                 <a:ea typeface="Verdana"/>
               </a:rPr>
-              <a:t>10 / 16</a:t>
+              <a:t>11 / 17</a:t>
             </a:r>
             <a:endParaRPr/>
           </a:p>
@@ -2270,12 +3021,12 @@
 </p:sld>
 </file>
 
-<file path=ppt/slides/slide11.xml><?xml version="1.0" encoding="utf-8"?>
+<file path=ppt/slides/slide12.xml><?xml version="1.0" encoding="utf-8"?>
 <p:sld xmlns:p="http://schemas.openxmlformats.org/presentationml/2006/main" xmlns:a="http://schemas.openxmlformats.org/drawingml/2006/main" xmlns:asvg="http://schemas.microsoft.com/office/drawing/2016/SVG/main" xmlns:r="http://schemas.openxmlformats.org/officeDocument/2006/relationships" xmlns:mc="http://schemas.openxmlformats.org/markup-compatibility/2006" mc:Ignorable="asvg">
   <p:cSld>
     <p:spTree>
       <p:nvGrpSpPr>
-        <p:cNvPr id="40" name="" descr="&lt;Slide&#10;    style={{&#10;        width: '1280px',&#10;        height: '720px',&#10;        background: 'linear-gradient(135deg, #51277C 0%, #7A45A8 100%)',&#10;        paddingTop: 60,&#10;        paddingBottom: 60,&#10;        paddingLeft: 72,&#10;        paddingRight: 72,&#10;        justifyContent: 'center',&#10;        position: 'relative',&#10;        overflow: 'hidden',&#10;    }}&#10;&gt;&#10;    &lt;Box&#10;        style={{&#10;            position: 'absolute',&#10;            top: -100,&#10;            right: -60,&#10;            width: 420,&#10;            height: 420,&#10;            borderRadius: 210,&#10;            background: '#AFC440',&#10;            opacity: 0.14,&#10;        }}&#10;    /&gt;&#10;    &lt;Box style={{ position: 'absolute', bottom: 46, right: 78, opacity: 0.16 }}&gt;&#10;        &lt;svg width={230} height={190} viewBox='0 0 230 190'&gt;&#10;            &lt;rect x='52' y='84' width='126' height='92' rx='12' fill='none' stroke='#FFFFFF' strokeWidth='7' /&gt;&#10;            &lt;path d='M78 84V58a37 37 0 0 1 74 0v26' fill='none' stroke='#FFFFFF' strokeWidth='7' /&gt;&#10;            &lt;circle cx='115' cy='126' r='12' fill='#F3B26C' /&gt;&#10;            &lt;path d='M60 26h36v40H60z' fill='none' stroke='#FFFFFF' strokeWidth='6' /&gt;&#10;            &lt;path d='M96 32l30-14v26z' fill='#FFFFFF' /&gt;&#10;            &lt;path d='M138 54c14 8 22 18 26 30' fill='none' stroke='#FFFFFF' strokeWidth='6' strokeLinecap='round' /&gt;&#10;        &lt;/svg&gt;&#10;    &lt;/Box&gt;&#10;&#10;    &lt;Box style={{ position: 'relative', zIndex: 1, width: '62%' }}&gt;&#10;        &lt;Box style={{ flexDirection: 'row', alignItems: 'center', gap: 14, alignSelf: 'flex-start' }}&gt;&#10;            &lt;Text&#10;                style={{&#10;                    fontSize: 76,&#10;                    fontWeight: 'bold',&#10;                    color: '#F3B26C',&#10;                    fontFamily: 'Trebuchet MS',&#10;                    lineHeight: 1,&#10;                }}&#10;            &gt;&#10;                04&#10;            &lt;/Text&gt;&#10;            &lt;Box style={{ width: 3, height: 52, background: 'rgba(255,255,255,0.45)' }} /&gt;&#10;            &lt;Text style={{ fontSize: 19, color: 'rgba(255,255,255,0.8)', fontFamily: 'Verdana' }}&gt;&#10;                Bagian terakhir&#10;            &lt;/Text&gt;&#10;        &lt;/Box&gt;&#10;&#10;        &lt;Text&#10;            style={{&#10;                marginTop: 26,&#10;                fontSize: 58,&#10;                fontWeight: 'bold',&#10;                color: '#FFFFFF',&#10;                fontFamily: 'Trebuchet MS',&#10;                lineHeight: 1.15,&#10;            }}&#10;        &gt;&#10;            Kunci &amp;amp;{'\n'}publikasi&#10;        &lt;/Text&gt;&#10;&#10;        &lt;Text&#10;            style={{&#10;                marginTop: 24,&#10;                fontSize: 22,&#10;                color: 'rgba(255,255,255,0.88)',&#10;                fontFamily: 'Verdana',&#10;                lineHeight: 1.5,&#10;            }}&#10;        &gt;&#10;            Dua langkah terakhir — urutannya tidak bisa dibalik.&#10;        &lt;/Text&gt;&#10;    &lt;/Box&gt;&#10;&lt;/Slide&gt;&#10;"/>
+        <p:cNvPr id="60" name=""/>
         <p:cNvGrpSpPr/>
         <p:nvPr/>
       </p:nvGrpSpPr>
@@ -2289,7 +3040,7 @@
       </p:grpSpPr>
       <p:sp>
         <p:nvSpPr>
-          <p:cNvPr id="41" name=""/>
+          <p:cNvPr id="61" name=""/>
           <p:cNvSpPr/>
           <p:nvPr/>
         </p:nvSpPr>
@@ -2316,12 +3067,15 @@
         </p:spPr>
         <p:txBody>
           <a:bodyPr/>
-          <a:p/>
-        </p:txBody>
-      </p:sp>
-      <p:sp>
-        <p:nvSpPr>
-          <p:cNvPr id="42" name=""/>
+          <a:p>
+            <a:pPr/>
+            <a:endParaRPr/>
+          </a:p>
+        </p:txBody>
+      </p:sp>
+      <p:sp>
+        <p:nvSpPr>
+          <p:cNvPr id="62" name=""/>
           <p:cNvSpPr/>
           <p:nvPr/>
         </p:nvSpPr>
@@ -2712,12 +3466,15 @@
         </p:spPr>
         <p:txBody>
           <a:bodyPr/>
-          <a:p/>
+          <a:p>
+            <a:pPr/>
+            <a:endParaRPr/>
+          </a:p>
         </p:txBody>
       </p:sp>
       <p:pic>
         <p:nvPicPr>
-          <p:cNvPr id="43" name=""/>
+          <p:cNvPr id="63" name=""/>
           <p:cNvPicPr>
             <a:picLocks noChangeAspect="1"/>
           </p:cNvPicPr>
@@ -2749,7 +3506,7 @@
       </p:pic>
       <p:sp>
         <p:nvSpPr>
-          <p:cNvPr id="44" name="" descr="{&quot;isTemplate&quot;:true,&quot;type&quot;:&quot;text&quot;}"/>
+          <p:cNvPr id="64" name="" descr="{&quot;isTemplate&quot;:true,&quot;type&quot;:&quot;text&quot;}"/>
           <p:cNvSpPr txBox="1"/>
           <p:nvPr/>
         </p:nvSpPr>
@@ -2784,7 +3541,7 @@
       </p:sp>
       <p:sp>
         <p:nvSpPr>
-          <p:cNvPr id="45" name=""/>
+          <p:cNvPr id="65" name=""/>
           <p:cNvSpPr/>
           <p:nvPr/>
         </p:nvSpPr>
@@ -2805,12 +3562,15 @@
         </p:spPr>
         <p:txBody>
           <a:bodyPr/>
-          <a:p/>
-        </p:txBody>
-      </p:sp>
-      <p:sp>
-        <p:nvSpPr>
-          <p:cNvPr id="46" name="" descr="{&quot;isTemplate&quot;:true,&quot;type&quot;:&quot;text&quot;}"/>
+          <a:p>
+            <a:pPr/>
+            <a:endParaRPr/>
+          </a:p>
+        </p:txBody>
+      </p:sp>
+      <p:sp>
+        <p:nvSpPr>
+          <p:cNvPr id="66" name="" descr="{&quot;isTemplate&quot;:true,&quot;type&quot;:&quot;text&quot;}"/>
           <p:cNvSpPr txBox="1"/>
           <p:nvPr/>
         </p:nvSpPr>
@@ -2847,7 +3607,7 @@
       </p:sp>
       <p:sp>
         <p:nvSpPr>
-          <p:cNvPr id="47" name="" descr="{&quot;isTemplate&quot;:true,&quot;type&quot;:&quot;text&quot;}"/>
+          <p:cNvPr id="67" name="" descr="{&quot;isTemplate&quot;:true,&quot;type&quot;:&quot;text&quot;}"/>
           <p:cNvSpPr txBox="1"/>
           <p:nvPr/>
         </p:nvSpPr>
@@ -2900,7 +3660,7 @@
       </p:sp>
       <p:sp>
         <p:nvSpPr>
-          <p:cNvPr id="48" name="" descr="{&quot;isTemplate&quot;:true,&quot;type&quot;:&quot;text&quot;}"/>
+          <p:cNvPr id="68" name="" descr="{&quot;isTemplate&quot;:true,&quot;type&quot;:&quot;text&quot;}"/>
           <p:cNvSpPr txBox="1"/>
           <p:nvPr/>
         </p:nvSpPr>
@@ -2940,12 +3700,12 @@
 </p:sld>
 </file>
 
-<file path=ppt/slides/slide12.xml><?xml version="1.0" encoding="utf-8"?>
+<file path=ppt/slides/slide13.xml><?xml version="1.0" encoding="utf-8"?>
 <p:sld xmlns:p="http://schemas.openxmlformats.org/presentationml/2006/main" xmlns:a="http://schemas.openxmlformats.org/drawingml/2006/main" xmlns:asvg="http://schemas.microsoft.com/office/drawing/2016/SVG/main" xmlns:r="http://schemas.openxmlformats.org/officeDocument/2006/relationships" xmlns:mc="http://schemas.openxmlformats.org/markup-compatibility/2006" mc:Ignorable="asvg">
   <p:cSld>
     <p:spTree>
       <p:nvGrpSpPr>
-        <p:cNvPr id="49" name="" descr="&lt;Slide&#10;    style={{&#10;        width: '1280px',&#10;        height: '720px',&#10;        background: '#FAF7F2',&#10;        paddingTop: 20,&#10;        paddingBottom: 20,&#10;        paddingLeft: 64,&#10;        paddingRight: 64,&#10;        position: 'relative',&#10;        overflow: 'hidden',&#10;    }}&#10;&gt;&#10;    &lt;Box&#10;        style={{&#10;            position: 'absolute',&#10;            bottom: -140,&#10;            right: -110,&#10;            width: 460,&#10;            height: 460,&#10;            borderRadius: 230,&#10;            background: 'linear-gradient(135deg, #51277C 0%, #7A45A8 100%)',&#10;            opacity: 0.09,&#10;        }}&#10;    /&gt;&#10;&#10;    {/* ── A · blok judul ── */}&#10;    &lt;Box style={{ height: 110, justifyContent: 'center' }}&gt;&#10;        &lt;Text&#10;            style={{&#10;                fontSize: 34,&#10;                fontWeight: 'bold',&#10;                color: '#51277C',&#10;                fontFamily: 'Trebuchet MS',&#10;                lineHeight: 1.3,&#10;            }}&#10;        &gt;&#10;            Terkunci, lalu terbit&#10;        &lt;/Text&gt;&#10;        &lt;Box style={{ marginTop: 10, width: 72, height: 6, borderRadius: 3, background: '#F3B26C' }} /&gt;&#10;    &lt;/Box&gt;&#10;&#10;    {/* ── B · area konten ── */}&#10;    &lt;Box style={{ height: 530, flexDirection: 'row', gap: 34, position: 'relative', zIndex: 1 }}&gt;&#10;        {/* kiri 55% · frasa raksasa */}&#10;        &lt;Box style={{ width: '55%', height: '100%', justifyContent: 'center' }}&gt;&#10;            &lt;Text&#10;                style={{&#10;                    fontSize: 64,&#10;                    fontWeight: 'bold',&#10;                    color: '#51277C',&#10;                    fontFamily: 'Trebuchet MS',&#10;                    lineHeight: 1.1,&#10;                }}&#10;            &gt;&#10;                Kunci dulu,{'\n'}baru terbit.&#10;            &lt;/Text&gt;&#10;&#10;            &lt;Text&#10;                style={{&#10;                    marginTop: 22,&#10;                    fontSize: 19,&#10;                    color: '#2A2333',&#10;                    fontFamily: 'Verdana',&#10;                    lineHeight: 1.55,&#10;                }}&#10;            &gt;&#10;                Orang tua baru melihat jadwal setelah diterbitkan. Selama belum, jadwalnya&#10;                tetap tersimpan — hanya belum diumumkan.&#10;            &lt;/Text&gt;&#10;&#10;            &lt;Box&#10;                style={{&#10;                    marginTop: 24,&#10;                    background: 'rgba(243,178,108,0.22)',&#10;                    borderRadius: 14,&#10;                    borderLeft: '8px solid #F3B26C',&#10;                    padding: 18,&#10;                }}&#10;            &gt;&#10;                &lt;Text&#10;                    style={{&#10;                        fontSize: 18,&#10;                        color: '#2A2333',&#10;                        fontFamily: 'Verdana',&#10;                        lineHeight: 1.5,&#10;                    }}&#10;                &gt;&#10;                    Publikasi menolak selama masih ada hari yang belum dikunci. Selesaikan&#10;                    semuanya lebih dulu, baru tekan Publikasi.&#10;                &lt;/Text&gt;&#10;            &lt;/Box&gt;&#10;        &lt;/Box&gt;&#10;&#10;        {/* kanan 45% · tiga status */}&#10;        &lt;Box&#10;            style={{&#10;                width: '45%',&#10;                height: '100%',&#10;                background: 'rgba(81,39,124,0.06)',&#10;                borderRadius: 20,&#10;                justifyContent: 'center',&#10;                alignItems: 'center',&#10;            }}&#10;        &gt;&#10;            &lt;svg width={430} height={430} viewBox='0 0 430 430'&gt;&#10;                {/* 1 · masih bisa diubah */}&#10;                &lt;rect x='18' y='14' width='394' height='112' rx='16' fill='#FFFFFF' stroke='#DED7CB' strokeWidth='2' /&gt;&#10;                &lt;circle cx='66' cy='70' r='26' fill='#DED7CB' /&gt;&#10;                &lt;text x='66' y='80' fontFamily='Trebuchet MS' fontSize='24' fontWeight='bold' fill='#FFFFFF' textAnchor='middle'&gt;&#10;                    1&#10;                &lt;/text&gt;&#10;                &lt;text x='110' y='62' fontFamily='Trebuchet MS' fontSize='22' fontWeight='bold' fill='#51277C'&gt;&#10;                    Masih bisa diubah&#10;                &lt;/text&gt;&#10;                &lt;text x='110' y='94' fontFamily='Verdana' fontSize='15' fill='#6B6478'&gt;&#10;                    disusun korlas&#10;                &lt;/text&gt;&#10;&#10;                {/* 2 · dikunci */}&#10;                &lt;rect x='18' y='152' width='394' height='112' rx='16' fill='#FFFFFF' stroke='#AFC440' strokeWidth='3' /&gt;&#10;                &lt;circle cx='66' cy='208' r='26' fill='#AFC440' /&gt;&#10;                &lt;text x='66' y='218' fontFamily='Trebuchet MS' fontSize='24' fontWeight='bold' fill='#FFFFFF' textAnchor='middle'&gt;&#10;                    2&#10;                &lt;/text&gt;&#10;                &lt;text x='110' y='200' fontFamily='Trebuchet MS' fontSize='22' fontWeight='bold' fill='#51277C'&gt;&#10;                    Dikunci&#10;                &lt;/text&gt;&#10;                &lt;text x='110' y='232' fontFamily='Verdana' fontSize='15' fill='#6B6478'&gt;&#10;                    sudah tidak bisa diedit&#10;                &lt;/text&gt;&#10;&#10;                {/* 3 · terbit */}&#10;                &lt;rect x='18' y='290' width='394' height='126' rx='16' fill='#51277C' /&gt;&#10;                &lt;circle cx='66' cy='352' r='26' fill='#F3B26C' /&gt;&#10;                &lt;text x='66' y='362' fontFamily='Trebuchet MS' fontSize='24' fontWeight='bold' fill='#51277C' textAnchor='middle'&gt;&#10;                    3&#10;                &lt;/text&gt;&#10;                &lt;text x='110' y='344' fontFamily='Trebuchet MS' fontSize='22' fontWeight='bold' fill='#FFFFFF'&gt;&#10;                    Terbit ke orang tua&#10;                &lt;/text&gt;&#10;                &lt;text x='110' y='376' fontFamily='Verdana' fontSize='15' fill='#EFEAE1'&gt;&#10;                    tampil di HP mereka&#10;                &lt;/text&gt;&#10;                &lt;text x='110' y='400' fontFamily='Verdana' fontSize='14' fill='#F3B26C'&gt;&#10;                    revisi? minta admin membuka kunci&#10;                &lt;/text&gt;&#10;            &lt;/svg&gt;&#10;        &lt;/Box&gt;&#10;    &lt;/Box&gt;&#10;&#10;    {/* ── C · bilah kaki ── */}&#10;    &lt;Box&#10;        style={{&#10;            height: 40,&#10;            flexDirection: 'row',&#10;            alignItems: 'center',&#10;            justifyContent: 'space-between',&#10;        }}&#10;    &gt;&#10;        &lt;Text style={{ fontSize: 14, color: '#6B6478', fontFamily: 'Verdana' }}&gt;&#10;            Pizza Snack Play · Panduan Korlas &amp;amp; Admin&#10;        &lt;/Text&gt;&#10;        &lt;Text style={{ fontSize: 14, color: '#6B6478', fontFamily: 'Verdana' }}&gt;12 / 16&lt;/Text&gt;&#10;    &lt;/Box&gt;&#10;&lt;/Slide&gt;&#10;"/>
+        <p:cNvPr id="69" name=""/>
         <p:cNvGrpSpPr/>
         <p:nvPr/>
       </p:nvGrpSpPr>
@@ -2959,7 +3719,7 @@
       </p:grpSpPr>
       <p:sp>
         <p:nvSpPr>
-          <p:cNvPr id="50" name=""/>
+          <p:cNvPr id="70" name=""/>
           <p:cNvSpPr/>
           <p:nvPr/>
         </p:nvSpPr>
@@ -2978,12 +3738,15 @@
         </p:spPr>
         <p:txBody>
           <a:bodyPr/>
-          <a:p/>
-        </p:txBody>
-      </p:sp>
-      <p:sp>
-        <p:nvSpPr>
-          <p:cNvPr id="51" name="" descr="{&quot;isTemplate&quot;:true,&quot;type&quot;:&quot;text&quot;}"/>
+          <a:p>
+            <a:pPr/>
+            <a:endParaRPr/>
+          </a:p>
+        </p:txBody>
+      </p:sp>
+      <p:sp>
+        <p:nvSpPr>
+          <p:cNvPr id="71" name="" descr="{&quot;isTemplate&quot;:true,&quot;type&quot;:&quot;text&quot;}"/>
           <p:cNvSpPr txBox="1"/>
           <p:nvPr/>
         </p:nvSpPr>
@@ -3018,7 +3781,7 @@
       </p:sp>
       <p:sp>
         <p:nvSpPr>
-          <p:cNvPr id="52" name=""/>
+          <p:cNvPr id="72" name=""/>
           <p:cNvSpPr/>
           <p:nvPr/>
         </p:nvSpPr>
@@ -3039,12 +3802,15 @@
         </p:spPr>
         <p:txBody>
           <a:bodyPr/>
-          <a:p/>
-        </p:txBody>
-      </p:sp>
-      <p:sp>
-        <p:nvSpPr>
-          <p:cNvPr id="53" name="" descr="{&quot;isTemplate&quot;:true,&quot;type&quot;:&quot;text&quot;}"/>
+          <a:p>
+            <a:pPr/>
+            <a:endParaRPr/>
+          </a:p>
+        </p:txBody>
+      </p:sp>
+      <p:sp>
+        <p:nvSpPr>
+          <p:cNvPr id="73" name="" descr="{&quot;isTemplate&quot;:true,&quot;type&quot;:&quot;text&quot;}"/>
           <p:cNvSpPr txBox="1"/>
           <p:nvPr/>
         </p:nvSpPr>
@@ -3079,7 +3845,7 @@
       </p:sp>
       <p:sp>
         <p:nvSpPr>
-          <p:cNvPr id="54" name="" descr="{&quot;isTemplate&quot;:true,&quot;type&quot;:&quot;text&quot;}"/>
+          <p:cNvPr id="74" name="" descr="{&quot;isTemplate&quot;:true,&quot;type&quot;:&quot;text&quot;}"/>
           <p:cNvSpPr txBox="1"/>
           <p:nvPr/>
         </p:nvSpPr>
@@ -3106,15 +3872,15 @@
                 <a:latin typeface="Verdana"/>
                 <a:ea typeface="Verdana"/>
               </a:rPr>
-              <a:t>12 / 16</a:t>
-            </a:r>
-            <a:endParaRPr/>
-          </a:p>
-        </p:txBody>
-      </p:sp>
-      <p:sp>
-        <p:nvSpPr>
-          <p:cNvPr id="55" name=""/>
+              <a:t>13 / 17</a:t>
+            </a:r>
+            <a:endParaRPr/>
+          </a:p>
+        </p:txBody>
+      </p:sp>
+      <p:sp>
+        <p:nvSpPr>
+          <p:cNvPr id="75" name=""/>
           <p:cNvSpPr/>
           <p:nvPr/>
         </p:nvSpPr>
@@ -3467,12 +4233,15 @@
         </p:spPr>
         <p:txBody>
           <a:bodyPr/>
-          <a:p/>
-        </p:txBody>
-      </p:sp>
-      <p:sp>
-        <p:nvSpPr>
-          <p:cNvPr id="56" name="" descr="{&quot;isTemplate&quot;:true,&quot;type&quot;:&quot;text&quot;}"/>
+          <a:p>
+            <a:pPr/>
+            <a:endParaRPr/>
+          </a:p>
+        </p:txBody>
+      </p:sp>
+      <p:sp>
+        <p:nvSpPr>
+          <p:cNvPr id="76" name="" descr="{&quot;isTemplate&quot;:true,&quot;type&quot;:&quot;text&quot;}"/>
           <p:cNvSpPr txBox="1"/>
           <p:nvPr/>
         </p:nvSpPr>
@@ -3525,7 +4294,7 @@
       </p:sp>
       <p:sp>
         <p:nvSpPr>
-          <p:cNvPr id="57" name="" descr="{&quot;isTemplate&quot;:true,&quot;type&quot;:&quot;text&quot;}"/>
+          <p:cNvPr id="77" name="" descr="{&quot;isTemplate&quot;:true,&quot;type&quot;:&quot;text&quot;}"/>
           <p:cNvSpPr txBox="1"/>
           <p:nvPr/>
         </p:nvSpPr>
@@ -3562,7 +4331,7 @@
       </p:sp>
       <p:sp>
         <p:nvSpPr>
-          <p:cNvPr id="58" name=""/>
+          <p:cNvPr id="78" name=""/>
           <p:cNvSpPr/>
           <p:nvPr/>
         </p:nvSpPr>
@@ -3585,12 +4354,15 @@
         </p:spPr>
         <p:txBody>
           <a:bodyPr/>
-          <a:p/>
-        </p:txBody>
-      </p:sp>
-      <p:sp>
-        <p:nvSpPr>
-          <p:cNvPr id="59" name=""/>
+          <a:p>
+            <a:pPr/>
+            <a:endParaRPr/>
+          </a:p>
+        </p:txBody>
+      </p:sp>
+      <p:sp>
+        <p:nvSpPr>
+          <p:cNvPr id="79" name=""/>
           <p:cNvSpPr/>
           <p:nvPr/>
         </p:nvSpPr>
@@ -3642,12 +4414,15 @@
         </p:spPr>
         <p:txBody>
           <a:bodyPr/>
-          <a:p/>
-        </p:txBody>
-      </p:sp>
-      <p:sp>
-        <p:nvSpPr>
-          <p:cNvPr id="60" name="" descr="{&quot;isTemplate&quot;:true,&quot;type&quot;:&quot;text&quot;}"/>
+          <a:p>
+            <a:pPr/>
+            <a:endParaRPr/>
+          </a:p>
+        </p:txBody>
+      </p:sp>
+      <p:sp>
+        <p:nvSpPr>
+          <p:cNvPr id="80" name="" descr="{&quot;isTemplate&quot;:true,&quot;type&quot;:&quot;text&quot;}"/>
           <p:cNvSpPr txBox="1"/>
           <p:nvPr/>
         </p:nvSpPr>
@@ -3684,7 +4459,7 @@
       </p:sp>
       <p:sp>
         <p:nvSpPr>
-          <p:cNvPr id="61" name=""/>
+          <p:cNvPr id="81" name=""/>
           <p:cNvSpPr/>
           <p:nvPr/>
         </p:nvSpPr>
@@ -3707,12 +4482,15 @@
         </p:spPr>
         <p:txBody>
           <a:bodyPr/>
-          <a:p/>
+          <a:p>
+            <a:pPr/>
+            <a:endParaRPr/>
+          </a:p>
         </p:txBody>
       </p:sp>
       <p:pic>
         <p:nvPicPr>
-          <p:cNvPr id="62" name=""/>
+          <p:cNvPr id="82" name=""/>
           <p:cNvPicPr>
             <a:picLocks noChangeAspect="1"/>
           </p:cNvPicPr>
@@ -3746,12 +4524,12 @@
 </p:sld>
 </file>
 
-<file path=ppt/slides/slide13.xml><?xml version="1.0" encoding="utf-8"?>
+<file path=ppt/slides/slide14.xml><?xml version="1.0" encoding="utf-8"?>
 <p:sld xmlns:p="http://schemas.openxmlformats.org/presentationml/2006/main" xmlns:a="http://schemas.openxmlformats.org/drawingml/2006/main" xmlns:asvg="http://schemas.microsoft.com/office/drawing/2016/SVG/main" xmlns:r="http://schemas.openxmlformats.org/officeDocument/2006/relationships" xmlns:mc="http://schemas.openxmlformats.org/markup-compatibility/2006" mc:Ignorable="asvg">
   <p:cSld>
     <p:spTree>
       <p:nvGrpSpPr>
-        <p:cNvPr id="63" name="" descr="&lt;Slide&#10;    style={{&#10;        width: '1280px',&#10;        height: '720px',&#10;        background: '#FAF7F2',&#10;        paddingTop: 20,&#10;        paddingBottom: 20,&#10;        paddingLeft: 64,&#10;        paddingRight: 64,&#10;    }}&#10;&gt;&#10;    {/* ── A · blok judul ── */}&#10;    &lt;Box style={{ height: 110, justifyContent: 'center' }}&gt;&#10;        &lt;Text&#10;            style={{&#10;                fontSize: 34,&#10;                fontWeight: 'bold',&#10;                color: '#51277C',&#10;                fontFamily: 'Trebuchet MS',&#10;                lineHeight: 1.3,&#10;            }}&#10;        &gt;&#10;            Aksi massal: satu klik untuk banyak hari&#10;        &lt;/Text&gt;&#10;        &lt;Box style={{ marginTop: 10, width: 72, height: 6, borderRadius: 3, background: '#51277C' }} /&gt;&#10;    &lt;/Box&gt;&#10;&#10;    {/* ── B · area konten ── */}&#10;    &lt;Box style={{ height: 530, flexDirection: 'row', gap: 30 }}&gt;&#10;        {/* kiri 55% · tabel dengan kotak centang */}&#10;        &lt;Box&#10;            style={{&#10;                width: '55%',&#10;                height: '100%',&#10;                background: 'rgba(81,39,124,0.06)',&#10;                borderRadius: 20,&#10;                justifyContent: 'center',&#10;                alignItems: 'center',&#10;            }}&#10;        &gt;&#10;            &lt;svg width={560} height={440} viewBox='0 0 560 440'&gt;&#10;                {/* baris header minggu */}&#10;                &lt;rect x='10' y='8' width='540' height='44' rx='10' fill='#51277C' /&gt;&#10;                &lt;rect x='26' y='22' width='20' height='20' rx='5' fill='#F3B26C' /&gt;&#10;                &lt;path d='M31 32l4 4 8-9' fill='none' stroke='#51277C' strokeWidth='3' strokeLinecap='round' strokeLinejoin='round' /&gt;&#10;                &lt;text x='62' y='38' fontFamily='Verdana' fontSize='15' fill='#FFFFFF'&gt;Pilih minggu ini&lt;/text&gt;&#10;&#10;                {/* Senin — dicentang */}&#10;                &lt;rect x='10' y='62' width='540' height='46' rx='10' fill='#FFFFFF' stroke='#E6DFD2' strokeWidth='2' /&gt;&#10;                &lt;rect x='26' y='75' width='20' height='20' rx='5' fill='#51277C' stroke='#51277C' strokeWidth='2' /&gt;&#10;                &lt;path d='M31 85l4 4 8-9' fill='none' stroke='#FFFFFF' strokeWidth='3' strokeLinecap='round' strokeLinejoin='round' /&gt;&#10;                &lt;text x='62' y='92' fontFamily='Verdana' fontSize='15' fill='#2A2333'&gt;Senin, 5&lt;/text&gt;&#10;                &lt;rect x='436' y='73' width='98' height='24' rx='12' fill='#DED7CB' /&gt;&#10;&#10;                {/* Selasa — dicentang */}&#10;                &lt;rect x='10' y='116' width='540' height='46' rx='10' fill='#FFFFFF' stroke='#E6DFD2' strokeWidth='2' /&gt;&#10;                &lt;rect x='26' y='129' width='20' height='20' rx='5' fill='#51277C' stroke='#51277C' strokeWidth='2' /&gt;&#10;                &lt;path d='M31 139l4 4 8-9' fill='none' stroke='#FFFFFF' strokeWidth='3' strokeLinecap='round' strokeLinejoin='round' /&gt;&#10;                &lt;text x='62' y='146' fontFamily='Verdana' fontSize='15' fill='#2A2333'&gt;Selasa, 6&lt;/text&gt;&#10;                &lt;rect x='436' y='127' width='98' height='24' rx='12' fill='#DED7CB' /&gt;&#10;&#10;                {/* Rabu — dicentang */}&#10;                &lt;rect x='10' y='170' width='540' height='46' rx='10' fill='#FFFFFF' stroke='#E6DFD2' strokeWidth='2' /&gt;&#10;                &lt;rect x='26' y='183' width='20' height='20' rx='5' fill='#51277C' stroke='#51277C' strokeWidth='2' /&gt;&#10;                &lt;path d='M31 193l4 4 8-9' fill='none' stroke='#FFFFFF' strokeWidth='3' strokeLinecap='round' strokeLinejoin='round' /&gt;&#10;                &lt;text x='62' y='200' fontFamily='Verdana' fontSize='15' fill='#2A2333'&gt;Rabu, 7&lt;/text&gt;&#10;                &lt;rect x='436' y='181' width='98' height='24' rx='12' fill='#DED7CB' /&gt;&#10;&#10;                {/* Kamis — tidak dicentang */}&#10;                &lt;rect x='10' y='224' width='540' height='46' rx='10' fill='#FFFFFF' stroke='#E6DFD2' strokeWidth='2' /&gt;&#10;                &lt;rect x='26' y='237' width='20' height='20' rx='5' fill='#FFFFFF' stroke='#DED7CB' strokeWidth='2' /&gt;&#10;                &lt;text x='62' y='254' fontFamily='Verdana' fontSize='15' fill='#2A2333'&gt;Kamis, 8&lt;/text&gt;&#10;                &lt;rect x='436' y='235' width='98' height='24' rx='12' fill='#DED7CB' /&gt;&#10;&#10;                {/* Jumat — tidak dicentang */}&#10;                &lt;rect x='10' y='278' width='540' height='46' rx='10' fill='#FFFFFF' stroke='#E6DFD2' strokeWidth='2' /&gt;&#10;                &lt;rect x='26' y='291' width='20' height='20' rx='5' fill='#FFFFFF' stroke='#DED7CB' strokeWidth='2' /&gt;&#10;                &lt;text x='62' y='308' fontFamily='Verdana' fontSize='15' fill='#2A2333'&gt;Jumat, 9&lt;/text&gt;&#10;                &lt;rect x='436' y='289' width='98' height='24' rx='12' fill='#DED7CB' /&gt;&#10;&#10;                {/* bilah aksi */}&#10;                &lt;rect x='10' y='344' width='540' height='78' rx='14' fill='#51277C' /&gt;&#10;                &lt;rect x='28' y='364' width='120' height='38' rx='10' fill='#FFFFFF' /&gt;&#10;                &lt;text x='88' y='389' fontFamily='Verdana' fontSize='15' fontWeight='bold' fill='#51277C' textAnchor='middle'&gt;Kunci&lt;/text&gt;&#10;                &lt;rect x='160' y='364' width='120' height='38' rx='10' fill='rgba(255,255,255,0.25)' /&gt;&#10;                &lt;text x='220' y='389' fontFamily='Verdana' fontSize='15' fill='#EFEAE1' textAnchor='middle'&gt;Publikasi&lt;/text&gt;&#10;                &lt;rect x='292' y='364' width='120' height='38' rx='10' fill='rgba(255,255,255,0.25)' /&gt;&#10;                &lt;text x='352' y='389' fontFamily='Verdana' fontSize='15' fill='#EFEAE1' textAnchor='middle'&gt;Buka kunci&lt;/text&gt;&#10;                &lt;text x='470' y='389' fontFamily='Verdana' fontSize='14' fill='#F3B26C'&gt;3 dipilih&lt;/text&gt;&#10;            &lt;/svg&gt;&#10;        &lt;/Box&gt;&#10;&#10;        {/* kanan 45% · tiga keterangan */}&#10;        &lt;Box style={{ width: '45%', height: '100%', justifyContent: 'space-between' }}&gt;&#10;            {[&#10;                {&#10;                    t: 'Centang dulu, lalu pilih aksinya',&#10;                    d: 'Ada &quot;Pilih minggu ini&quot; di setiap blok minggu dan &quot;Pilih semua&quot; di bagian atas tabel.',&#10;                    g: 'Tidak satu per satu',&#10;                },&#10;                {&#10;                    t: 'Tombol menyesuaikan pilihan Anda',&#10;                    d: 'Bilah aksi di bawah layar hanya menghidupkan tombol yang cocok dengan status hari yang dicentang.',&#10;                    g: 'Tidak bisa salah klik',&#10;                },&#10;                {&#10;                    t: 'Buka kunci massal hanya admin',&#10;                    d: 'Korlas tetap terbatas kelasnya sendiri — hari dari kelas lain tidak ikut tersentuh.',&#10;                    g: 'Aman lintas kelas',&#10;                },&#10;            ].map((it, i) =&gt; (&#10;                &lt;Box&#10;                    key={i}&#10;                    style={{&#10;                        height: 166,&#10;                        background: '#FFFFFF',&#10;                        borderRadius: 16,&#10;                        boxShadow: '0 4px 20px rgba(0,0,0,0.08)',&#10;                        padding: 22,&#10;                        borderLeft: '8px solid #AFC440',&#10;                    }}&#10;                &gt;&#10;                    &lt;Text&#10;                        style={{&#10;                            fontSize: 24,&#10;                            fontWeight: 'bold',&#10;                            color: '#51277C',&#10;                            fontFamily: 'Trebuchet MS',&#10;                            lineHeight: 1.3,&#10;                        }}&#10;                    &gt;&#10;                        {it.t}&#10;                    &lt;/Text&gt;&#10;                    &lt;Text&#10;                        style={{&#10;                            marginTop: 10,&#10;                            fontSize: 17,&#10;                            color: '#6B6478',&#10;                            fontFamily: 'Verdana',&#10;                            lineHeight: 1.5,&#10;                        }}&#10;                    &gt;&#10;                        {it.d}&#10;                    &lt;/Text&gt;&#10;                    &lt;Box style={{ marginTop: 'auto' }}&gt;&#10;                        &lt;Text&#10;                            style={{&#10;                                fontSize: 16,&#10;                                color: '#51277C',&#10;                                fontFamily: 'Verdana',&#10;                                fontWeight: 'bold',&#10;                            }}&#10;                        &gt;&#10;                            {it.g}&#10;                        &lt;/Text&gt;&#10;                    &lt;/Box&gt;&#10;                &lt;/Box&gt;&#10;            ))}&#10;        &lt;/Box&gt;&#10;    &lt;/Box&gt;&#10;&#10;    {/* ── C · bilah kaki ── */}&#10;    &lt;Box&#10;        style={{&#10;            height: 40,&#10;            flexDirection: 'row',&#10;            alignItems: 'center',&#10;            justifyContent: 'space-between',&#10;        }}&#10;    &gt;&#10;        &lt;Text style={{ fontSize: 14, color: '#6B6478', fontFamily: 'Verdana' }}&gt;&#10;            Pizza Snack Play · Panduan Korlas &amp;amp; Admin&#10;        &lt;/Text&gt;&#10;        &lt;Text style={{ fontSize: 14, color: '#6B6478', fontFamily: 'Verdana' }}&gt;13 / 16&lt;/Text&gt;&#10;    &lt;/Box&gt;&#10;&lt;/Slide&gt;&#10;"/>
+        <p:cNvPr id="83" name=""/>
         <p:cNvGrpSpPr/>
         <p:nvPr/>
       </p:nvGrpSpPr>
@@ -3765,7 +4543,7 @@
       </p:grpSpPr>
       <p:sp>
         <p:nvSpPr>
-          <p:cNvPr id="64" name=""/>
+          <p:cNvPr id="84" name=""/>
           <p:cNvSpPr/>
           <p:nvPr/>
         </p:nvSpPr>
@@ -3784,12 +4562,15 @@
         </p:spPr>
         <p:txBody>
           <a:bodyPr/>
-          <a:p/>
-        </p:txBody>
-      </p:sp>
-      <p:sp>
-        <p:nvSpPr>
-          <p:cNvPr id="65" name="" descr="{&quot;isTemplate&quot;:true,&quot;type&quot;:&quot;text&quot;}"/>
+          <a:p>
+            <a:pPr/>
+            <a:endParaRPr/>
+          </a:p>
+        </p:txBody>
+      </p:sp>
+      <p:sp>
+        <p:nvSpPr>
+          <p:cNvPr id="85" name="" descr="{&quot;isTemplate&quot;:true,&quot;type&quot;:&quot;text&quot;}"/>
           <p:cNvSpPr txBox="1"/>
           <p:nvPr/>
         </p:nvSpPr>
@@ -3824,7 +4605,7 @@
       </p:sp>
       <p:sp>
         <p:nvSpPr>
-          <p:cNvPr id="66" name=""/>
+          <p:cNvPr id="86" name=""/>
           <p:cNvSpPr/>
           <p:nvPr/>
         </p:nvSpPr>
@@ -3845,12 +4626,15 @@
         </p:spPr>
         <p:txBody>
           <a:bodyPr/>
-          <a:p/>
-        </p:txBody>
-      </p:sp>
-      <p:sp>
-        <p:nvSpPr>
-          <p:cNvPr id="67" name=""/>
+          <a:p>
+            <a:pPr/>
+            <a:endParaRPr/>
+          </a:p>
+        </p:txBody>
+      </p:sp>
+      <p:sp>
+        <p:nvSpPr>
+          <p:cNvPr id="87" name=""/>
           <p:cNvSpPr/>
           <p:nvPr/>
         </p:nvSpPr>
@@ -3873,12 +4657,15 @@
         </p:spPr>
         <p:txBody>
           <a:bodyPr/>
-          <a:p/>
+          <a:p>
+            <a:pPr/>
+            <a:endParaRPr/>
+          </a:p>
         </p:txBody>
       </p:sp>
       <p:pic>
         <p:nvPicPr>
-          <p:cNvPr id="68" name=""/>
+          <p:cNvPr id="88" name=""/>
           <p:cNvPicPr>
             <a:picLocks noChangeAspect="1"/>
           </p:cNvPicPr>
@@ -3909,7 +4696,7 @@
       </p:pic>
       <p:sp>
         <p:nvSpPr>
-          <p:cNvPr id="69" name=""/>
+          <p:cNvPr id="89" name=""/>
           <p:cNvSpPr/>
           <p:nvPr/>
         </p:nvSpPr>
@@ -3937,12 +4724,15 @@
         </p:spPr>
         <p:txBody>
           <a:bodyPr/>
-          <a:p/>
-        </p:txBody>
-      </p:sp>
-      <p:sp>
-        <p:nvSpPr>
-          <p:cNvPr id="70" name=""/>
+          <a:p>
+            <a:pPr/>
+            <a:endParaRPr/>
+          </a:p>
+        </p:txBody>
+      </p:sp>
+      <p:sp>
+        <p:nvSpPr>
+          <p:cNvPr id="90" name=""/>
           <p:cNvSpPr/>
           <p:nvPr/>
         </p:nvSpPr>
@@ -3994,12 +4784,15 @@
         </p:spPr>
         <p:txBody>
           <a:bodyPr/>
-          <a:p/>
-        </p:txBody>
-      </p:sp>
-      <p:sp>
-        <p:nvSpPr>
-          <p:cNvPr id="71" name="" descr="{&quot;isTemplate&quot;:true,&quot;type&quot;:&quot;text&quot;}"/>
+          <a:p>
+            <a:pPr/>
+            <a:endParaRPr/>
+          </a:p>
+        </p:txBody>
+      </p:sp>
+      <p:sp>
+        <p:nvSpPr>
+          <p:cNvPr id="91" name="" descr="{&quot;isTemplate&quot;:true,&quot;type&quot;:&quot;text&quot;}"/>
           <p:cNvSpPr txBox="1"/>
           <p:nvPr/>
         </p:nvSpPr>
@@ -4034,7 +4827,7 @@
       </p:sp>
       <p:sp>
         <p:nvSpPr>
-          <p:cNvPr id="72" name="" descr="{&quot;isTemplate&quot;:true,&quot;type&quot;:&quot;text&quot;}"/>
+          <p:cNvPr id="92" name="" descr="{&quot;isTemplate&quot;:true,&quot;type&quot;:&quot;text&quot;}"/>
           <p:cNvSpPr txBox="1"/>
           <p:nvPr/>
         </p:nvSpPr>
@@ -4071,7 +4864,7 @@
       </p:sp>
       <p:sp>
         <p:nvSpPr>
-          <p:cNvPr id="73" name="" descr="{&quot;isTemplate&quot;:true,&quot;type&quot;:&quot;text&quot;}"/>
+          <p:cNvPr id="93" name="" descr="{&quot;isTemplate&quot;:true,&quot;type&quot;:&quot;text&quot;}"/>
           <p:cNvSpPr txBox="1"/>
           <p:nvPr/>
         </p:nvSpPr>
@@ -4106,7 +4899,7 @@
       </p:sp>
       <p:sp>
         <p:nvSpPr>
-          <p:cNvPr id="74" name=""/>
+          <p:cNvPr id="94" name=""/>
           <p:cNvSpPr/>
           <p:nvPr/>
         </p:nvSpPr>
@@ -4134,12 +4927,15 @@
         </p:spPr>
         <p:txBody>
           <a:bodyPr/>
-          <a:p/>
-        </p:txBody>
-      </p:sp>
-      <p:sp>
-        <p:nvSpPr>
-          <p:cNvPr id="75" name=""/>
+          <a:p>
+            <a:pPr/>
+            <a:endParaRPr/>
+          </a:p>
+        </p:txBody>
+      </p:sp>
+      <p:sp>
+        <p:nvSpPr>
+          <p:cNvPr id="95" name=""/>
           <p:cNvSpPr/>
           <p:nvPr/>
         </p:nvSpPr>
@@ -4191,12 +4987,15 @@
         </p:spPr>
         <p:txBody>
           <a:bodyPr/>
-          <a:p/>
-        </p:txBody>
-      </p:sp>
-      <p:sp>
-        <p:nvSpPr>
-          <p:cNvPr id="76" name="" descr="{&quot;isTemplate&quot;:true,&quot;type&quot;:&quot;text&quot;}"/>
+          <a:p>
+            <a:pPr/>
+            <a:endParaRPr/>
+          </a:p>
+        </p:txBody>
+      </p:sp>
+      <p:sp>
+        <p:nvSpPr>
+          <p:cNvPr id="96" name="" descr="{&quot;isTemplate&quot;:true,&quot;type&quot;:&quot;text&quot;}"/>
           <p:cNvSpPr txBox="1"/>
           <p:nvPr/>
         </p:nvSpPr>
@@ -4231,7 +5030,7 @@
       </p:sp>
       <p:sp>
         <p:nvSpPr>
-          <p:cNvPr id="77" name="" descr="{&quot;isTemplate&quot;:true,&quot;type&quot;:&quot;text&quot;}"/>
+          <p:cNvPr id="97" name="" descr="{&quot;isTemplate&quot;:true,&quot;type&quot;:&quot;text&quot;}"/>
           <p:cNvSpPr txBox="1"/>
           <p:nvPr/>
         </p:nvSpPr>
@@ -4268,7 +5067,7 @@
       </p:sp>
       <p:sp>
         <p:nvSpPr>
-          <p:cNvPr id="78" name="" descr="{&quot;isTemplate&quot;:true,&quot;type&quot;:&quot;text&quot;}"/>
+          <p:cNvPr id="98" name="" descr="{&quot;isTemplate&quot;:true,&quot;type&quot;:&quot;text&quot;}"/>
           <p:cNvSpPr txBox="1"/>
           <p:nvPr/>
         </p:nvSpPr>
@@ -4303,7 +5102,7 @@
       </p:sp>
       <p:sp>
         <p:nvSpPr>
-          <p:cNvPr id="79" name=""/>
+          <p:cNvPr id="99" name=""/>
           <p:cNvSpPr/>
           <p:nvPr/>
         </p:nvSpPr>
@@ -4331,12 +5130,15 @@
         </p:spPr>
         <p:txBody>
           <a:bodyPr/>
-          <a:p/>
-        </p:txBody>
-      </p:sp>
-      <p:sp>
-        <p:nvSpPr>
-          <p:cNvPr id="80" name=""/>
+          <a:p>
+            <a:pPr/>
+            <a:endParaRPr/>
+          </a:p>
+        </p:txBody>
+      </p:sp>
+      <p:sp>
+        <p:nvSpPr>
+          <p:cNvPr id="100" name=""/>
           <p:cNvSpPr/>
           <p:nvPr/>
         </p:nvSpPr>
@@ -4388,12 +5190,15 @@
         </p:spPr>
         <p:txBody>
           <a:bodyPr/>
-          <a:p/>
-        </p:txBody>
-      </p:sp>
-      <p:sp>
-        <p:nvSpPr>
-          <p:cNvPr id="81" name="" descr="{&quot;isTemplate&quot;:true,&quot;type&quot;:&quot;text&quot;}"/>
+          <a:p>
+            <a:pPr/>
+            <a:endParaRPr/>
+          </a:p>
+        </p:txBody>
+      </p:sp>
+      <p:sp>
+        <p:nvSpPr>
+          <p:cNvPr id="101" name="" descr="{&quot;isTemplate&quot;:true,&quot;type&quot;:&quot;text&quot;}"/>
           <p:cNvSpPr txBox="1"/>
           <p:nvPr/>
         </p:nvSpPr>
@@ -4428,7 +5233,7 @@
       </p:sp>
       <p:sp>
         <p:nvSpPr>
-          <p:cNvPr id="82" name="" descr="{&quot;isTemplate&quot;:true,&quot;type&quot;:&quot;text&quot;}"/>
+          <p:cNvPr id="102" name="" descr="{&quot;isTemplate&quot;:true,&quot;type&quot;:&quot;text&quot;}"/>
           <p:cNvSpPr txBox="1"/>
           <p:nvPr/>
         </p:nvSpPr>
@@ -4465,7 +5270,7 @@
       </p:sp>
       <p:sp>
         <p:nvSpPr>
-          <p:cNvPr id="83" name="" descr="{&quot;isTemplate&quot;:true,&quot;type&quot;:&quot;text&quot;}"/>
+          <p:cNvPr id="103" name="" descr="{&quot;isTemplate&quot;:true,&quot;type&quot;:&quot;text&quot;}"/>
           <p:cNvSpPr txBox="1"/>
           <p:nvPr/>
         </p:nvSpPr>
@@ -4500,7 +5305,7 @@
       </p:sp>
       <p:sp>
         <p:nvSpPr>
-          <p:cNvPr id="84" name="" descr="{&quot;isTemplate&quot;:true,&quot;type&quot;:&quot;text&quot;}"/>
+          <p:cNvPr id="104" name="" descr="{&quot;isTemplate&quot;:true,&quot;type&quot;:&quot;text&quot;}"/>
           <p:cNvSpPr txBox="1"/>
           <p:nvPr/>
         </p:nvSpPr>
@@ -4535,7 +5340,7 @@
       </p:sp>
       <p:sp>
         <p:nvSpPr>
-          <p:cNvPr id="85" name="" descr="{&quot;isTemplate&quot;:true,&quot;type&quot;:&quot;text&quot;}"/>
+          <p:cNvPr id="105" name="" descr="{&quot;isTemplate&quot;:true,&quot;type&quot;:&quot;text&quot;}"/>
           <p:cNvSpPr txBox="1"/>
           <p:nvPr/>
         </p:nvSpPr>
@@ -4562,7 +5367,7 @@
                 <a:latin typeface="Verdana"/>
                 <a:ea typeface="Verdana"/>
               </a:rPr>
-              <a:t>13 / 16</a:t>
+              <a:t>14 / 17</a:t>
             </a:r>
             <a:endParaRPr/>
           </a:p>
@@ -4573,12 +5378,12 @@
 </p:sld>
 </file>
 
-<file path=ppt/slides/slide14.xml><?xml version="1.0" encoding="utf-8"?>
+<file path=ppt/slides/slide15.xml><?xml version="1.0" encoding="utf-8"?>
 <p:sld xmlns:p="http://schemas.openxmlformats.org/presentationml/2006/main" xmlns:a="http://schemas.openxmlformats.org/drawingml/2006/main" xmlns:asvg="http://schemas.microsoft.com/office/drawing/2016/SVG/main" xmlns:r="http://schemas.openxmlformats.org/officeDocument/2006/relationships" xmlns:mc="http://schemas.openxmlformats.org/markup-compatibility/2006" mc:Ignorable="asvg">
   <p:cSld>
     <p:spTree>
       <p:nvGrpSpPr>
-        <p:cNvPr id="86" name="" descr="&lt;Slide&#10;    style={{&#10;        width: '1280px',&#10;        height: '720px',&#10;        background: '#FAF7F2',&#10;        paddingTop: 20,&#10;        paddingBottom: 20,&#10;        paddingLeft: 64,&#10;        paddingRight: 64,&#10;        position: 'relative',&#10;        overflow: 'hidden',&#10;    }}&#10;&gt;&#10;    &lt;Box&#10;        style={{&#10;            position: 'absolute',&#10;            top: -150,&#10;            left: -120,&#10;            width: 440,&#10;            height: 440,&#10;            borderRadius: 220,&#10;            background: 'linear-gradient(135deg, #AFC440 0%, #F3B26C 100%)',&#10;            opacity: 0.14,&#10;        }}&#10;    /&gt;&#10;&#10;    {/* ── A · blok judul ── */}&#10;    &lt;Box style={{ height: 110, justifyContent: 'center' }}&gt;&#10;        &lt;Text&#10;            style={{&#10;                fontSize: 34,&#10;                fontWeight: 'bold',&#10;                color: '#51277C',&#10;                fontFamily: 'Trebuchet MS',&#10;                lineHeight: 1.3,&#10;            }}&#10;        &gt;&#10;            Laporan piket: sudah merata?&#10;        &lt;/Text&gt;&#10;        &lt;Box style={{ marginTop: 10, width: 72, height: 6, borderRadius: 3, background: '#F3B26C' }} /&gt;&#10;    &lt;/Box&gt;&#10;&#10;    {/* ── B · area konten ── */}&#10;    &lt;Box style={{ height: 530, flexDirection: 'row', gap: 34, position: 'relative', zIndex: 1 }}&gt;&#10;        {/* kiri 55% · frasa raksasa */}&#10;        &lt;Box style={{ width: '55%', height: '100%', justifyContent: 'center' }}&gt;&#10;            &lt;Text&#10;                style={{&#10;                    fontSize: 62,&#10;                    fontWeight: 'bold',&#10;                    color: '#51277C',&#10;                    fontFamily: 'Trebuchet MS',&#10;                    lineHeight: 1.1,&#10;                }}&#10;            &gt;&#10;                Merata,{'\n'}bukan sekadar penuh.&#10;            &lt;/Text&gt;&#10;&#10;            &lt;Text&#10;                style={{&#10;                    marginTop: 22,&#10;                    fontSize: 19,&#10;                    color: '#2A2333',&#10;                    fontFamily: 'Verdana',&#10;                    lineHeight: 1.55,&#10;                }}&#10;            &gt;&#10;                Menu Laporan menghitung berapa kali setiap orang tua sudah mengambil piket,&#10;                lengkap dengan tanggal dan menunya. Angkanya diambil dari tempat yang sama&#10;                dengan yang dipakai orang tua saat mengambil tanggal.&#10;            &lt;/Text&gt;&#10;&#10;            &lt;Box&#10;                style={{&#10;                    marginTop: 24,&#10;                    background: 'rgba(243,178,108,0.22)',&#10;                    borderRadius: 14,&#10;                    borderLeft: '8px solid #F3B26C',&#10;                    padding: 18,&#10;                }}&#10;            &gt;&#10;                &lt;Text&#10;                    style={{&#10;                        fontSize: 18,&#10;                        color: '#2A2333',&#10;                        fontFamily: 'Verdana',&#10;                        lineHeight: 1.5,&#10;                    }}&#10;                &gt;&#10;                    Yang paling berguna justru satu daftar ini:&#10;                &lt;/Text&gt;&#10;                &lt;Text&#10;                    style={{&#10;                        marginTop: 10,&#10;                        fontSize: 19,&#10;                        fontWeight: 'bold',&#10;                        color: '#51277C',&#10;                        fontFamily: 'Trebuchet MS',&#10;                        lineHeight: 1.35,&#10;                    }}&#10;                &gt;&#10;                    Belum pernah ambil&#10;                &lt;/Text&gt;&#10;                &lt;Text&#10;                    style={{&#10;                        marginTop: 4,&#10;                        fontSize: 17,&#10;                        color: '#2A2333',&#10;                        fontFamily: 'Verdana',&#10;                        lineHeight: 1.5,&#10;                    }}&#10;                &gt;&#10;                    merekalah yang bisa diajak lebih dulu bulan depan.&#10;                &lt;/Text&gt;&#10;            &lt;/Box&gt;&#10;        &lt;/Box&gt;&#10;&#10;        {/* kanan 45% · rekap per orang tua */}&#10;        &lt;Box&#10;            style={{&#10;                width: '45%',&#10;                height: '100%',&#10;                background: 'rgba(81,39,124,0.06)',&#10;                borderRadius: 20,&#10;                justifyContent: 'center',&#10;                alignItems: 'center',&#10;            }}&#10;        &gt;&#10;            &lt;svg width={430} height={430} viewBox='0 0 430 430'&gt;&#10;                &lt;text x='18' y='38' fontFamily='Trebuchet MS' fontSize='21' fontWeight='bold' fill='#51277C'&gt;&#10;                    Rekap ambil piket&#10;                &lt;/text&gt;&#10;                &lt;text x='18' y='62' fontFamily='Verdana' fontSize='14' fill='#6B6478'&gt;&#10;                    1 – 31 Oktober · Kelas 1&#10;                &lt;/text&gt;&#10;&#10;                {/* Sari · 4 */}&#10;                &lt;text x='18' y='120' fontFamily='Verdana' fontSize='15' fill='#2A2333'&gt;Sari&lt;/text&gt;&#10;                &lt;rect x='110' y='104' width='250' height='22' rx='11' fill='#EFEAE1' /&gt;&#10;                &lt;rect x='110' y='104' width='250' height='22' rx='11' fill='#51277C' /&gt;&#10;                &lt;text x='372' y='120' fontFamily='Trebuchet MS' fontSize='16' fontWeight='bold' fill='#51277C'&gt;4&lt;/text&gt;&#10;&#10;                {/* Budi · 3 */}&#10;                &lt;text x='18' y='176' fontFamily='Verdana' fontSize='15' fill='#2A2333'&gt;Budi&lt;/text&gt;&#10;                &lt;rect x='110' y='160' width='250' height='22' rx='11' fill='#EFEAE1' /&gt;&#10;                &lt;rect x='110' y='160' width='188' height='22' rx='11' fill='#51277C' /&gt;&#10;                &lt;text x='372' y='176' fontFamily='Trebuchet MS' fontSize='16' fontWeight='bold' fill='#51277C'&gt;3&lt;/text&gt;&#10;&#10;                {/* Dewi · 2 */}&#10;                &lt;text x='18' y='232' fontFamily='Verdana' fontSize='15' fill='#2A2333'&gt;Dewi&lt;/text&gt;&#10;                &lt;rect x='110' y='216' width='250' height='22' rx='11' fill='#EFEAE1' /&gt;&#10;                &lt;rect x='110' y='216' width='125' height='22' rx='11' fill='#51277C' /&gt;&#10;                &lt;text x='372' y='232' fontFamily='Trebuchet MS' fontSize='16' fontWeight='bold' fill='#51277C'&gt;2&lt;/text&gt;&#10;&#10;                {/* Rina · 1 */}&#10;                &lt;text x='18' y='288' fontFamily='Verdana' fontSize='15' fill='#2A2333'&gt;Rina&lt;/text&gt;&#10;                &lt;rect x='110' y='272' width='250' height='22' rx='11' fill='#EFEAE1' /&gt;&#10;                &lt;rect x='110' y='272' width='63' height='22' rx='11' fill='#51277C' /&gt;&#10;                &lt;text x='372' y='288' fontFamily='Trebuchet MS' fontSize='16' fontWeight='bold' fill='#51277C'&gt;1&lt;/text&gt;&#10;&#10;                {/* Anto · 0 — belum pernah */}&#10;                &lt;text x='18' y='344' fontFamily='Verdana' fontSize='15' fill='#2A2333'&gt;Anto&lt;/text&gt;&#10;                &lt;rect x='110' y='328' width='250' height='22' rx='11' fill='#EFEAE1' /&gt;&#10;                &lt;rect x='110' y='328' width='250' height='22' rx='11' fill='#F3B26C' opacity='0.35' /&gt;&#10;                &lt;text x='372' y='344' fontFamily='Trebuchet MS' fontSize='16' fontWeight='bold' fill='#F3B26C'&gt;0&lt;/text&gt;&#10;&#10;                {/* simpulan */}&#10;                &lt;rect x='18' y='374' width='394' height='48' rx='14' fill='#51277C' /&gt;&#10;                &lt;text x='38' y='396' fontFamily='Verdana' fontSize='15' fill='#F3B26C' fontWeight='bold'&gt;&#10;                    Belum pernah ambil: Anto&#10;                &lt;/text&gt;&#10;                &lt;text x='38' y='414' fontFamily='Verdana' fontSize='13' fill='#EFEAE1'&gt;&#10;                    ajak lebih dulu saat menyusun bulan depan&#10;                &lt;/text&gt;&#10;            &lt;/svg&gt;&#10;        &lt;/Box&gt;&#10;    &lt;/Box&gt;&#10;&#10;    {/* ── C · bilah kaki ── */}&#10;    &lt;Box&#10;        style={{&#10;            height: 40,&#10;            flexDirection: 'row',&#10;            alignItems: 'center',&#10;            justifyContent: 'space-between',&#10;        }}&#10;    &gt;&#10;        &lt;Text style={{ fontSize: 14, color: '#6B6478', fontFamily: 'Verdana' }}&gt;&#10;            Pizza Snack Play · Panduan Korlas &amp;amp; Admin&#10;        &lt;/Text&gt;&#10;        &lt;Text style={{ fontSize: 14, color: '#6B6478', fontFamily: 'Verdana' }}&gt;14 / 16&lt;/Text&gt;&#10;    &lt;/Box&gt;&#10;&lt;/Slide&gt;&#10;"/>
+        <p:cNvPr id="106" name=""/>
         <p:cNvGrpSpPr/>
         <p:nvPr/>
       </p:nvGrpSpPr>
@@ -4592,7 +5397,7 @@
       </p:grpSpPr>
       <p:sp>
         <p:nvSpPr>
-          <p:cNvPr id="87" name=""/>
+          <p:cNvPr id="107" name=""/>
           <p:cNvSpPr/>
           <p:nvPr/>
         </p:nvSpPr>
@@ -4611,12 +5416,15 @@
         </p:spPr>
         <p:txBody>
           <a:bodyPr/>
-          <a:p/>
-        </p:txBody>
-      </p:sp>
-      <p:sp>
-        <p:nvSpPr>
-          <p:cNvPr id="88" name="" descr="{&quot;isTemplate&quot;:true,&quot;type&quot;:&quot;text&quot;}"/>
+          <a:p>
+            <a:pPr/>
+            <a:endParaRPr/>
+          </a:p>
+        </p:txBody>
+      </p:sp>
+      <p:sp>
+        <p:nvSpPr>
+          <p:cNvPr id="108" name="" descr="{&quot;isTemplate&quot;:true,&quot;type&quot;:&quot;text&quot;}"/>
           <p:cNvSpPr txBox="1"/>
           <p:nvPr/>
         </p:nvSpPr>
@@ -4651,7 +5459,7 @@
       </p:sp>
       <p:sp>
         <p:nvSpPr>
-          <p:cNvPr id="89" name=""/>
+          <p:cNvPr id="109" name=""/>
           <p:cNvSpPr/>
           <p:nvPr/>
         </p:nvSpPr>
@@ -4672,12 +5480,15 @@
         </p:spPr>
         <p:txBody>
           <a:bodyPr/>
-          <a:p/>
-        </p:txBody>
-      </p:sp>
-      <p:sp>
-        <p:nvSpPr>
-          <p:cNvPr id="90" name="" descr="{&quot;isTemplate&quot;:true,&quot;type&quot;:&quot;text&quot;}"/>
+          <a:p>
+            <a:pPr/>
+            <a:endParaRPr/>
+          </a:p>
+        </p:txBody>
+      </p:sp>
+      <p:sp>
+        <p:nvSpPr>
+          <p:cNvPr id="110" name="" descr="{&quot;isTemplate&quot;:true,&quot;type&quot;:&quot;text&quot;}"/>
           <p:cNvSpPr txBox="1"/>
           <p:nvPr/>
         </p:nvSpPr>
@@ -4712,7 +5523,7 @@
       </p:sp>
       <p:sp>
         <p:nvSpPr>
-          <p:cNvPr id="91" name="" descr="{&quot;isTemplate&quot;:true,&quot;type&quot;:&quot;text&quot;}"/>
+          <p:cNvPr id="111" name="" descr="{&quot;isTemplate&quot;:true,&quot;type&quot;:&quot;text&quot;}"/>
           <p:cNvSpPr txBox="1"/>
           <p:nvPr/>
         </p:nvSpPr>
@@ -4739,15 +5550,15 @@
                 <a:latin typeface="Verdana"/>
                 <a:ea typeface="Verdana"/>
               </a:rPr>
-              <a:t>14 / 16</a:t>
-            </a:r>
-            <a:endParaRPr/>
-          </a:p>
-        </p:txBody>
-      </p:sp>
-      <p:sp>
-        <p:nvSpPr>
-          <p:cNvPr id="92" name=""/>
+              <a:t>15 / 17</a:t>
+            </a:r>
+            <a:endParaRPr/>
+          </a:p>
+        </p:txBody>
+      </p:sp>
+      <p:sp>
+        <p:nvSpPr>
+          <p:cNvPr id="112" name=""/>
           <p:cNvSpPr/>
           <p:nvPr/>
         </p:nvSpPr>
@@ -5076,12 +5887,15 @@
         </p:spPr>
         <p:txBody>
           <a:bodyPr/>
-          <a:p/>
-        </p:txBody>
-      </p:sp>
-      <p:sp>
-        <p:nvSpPr>
-          <p:cNvPr id="93" name="" descr="{&quot;isTemplate&quot;:true,&quot;type&quot;:&quot;text&quot;}"/>
+          <a:p>
+            <a:pPr/>
+            <a:endParaRPr/>
+          </a:p>
+        </p:txBody>
+      </p:sp>
+      <p:sp>
+        <p:nvSpPr>
+          <p:cNvPr id="113" name="" descr="{&quot;isTemplate&quot;:true,&quot;type&quot;:&quot;text&quot;}"/>
           <p:cNvSpPr txBox="1"/>
           <p:nvPr/>
         </p:nvSpPr>
@@ -5136,7 +5950,7 @@
       </p:sp>
       <p:sp>
         <p:nvSpPr>
-          <p:cNvPr id="94" name="" descr="{&quot;isTemplate&quot;:true,&quot;type&quot;:&quot;text&quot;}"/>
+          <p:cNvPr id="114" name="" descr="{&quot;isTemplate&quot;:true,&quot;type&quot;:&quot;text&quot;}"/>
           <p:cNvSpPr txBox="1"/>
           <p:nvPr/>
         </p:nvSpPr>
@@ -5173,7 +5987,7 @@
       </p:sp>
       <p:sp>
         <p:nvSpPr>
-          <p:cNvPr id="95" name=""/>
+          <p:cNvPr id="115" name=""/>
           <p:cNvSpPr/>
           <p:nvPr/>
         </p:nvSpPr>
@@ -5196,12 +6010,15 @@
         </p:spPr>
         <p:txBody>
           <a:bodyPr/>
-          <a:p/>
-        </p:txBody>
-      </p:sp>
-      <p:sp>
-        <p:nvSpPr>
-          <p:cNvPr id="96" name=""/>
+          <a:p>
+            <a:pPr/>
+            <a:endParaRPr/>
+          </a:p>
+        </p:txBody>
+      </p:sp>
+      <p:sp>
+        <p:nvSpPr>
+          <p:cNvPr id="116" name=""/>
           <p:cNvSpPr/>
           <p:nvPr/>
         </p:nvSpPr>
@@ -5253,12 +6070,15 @@
         </p:spPr>
         <p:txBody>
           <a:bodyPr/>
-          <a:p/>
-        </p:txBody>
-      </p:sp>
-      <p:sp>
-        <p:nvSpPr>
-          <p:cNvPr id="97" name="" descr="{&quot;isTemplate&quot;:true,&quot;type&quot;:&quot;text&quot;}"/>
+          <a:p>
+            <a:pPr/>
+            <a:endParaRPr/>
+          </a:p>
+        </p:txBody>
+      </p:sp>
+      <p:sp>
+        <p:nvSpPr>
+          <p:cNvPr id="117" name="" descr="{&quot;isTemplate&quot;:true,&quot;type&quot;:&quot;text&quot;}"/>
           <p:cNvSpPr txBox="1"/>
           <p:nvPr/>
         </p:nvSpPr>
@@ -5293,7 +6113,7 @@
       </p:sp>
       <p:sp>
         <p:nvSpPr>
-          <p:cNvPr id="98" name="" descr="{&quot;isTemplate&quot;:true,&quot;type&quot;:&quot;text&quot;}"/>
+          <p:cNvPr id="118" name="" descr="{&quot;isTemplate&quot;:true,&quot;type&quot;:&quot;text&quot;}"/>
           <p:cNvSpPr txBox="1"/>
           <p:nvPr/>
         </p:nvSpPr>
@@ -5328,7 +6148,7 @@
       </p:sp>
       <p:sp>
         <p:nvSpPr>
-          <p:cNvPr id="99" name="" descr="{&quot;isTemplate&quot;:true,&quot;type&quot;:&quot;text&quot;}"/>
+          <p:cNvPr id="119" name="" descr="{&quot;isTemplate&quot;:true,&quot;type&quot;:&quot;text&quot;}"/>
           <p:cNvSpPr txBox="1"/>
           <p:nvPr/>
         </p:nvSpPr>
@@ -5363,7 +6183,7 @@
       </p:sp>
       <p:sp>
         <p:nvSpPr>
-          <p:cNvPr id="100" name=""/>
+          <p:cNvPr id="120" name=""/>
           <p:cNvSpPr/>
           <p:nvPr/>
         </p:nvSpPr>
@@ -5386,12 +6206,15 @@
         </p:spPr>
         <p:txBody>
           <a:bodyPr/>
-          <a:p/>
+          <a:p>
+            <a:pPr/>
+            <a:endParaRPr/>
+          </a:p>
         </p:txBody>
       </p:sp>
       <p:pic>
         <p:nvPicPr>
-          <p:cNvPr id="101" name=""/>
+          <p:cNvPr id="121" name=""/>
           <p:cNvPicPr>
             <a:picLocks noChangeAspect="1"/>
           </p:cNvPicPr>
@@ -5425,12 +6248,12 @@
 </p:sld>
 </file>
 
-<file path=ppt/slides/slide15.xml><?xml version="1.0" encoding="utf-8"?>
+<file path=ppt/slides/slide16.xml><?xml version="1.0" encoding="utf-8"?>
 <p:sld xmlns:p="http://schemas.openxmlformats.org/presentationml/2006/main" xmlns:a="http://schemas.openxmlformats.org/drawingml/2006/main" xmlns:asvg="http://schemas.microsoft.com/office/drawing/2016/SVG/main" xmlns:r="http://schemas.openxmlformats.org/officeDocument/2006/relationships" xmlns:mc="http://schemas.openxmlformats.org/markup-compatibility/2006" mc:Ignorable="asvg">
   <p:cSld>
     <p:spTree>
       <p:nvGrpSpPr>
-        <p:cNvPr id="102" name="" descr="&lt;Slide&#10;    style={{&#10;        width: '1280px',&#10;        height: '720px',&#10;        background: '#FAF7F2',&#10;        paddingTop: 20,&#10;        paddingBottom: 20,&#10;        paddingLeft: 64,&#10;        paddingRight: 64,&#10;    }}&#10;&gt;&#10;    {/* ── A · blok judul ── */}&#10;    &lt;Box style={{ height: 110, justifyContent: 'center' }}&gt;&#10;        &lt;Text&#10;            style={{&#10;                fontSize: 34,&#10;                fontWeight: 'bold',&#10;                color: '#51277C',&#10;                fontFamily: 'Trebuchet MS',&#10;                lineHeight: 1.3,&#10;            }}&#10;        &gt;&#10;            Empat hal yang perlu diingat&#10;        &lt;/Text&gt;&#10;        &lt;Box style={{ marginTop: 10, width: 72, height: 6, borderRadius: 3, background: '#51277C' }} /&gt;&#10;    &lt;/Box&gt;&#10;&#10;    {/* ── B · area konten ── */}&#10;    &lt;Box style={{ height: 530 }}&gt;&#10;        &lt;Box style={{ height: 470, flexDirection: 'row', gap: 18 }}&gt;&#10;            {[&#10;                {&#10;                    d: 'M7 2v3M17 2v3M3 9h18M5 5h14a2 2 0 0 1 2 2v12a2 2 0 0 1-2 2H5a2 2 0 0 1-2-2V7a2 2 0 0 1 2-2zM8 13h8',&#10;                    t: 'Kosongkan petugas sebelum terbit',&#10;                    d: 'Bila tanggalnya ingin direbut orang tua, biarkan petugas kosong sebelum dipublikasikan. Setelah terbit, yang masih bisa diisi hanya petugas — menu &amp; catatan tetap terkunci.',&#10;                    g: 'Tentukan sebelum kunci',&#10;                },&#10;                {&#10;                    d: 'M7 4h10a3 3 0 0 1 3 3v10a3 3 0 0 1-3 3H7a3 3 0 0 1-3-3V7a3 3 0 0 1 3-3zM7 11l2 2 3-4M8 16h7',&#10;                    t: 'Selesaikan semua dulu',&#10;                    d: 'Publikasi menolak selama masih ada hari yang belum dikunci. Periksa kartu status per kelas sebelum menekan tombolnya.',&#10;                    g: 'Jangan separuh jadi',&#10;                },&#10;                {&#10;                    d: 'M7 11h10a2 2 0 0 1 2 2v6a2 2 0 0 1-2 2H7a2 2 0 0 1-2-2v-6a2 2 0 0 1 2-2zM8 11V8a4 4 0 0 1 7.5-2',&#10;                    t: 'Revisi sesudah terbit: minta admin',&#10;                    d: 'Membuka kunci jadwal wewenang admin. Korlas tidak bisa mencairkan jadwal yang sudah dikunci atau terbit.',&#10;                    g: 'Sampaikan ke admin',&#10;                },&#10;                {&#10;                    d: 'M7 2v3M17 2v3M3 9h18M5 5h14a2 2 0 0 1 2 2v12a2 2 0 0 1-2 2H5a2 2 0 0 1-2-2V7a2 2 0 0 1 2-2zM9 14l6 6M15 14l-6 6',&#10;                    t: 'Hari libur sekolah wewenang admin',&#10;                    d: 'Korlas bisa menandai libur pada jadwal kelasnya sendiri. Hari libur yang berlaku untuk semua kelas ditambahkan admin.',&#10;                    g: 'Berlaku sekolah',&#10;                },&#10;            ].map((c, idx) =&gt; (&#10;                &lt;Box&#10;                    key={idx}&#10;                    style={{&#10;                        flex: 1,&#10;                        height: '100%',&#10;                        background: '#FFFFFF',&#10;                        borderRadius: 16,&#10;                        boxShadow: '0 4px 20px rgba(0,0,0,0.08)',&#10;                        padding: 24,&#10;                        borderTop: '8px solid #AFC440',&#10;                    }}&#10;                &gt;&#10;                    &lt;Box&#10;                        style={{&#10;                            width: 60,&#10;                            height: 60,&#10;                            borderRadius: 30,&#10;                            background: 'rgba(81,39,124,0.10)',&#10;                            justifyContent: 'center',&#10;                            alignItems: 'center',&#10;                        }}&#10;                    &gt;&#10;                        &lt;svg width={30} height={30} viewBox='0 0 24 24' xmlns=&quot;http://www.w3.org/2000/svg&quot;&gt;&#10;                            &lt;path&#10;                                fill='none'&#10;                                stroke='#51277C'&#10;                                strokeWidth='2'&#10;                                strokeLinecap='round'&#10;                                strokeLinejoin='round'&#10;                                d={c.d}&#10;                            /&gt;&#10;                        &lt;/svg&gt;&#10;                    &lt;/Box&gt;&#10;&#10;                    &lt;Text&#10;                        style={{&#10;                            marginTop: 16,&#10;                            fontSize: 23,&#10;                            fontWeight: 'bold',&#10;                            color: '#51277C',&#10;                            fontFamily: 'Trebuchet MS',&#10;                            lineHeight: 1.32,&#10;                        }}&#10;                    &gt;&#10;                        {c.t}&#10;                    &lt;/Text&gt;&#10;&#10;                    &lt;Box style={{ marginTop: 12, width: 44, height: 3, borderRadius: 2, background: '#AFC440' }} /&gt;&#10;&#10;                    &lt;Text&#10;                        style={{&#10;                            marginTop: 12,&#10;                            fontSize: 17,&#10;                            color: '#6B6478',&#10;                            fontFamily: 'Verdana',&#10;                            lineHeight: 1.5,&#10;                        }}&#10;                    &gt;&#10;                        {c.d}&#10;                    &lt;/Text&gt;&#10;&#10;                    &lt;Box style={{ marginTop: 'auto' }}&gt;&#10;                        &lt;Text&#10;                            style={{&#10;                                fontSize: 16,&#10;                                color: '#51277C',&#10;                                fontFamily: 'Verdana',&#10;                                fontWeight: 'bold',&#10;                            }}&#10;                        &gt;&#10;                            {c.g}&#10;                        &lt;/Text&gt;&#10;                    &lt;/Box&gt;&#10;                &lt;/Box&gt;&#10;            ))}&#10;        &lt;/Box&gt;&#10;&#10;        {/* simpulan */}&#10;        &lt;Box&#10;            style={{&#10;                marginTop: 14,&#10;                height: 46,&#10;                background: '#51277C',&#10;                borderRadius: 14,&#10;                justifyContent: 'center',&#10;                alignItems: 'center',&#10;            }}&#10;        &gt;&#10;            &lt;Text&#10;                style={{&#10;                    fontSize: 19,&#10;                    color: '#FFFFFF',&#10;                    fontFamily: 'Verdana',&#10;                    fontWeight: 'bold',&#10;                }}&#10;            &gt;&#10;                Intinya: susun, tentukan petugas, kunci, lalu terbitkan.&#10;            &lt;/Text&gt;&#10;        &lt;/Box&gt;&#10;    &lt;/Box&gt;&#10;&#10;    {/* ── C · bilah kaki ── */}&#10;    &lt;Box&#10;        style={{&#10;            height: 40,&#10;            flexDirection: 'row',&#10;            alignItems: 'center',&#10;            justifyContent: 'space-between',&#10;        }}&#10;    &gt;&#10;        &lt;Text style={{ fontSize: 14, color: '#6B6478', fontFamily: 'Verdana' }}&gt;&#10;            Pizza Snack Play · Panduan Korlas &amp;amp; Admin&#10;        &lt;/Text&gt;&#10;        &lt;Text style={{ fontSize: 14, color: '#6B6478', fontFamily: 'Verdana' }}&gt;15 / 16&lt;/Text&gt;&#10;    &lt;/Box&gt;&#10;&lt;/Slide&gt;&#10;"/>
+        <p:cNvPr id="122" name=""/>
         <p:cNvGrpSpPr/>
         <p:nvPr/>
       </p:nvGrpSpPr>
@@ -5444,7 +6267,7 @@
       </p:grpSpPr>
       <p:sp>
         <p:nvSpPr>
-          <p:cNvPr id="103" name=""/>
+          <p:cNvPr id="123" name=""/>
           <p:cNvSpPr/>
           <p:nvPr/>
         </p:nvSpPr>
@@ -5463,12 +6286,15 @@
         </p:spPr>
         <p:txBody>
           <a:bodyPr/>
-          <a:p/>
-        </p:txBody>
-      </p:sp>
-      <p:sp>
-        <p:nvSpPr>
-          <p:cNvPr id="104" name="" descr="{&quot;isTemplate&quot;:true,&quot;type&quot;:&quot;text&quot;}"/>
+          <a:p>
+            <a:pPr/>
+            <a:endParaRPr/>
+          </a:p>
+        </p:txBody>
+      </p:sp>
+      <p:sp>
+        <p:nvSpPr>
+          <p:cNvPr id="124" name="" descr="{&quot;isTemplate&quot;:true,&quot;type&quot;:&quot;text&quot;}"/>
           <p:cNvSpPr txBox="1"/>
           <p:nvPr/>
         </p:nvSpPr>
@@ -5503,7 +6329,7 @@
       </p:sp>
       <p:sp>
         <p:nvSpPr>
-          <p:cNvPr id="105" name=""/>
+          <p:cNvPr id="125" name=""/>
           <p:cNvSpPr/>
           <p:nvPr/>
         </p:nvSpPr>
@@ -5524,12 +6350,15 @@
         </p:spPr>
         <p:txBody>
           <a:bodyPr/>
-          <a:p/>
-        </p:txBody>
-      </p:sp>
-      <p:sp>
-        <p:nvSpPr>
-          <p:cNvPr id="106" name=""/>
+          <a:p>
+            <a:pPr/>
+            <a:endParaRPr/>
+          </a:p>
+        </p:txBody>
+      </p:sp>
+      <p:sp>
+        <p:nvSpPr>
+          <p:cNvPr id="126" name=""/>
           <p:cNvSpPr/>
           <p:nvPr/>
         </p:nvSpPr>
@@ -5557,12 +6386,15 @@
         </p:spPr>
         <p:txBody>
           <a:bodyPr/>
-          <a:p/>
-        </p:txBody>
-      </p:sp>
-      <p:sp>
-        <p:nvSpPr>
-          <p:cNvPr id="107" name=""/>
+          <a:p>
+            <a:pPr/>
+            <a:endParaRPr/>
+          </a:p>
+        </p:txBody>
+      </p:sp>
+      <p:sp>
+        <p:nvSpPr>
+          <p:cNvPr id="127" name=""/>
           <p:cNvSpPr/>
           <p:nvPr/>
         </p:nvSpPr>
@@ -5614,12 +6446,15 @@
         </p:spPr>
         <p:txBody>
           <a:bodyPr/>
-          <a:p/>
-        </p:txBody>
-      </p:sp>
-      <p:sp>
-        <p:nvSpPr>
-          <p:cNvPr id="108" name=""/>
+          <a:p>
+            <a:pPr/>
+            <a:endParaRPr/>
+          </a:p>
+        </p:txBody>
+      </p:sp>
+      <p:sp>
+        <p:nvSpPr>
+          <p:cNvPr id="128" name=""/>
           <p:cNvSpPr/>
           <p:nvPr/>
         </p:nvSpPr>
@@ -5642,12 +6477,15 @@
         </p:spPr>
         <p:txBody>
           <a:bodyPr/>
-          <a:p/>
+          <a:p>
+            <a:pPr/>
+            <a:endParaRPr/>
+          </a:p>
         </p:txBody>
       </p:sp>
       <p:pic>
         <p:nvPicPr>
-          <p:cNvPr id="109" name=""/>
+          <p:cNvPr id="129" name=""/>
           <p:cNvPicPr>
             <a:picLocks noChangeAspect="1"/>
           </p:cNvPicPr>
@@ -5678,7 +6516,7 @@
       </p:pic>
       <p:sp>
         <p:nvSpPr>
-          <p:cNvPr id="110" name="" descr="{&quot;isTemplate&quot;:true,&quot;type&quot;:&quot;text&quot;}"/>
+          <p:cNvPr id="130" name="" descr="{&quot;isTemplate&quot;:true,&quot;type&quot;:&quot;text&quot;}"/>
           <p:cNvSpPr txBox="1"/>
           <p:nvPr/>
         </p:nvSpPr>
@@ -5715,7 +6553,7 @@
       </p:sp>
       <p:sp>
         <p:nvSpPr>
-          <p:cNvPr id="111" name=""/>
+          <p:cNvPr id="131" name=""/>
           <p:cNvSpPr/>
           <p:nvPr/>
         </p:nvSpPr>
@@ -5736,12 +6574,15 @@
         </p:spPr>
         <p:txBody>
           <a:bodyPr/>
-          <a:p/>
-        </p:txBody>
-      </p:sp>
-      <p:sp>
-        <p:nvSpPr>
-          <p:cNvPr id="112" name="" descr="{&quot;isTemplate&quot;:true,&quot;type&quot;:&quot;text&quot;}"/>
+          <a:p>
+            <a:pPr/>
+            <a:endParaRPr/>
+          </a:p>
+        </p:txBody>
+      </p:sp>
+      <p:sp>
+        <p:nvSpPr>
+          <p:cNvPr id="132" name="" descr="{&quot;isTemplate&quot;:true,&quot;type&quot;:&quot;text&quot;}"/>
           <p:cNvSpPr txBox="1"/>
           <p:nvPr/>
         </p:nvSpPr>
@@ -5778,7 +6619,7 @@
       </p:sp>
       <p:sp>
         <p:nvSpPr>
-          <p:cNvPr id="113" name="" descr="{&quot;isTemplate&quot;:true,&quot;type&quot;:&quot;text&quot;}"/>
+          <p:cNvPr id="133" name="" descr="{&quot;isTemplate&quot;:true,&quot;type&quot;:&quot;text&quot;}"/>
           <p:cNvSpPr txBox="1"/>
           <p:nvPr/>
         </p:nvSpPr>
@@ -5813,7 +6654,7 @@
       </p:sp>
       <p:sp>
         <p:nvSpPr>
-          <p:cNvPr id="114" name=""/>
+          <p:cNvPr id="134" name=""/>
           <p:cNvSpPr/>
           <p:nvPr/>
         </p:nvSpPr>
@@ -5841,12 +6682,15 @@
         </p:spPr>
         <p:txBody>
           <a:bodyPr/>
-          <a:p/>
-        </p:txBody>
-      </p:sp>
-      <p:sp>
-        <p:nvSpPr>
-          <p:cNvPr id="115" name=""/>
+          <a:p>
+            <a:pPr/>
+            <a:endParaRPr/>
+          </a:p>
+        </p:txBody>
+      </p:sp>
+      <p:sp>
+        <p:nvSpPr>
+          <p:cNvPr id="135" name=""/>
           <p:cNvSpPr/>
           <p:nvPr/>
         </p:nvSpPr>
@@ -5898,12 +6742,15 @@
         </p:spPr>
         <p:txBody>
           <a:bodyPr/>
-          <a:p/>
-        </p:txBody>
-      </p:sp>
-      <p:sp>
-        <p:nvSpPr>
-          <p:cNvPr id="116" name=""/>
+          <a:p>
+            <a:pPr/>
+            <a:endParaRPr/>
+          </a:p>
+        </p:txBody>
+      </p:sp>
+      <p:sp>
+        <p:nvSpPr>
+          <p:cNvPr id="136" name=""/>
           <p:cNvSpPr/>
           <p:nvPr/>
         </p:nvSpPr>
@@ -5926,12 +6773,15 @@
         </p:spPr>
         <p:txBody>
           <a:bodyPr/>
-          <a:p/>
+          <a:p>
+            <a:pPr/>
+            <a:endParaRPr/>
+          </a:p>
         </p:txBody>
       </p:sp>
       <p:pic>
         <p:nvPicPr>
-          <p:cNvPr id="117" name=""/>
+          <p:cNvPr id="137" name=""/>
           <p:cNvPicPr>
             <a:picLocks noChangeAspect="1"/>
           </p:cNvPicPr>
@@ -5962,7 +6812,7 @@
       </p:pic>
       <p:sp>
         <p:nvSpPr>
-          <p:cNvPr id="118" name="" descr="{&quot;isTemplate&quot;:true,&quot;type&quot;:&quot;text&quot;}"/>
+          <p:cNvPr id="138" name="" descr="{&quot;isTemplate&quot;:true,&quot;type&quot;:&quot;text&quot;}"/>
           <p:cNvSpPr txBox="1"/>
           <p:nvPr/>
         </p:nvSpPr>
@@ -5999,7 +6849,7 @@
       </p:sp>
       <p:sp>
         <p:nvSpPr>
-          <p:cNvPr id="119" name=""/>
+          <p:cNvPr id="139" name=""/>
           <p:cNvSpPr/>
           <p:nvPr/>
         </p:nvSpPr>
@@ -6020,12 +6870,15 @@
         </p:spPr>
         <p:txBody>
           <a:bodyPr/>
-          <a:p/>
-        </p:txBody>
-      </p:sp>
-      <p:sp>
-        <p:nvSpPr>
-          <p:cNvPr id="120" name="" descr="{&quot;isTemplate&quot;:true,&quot;type&quot;:&quot;text&quot;}"/>
+          <a:p>
+            <a:pPr/>
+            <a:endParaRPr/>
+          </a:p>
+        </p:txBody>
+      </p:sp>
+      <p:sp>
+        <p:nvSpPr>
+          <p:cNvPr id="140" name="" descr="{&quot;isTemplate&quot;:true,&quot;type&quot;:&quot;text&quot;}"/>
           <p:cNvSpPr txBox="1"/>
           <p:nvPr/>
         </p:nvSpPr>
@@ -6062,7 +6915,7 @@
       </p:sp>
       <p:sp>
         <p:nvSpPr>
-          <p:cNvPr id="121" name="" descr="{&quot;isTemplate&quot;:true,&quot;type&quot;:&quot;text&quot;}"/>
+          <p:cNvPr id="141" name="" descr="{&quot;isTemplate&quot;:true,&quot;type&quot;:&quot;text&quot;}"/>
           <p:cNvSpPr txBox="1"/>
           <p:nvPr/>
         </p:nvSpPr>
@@ -6097,7 +6950,7 @@
       </p:sp>
       <p:sp>
         <p:nvSpPr>
-          <p:cNvPr id="122" name=""/>
+          <p:cNvPr id="142" name=""/>
           <p:cNvSpPr/>
           <p:nvPr/>
         </p:nvSpPr>
@@ -6125,12 +6978,15 @@
         </p:spPr>
         <p:txBody>
           <a:bodyPr/>
-          <a:p/>
-        </p:txBody>
-      </p:sp>
-      <p:sp>
-        <p:nvSpPr>
-          <p:cNvPr id="123" name=""/>
+          <a:p>
+            <a:pPr/>
+            <a:endParaRPr/>
+          </a:p>
+        </p:txBody>
+      </p:sp>
+      <p:sp>
+        <p:nvSpPr>
+          <p:cNvPr id="143" name=""/>
           <p:cNvSpPr/>
           <p:nvPr/>
         </p:nvSpPr>
@@ -6182,12 +7038,15 @@
         </p:spPr>
         <p:txBody>
           <a:bodyPr/>
-          <a:p/>
-        </p:txBody>
-      </p:sp>
-      <p:sp>
-        <p:nvSpPr>
-          <p:cNvPr id="124" name=""/>
+          <a:p>
+            <a:pPr/>
+            <a:endParaRPr/>
+          </a:p>
+        </p:txBody>
+      </p:sp>
+      <p:sp>
+        <p:nvSpPr>
+          <p:cNvPr id="144" name=""/>
           <p:cNvSpPr/>
           <p:nvPr/>
         </p:nvSpPr>
@@ -6210,12 +7069,15 @@
         </p:spPr>
         <p:txBody>
           <a:bodyPr/>
-          <a:p/>
+          <a:p>
+            <a:pPr/>
+            <a:endParaRPr/>
+          </a:p>
         </p:txBody>
       </p:sp>
       <p:pic>
         <p:nvPicPr>
-          <p:cNvPr id="125" name=""/>
+          <p:cNvPr id="145" name=""/>
           <p:cNvPicPr>
             <a:picLocks noChangeAspect="1"/>
           </p:cNvPicPr>
@@ -6246,7 +7108,7 @@
       </p:pic>
       <p:sp>
         <p:nvSpPr>
-          <p:cNvPr id="126" name="" descr="{&quot;isTemplate&quot;:true,&quot;type&quot;:&quot;text&quot;}"/>
+          <p:cNvPr id="146" name="" descr="{&quot;isTemplate&quot;:true,&quot;type&quot;:&quot;text&quot;}"/>
           <p:cNvSpPr txBox="1"/>
           <p:nvPr/>
         </p:nvSpPr>
@@ -6283,7 +7145,7 @@
       </p:sp>
       <p:sp>
         <p:nvSpPr>
-          <p:cNvPr id="127" name=""/>
+          <p:cNvPr id="147" name=""/>
           <p:cNvSpPr/>
           <p:nvPr/>
         </p:nvSpPr>
@@ -6304,12 +7166,15 @@
         </p:spPr>
         <p:txBody>
           <a:bodyPr/>
-          <a:p/>
-        </p:txBody>
-      </p:sp>
-      <p:sp>
-        <p:nvSpPr>
-          <p:cNvPr id="128" name="" descr="{&quot;isTemplate&quot;:true,&quot;type&quot;:&quot;text&quot;}"/>
+          <a:p>
+            <a:pPr/>
+            <a:endParaRPr/>
+          </a:p>
+        </p:txBody>
+      </p:sp>
+      <p:sp>
+        <p:nvSpPr>
+          <p:cNvPr id="148" name="" descr="{&quot;isTemplate&quot;:true,&quot;type&quot;:&quot;text&quot;}"/>
           <p:cNvSpPr txBox="1"/>
           <p:nvPr/>
         </p:nvSpPr>
@@ -6346,7 +7211,7 @@
       </p:sp>
       <p:sp>
         <p:nvSpPr>
-          <p:cNvPr id="129" name="" descr="{&quot;isTemplate&quot;:true,&quot;type&quot;:&quot;text&quot;}"/>
+          <p:cNvPr id="149" name="" descr="{&quot;isTemplate&quot;:true,&quot;type&quot;:&quot;text&quot;}"/>
           <p:cNvSpPr txBox="1"/>
           <p:nvPr/>
         </p:nvSpPr>
@@ -6381,7 +7246,7 @@
       </p:sp>
       <p:sp>
         <p:nvSpPr>
-          <p:cNvPr id="130" name=""/>
+          <p:cNvPr id="150" name=""/>
           <p:cNvSpPr/>
           <p:nvPr/>
         </p:nvSpPr>
@@ -6409,12 +7274,15 @@
         </p:spPr>
         <p:txBody>
           <a:bodyPr/>
-          <a:p/>
-        </p:txBody>
-      </p:sp>
-      <p:sp>
-        <p:nvSpPr>
-          <p:cNvPr id="131" name=""/>
+          <a:p>
+            <a:pPr/>
+            <a:endParaRPr/>
+          </a:p>
+        </p:txBody>
+      </p:sp>
+      <p:sp>
+        <p:nvSpPr>
+          <p:cNvPr id="151" name=""/>
           <p:cNvSpPr/>
           <p:nvPr/>
         </p:nvSpPr>
@@ -6466,12 +7334,15 @@
         </p:spPr>
         <p:txBody>
           <a:bodyPr/>
-          <a:p/>
-        </p:txBody>
-      </p:sp>
-      <p:sp>
-        <p:nvSpPr>
-          <p:cNvPr id="132" name=""/>
+          <a:p>
+            <a:pPr/>
+            <a:endParaRPr/>
+          </a:p>
+        </p:txBody>
+      </p:sp>
+      <p:sp>
+        <p:nvSpPr>
+          <p:cNvPr id="152" name=""/>
           <p:cNvSpPr/>
           <p:nvPr/>
         </p:nvSpPr>
@@ -6494,12 +7365,15 @@
         </p:spPr>
         <p:txBody>
           <a:bodyPr/>
-          <a:p/>
+          <a:p>
+            <a:pPr/>
+            <a:endParaRPr/>
+          </a:p>
         </p:txBody>
       </p:sp>
       <p:pic>
         <p:nvPicPr>
-          <p:cNvPr id="133" name=""/>
+          <p:cNvPr id="153" name=""/>
           <p:cNvPicPr>
             <a:picLocks noChangeAspect="1"/>
           </p:cNvPicPr>
@@ -6530,7 +7404,7 @@
       </p:pic>
       <p:sp>
         <p:nvSpPr>
-          <p:cNvPr id="134" name="" descr="{&quot;isTemplate&quot;:true,&quot;type&quot;:&quot;text&quot;}"/>
+          <p:cNvPr id="154" name="" descr="{&quot;isTemplate&quot;:true,&quot;type&quot;:&quot;text&quot;}"/>
           <p:cNvSpPr txBox="1"/>
           <p:nvPr/>
         </p:nvSpPr>
@@ -6567,7 +7441,7 @@
       </p:sp>
       <p:sp>
         <p:nvSpPr>
-          <p:cNvPr id="135" name=""/>
+          <p:cNvPr id="155" name=""/>
           <p:cNvSpPr/>
           <p:nvPr/>
         </p:nvSpPr>
@@ -6588,12 +7462,15 @@
         </p:spPr>
         <p:txBody>
           <a:bodyPr/>
-          <a:p/>
-        </p:txBody>
-      </p:sp>
-      <p:sp>
-        <p:nvSpPr>
-          <p:cNvPr id="136" name="" descr="{&quot;isTemplate&quot;:true,&quot;type&quot;:&quot;text&quot;}"/>
+          <a:p>
+            <a:pPr/>
+            <a:endParaRPr/>
+          </a:p>
+        </p:txBody>
+      </p:sp>
+      <p:sp>
+        <p:nvSpPr>
+          <p:cNvPr id="156" name="" descr="{&quot;isTemplate&quot;:true,&quot;type&quot;:&quot;text&quot;}"/>
           <p:cNvSpPr txBox="1"/>
           <p:nvPr/>
         </p:nvSpPr>
@@ -6630,7 +7507,7 @@
       </p:sp>
       <p:sp>
         <p:nvSpPr>
-          <p:cNvPr id="137" name="" descr="{&quot;isTemplate&quot;:true,&quot;type&quot;:&quot;text&quot;}"/>
+          <p:cNvPr id="157" name="" descr="{&quot;isTemplate&quot;:true,&quot;type&quot;:&quot;text&quot;}"/>
           <p:cNvSpPr txBox="1"/>
           <p:nvPr/>
         </p:nvSpPr>
@@ -6665,7 +7542,7 @@
       </p:sp>
       <p:sp>
         <p:nvSpPr>
-          <p:cNvPr id="138" name=""/>
+          <p:cNvPr id="158" name=""/>
           <p:cNvSpPr/>
           <p:nvPr/>
         </p:nvSpPr>
@@ -6686,12 +7563,15 @@
         </p:spPr>
         <p:txBody>
           <a:bodyPr/>
-          <a:p/>
-        </p:txBody>
-      </p:sp>
-      <p:sp>
-        <p:nvSpPr>
-          <p:cNvPr id="139" name="" descr="{&quot;isTemplate&quot;:true,&quot;type&quot;:&quot;text&quot;}"/>
+          <a:p>
+            <a:pPr/>
+            <a:endParaRPr/>
+          </a:p>
+        </p:txBody>
+      </p:sp>
+      <p:sp>
+        <p:nvSpPr>
+          <p:cNvPr id="159" name="" descr="{&quot;isTemplate&quot;:true,&quot;type&quot;:&quot;text&quot;}"/>
           <p:cNvSpPr txBox="1"/>
           <p:nvPr/>
         </p:nvSpPr>
@@ -6726,7 +7606,7 @@
       </p:sp>
       <p:sp>
         <p:nvSpPr>
-          <p:cNvPr id="140" name="" descr="{&quot;isTemplate&quot;:true,&quot;type&quot;:&quot;text&quot;}"/>
+          <p:cNvPr id="160" name="" descr="{&quot;isTemplate&quot;:true,&quot;type&quot;:&quot;text&quot;}"/>
           <p:cNvSpPr txBox="1"/>
           <p:nvPr/>
         </p:nvSpPr>
@@ -6761,7 +7641,7 @@
       </p:sp>
       <p:sp>
         <p:nvSpPr>
-          <p:cNvPr id="141" name="" descr="{&quot;isTemplate&quot;:true,&quot;type&quot;:&quot;text&quot;}"/>
+          <p:cNvPr id="161" name="" descr="{&quot;isTemplate&quot;:true,&quot;type&quot;:&quot;text&quot;}"/>
           <p:cNvSpPr txBox="1"/>
           <p:nvPr/>
         </p:nvSpPr>
@@ -6788,7 +7668,7 @@
                 <a:latin typeface="Verdana"/>
                 <a:ea typeface="Verdana"/>
               </a:rPr>
-              <a:t>15 / 16</a:t>
+              <a:t>16 / 17</a:t>
             </a:r>
             <a:endParaRPr/>
           </a:p>
@@ -6799,12 +7679,12 @@
 </p:sld>
 </file>
 
-<file path=ppt/slides/slide16.xml><?xml version="1.0" encoding="utf-8"?>
+<file path=ppt/slides/slide17.xml><?xml version="1.0" encoding="utf-8"?>
 <p:sld xmlns:p="http://schemas.openxmlformats.org/presentationml/2006/main" xmlns:a="http://schemas.openxmlformats.org/drawingml/2006/main" xmlns:asvg="http://schemas.microsoft.com/office/drawing/2016/SVG/main" xmlns:r="http://schemas.openxmlformats.org/officeDocument/2006/relationships" xmlns:mc="http://schemas.openxmlformats.org/markup-compatibility/2006" mc:Ignorable="asvg">
   <p:cSld>
     <p:spTree>
       <p:nvGrpSpPr>
-        <p:cNvPr id="142" name="" descr="&lt;Slide&#10;    style={{&#10;        width: '1280px',&#10;        height: '720px',&#10;        background: '#FAF7F2',&#10;        justifyContent: 'center',&#10;        alignItems: 'center',&#10;        position: 'relative',&#10;        overflow: 'hidden',&#10;    }}&#10;&gt;&#10;    &lt;Box&#10;        style={{&#10;            position: 'absolute',&#10;            top: 90,&#10;            width: 520,&#10;            height: 520,&#10;            borderRadius: 260,&#10;            background: 'linear-gradient(135deg, #51277C 0%, #7A45A8 100%)',&#10;            opacity: 0.10,&#10;        }}&#10;    /&gt;&#10;    &lt;Box&#10;        style={{&#10;            position: 'absolute',&#10;            bottom: -80,&#10;            left: -80,&#10;            width: 320,&#10;            height: 320,&#10;            borderRadius: 160,&#10;            background: 'linear-gradient(135deg, #AFC440 0%, #F3B26C 100%)',&#10;            opacity: 0.18,&#10;        }}&#10;    /&gt;&#10;&#10;    &lt;Box style={{ position: 'relative', zIndex: 1, alignItems: 'center', paddingLeft: 72, paddingRight: 72 }}&gt;&#10;        &lt;Image src=&quot;assets/app_logo.png&quot; style={{ width: 200, height: 194, objectFit: 'contain' }} /&gt;&#10;&#10;        &lt;Text&#10;            style={{&#10;                marginTop: 26,&#10;                fontSize: 60,&#10;                fontWeight: 'bold',&#10;                color: '#51277C',&#10;                fontFamily: 'Trebuchet MS',&#10;                lineHeight: 1.15,&#10;            }}&#10;        &gt;&#10;            Terima kasih&#10;        &lt;/Text&gt;&#10;&#10;        &lt;Box style={{ marginTop: 18, width: 96, height: 7, borderRadius: 4, background: '#AFC440' }} /&gt;&#10;&#10;        &lt;Text&#10;            style={{&#10;                marginTop: 22,&#10;                fontSize: 22,&#10;                color: '#2A2333',&#10;                fontFamily: 'Verdana',&#10;                lineHeight: 1.5,&#10;                textAlign: 'center',&#10;            }}&#10;        &gt;&#10;            Coba tempel jadwal dari teks sekolah minggu ini, lalu periksa Laporannya.&#10;        &lt;/Text&gt;&#10;&#10;        &lt;Text&#10;            style={{&#10;                marginTop: 14,&#10;                fontSize: 19,&#10;                color: '#6B6478',&#10;                fontFamily: 'Verdana',&#10;                lineHeight: 1.5,&#10;                textAlign: 'center',&#10;            }}&#10;        &gt;&#10;            Ada yang tidak beres? Sampaikan kepada admin sekolah.&#10;        &lt;/Text&gt;&#10;&#10;        &lt;Box&#10;            style={{&#10;                marginTop: 26,&#10;                flexDirection: 'row',&#10;                alignItems: 'center',&#10;                gap: 12,&#10;                background: '#F3B26C',&#10;                borderRadius: 999,&#10;                paddingTop: 13,&#10;                paddingBottom: 13,&#10;                paddingLeft: 28,&#10;                paddingRight: 30,&#10;            }}&#10;        &gt;&#10;            &lt;svg width={22} height={22} viewBox=&quot;0 0 576 512&quot; xmlns=&quot;http://www.w3.org/2000/svg&quot;&gt;&lt;path fill=&quot;#51277C&quot; d=&quot;M316.9 18C311.6 7 300.4 0 288.1 0s-23.4 7-28.8 18L195 150.3 51.4 171.5c-12 1.8-22 10.2-25.7 21.7s-.7 24.2 7.9 32.7L137.8 329 113.2 474.7c-2 12 3 24.2 12.9 31.3s23 8 33.8 2.3l128.3-68.5 128.3 68.5c10.8 5.7 23.9 4.9 33.8-2.3s14.9-19.3 12.9-31.3L438.5 329 542.7 225.9c8.6-8.5 11.7-21.2 7.9-32.7s-13.7-19.9-25.7-21.7L381.2 150.3 316.9 18z&quot; /&gt;&lt;/svg&gt;&#10;            &lt;Text style={{ fontSize: 19, color: '#51277C', fontFamily: 'Trebuchet MS', fontWeight: 'bold' }}&gt;&#10;                Pizza Snack Play&#10;            &lt;/Text&gt;&#10;        &lt;/Box&gt;&#10;    &lt;/Box&gt;&#10;&lt;/Slide&gt;&#10;"/>
+        <p:cNvPr id="162" name=""/>
         <p:cNvGrpSpPr/>
         <p:nvPr/>
       </p:nvGrpSpPr>
@@ -6818,7 +7698,7 @@
       </p:grpSpPr>
       <p:sp>
         <p:nvSpPr>
-          <p:cNvPr id="143" name=""/>
+          <p:cNvPr id="163" name=""/>
           <p:cNvSpPr/>
           <p:nvPr/>
         </p:nvSpPr>
@@ -6837,12 +7717,15 @@
         </p:spPr>
         <p:txBody>
           <a:bodyPr/>
-          <a:p/>
-        </p:txBody>
-      </p:sp>
-      <p:sp>
-        <p:nvSpPr>
-          <p:cNvPr id="144" name=""/>
+          <a:p>
+            <a:pPr/>
+            <a:endParaRPr/>
+          </a:p>
+        </p:txBody>
+      </p:sp>
+      <p:sp>
+        <p:nvSpPr>
+          <p:cNvPr id="164" name=""/>
           <p:cNvSpPr/>
           <p:nvPr/>
         </p:nvSpPr>
@@ -6875,12 +7758,15 @@
         </p:spPr>
         <p:txBody>
           <a:bodyPr/>
-          <a:p/>
-        </p:txBody>
-      </p:sp>
-      <p:sp>
-        <p:nvSpPr>
-          <p:cNvPr id="145" name=""/>
+          <a:p>
+            <a:pPr/>
+            <a:endParaRPr/>
+          </a:p>
+        </p:txBody>
+      </p:sp>
+      <p:sp>
+        <p:nvSpPr>
+          <p:cNvPr id="165" name=""/>
           <p:cNvSpPr/>
           <p:nvPr/>
         </p:nvSpPr>
@@ -6939,12 +7825,15 @@
         </p:spPr>
         <p:txBody>
           <a:bodyPr/>
-          <a:p/>
+          <a:p>
+            <a:pPr/>
+            <a:endParaRPr/>
+          </a:p>
         </p:txBody>
       </p:sp>
       <p:pic>
         <p:nvPicPr>
-          <p:cNvPr id="146" name=""/>
+          <p:cNvPr id="166" name=""/>
           <p:cNvPicPr>
             <a:picLocks noChangeAspect="1"/>
           </p:cNvPicPr>
@@ -6970,7 +7859,7 @@
       </p:pic>
       <p:sp>
         <p:nvSpPr>
-          <p:cNvPr id="147" name="" descr="{&quot;isTemplate&quot;:true,&quot;type&quot;:&quot;text&quot;}"/>
+          <p:cNvPr id="167" name="" descr="{&quot;isTemplate&quot;:true,&quot;type&quot;:&quot;text&quot;}"/>
           <p:cNvSpPr txBox="1"/>
           <p:nvPr/>
         </p:nvSpPr>
@@ -7005,7 +7894,7 @@
       </p:sp>
       <p:sp>
         <p:nvSpPr>
-          <p:cNvPr id="148" name=""/>
+          <p:cNvPr id="168" name=""/>
           <p:cNvSpPr/>
           <p:nvPr/>
         </p:nvSpPr>
@@ -7026,12 +7915,15 @@
         </p:spPr>
         <p:txBody>
           <a:bodyPr/>
-          <a:p/>
-        </p:txBody>
-      </p:sp>
-      <p:sp>
-        <p:nvSpPr>
-          <p:cNvPr id="149" name="" descr="{&quot;isTemplate&quot;:true,&quot;type&quot;:&quot;text&quot;}"/>
+          <a:p>
+            <a:pPr/>
+            <a:endParaRPr/>
+          </a:p>
+        </p:txBody>
+      </p:sp>
+      <p:sp>
+        <p:nvSpPr>
+          <p:cNvPr id="169" name="" descr="{&quot;isTemplate&quot;:true,&quot;type&quot;:&quot;text&quot;}"/>
           <p:cNvSpPr txBox="1"/>
           <p:nvPr/>
         </p:nvSpPr>
@@ -7066,7 +7958,7 @@
       </p:sp>
       <p:sp>
         <p:nvSpPr>
-          <p:cNvPr id="150" name="" descr="{&quot;isTemplate&quot;:true,&quot;type&quot;:&quot;text&quot;}"/>
+          <p:cNvPr id="170" name="" descr="{&quot;isTemplate&quot;:true,&quot;type&quot;:&quot;text&quot;}"/>
           <p:cNvSpPr txBox="1"/>
           <p:nvPr/>
         </p:nvSpPr>
@@ -7101,7 +7993,7 @@
       </p:sp>
       <p:sp>
         <p:nvSpPr>
-          <p:cNvPr id="151" name=""/>
+          <p:cNvPr id="171" name=""/>
           <p:cNvSpPr/>
           <p:nvPr/>
         </p:nvSpPr>
@@ -7122,12 +8014,15 @@
         </p:spPr>
         <p:txBody>
           <a:bodyPr/>
-          <a:p/>
+          <a:p>
+            <a:pPr/>
+            <a:endParaRPr/>
+          </a:p>
         </p:txBody>
       </p:sp>
       <p:pic>
         <p:nvPicPr>
-          <p:cNvPr id="152" name=""/>
+          <p:cNvPr id="172" name=""/>
           <p:cNvPicPr>
             <a:picLocks noChangeAspect="1"/>
           </p:cNvPicPr>
@@ -7158,7 +8053,7 @@
       </p:pic>
       <p:sp>
         <p:nvSpPr>
-          <p:cNvPr id="153" name="" descr="{&quot;isTemplate&quot;:true,&quot;type&quot;:&quot;text&quot;}"/>
+          <p:cNvPr id="173" name="" descr="{&quot;isTemplate&quot;:true,&quot;type&quot;:&quot;text&quot;}"/>
           <p:cNvSpPr txBox="1"/>
           <p:nvPr/>
         </p:nvSpPr>
@@ -7201,7 +8096,7 @@
   <p:cSld>
     <p:spTree>
       <p:nvGrpSpPr>
-        <p:cNvPr id="154" name="" descr="&lt;Slide&#10;    style={{&#10;        width: '1280px',&#10;        height: '720px',&#10;        background: '#FAF7F2',&#10;        paddingTop: 20,&#10;        paddingBottom: 20,&#10;        paddingLeft: 64,&#10;        paddingRight: 64,&#10;    }}&#10;&gt;&#10;    {/* ── A · blok judul ── */}&#10;    &lt;Box style={{ height: 110, justifyContent: 'center' }}&gt;&#10;        &lt;Text&#10;            style={{&#10;                fontSize: 34,&#10;                fontWeight: 'bold',&#10;                color: '#51277C',&#10;                fontFamily: 'Trebuchet MS',&#10;                lineHeight: 1.3,&#10;            }}&#10;        &gt;&#10;            Isi panduan ini&#10;        &lt;/Text&gt;&#10;        &lt;Box style={{ marginTop: 10, width: 72, height: 6, borderRadius: 3, background: '#51277C' }} /&gt;&#10;    &lt;/Box&gt;&#10;&#10;    {/* ── B · area konten ── */}&#10;    &lt;Box style={{ height: 530, flexDirection: 'row', gap: 28 }}&gt;&#10;        &lt;Box&#10;            style={{&#10;                width: '32%',&#10;                height: '100%',&#10;                background: 'linear-gradient(135deg, #51277C 0%, #7A45A8 100%)',&#10;                borderRadius: 18,&#10;                padding: 28,&#10;                justifyContent: 'space-between',&#10;            }}&#10;        &gt;&#10;            &lt;Box&gt;&#10;                &lt;Text&#10;                    style={{&#10;                        fontSize: 96,&#10;                        fontWeight: 'bold',&#10;                        color: '#FFFFFF',&#10;                        fontFamily: 'Trebuchet MS',&#10;                        lineHeight: 1,&#10;                    }}&#10;                &gt;&#10;                    4&#10;                &lt;/Text&gt;&#10;                &lt;Text&#10;                    style={{&#10;                        marginTop: 6,&#10;                        fontSize: 24,&#10;                        fontWeight: 'bold',&#10;                        color: '#F3B26C',&#10;                        fontFamily: 'Trebuchet MS',&#10;                    }}&#10;                &gt;&#10;                    bagian&#10;                &lt;/Text&gt;&#10;            &lt;/Box&gt;&#10;            &lt;Text&#10;                style={{&#10;                    fontSize: 17,&#10;                    color: 'rgba(255,255,255,0.88)',&#10;                    fontFamily: 'Verdana',&#10;                    lineHeight: 1.5,&#10;                }}&#10;            &gt;&#10;                Bagian 3 dan 4 yang dipakai setiap bulan, menjelang jadwal baru.&#10;            &lt;/Text&gt;&#10;        &lt;/Box&gt;&#10;&#10;        &lt;Box style={{ width: '68%', height: '100%', justifyContent: 'space-between' }}&gt;&#10;            {[&#10;                {&#10;                    n: '01',&#10;                    t: 'Peran Anda',&#10;                    d: 'Tiga tugas korlas, sesuai urutan mengerjakannya.',&#10;                    p: '4',&#10;                },&#10;                {&#10;                    n: '02',&#10;                    t: 'Akun &amp; wewenang',&#10;                    d: 'Apa yang boleh korlas, dan mana wewenang admin.',&#10;                    p: '6',&#10;                },&#10;                {&#10;                    n: '03',&#10;                    t: 'Menyusun jadwal',&#10;                    d: 'Isi menu, salin Sepekan, atau tempel teks sekolah.',&#10;                    p: '8–10',&#10;                },&#10;                {&#10;                    n: '04',&#10;                    t: 'Kunci, publikasi &amp; laporan',&#10;                    d: 'Urutan yang tidak bisa dibalik, aksi massal, lalu rekap piket.',&#10;                    p: '12–15',&#10;                },&#10;            ].map((it, i) =&gt; (&#10;                &lt;Box&#10;                    key={i}&#10;                    style={{&#10;                        flexDirection: 'row',&#10;                        alignItems: 'center',&#10;                        gap: 20,&#10;                        height: 122,&#10;                        background: '#FFFFFF',&#10;                        borderRadius: 16,&#10;                        boxShadow: '0 4px 20px rgba(0,0,0,0.08)',&#10;                        paddingLeft: 24,&#10;                        paddingRight: 28,&#10;                        borderLeft: '8px solid #AFC440',&#10;                    }}&#10;                &gt;&#10;                    &lt;Box&#10;                        style={{&#10;                            width: 56,&#10;                            height: 56,&#10;                            borderRadius: 28,&#10;                            background: 'rgba(81,39,124,0.09)',&#10;                            justifyContent: 'center',&#10;                            alignItems: 'center',&#10;                        }}&#10;                    &gt;&#10;                        &lt;Text&#10;                            style={{&#10;                                fontSize: 24,&#10;                                fontWeight: 'bold',&#10;                                color: '#51277C',&#10;                                fontFamily: 'Trebuchet MS',&#10;                            }}&#10;                        &gt;&#10;                            {it.n}&#10;                        &lt;/Text&gt;&#10;                    &lt;/Box&gt;&#10;                    &lt;Box style={{ flex: 1 }}&gt;&#10;                        &lt;Text&#10;                            style={{&#10;                                fontSize: 25,&#10;                                fontWeight: 'bold',&#10;                                color: '#2A2333',&#10;                                fontFamily: 'Trebuchet MS',&#10;                                lineHeight: 1.3,&#10;                            }}&#10;                        &gt;&#10;                            {it.t}&#10;                        &lt;/Text&gt;&#10;                        &lt;Text&#10;                            style={{&#10;                                marginTop: 5,&#10;                                fontSize: 18,&#10;                                color: '#6B6478',&#10;                                fontFamily: 'Verdana',&#10;                                lineHeight: 1.45,&#10;                            }}&#10;                        &gt;&#10;                            {it.d}&#10;                        &lt;/Text&gt;&#10;                    &lt;/Box&gt;&#10;                    &lt;Text&#10;                        style={{&#10;                            fontSize: 17,&#10;                            color: '#51277C',&#10;                            fontFamily: 'Verdana',&#10;                            fontWeight: 'bold',&#10;                        }}&#10;                    &gt;&#10;                        {it.p}&#10;                    &lt;/Text&gt;&#10;                &lt;/Box&gt;&#10;            ))}&#10;        &lt;/Box&gt;&#10;    &lt;/Box&gt;&#10;&#10;    {/* ── C · bilah kaki ── */}&#10;    &lt;Box&#10;        style={{&#10;            height: 40,&#10;            flexDirection: 'row',&#10;            alignItems: 'center',&#10;            justifyContent: 'space-between',&#10;        }}&#10;    &gt;&#10;        &lt;Text style={{ fontSize: 14, color: '#6B6478', fontFamily: 'Verdana' }}&gt;&#10;            Pizza Snack Play · Panduan Korlas &amp;amp; Admin&#10;        &lt;/Text&gt;&#10;        &lt;Text style={{ fontSize: 14, color: '#6B6478', fontFamily: 'Verdana' }}&gt;02 / 16&lt;/Text&gt;&#10;    &lt;/Box&gt;&#10;&lt;/Slide&gt;&#10;"/>
+        <p:cNvPr id="174" name=""/>
         <p:cNvGrpSpPr/>
         <p:nvPr/>
       </p:nvGrpSpPr>
@@ -7215,7 +8110,7 @@
       </p:grpSpPr>
       <p:sp>
         <p:nvSpPr>
-          <p:cNvPr id="155" name=""/>
+          <p:cNvPr id="175" name=""/>
           <p:cNvSpPr/>
           <p:nvPr/>
         </p:nvSpPr>
@@ -7234,12 +8129,15 @@
         </p:spPr>
         <p:txBody>
           <a:bodyPr/>
-          <a:p/>
-        </p:txBody>
-      </p:sp>
-      <p:sp>
-        <p:nvSpPr>
-          <p:cNvPr id="156" name="" descr="{&quot;isTemplate&quot;:true,&quot;type&quot;:&quot;text&quot;}"/>
+          <a:p>
+            <a:pPr/>
+            <a:endParaRPr/>
+          </a:p>
+        </p:txBody>
+      </p:sp>
+      <p:sp>
+        <p:nvSpPr>
+          <p:cNvPr id="176" name="" descr="{&quot;isTemplate&quot;:true,&quot;type&quot;:&quot;text&quot;}"/>
           <p:cNvSpPr txBox="1"/>
           <p:nvPr/>
         </p:nvSpPr>
@@ -7274,7 +8172,7 @@
       </p:sp>
       <p:sp>
         <p:nvSpPr>
-          <p:cNvPr id="157" name=""/>
+          <p:cNvPr id="177" name=""/>
           <p:cNvSpPr/>
           <p:nvPr/>
         </p:nvSpPr>
@@ -7295,12 +8193,15 @@
         </p:spPr>
         <p:txBody>
           <a:bodyPr/>
-          <a:p/>
-        </p:txBody>
-      </p:sp>
-      <p:sp>
-        <p:nvSpPr>
-          <p:cNvPr id="158" name=""/>
+          <a:p>
+            <a:pPr/>
+            <a:endParaRPr/>
+          </a:p>
+        </p:txBody>
+      </p:sp>
+      <p:sp>
+        <p:nvSpPr>
+          <p:cNvPr id="178" name=""/>
           <p:cNvSpPr/>
           <p:nvPr/>
         </p:nvSpPr>
@@ -7329,12 +8230,15 @@
         </p:spPr>
         <p:txBody>
           <a:bodyPr/>
-          <a:p/>
-        </p:txBody>
-      </p:sp>
-      <p:sp>
-        <p:nvSpPr>
-          <p:cNvPr id="159" name="" descr="{&quot;isTemplate&quot;:true,&quot;type&quot;:&quot;text&quot;}"/>
+          <a:p>
+            <a:pPr/>
+            <a:endParaRPr/>
+          </a:p>
+        </p:txBody>
+      </p:sp>
+      <p:sp>
+        <p:nvSpPr>
+          <p:cNvPr id="179" name="" descr="{&quot;isTemplate&quot;:true,&quot;type&quot;:&quot;text&quot;}"/>
           <p:cNvSpPr txBox="1"/>
           <p:nvPr/>
         </p:nvSpPr>
@@ -7369,7 +8273,7 @@
       </p:sp>
       <p:sp>
         <p:nvSpPr>
-          <p:cNvPr id="160" name="" descr="{&quot;isTemplate&quot;:true,&quot;type&quot;:&quot;text&quot;}"/>
+          <p:cNvPr id="180" name="" descr="{&quot;isTemplate&quot;:true,&quot;type&quot;:&quot;text&quot;}"/>
           <p:cNvSpPr txBox="1"/>
           <p:nvPr/>
         </p:nvSpPr>
@@ -7404,7 +8308,7 @@
       </p:sp>
       <p:sp>
         <p:nvSpPr>
-          <p:cNvPr id="161" name="" descr="{&quot;isTemplate&quot;:true,&quot;type&quot;:&quot;text&quot;}"/>
+          <p:cNvPr id="181" name="" descr="{&quot;isTemplate&quot;:true,&quot;type&quot;:&quot;text&quot;}"/>
           <p:cNvSpPr txBox="1"/>
           <p:nvPr/>
         </p:nvSpPr>
@@ -7443,7 +8347,7 @@
       </p:sp>
       <p:sp>
         <p:nvSpPr>
-          <p:cNvPr id="162" name=""/>
+          <p:cNvPr id="182" name=""/>
           <p:cNvSpPr/>
           <p:nvPr/>
         </p:nvSpPr>
@@ -7471,12 +8375,15 @@
         </p:spPr>
         <p:txBody>
           <a:bodyPr/>
-          <a:p/>
-        </p:txBody>
-      </p:sp>
-      <p:sp>
-        <p:nvSpPr>
-          <p:cNvPr id="163" name=""/>
+          <a:p>
+            <a:pPr/>
+            <a:endParaRPr/>
+          </a:p>
+        </p:txBody>
+      </p:sp>
+      <p:sp>
+        <p:nvSpPr>
+          <p:cNvPr id="183" name=""/>
           <p:cNvSpPr/>
           <p:nvPr/>
         </p:nvSpPr>
@@ -7528,12 +8435,15 @@
         </p:spPr>
         <p:txBody>
           <a:bodyPr/>
-          <a:p/>
-        </p:txBody>
-      </p:sp>
-      <p:sp>
-        <p:nvSpPr>
-          <p:cNvPr id="164" name=""/>
+          <a:p>
+            <a:pPr/>
+            <a:endParaRPr/>
+          </a:p>
+        </p:txBody>
+      </p:sp>
+      <p:sp>
+        <p:nvSpPr>
+          <p:cNvPr id="184" name=""/>
           <p:cNvSpPr/>
           <p:nvPr/>
         </p:nvSpPr>
@@ -7556,12 +8466,15 @@
         </p:spPr>
         <p:txBody>
           <a:bodyPr/>
-          <a:p/>
-        </p:txBody>
-      </p:sp>
-      <p:sp>
-        <p:nvSpPr>
-          <p:cNvPr id="165" name="" descr="{&quot;isTemplate&quot;:true,&quot;type&quot;:&quot;text&quot;}"/>
+          <a:p>
+            <a:pPr/>
+            <a:endParaRPr/>
+          </a:p>
+        </p:txBody>
+      </p:sp>
+      <p:sp>
+        <p:nvSpPr>
+          <p:cNvPr id="185" name="" descr="{&quot;isTemplate&quot;:true,&quot;type&quot;:&quot;text&quot;}"/>
           <p:cNvSpPr txBox="1"/>
           <p:nvPr/>
         </p:nvSpPr>
@@ -7596,7 +8509,7 @@
       </p:sp>
       <p:sp>
         <p:nvSpPr>
-          <p:cNvPr id="166" name="" descr="{&quot;isTemplate&quot;:true,&quot;type&quot;:&quot;text&quot;}"/>
+          <p:cNvPr id="186" name="" descr="{&quot;isTemplate&quot;:true,&quot;type&quot;:&quot;text&quot;}"/>
           <p:cNvSpPr txBox="1"/>
           <p:nvPr/>
         </p:nvSpPr>
@@ -7631,7 +8544,7 @@
       </p:sp>
       <p:sp>
         <p:nvSpPr>
-          <p:cNvPr id="167" name="" descr="{&quot;isTemplate&quot;:true,&quot;type&quot;:&quot;text&quot;}"/>
+          <p:cNvPr id="187" name="" descr="{&quot;isTemplate&quot;:true,&quot;type&quot;:&quot;text&quot;}"/>
           <p:cNvSpPr txBox="1"/>
           <p:nvPr/>
         </p:nvSpPr>
@@ -7666,7 +8579,7 @@
       </p:sp>
       <p:sp>
         <p:nvSpPr>
-          <p:cNvPr id="168" name="" descr="{&quot;isTemplate&quot;:true,&quot;type&quot;:&quot;text&quot;}"/>
+          <p:cNvPr id="188" name="" descr="{&quot;isTemplate&quot;:true,&quot;type&quot;:&quot;text&quot;}"/>
           <p:cNvSpPr txBox="1"/>
           <p:nvPr/>
         </p:nvSpPr>
@@ -7701,7 +8614,7 @@
       </p:sp>
       <p:sp>
         <p:nvSpPr>
-          <p:cNvPr id="169" name=""/>
+          <p:cNvPr id="189" name=""/>
           <p:cNvSpPr/>
           <p:nvPr/>
         </p:nvSpPr>
@@ -7729,12 +8642,15 @@
         </p:spPr>
         <p:txBody>
           <a:bodyPr/>
-          <a:p/>
-        </p:txBody>
-      </p:sp>
-      <p:sp>
-        <p:nvSpPr>
-          <p:cNvPr id="170" name=""/>
+          <a:p>
+            <a:pPr/>
+            <a:endParaRPr/>
+          </a:p>
+        </p:txBody>
+      </p:sp>
+      <p:sp>
+        <p:nvSpPr>
+          <p:cNvPr id="190" name=""/>
           <p:cNvSpPr/>
           <p:nvPr/>
         </p:nvSpPr>
@@ -7786,12 +8702,15 @@
         </p:spPr>
         <p:txBody>
           <a:bodyPr/>
-          <a:p/>
-        </p:txBody>
-      </p:sp>
-      <p:sp>
-        <p:nvSpPr>
-          <p:cNvPr id="171" name=""/>
+          <a:p>
+            <a:pPr/>
+            <a:endParaRPr/>
+          </a:p>
+        </p:txBody>
+      </p:sp>
+      <p:sp>
+        <p:nvSpPr>
+          <p:cNvPr id="191" name=""/>
           <p:cNvSpPr/>
           <p:nvPr/>
         </p:nvSpPr>
@@ -7814,12 +8733,15 @@
         </p:spPr>
         <p:txBody>
           <a:bodyPr/>
-          <a:p/>
-        </p:txBody>
-      </p:sp>
-      <p:sp>
-        <p:nvSpPr>
-          <p:cNvPr id="172" name="" descr="{&quot;isTemplate&quot;:true,&quot;type&quot;:&quot;text&quot;}"/>
+          <a:p>
+            <a:pPr/>
+            <a:endParaRPr/>
+          </a:p>
+        </p:txBody>
+      </p:sp>
+      <p:sp>
+        <p:nvSpPr>
+          <p:cNvPr id="192" name="" descr="{&quot;isTemplate&quot;:true,&quot;type&quot;:&quot;text&quot;}"/>
           <p:cNvSpPr txBox="1"/>
           <p:nvPr/>
         </p:nvSpPr>
@@ -7854,14 +8776,14 @@
       </p:sp>
       <p:sp>
         <p:nvSpPr>
-          <p:cNvPr id="173" name="" descr="{&quot;isTemplate&quot;:true,&quot;type&quot;:&quot;text&quot;}"/>
+          <p:cNvPr id="193" name="" descr="{&quot;isTemplate&quot;:true,&quot;type&quot;:&quot;text&quot;}"/>
           <p:cNvSpPr txBox="1"/>
           <p:nvPr/>
         </p:nvSpPr>
         <p:spPr>
           <a:xfrm rot="0" flipH="0" flipV="0">
             <a:off x="5334000" y="2752725"/>
-            <a:ext cx="5667375" cy="371475"/>
+            <a:ext cx="5438775" cy="371475"/>
           </a:xfrm>
           <a:prstGeom prst="rect"/>
         </p:spPr>
@@ -7889,14 +8811,14 @@
       </p:sp>
       <p:sp>
         <p:nvSpPr>
-          <p:cNvPr id="174" name="" descr="{&quot;isTemplate&quot;:true,&quot;type&quot;:&quot;text&quot;}"/>
+          <p:cNvPr id="194" name="" descr="{&quot;isTemplate&quot;:true,&quot;type&quot;:&quot;text&quot;}"/>
           <p:cNvSpPr txBox="1"/>
           <p:nvPr/>
         </p:nvSpPr>
         <p:spPr>
           <a:xfrm rot="0" flipH="0" flipV="0">
             <a:off x="5334000" y="3171825"/>
-            <a:ext cx="5667375" cy="304800"/>
+            <a:ext cx="5438775" cy="304800"/>
           </a:xfrm>
           <a:prstGeom prst="rect"/>
         </p:spPr>
@@ -7916,22 +8838,22 @@
                 <a:latin typeface="Verdana"/>
                 <a:ea typeface="Verdana"/>
               </a:rPr>
-              <a:t>Apa yang boleh korlas, dan mana wewenang admin.</a:t>
-            </a:r>
-            <a:endParaRPr/>
-          </a:p>
-        </p:txBody>
-      </p:sp>
-      <p:sp>
-        <p:nvSpPr>
-          <p:cNvPr id="175" name="" descr="{&quot;isTemplate&quot;:true,&quot;type&quot;:&quot;text&quot;}"/>
+              <a:t>Batas wewenang, dan cara mengurus akun sekaligus.</a:t>
+            </a:r>
+            <a:endParaRPr/>
+          </a:p>
+        </p:txBody>
+      </p:sp>
+      <p:sp>
+        <p:nvSpPr>
+          <p:cNvPr id="195" name="" descr="{&quot;isTemplate&quot;:true,&quot;type&quot;:&quot;text&quot;}"/>
           <p:cNvSpPr txBox="1"/>
           <p:nvPr/>
         </p:nvSpPr>
         <p:spPr>
           <a:xfrm rot="0" flipH="0" flipV="0">
-            <a:off x="11191875" y="3019425"/>
-            <a:ext cx="123825" cy="200025"/>
+            <a:off x="10963275" y="3019425"/>
+            <a:ext cx="352425" cy="200025"/>
           </a:xfrm>
           <a:prstGeom prst="rect"/>
         </p:spPr>
@@ -7951,15 +8873,15 @@
                 <a:latin typeface="Verdana"/>
                 <a:ea typeface="Verdana"/>
               </a:rPr>
-              <a:t>6</a:t>
-            </a:r>
-            <a:endParaRPr/>
-          </a:p>
-        </p:txBody>
-      </p:sp>
-      <p:sp>
-        <p:nvSpPr>
-          <p:cNvPr id="176" name=""/>
+              <a:t>6–7</a:t>
+            </a:r>
+            <a:endParaRPr/>
+          </a:p>
+        </p:txBody>
+      </p:sp>
+      <p:sp>
+        <p:nvSpPr>
+          <p:cNvPr id="196" name=""/>
           <p:cNvSpPr/>
           <p:nvPr/>
         </p:nvSpPr>
@@ -7987,12 +8909,15 @@
         </p:spPr>
         <p:txBody>
           <a:bodyPr/>
-          <a:p/>
-        </p:txBody>
-      </p:sp>
-      <p:sp>
-        <p:nvSpPr>
-          <p:cNvPr id="177" name=""/>
+          <a:p>
+            <a:pPr/>
+            <a:endParaRPr/>
+          </a:p>
+        </p:txBody>
+      </p:sp>
+      <p:sp>
+        <p:nvSpPr>
+          <p:cNvPr id="197" name=""/>
           <p:cNvSpPr/>
           <p:nvPr/>
         </p:nvSpPr>
@@ -8044,12 +8969,15 @@
         </p:spPr>
         <p:txBody>
           <a:bodyPr/>
-          <a:p/>
-        </p:txBody>
-      </p:sp>
-      <p:sp>
-        <p:nvSpPr>
-          <p:cNvPr id="178" name=""/>
+          <a:p>
+            <a:pPr/>
+            <a:endParaRPr/>
+          </a:p>
+        </p:txBody>
+      </p:sp>
+      <p:sp>
+        <p:nvSpPr>
+          <p:cNvPr id="198" name=""/>
           <p:cNvSpPr/>
           <p:nvPr/>
         </p:nvSpPr>
@@ -8072,12 +9000,15 @@
         </p:spPr>
         <p:txBody>
           <a:bodyPr/>
-          <a:p/>
-        </p:txBody>
-      </p:sp>
-      <p:sp>
-        <p:nvSpPr>
-          <p:cNvPr id="179" name="" descr="{&quot;isTemplate&quot;:true,&quot;type&quot;:&quot;text&quot;}"/>
+          <a:p>
+            <a:pPr/>
+            <a:endParaRPr/>
+          </a:p>
+        </p:txBody>
+      </p:sp>
+      <p:sp>
+        <p:nvSpPr>
+          <p:cNvPr id="199" name="" descr="{&quot;isTemplate&quot;:true,&quot;type&quot;:&quot;text&quot;}"/>
           <p:cNvSpPr txBox="1"/>
           <p:nvPr/>
         </p:nvSpPr>
@@ -8112,7 +9043,7 @@
       </p:sp>
       <p:sp>
         <p:nvSpPr>
-          <p:cNvPr id="180" name="" descr="{&quot;isTemplate&quot;:true,&quot;type&quot;:&quot;text&quot;}"/>
+          <p:cNvPr id="200" name="" descr="{&quot;isTemplate&quot;:true,&quot;type&quot;:&quot;text&quot;}"/>
           <p:cNvSpPr txBox="1"/>
           <p:nvPr/>
         </p:nvSpPr>
@@ -8147,7 +9078,7 @@
       </p:sp>
       <p:sp>
         <p:nvSpPr>
-          <p:cNvPr id="181" name="" descr="{&quot;isTemplate&quot;:true,&quot;type&quot;:&quot;text&quot;}"/>
+          <p:cNvPr id="201" name="" descr="{&quot;isTemplate&quot;:true,&quot;type&quot;:&quot;text&quot;}"/>
           <p:cNvSpPr txBox="1"/>
           <p:nvPr/>
         </p:nvSpPr>
@@ -8182,7 +9113,7 @@
       </p:sp>
       <p:sp>
         <p:nvSpPr>
-          <p:cNvPr id="182" name="" descr="{&quot;isTemplate&quot;:true,&quot;type&quot;:&quot;text&quot;}"/>
+          <p:cNvPr id="202" name="" descr="{&quot;isTemplate&quot;:true,&quot;type&quot;:&quot;text&quot;}"/>
           <p:cNvSpPr txBox="1"/>
           <p:nvPr/>
         </p:nvSpPr>
@@ -8209,15 +9140,15 @@
                 <a:latin typeface="Verdana"/>
                 <a:ea typeface="Verdana"/>
               </a:rPr>
-              <a:t>8–10</a:t>
-            </a:r>
-            <a:endParaRPr/>
-          </a:p>
-        </p:txBody>
-      </p:sp>
-      <p:sp>
-        <p:nvSpPr>
-          <p:cNvPr id="183" name=""/>
+              <a:t>9–11</a:t>
+            </a:r>
+            <a:endParaRPr/>
+          </a:p>
+        </p:txBody>
+      </p:sp>
+      <p:sp>
+        <p:nvSpPr>
+          <p:cNvPr id="203" name=""/>
           <p:cNvSpPr/>
           <p:nvPr/>
         </p:nvSpPr>
@@ -8245,12 +9176,15 @@
         </p:spPr>
         <p:txBody>
           <a:bodyPr/>
-          <a:p/>
-        </p:txBody>
-      </p:sp>
-      <p:sp>
-        <p:nvSpPr>
-          <p:cNvPr id="184" name=""/>
+          <a:p>
+            <a:pPr/>
+            <a:endParaRPr/>
+          </a:p>
+        </p:txBody>
+      </p:sp>
+      <p:sp>
+        <p:nvSpPr>
+          <p:cNvPr id="204" name=""/>
           <p:cNvSpPr/>
           <p:nvPr/>
         </p:nvSpPr>
@@ -8302,12 +9236,15 @@
         </p:spPr>
         <p:txBody>
           <a:bodyPr/>
-          <a:p/>
-        </p:txBody>
-      </p:sp>
-      <p:sp>
-        <p:nvSpPr>
-          <p:cNvPr id="185" name=""/>
+          <a:p>
+            <a:pPr/>
+            <a:endParaRPr/>
+          </a:p>
+        </p:txBody>
+      </p:sp>
+      <p:sp>
+        <p:nvSpPr>
+          <p:cNvPr id="205" name=""/>
           <p:cNvSpPr/>
           <p:nvPr/>
         </p:nvSpPr>
@@ -8330,12 +9267,15 @@
         </p:spPr>
         <p:txBody>
           <a:bodyPr/>
-          <a:p/>
-        </p:txBody>
-      </p:sp>
-      <p:sp>
-        <p:nvSpPr>
-          <p:cNvPr id="186" name="" descr="{&quot;isTemplate&quot;:true,&quot;type&quot;:&quot;text&quot;}"/>
+          <a:p>
+            <a:pPr/>
+            <a:endParaRPr/>
+          </a:p>
+        </p:txBody>
+      </p:sp>
+      <p:sp>
+        <p:nvSpPr>
+          <p:cNvPr id="206" name="" descr="{&quot;isTemplate&quot;:true,&quot;type&quot;:&quot;text&quot;}"/>
           <p:cNvSpPr txBox="1"/>
           <p:nvPr/>
         </p:nvSpPr>
@@ -8370,7 +9310,7 @@
       </p:sp>
       <p:sp>
         <p:nvSpPr>
-          <p:cNvPr id="187" name="" descr="{&quot;isTemplate&quot;:true,&quot;type&quot;:&quot;text&quot;}"/>
+          <p:cNvPr id="207" name="" descr="{&quot;isTemplate&quot;:true,&quot;type&quot;:&quot;text&quot;}"/>
           <p:cNvSpPr txBox="1"/>
           <p:nvPr/>
         </p:nvSpPr>
@@ -8405,7 +9345,7 @@
       </p:sp>
       <p:sp>
         <p:nvSpPr>
-          <p:cNvPr id="188" name="" descr="{&quot;isTemplate&quot;:true,&quot;type&quot;:&quot;text&quot;}"/>
+          <p:cNvPr id="208" name="" descr="{&quot;isTemplate&quot;:true,&quot;type&quot;:&quot;text&quot;}"/>
           <p:cNvSpPr txBox="1"/>
           <p:nvPr/>
         </p:nvSpPr>
@@ -8442,7 +9382,7 @@
       </p:sp>
       <p:sp>
         <p:nvSpPr>
-          <p:cNvPr id="189" name="" descr="{&quot;isTemplate&quot;:true,&quot;type&quot;:&quot;text&quot;}"/>
+          <p:cNvPr id="209" name="" descr="{&quot;isTemplate&quot;:true,&quot;type&quot;:&quot;text&quot;}"/>
           <p:cNvSpPr txBox="1"/>
           <p:nvPr/>
         </p:nvSpPr>
@@ -8469,15 +9409,15 @@
                 <a:latin typeface="Verdana"/>
                 <a:ea typeface="Verdana"/>
               </a:rPr>
-              <a:t>12–15</a:t>
-            </a:r>
-            <a:endParaRPr/>
-          </a:p>
-        </p:txBody>
-      </p:sp>
-      <p:sp>
-        <p:nvSpPr>
-          <p:cNvPr id="190" name="" descr="{&quot;isTemplate&quot;:true,&quot;type&quot;:&quot;text&quot;}"/>
+              <a:t>13–16</a:t>
+            </a:r>
+            <a:endParaRPr/>
+          </a:p>
+        </p:txBody>
+      </p:sp>
+      <p:sp>
+        <p:nvSpPr>
+          <p:cNvPr id="210" name="" descr="{&quot;isTemplate&quot;:true,&quot;type&quot;:&quot;text&quot;}"/>
           <p:cNvSpPr txBox="1"/>
           <p:nvPr/>
         </p:nvSpPr>
@@ -8512,7 +9452,7 @@
       </p:sp>
       <p:sp>
         <p:nvSpPr>
-          <p:cNvPr id="191" name="" descr="{&quot;isTemplate&quot;:true,&quot;type&quot;:&quot;text&quot;}"/>
+          <p:cNvPr id="211" name="" descr="{&quot;isTemplate&quot;:true,&quot;type&quot;:&quot;text&quot;}"/>
           <p:cNvSpPr txBox="1"/>
           <p:nvPr/>
         </p:nvSpPr>
@@ -8539,7 +9479,7 @@
                 <a:latin typeface="Verdana"/>
                 <a:ea typeface="Verdana"/>
               </a:rPr>
-              <a:t>02 / 16</a:t>
+              <a:t>02 / 17</a:t>
             </a:r>
             <a:endParaRPr/>
           </a:p>
@@ -8555,7 +9495,7 @@
   <p:cSld>
     <p:spTree>
       <p:nvGrpSpPr>
-        <p:cNvPr id="192" name="" descr="&lt;Slide&#10;    style={{&#10;        width: '1280px',&#10;        height: '720px',&#10;        background: 'linear-gradient(135deg, #51277C 0%, #7A45A8 100%)',&#10;        paddingTop: 60,&#10;        paddingBottom: 60,&#10;        paddingLeft: 72,&#10;        paddingRight: 72,&#10;        justifyContent: 'center',&#10;        position: 'relative',&#10;        overflow: 'hidden',&#10;    }}&#10;&gt;&#10;    &lt;Box&#10;        style={{&#10;            position: 'absolute',&#10;            top: -100,&#10;            right: -60,&#10;            width: 420,&#10;            height: 420,&#10;            borderRadius: 210,&#10;            background: '#AFC440',&#10;            opacity: 0.14,&#10;        }}&#10;    /&gt;&#10;    &lt;Box style={{ position: 'absolute', bottom: 46, right: 78, opacity: 0.16 }}&gt;&#10;        &lt;svg width={240} height={190} viewBox='0 0 240 190'&gt;&#10;            &lt;rect x='10' y='26' width='220' height='156' rx='16' fill='none' stroke='#FFFFFF' strokeWidth='6' /&gt;&#10;            &lt;path d='M10 62h220' stroke='#FFFFFF' strokeWidth='6' /&gt;&#10;            &lt;path d='M60 8v30M180 8v30' stroke='#FFFFFF' strokeWidth='8' strokeLinecap='round' /&gt;&#10;            &lt;rect x='42' y='84' width='34' height='26' rx='6' fill='#FFFFFF' /&gt;&#10;            &lt;rect x='102' y='84' width='34' height='26' rx='6' fill='#FFFFFF' /&gt;&#10;            &lt;rect x='162' y='84' width='34' height='26' rx='6' fill='#FFFFFF' /&gt;&#10;            &lt;rect x='42' y='128' width='34' height='26' rx='6' fill='#FFFFFF' /&gt;&#10;            &lt;rect x='102' y='128' width='34' height='26' rx='6' fill='#F3B26C' /&gt;&#10;        &lt;/svg&gt;&#10;    &lt;/Box&gt;&#10;&#10;    &lt;Box style={{ position: 'relative', zIndex: 1, width: '62%' }}&gt;&#10;        &lt;Box style={{ flexDirection: 'row', alignItems: 'center', gap: 14, alignSelf: 'flex-start' }}&gt;&#10;            &lt;Text&#10;                style={{&#10;                    fontSize: 76,&#10;                    fontWeight: 'bold',&#10;                    color: '#F3B26C',&#10;                    fontFamily: 'Trebuchet MS',&#10;                    lineHeight: 1,&#10;                }}&#10;            &gt;&#10;                01&#10;            &lt;/Text&gt;&#10;            &lt;Box style={{ width: 3, height: 52, background: 'rgba(255,255,255,0.45)' }} /&gt;&#10;            &lt;Text style={{ fontSize: 19, color: 'rgba(255,255,255,0.8)', fontFamily: 'Verdana' }}&gt;&#10;                Bagian pertama&#10;            &lt;/Text&gt;&#10;        &lt;/Box&gt;&#10;&#10;        &lt;Text&#10;            style={{&#10;                marginTop: 26,&#10;                fontSize: 60,&#10;                fontWeight: 'bold',&#10;                color: '#FFFFFF',&#10;                fontFamily: 'Trebuchet MS',&#10;                lineHeight: 1.15,&#10;            }}&#10;        &gt;&#10;            Peran Anda{'\n'}di kelas&#10;        &lt;/Text&gt;&#10;&#10;        &lt;Text&#10;            style={{&#10;                marginTop: 24,&#10;                fontSize: 22,&#10;                color: 'rgba(255,255,255,0.88)',&#10;                fontFamily: 'Verdana',&#10;                lineHeight: 1.5,&#10;            }}&#10;        &gt;&#10;            Korlas mengurus jadwal satu kelas. Mulai dari yang paling sering dikerjakan.&#10;        &lt;/Text&gt;&#10;    &lt;/Box&gt;&#10;&lt;/Slide&gt;&#10;"/>
+        <p:cNvPr id="212" name=""/>
         <p:cNvGrpSpPr/>
         <p:nvPr/>
       </p:nvGrpSpPr>
@@ -8569,7 +9509,7 @@
       </p:grpSpPr>
       <p:sp>
         <p:nvSpPr>
-          <p:cNvPr id="193" name=""/>
+          <p:cNvPr id="213" name=""/>
           <p:cNvSpPr/>
           <p:nvPr/>
         </p:nvSpPr>
@@ -8596,12 +9536,15 @@
         </p:spPr>
         <p:txBody>
           <a:bodyPr/>
-          <a:p/>
-        </p:txBody>
-      </p:sp>
-      <p:sp>
-        <p:nvSpPr>
-          <p:cNvPr id="194" name=""/>
+          <a:p>
+            <a:pPr/>
+            <a:endParaRPr/>
+          </a:p>
+        </p:txBody>
+      </p:sp>
+      <p:sp>
+        <p:nvSpPr>
+          <p:cNvPr id="214" name=""/>
           <p:cNvSpPr/>
           <p:nvPr/>
         </p:nvSpPr>
@@ -8992,12 +9935,15 @@
         </p:spPr>
         <p:txBody>
           <a:bodyPr/>
-          <a:p/>
+          <a:p>
+            <a:pPr/>
+            <a:endParaRPr/>
+          </a:p>
         </p:txBody>
       </p:sp>
       <p:pic>
         <p:nvPicPr>
-          <p:cNvPr id="195" name=""/>
+          <p:cNvPr id="215" name=""/>
           <p:cNvPicPr>
             <a:picLocks noChangeAspect="1"/>
           </p:cNvPicPr>
@@ -9029,7 +9975,7 @@
       </p:pic>
       <p:sp>
         <p:nvSpPr>
-          <p:cNvPr id="196" name="" descr="{&quot;isTemplate&quot;:true,&quot;type&quot;:&quot;text&quot;}"/>
+          <p:cNvPr id="216" name="" descr="{&quot;isTemplate&quot;:true,&quot;type&quot;:&quot;text&quot;}"/>
           <p:cNvSpPr txBox="1"/>
           <p:nvPr/>
         </p:nvSpPr>
@@ -9064,7 +10010,7 @@
       </p:sp>
       <p:sp>
         <p:nvSpPr>
-          <p:cNvPr id="197" name=""/>
+          <p:cNvPr id="217" name=""/>
           <p:cNvSpPr/>
           <p:nvPr/>
         </p:nvSpPr>
@@ -9085,12 +10031,15 @@
         </p:spPr>
         <p:txBody>
           <a:bodyPr/>
-          <a:p/>
-        </p:txBody>
-      </p:sp>
-      <p:sp>
-        <p:nvSpPr>
-          <p:cNvPr id="198" name="" descr="{&quot;isTemplate&quot;:true,&quot;type&quot;:&quot;text&quot;}"/>
+          <a:p>
+            <a:pPr/>
+            <a:endParaRPr/>
+          </a:p>
+        </p:txBody>
+      </p:sp>
+      <p:sp>
+        <p:nvSpPr>
+          <p:cNvPr id="218" name="" descr="{&quot;isTemplate&quot;:true,&quot;type&quot;:&quot;text&quot;}"/>
           <p:cNvSpPr txBox="1"/>
           <p:nvPr/>
         </p:nvSpPr>
@@ -9127,7 +10076,7 @@
       </p:sp>
       <p:sp>
         <p:nvSpPr>
-          <p:cNvPr id="199" name="" descr="{&quot;isTemplate&quot;:true,&quot;type&quot;:&quot;text&quot;}"/>
+          <p:cNvPr id="219" name="" descr="{&quot;isTemplate&quot;:true,&quot;type&quot;:&quot;text&quot;}"/>
           <p:cNvSpPr txBox="1"/>
           <p:nvPr/>
         </p:nvSpPr>
@@ -9180,7 +10129,7 @@
       </p:sp>
       <p:sp>
         <p:nvSpPr>
-          <p:cNvPr id="200" name="" descr="{&quot;isTemplate&quot;:true,&quot;type&quot;:&quot;text&quot;}"/>
+          <p:cNvPr id="220" name="" descr="{&quot;isTemplate&quot;:true,&quot;type&quot;:&quot;text&quot;}"/>
           <p:cNvSpPr txBox="1"/>
           <p:nvPr/>
         </p:nvSpPr>
@@ -9227,7 +10176,7 @@
   <p:cSld>
     <p:spTree>
       <p:nvGrpSpPr>
-        <p:cNvPr id="201" name="" descr="&lt;Slide&#10;    style={{&#10;        width: '1280px',&#10;        height: '720px',&#10;        background: '#FAF7F2',&#10;        paddingTop: 20,&#10;        paddingBottom: 20,&#10;        paddingLeft: 64,&#10;        paddingRight: 64,&#10;    }}&#10;&gt;&#10;    {/* ── A · blok judul ── */}&#10;    &lt;Box style={{ height: 110, justifyContent: 'center' }}&gt;&#10;        &lt;Text&#10;            style={{&#10;                fontSize: 34,&#10;                fontWeight: 'bold',&#10;                color: '#51277C',&#10;                fontFamily: 'Trebuchet MS',&#10;                lineHeight: 1.3,&#10;            }}&#10;        &gt;&#10;            Tiga tugas Anda&#10;        &lt;/Text&gt;&#10;        &lt;Box style={{ marginTop: 10, width: 72, height: 6, borderRadius: 3, background: '#51277C' }} /&gt;&#10;    &lt;/Box&gt;&#10;&#10;    {/* ── B · area konten ── */}&#10;    &lt;Box style={{ height: 530, flexDirection: 'row', gap: 30 }}&gt;&#10;        {/* kiri 55% · alur tiga langkah */}&#10;        &lt;Box&#10;            style={{&#10;                width: '55%',&#10;                height: '100%',&#10;                background: 'rgba(81,39,124,0.06)',&#10;                borderRadius: 20,&#10;                justifyContent: 'center',&#10;                alignItems: 'center',&#10;            }}&#10;        &gt;&#10;            &lt;svg width={520} height={430} viewBox='0 0 520 430'&gt;&#10;                {/* langkah 1 */}&#10;                &lt;rect x='14' y='8' width='492' height='112' rx='16' fill='#FFFFFF' stroke='#E6DFD2' strokeWidth='2' /&gt;&#10;                &lt;circle cx='62' cy='64' r='28' fill='#51277C' /&gt;&#10;                &lt;text x='62' y='74' fontFamily='Trebuchet MS' fontSize='28' fontWeight='bold' fill='#FFFFFF' textAnchor='middle'&gt;&#10;                    1&#10;                &lt;/text&gt;&#10;                &lt;text x='112' y='54' fontFamily='Trebuchet MS' fontSize='24' fontWeight='bold' fill='#51277C'&gt;&#10;                    Susun&#10;                &lt;/text&gt;&#10;                &lt;text x='112' y='86' fontFamily='Verdana' fontSize='16' fill='#6B6478'&gt;&#10;                    Menu untuk Senin sampai Jumat&#10;                &lt;/text&gt;&#10;                {/* panah */}&#10;                &lt;path d='M260 126v30' stroke='#AFC440' strokeWidth='5' strokeLinecap='round' /&gt;&#10;                &lt;path d='M250 150l10 12 10-12' fill='none' stroke='#AFC440' strokeWidth='5' strokeLinecap='round' /&gt;&#10;&#10;                {/* langkah 2 */}&#10;                &lt;rect x='14' y='164' width='492' height='112' rx='16' fill='#FFFFFF' stroke='#E6DFD2' strokeWidth='2' /&gt;&#10;                &lt;circle cx='62' cy='220' r='28' fill='#51277C' /&gt;&#10;                &lt;text x='62' y='230' fontFamily='Trebuchet MS' fontSize='28' fontWeight='bold' fill='#FFFFFF' textAnchor='middle'&gt;&#10;                    2&#10;                &lt;/text&gt;&#10;                &lt;text x='112' y='210' fontFamily='Trebuchet MS' fontSize='24' fontWeight='bold' fill='#51277C'&gt;&#10;                    Tentukan petugas&#10;                &lt;/text&gt;&#10;                &lt;text x='112' y='242' fontFamily='Verdana' fontSize='16' fill='#6B6478'&gt;&#10;                    Atau biarkan kosong supaya direbut orang tua&#10;                &lt;/text&gt;&#10;                {/* panah */}&#10;                &lt;path d='M260 282v30' stroke='#AFC440' strokeWidth='5' strokeLinecap='round' /&gt;&#10;                &lt;path d='M250 306l10 12 10-12' fill='none' stroke='#AFC440' strokeWidth='5' strokeLinecap='round' /&gt;&#10;&#10;                {/* langkah 3 */}&#10;                &lt;rect x='14' y='320' width='492' height='104' rx='16' fill='#51277C' /&gt;&#10;                &lt;circle cx='62' cy='372' r='28' fill='#F3B26C' /&gt;&#10;                &lt;text x='62' y='382' fontFamily='Trebuchet MS' fontSize='28' fontWeight='bold' fill='#51277C' textAnchor='middle'&gt;&#10;                    3&#10;                &lt;/text&gt;&#10;                &lt;text x='112' y='362' fontFamily='Trebuchet MS' fontSize='24' fontWeight='bold' fill='#FFFFFF'&gt;&#10;                    Umumkan&#10;                &lt;/text&gt;&#10;                &lt;text x='112' y='394' fontFamily='Verdana' fontSize='16' fill='#EFEAE1'&gt;&#10;                    Kunci lebih dulu, baru terbit ke orang tua&#10;                &lt;/text&gt;&#10;            &lt;/svg&gt;&#10;        &lt;/Box&gt;&#10;&#10;        {/* kanan 45% · tiga keterangan */}&#10;        &lt;Box style={{ width: '45%', height: '100%', justifyContent: 'space-between' }}&gt;&#10;            {[&#10;                {&#10;                    t: 'Susun — isi menunya',&#10;                    d: 'Satu bulan lebih baik dikerjakan sekaligus. Tiga cara: ketik per hari, salin dari minggu lain, atau tempel teks dari sekolah.',&#10;                    g: 'Bagian 3',&#10;                },&#10;                {&#10;                    t: 'Petugas — siapa ambil snack',&#10;                    d: 'Pilih dari daftar siswa kelas Anda; nama orang tuanya terisi sendiri. Dikosongkan pun boleh.',&#10;                    g: 'Bisa dikosongkan',&#10;                },&#10;                {&#10;                    t: 'Umumkan — baru kelihatan',&#10;                    d: 'Sebelum diumumkan, orang tua tidak melihat apa pun. Jadi jangan khawatir kalau belum muncul.',&#10;                    g: 'Bagian 4',&#10;                },&#10;            ].map((it, i) =&gt; (&#10;                &lt;Box&#10;                    key={i}&#10;                    style={{&#10;                        height: 166,&#10;                        background: '#FFFFFF',&#10;                        borderRadius: 16,&#10;                        boxShadow: '0 4px 20px rgba(0,0,0,0.08)',&#10;                        padding: 22,&#10;                        borderLeft: i === 2 ? '8px solid #F3B26C' : '8px solid #AFC440',&#10;                    }}&#10;                &gt;&#10;                    &lt;Text&#10;                        style={{&#10;                            fontSize: 24,&#10;                            fontWeight: 'bold',&#10;                            color: '#51277C',&#10;                            fontFamily: 'Trebuchet MS',&#10;                            lineHeight: 1.3,&#10;                        }}&#10;                    &gt;&#10;                        {it.t}&#10;                    &lt;/Text&gt;&#10;                    &lt;Text&#10;                        style={{&#10;                            marginTop: 10,&#10;                            fontSize: 17,&#10;                            color: '#6B6478',&#10;                            fontFamily: 'Verdana',&#10;                            lineHeight: 1.5,&#10;                        }}&#10;                    &gt;&#10;                        {it.d}&#10;                    &lt;/Text&gt;&#10;                    &lt;Box style={{ marginTop: 'auto' }}&gt;&#10;                        &lt;Text&#10;                            style={{&#10;                                fontSize: 16,&#10;                                color: '#51277C',&#10;                                fontFamily: 'Verdana',&#10;                                fontWeight: 'bold',&#10;                            }}&#10;                        &gt;&#10;                            {it.g}&#10;                        &lt;/Text&gt;&#10;                    &lt;/Box&gt;&#10;                &lt;/Box&gt;&#10;            ))}&#10;        &lt;/Box&gt;&#10;    &lt;/Box&gt;&#10;&#10;    {/* ── C · bilah kaki ── */}&#10;    &lt;Box&#10;        style={{&#10;            height: 40,&#10;            flexDirection: 'row',&#10;            alignItems: 'center',&#10;            justifyContent: 'space-between',&#10;        }}&#10;    &gt;&#10;        &lt;Text style={{ fontSize: 14, color: '#6B6478', fontFamily: 'Verdana' }}&gt;&#10;            Pizza Snack Play · Panduan Korlas &amp;amp; Admin&#10;        &lt;/Text&gt;&#10;        &lt;Text style={{ fontSize: 14, color: '#6B6478', fontFamily: 'Verdana' }}&gt;04 / 16&lt;/Text&gt;&#10;    &lt;/Box&gt;&#10;&lt;/Slide&gt;&#10;"/>
+        <p:cNvPr id="221" name="" descr="&lt;Slide&#10;    style={{&#10;        width: '1280px',&#10;        height: '720px',&#10;        background: '#FAF7F2',&#10;        paddingTop: 20,&#10;        paddingBottom: 20,&#10;        paddingLeft: 64,&#10;        paddingRight: 64,&#10;    }}&#10;&gt;&#10;    {/* ── A · blok judul ── */}&#10;    &lt;Box style={{ height: 110, justifyContent: 'center' }}&gt;&#10;        &lt;Text&#10;            style={{&#10;                fontSize: 34,&#10;                fontWeight: 'bold',&#10;                color: '#51277C',&#10;                fontFamily: 'Trebuchet MS',&#10;                lineHeight: 1.3,&#10;            }}&#10;        &gt;&#10;            Tiga tugas Anda&#10;        &lt;/Text&gt;&#10;        &lt;Box style={{ marginTop: 10, width: 72, height: 6, borderRadius: 3, background: '#51277C' }} /&gt;&#10;    &lt;/Box&gt;&#10;&#10;    {/* ── B · area konten ── */}&#10;    &lt;Box style={{ height: 530, flexDirection: 'row', gap: 30 }}&gt;&#10;        {/* kiri 55% · alur tiga langkah */}&#10;        &lt;Box&#10;            style={{&#10;                width: '55%',&#10;                height: '100%',&#10;                background: 'rgba(81,39,124,0.06)',&#10;                borderRadius: 20,&#10;                justifyContent: 'center',&#10;                alignItems: 'center',&#10;            }}&#10;        &gt;&#10;            &lt;svg width={520} height={430} viewBox='0 0 520 430'&gt;&#10;                {/* langkah 1 */}&#10;                &lt;rect x='14' y='8' width='492' height='112' rx='16' fill='#FFFFFF' stroke='#E6DFD2' strokeWidth='2' /&gt;&#10;                &lt;circle cx='62' cy='64' r='28' fill='#51277C' /&gt;&#10;                &lt;text x='62' y='74' fontFamily='Trebuchet MS' fontSize='28' fontWeight='bold' fill='#FFFFFF' textAnchor='middle'&gt;&#10;                    1&#10;                &lt;/text&gt;&#10;                &lt;text x='112' y='54' fontFamily='Trebuchet MS' fontSize='24' fontWeight='bold' fill='#51277C'&gt;&#10;                    Susun&#10;                &lt;/text&gt;&#10;                &lt;text x='112' y='86' fontFamily='Verdana' fontSize='16' fill='#6B6478'&gt;&#10;                    Menu untuk Senin sampai Jumat&#10;                &lt;/text&gt;&#10;                {/* panah */}&#10;                &lt;path d='M260 126v30' stroke='#AFC440' strokeWidth='5' strokeLinecap='round' /&gt;&#10;                &lt;path d='M250 150l10 12 10-12' fill='none' stroke='#AFC440' strokeWidth='5' strokeLinecap='round' /&gt;&#10;&#10;                {/* langkah 2 */}&#10;                &lt;rect x='14' y='164' width='492' height='112' rx='16' fill='#FFFFFF' stroke='#E6DFD2' strokeWidth='2' /&gt;&#10;                &lt;circle cx='62' cy='220' r='28' fill='#51277C' /&gt;&#10;                &lt;text x='62' y='230' fontFamily='Trebuchet MS' fontSize='28' fontWeight='bold' fill='#FFFFFF' textAnchor='middle'&gt;&#10;                    2&#10;                &lt;/text&gt;&#10;                &lt;text x='112' y='210' fontFamily='Trebuchet MS' fontSize='24' fontWeight='bold' fill='#51277C'&gt;&#10;                    Tentukan petugas&#10;                &lt;/text&gt;&#10;                &lt;text x='112' y='242' fontFamily='Verdana' fontSize='16' fill='#6B6478'&gt;&#10;                    Atau biarkan kosong supaya direbut orang tua&#10;                &lt;/text&gt;&#10;                {/* panah */}&#10;                &lt;path d='M260 282v30' stroke='#AFC440' strokeWidth='5' strokeLinecap='round' /&gt;&#10;                &lt;path d='M250 306l10 12 10-12' fill='none' stroke='#AFC440' strokeWidth='5' strokeLinecap='round' /&gt;&#10;&#10;                {/* langkah 3 */}&#10;                &lt;rect x='14' y='320' width='492' height='104' rx='16' fill='#51277C' /&gt;&#10;                &lt;circle cx='62' cy='372' r='28' fill='#F3B26C' /&gt;&#10;                &lt;text x='62' y='382' fontFamily='Trebuchet MS' fontSize='28' fontWeight='bold' fill='#51277C' textAnchor='middle'&gt;&#10;                    3&#10;                &lt;/text&gt;&#10;                &lt;text x='112' y='362' fontFamily='Trebuchet MS' fontSize='24' fontWeight='bold' fill='#FFFFFF'&gt;&#10;                    Umumkan&#10;                &lt;/text&gt;&#10;                &lt;text x='112' y='394' fontFamily='Verdana' fontSize='16' fill='#EFEAE1'&gt;&#10;                    Kunci lebih dulu, baru terbit ke orang tua&#10;                &lt;/text&gt;&#10;            &lt;/svg&gt;&#10;        &lt;/Box&gt;&#10;&#10;        {/* kanan 45% · tiga keterangan */}&#10;        &lt;Box style={{ width: '45%', height: '100%', justifyContent: 'space-between' }}&gt;&#10;            {[&#10;                {&#10;                    t: 'Susun — isi menunya',&#10;                    d: 'Satu bulan lebih baik dikerjakan sekaligus. Tiga cara: ketik per hari, salin dari minggu lain, atau tempel teks dari sekolah.',&#10;                    g: 'Bagian 3',&#10;                },&#10;                {&#10;                    t: 'Petugas — siapa ambil snack',&#10;                    d: 'Pilih dari daftar siswa kelas Anda; nama orang tuanya terisi sendiri. Dikosongkan pun boleh.',&#10;                    g: 'Bisa dikosongkan',&#10;                },&#10;                {&#10;                    t: 'Umumkan — baru kelihatan',&#10;                    d: 'Sebelum diumumkan, orang tua tidak melihat apa pun. Jadi jangan khawatir kalau belum muncul.',&#10;                    g: 'Bagian 4',&#10;                },&#10;            ].map((it, i) =&gt; (&#10;                &lt;Box&#10;                    key={i}&#10;                    style={{&#10;                        height: 166,&#10;                        background: '#FFFFFF',&#10;                        borderRadius: 16,&#10;                        boxShadow: '0 4px 20px rgba(0,0,0,0.08)',&#10;                        padding: 22,&#10;                        borderLeft: i === 2 ? '8px solid #F3B26C' : '8px solid #AFC440',&#10;                    }}&#10;                &gt;&#10;                    &lt;Text&#10;                        style={{&#10;                            fontSize: 24,&#10;                            fontWeight: 'bold',&#10;                            color: '#51277C',&#10;                            fontFamily: 'Trebuchet MS',&#10;                            lineHeight: 1.3,&#10;                        }}&#10;                    &gt;&#10;                        {it.t}&#10;                    &lt;/Text&gt;&#10;                    &lt;Text&#10;                        style={{&#10;                            marginTop: 10,&#10;                            fontSize: 17,&#10;                            color: '#6B6478',&#10;                            fontFamily: 'Verdana',&#10;                            lineHeight: 1.5,&#10;                        }}&#10;                    &gt;&#10;                        {it.d}&#10;                    &lt;/Text&gt;&#10;                    &lt;Box style={{ marginTop: 'auto' }}&gt;&#10;                        &lt;Text&#10;                            style={{&#10;                                fontSize: 16,&#10;                                color: '#51277C',&#10;                                fontFamily: 'Verdana',&#10;                                fontWeight: 'bold',&#10;                            }}&#10;                        &gt;&#10;                            {it.g}&#10;                        &lt;/Text&gt;&#10;                    &lt;/Box&gt;&#10;                &lt;/Box&gt;&#10;            ))}&#10;        &lt;/Box&gt;&#10;    &lt;/Box&gt;&#10;&#10;    {/* ── C · bilah kaki ── */}&#10;    &lt;Box&#10;        style={{&#10;            height: 40,&#10;            flexDirection: 'row',&#10;            alignItems: 'center',&#10;            justifyContent: 'space-between',&#10;        }}&#10;    &gt;&#10;        &lt;Text style={{ fontSize: 14, color: '#6B6478', fontFamily: 'Verdana' }}&gt;&#10;            Pizza Snack Play · Panduan Korlas &amp;amp; Admin&#10;        &lt;/Text&gt;&#10;        &lt;Text style={{ fontSize: 14, color: '#6B6478', fontFamily: 'Verdana' }}&gt;04 / 17&lt;/Text&gt;&#10;    &lt;/Box&gt;&#10;&lt;/Slide&gt;&#10;"/>
         <p:cNvGrpSpPr/>
         <p:nvPr/>
       </p:nvGrpSpPr>
@@ -9241,7 +10190,7 @@
       </p:grpSpPr>
       <p:sp>
         <p:nvSpPr>
-          <p:cNvPr id="202" name=""/>
+          <p:cNvPr id="222" name=""/>
           <p:cNvSpPr/>
           <p:nvPr/>
         </p:nvSpPr>
@@ -9265,7 +10214,7 @@
       </p:sp>
       <p:sp>
         <p:nvSpPr>
-          <p:cNvPr id="203" name="" descr="{&quot;isTemplate&quot;:true,&quot;type&quot;:&quot;text&quot;}"/>
+          <p:cNvPr id="223" name="" descr="{&quot;isTemplate&quot;:true,&quot;type&quot;:&quot;text&quot;}"/>
           <p:cNvSpPr txBox="1"/>
           <p:nvPr/>
         </p:nvSpPr>
@@ -9300,7 +10249,7 @@
       </p:sp>
       <p:sp>
         <p:nvSpPr>
-          <p:cNvPr id="204" name=""/>
+          <p:cNvPr id="224" name=""/>
           <p:cNvSpPr/>
           <p:nvPr/>
         </p:nvSpPr>
@@ -9326,7 +10275,7 @@
       </p:sp>
       <p:sp>
         <p:nvSpPr>
-          <p:cNvPr id="205" name=""/>
+          <p:cNvPr id="225" name=""/>
           <p:cNvSpPr/>
           <p:nvPr/>
         </p:nvSpPr>
@@ -9354,7 +10303,7 @@
       </p:sp>
       <p:pic>
         <p:nvPicPr>
-          <p:cNvPr id="206" name=""/>
+          <p:cNvPr id="226" name=""/>
           <p:cNvPicPr>
             <a:picLocks noChangeAspect="1"/>
           </p:cNvPicPr>
@@ -9385,7 +10334,7 @@
       </p:pic>
       <p:sp>
         <p:nvSpPr>
-          <p:cNvPr id="207" name=""/>
+          <p:cNvPr id="227" name=""/>
           <p:cNvSpPr/>
           <p:nvPr/>
         </p:nvSpPr>
@@ -9418,7 +10367,7 @@
       </p:sp>
       <p:sp>
         <p:nvSpPr>
-          <p:cNvPr id="208" name=""/>
+          <p:cNvPr id="228" name=""/>
           <p:cNvSpPr/>
           <p:nvPr/>
         </p:nvSpPr>
@@ -9475,7 +10424,7 @@
       </p:sp>
       <p:sp>
         <p:nvSpPr>
-          <p:cNvPr id="209" name="" descr="{&quot;isTemplate&quot;:true,&quot;type&quot;:&quot;text&quot;}"/>
+          <p:cNvPr id="229" name="" descr="{&quot;isTemplate&quot;:true,&quot;type&quot;:&quot;text&quot;}"/>
           <p:cNvSpPr txBox="1"/>
           <p:nvPr/>
         </p:nvSpPr>
@@ -9510,7 +10459,7 @@
       </p:sp>
       <p:sp>
         <p:nvSpPr>
-          <p:cNvPr id="210" name="" descr="{&quot;isTemplate&quot;:true,&quot;type&quot;:&quot;text&quot;}"/>
+          <p:cNvPr id="230" name="" descr="{&quot;isTemplate&quot;:true,&quot;type&quot;:&quot;text&quot;}"/>
           <p:cNvSpPr txBox="1"/>
           <p:nvPr/>
         </p:nvSpPr>
@@ -9547,7 +10496,7 @@
       </p:sp>
       <p:sp>
         <p:nvSpPr>
-          <p:cNvPr id="211" name="" descr="{&quot;isTemplate&quot;:true,&quot;type&quot;:&quot;text&quot;}"/>
+          <p:cNvPr id="231" name="" descr="{&quot;isTemplate&quot;:true,&quot;type&quot;:&quot;text&quot;}"/>
           <p:cNvSpPr txBox="1"/>
           <p:nvPr/>
         </p:nvSpPr>
@@ -9582,7 +10531,7 @@
       </p:sp>
       <p:sp>
         <p:nvSpPr>
-          <p:cNvPr id="212" name=""/>
+          <p:cNvPr id="232" name=""/>
           <p:cNvSpPr/>
           <p:nvPr/>
         </p:nvSpPr>
@@ -9615,7 +10564,7 @@
       </p:sp>
       <p:sp>
         <p:nvSpPr>
-          <p:cNvPr id="213" name=""/>
+          <p:cNvPr id="233" name=""/>
           <p:cNvSpPr/>
           <p:nvPr/>
         </p:nvSpPr>
@@ -9672,7 +10621,7 @@
       </p:sp>
       <p:sp>
         <p:nvSpPr>
-          <p:cNvPr id="214" name="" descr="{&quot;isTemplate&quot;:true,&quot;type&quot;:&quot;text&quot;}"/>
+          <p:cNvPr id="234" name="" descr="{&quot;isTemplate&quot;:true,&quot;type&quot;:&quot;text&quot;}"/>
           <p:cNvSpPr txBox="1"/>
           <p:nvPr/>
         </p:nvSpPr>
@@ -9707,7 +10656,7 @@
       </p:sp>
       <p:sp>
         <p:nvSpPr>
-          <p:cNvPr id="215" name="" descr="{&quot;isTemplate&quot;:true,&quot;type&quot;:&quot;text&quot;}"/>
+          <p:cNvPr id="235" name="" descr="{&quot;isTemplate&quot;:true,&quot;type&quot;:&quot;text&quot;}"/>
           <p:cNvSpPr txBox="1"/>
           <p:nvPr/>
         </p:nvSpPr>
@@ -9744,7 +10693,7 @@
       </p:sp>
       <p:sp>
         <p:nvSpPr>
-          <p:cNvPr id="216" name="" descr="{&quot;isTemplate&quot;:true,&quot;type&quot;:&quot;text&quot;}"/>
+          <p:cNvPr id="236" name="" descr="{&quot;isTemplate&quot;:true,&quot;type&quot;:&quot;text&quot;}"/>
           <p:cNvSpPr txBox="1"/>
           <p:nvPr/>
         </p:nvSpPr>
@@ -9779,7 +10728,7 @@
       </p:sp>
       <p:sp>
         <p:nvSpPr>
-          <p:cNvPr id="217" name=""/>
+          <p:cNvPr id="237" name=""/>
           <p:cNvSpPr/>
           <p:nvPr/>
         </p:nvSpPr>
@@ -9812,7 +10761,7 @@
       </p:sp>
       <p:sp>
         <p:nvSpPr>
-          <p:cNvPr id="218" name=""/>
+          <p:cNvPr id="238" name=""/>
           <p:cNvSpPr/>
           <p:nvPr/>
         </p:nvSpPr>
@@ -9869,7 +10818,7 @@
       </p:sp>
       <p:sp>
         <p:nvSpPr>
-          <p:cNvPr id="219" name="" descr="{&quot;isTemplate&quot;:true,&quot;type&quot;:&quot;text&quot;}"/>
+          <p:cNvPr id="239" name="" descr="{&quot;isTemplate&quot;:true,&quot;type&quot;:&quot;text&quot;}"/>
           <p:cNvSpPr txBox="1"/>
           <p:nvPr/>
         </p:nvSpPr>
@@ -9904,7 +10853,7 @@
       </p:sp>
       <p:sp>
         <p:nvSpPr>
-          <p:cNvPr id="220" name="" descr="{&quot;isTemplate&quot;:true,&quot;type&quot;:&quot;text&quot;}"/>
+          <p:cNvPr id="240" name="" descr="{&quot;isTemplate&quot;:true,&quot;type&quot;:&quot;text&quot;}"/>
           <p:cNvSpPr txBox="1"/>
           <p:nvPr/>
         </p:nvSpPr>
@@ -9941,7 +10890,7 @@
       </p:sp>
       <p:sp>
         <p:nvSpPr>
-          <p:cNvPr id="221" name="" descr="{&quot;isTemplate&quot;:true,&quot;type&quot;:&quot;text&quot;}"/>
+          <p:cNvPr id="241" name="" descr="{&quot;isTemplate&quot;:true,&quot;type&quot;:&quot;text&quot;}"/>
           <p:cNvSpPr txBox="1"/>
           <p:nvPr/>
         </p:nvSpPr>
@@ -9976,7 +10925,7 @@
       </p:sp>
       <p:sp>
         <p:nvSpPr>
-          <p:cNvPr id="222" name="" descr="{&quot;isTemplate&quot;:true,&quot;type&quot;:&quot;text&quot;}"/>
+          <p:cNvPr id="242" name="" descr="{&quot;isTemplate&quot;:true,&quot;type&quot;:&quot;text&quot;}"/>
           <p:cNvSpPr txBox="1"/>
           <p:nvPr/>
         </p:nvSpPr>
@@ -10011,7 +10960,7 @@
       </p:sp>
       <p:sp>
         <p:nvSpPr>
-          <p:cNvPr id="223" name="" descr="{&quot;isTemplate&quot;:true,&quot;type&quot;:&quot;text&quot;}"/>
+          <p:cNvPr id="243" name="" descr="{&quot;isTemplate&quot;:true,&quot;type&quot;:&quot;text&quot;}"/>
           <p:cNvSpPr txBox="1"/>
           <p:nvPr/>
         </p:nvSpPr>
@@ -10038,7 +10987,7 @@
                 <a:latin typeface="Verdana"/>
                 <a:ea typeface="Verdana"/>
               </a:rPr>
-              <a:t>04 / 16</a:t>
+              <a:t>04 / 17</a:t>
             </a:r>
             <a:endParaRPr/>
           </a:p>
@@ -10054,7 +11003,7 @@
   <p:cSld>
     <p:spTree>
       <p:nvGrpSpPr>
-        <p:cNvPr id="224" name="" descr="&lt;Slide&#10;    style={{&#10;        width: '1280px',&#10;        height: '720px',&#10;        background: 'linear-gradient(135deg, #51277C 0%, #7A45A8 100%)',&#10;        paddingTop: 60,&#10;        paddingBottom: 60,&#10;        paddingLeft: 72,&#10;        paddingRight: 72,&#10;        justifyContent: 'center',&#10;        position: 'relative',&#10;        overflow: 'hidden',&#10;    }}&#10;&gt;&#10;    &lt;Box&#10;        style={{&#10;            position: 'absolute',&#10;            top: -100,&#10;            right: -60,&#10;            width: 420,&#10;            height: 420,&#10;            borderRadius: 210,&#10;            background: '#AFC440',&#10;            opacity: 0.14,&#10;        }}&#10;    /&gt;&#10;    &lt;Box style={{ position: 'absolute', bottom: 46, right: 78, opacity: 0.16 }}&gt;&#10;        &lt;svg width={220} height={190} viewBox='0 0 220 190'&gt;&#10;            &lt;circle cx='70' cy='70' r='44' fill='none' stroke='#FFFFFF' strokeWidth='7' /&gt;&#10;            &lt;path d='M70 114v56' stroke='#FFFFFF' strokeWidth='7' strokeLinecap='round' /&gt;&#10;            &lt;path d='M96 140h26M96 158h26' stroke='#FFFFFF' strokeWidth='7' strokeLinecap='round' /&gt;&#10;            &lt;circle cx='164' cy='52' r='30' fill='none' stroke='#F3B26C' strokeWidth='7' /&gt;&#10;            &lt;path d='M148 52h32M164 36v32' stroke='#F3B26C' strokeWidth='7' strokeLinecap='round' /&gt;&#10;        &lt;/svg&gt;&#10;    &lt;/Box&gt;&#10;&#10;    &lt;Box style={{ position: 'relative', zIndex: 1, width: '62%' }}&gt;&#10;        &lt;Box style={{ flexDirection: 'row', alignItems: 'center', gap: 14, alignSelf: 'flex-start' }}&gt;&#10;            &lt;Text&#10;                style={{&#10;                    fontSize: 76,&#10;                    fontWeight: 'bold',&#10;                    color: '#F3B26C',&#10;                    fontFamily: 'Trebuchet MS',&#10;                    lineHeight: 1,&#10;                }}&#10;            &gt;&#10;                02&#10;            &lt;/Text&gt;&#10;            &lt;Box style={{ width: 3, height: 52, background: 'rgba(255,255,255,0.45)' }} /&gt;&#10;            &lt;Text style={{ fontSize: 19, color: 'rgba(255,255,255,0.8)', fontFamily: 'Verdana' }}&gt;&#10;                Bagian kedua&#10;            &lt;/Text&gt;&#10;        &lt;/Box&gt;&#10;&#10;        &lt;Text&#10;            style={{&#10;                marginTop: 26,&#10;                fontSize: 60,&#10;                fontWeight: 'bold',&#10;                color: '#FFFFFF',&#10;                fontFamily: 'Trebuchet MS',&#10;                lineHeight: 1.15,&#10;            }}&#10;        &gt;&#10;            Akun &amp;amp;{'\n'}wewenang&#10;        &lt;/Text&gt;&#10;&#10;        &lt;Text&#10;            style={{&#10;                marginTop: 24,&#10;                fontSize: 22,&#10;                color: 'rgba(255,255,255,0.88)',&#10;                fontFamily: 'Verdana',&#10;                lineHeight: 1.5,&#10;            }}&#10;        &gt;&#10;            Supaya jelas mana yang bisa dikerjakan sendiri, mana yang minta admin.&#10;        &lt;/Text&gt;&#10;    &lt;/Box&gt;&#10;&lt;/Slide&gt;&#10;"/>
+        <p:cNvPr id="244" name=""/>
         <p:cNvGrpSpPr/>
         <p:nvPr/>
       </p:nvGrpSpPr>
@@ -10068,7 +11017,7 @@
       </p:grpSpPr>
       <p:sp>
         <p:nvSpPr>
-          <p:cNvPr id="225" name=""/>
+          <p:cNvPr id="245" name=""/>
           <p:cNvSpPr/>
           <p:nvPr/>
         </p:nvSpPr>
@@ -10095,12 +11044,15 @@
         </p:spPr>
         <p:txBody>
           <a:bodyPr/>
-          <a:p/>
-        </p:txBody>
-      </p:sp>
-      <p:sp>
-        <p:nvSpPr>
-          <p:cNvPr id="226" name=""/>
+          <a:p>
+            <a:pPr/>
+            <a:endParaRPr/>
+          </a:p>
+        </p:txBody>
+      </p:sp>
+      <p:sp>
+        <p:nvSpPr>
+          <p:cNvPr id="246" name=""/>
           <p:cNvSpPr/>
           <p:nvPr/>
         </p:nvSpPr>
@@ -10491,12 +11443,15 @@
         </p:spPr>
         <p:txBody>
           <a:bodyPr/>
-          <a:p/>
+          <a:p>
+            <a:pPr/>
+            <a:endParaRPr/>
+          </a:p>
         </p:txBody>
       </p:sp>
       <p:pic>
         <p:nvPicPr>
-          <p:cNvPr id="227" name=""/>
+          <p:cNvPr id="247" name=""/>
           <p:cNvPicPr>
             <a:picLocks noChangeAspect="1"/>
           </p:cNvPicPr>
@@ -10528,7 +11483,7 @@
       </p:pic>
       <p:sp>
         <p:nvSpPr>
-          <p:cNvPr id="228" name="" descr="{&quot;isTemplate&quot;:true,&quot;type&quot;:&quot;text&quot;}"/>
+          <p:cNvPr id="248" name="" descr="{&quot;isTemplate&quot;:true,&quot;type&quot;:&quot;text&quot;}"/>
           <p:cNvSpPr txBox="1"/>
           <p:nvPr/>
         </p:nvSpPr>
@@ -10563,7 +11518,7 @@
       </p:sp>
       <p:sp>
         <p:nvSpPr>
-          <p:cNvPr id="229" name=""/>
+          <p:cNvPr id="249" name=""/>
           <p:cNvSpPr/>
           <p:nvPr/>
         </p:nvSpPr>
@@ -10584,12 +11539,15 @@
         </p:spPr>
         <p:txBody>
           <a:bodyPr/>
-          <a:p/>
-        </p:txBody>
-      </p:sp>
-      <p:sp>
-        <p:nvSpPr>
-          <p:cNvPr id="230" name="" descr="{&quot;isTemplate&quot;:true,&quot;type&quot;:&quot;text&quot;}"/>
+          <a:p>
+            <a:pPr/>
+            <a:endParaRPr/>
+          </a:p>
+        </p:txBody>
+      </p:sp>
+      <p:sp>
+        <p:nvSpPr>
+          <p:cNvPr id="250" name="" descr="{&quot;isTemplate&quot;:true,&quot;type&quot;:&quot;text&quot;}"/>
           <p:cNvSpPr txBox="1"/>
           <p:nvPr/>
         </p:nvSpPr>
@@ -10626,7 +11584,7 @@
       </p:sp>
       <p:sp>
         <p:nvSpPr>
-          <p:cNvPr id="231" name="" descr="{&quot;isTemplate&quot;:true,&quot;type&quot;:&quot;text&quot;}"/>
+          <p:cNvPr id="251" name="" descr="{&quot;isTemplate&quot;:true,&quot;type&quot;:&quot;text&quot;}"/>
           <p:cNvSpPr txBox="1"/>
           <p:nvPr/>
         </p:nvSpPr>
@@ -10679,7 +11637,7 @@
       </p:sp>
       <p:sp>
         <p:nvSpPr>
-          <p:cNvPr id="232" name="" descr="{&quot;isTemplate&quot;:true,&quot;type&quot;:&quot;text&quot;}"/>
+          <p:cNvPr id="252" name="" descr="{&quot;isTemplate&quot;:true,&quot;type&quot;:&quot;text&quot;}"/>
           <p:cNvSpPr txBox="1"/>
           <p:nvPr/>
         </p:nvSpPr>
@@ -10726,7 +11684,7 @@
   <p:cSld>
     <p:spTree>
       <p:nvGrpSpPr>
-        <p:cNvPr id="233" name="" descr="&lt;Slide&#10;    style={{&#10;        width: '1280px',&#10;        height: '720px',&#10;        background: '#FAF7F2',&#10;        paddingTop: 20,&#10;        paddingBottom: 20,&#10;        paddingLeft: 64,&#10;        paddingRight: 64,&#10;    }}&#10;&gt;&#10;    {/* ── A · blok judul ── */}&#10;    &lt;Box style={{ height: 110, justifyContent: 'center' }}&gt;&#10;        &lt;Text&#10;            style={{&#10;                fontSize: 34,&#10;                fontWeight: 'bold',&#10;                color: '#51277C',&#10;                fontFamily: 'Trebuchet MS',&#10;                lineHeight: 1.3,&#10;            }}&#10;        &gt;&#10;            Admin &amp;amp; Korlas: bedanya di mana&#10;        &lt;/Text&gt;&#10;        &lt;Box style={{ marginTop: 10, width: 72, height: 6, borderRadius: 3, background: '#51277C' }} /&gt;&#10;    &lt;/Box&gt;&#10;&#10;    {/* ── B · area konten ── */}&#10;    &lt;Box style={{ height: 530, flexDirection: 'row', gap: 26 }}&gt;&#10;        {/* kiri 60% · dua kartu wewenang */}&#10;        &lt;Box style={{ width: '60%', height: '100%', justifyContent: 'space-between' }}&gt;&#10;            &lt;Box&#10;                style={{&#10;                    height: 258,&#10;                    background: '#FFFFFF',&#10;                    borderRadius: 16,&#10;                    boxShadow: '0 4px 20px rgba(0,0,0,0.08)',&#10;                    padding: 22,&#10;                    borderTop: '8px solid #AFC440',&#10;                }}&#10;            &gt;&#10;                &lt;Text&#10;                    style={{&#10;                        fontSize: 25,&#10;                        fontWeight: 'bold',&#10;                        color: '#51277C',&#10;                        fontFamily: 'Trebuchet MS',&#10;                    }}&#10;                &gt;&#10;                    Korlas boleh sendiri&#10;                &lt;/Text&gt;&#10;                &lt;Box style={{ marginTop: 12 }}&gt;&#10;                    {[&#10;                        'Menyusun &amp; mengubah jadwal kelasnya, selama belum dikunci',&#10;                        'Menentukan petugas, atau membiarkannya kosong',&#10;                        'Menyalin Sepekan &amp; menempel teks jadwal dari sekolah',&#10;                        'Mengunci lalu mempublikasikan jadwal kelasnya',&#10;                        'Mengambil tanggal piket seperti orang tua lainnya',&#10;                    ].map((s, i) =&gt; (&#10;                        &lt;Box key={i} style={{ flexDirection: 'row', alignItems: 'center', gap: 10, marginTop: 7 }}&gt;&#10;                            &lt;svg width={18} height={18} viewBox='0 0 24 24'&gt;&#10;                                &lt;path d='M5 13l4 4 10-11' fill='none' stroke='#AFC440' strokeWidth='3' strokeLinecap='round' strokeLinejoin='round' /&gt;&#10;                            &lt;/svg&gt;&#10;                            &lt;Text style={{ flex: 1, fontSize: 16, color: '#2A2333', fontFamily: 'Verdana', lineHeight: 1.45 }}&gt;&#10;                                {s}&#10;                            &lt;/Text&gt;&#10;                        &lt;/Box&gt;&#10;                    ))}&#10;                &lt;/Box&gt;&#10;            &lt;/Box&gt;&#10;&#10;            &lt;Box&#10;                style={{&#10;                    height: 254,&#10;                    background: '#FFFFFF',&#10;                    borderRadius: 16,&#10;                    boxShadow: '0 4px 20px rgba(0,0,0,0.08)',&#10;                    padding: 22,&#10;                    borderTop: '8px solid #F3B26C',&#10;                }}&#10;            &gt;&#10;                &lt;Text&#10;                    style={{&#10;                        fontSize: 25,&#10;                        fontWeight: 'bold',&#10;                        color: '#51277C',&#10;                        fontFamily: 'Trebuchet MS',&#10;                    }}&#10;                &gt;&#10;                    Tetap wewenang admin&#10;                &lt;/Text&gt;&#10;                &lt;Box style={{ marginTop: 12 }}&gt;&#10;                    {[&#10;                        'Mengelola katalog menu &amp; kategori',&#10;                        'Mengelola akun orang tua, termasuk mengangkat korlas',&#10;                        'Hari libur sekolah — berlaku untuk semua kelas',&#10;                        'Membuka kunci jadwal yang sudah dikunci atau terbit',&#10;                    ].map((s, i) =&gt; (&#10;                        &lt;Box key={i} style={{ flexDirection: 'row', alignItems: 'center', gap: 10, marginTop: 7 }}&gt;&#10;                            &lt;svg width={18} height={18} viewBox='0 0 24 24'&gt;&#10;                                &lt;path d='M7 7l10 10M17 7L7 17' fill='none' stroke='#F3B26C' strokeWidth='3' strokeLinecap='round' /&gt;&#10;                            &lt;/svg&gt;&#10;                            &lt;Text style={{ flex: 1, fontSize: 16, color: '#2A2333', fontFamily: 'Verdana', lineHeight: 1.45 }}&gt;&#10;                                {s}&#10;                            &lt;/Text&gt;&#10;                        &lt;/Box&gt;&#10;                    ))}&#10;                &lt;/Box&gt;&#10;            &lt;/Box&gt;&#10;        &lt;/Box&gt;&#10;&#10;        {/* kanan 40% · ilustrasi dua peran */}&#10;        &lt;Box&#10;            style={{&#10;                width: '40%',&#10;                height: '100%',&#10;                background: 'rgba(81,39,124,0.06)',&#10;                borderRadius: 20,&#10;                justifyContent: 'center',&#10;                alignItems: 'center',&#10;            }}&#10;        &gt;&#10;            &lt;svg width={360} height={400} viewBox='0 0 360 400'&gt;&#10;                {/* korlas */}&#10;                &lt;rect x='24' y='24' width='312' height='150' rx='18' fill='#FFFFFF' stroke='#AFC440' strokeWidth='3' /&gt;&#10;                &lt;circle cx='76' cy='78' r='30' fill='#AFC440' /&gt;&#10;                &lt;text x='76' y='90' fontFamily='Trebuchet MS' fontSize='30' fontWeight='bold' fill='#3F4718' textAnchor='middle'&gt;&#10;                    K&#10;                &lt;/text&gt;&#10;                &lt;text x='124' y='70' fontFamily='Trebuchet MS' fontSize='24' fontWeight='bold' fill='#51277C'&gt;&#10;                    Korlas&#10;                &lt;/text&gt;&#10;                &lt;text x='124' y='102' fontFamily='Verdana' fontSize='15' fill='#6B6478'&gt;&#10;                    satu kelas&#10;                &lt;/text&gt;&#10;                &lt;rect x='52' y='122' width='256' height='9' rx='5' fill='#DED7CB' /&gt;&#10;                &lt;rect x='52' y='140' width='196' height='9' rx='5' fill='#EDE8DF' /&gt;&#10;&#10;                {/* admin */}&#10;                &lt;rect x='24' y='196' width='312' height='150' rx='18' fill='#51277C' /&gt;&#10;                &lt;circle cx='76' cy='250' r='30' fill='#F3B26C' /&gt;&#10;                &lt;text x='76' y='262' fontFamily='Trebuchet MS' fontSize='30' fontWeight='bold' fill='#51277C' textAnchor='middle'&gt;&#10;                    A&#10;                &lt;/text&gt;&#10;                &lt;text x='124' y='242' fontFamily='Trebuchet MS' fontSize='24' fontWeight='bold' fill='#FFFFFF'&gt;&#10;                    Admin&#10;                &lt;/text&gt;&#10;                &lt;text x='124' y='274' fontFamily='Verdana' fontSize='15' fill='#EFEAE1'&gt;&#10;                    semua kelas&#10;                &lt;/text&gt;&#10;                &lt;rect x='52' y='294' width='256' height='9' rx='5' fill='rgba(255,255,255,0.5)' /&gt;&#10;                &lt;rect x='52' y='312' width='216' height='9' rx='5' fill='rgba(255,255,255,0.3)' /&gt;&#10;&#10;                &lt;text x='180' y='380' fontFamily='Verdana' fontSize='16' fill='#6B6478' textAnchor='middle'&gt;&#10;                    Admin melihat semua kelas&#10;                &lt;/text&gt;&#10;            &lt;/svg&gt;&#10;        &lt;/Box&gt;&#10;    &lt;/Box&gt;&#10;&#10;    {/* ── C · bilah kaki ── */}&#10;    &lt;Box&#10;        style={{&#10;            height: 40,&#10;            flexDirection: 'row',&#10;            alignItems: 'center',&#10;            justifyContent: 'space-between',&#10;        }}&#10;    &gt;&#10;        &lt;Text style={{ fontSize: 14, color: '#6B6478', fontFamily: 'Verdana' }}&gt;&#10;            Pizza Snack Play · Panduan Korlas &amp;amp; Admin&#10;        &lt;/Text&gt;&#10;        &lt;Text style={{ fontSize: 14, color: '#6B6478', fontFamily: 'Verdana' }}&gt;06 / 16&lt;/Text&gt;&#10;    &lt;/Box&gt;&#10;&lt;/Slide&gt;&#10;"/>
+        <p:cNvPr id="253" name="" descr="&lt;Slide&#10;    style={{&#10;        width: '1280px',&#10;        height: '720px',&#10;        background: '#FAF7F2',&#10;        paddingTop: 20,&#10;        paddingBottom: 20,&#10;        paddingLeft: 64,&#10;        paddingRight: 64,&#10;    }}&#10;&gt;&#10;    {/* ── A · blok judul ── */}&#10;    &lt;Box style={{ height: 110, justifyContent: 'center' }}&gt;&#10;        &lt;Text&#10;            style={{&#10;                fontSize: 34,&#10;                fontWeight: 'bold',&#10;                color: '#51277C',&#10;                fontFamily: 'Trebuchet MS',&#10;                lineHeight: 1.3,&#10;            }}&#10;        &gt;&#10;            Admin &amp;amp; Korlas: bedanya di mana&#10;        &lt;/Text&gt;&#10;        &lt;Box style={{ marginTop: 10, width: 72, height: 6, borderRadius: 3, background: '#51277C' }} /&gt;&#10;    &lt;/Box&gt;&#10;&#10;    {/* ── B · area konten ── */}&#10;    &lt;Box style={{ height: 530, flexDirection: 'row', gap: 26 }}&gt;&#10;        {/* kiri 60% · dua kartu wewenang */}&#10;        &lt;Box style={{ width: '60%', height: '100%', justifyContent: 'space-between' }}&gt;&#10;            &lt;Box&#10;                style={{&#10;                    height: 258,&#10;                    background: '#FFFFFF',&#10;                    borderRadius: 16,&#10;                    boxShadow: '0 4px 20px rgba(0,0,0,0.08)',&#10;                    padding: 22,&#10;                    borderTop: '8px solid #AFC440',&#10;                }}&#10;            &gt;&#10;                &lt;Text&#10;                    style={{&#10;                        fontSize: 25,&#10;                        fontWeight: 'bold',&#10;                        color: '#51277C',&#10;                        fontFamily: 'Trebuchet MS',&#10;                    }}&#10;                &gt;&#10;                    Korlas boleh sendiri&#10;                &lt;/Text&gt;&#10;                &lt;Box style={{ marginTop: 12 }}&gt;&#10;                    {[&#10;                        'Menyusun &amp; mengubah jadwal kelasnya, selama belum dikunci',&#10;                        'Menentukan petugas, atau membiarkannya kosong',&#10;                        'Menyalin Sepekan &amp; menempel teks jadwal dari sekolah',&#10;                        'Mengunci lalu mempublikasikan jadwal kelasnya',&#10;                        'Mengambil tanggal piket seperti orang tua lainnya',&#10;                    ].map((s, i) =&gt; (&#10;                        &lt;Box key={i} style={{ flexDirection: 'row', alignItems: 'center', gap: 10, marginTop: 7 }}&gt;&#10;                            &lt;svg width={18} height={18} viewBox='0 0 24 24'&gt;&#10;                                &lt;path d='M5 13l4 4 10-11' fill='none' stroke='#AFC440' strokeWidth='3' strokeLinecap='round' strokeLinejoin='round' /&gt;&#10;                            &lt;/svg&gt;&#10;                            &lt;Text style={{ flex: 1, fontSize: 16, color: '#2A2333', fontFamily: 'Verdana', lineHeight: 1.45 }}&gt;&#10;                                {s}&#10;                            &lt;/Text&gt;&#10;                        &lt;/Box&gt;&#10;                    ))}&#10;                &lt;/Box&gt;&#10;            &lt;/Box&gt;&#10;&#10;            &lt;Box&#10;                style={{&#10;                    height: 254,&#10;                    background: '#FFFFFF',&#10;                    borderRadius: 16,&#10;                    boxShadow: '0 4px 20px rgba(0,0,0,0.08)',&#10;                    padding: 22,&#10;                    borderTop: '8px solid #F3B26C',&#10;                }}&#10;            &gt;&#10;                &lt;Text&#10;                    style={{&#10;                        fontSize: 25,&#10;                        fontWeight: 'bold',&#10;                        color: '#51277C',&#10;                        fontFamily: 'Trebuchet MS',&#10;                    }}&#10;                &gt;&#10;                    Tetap wewenang admin&#10;                &lt;/Text&gt;&#10;                &lt;Box style={{ marginTop: 12 }}&gt;&#10;                    {[&#10;                        'Mengelola katalog menu &amp; kategori',&#10;                        'Mengelola akun orang tua, termasuk mengangkat korlas',&#10;                        'Hari libur sekolah — berlaku untuk semua kelas',&#10;                        'Membuka kunci jadwal yang sudah dikunci atau terbit',&#10;                    ].map((s, i) =&gt; (&#10;                        &lt;Box key={i} style={{ flexDirection: 'row', alignItems: 'center', gap: 10, marginTop: 7 }}&gt;&#10;                            &lt;svg width={18} height={18} viewBox='0 0 24 24'&gt;&#10;                                &lt;path d='M7 7l10 10M17 7L7 17' fill='none' stroke='#F3B26C' strokeWidth='3' strokeLinecap='round' /&gt;&#10;                            &lt;/svg&gt;&#10;                            &lt;Text style={{ flex: 1, fontSize: 16, color: '#2A2333', fontFamily: 'Verdana', lineHeight: 1.45 }}&gt;&#10;                                {s}&#10;                            &lt;/Text&gt;&#10;                        &lt;/Box&gt;&#10;                    ))}&#10;                &lt;/Box&gt;&#10;            &lt;/Box&gt;&#10;        &lt;/Box&gt;&#10;&#10;        {/* kanan 40% · ilustrasi dua peran */}&#10;        &lt;Box&#10;            style={{&#10;                width: '40%',&#10;                height: '100%',&#10;                background: 'rgba(81,39,124,0.06)',&#10;                borderRadius: 20,&#10;                justifyContent: 'center',&#10;                alignItems: 'center',&#10;            }}&#10;        &gt;&#10;            &lt;svg width={360} height={400} viewBox='0 0 360 400'&gt;&#10;                {/* korlas */}&#10;                &lt;rect x='24' y='24' width='312' height='150' rx='18' fill='#FFFFFF' stroke='#AFC440' strokeWidth='3' /&gt;&#10;                &lt;circle cx='76' cy='78' r='30' fill='#AFC440' /&gt;&#10;                &lt;text x='76' y='90' fontFamily='Trebuchet MS' fontSize='30' fontWeight='bold' fill='#3F4718' textAnchor='middle'&gt;&#10;                    K&#10;                &lt;/text&gt;&#10;                &lt;text x='124' y='70' fontFamily='Trebuchet MS' fontSize='24' fontWeight='bold' fill='#51277C'&gt;&#10;                    Korlas&#10;                &lt;/text&gt;&#10;                &lt;text x='124' y='102' fontFamily='Verdana' fontSize='15' fill='#6B6478'&gt;&#10;                    satu kelas&#10;                &lt;/text&gt;&#10;                &lt;rect x='52' y='122' width='256' height='9' rx='5' fill='#DED7CB' /&gt;&#10;                &lt;rect x='52' y='140' width='196' height='9' rx='5' fill='#EDE8DF' /&gt;&#10;&#10;                {/* admin */}&#10;                &lt;rect x='24' y='196' width='312' height='150' rx='18' fill='#51277C' /&gt;&#10;                &lt;circle cx='76' cy='250' r='30' fill='#F3B26C' /&gt;&#10;                &lt;text x='76' y='262' fontFamily='Trebuchet MS' fontSize='30' fontWeight='bold' fill='#51277C' textAnchor='middle'&gt;&#10;                    A&#10;                &lt;/text&gt;&#10;                &lt;text x='124' y='242' fontFamily='Trebuchet MS' fontSize='24' fontWeight='bold' fill='#FFFFFF'&gt;&#10;                    Admin&#10;                &lt;/text&gt;&#10;                &lt;text x='124' y='274' fontFamily='Verdana' fontSize='15' fill='#EFEAE1'&gt;&#10;                    semua kelas&#10;                &lt;/text&gt;&#10;                &lt;rect x='52' y='294' width='256' height='9' rx='5' fill='rgba(255,255,255,0.5)' /&gt;&#10;                &lt;rect x='52' y='312' width='216' height='9' rx='5' fill='rgba(255,255,255,0.3)' /&gt;&#10;&#10;                &lt;text x='180' y='380' fontFamily='Verdana' fontSize='16' fill='#6B6478' textAnchor='middle'&gt;&#10;                    Admin melihat semua kelas&#10;                &lt;/text&gt;&#10;            &lt;/svg&gt;&#10;        &lt;/Box&gt;&#10;    &lt;/Box&gt;&#10;&#10;    {/* ── C · bilah kaki ── */}&#10;    &lt;Box&#10;        style={{&#10;            height: 40,&#10;            flexDirection: 'row',&#10;            alignItems: 'center',&#10;            justifyContent: 'space-between',&#10;        }}&#10;    &gt;&#10;        &lt;Text style={{ fontSize: 14, color: '#6B6478', fontFamily: 'Verdana' }}&gt;&#10;            Pizza Snack Play · Panduan Korlas &amp;amp; Admin&#10;        &lt;/Text&gt;&#10;        &lt;Text style={{ fontSize: 14, color: '#6B6478', fontFamily: 'Verdana' }}&gt;06 / 17&lt;/Text&gt;&#10;    &lt;/Box&gt;&#10;&lt;/Slide&gt;&#10;"/>
         <p:cNvGrpSpPr/>
         <p:nvPr/>
       </p:nvGrpSpPr>
@@ -10740,7 +11698,7 @@
       </p:grpSpPr>
       <p:sp>
         <p:nvSpPr>
-          <p:cNvPr id="234" name=""/>
+          <p:cNvPr id="254" name=""/>
           <p:cNvSpPr/>
           <p:nvPr/>
         </p:nvSpPr>
@@ -10764,7 +11722,7 @@
       </p:sp>
       <p:sp>
         <p:nvSpPr>
-          <p:cNvPr id="235" name="" descr="{&quot;isTemplate&quot;:true,&quot;type&quot;:&quot;text&quot;}"/>
+          <p:cNvPr id="255" name="" descr="{&quot;isTemplate&quot;:true,&quot;type&quot;:&quot;text&quot;}"/>
           <p:cNvSpPr txBox="1"/>
           <p:nvPr/>
         </p:nvSpPr>
@@ -10799,7 +11757,7 @@
       </p:sp>
       <p:sp>
         <p:nvSpPr>
-          <p:cNvPr id="236" name=""/>
+          <p:cNvPr id="256" name=""/>
           <p:cNvSpPr/>
           <p:nvPr/>
         </p:nvSpPr>
@@ -10825,7 +11783,7 @@
       </p:sp>
       <p:sp>
         <p:nvSpPr>
-          <p:cNvPr id="237" name=""/>
+          <p:cNvPr id="257" name=""/>
           <p:cNvSpPr/>
           <p:nvPr/>
         </p:nvSpPr>
@@ -10858,7 +11816,7 @@
       </p:sp>
       <p:sp>
         <p:nvSpPr>
-          <p:cNvPr id="238" name=""/>
+          <p:cNvPr id="258" name=""/>
           <p:cNvSpPr/>
           <p:nvPr/>
         </p:nvSpPr>
@@ -10915,7 +11873,7 @@
       </p:sp>
       <p:sp>
         <p:nvSpPr>
-          <p:cNvPr id="239" name="" descr="{&quot;isTemplate&quot;:true,&quot;type&quot;:&quot;text&quot;}"/>
+          <p:cNvPr id="259" name="" descr="{&quot;isTemplate&quot;:true,&quot;type&quot;:&quot;text&quot;}"/>
           <p:cNvSpPr txBox="1"/>
           <p:nvPr/>
         </p:nvSpPr>
@@ -10950,7 +11908,7 @@
       </p:sp>
       <p:pic>
         <p:nvPicPr>
-          <p:cNvPr id="240" name=""/>
+          <p:cNvPr id="260" name=""/>
           <p:cNvPicPr>
             <a:picLocks noChangeAspect="1"/>
           </p:cNvPicPr>
@@ -10981,7 +11939,7 @@
       </p:pic>
       <p:sp>
         <p:nvSpPr>
-          <p:cNvPr id="241" name="" descr="{&quot;isTemplate&quot;:true,&quot;type&quot;:&quot;text&quot;}"/>
+          <p:cNvPr id="261" name="" descr="{&quot;isTemplate&quot;:true,&quot;type&quot;:&quot;text&quot;}"/>
           <p:cNvSpPr txBox="1"/>
           <p:nvPr/>
         </p:nvSpPr>
@@ -11016,7 +11974,7 @@
       </p:sp>
       <p:pic>
         <p:nvPicPr>
-          <p:cNvPr id="242" name=""/>
+          <p:cNvPr id="262" name=""/>
           <p:cNvPicPr>
             <a:picLocks noChangeAspect="1"/>
           </p:cNvPicPr>
@@ -11047,7 +12005,7 @@
       </p:pic>
       <p:sp>
         <p:nvSpPr>
-          <p:cNvPr id="243" name="" descr="{&quot;isTemplate&quot;:true,&quot;type&quot;:&quot;text&quot;}"/>
+          <p:cNvPr id="263" name="" descr="{&quot;isTemplate&quot;:true,&quot;type&quot;:&quot;text&quot;}"/>
           <p:cNvSpPr txBox="1"/>
           <p:nvPr/>
         </p:nvSpPr>
@@ -11082,7 +12040,7 @@
       </p:sp>
       <p:pic>
         <p:nvPicPr>
-          <p:cNvPr id="244" name=""/>
+          <p:cNvPr id="264" name=""/>
           <p:cNvPicPr>
             <a:picLocks noChangeAspect="1"/>
           </p:cNvPicPr>
@@ -11113,7 +12071,7 @@
       </p:pic>
       <p:sp>
         <p:nvSpPr>
-          <p:cNvPr id="245" name="" descr="{&quot;isTemplate&quot;:true,&quot;type&quot;:&quot;text&quot;}"/>
+          <p:cNvPr id="265" name="" descr="{&quot;isTemplate&quot;:true,&quot;type&quot;:&quot;text&quot;}"/>
           <p:cNvSpPr txBox="1"/>
           <p:nvPr/>
         </p:nvSpPr>
@@ -11148,7 +12106,7 @@
       </p:sp>
       <p:pic>
         <p:nvPicPr>
-          <p:cNvPr id="246" name=""/>
+          <p:cNvPr id="266" name=""/>
           <p:cNvPicPr>
             <a:picLocks noChangeAspect="1"/>
           </p:cNvPicPr>
@@ -11179,7 +12137,7 @@
       </p:pic>
       <p:sp>
         <p:nvSpPr>
-          <p:cNvPr id="247" name="" descr="{&quot;isTemplate&quot;:true,&quot;type&quot;:&quot;text&quot;}"/>
+          <p:cNvPr id="267" name="" descr="{&quot;isTemplate&quot;:true,&quot;type&quot;:&quot;text&quot;}"/>
           <p:cNvSpPr txBox="1"/>
           <p:nvPr/>
         </p:nvSpPr>
@@ -11214,7 +12172,7 @@
       </p:sp>
       <p:pic>
         <p:nvPicPr>
-          <p:cNvPr id="248" name=""/>
+          <p:cNvPr id="268" name=""/>
           <p:cNvPicPr>
             <a:picLocks noChangeAspect="1"/>
           </p:cNvPicPr>
@@ -11245,7 +12203,7 @@
       </p:pic>
       <p:sp>
         <p:nvSpPr>
-          <p:cNvPr id="249" name="" descr="{&quot;isTemplate&quot;:true,&quot;type&quot;:&quot;text&quot;}"/>
+          <p:cNvPr id="269" name="" descr="{&quot;isTemplate&quot;:true,&quot;type&quot;:&quot;text&quot;}"/>
           <p:cNvSpPr txBox="1"/>
           <p:nvPr/>
         </p:nvSpPr>
@@ -11280,7 +12238,7 @@
       </p:sp>
       <p:sp>
         <p:nvSpPr>
-          <p:cNvPr id="250" name=""/>
+          <p:cNvPr id="270" name=""/>
           <p:cNvSpPr/>
           <p:nvPr/>
         </p:nvSpPr>
@@ -11313,7 +12271,7 @@
       </p:sp>
       <p:sp>
         <p:nvSpPr>
-          <p:cNvPr id="251" name=""/>
+          <p:cNvPr id="271" name=""/>
           <p:cNvSpPr/>
           <p:nvPr/>
         </p:nvSpPr>
@@ -11370,7 +12328,7 @@
       </p:sp>
       <p:sp>
         <p:nvSpPr>
-          <p:cNvPr id="252" name="" descr="{&quot;isTemplate&quot;:true,&quot;type&quot;:&quot;text&quot;}"/>
+          <p:cNvPr id="272" name="" descr="{&quot;isTemplate&quot;:true,&quot;type&quot;:&quot;text&quot;}"/>
           <p:cNvSpPr txBox="1"/>
           <p:nvPr/>
         </p:nvSpPr>
@@ -11405,7 +12363,7 @@
       </p:sp>
       <p:pic>
         <p:nvPicPr>
-          <p:cNvPr id="253" name=""/>
+          <p:cNvPr id="273" name=""/>
           <p:cNvPicPr>
             <a:picLocks noChangeAspect="1"/>
           </p:cNvPicPr>
@@ -11436,7 +12394,7 @@
       </p:pic>
       <p:sp>
         <p:nvSpPr>
-          <p:cNvPr id="254" name="" descr="{&quot;isTemplate&quot;:true,&quot;type&quot;:&quot;text&quot;}"/>
+          <p:cNvPr id="274" name="" descr="{&quot;isTemplate&quot;:true,&quot;type&quot;:&quot;text&quot;}"/>
           <p:cNvSpPr txBox="1"/>
           <p:nvPr/>
         </p:nvSpPr>
@@ -11471,7 +12429,7 @@
       </p:sp>
       <p:pic>
         <p:nvPicPr>
-          <p:cNvPr id="255" name=""/>
+          <p:cNvPr id="275" name=""/>
           <p:cNvPicPr>
             <a:picLocks noChangeAspect="1"/>
           </p:cNvPicPr>
@@ -11502,7 +12460,7 @@
       </p:pic>
       <p:sp>
         <p:nvSpPr>
-          <p:cNvPr id="256" name="" descr="{&quot;isTemplate&quot;:true,&quot;type&quot;:&quot;text&quot;}"/>
+          <p:cNvPr id="276" name="" descr="{&quot;isTemplate&quot;:true,&quot;type&quot;:&quot;text&quot;}"/>
           <p:cNvSpPr txBox="1"/>
           <p:nvPr/>
         </p:nvSpPr>
@@ -11537,7 +12495,7 @@
       </p:sp>
       <p:pic>
         <p:nvPicPr>
-          <p:cNvPr id="257" name=""/>
+          <p:cNvPr id="277" name=""/>
           <p:cNvPicPr>
             <a:picLocks noChangeAspect="1"/>
           </p:cNvPicPr>
@@ -11568,7 +12526,7 @@
       </p:pic>
       <p:sp>
         <p:nvSpPr>
-          <p:cNvPr id="258" name="" descr="{&quot;isTemplate&quot;:true,&quot;type&quot;:&quot;text&quot;}"/>
+          <p:cNvPr id="278" name="" descr="{&quot;isTemplate&quot;:true,&quot;type&quot;:&quot;text&quot;}"/>
           <p:cNvSpPr txBox="1"/>
           <p:nvPr/>
         </p:nvSpPr>
@@ -11603,7 +12561,7 @@
       </p:sp>
       <p:pic>
         <p:nvPicPr>
-          <p:cNvPr id="259" name=""/>
+          <p:cNvPr id="279" name=""/>
           <p:cNvPicPr>
             <a:picLocks noChangeAspect="1"/>
           </p:cNvPicPr>
@@ -11634,7 +12592,7 @@
       </p:pic>
       <p:sp>
         <p:nvSpPr>
-          <p:cNvPr id="260" name="" descr="{&quot;isTemplate&quot;:true,&quot;type&quot;:&quot;text&quot;}"/>
+          <p:cNvPr id="280" name="" descr="{&quot;isTemplate&quot;:true,&quot;type&quot;:&quot;text&quot;}"/>
           <p:cNvSpPr txBox="1"/>
           <p:nvPr/>
         </p:nvSpPr>
@@ -11669,7 +12627,7 @@
       </p:sp>
       <p:sp>
         <p:nvSpPr>
-          <p:cNvPr id="261" name=""/>
+          <p:cNvPr id="281" name=""/>
           <p:cNvSpPr/>
           <p:nvPr/>
         </p:nvSpPr>
@@ -11697,7 +12655,7 @@
       </p:sp>
       <p:pic>
         <p:nvPicPr>
-          <p:cNvPr id="262" name=""/>
+          <p:cNvPr id="282" name=""/>
           <p:cNvPicPr>
             <a:picLocks noChangeAspect="1"/>
           </p:cNvPicPr>
@@ -11728,7 +12686,7 @@
       </p:pic>
       <p:sp>
         <p:nvSpPr>
-          <p:cNvPr id="263" name="" descr="{&quot;isTemplate&quot;:true,&quot;type&quot;:&quot;text&quot;}"/>
+          <p:cNvPr id="283" name="" descr="{&quot;isTemplate&quot;:true,&quot;type&quot;:&quot;text&quot;}"/>
           <p:cNvSpPr txBox="1"/>
           <p:nvPr/>
         </p:nvSpPr>
@@ -11763,7 +12721,7 @@
       </p:sp>
       <p:sp>
         <p:nvSpPr>
-          <p:cNvPr id="264" name="" descr="{&quot;isTemplate&quot;:true,&quot;type&quot;:&quot;text&quot;}"/>
+          <p:cNvPr id="284" name="" descr="{&quot;isTemplate&quot;:true,&quot;type&quot;:&quot;text&quot;}"/>
           <p:cNvSpPr txBox="1"/>
           <p:nvPr/>
         </p:nvSpPr>
@@ -11790,7 +12748,7 @@
                 <a:latin typeface="Verdana"/>
                 <a:ea typeface="Verdana"/>
               </a:rPr>
-              <a:t>06 / 16</a:t>
+              <a:t>06 / 17</a:t>
             </a:r>
             <a:endParaRPr/>
           </a:p>
@@ -11806,7 +12764,7 @@
   <p:cSld>
     <p:spTree>
       <p:nvGrpSpPr>
-        <p:cNvPr id="265" name="" descr="&lt;Slide&#10;    style={{&#10;        width: '1280px',&#10;        height: '720px',&#10;        background: 'linear-gradient(135deg, #51277C 0%, #7A45A8 100%)',&#10;        paddingTop: 60,&#10;        paddingBottom: 60,&#10;        paddingLeft: 72,&#10;        paddingRight: 72,&#10;        justifyContent: 'center',&#10;        position: 'relative',&#10;        overflow: 'hidden',&#10;    }}&#10;&gt;&#10;    &lt;Box&#10;        style={{&#10;            position: 'absolute',&#10;            top: -100,&#10;            right: -60,&#10;            width: 420,&#10;            height: 420,&#10;            borderRadius: 210,&#10;            background: '#AFC440',&#10;            opacity: 0.14,&#10;        }}&#10;    /&gt;&#10;    &lt;Box style={{ position: 'absolute', bottom: 46, right: 78, opacity: 0.16 }}&gt;&#10;        &lt;svg width={230} height={190} viewBox='0 0 230 190'&gt;&#10;            &lt;rect x='10' y='30' width='210' height='150' rx='16' fill='none' stroke='#FFFFFF' strokeWidth='6' /&gt;&#10;            &lt;path d='M10 68h210' stroke='#FFFFFF' strokeWidth='6' /&gt;&#10;            &lt;path d='M56 8v34M174 8v34' stroke='#FFFFFF' strokeWidth='8' strokeLinecap='round' /&gt;&#10;            &lt;rect x='38' y='90' width='32' height='24' rx='5' fill='#FFFFFF' /&gt;&#10;            &lt;rect x='88' y='90' width='32' height='24' rx='5' fill='#FFFFFF' /&gt;&#10;            &lt;rect x='138' y='90' width='32' height='24' rx='5' fill='#F3B26C' /&gt;&#10;            &lt;rect x='38' y='132' width='32' height='24' rx='5' fill='#FFFFFF' /&gt;&#10;            &lt;rect x='88' y='132' width='32' height='24' rx='5' fill='#FFFFFF' /&gt;&#10;            &lt;path d='M150 168l30-72 22 40 20-16 8 48z' fill='none' stroke='#FFFFFF' strokeWidth='6' strokeLinejoin='round' /&gt;&#10;        &lt;/svg&gt;&#10;    &lt;/Box&gt;&#10;&#10;    &lt;Box style={{ position: 'relative', zIndex: 1, width: '62%' }}&gt;&#10;        &lt;Box style={{ flexDirection: 'row', alignItems: 'center', gap: 14, alignSelf: 'flex-start' }}&gt;&#10;            &lt;Text&#10;                style={{&#10;                    fontSize: 76,&#10;                    fontWeight: 'bold',&#10;                    color: '#F3B26C',&#10;                    fontFamily: 'Trebuchet MS',&#10;                    lineHeight: 1,&#10;                }}&#10;            &gt;&#10;                03&#10;            &lt;/Text&gt;&#10;            &lt;Box style={{ width: 3, height: 52, background: 'rgba(255,255,255,0.45)' }} /&gt;&#10;            &lt;Text style={{ fontSize: 19, color: 'rgba(255,255,255,0.8)', fontFamily: 'Verdana' }}&gt;&#10;                Bagian ketiga&#10;            &lt;/Text&gt;&#10;        &lt;/Box&gt;&#10;&#10;        &lt;Text&#10;            style={{&#10;                marginTop: 26,&#10;                fontSize: 60,&#10;                fontWeight: 'bold',&#10;                color: '#FFFFFF',&#10;                fontFamily: 'Trebuchet MS',&#10;                lineHeight: 1.15,&#10;            }}&#10;        &gt;&#10;            Menyusun{'\n'}jadwal&#10;        &lt;/Text&gt;&#10;&#10;        &lt;Text&#10;            style={{&#10;                marginTop: 24,&#10;                fontSize: 22,&#10;                color: 'rgba(255,255,255,0.88)',&#10;                fontFamily: 'Verdana',&#10;                lineHeight: 1.5,&#10;            }}&#10;        &gt;&#10;            Tiga cara mengisi — pilih yang paling dekat dengan bahan yang Anda punya.&#10;        &lt;/Text&gt;&#10;    &lt;/Box&gt;&#10;&lt;/Slide&gt;&#10;"/>
+        <p:cNvPr id="285" name=""/>
         <p:cNvGrpSpPr/>
         <p:nvPr/>
       </p:nvGrpSpPr>
@@ -11820,7 +12778,861 @@
       </p:grpSpPr>
       <p:sp>
         <p:nvSpPr>
-          <p:cNvPr id="266" name=""/>
+          <p:cNvPr id="286" name=""/>
+          <p:cNvSpPr/>
+          <p:nvPr/>
+        </p:nvSpPr>
+        <p:spPr>
+          <a:xfrm rot="0" flipH="0" flipV="0">
+            <a:off x="0" y="0"/>
+            <a:ext cx="12192000" cy="6858000"/>
+          </a:xfrm>
+          <a:prstGeom prst="rect">
+            <a:avLst/>
+          </a:prstGeom>
+          <a:solidFill>
+            <a:srgbClr val="FAF7F2"/>
+          </a:solidFill>
+          <a:ln/>
+        </p:spPr>
+        <p:txBody>
+          <a:bodyPr/>
+          <a:p>
+            <a:pPr/>
+            <a:endParaRPr/>
+          </a:p>
+        </p:txBody>
+      </p:sp>
+      <p:sp>
+        <p:nvSpPr>
+          <p:cNvPr id="287" name="" descr="{&quot;isTemplate&quot;:true,&quot;type&quot;:&quot;text&quot;}"/>
+          <p:cNvSpPr txBox="1"/>
+          <p:nvPr/>
+        </p:nvSpPr>
+        <p:spPr>
+          <a:xfrm rot="0" flipH="0" flipV="0">
+            <a:off x="609600" y="381000"/>
+            <a:ext cx="10972800" cy="514350"/>
+          </a:xfrm>
+          <a:prstGeom prst="rect"/>
+        </p:spPr>
+        <p:txBody>
+          <a:bodyPr wrap="none" lIns="0" tIns="0" rIns="0" bIns="0"/>
+          <a:p>
+            <a:pPr>
+              <a:lnSpc>
+                <a:spcPct val="130000"/>
+              </a:lnSpc>
+            </a:pPr>
+            <a:r>
+              <a:rPr lang="en-US" sz="2550" b="1">
+                <a:solidFill>
+                  <a:srgbClr val="51277C"/>
+                </a:solidFill>
+                <a:latin typeface="Trebuchet MS"/>
+                <a:ea typeface="Trebuchet MS"/>
+              </a:rPr>
+              <a:t>Kelola akun orang tua sekaligus</a:t>
+            </a:r>
+            <a:endParaRPr/>
+          </a:p>
+        </p:txBody>
+      </p:sp>
+      <p:sp>
+        <p:nvSpPr>
+          <p:cNvPr id="288" name=""/>
+          <p:cNvSpPr/>
+          <p:nvPr/>
+        </p:nvSpPr>
+        <p:spPr>
+          <a:xfrm rot="0" flipH="0" flipV="0">
+            <a:off x="609600" y="990600"/>
+            <a:ext cx="685800" cy="57150"/>
+          </a:xfrm>
+          <a:prstGeom prst="roundRect">
+            <a:avLst>
+              <a:gd name="adj" fmla="val 50000"/>
+            </a:avLst>
+          </a:prstGeom>
+          <a:solidFill>
+            <a:srgbClr val="51277C"/>
+          </a:solidFill>
+          <a:ln/>
+        </p:spPr>
+        <p:txBody>
+          <a:bodyPr/>
+          <a:p>
+            <a:pPr/>
+            <a:endParaRPr/>
+          </a:p>
+        </p:txBody>
+      </p:sp>
+      <p:sp>
+        <p:nvSpPr>
+          <p:cNvPr id="289" name=""/>
+          <p:cNvSpPr/>
+          <p:nvPr/>
+        </p:nvSpPr>
+        <p:spPr>
+          <a:xfrm rot="0" flipH="0" flipV="0">
+            <a:off x="609600" y="1238250"/>
+            <a:ext cx="5876925" cy="5048250"/>
+          </a:xfrm>
+          <a:prstGeom prst="roundRect">
+            <a:avLst>
+              <a:gd name="adj" fmla="val 3774"/>
+            </a:avLst>
+          </a:prstGeom>
+          <a:solidFill>
+            <a:srgbClr val="51277C">
+              <a:alpha val="6000"/>
+            </a:srgbClr>
+          </a:solidFill>
+          <a:ln/>
+        </p:spPr>
+        <p:txBody>
+          <a:bodyPr/>
+          <a:p>
+            <a:pPr/>
+            <a:endParaRPr/>
+          </a:p>
+        </p:txBody>
+      </p:sp>
+      <p:pic>
+        <p:nvPicPr>
+          <p:cNvPr id="290" name=""/>
+          <p:cNvPicPr>
+            <a:picLocks noChangeAspect="1"/>
+          </p:cNvPicPr>
+          <p:nvPr/>
+        </p:nvPicPr>
+        <p:blipFill>
+          <a:blip r:embed="rId1">
+            <a:extLst>
+              <a:ext uri="{96DAC541-7B7A-43D3-8B79-37D633B846F1}">
+                <asvg:svgBlip r:embed="rId1"/>
+              </a:ext>
+            </a:extLst>
+          </a:blip>
+          <a:stretch>
+            <a:fillRect/>
+          </a:stretch>
+        </p:blipFill>
+        <p:spPr>
+          <a:xfrm rot="0" flipH="0" flipV="0">
+            <a:off x="1076325" y="1714500"/>
+            <a:ext cx="4953000" cy="4095750"/>
+          </a:xfrm>
+          <a:prstGeom prst="rect">
+            <a:avLst/>
+          </a:prstGeom>
+          <a:ln/>
+        </p:spPr>
+      </p:pic>
+      <p:sp>
+        <p:nvSpPr>
+          <p:cNvPr id="291" name=""/>
+          <p:cNvSpPr/>
+          <p:nvPr/>
+        </p:nvSpPr>
+        <p:spPr>
+          <a:xfrm rot="0" flipH="0" flipV="0">
+            <a:off x="6848475" y="1238250"/>
+            <a:ext cx="4810125" cy="1581150"/>
+          </a:xfrm>
+          <a:prstGeom prst="roundRect">
+            <a:avLst>
+              <a:gd name="adj" fmla="val 9639"/>
+            </a:avLst>
+          </a:prstGeom>
+          <a:solidFill>
+            <a:srgbClr val="FFFFFF"/>
+          </a:solidFill>
+          <a:ln/>
+          <a:effectLst>
+            <a:outerShdw blurRad="190500" dist="38100" dir="5400000">
+              <a:srgbClr val="000000">
+                <a:alpha val="8000"/>
+              </a:srgbClr>
+            </a:outerShdw>
+          </a:effectLst>
+        </p:spPr>
+        <p:txBody>
+          <a:bodyPr/>
+          <a:p>
+            <a:pPr/>
+            <a:endParaRPr/>
+          </a:p>
+        </p:txBody>
+      </p:sp>
+      <p:sp>
+        <p:nvSpPr>
+          <p:cNvPr id="292" name=""/>
+          <p:cNvSpPr/>
+          <p:nvPr/>
+        </p:nvSpPr>
+        <p:spPr>
+          <a:xfrm rot="0" flipH="0" flipV="0">
+            <a:off x="6848475" y="1238250"/>
+            <a:ext cx="4810125" cy="1581150"/>
+          </a:xfrm>
+          <a:custGeom>
+            <a:pathLst>
+              <a:path w="505" h="166">
+                <a:moveTo>
+                  <a:pt x="15" y="0"/>
+                </a:moveTo>
+                <a:cubicBezTo>
+                  <a:pt x="11" y="0"/>
+                  <a:pt x="8" y="4"/>
+                  <a:pt x="8" y="8"/>
+                </a:cubicBezTo>
+                <a:lnTo>
+                  <a:pt x="8" y="158"/>
+                </a:lnTo>
+                <a:cubicBezTo>
+                  <a:pt x="8" y="162"/>
+                  <a:pt x="11" y="165"/>
+                  <a:pt x="14" y="166"/>
+                </a:cubicBezTo>
+                <a:cubicBezTo>
+                  <a:pt x="6" y="165"/>
+                  <a:pt x="0" y="158"/>
+                  <a:pt x="0" y="150"/>
+                </a:cubicBezTo>
+                <a:lnTo>
+                  <a:pt x="0" y="16"/>
+                </a:lnTo>
+                <a:cubicBezTo>
+                  <a:pt x="0" y="7"/>
+                  <a:pt x="7" y="0"/>
+                  <a:pt x="16" y="0"/>
+                </a:cubicBezTo>
+                <a:close/>
+              </a:path>
+            </a:pathLst>
+          </a:custGeom>
+          <a:solidFill>
+            <a:srgbClr val="AFC440"/>
+          </a:solidFill>
+          <a:ln/>
+        </p:spPr>
+        <p:txBody>
+          <a:bodyPr/>
+          <a:p>
+            <a:pPr/>
+            <a:endParaRPr/>
+          </a:p>
+        </p:txBody>
+      </p:sp>
+      <p:sp>
+        <p:nvSpPr>
+          <p:cNvPr id="293" name="" descr="{&quot;isTemplate&quot;:true,&quot;type&quot;:&quot;text&quot;}"/>
+          <p:cNvSpPr txBox="1"/>
+          <p:nvPr/>
+        </p:nvSpPr>
+        <p:spPr>
+          <a:xfrm rot="0" flipH="0" flipV="0">
+            <a:off x="7058025" y="1447800"/>
+            <a:ext cx="4314825" cy="361950"/>
+          </a:xfrm>
+          <a:prstGeom prst="rect"/>
+        </p:spPr>
+        <p:txBody>
+          <a:bodyPr wrap="none" lIns="0" tIns="0" rIns="0" bIns="0"/>
+          <a:p>
+            <a:pPr>
+              <a:lnSpc>
+                <a:spcPct val="130000"/>
+              </a:lnSpc>
+            </a:pPr>
+            <a:r>
+              <a:rPr lang="en-US" sz="1800" b="1">
+                <a:solidFill>
+                  <a:srgbClr val="51277C"/>
+                </a:solidFill>
+                <a:latin typeface="Trebuchet MS"/>
+                <a:ea typeface="Trebuchet MS"/>
+              </a:rPr>
+              <a:t>Satu berkas, dua arah</a:t>
+            </a:r>
+            <a:endParaRPr/>
+          </a:p>
+        </p:txBody>
+      </p:sp>
+      <p:sp>
+        <p:nvSpPr>
+          <p:cNvPr id="294" name="" descr="{&quot;isTemplate&quot;:true,&quot;type&quot;:&quot;text&quot;}"/>
+          <p:cNvSpPr txBox="1"/>
+          <p:nvPr/>
+        </p:nvSpPr>
+        <p:spPr>
+          <a:xfrm rot="0" flipH="0" flipV="0">
+            <a:off x="7058025" y="1905000"/>
+            <a:ext cx="4314825" cy="590550"/>
+          </a:xfrm>
+          <a:prstGeom prst="rect"/>
+        </p:spPr>
+        <p:txBody>
+          <a:bodyPr wrap="square" lIns="0" tIns="0" rIns="0" bIns="0">
+            <a:normAutofit/>
+          </a:bodyPr>
+          <a:p>
+            <a:pPr>
+              <a:lnSpc>
+                <a:spcPct val="150000"/>
+              </a:lnSpc>
+            </a:pPr>
+            <a:r>
+              <a:rPr lang="en-US" sz="1275">
+                <a:solidFill>
+                  <a:srgbClr val="6B6478"/>
+                </a:solidFill>
+                <a:latin typeface="Verdana"/>
+                <a:ea typeface="Verdana"/>
+              </a:rPr>
+              <a:t>Unduh daftar akun sebagai Excel, sunting sebanyak yang perlu, lalu unggah kembali berkas yang sama.</a:t>
+            </a:r>
+            <a:endParaRPr/>
+          </a:p>
+        </p:txBody>
+      </p:sp>
+      <p:sp>
+        <p:nvSpPr>
+          <p:cNvPr id="295" name="" descr="{&quot;isTemplate&quot;:true,&quot;type&quot;:&quot;text&quot;}"/>
+          <p:cNvSpPr txBox="1"/>
+          <p:nvPr/>
+        </p:nvSpPr>
+        <p:spPr>
+          <a:xfrm rot="0" flipH="0" flipV="0">
+            <a:off x="7058025" y="2419350"/>
+            <a:ext cx="4314825" cy="190500"/>
+          </a:xfrm>
+          <a:prstGeom prst="rect"/>
+        </p:spPr>
+        <p:txBody>
+          <a:bodyPr wrap="none" lIns="0" tIns="0" rIns="0" bIns="0"/>
+          <a:p>
+            <a:pPr>
+              <a:lnSpc>
+                <a:spcPct val="100000"/>
+              </a:lnSpc>
+            </a:pPr>
+            <a:r>
+              <a:rPr lang="en-US" sz="1200" b="1">
+                <a:solidFill>
+                  <a:srgbClr val="51277C"/>
+                </a:solidFill>
+                <a:latin typeface="Verdana"/>
+                <a:ea typeface="Verdana"/>
+              </a:rPr>
+              <a:t>Khusus admin</a:t>
+            </a:r>
+            <a:endParaRPr/>
+          </a:p>
+        </p:txBody>
+      </p:sp>
+      <p:sp>
+        <p:nvSpPr>
+          <p:cNvPr id="296" name=""/>
+          <p:cNvSpPr/>
+          <p:nvPr/>
+        </p:nvSpPr>
+        <p:spPr>
+          <a:xfrm rot="0" flipH="0" flipV="0">
+            <a:off x="6848475" y="2971800"/>
+            <a:ext cx="4810125" cy="1581150"/>
+          </a:xfrm>
+          <a:prstGeom prst="roundRect">
+            <a:avLst>
+              <a:gd name="adj" fmla="val 9639"/>
+            </a:avLst>
+          </a:prstGeom>
+          <a:solidFill>
+            <a:srgbClr val="FFFFFF"/>
+          </a:solidFill>
+          <a:ln/>
+          <a:effectLst>
+            <a:outerShdw blurRad="190500" dist="38100" dir="5400000">
+              <a:srgbClr val="000000">
+                <a:alpha val="8000"/>
+              </a:srgbClr>
+            </a:outerShdw>
+          </a:effectLst>
+        </p:spPr>
+        <p:txBody>
+          <a:bodyPr/>
+          <a:p>
+            <a:pPr/>
+            <a:endParaRPr/>
+          </a:p>
+        </p:txBody>
+      </p:sp>
+      <p:sp>
+        <p:nvSpPr>
+          <p:cNvPr id="297" name=""/>
+          <p:cNvSpPr/>
+          <p:nvPr/>
+        </p:nvSpPr>
+        <p:spPr>
+          <a:xfrm rot="0" flipH="0" flipV="0">
+            <a:off x="6848475" y="2971800"/>
+            <a:ext cx="4810125" cy="1581150"/>
+          </a:xfrm>
+          <a:custGeom>
+            <a:pathLst>
+              <a:path w="505" h="166">
+                <a:moveTo>
+                  <a:pt x="15" y="0"/>
+                </a:moveTo>
+                <a:cubicBezTo>
+                  <a:pt x="11" y="0"/>
+                  <a:pt x="8" y="4"/>
+                  <a:pt x="8" y="8"/>
+                </a:cubicBezTo>
+                <a:lnTo>
+                  <a:pt x="8" y="158"/>
+                </a:lnTo>
+                <a:cubicBezTo>
+                  <a:pt x="8" y="162"/>
+                  <a:pt x="11" y="165"/>
+                  <a:pt x="14" y="166"/>
+                </a:cubicBezTo>
+                <a:cubicBezTo>
+                  <a:pt x="6" y="165"/>
+                  <a:pt x="0" y="158"/>
+                  <a:pt x="0" y="150"/>
+                </a:cubicBezTo>
+                <a:lnTo>
+                  <a:pt x="0" y="16"/>
+                </a:lnTo>
+                <a:cubicBezTo>
+                  <a:pt x="0" y="7"/>
+                  <a:pt x="7" y="0"/>
+                  <a:pt x="16" y="0"/>
+                </a:cubicBezTo>
+                <a:close/>
+              </a:path>
+            </a:pathLst>
+          </a:custGeom>
+          <a:solidFill>
+            <a:srgbClr val="AFC440"/>
+          </a:solidFill>
+          <a:ln/>
+        </p:spPr>
+        <p:txBody>
+          <a:bodyPr/>
+          <a:p>
+            <a:pPr/>
+            <a:endParaRPr/>
+          </a:p>
+        </p:txBody>
+      </p:sp>
+      <p:sp>
+        <p:nvSpPr>
+          <p:cNvPr id="298" name="" descr="{&quot;isTemplate&quot;:true,&quot;type&quot;:&quot;text&quot;}"/>
+          <p:cNvSpPr txBox="1"/>
+          <p:nvPr/>
+        </p:nvSpPr>
+        <p:spPr>
+          <a:xfrm rot="0" flipH="0" flipV="0">
+            <a:off x="7058025" y="3181350"/>
+            <a:ext cx="4314825" cy="361950"/>
+          </a:xfrm>
+          <a:prstGeom prst="rect"/>
+        </p:spPr>
+        <p:txBody>
+          <a:bodyPr wrap="none" lIns="0" tIns="0" rIns="0" bIns="0"/>
+          <a:p>
+            <a:pPr>
+              <a:lnSpc>
+                <a:spcPct val="130000"/>
+              </a:lnSpc>
+            </a:pPr>
+            <a:r>
+              <a:rPr lang="en-US" sz="1800" b="1">
+                <a:solidFill>
+                  <a:srgbClr val="51277C"/>
+                </a:solidFill>
+                <a:latin typeface="Trebuchet MS"/>
+                <a:ea typeface="Trebuchet MS"/>
+              </a:rPr>
+              <a:t>Ada ditimpa, baru ditambah</a:t>
+            </a:r>
+            <a:endParaRPr/>
+          </a:p>
+        </p:txBody>
+      </p:sp>
+      <p:sp>
+        <p:nvSpPr>
+          <p:cNvPr id="299" name="" descr="{&quot;isTemplate&quot;:true,&quot;type&quot;:&quot;text&quot;}"/>
+          <p:cNvSpPr txBox="1"/>
+          <p:nvPr/>
+        </p:nvSpPr>
+        <p:spPr>
+          <a:xfrm rot="0" flipH="0" flipV="0">
+            <a:off x="7058025" y="3638550"/>
+            <a:ext cx="4314825" cy="876300"/>
+          </a:xfrm>
+          <a:prstGeom prst="rect"/>
+        </p:spPr>
+        <p:txBody>
+          <a:bodyPr wrap="square" lIns="0" tIns="0" rIns="0" bIns="0">
+            <a:normAutofit/>
+          </a:bodyPr>
+          <a:p>
+            <a:pPr>
+              <a:lnSpc>
+                <a:spcPct val="150000"/>
+              </a:lnSpc>
+            </a:pPr>
+            <a:r>
+              <a:rPr lang="en-US" sz="1275">
+                <a:solidFill>
+                  <a:srgbClr val="6B6478"/>
+                </a:solidFill>
+                <a:latin typeface="Verdana"/>
+                <a:ea typeface="Verdana"/>
+              </a:rPr>
+              <a:t>Username yang sudah terdaftar diperbarui; yang belum ada dibuatkan akun baru. Sel kosong tidak mengubah apa pun.</a:t>
+            </a:r>
+            <a:endParaRPr/>
+          </a:p>
+        </p:txBody>
+      </p:sp>
+      <p:sp>
+        <p:nvSpPr>
+          <p:cNvPr id="300" name="" descr="{&quot;isTemplate&quot;:true,&quot;type&quot;:&quot;text&quot;}"/>
+          <p:cNvSpPr txBox="1"/>
+          <p:nvPr/>
+        </p:nvSpPr>
+        <p:spPr>
+          <a:xfrm rot="0" flipH="0" flipV="0">
+            <a:off x="7058025" y="4152900"/>
+            <a:ext cx="4314825" cy="190500"/>
+          </a:xfrm>
+          <a:prstGeom prst="rect"/>
+        </p:spPr>
+        <p:txBody>
+          <a:bodyPr wrap="none" lIns="0" tIns="0" rIns="0" bIns="0"/>
+          <a:p>
+            <a:pPr>
+              <a:lnSpc>
+                <a:spcPct val="100000"/>
+              </a:lnSpc>
+            </a:pPr>
+            <a:r>
+              <a:rPr lang="en-US" sz="1200" b="1">
+                <a:solidFill>
+                  <a:srgbClr val="51277C"/>
+                </a:solidFill>
+                <a:latin typeface="Verdana"/>
+                <a:ea typeface="Verdana"/>
+              </a:rPr>
+              <a:t>Dikunci pada username</a:t>
+            </a:r>
+            <a:endParaRPr/>
+          </a:p>
+        </p:txBody>
+      </p:sp>
+      <p:sp>
+        <p:nvSpPr>
+          <p:cNvPr id="301" name=""/>
+          <p:cNvSpPr/>
+          <p:nvPr/>
+        </p:nvSpPr>
+        <p:spPr>
+          <a:xfrm rot="0" flipH="0" flipV="0">
+            <a:off x="6848475" y="4705350"/>
+            <a:ext cx="4810125" cy="1581150"/>
+          </a:xfrm>
+          <a:prstGeom prst="roundRect">
+            <a:avLst>
+              <a:gd name="adj" fmla="val 9639"/>
+            </a:avLst>
+          </a:prstGeom>
+          <a:solidFill>
+            <a:srgbClr val="FFFFFF"/>
+          </a:solidFill>
+          <a:ln/>
+          <a:effectLst>
+            <a:outerShdw blurRad="190500" dist="38100" dir="5400000">
+              <a:srgbClr val="000000">
+                <a:alpha val="8000"/>
+              </a:srgbClr>
+            </a:outerShdw>
+          </a:effectLst>
+        </p:spPr>
+        <p:txBody>
+          <a:bodyPr/>
+          <a:p>
+            <a:pPr/>
+            <a:endParaRPr/>
+          </a:p>
+        </p:txBody>
+      </p:sp>
+      <p:sp>
+        <p:nvSpPr>
+          <p:cNvPr id="302" name=""/>
+          <p:cNvSpPr/>
+          <p:nvPr/>
+        </p:nvSpPr>
+        <p:spPr>
+          <a:xfrm rot="0" flipH="0" flipV="0">
+            <a:off x="6848475" y="4705350"/>
+            <a:ext cx="4810125" cy="1581150"/>
+          </a:xfrm>
+          <a:custGeom>
+            <a:pathLst>
+              <a:path w="505" h="166">
+                <a:moveTo>
+                  <a:pt x="15" y="0"/>
+                </a:moveTo>
+                <a:cubicBezTo>
+                  <a:pt x="11" y="0"/>
+                  <a:pt x="8" y="4"/>
+                  <a:pt x="8" y="8"/>
+                </a:cubicBezTo>
+                <a:lnTo>
+                  <a:pt x="8" y="158"/>
+                </a:lnTo>
+                <a:cubicBezTo>
+                  <a:pt x="8" y="162"/>
+                  <a:pt x="11" y="165"/>
+                  <a:pt x="14" y="166"/>
+                </a:cubicBezTo>
+                <a:cubicBezTo>
+                  <a:pt x="6" y="165"/>
+                  <a:pt x="0" y="158"/>
+                  <a:pt x="0" y="150"/>
+                </a:cubicBezTo>
+                <a:lnTo>
+                  <a:pt x="0" y="16"/>
+                </a:lnTo>
+                <a:cubicBezTo>
+                  <a:pt x="0" y="7"/>
+                  <a:pt x="7" y="0"/>
+                  <a:pt x="16" y="0"/>
+                </a:cubicBezTo>
+                <a:close/>
+              </a:path>
+            </a:pathLst>
+          </a:custGeom>
+          <a:solidFill>
+            <a:srgbClr val="F3B26C"/>
+          </a:solidFill>
+          <a:ln/>
+        </p:spPr>
+        <p:txBody>
+          <a:bodyPr/>
+          <a:p>
+            <a:pPr/>
+            <a:endParaRPr/>
+          </a:p>
+        </p:txBody>
+      </p:sp>
+      <p:sp>
+        <p:nvSpPr>
+          <p:cNvPr id="303" name="" descr="{&quot;isTemplate&quot;:true,&quot;type&quot;:&quot;text&quot;}"/>
+          <p:cNvSpPr txBox="1"/>
+          <p:nvPr/>
+        </p:nvSpPr>
+        <p:spPr>
+          <a:xfrm rot="0" flipH="0" flipV="0">
+            <a:off x="7058025" y="4914900"/>
+            <a:ext cx="4314825" cy="361950"/>
+          </a:xfrm>
+          <a:prstGeom prst="rect"/>
+        </p:spPr>
+        <p:txBody>
+          <a:bodyPr wrap="none" lIns="0" tIns="0" rIns="0" bIns="0"/>
+          <a:p>
+            <a:pPr>
+              <a:lnSpc>
+                <a:spcPct val="130000"/>
+              </a:lnSpc>
+            </a:pPr>
+            <a:r>
+              <a:rPr lang="en-US" sz="1800" b="1">
+                <a:solidFill>
+                  <a:srgbClr val="51277C"/>
+                </a:solidFill>
+                <a:latin typeface="Trebuchet MS"/>
+                <a:ea typeface="Trebuchet MS"/>
+              </a:rPr>
+              <a:t>Pratinjau sebelum berubah</a:t>
+            </a:r>
+            <a:endParaRPr/>
+          </a:p>
+        </p:txBody>
+      </p:sp>
+      <p:sp>
+        <p:nvSpPr>
+          <p:cNvPr id="304" name="" descr="{&quot;isTemplate&quot;:true,&quot;type&quot;:&quot;text&quot;}"/>
+          <p:cNvSpPr txBox="1"/>
+          <p:nvPr/>
+        </p:nvSpPr>
+        <p:spPr>
+          <a:xfrm rot="0" flipH="0" flipV="0">
+            <a:off x="7058025" y="5372100"/>
+            <a:ext cx="4314825" cy="590550"/>
+          </a:xfrm>
+          <a:prstGeom prst="rect"/>
+        </p:spPr>
+        <p:txBody>
+          <a:bodyPr wrap="square" lIns="0" tIns="0" rIns="0" bIns="0">
+            <a:normAutofit/>
+          </a:bodyPr>
+          <a:p>
+            <a:pPr>
+              <a:lnSpc>
+                <a:spcPct val="150000"/>
+              </a:lnSpc>
+            </a:pPr>
+            <a:r>
+              <a:rPr lang="en-US" sz="1275">
+                <a:solidFill>
+                  <a:srgbClr val="6B6478"/>
+                </a:solidFill>
+                <a:latin typeface="Verdana"/>
+                <a:ea typeface="Verdana"/>
+              </a:rPr>
+              <a:t>Layar menunjukkan lebih dulu berapa akun dibuat, diperbarui, dan dilewati. Belum ada yang tersimpan.</a:t>
+            </a:r>
+            <a:endParaRPr/>
+          </a:p>
+        </p:txBody>
+      </p:sp>
+      <p:sp>
+        <p:nvSpPr>
+          <p:cNvPr id="305" name="" descr="{&quot;isTemplate&quot;:true,&quot;type&quot;:&quot;text&quot;}"/>
+          <p:cNvSpPr txBox="1"/>
+          <p:nvPr/>
+        </p:nvSpPr>
+        <p:spPr>
+          <a:xfrm rot="0" flipH="0" flipV="0">
+            <a:off x="7058025" y="5886450"/>
+            <a:ext cx="4314825" cy="190500"/>
+          </a:xfrm>
+          <a:prstGeom prst="rect"/>
+        </p:spPr>
+        <p:txBody>
+          <a:bodyPr wrap="none" lIns="0" tIns="0" rIns="0" bIns="0"/>
+          <a:p>
+            <a:pPr>
+              <a:lnSpc>
+                <a:spcPct val="100000"/>
+              </a:lnSpc>
+            </a:pPr>
+            <a:r>
+              <a:rPr lang="en-US" sz="1200" b="1">
+                <a:solidFill>
+                  <a:srgbClr val="51277C"/>
+                </a:solidFill>
+                <a:latin typeface="Verdana"/>
+                <a:ea typeface="Verdana"/>
+              </a:rPr>
+              <a:t>Aman diulang</a:t>
+            </a:r>
+            <a:endParaRPr/>
+          </a:p>
+        </p:txBody>
+      </p:sp>
+      <p:sp>
+        <p:nvSpPr>
+          <p:cNvPr id="306" name="" descr="{&quot;isTemplate&quot;:true,&quot;type&quot;:&quot;text&quot;}"/>
+          <p:cNvSpPr txBox="1"/>
+          <p:nvPr/>
+        </p:nvSpPr>
+        <p:spPr>
+          <a:xfrm rot="0" flipH="0" flipV="0">
+            <a:off x="609600" y="6400800"/>
+            <a:ext cx="2905125" cy="161925"/>
+          </a:xfrm>
+          <a:prstGeom prst="rect"/>
+        </p:spPr>
+        <p:txBody>
+          <a:bodyPr wrap="none" lIns="0" tIns="0" rIns="0" bIns="0"/>
+          <a:p>
+            <a:pPr>
+              <a:lnSpc>
+                <a:spcPct val="100000"/>
+              </a:lnSpc>
+            </a:pPr>
+            <a:r>
+              <a:rPr lang="en-US" sz="1050">
+                <a:solidFill>
+                  <a:srgbClr val="6B6478"/>
+                </a:solidFill>
+                <a:latin typeface="Verdana"/>
+                <a:ea typeface="Verdana"/>
+              </a:rPr>
+              <a:t>Pizza Snack Play · Panduan Korlas &amp; Admin</a:t>
+            </a:r>
+            <a:endParaRPr/>
+          </a:p>
+        </p:txBody>
+      </p:sp>
+      <p:sp>
+        <p:nvSpPr>
+          <p:cNvPr id="307" name="" descr="{&quot;isTemplate&quot;:true,&quot;type&quot;:&quot;text&quot;}"/>
+          <p:cNvSpPr txBox="1"/>
+          <p:nvPr/>
+        </p:nvSpPr>
+        <p:spPr>
+          <a:xfrm rot="0" flipH="0" flipV="0">
+            <a:off x="11087100" y="6400800"/>
+            <a:ext cx="495300" cy="161925"/>
+          </a:xfrm>
+          <a:prstGeom prst="rect"/>
+        </p:spPr>
+        <p:txBody>
+          <a:bodyPr wrap="none" lIns="0" tIns="0" rIns="0" bIns="0"/>
+          <a:p>
+            <a:pPr>
+              <a:lnSpc>
+                <a:spcPct val="100000"/>
+              </a:lnSpc>
+            </a:pPr>
+            <a:r>
+              <a:rPr lang="en-US" sz="1050">
+                <a:solidFill>
+                  <a:srgbClr val="6B6478"/>
+                </a:solidFill>
+                <a:latin typeface="Verdana"/>
+                <a:ea typeface="Verdana"/>
+              </a:rPr>
+              <a:t>07 / 17</a:t>
+            </a:r>
+            <a:endParaRPr/>
+          </a:p>
+        </p:txBody>
+      </p:sp>
+    </p:spTree>
+  </p:cSld>
+</p:sld>
+</file>
+
+<file path=ppt/slides/slide8.xml><?xml version="1.0" encoding="utf-8"?>
+<p:sld xmlns:p="http://schemas.openxmlformats.org/presentationml/2006/main" xmlns:a="http://schemas.openxmlformats.org/drawingml/2006/main" xmlns:asvg="http://schemas.microsoft.com/office/drawing/2016/SVG/main" xmlns:r="http://schemas.openxmlformats.org/officeDocument/2006/relationships" xmlns:mc="http://schemas.openxmlformats.org/markup-compatibility/2006" mc:Ignorable="asvg">
+  <p:cSld>
+    <p:spTree>
+      <p:nvGrpSpPr>
+        <p:cNvPr id="308" name=""/>
+        <p:cNvGrpSpPr/>
+        <p:nvPr/>
+      </p:nvGrpSpPr>
+      <p:grpSpPr>
+        <a:xfrm>
+          <a:off x="0" y="0"/>
+          <a:ext cx="0" cy="0"/>
+          <a:chOff x="0" y="0"/>
+          <a:chExt cx="0" cy="0"/>
+        </a:xfrm>
+      </p:grpSpPr>
+      <p:sp>
+        <p:nvSpPr>
+          <p:cNvPr id="309" name=""/>
           <p:cNvSpPr/>
           <p:nvPr/>
         </p:nvSpPr>
@@ -11847,12 +13659,15 @@
         </p:spPr>
         <p:txBody>
           <a:bodyPr/>
-          <a:p/>
-        </p:txBody>
-      </p:sp>
-      <p:sp>
-        <p:nvSpPr>
-          <p:cNvPr id="267" name=""/>
+          <a:p>
+            <a:pPr/>
+            <a:endParaRPr/>
+          </a:p>
+        </p:txBody>
+      </p:sp>
+      <p:sp>
+        <p:nvSpPr>
+          <p:cNvPr id="310" name=""/>
           <p:cNvSpPr/>
           <p:nvPr/>
         </p:nvSpPr>
@@ -12243,12 +14058,15 @@
         </p:spPr>
         <p:txBody>
           <a:bodyPr/>
-          <a:p/>
+          <a:p>
+            <a:pPr/>
+            <a:endParaRPr/>
+          </a:p>
         </p:txBody>
       </p:sp>
       <p:pic>
         <p:nvPicPr>
-          <p:cNvPr id="268" name=""/>
+          <p:cNvPr id="311" name=""/>
           <p:cNvPicPr>
             <a:picLocks noChangeAspect="1"/>
           </p:cNvPicPr>
@@ -12280,7 +14098,7 @@
       </p:pic>
       <p:sp>
         <p:nvSpPr>
-          <p:cNvPr id="269" name="" descr="{&quot;isTemplate&quot;:true,&quot;type&quot;:&quot;text&quot;}"/>
+          <p:cNvPr id="312" name="" descr="{&quot;isTemplate&quot;:true,&quot;type&quot;:&quot;text&quot;}"/>
           <p:cNvSpPr txBox="1"/>
           <p:nvPr/>
         </p:nvSpPr>
@@ -12315,7 +14133,7 @@
       </p:sp>
       <p:sp>
         <p:nvSpPr>
-          <p:cNvPr id="270" name=""/>
+          <p:cNvPr id="313" name=""/>
           <p:cNvSpPr/>
           <p:nvPr/>
         </p:nvSpPr>
@@ -12336,12 +14154,15 @@
         </p:spPr>
         <p:txBody>
           <a:bodyPr/>
-          <a:p/>
-        </p:txBody>
-      </p:sp>
-      <p:sp>
-        <p:nvSpPr>
-          <p:cNvPr id="271" name="" descr="{&quot;isTemplate&quot;:true,&quot;type&quot;:&quot;text&quot;}"/>
+          <a:p>
+            <a:pPr/>
+            <a:endParaRPr/>
+          </a:p>
+        </p:txBody>
+      </p:sp>
+      <p:sp>
+        <p:nvSpPr>
+          <p:cNvPr id="314" name="" descr="{&quot;isTemplate&quot;:true,&quot;type&quot;:&quot;text&quot;}"/>
           <p:cNvSpPr txBox="1"/>
           <p:nvPr/>
         </p:nvSpPr>
@@ -12378,7 +14199,7 @@
       </p:sp>
       <p:sp>
         <p:nvSpPr>
-          <p:cNvPr id="272" name="" descr="{&quot;isTemplate&quot;:true,&quot;type&quot;:&quot;text&quot;}"/>
+          <p:cNvPr id="315" name="" descr="{&quot;isTemplate&quot;:true,&quot;type&quot;:&quot;text&quot;}"/>
           <p:cNvSpPr txBox="1"/>
           <p:nvPr/>
         </p:nvSpPr>
@@ -12431,7 +14252,7 @@
       </p:sp>
       <p:sp>
         <p:nvSpPr>
-          <p:cNvPr id="273" name="" descr="{&quot;isTemplate&quot;:true,&quot;type&quot;:&quot;text&quot;}"/>
+          <p:cNvPr id="316" name="" descr="{&quot;isTemplate&quot;:true,&quot;type&quot;:&quot;text&quot;}"/>
           <p:cNvSpPr txBox="1"/>
           <p:nvPr/>
         </p:nvSpPr>
@@ -12473,12 +14294,12 @@
 </p:sld>
 </file>
 
-<file path=ppt/slides/slide8.xml><?xml version="1.0" encoding="utf-8"?>
+<file path=ppt/slides/slide9.xml><?xml version="1.0" encoding="utf-8"?>
 <p:sld xmlns:p="http://schemas.openxmlformats.org/presentationml/2006/main" xmlns:a="http://schemas.openxmlformats.org/drawingml/2006/main" xmlns:asvg="http://schemas.microsoft.com/office/drawing/2016/SVG/main" xmlns:r="http://schemas.openxmlformats.org/officeDocument/2006/relationships" xmlns:mc="http://schemas.openxmlformats.org/markup-compatibility/2006" mc:Ignorable="asvg">
   <p:cSld>
     <p:spTree>
       <p:nvGrpSpPr>
-        <p:cNvPr id="274" name="" descr="&lt;Slide&#10;    style={{&#10;        width: '1280px',&#10;        height: '720px',&#10;        background: '#FAF7F2',&#10;        paddingTop: 20,&#10;        paddingBottom: 20,&#10;        paddingLeft: 64,&#10;        paddingRight: 64,&#10;    }}&#10;&gt;&#10;    {/* ── A · blok judul ── */}&#10;    &lt;Box style={{ height: 110, justifyContent: 'center' }}&gt;&#10;        &lt;Text&#10;            style={{&#10;                fontSize: 34,&#10;                fontWeight: 'bold',&#10;                color: '#51277C',&#10;                fontFamily: 'Trebuchet MS',&#10;                lineHeight: 1.3,&#10;            }}&#10;        &gt;&#10;            Isi menu per hari&#10;        &lt;/Text&gt;&#10;        &lt;Box style={{ marginTop: 10, width: 72, height: 6, borderRadius: 3, background: '#51277C' }} /&gt;&#10;    &lt;/Box&gt;&#10;&#10;    {/* ── B · area konten ── */}&#10;    &lt;Box style={{ height: 530 }}&gt;&#10;        {/* atas · ilustrasi tabel jadwal */}&#10;        &lt;Box&#10;            style={{&#10;                height: 306,&#10;                background: 'rgba(81,39,124,0.06)',&#10;                borderRadius: 20,&#10;                justifyContent: 'center',&#10;                alignItems: 'center',&#10;            }}&#10;        &gt;&#10;            &lt;svg width={1100} height={270} viewBox='0 0 1100 270'&gt;&#10;                &lt;rect x='6' y='6' width='1088' height='46' rx='10' fill='#51277C' /&gt;&#10;                &lt;text x='46' y='37' fontFamily='Trebuchet MS' fontSize='20' fontWeight='bold' fill='#FFFFFF'&gt;&#10;                    Tanggal&#10;                &lt;/text&gt;&#10;                &lt;text x='330' y='37' fontFamily='Trebuchet MS' fontSize='20' fontWeight='bold' fill='#FFFFFF'&gt;&#10;                    Menu&#10;                &lt;/text&gt;&#10;                &lt;text x='760' y='37' fontFamily='Trebuchet MS' fontSize='20' fontWeight='bold' fill='#FFFFFF'&gt;&#10;                    Petugas&#10;                &lt;/text&gt;&#10;                &lt;text x='990' y='37' fontFamily='Trebuchet MS' fontSize='20' fontWeight='bold' fill='#FFFFFF'&gt;&#10;                    Status&#10;                &lt;/text&gt;&#10;&#10;                {/* Senin */}&#10;                &lt;rect x='6' y='60' width='1088' height='46' rx='10' fill='#FFFFFF' stroke='#E6DFD2' strokeWidth='2' /&gt;&#10;                &lt;text x='46' y='90' fontFamily='Verdana' fontSize='16' fill='#51277C'&gt;Senin, 5&lt;/text&gt;&#10;                &lt;text x='330' y='90' fontFamily='Verdana' fontSize='16' fill='#2A2333'&gt;Roti coklat + jeruk&lt;/text&gt;&#10;                &lt;text x='760' y='90' fontFamily='Verdana' fontSize='16' fill='#6B6478'&gt;Rafa&lt;/text&gt;&#10;                &lt;rect x='940' y='71' width='118' height='24' rx='12' fill='#DED7CB' /&gt;&#10;                &lt;text x='999' y='88' fontFamily='Verdana' fontSize='13' fill='#51277C' textAnchor='middle'&gt;bisa diubah&lt;/text&gt;&#10;&#10;                {/* Selasa */}&#10;                &lt;rect x='6' y='112' width='1088' height='46' rx='10' fill='#FFFFFF' stroke='#E6DFD2' strokeWidth='2' /&gt;&#10;                &lt;text x='46' y='142' fontFamily='Verdana' fontSize='16' fill='#51277C'&gt;Selasa, 6&lt;/text&gt;&#10;                &lt;text x='330' y='142' fontFamily='Verdana' fontSize='16' fill='#2A2333'&gt;Puding + pisang&lt;/text&gt;&#10;                &lt;text x='760' y='142' fontFamily='Verdana' fontSize='16' fill='#6B6478'&gt;—&lt;/text&gt;&#10;                &lt;rect x='940' y='123' width='118' height='24' rx='12' fill='#DED7CB' /&gt;&#10;                &lt;text x='999' y='140' fontFamily='Verdana' fontSize='13' fill='#51277C' textAnchor='middle'&gt;bisa diubah&lt;/text&gt;&#10;&#10;                {/* Rabu — libur */}&#10;                &lt;rect x='6' y='164' width='1088' height='46' rx='10' fill='#FFFFFF' stroke='#F3B26C' strokeWidth='2' /&gt;&#10;                &lt;text x='46' y='194' fontFamily='Verdana' fontSize='16' fill='#51277C'&gt;Rabu, 7&lt;/text&gt;&#10;                &lt;text x='330' y='194' fontFamily='Verdana' fontSize='16' fill='#2A2333'&gt;Libur&lt;/text&gt;&#10;                &lt;text x='760' y='194' fontFamily='Verdana' fontSize='16' fill='#6B6478'&gt;—&lt;/text&gt;&#10;                &lt;rect x='940' y='175' width='118' height='24' rx='12' fill='#F3B26C' /&gt;&#10;                &lt;text x='999' y='192' fontFamily='Verdana' fontSize='13' fill='#51277C' textAnchor='middle'&gt;libur&lt;/text&gt;&#10;&#10;                {/* Kamis — petugas kosong */}&#10;                &lt;rect x='6' y='216' width='1088' height='46' rx='10' fill='#FFFFFF' stroke='#AFC440' strokeWidth='3' /&gt;&#10;                &lt;text x='46' y='246' fontFamily='Verdana' fontSize='16' fill='#51277C'&gt;Kamis, 8&lt;/text&gt;&#10;                &lt;text x='330' y='246' fontFamily='Verdana' fontSize='16' fill='#2A2333'&gt;Donat + melon&lt;/text&gt;&#10;                &lt;text x='760' y='246' fontFamily='Verdana' fontSize='16' fill='#6B6478'&gt;—&lt;/text&gt;&#10;                &lt;rect x='940' y='227' width='118' height='24' rx='12' fill='#AFC440' /&gt;&#10;                &lt;text x='999' y='244' fontFamily='Verdana' fontSize='13' fill='#3F4718' textAnchor='middle'&gt;petugas kosong&lt;/text&gt;&#10;            &lt;/svg&gt;&#10;        &lt;/Box&gt;&#10;&#10;        {/* bawah · dua kartu 60:40 */}&#10;        &lt;Box style={{ marginTop: 18, height: 206, flexDirection: 'row', gap: 24 }}&gt;&#10;            &lt;Box&#10;                style={{&#10;                    width: '60%',&#10;                    background: '#FFFFFF',&#10;                    borderRadius: 16,&#10;                    boxShadow: '0 4px 20px rgba(0,0,0,0.08)',&#10;                    padding: 24,&#10;                    borderLeft: '8px solid #AFC440',&#10;                }}&#10;            &gt;&#10;                &lt;Text&#10;                    style={{&#10;                        fontSize: 26,&#10;                        fontWeight: 'bold',&#10;                        color: '#51277C',&#10;                        fontFamily: 'Trebuchet MS',&#10;                    }}&#10;                &gt;&#10;                    Pilih menu di setiap tanggal&#10;                &lt;/Text&gt;&#10;                &lt;Text&#10;                    style={{&#10;                        marginTop: 10,&#10;                        fontSize: 18,&#10;                        color: '#6B6478',&#10;                        fontFamily: 'Verdana',&#10;                        lineHeight: 1.5,&#10;                    }}&#10;                &gt;&#10;                    Satu hari berisi makanan utama dan buah pendamping. Hari yang tidak masuk&#10;                    sekolah cukup ditandai libur — menunya tidak perlu diisi.&#10;                &lt;/Text&gt;&#10;            &lt;/Box&gt;&#10;&#10;            &lt;Box&#10;                style={{&#10;                    width: '40%',&#10;                    background: '#FFFFFF',&#10;                    borderRadius: 16,&#10;                    boxShadow: '0 4px 20px rgba(0,0,0,0.08)',&#10;                    padding: 24,&#10;                    borderLeft: '8px solid #F3B26C',&#10;                }}&#10;            &gt;&#10;                &lt;Text&#10;                    style={{&#10;                        fontSize: 26,&#10;                        fontWeight: 'bold',&#10;                        color: '#51277C',&#10;                        fontFamily: 'Trebuchet MS',&#10;                    }}&#10;                &gt;&#10;                    Salin Sepekan&#10;                &lt;/Text&gt;&#10;                &lt;Text&#10;                    style={{&#10;                        marginTop: 10,&#10;                        fontSize: 18,&#10;                        color: '#6B6478',&#10;                        fontFamily: 'Verdana',&#10;                        lineHeight: 1.5,&#10;                    }}&#10;                &gt;&#10;                    Duplikasi Senin–Jumat ke minggu lain. Tanggal yang sudah terisi dilewati.&#10;                &lt;/Text&gt;&#10;            &lt;/Box&gt;&#10;        &lt;/Box&gt;&#10;    &lt;/Box&gt;&#10;&#10;    {/* ── C · bilah kaki ── */}&#10;    &lt;Box&#10;        style={{&#10;            height: 40,&#10;            flexDirection: 'row',&#10;            alignItems: 'center',&#10;            justifyContent: 'space-between',&#10;        }}&#10;    &gt;&#10;        &lt;Text style={{ fontSize: 14, color: '#6B6478', fontFamily: 'Verdana' }}&gt;&#10;            Pizza Snack Play · Panduan Korlas &amp;amp; Admin&#10;        &lt;/Text&gt;&#10;        &lt;Text style={{ fontSize: 14, color: '#6B6478', fontFamily: 'Verdana' }}&gt;08 / 16&lt;/Text&gt;&#10;    &lt;/Box&gt;&#10;&lt;/Slide&gt;&#10;"/>
+        <p:cNvPr id="317" name=""/>
         <p:cNvGrpSpPr/>
         <p:nvPr/>
       </p:nvGrpSpPr>
@@ -12492,7 +14313,7 @@
       </p:grpSpPr>
       <p:sp>
         <p:nvSpPr>
-          <p:cNvPr id="275" name=""/>
+          <p:cNvPr id="318" name=""/>
           <p:cNvSpPr/>
           <p:nvPr/>
         </p:nvSpPr>
@@ -12511,12 +14332,15 @@
         </p:spPr>
         <p:txBody>
           <a:bodyPr/>
-          <a:p/>
-        </p:txBody>
-      </p:sp>
-      <p:sp>
-        <p:nvSpPr>
-          <p:cNvPr id="276" name="" descr="{&quot;isTemplate&quot;:true,&quot;type&quot;:&quot;text&quot;}"/>
+          <a:p>
+            <a:pPr/>
+            <a:endParaRPr/>
+          </a:p>
+        </p:txBody>
+      </p:sp>
+      <p:sp>
+        <p:nvSpPr>
+          <p:cNvPr id="319" name="" descr="{&quot;isTemplate&quot;:true,&quot;type&quot;:&quot;text&quot;}"/>
           <p:cNvSpPr txBox="1"/>
           <p:nvPr/>
         </p:nvSpPr>
@@ -12551,7 +14375,7 @@
       </p:sp>
       <p:sp>
         <p:nvSpPr>
-          <p:cNvPr id="277" name=""/>
+          <p:cNvPr id="320" name=""/>
           <p:cNvSpPr/>
           <p:nvPr/>
         </p:nvSpPr>
@@ -12572,12 +14396,15 @@
         </p:spPr>
         <p:txBody>
           <a:bodyPr/>
-          <a:p/>
-        </p:txBody>
-      </p:sp>
-      <p:sp>
-        <p:nvSpPr>
-          <p:cNvPr id="278" name=""/>
+          <a:p>
+            <a:pPr/>
+            <a:endParaRPr/>
+          </a:p>
+        </p:txBody>
+      </p:sp>
+      <p:sp>
+        <p:nvSpPr>
+          <p:cNvPr id="321" name=""/>
           <p:cNvSpPr/>
           <p:nvPr/>
         </p:nvSpPr>
@@ -12600,12 +14427,15 @@
         </p:spPr>
         <p:txBody>
           <a:bodyPr/>
-          <a:p/>
+          <a:p>
+            <a:pPr/>
+            <a:endParaRPr/>
+          </a:p>
         </p:txBody>
       </p:sp>
       <p:pic>
         <p:nvPicPr>
-          <p:cNvPr id="279" name=""/>
+          <p:cNvPr id="322" name=""/>
           <p:cNvPicPr>
             <a:picLocks noChangeAspect="1"/>
           </p:cNvPicPr>
@@ -12636,7 +14466,7 @@
       </p:pic>
       <p:sp>
         <p:nvSpPr>
-          <p:cNvPr id="280" name=""/>
+          <p:cNvPr id="323" name=""/>
           <p:cNvSpPr/>
           <p:nvPr/>
         </p:nvSpPr>
@@ -12664,12 +14494,15 @@
         </p:spPr>
         <p:txBody>
           <a:bodyPr/>
-          <a:p/>
-        </p:txBody>
-      </p:sp>
-      <p:sp>
-        <p:nvSpPr>
-          <p:cNvPr id="281" name=""/>
+          <a:p>
+            <a:pPr/>
+            <a:endParaRPr/>
+          </a:p>
+        </p:txBody>
+      </p:sp>
+      <p:sp>
+        <p:nvSpPr>
+          <p:cNvPr id="324" name=""/>
           <p:cNvSpPr/>
           <p:nvPr/>
         </p:nvSpPr>
@@ -12721,12 +14554,15 @@
         </p:spPr>
         <p:txBody>
           <a:bodyPr/>
-          <a:p/>
-        </p:txBody>
-      </p:sp>
-      <p:sp>
-        <p:nvSpPr>
-          <p:cNvPr id="282" name="" descr="{&quot;isTemplate&quot;:true,&quot;type&quot;:&quot;text&quot;}"/>
+          <a:p>
+            <a:pPr/>
+            <a:endParaRPr/>
+          </a:p>
+        </p:txBody>
+      </p:sp>
+      <p:sp>
+        <p:nvSpPr>
+          <p:cNvPr id="325" name="" descr="{&quot;isTemplate&quot;:true,&quot;type&quot;:&quot;text&quot;}"/>
           <p:cNvSpPr txBox="1"/>
           <p:nvPr/>
         </p:nvSpPr>
@@ -12761,7 +14597,7 @@
       </p:sp>
       <p:sp>
         <p:nvSpPr>
-          <p:cNvPr id="283" name="" descr="{&quot;isTemplate&quot;:true,&quot;type&quot;:&quot;text&quot;}"/>
+          <p:cNvPr id="326" name="" descr="{&quot;isTemplate&quot;:true,&quot;type&quot;:&quot;text&quot;}"/>
           <p:cNvSpPr txBox="1"/>
           <p:nvPr/>
         </p:nvSpPr>
@@ -12798,7 +14634,7 @@
       </p:sp>
       <p:sp>
         <p:nvSpPr>
-          <p:cNvPr id="284" name=""/>
+          <p:cNvPr id="327" name=""/>
           <p:cNvSpPr/>
           <p:nvPr/>
         </p:nvSpPr>
@@ -12826,12 +14662,15 @@
         </p:spPr>
         <p:txBody>
           <a:bodyPr/>
-          <a:p/>
-        </p:txBody>
-      </p:sp>
-      <p:sp>
-        <p:nvSpPr>
-          <p:cNvPr id="285" name=""/>
+          <a:p>
+            <a:pPr/>
+            <a:endParaRPr/>
+          </a:p>
+        </p:txBody>
+      </p:sp>
+      <p:sp>
+        <p:nvSpPr>
+          <p:cNvPr id="328" name=""/>
           <p:cNvSpPr/>
           <p:nvPr/>
         </p:nvSpPr>
@@ -12883,12 +14722,15 @@
         </p:spPr>
         <p:txBody>
           <a:bodyPr/>
-          <a:p/>
-        </p:txBody>
-      </p:sp>
-      <p:sp>
-        <p:nvSpPr>
-          <p:cNvPr id="286" name="" descr="{&quot;isTemplate&quot;:true,&quot;type&quot;:&quot;text&quot;}"/>
+          <a:p>
+            <a:pPr/>
+            <a:endParaRPr/>
+          </a:p>
+        </p:txBody>
+      </p:sp>
+      <p:sp>
+        <p:nvSpPr>
+          <p:cNvPr id="329" name="" descr="{&quot;isTemplate&quot;:true,&quot;type&quot;:&quot;text&quot;}"/>
           <p:cNvSpPr txBox="1"/>
           <p:nvPr/>
         </p:nvSpPr>
@@ -12923,7 +14765,7 @@
       </p:sp>
       <p:sp>
         <p:nvSpPr>
-          <p:cNvPr id="287" name="" descr="{&quot;isTemplate&quot;:true,&quot;type&quot;:&quot;text&quot;}"/>
+          <p:cNvPr id="330" name="" descr="{&quot;isTemplate&quot;:true,&quot;type&quot;:&quot;text&quot;}"/>
           <p:cNvSpPr txBox="1"/>
           <p:nvPr/>
         </p:nvSpPr>
@@ -12960,7 +14802,7 @@
       </p:sp>
       <p:sp>
         <p:nvSpPr>
-          <p:cNvPr id="288" name="" descr="{&quot;isTemplate&quot;:true,&quot;type&quot;:&quot;text&quot;}"/>
+          <p:cNvPr id="331" name="" descr="{&quot;isTemplate&quot;:true,&quot;type&quot;:&quot;text&quot;}"/>
           <p:cNvSpPr txBox="1"/>
           <p:nvPr/>
         </p:nvSpPr>
@@ -12995,7 +14837,7 @@
       </p:sp>
       <p:sp>
         <p:nvSpPr>
-          <p:cNvPr id="289" name="" descr="{&quot;isTemplate&quot;:true,&quot;type&quot;:&quot;text&quot;}"/>
+          <p:cNvPr id="332" name="" descr="{&quot;isTemplate&quot;:true,&quot;type&quot;:&quot;text&quot;}"/>
           <p:cNvSpPr txBox="1"/>
           <p:nvPr/>
         </p:nvSpPr>
@@ -13022,696 +14864,12 @@
                 <a:latin typeface="Verdana"/>
                 <a:ea typeface="Verdana"/>
               </a:rPr>
-              <a:t>08 / 16</a:t>
-            </a:r>
-            <a:endParaRPr/>
-          </a:p>
-        </p:txBody>
-      </p:sp>
-    </p:spTree>
-  </p:cSld>
-</p:sld>
-</file>
-
-<file path=ppt/slides/slide9.xml><?xml version="1.0" encoding="utf-8"?>
-<p:sld xmlns:p="http://schemas.openxmlformats.org/presentationml/2006/main" xmlns:a="http://schemas.openxmlformats.org/drawingml/2006/main" xmlns:asvg="http://schemas.microsoft.com/office/drawing/2016/SVG/main" xmlns:r="http://schemas.openxmlformats.org/officeDocument/2006/relationships" xmlns:mc="http://schemas.openxmlformats.org/markup-compatibility/2006" mc:Ignorable="asvg">
-  <p:cSld>
-    <p:spTree>
-      <p:nvGrpSpPr>
-        <p:cNvPr id="290" name="" descr="&lt;Slide&#10;    style={{&#10;        width: '1280px',&#10;        height: '720px',&#10;        background: '#FAF7F2',&#10;        paddingTop: 20,&#10;        paddingBottom: 20,&#10;        paddingLeft: 64,&#10;        paddingRight: 64,&#10;        position: 'relative',&#10;        overflow: 'hidden',&#10;    }}&#10;&gt;&#10;    &lt;Box&#10;        style={{&#10;            position: 'absolute',&#10;            bottom: -130,&#10;            left: -110,&#10;            width: 380,&#10;            height: 380,&#10;            borderRadius: 190,&#10;            background: 'linear-gradient(135deg, #AFC440 0%, #F3B26C 100%)',&#10;            opacity: 0.12,&#10;        }}&#10;    /&gt;&#10;&#10;    {/* ── A · blok judul ── */}&#10;    &lt;Box style={{ height: 110, justifyContent: 'center' }}&gt;&#10;        &lt;Text&#10;            style={{&#10;                fontSize: 34,&#10;                fontWeight: 'bold',&#10;                color: '#51277C',&#10;                fontFamily: 'Trebuchet MS',&#10;                lineHeight: 1.3,&#10;            }}&#10;        &gt;&#10;            Tempel teks dari sekolah&#10;        &lt;/Text&gt;&#10;        &lt;Box style={{ marginTop: 10, width: 72, height: 6, borderRadius: 3, background: '#F3B26C' }} /&gt;&#10;    &lt;/Box&gt;&#10;&#10;    {/* ── B · area konten ── */}&#10;    &lt;Box style={{ height: 530, flexDirection: 'row', gap: 34, position: 'relative', zIndex: 1 }}&gt;&#10;        {/* kiri 45% · pesan */}&#10;        &lt;Box style={{ width: '45%', height: '100%', justifyContent: 'center' }}&gt;&#10;            &lt;Text&#10;                style={{&#10;                    fontSize: 44,&#10;                    fontWeight: 'bold',&#10;                    color: '#51277C',&#10;                    fontFamily: 'Trebuchet MS',&#10;                    lineHeight: 1.15,&#10;                }}&#10;            &gt;&#10;                Tidak perlu{'\n'}ketik ulang.&#10;            &lt;/Text&gt;&#10;&#10;            &lt;Text&#10;                style={{&#10;                    marginTop: 20,&#10;                    fontSize: 19,&#10;                    color: '#2A2333',&#10;                    fontFamily: 'Verdana',&#10;                    lineHeight: 1.55,&#10;                }}&#10;            &gt;&#10;                Jadwal yang dikirim sekolah lewat WhatsApp bisa ditempel apa adanya. Aplikasi&#10;                membaca rentang tanggal dan baris harinya sendiri.&#10;            &lt;/Text&gt;&#10;&#10;            &lt;Box style={{ marginTop: 18 }}&gt;&#10;                {[&#10;                    'Pratinjau ditampilkan lebih dulu — bisa dibatalkan',&#10;                    'Tanggal yang sudah ada jadwalnya dilewati, jadi tempel ulang aman',&#10;                    'Hasilnya masuk sebagai jadwal yang masih bisa diubah',&#10;                ].map((s, i) =&gt; (&#10;                    &lt;Box key={i} style={{ flexDirection: 'row', alignItems: 'center', gap: 10, marginTop: 9 }}&gt;&#10;                        &lt;svg width={20} height={20} viewBox='0 0 24 24'&gt;&#10;                            &lt;path d='M5 13l4 4 10-11' fill='none' stroke='#AFC440' strokeWidth='3' strokeLinecap='round' strokeLinejoin='round' /&gt;&#10;                        &lt;/svg&gt;&#10;                        &lt;Text style={{ flex: 1, fontSize: 17, color: '#6B6478', fontFamily: 'Verdana', lineHeight: 1.45 }}&gt;&#10;                            {s}&#10;                        &lt;/Text&gt;&#10;                    &lt;/Box&gt;&#10;                ))}&#10;            &lt;/Box&gt;&#10;&#10;            &lt;Box&#10;                style={{&#10;                    marginTop: 22,&#10;                    alignSelf: 'flex-start',&#10;                    flexDirection: 'row',&#10;                    alignItems: 'center',&#10;                    gap: 10,&#10;                    background: '#51277C',&#10;                    borderRadius: 12,&#10;                    paddingTop: 12,&#10;                    paddingBottom: 12,&#10;                    paddingLeft: 22,&#10;                    paddingRight: 22,&#10;                }}&#10;            &gt;&#10;                &lt;svg width={22} height={22} viewBox='0 0 24 24'&gt;&#10;                    &lt;path d='M9 3h6v3H9z' fill='#F3B26C' /&gt;&#10;                    &lt;path d='M6 5h12v16H6z' fill='none' stroke='#F3B26C' strokeWidth='2' /&gt;&#10;                &lt;/svg&gt;&#10;                &lt;Text style={{ fontSize: 18, color: '#FFFFFF', fontFamily: 'Verdana', fontWeight: 'bold' }}&gt;&#10;                    Tombol: Impor Jadwal&#10;                &lt;/Text&gt;&#10;            &lt;/Box&gt;&#10;        &lt;/Box&gt;&#10;&#10;        {/* kanan 55% · ilustrasi tempel → pratinjau */}&#10;        &lt;Box&#10;            style={{&#10;                width: '55%',&#10;                height: '100%',&#10;                background: 'rgba(81,39,124,0.06)',&#10;                borderRadius: 20,&#10;                justifyContent: 'center',&#10;                alignItems: 'center',&#10;            }}&#10;        &gt;&#10;            &lt;svg width={580} height={450} viewBox='0 0 580 450'&gt;&#10;                {/* teks asal */}&#10;                &lt;rect x='12' y='12' width='556' height='176' rx='16' fill='#FFFFFF' stroke='#E6DFD2' strokeWidth='2' /&gt;&#10;                &lt;circle cx='44' cy='44' r='14' fill='#AFC440' /&gt;&#10;                &lt;rect x='70' y='38' width='150' height='11' rx='5' fill='#DED7CB' /&gt;&#10;                &lt;rect x='34' y='80' width='160' height='10' rx='5' fill='#51277C' opacity='0.65' /&gt;&#10;                &lt;rect x='34' y='106' width='214' height='10' rx='5' fill='#DED7CB' /&gt;&#10;                &lt;rect x='34' y='132' width='188' height='10' rx='5' fill='#DED7CB' /&gt;&#10;                &lt;rect x='34' y='158' width='150' height='10' rx='5' fill='#DED7CB' /&gt;&#10;                &lt;text x='300' y='112' fontFamily='Verdana' fontSize='14' fill='#6B6478'&gt;Kamis : Puding + jeruk&lt;/text&gt;&#10;                &lt;text x='300' y='140' fontFamily='Verdana' fontSize='14' fill='#6B6478'&gt;Jumat : Donat + melon&lt;/text&gt;&#10;&#10;                {/* panah */}&#10;                &lt;path d='M290 196v46' stroke='#F3B26C' strokeWidth='6' strokeLinecap='round' /&gt;&#10;                &lt;path d='M276 234l14 16 14-16' fill='none' stroke='#F3B26C' strokeWidth='6' strokeLinecap='round' strokeLinejoin='round' /&gt;&#10;                &lt;text x='318' y='228' fontFamily='Verdana' fontSize='15' fill='#51277C'&gt;pratinjau&lt;/text&gt;&#10;&#10;                {/* pratinjau */}&#10;                &lt;rect x='12' y='258' width='556' height='180' rx='16' fill='#51277C' /&gt;&#10;                &lt;text x='40' y='294' fontFamily='Trebuchet MS' fontSize='21' fontWeight='bold' fill='#FFFFFF'&gt;&#10;                    Pratinjau — 12 baris baru&#10;                &lt;/text&gt;&#10;                &lt;rect x='40' y='312' width='500' height='34' rx='8' fill='rgba(255,255,255,0.16)' /&gt;&#10;                &lt;text x='58' y='335' fontFamily='Verdana' fontSize='14' fill='#FFFFFF'&gt;Kamis, 2 Okt&lt;/text&gt;&#10;                &lt;text x='230' y='335' fontFamily='Verdana' fontSize='14' fill='#EFEAE1'&gt;Puding + jeruk&lt;/text&gt;&#10;                &lt;rect x='40' y='354' width='500' height='34' rx='8' fill='rgba(255,255,255,0.16)' /&gt;&#10;                &lt;text x='58' y='377' fontFamily='Verdana' fontSize='14' fill='#FFFFFF'&gt;Jumat, 3 Okt&lt;/text&gt;&#10;                &lt;text x='230' y='377' fontFamily='Verdana' fontSize='14' fill='#EFEAE1'&gt;Donat + melon&lt;/text&gt;&#10;                &lt;rect x='392' y='400' width='148' height='26' rx='13' fill='#F3B26C' /&gt;&#10;                &lt;text x='466' y='419' fontFamily='Verdana' fontSize='14' fontWeight='bold' fill='#51277C' textAnchor='middle'&gt;&#10;                    Impor&#10;                &lt;/text&gt;&#10;            &lt;/svg&gt;&#10;        &lt;/Box&gt;&#10;    &lt;/Box&gt;&#10;&#10;    {/* ── C · bilah kaki ── */}&#10;    &lt;Box&#10;        style={{&#10;            height: 40,&#10;            flexDirection: 'row',&#10;            alignItems: 'center',&#10;            justifyContent: 'space-between',&#10;        }}&#10;    &gt;&#10;        &lt;Text style={{ fontSize: 14, color: '#6B6478', fontFamily: 'Verdana' }}&gt;&#10;            Pizza Snack Play · Panduan Korlas &amp;amp; Admin&#10;        &lt;/Text&gt;&#10;        &lt;Text style={{ fontSize: 14, color: '#6B6478', fontFamily: 'Verdana' }}&gt;09 / 16&lt;/Text&gt;&#10;    &lt;/Box&gt;&#10;&lt;/Slide&gt;&#10;"/>
-        <p:cNvGrpSpPr/>
-        <p:nvPr/>
-      </p:nvGrpSpPr>
-      <p:grpSpPr>
-        <a:xfrm>
-          <a:off x="0" y="0"/>
-          <a:ext cx="0" cy="0"/>
-          <a:chOff x="0" y="0"/>
-          <a:chExt cx="0" cy="0"/>
-        </a:xfrm>
-      </p:grpSpPr>
-      <p:sp>
-        <p:nvSpPr>
-          <p:cNvPr id="291" name=""/>
-          <p:cNvSpPr/>
-          <p:nvPr/>
-        </p:nvSpPr>
-        <p:spPr>
-          <a:xfrm rot="0" flipH="0" flipV="0">
-            <a:off x="0" y="0"/>
-            <a:ext cx="12192000" cy="6858000"/>
-          </a:xfrm>
-          <a:prstGeom prst="rect">
-            <a:avLst/>
-          </a:prstGeom>
-          <a:solidFill>
-            <a:srgbClr val="FAF7F2"/>
-          </a:solidFill>
-          <a:ln/>
-        </p:spPr>
-        <p:txBody>
-          <a:bodyPr/>
-          <a:p/>
-        </p:txBody>
-      </p:sp>
-      <p:sp>
-        <p:nvSpPr>
-          <p:cNvPr id="292" name="" descr="{&quot;isTemplate&quot;:true,&quot;type&quot;:&quot;text&quot;}"/>
-          <p:cNvSpPr txBox="1"/>
-          <p:nvPr/>
-        </p:nvSpPr>
-        <p:spPr>
-          <a:xfrm rot="0" flipH="0" flipV="0">
-            <a:off x="609600" y="381000"/>
-            <a:ext cx="10972800" cy="514350"/>
-          </a:xfrm>
-          <a:prstGeom prst="rect"/>
-        </p:spPr>
-        <p:txBody>
-          <a:bodyPr wrap="none" lIns="0" tIns="0" rIns="0" bIns="0"/>
-          <a:p>
-            <a:pPr>
-              <a:lnSpc>
-                <a:spcPct val="130000"/>
-              </a:lnSpc>
-            </a:pPr>
-            <a:r>
-              <a:rPr lang="en-US" sz="2550" b="1">
-                <a:solidFill>
-                  <a:srgbClr val="51277C"/>
-                </a:solidFill>
-                <a:latin typeface="Trebuchet MS"/>
-                <a:ea typeface="Trebuchet MS"/>
-              </a:rPr>
-              <a:t>Tempel teks dari sekolah</a:t>
-            </a:r>
-            <a:endParaRPr/>
-          </a:p>
-        </p:txBody>
-      </p:sp>
-      <p:sp>
-        <p:nvSpPr>
-          <p:cNvPr id="293" name=""/>
-          <p:cNvSpPr/>
-          <p:nvPr/>
-        </p:nvSpPr>
-        <p:spPr>
-          <a:xfrm rot="0" flipH="0" flipV="0">
-            <a:off x="609600" y="990600"/>
-            <a:ext cx="685800" cy="57150"/>
-          </a:xfrm>
-          <a:prstGeom prst="roundRect">
-            <a:avLst>
-              <a:gd name="adj" fmla="val 50000"/>
-            </a:avLst>
-          </a:prstGeom>
-          <a:solidFill>
-            <a:srgbClr val="F3B26C"/>
-          </a:solidFill>
-          <a:ln/>
-        </p:spPr>
-        <p:txBody>
-          <a:bodyPr/>
-          <a:p/>
-        </p:txBody>
-      </p:sp>
-      <p:sp>
-        <p:nvSpPr>
-          <p:cNvPr id="294" name="" descr="{&quot;isTemplate&quot;:true,&quot;type&quot;:&quot;text&quot;}"/>
-          <p:cNvSpPr txBox="1"/>
-          <p:nvPr/>
-        </p:nvSpPr>
-        <p:spPr>
-          <a:xfrm rot="0" flipH="0" flipV="0">
-            <a:off x="609600" y="6400800"/>
-            <a:ext cx="2905125" cy="161925"/>
-          </a:xfrm>
-          <a:prstGeom prst="rect"/>
-        </p:spPr>
-        <p:txBody>
-          <a:bodyPr wrap="none" lIns="0" tIns="0" rIns="0" bIns="0"/>
-          <a:p>
-            <a:pPr>
-              <a:lnSpc>
-                <a:spcPct val="100000"/>
-              </a:lnSpc>
-            </a:pPr>
-            <a:r>
-              <a:rPr lang="en-US" sz="1050">
-                <a:solidFill>
-                  <a:srgbClr val="6B6478"/>
-                </a:solidFill>
-                <a:latin typeface="Verdana"/>
-                <a:ea typeface="Verdana"/>
-              </a:rPr>
-              <a:t>Pizza Snack Play · Panduan Korlas &amp; Admin</a:t>
-            </a:r>
-            <a:endParaRPr/>
-          </a:p>
-        </p:txBody>
-      </p:sp>
-      <p:sp>
-        <p:nvSpPr>
-          <p:cNvPr id="295" name="" descr="{&quot;isTemplate&quot;:true,&quot;type&quot;:&quot;text&quot;}"/>
-          <p:cNvSpPr txBox="1"/>
-          <p:nvPr/>
-        </p:nvSpPr>
-        <p:spPr>
-          <a:xfrm rot="0" flipH="0" flipV="0">
-            <a:off x="11087100" y="6400800"/>
-            <a:ext cx="495300" cy="161925"/>
-          </a:xfrm>
-          <a:prstGeom prst="rect"/>
-        </p:spPr>
-        <p:txBody>
-          <a:bodyPr wrap="none" lIns="0" tIns="0" rIns="0" bIns="0"/>
-          <a:p>
-            <a:pPr>
-              <a:lnSpc>
-                <a:spcPct val="100000"/>
-              </a:lnSpc>
-            </a:pPr>
-            <a:r>
-              <a:rPr lang="en-US" sz="1050">
-                <a:solidFill>
-                  <a:srgbClr val="6B6478"/>
-                </a:solidFill>
-                <a:latin typeface="Verdana"/>
-                <a:ea typeface="Verdana"/>
-              </a:rPr>
-              <a:t>09 / 16</a:t>
-            </a:r>
-            <a:endParaRPr/>
-          </a:p>
-        </p:txBody>
-      </p:sp>
-      <p:sp>
-        <p:nvSpPr>
-          <p:cNvPr id="296" name=""/>
-          <p:cNvSpPr/>
-          <p:nvPr/>
-        </p:nvSpPr>
-        <p:spPr>
-          <a:xfrm rot="0" flipH="0" flipV="0">
-            <a:off x="-1047750" y="4476750"/>
-            <a:ext cx="3619500" cy="3619500"/>
-          </a:xfrm>
-          <a:custGeom>
-            <a:pathLst>
-              <a:path w="380" h="380">
-                <a:moveTo>
-                  <a:pt x="195" y="0"/>
-                </a:moveTo>
-                <a:cubicBezTo>
-                  <a:pt x="255" y="2"/>
-                  <a:pt x="311" y="32"/>
-                  <a:pt x="346" y="81"/>
-                </a:cubicBezTo>
-                <a:cubicBezTo>
-                  <a:pt x="380" y="130"/>
-                  <a:pt x="389" y="193"/>
-                  <a:pt x="370" y="250"/>
-                </a:cubicBezTo>
-                <a:lnTo>
-                  <a:pt x="110" y="250"/>
-                </a:lnTo>
-                <a:lnTo>
-                  <a:pt x="110" y="18"/>
-                </a:lnTo>
-                <a:cubicBezTo>
-                  <a:pt x="135" y="6"/>
-                  <a:pt x="162" y="0"/>
-                  <a:pt x="190" y="0"/>
-                </a:cubicBezTo>
-                <a:close/>
-              </a:path>
-            </a:pathLst>
-          </a:custGeom>
-          <a:gradFill>
-            <a:gsLst>
-              <a:gs pos="0">
-                <a:srgbClr val="AFC440">
-                  <a:alpha val="12000"/>
-                </a:srgbClr>
-              </a:gs>
-              <a:gs pos="100000">
-                <a:srgbClr val="F3B26C">
-                  <a:alpha val="12000"/>
-                </a:srgbClr>
-              </a:gs>
-            </a:gsLst>
-            <a:lin ang="2700000" scaled="1"/>
-          </a:gradFill>
-          <a:ln/>
-        </p:spPr>
-        <p:txBody>
-          <a:bodyPr/>
-          <a:p/>
-        </p:txBody>
-      </p:sp>
-      <p:sp>
-        <p:nvSpPr>
-          <p:cNvPr id="297" name="" descr="{&quot;isTemplate&quot;:true,&quot;type&quot;:&quot;text&quot;}"/>
-          <p:cNvSpPr txBox="1"/>
-          <p:nvPr/>
-        </p:nvSpPr>
-        <p:spPr>
-          <a:xfrm rot="0" flipH="0" flipV="0">
-            <a:off x="609600" y="1323975"/>
-            <a:ext cx="4791075" cy="1162050"/>
-          </a:xfrm>
-          <a:prstGeom prst="rect"/>
-        </p:spPr>
-        <p:txBody>
-          <a:bodyPr wrap="none" lIns="0" tIns="0" rIns="0" bIns="0"/>
-          <a:p>
-            <a:pPr>
-              <a:lnSpc>
-                <a:spcPct val="114999"/>
-              </a:lnSpc>
-            </a:pPr>
-            <a:r>
-              <a:rPr lang="en-US" sz="3300" b="1">
-                <a:solidFill>
-                  <a:srgbClr val="51277C"/>
-                </a:solidFill>
-                <a:latin typeface="Trebuchet MS"/>
-                <a:ea typeface="Trebuchet MS"/>
-              </a:rPr>
-              <a:t>Tidak perlu</a:t>
-            </a:r>
-            <a:endParaRPr/>
-          </a:p>
-          <a:p>
-            <a:pPr>
-              <a:lnSpc>
-                <a:spcPct val="114999"/>
-              </a:lnSpc>
-            </a:pPr>
-            <a:r>
-              <a:rPr lang="en-US" sz="3300" b="1">
-                <a:solidFill>
-                  <a:srgbClr val="51277C"/>
-                </a:solidFill>
-                <a:latin typeface="Trebuchet MS"/>
-                <a:ea typeface="Trebuchet MS"/>
-              </a:rPr>
-              <a:t>ketik ulang.</a:t>
-            </a:r>
-            <a:endParaRPr/>
-          </a:p>
-        </p:txBody>
-      </p:sp>
-      <p:sp>
-        <p:nvSpPr>
-          <p:cNvPr id="298" name="" descr="{&quot;isTemplate&quot;:true,&quot;type&quot;:&quot;text&quot;}"/>
-          <p:cNvSpPr txBox="1"/>
-          <p:nvPr/>
-        </p:nvSpPr>
-        <p:spPr>
-          <a:xfrm rot="0" flipH="0" flipV="0">
-            <a:off x="609600" y="2676525"/>
-            <a:ext cx="4791075" cy="1019175"/>
-          </a:xfrm>
-          <a:prstGeom prst="rect"/>
-        </p:spPr>
-        <p:txBody>
-          <a:bodyPr wrap="square" lIns="0" tIns="0" rIns="0" bIns="0">
-            <a:normAutofit/>
-          </a:bodyPr>
-          <a:p>
-            <a:pPr>
-              <a:lnSpc>
-                <a:spcPct val="155000"/>
-              </a:lnSpc>
-            </a:pPr>
-            <a:r>
-              <a:rPr lang="en-US" sz="1425">
-                <a:solidFill>
-                  <a:srgbClr val="2A2333"/>
-                </a:solidFill>
-                <a:latin typeface="Verdana"/>
-                <a:ea typeface="Verdana"/>
-              </a:rPr>
-              <a:t>Jadwal yang dikirim sekolah lewat WhatsApp bisa ditempel apa adanya. Aplikasi membaca rentang tanggal dan baris harinya sendiri.</a:t>
-            </a:r>
-            <a:endParaRPr/>
-          </a:p>
-        </p:txBody>
-      </p:sp>
-      <p:pic>
-        <p:nvPicPr>
-          <p:cNvPr id="299" name=""/>
-          <p:cNvPicPr>
-            <a:picLocks noChangeAspect="1"/>
-          </p:cNvPicPr>
-          <p:nvPr/>
-        </p:nvPicPr>
-        <p:blipFill>
-          <a:blip r:embed="rId1">
-            <a:extLst>
-              <a:ext uri="{96DAC541-7B7A-43D3-8B79-37D633B846F1}">
-                <asvg:svgBlip r:embed="rId1"/>
-              </a:ext>
-            </a:extLst>
-          </a:blip>
-          <a:stretch>
-            <a:fillRect/>
-          </a:stretch>
-        </p:blipFill>
-        <p:spPr>
-          <a:xfrm rot="0" flipH="0" flipV="0">
-            <a:off x="609600" y="4000500"/>
-            <a:ext cx="190500" cy="190500"/>
-          </a:xfrm>
-          <a:prstGeom prst="rect">
-            <a:avLst/>
-          </a:prstGeom>
-          <a:ln/>
-        </p:spPr>
-      </p:pic>
-      <p:sp>
-        <p:nvSpPr>
-          <p:cNvPr id="300" name="" descr="{&quot;isTemplate&quot;:true,&quot;type&quot;:&quot;text&quot;}"/>
-          <p:cNvSpPr txBox="1"/>
-          <p:nvPr/>
-        </p:nvSpPr>
-        <p:spPr>
-          <a:xfrm rot="0" flipH="0" flipV="0">
-            <a:off x="895350" y="3952875"/>
-            <a:ext cx="4505325" cy="285750"/>
-          </a:xfrm>
-          <a:prstGeom prst="rect"/>
-        </p:spPr>
-        <p:txBody>
-          <a:bodyPr wrap="none" lIns="0" tIns="0" rIns="0" bIns="0"/>
-          <a:p>
-            <a:pPr>
-              <a:lnSpc>
-                <a:spcPct val="145000"/>
-              </a:lnSpc>
-            </a:pPr>
-            <a:r>
-              <a:rPr lang="en-US" sz="1275">
-                <a:solidFill>
-                  <a:srgbClr val="6B6478"/>
-                </a:solidFill>
-                <a:latin typeface="Verdana"/>
-                <a:ea typeface="Verdana"/>
-              </a:rPr>
-              <a:t>Pratinjau ditampilkan lebih dulu — bisa dibatalkan</a:t>
-            </a:r>
-            <a:endParaRPr/>
-          </a:p>
-        </p:txBody>
-      </p:sp>
-      <p:pic>
-        <p:nvPicPr>
-          <p:cNvPr id="301" name=""/>
-          <p:cNvPicPr>
-            <a:picLocks noChangeAspect="1"/>
-          </p:cNvPicPr>
-          <p:nvPr/>
-        </p:nvPicPr>
-        <p:blipFill>
-          <a:blip r:embed="rId1">
-            <a:extLst>
-              <a:ext uri="{96DAC541-7B7A-43D3-8B79-37D633B846F1}">
-                <asvg:svgBlip r:embed="rId1"/>
-              </a:ext>
-            </a:extLst>
-          </a:blip>
-          <a:stretch>
-            <a:fillRect/>
-          </a:stretch>
-        </p:blipFill>
-        <p:spPr>
-          <a:xfrm rot="0" flipH="0" flipV="0">
-            <a:off x="609600" y="4514850"/>
-            <a:ext cx="190500" cy="190500"/>
-          </a:xfrm>
-          <a:prstGeom prst="rect">
-            <a:avLst/>
-          </a:prstGeom>
-          <a:ln/>
-        </p:spPr>
-      </p:pic>
-      <p:sp>
-        <p:nvSpPr>
-          <p:cNvPr id="302" name="" descr="{&quot;isTemplate&quot;:true,&quot;type&quot;:&quot;text&quot;}"/>
-          <p:cNvSpPr txBox="1"/>
-          <p:nvPr/>
-        </p:nvSpPr>
-        <p:spPr>
-          <a:xfrm rot="0" flipH="0" flipV="0">
-            <a:off x="895350" y="4324350"/>
-            <a:ext cx="4505325" cy="571500"/>
-          </a:xfrm>
-          <a:prstGeom prst="rect"/>
-        </p:spPr>
-        <p:txBody>
-          <a:bodyPr wrap="square" lIns="0" tIns="0" rIns="0" bIns="0">
-            <a:normAutofit/>
-          </a:bodyPr>
-          <a:p>
-            <a:pPr>
-              <a:lnSpc>
-                <a:spcPct val="145000"/>
-              </a:lnSpc>
-            </a:pPr>
-            <a:r>
-              <a:rPr lang="en-US" sz="1275">
-                <a:solidFill>
-                  <a:srgbClr val="6B6478"/>
-                </a:solidFill>
-                <a:latin typeface="Verdana"/>
-                <a:ea typeface="Verdana"/>
-              </a:rPr>
-              <a:t>Tanggal yang sudah ada jadwalnya dilewati, jadi tempel ulang aman</a:t>
-            </a:r>
-            <a:endParaRPr/>
-          </a:p>
-        </p:txBody>
-      </p:sp>
-      <p:pic>
-        <p:nvPicPr>
-          <p:cNvPr id="303" name=""/>
-          <p:cNvPicPr>
-            <a:picLocks noChangeAspect="1"/>
-          </p:cNvPicPr>
-          <p:nvPr/>
-        </p:nvPicPr>
-        <p:blipFill>
-          <a:blip r:embed="rId1">
-            <a:extLst>
-              <a:ext uri="{96DAC541-7B7A-43D3-8B79-37D633B846F1}">
-                <asvg:svgBlip r:embed="rId1"/>
-              </a:ext>
-            </a:extLst>
-          </a:blip>
-          <a:stretch>
-            <a:fillRect/>
-          </a:stretch>
-        </p:blipFill>
-        <p:spPr>
-          <a:xfrm rot="0" flipH="0" flipV="0">
-            <a:off x="609600" y="5172075"/>
-            <a:ext cx="190500" cy="190500"/>
-          </a:xfrm>
-          <a:prstGeom prst="rect">
-            <a:avLst/>
-          </a:prstGeom>
-          <a:ln/>
-        </p:spPr>
-      </p:pic>
-      <p:sp>
-        <p:nvSpPr>
-          <p:cNvPr id="304" name="" descr="{&quot;isTemplate&quot;:true,&quot;type&quot;:&quot;text&quot;}"/>
-          <p:cNvSpPr txBox="1"/>
-          <p:nvPr/>
-        </p:nvSpPr>
-        <p:spPr>
-          <a:xfrm rot="0" flipH="0" flipV="0">
-            <a:off x="895350" y="4981575"/>
-            <a:ext cx="4505325" cy="571500"/>
-          </a:xfrm>
-          <a:prstGeom prst="rect"/>
-        </p:spPr>
-        <p:txBody>
-          <a:bodyPr wrap="square" lIns="0" tIns="0" rIns="0" bIns="0">
-            <a:normAutofit/>
-          </a:bodyPr>
-          <a:p>
-            <a:pPr>
-              <a:lnSpc>
-                <a:spcPct val="145000"/>
-              </a:lnSpc>
-            </a:pPr>
-            <a:r>
-              <a:rPr lang="en-US" sz="1275">
-                <a:solidFill>
-                  <a:srgbClr val="6B6478"/>
-                </a:solidFill>
-                <a:latin typeface="Verdana"/>
-                <a:ea typeface="Verdana"/>
-              </a:rPr>
-              <a:t>Hasilnya masuk sebagai jadwal yang masih bisa diubah</a:t>
-            </a:r>
-            <a:endParaRPr/>
-          </a:p>
-        </p:txBody>
-      </p:sp>
-      <p:sp>
-        <p:nvSpPr>
-          <p:cNvPr id="305" name=""/>
-          <p:cNvSpPr/>
-          <p:nvPr/>
-        </p:nvSpPr>
-        <p:spPr>
-          <a:xfrm rot="0" flipH="0" flipV="0">
-            <a:off x="609600" y="5762625"/>
-            <a:ext cx="2895600" cy="438150"/>
-          </a:xfrm>
-          <a:prstGeom prst="roundRect">
-            <a:avLst>
-              <a:gd name="adj" fmla="val 26087"/>
-            </a:avLst>
-          </a:prstGeom>
-          <a:solidFill>
-            <a:srgbClr val="51277C"/>
-          </a:solidFill>
-          <a:ln/>
-        </p:spPr>
-        <p:txBody>
-          <a:bodyPr/>
-          <a:p/>
-        </p:txBody>
-      </p:sp>
-      <p:pic>
-        <p:nvPicPr>
-          <p:cNvPr id="306" name=""/>
-          <p:cNvPicPr>
-            <a:picLocks noChangeAspect="1"/>
-          </p:cNvPicPr>
-          <p:nvPr/>
-        </p:nvPicPr>
-        <p:blipFill>
-          <a:blip r:embed="rId2">
-            <a:extLst>
-              <a:ext uri="{96DAC541-7B7A-43D3-8B79-37D633B846F1}">
-                <asvg:svgBlip r:embed="rId2"/>
-              </a:ext>
-            </a:extLst>
-          </a:blip>
-          <a:stretch>
-            <a:fillRect/>
-          </a:stretch>
-        </p:blipFill>
-        <p:spPr>
-          <a:xfrm rot="0" flipH="0" flipV="0">
-            <a:off x="819150" y="5876925"/>
-            <a:ext cx="209550" cy="209550"/>
-          </a:xfrm>
-          <a:prstGeom prst="rect">
-            <a:avLst/>
-          </a:prstGeom>
-          <a:ln/>
-        </p:spPr>
-      </p:pic>
-      <p:sp>
-        <p:nvSpPr>
-          <p:cNvPr id="307" name="" descr="{&quot;isTemplate&quot;:true,&quot;type&quot;:&quot;text&quot;}"/>
-          <p:cNvSpPr txBox="1"/>
-          <p:nvPr/>
-        </p:nvSpPr>
-        <p:spPr>
-          <a:xfrm rot="0" flipH="0" flipV="0">
-            <a:off x="1123950" y="5876925"/>
-            <a:ext cx="2171700" cy="209550"/>
-          </a:xfrm>
-          <a:prstGeom prst="rect"/>
-        </p:spPr>
-        <p:txBody>
-          <a:bodyPr wrap="none" lIns="0" tIns="0" rIns="0" bIns="0"/>
-          <a:p>
-            <a:pPr>
-              <a:lnSpc>
-                <a:spcPct val="100000"/>
-              </a:lnSpc>
-            </a:pPr>
-            <a:r>
-              <a:rPr lang="en-US" sz="1350" b="1">
-                <a:solidFill>
-                  <a:srgbClr val="FFFFFF"/>
-                </a:solidFill>
-                <a:latin typeface="Verdana"/>
-                <a:ea typeface="Verdana"/>
-              </a:rPr>
-              <a:t>Tombol: Impor Jadwal</a:t>
-            </a:r>
-            <a:endParaRPr/>
-          </a:p>
-        </p:txBody>
-      </p:sp>
-      <p:sp>
-        <p:nvSpPr>
-          <p:cNvPr id="308" name=""/>
-          <p:cNvSpPr/>
-          <p:nvPr/>
-        </p:nvSpPr>
-        <p:spPr>
-          <a:xfrm rot="0" flipH="0" flipV="0">
-            <a:off x="5724525" y="1238250"/>
-            <a:ext cx="5857875" cy="5048250"/>
-          </a:xfrm>
-          <a:prstGeom prst="roundRect">
-            <a:avLst>
-              <a:gd name="adj" fmla="val 3774"/>
-            </a:avLst>
-          </a:prstGeom>
-          <a:solidFill>
-            <a:srgbClr val="51277C">
-              <a:alpha val="6000"/>
-            </a:srgbClr>
-          </a:solidFill>
-          <a:ln/>
-        </p:spPr>
-        <p:txBody>
-          <a:bodyPr/>
-          <a:p/>
-        </p:txBody>
-      </p:sp>
-      <p:pic>
-        <p:nvPicPr>
-          <p:cNvPr id="309" name=""/>
-          <p:cNvPicPr>
-            <a:picLocks noChangeAspect="1"/>
-          </p:cNvPicPr>
-          <p:nvPr/>
-        </p:nvPicPr>
-        <p:blipFill>
-          <a:blip r:embed="rId3">
-            <a:extLst>
-              <a:ext uri="{96DAC541-7B7A-43D3-8B79-37D633B846F1}">
-                <asvg:svgBlip r:embed="rId3"/>
-              </a:ext>
-            </a:extLst>
-          </a:blip>
-          <a:stretch>
-            <a:fillRect/>
-          </a:stretch>
-        </p:blipFill>
-        <p:spPr>
-          <a:xfrm rot="0" flipH="0" flipV="0">
-            <a:off x="5895975" y="1619250"/>
-            <a:ext cx="5524500" cy="4286250"/>
-          </a:xfrm>
-          <a:prstGeom prst="rect">
-            <a:avLst/>
-          </a:prstGeom>
-          <a:ln/>
-        </p:spPr>
-      </p:pic>
+              <a:t>09 / 17</a:t>
+            </a:r>
+            <a:endParaRPr/>
+          </a:p>
+        </p:txBody>
+      </p:sp>
     </p:spTree>
   </p:cSld>
 </p:sld>

--- a/Panduan Korlas dan Admin Pizza Snack Play/Panduan Korlas dan Admin Pizza Snack Play.pptx
+++ b/Panduan Korlas dan Admin Pizza Snack Play/Panduan Korlas dan Admin Pizza Snack Play.pptx
@@ -5,7 +5,7 @@
     <p:sldMasterId id="2147483648" r:id="rId0"/>
   </p:sldMasterIdLst>
   <p:notesMasterIdLst>
-    <p:notesMasterId r:id="rId18"/>
+    <p:notesMasterId r:id="rId19"/>
   </p:notesMasterIdLst>
   <p:sldIdLst>
     <p:sldId id="256" r:id="rId1"/>
@@ -25,6 +25,7 @@
     <p:sldId id="270" r:id="rId15"/>
     <p:sldId id="271" r:id="rId16"/>
     <p:sldId id="272" r:id="rId17"/>
+    <p:sldId id="273" r:id="rId18"/>
   </p:sldIdLst>
   <p:sldSz cx="12192000" cy="6858000"/>
   <p:notesSz cx="6858000" cy="12192000"/>
@@ -1420,7 +1421,7 @@
   <p:cSld>
     <p:spTree>
       <p:nvGrpSpPr>
-        <p:cNvPr id="16" name=""/>
+        <p:cNvPr id="16" name="" descr="&lt;Slide&#10;    style={{&#10;        width: '1280px',&#10;        height: '720px',&#10;        background: '#FAF7F2',&#10;        paddingTop: 20,&#10;        paddingBottom: 20,&#10;        paddingLeft: 64,&#10;        paddingRight: 64,&#10;        position: 'relative',&#10;        overflow: 'hidden',&#10;    }}&#10;&gt;&#10;    &lt;Box&#10;        style={{&#10;            position: 'absolute',&#10;            bottom: -130,&#10;            left: -110,&#10;            width: 380,&#10;            height: 380,&#10;            borderRadius: 190,&#10;            background: 'linear-gradient(135deg, #AFC440 0%, #F3B26C 100%)',&#10;            opacity: 0.12,&#10;        }}&#10;    /&gt;&#10;&#10;    {/* ── A · blok judul ── */}&#10;    &lt;Box style={{ height: 110, justifyContent: 'center' }}&gt;&#10;        &lt;Text&#10;            style={{&#10;                fontSize: 34,&#10;                fontWeight: 'bold',&#10;                color: '#51277C',&#10;                fontFamily: 'Trebuchet MS',&#10;                lineHeight: 1.3,&#10;            }}&#10;        &gt;&#10;            Tempel teks dari sekolah&#10;        &lt;/Text&gt;&#10;        &lt;Box style={{ marginTop: 10, width: 72, height: 6, borderRadius: 3, background: '#F3B26C' }} /&gt;&#10;    &lt;/Box&gt;&#10;&#10;    {/* ── B · area konten ── */}&#10;    &lt;Box style={{ height: 530, flexDirection: 'row', gap: 34, position: 'relative', zIndex: 1 }}&gt;&#10;        {/* kiri 45% · pesan */}&#10;        &lt;Box style={{ width: '45%', height: '100%', justifyContent: 'center' }}&gt;&#10;            &lt;Text&#10;                style={{&#10;                    fontSize: 44,&#10;                    fontWeight: 'bold',&#10;                    color: '#51277C',&#10;                    fontFamily: 'Trebuchet MS',&#10;                    lineHeight: 1.15,&#10;                }}&#10;            &gt;&#10;                Tidak perlu{'\n'}ketik ulang.&#10;            &lt;/Text&gt;&#10;&#10;            &lt;Text&#10;                style={{&#10;                    marginTop: 20,&#10;                    fontSize: 19,&#10;                    color: '#2A2333',&#10;                    fontFamily: 'Verdana',&#10;                    lineHeight: 1.55,&#10;                }}&#10;            &gt;&#10;                Jadwal yang dikirim sekolah lewat WhatsApp bisa ditempel apa adanya. Aplikasi&#10;                membaca rentang tanggal dan baris harinya sendiri.&#10;            &lt;/Text&gt;&#10;&#10;            &lt;Box style={{ marginTop: 18 }}&gt;&#10;                {[&#10;                    'Pratinjau ditampilkan lebih dulu — bisa dibatalkan',&#10;                    'Tanggal yang sudah ada jadwalnya dilewati, jadi tempel ulang aman',&#10;                    'Hasilnya masuk sebagai jadwal yang masih bisa diubah',&#10;                ].map((s, i) =&gt; (&#10;                    &lt;Box key={i} style={{ flexDirection: 'row', alignItems: 'center', gap: 10, marginTop: 9 }}&gt;&#10;                        &lt;svg width={20} height={20} viewBox='0 0 24 24'&gt;&#10;                            &lt;path d='M5 13l4 4 10-11' fill='none' stroke='#AFC440' strokeWidth='3' strokeLinecap='round' strokeLinejoin='round' /&gt;&#10;                        &lt;/svg&gt;&#10;                        &lt;Text style={{ flex: 1, fontSize: 17, color: '#6B6478', fontFamily: 'Verdana', lineHeight: 1.45 }}&gt;&#10;                            {s}&#10;                        &lt;/Text&gt;&#10;                    &lt;/Box&gt;&#10;                ))}&#10;            &lt;/Box&gt;&#10;&#10;            &lt;Box&#10;                style={{&#10;                    marginTop: 22,&#10;                    alignSelf: 'flex-start',&#10;                    flexDirection: 'row',&#10;                    alignItems: 'center',&#10;                    gap: 10,&#10;                    background: '#51277C',&#10;                    borderRadius: 12,&#10;                    paddingTop: 12,&#10;                    paddingBottom: 12,&#10;                    paddingLeft: 22,&#10;                    paddingRight: 22,&#10;                }}&#10;            &gt;&#10;                &lt;svg width={22} height={22} viewBox='0 0 24 24'&gt;&#10;                    &lt;path d='M9 3h6v3H9z' fill='#F3B26C' /&gt;&#10;                    &lt;path d='M6 5h12v16H6z' fill='none' stroke='#F3B26C' strokeWidth='2' /&gt;&#10;                &lt;/svg&gt;&#10;                &lt;Text style={{ fontSize: 18, color: '#FFFFFF', fontFamily: 'Verdana', fontWeight: 'bold' }}&gt;&#10;                    Tombol: Impor Jadwal&#10;                &lt;/Text&gt;&#10;            &lt;/Box&gt;&#10;        &lt;/Box&gt;&#10;&#10;        {/* kanan 55% · ilustrasi tempel → pratinjau */}&#10;        &lt;Box&#10;            style={{&#10;                width: '55%',&#10;                height: '100%',&#10;                background: 'rgba(81,39,124,0.06)',&#10;                borderRadius: 20,&#10;                justifyContent: 'center',&#10;                alignItems: 'center',&#10;            }}&#10;        &gt;&#10;            &lt;svg width={580} height={450} viewBox='0 0 580 450'&gt;&#10;                {/* teks asal */}&#10;                &lt;rect x='12' y='12' width='556' height='176' rx='16' fill='#FFFFFF' stroke='#E6DFD2' strokeWidth='2' /&gt;&#10;                &lt;circle cx='44' cy='44' r='14' fill='#AFC440' /&gt;&#10;                &lt;rect x='70' y='38' width='150' height='11' rx='5' fill='#DED7CB' /&gt;&#10;                &lt;rect x='34' y='80' width='160' height='10' rx='5' fill='#51277C' opacity='0.65' /&gt;&#10;                &lt;rect x='34' y='106' width='214' height='10' rx='5' fill='#DED7CB' /&gt;&#10;                &lt;rect x='34' y='132' width='188' height='10' rx='5' fill='#DED7CB' /&gt;&#10;                &lt;rect x='34' y='158' width='150' height='10' rx='5' fill='#DED7CB' /&gt;&#10;                &lt;text x='300' y='112' fontFamily='Verdana' fontSize='14' fill='#6B6478'&gt;Kamis : Puding + jeruk&lt;/text&gt;&#10;                &lt;text x='300' y='140' fontFamily='Verdana' fontSize='14' fill='#6B6478'&gt;Jumat : Donat + melon&lt;/text&gt;&#10;&#10;                {/* panah */}&#10;                &lt;path d='M290 196v46' stroke='#F3B26C' strokeWidth='6' strokeLinecap='round' /&gt;&#10;                &lt;path d='M276 234l14 16 14-16' fill='none' stroke='#F3B26C' strokeWidth='6' strokeLinecap='round' strokeLinejoin='round' /&gt;&#10;                &lt;text x='318' y='228' fontFamily='Verdana' fontSize='15' fill='#51277C'&gt;pratinjau&lt;/text&gt;&#10;&#10;                {/* pratinjau */}&#10;                &lt;rect x='12' y='258' width='556' height='180' rx='16' fill='#51277C' /&gt;&#10;                &lt;text x='40' y='294' fontFamily='Trebuchet MS' fontSize='21' fontWeight='bold' fill='#FFFFFF'&gt;&#10;                    Pratinjau — 12 baris baru&#10;                &lt;/text&gt;&#10;                &lt;rect x='40' y='312' width='500' height='34' rx='8' fill='rgba(255,255,255,0.16)' /&gt;&#10;                &lt;text x='58' y='335' fontFamily='Verdana' fontSize='14' fill='#FFFFFF'&gt;Kamis, 2 Okt&lt;/text&gt;&#10;                &lt;text x='230' y='335' fontFamily='Verdana' fontSize='14' fill='#EFEAE1'&gt;Puding + jeruk&lt;/text&gt;&#10;                &lt;rect x='40' y='354' width='500' height='34' rx='8' fill='rgba(255,255,255,0.16)' /&gt;&#10;                &lt;text x='58' y='377' fontFamily='Verdana' fontSize='14' fill='#FFFFFF'&gt;Jumat, 3 Okt&lt;/text&gt;&#10;                &lt;text x='230' y='377' fontFamily='Verdana' fontSize='14' fill='#EFEAE1'&gt;Donat + melon&lt;/text&gt;&#10;                &lt;rect x='392' y='400' width='148' height='26' rx='13' fill='#F3B26C' /&gt;&#10;                &lt;text x='466' y='419' fontFamily='Verdana' fontSize='14' fontWeight='bold' fill='#51277C' textAnchor='middle'&gt;&#10;                    Impor&#10;                &lt;/text&gt;&#10;            &lt;/svg&gt;&#10;        &lt;/Box&gt;&#10;    &lt;/Box&gt;&#10;&#10;    {/* ── C · bilah kaki ── */}&#10;    &lt;Box&#10;        style={{&#10;            height: 40,&#10;            flexDirection: 'row',&#10;            alignItems: 'center',&#10;            justifyContent: 'space-between',&#10;        }}&#10;    &gt;&#10;        &lt;Text style={{ fontSize: 14, color: '#6B6478', fontFamily: 'Verdana' }}&gt;&#10;            Pizza Snack Play · Panduan Korlas &amp;amp; Admin&#10;        &lt;/Text&gt;&#10;        &lt;Text style={{ fontSize: 14, color: '#6B6478', fontFamily: 'Verdana' }}&gt;10 / 18&lt;/Text&gt;&#10;    &lt;/Box&gt;&#10;&lt;/Slide&gt;&#10;"/>
         <p:cNvGrpSpPr/>
         <p:nvPr/>
       </p:nvGrpSpPr>
@@ -1453,10 +1454,7 @@
         </p:spPr>
         <p:txBody>
           <a:bodyPr/>
-          <a:p>
-            <a:pPr/>
-            <a:endParaRPr/>
-          </a:p>
+          <a:p/>
         </p:txBody>
       </p:sp>
       <p:sp>
@@ -1517,10 +1515,7 @@
         </p:spPr>
         <p:txBody>
           <a:bodyPr/>
-          <a:p>
-            <a:pPr/>
-            <a:endParaRPr/>
-          </a:p>
+          <a:p/>
         </p:txBody>
       </p:sp>
       <p:sp>
@@ -1587,7 +1582,7 @@
                 <a:latin typeface="Verdana"/>
                 <a:ea typeface="Verdana"/>
               </a:rPr>
-              <a:t>10 / 17</a:t>
+              <a:t>10 / 18</a:t>
             </a:r>
             <a:endParaRPr/>
           </a:p>
@@ -1654,10 +1649,7 @@
         </p:spPr>
         <p:txBody>
           <a:bodyPr/>
-          <a:p>
-            <a:pPr/>
-            <a:endParaRPr/>
-          </a:p>
+          <a:p/>
         </p:txBody>
       </p:sp>
       <p:sp>
@@ -1975,10 +1967,7 @@
         </p:spPr>
         <p:txBody>
           <a:bodyPr/>
-          <a:p>
-            <a:pPr/>
-            <a:endParaRPr/>
-          </a:p>
+          <a:p/>
         </p:txBody>
       </p:sp>
       <p:pic>
@@ -2072,10 +2061,7 @@
         </p:spPr>
         <p:txBody>
           <a:bodyPr/>
-          <a:p>
-            <a:pPr/>
-            <a:endParaRPr/>
-          </a:p>
+          <a:p/>
         </p:txBody>
       </p:sp>
       <p:pic>
@@ -2119,7 +2105,7 @@
   <p:cSld>
     <p:spTree>
       <p:nvGrpSpPr>
-        <p:cNvPr id="36" name=""/>
+        <p:cNvPr id="36" name="" descr="&lt;Slide&#10;    style={{&#10;        width: '1280px',&#10;        height: '720px',&#10;        background: '#FAF7F2',&#10;        paddingTop: 20,&#10;        paddingBottom: 20,&#10;        paddingLeft: 64,&#10;        paddingRight: 64,&#10;    }}&#10;&gt;&#10;    {/* ── A · blok judul ── */}&#10;    &lt;Box style={{ height: 110, justifyContent: 'center' }}&gt;&#10;        &lt;Text&#10;            style={{&#10;                fontSize: 34,&#10;                fontWeight: 'bold',&#10;                color: '#51277C',&#10;                fontFamily: 'Trebuchet MS',&#10;                lineHeight: 1.3,&#10;            }}&#10;        &gt;&#10;            Petugas piket: siapa yang ambil snack&#10;        &lt;/Text&gt;&#10;        &lt;Box style={{ marginTop: 10, width: 72, height: 6, borderRadius: 3, background: '#51277C' }} /&gt;&#10;    &lt;/Box&gt;&#10;&#10;    {/* ── B · area konten ── */}&#10;    &lt;Box style={{ height: 530, flexDirection: 'row', gap: 26 }}&gt;&#10;        {/* kiri 30% · penanda */}&#10;        &lt;Box&#10;            style={{&#10;                width: '30%',&#10;                height: '100%',&#10;                background: 'linear-gradient(135deg, #51277C 0%, #7A45A8 100%)',&#10;                borderRadius: 18,&#10;                padding: 26,&#10;                justifyContent: 'space-between',&#10;            }}&#10;        &gt;&#10;            &lt;Box&gt;&#10;                &lt;Text&#10;                    style={{&#10;                        fontSize: 30,&#10;                        fontWeight: 'bold',&#10;                        color: '#FFFFFF',&#10;                        fontFamily: 'Trebuchet MS',&#10;                        lineHeight: 1.25,&#10;                    }}&#10;                &gt;&#10;                    Satu tanggal,{'\n'}satu petugas&#10;                &lt;/Text&gt;&#10;                &lt;Box style={{ marginTop: 16, width: 64, height: 5, borderRadius: 3, background: '#F3B26C' }} /&gt;&#10;            &lt;/Box&gt;&#10;            &lt;Text&#10;                style={{&#10;                    fontSize: 17,&#10;                    color: 'rgba(255,255,255,0.88)',&#10;                    fontFamily: 'Verdana',&#10;                    lineHeight: 1.5,&#10;                }}&#10;            &gt;&#10;                Nama petugas yang Anda isi akan tampil ke orang tua sekalian nama orang tuanya.&#10;            &lt;/Text&gt;&#10;        &lt;/Box&gt;&#10;&#10;        {/* kanan 70% · tiga poin + ilustrasi dropdown */}&#10;        &lt;Box style={{ width: '70%', height: '100%', flexDirection: 'row', gap: 22 }}&gt;&#10;            &lt;Box style={{ flex: 1, height: '100%', justifyContent: 'space-between' }}&gt;&#10;                {[&#10;                    {&#10;                        t: 'Pilih dari daftar siswa',&#10;                        d: 'Kolom petugas berisi nama siswa di kelas Anda. Nama orang tuanya terisi sendiri.',&#10;                    },&#10;                    {&#10;                        t: 'Biarkan kosong bila perlu',&#10;                        d: 'Tanggal tanpa petugas bisa diambil sendiri orang tua — siapa cepat dia dapat.',&#10;                    },&#10;                    {&#10;                        t: 'Tidak ikut direbut orang tua',&#10;                        d: 'Ditandai &quot;Ditetapkan korlas&quot;, jadi tidak ada dua orang merasa sudah dapat.',&#10;                    },&#10;                ].map((it, i) =&gt; (&#10;                    &lt;Box&#10;                        key={i}&#10;                        style={{&#10;                            height: 165,&#10;                            background: '#FFFFFF',&#10;                            borderRadius: 16,&#10;                            boxShadow: '0 4px 20px rgba(0,0,0,0.08)',&#10;                            padding: 22,&#10;                            borderLeft: '8px solid #AFC440',&#10;                        }}&#10;                    &gt;&#10;                        &lt;Text&#10;                            style={{&#10;                                fontSize: 23,&#10;                                fontWeight: 'bold',&#10;                                color: '#51277C',&#10;                                fontFamily: 'Trebuchet MS',&#10;                                lineHeight: 1.3,&#10;                            }}&#10;                        &gt;&#10;                            {it.t}&#10;                        &lt;/Text&gt;&#10;                        &lt;Text&#10;                            style={{&#10;                                marginTop: 9,&#10;                                fontSize: 17,&#10;                                color: '#6B6478',&#10;                                fontFamily: 'Verdana',&#10;                                lineHeight: 1.5,&#10;                            }}&#10;                        &gt;&#10;                            {it.d}&#10;                        &lt;/Text&gt;&#10;                    &lt;/Box&gt;&#10;                ))}&#10;            &lt;/Box&gt;&#10;&#10;            &lt;Box&#10;                style={{&#10;                    width: 300,&#10;                    height: '100%',&#10;                    background: 'rgba(81,39,124,0.06)',&#10;                    borderRadius: 18,&#10;                    justifyContent: 'center',&#10;                    alignItems: 'center',&#10;                }}&#10;            &gt;&#10;                &lt;svg width={276} height={300} viewBox='0 0 276 300'&gt;&#10;                    &lt;text x='14' y='26' fontFamily='Verdana' fontSize='14' fill='#6B6478'&gt;Petugas&lt;/text&gt;&#10;                    &lt;rect x='14' y='38' width='248' height='48' rx='10' fill='#FFFFFF' stroke='#51277C' strokeWidth='2' /&gt;&#10;                    &lt;text x='34' y='68' fontFamily='Verdana' fontSize='16' fill='#51277C'&gt;Rafa Aditya&lt;/text&gt;&#10;                    &lt;path d='M232 58l16 12-16 12z' fill='#51277C' /&gt;&#10;&#10;                    &lt;rect x='14' y='94' width='248' height='112' rx='10' fill='#FFFFFF' stroke='#E6DFD2' strokeWidth='2' /&gt;&#10;                    &lt;rect x='14' y='94' width='248' height='36' rx='10' fill='rgba(81,39,124,0.10)' /&gt;&#10;                    &lt;text x='34' y='117' fontFamily='Verdana' fontSize='15' fontWeight='bold' fill='#51277C'&gt;Rafa Aditya&lt;/text&gt;&#10;                    &lt;text x='34' y='148' fontFamily='Verdana' fontSize='15' fill='#2A2333'&gt;Dinda&lt;/text&gt;&#10;                    &lt;text x='34' y='178' fontFamily='Verdana' fontSize='15' fill='#2A2333'&gt;Bayu&lt;/text&gt;&#10;&#10;                    &lt;text x='14' y='234' fontFamily='Verdana' fontSize='14' fill='#6B6478'&gt;Orang tua (terisi sendiri)&lt;/text&gt;&#10;                    &lt;rect x='14' y='246' width='248' height='44' rx='10' fill='#EFEAE1' /&gt;&#10;                    &lt;text x='34' y='274' fontFamily='Verdana' fontSize='15' fill='#6B6478'&gt;Ibu Rina&lt;/text&gt;&#10;                &lt;/svg&gt;&#10;            &lt;/Box&gt;&#10;        &lt;/Box&gt;&#10;    &lt;/Box&gt;&#10;&#10;    {/* ── C · bilah kaki ── */}&#10;    &lt;Box&#10;        style={{&#10;            height: 40,&#10;            flexDirection: 'row',&#10;            alignItems: 'center',&#10;            justifyContent: 'space-between',&#10;        }}&#10;    &gt;&#10;        &lt;Text style={{ fontSize: 14, color: '#6B6478', fontFamily: 'Verdana' }}&gt;&#10;            Pizza Snack Play · Panduan Korlas &amp;amp; Admin&#10;        &lt;/Text&gt;&#10;        &lt;Text style={{ fontSize: 14, color: '#6B6478', fontFamily: 'Verdana' }}&gt;11 / 18&lt;/Text&gt;&#10;    &lt;/Box&gt;&#10;&lt;/Slide&gt;&#10;"/>
         <p:cNvGrpSpPr/>
         <p:nvPr/>
       </p:nvGrpSpPr>
@@ -2152,10 +2138,7 @@
         </p:spPr>
         <p:txBody>
           <a:bodyPr/>
-          <a:p>
-            <a:pPr/>
-            <a:endParaRPr/>
-          </a:p>
+          <a:p/>
         </p:txBody>
       </p:sp>
       <p:sp>
@@ -2216,10 +2199,7 @@
         </p:spPr>
         <p:txBody>
           <a:bodyPr/>
-          <a:p>
-            <a:pPr/>
-            <a:endParaRPr/>
-          </a:p>
+          <a:p/>
         </p:txBody>
       </p:sp>
       <p:sp>
@@ -2253,10 +2233,7 @@
         </p:spPr>
         <p:txBody>
           <a:bodyPr/>
-          <a:p>
-            <a:pPr/>
-            <a:endParaRPr/>
-          </a:p>
+          <a:p/>
         </p:txBody>
       </p:sp>
       <p:sp>
@@ -2335,10 +2312,7 @@
         </p:spPr>
         <p:txBody>
           <a:bodyPr/>
-          <a:p>
-            <a:pPr/>
-            <a:endParaRPr/>
-          </a:p>
+          <a:p/>
         </p:txBody>
       </p:sp>
       <p:sp>
@@ -2410,10 +2384,7 @@
         </p:spPr>
         <p:txBody>
           <a:bodyPr/>
-          <a:p>
-            <a:pPr/>
-            <a:endParaRPr/>
-          </a:p>
+          <a:p/>
         </p:txBody>
       </p:sp>
       <p:sp>
@@ -2470,10 +2441,7 @@
         </p:spPr>
         <p:txBody>
           <a:bodyPr/>
-          <a:p>
-            <a:pPr/>
-            <a:endParaRPr/>
-          </a:p>
+          <a:p/>
         </p:txBody>
       </p:sp>
       <p:sp>
@@ -2578,10 +2546,7 @@
         </p:spPr>
         <p:txBody>
           <a:bodyPr/>
-          <a:p>
-            <a:pPr/>
-            <a:endParaRPr/>
-          </a:p>
+          <a:p/>
         </p:txBody>
       </p:sp>
       <p:sp>
@@ -2638,10 +2603,7 @@
         </p:spPr>
         <p:txBody>
           <a:bodyPr/>
-          <a:p>
-            <a:pPr/>
-            <a:endParaRPr/>
-          </a:p>
+          <a:p/>
         </p:txBody>
       </p:sp>
       <p:sp>
@@ -2746,10 +2708,7 @@
         </p:spPr>
         <p:txBody>
           <a:bodyPr/>
-          <a:p>
-            <a:pPr/>
-            <a:endParaRPr/>
-          </a:p>
+          <a:p/>
         </p:txBody>
       </p:sp>
       <p:sp>
@@ -2806,10 +2765,7 @@
         </p:spPr>
         <p:txBody>
           <a:bodyPr/>
-          <a:p>
-            <a:pPr/>
-            <a:endParaRPr/>
-          </a:p>
+          <a:p/>
         </p:txBody>
       </p:sp>
       <p:sp>
@@ -2909,10 +2865,7 @@
         </p:spPr>
         <p:txBody>
           <a:bodyPr/>
-          <a:p>
-            <a:pPr/>
-            <a:endParaRPr/>
-          </a:p>
+          <a:p/>
         </p:txBody>
       </p:sp>
       <p:pic>
@@ -3010,7 +2963,7 @@
                 <a:latin typeface="Verdana"/>
                 <a:ea typeface="Verdana"/>
               </a:rPr>
-              <a:t>11 / 17</a:t>
+              <a:t>11 / 18</a:t>
             </a:r>
             <a:endParaRPr/>
           </a:p>
@@ -3705,7 +3658,7 @@
   <p:cSld>
     <p:spTree>
       <p:nvGrpSpPr>
-        <p:cNvPr id="69" name=""/>
+        <p:cNvPr id="69" name="" descr="&lt;Slide&#10;    style={{&#10;        width: '1280px',&#10;        height: '720px',&#10;        background: '#FAF7F2',&#10;        paddingTop: 20,&#10;        paddingBottom: 20,&#10;        paddingLeft: 64,&#10;        paddingRight: 64,&#10;        position: 'relative',&#10;        overflow: 'hidden',&#10;    }}&#10;&gt;&#10;    &lt;Box&#10;        style={{&#10;            position: 'absolute',&#10;            bottom: -140,&#10;            right: -110,&#10;            width: 460,&#10;            height: 460,&#10;            borderRadius: 230,&#10;            background: 'linear-gradient(135deg, #51277C 0%, #7A45A8 100%)',&#10;            opacity: 0.09,&#10;        }}&#10;    /&gt;&#10;&#10;    {/* ── A · blok judul ── */}&#10;    &lt;Box style={{ height: 110, justifyContent: 'center' }}&gt;&#10;        &lt;Text&#10;            style={{&#10;                fontSize: 34,&#10;                fontWeight: 'bold',&#10;                color: '#51277C',&#10;                fontFamily: 'Trebuchet MS',&#10;                lineHeight: 1.3,&#10;            }}&#10;        &gt;&#10;            Terkunci, lalu terbit&#10;        &lt;/Text&gt;&#10;        &lt;Box style={{ marginTop: 10, width: 72, height: 6, borderRadius: 3, background: '#F3B26C' }} /&gt;&#10;    &lt;/Box&gt;&#10;&#10;    {/* ── B · area konten ── */}&#10;    &lt;Box style={{ height: 530, flexDirection: 'row', gap: 34, position: 'relative', zIndex: 1 }}&gt;&#10;        {/* kiri 55% · frasa raksasa */}&#10;        &lt;Box style={{ width: '55%', height: '100%', justifyContent: 'center' }}&gt;&#10;            &lt;Text&#10;                style={{&#10;                    fontSize: 64,&#10;                    fontWeight: 'bold',&#10;                    color: '#51277C',&#10;                    fontFamily: 'Trebuchet MS',&#10;                    lineHeight: 1.1,&#10;                }}&#10;            &gt;&#10;                Kunci dulu,{'\n'}baru terbit.&#10;            &lt;/Text&gt;&#10;&#10;            &lt;Text&#10;                style={{&#10;                    marginTop: 22,&#10;                    fontSize: 19,&#10;                    color: '#2A2333',&#10;                    fontFamily: 'Verdana',&#10;                    lineHeight: 1.55,&#10;                }}&#10;            &gt;&#10;                Orang tua baru melihat jadwal setelah diterbitkan. Selama belum, jadwalnya&#10;                tetap tersimpan — hanya belum diumumkan.&#10;            &lt;/Text&gt;&#10;&#10;            &lt;Box&#10;                style={{&#10;                    marginTop: 24,&#10;                    background: 'rgba(243,178,108,0.22)',&#10;                    borderRadius: 14,&#10;                    borderLeft: '8px solid #F3B26C',&#10;                    padding: 18,&#10;                }}&#10;            &gt;&#10;                &lt;Text&#10;                    style={{&#10;                        fontSize: 18,&#10;                        color: '#2A2333',&#10;                        fontFamily: 'Verdana',&#10;                        lineHeight: 1.5,&#10;                    }}&#10;                &gt;&#10;                    Publikasi menolak selama masih ada hari yang belum dikunci. Selesaikan&#10;                    semuanya lebih dulu, baru tekan Publikasi.&#10;                &lt;/Text&gt;&#10;            &lt;/Box&gt;&#10;        &lt;/Box&gt;&#10;&#10;        {/* kanan 45% · tiga status */}&#10;        &lt;Box&#10;            style={{&#10;                width: '45%',&#10;                height: '100%',&#10;                background: 'rgba(81,39,124,0.06)',&#10;                borderRadius: 20,&#10;                justifyContent: 'center',&#10;                alignItems: 'center',&#10;            }}&#10;        &gt;&#10;            &lt;svg width={430} height={430} viewBox='0 0 430 430'&gt;&#10;                {/* 1 · masih bisa diubah */}&#10;                &lt;rect x='18' y='14' width='394' height='112' rx='16' fill='#FFFFFF' stroke='#DED7CB' strokeWidth='2' /&gt;&#10;                &lt;circle cx='66' cy='70' r='26' fill='#DED7CB' /&gt;&#10;                &lt;text x='66' y='80' fontFamily='Trebuchet MS' fontSize='24' fontWeight='bold' fill='#FFFFFF' textAnchor='middle'&gt;&#10;                    1&#10;                &lt;/text&gt;&#10;                &lt;text x='110' y='62' fontFamily='Trebuchet MS' fontSize='22' fontWeight='bold' fill='#51277C'&gt;&#10;                    Masih bisa diubah&#10;                &lt;/text&gt;&#10;                &lt;text x='110' y='94' fontFamily='Verdana' fontSize='15' fill='#6B6478'&gt;&#10;                    disusun korlas&#10;                &lt;/text&gt;&#10;&#10;                {/* 2 · dikunci */}&#10;                &lt;rect x='18' y='152' width='394' height='112' rx='16' fill='#FFFFFF' stroke='#AFC440' strokeWidth='3' /&gt;&#10;                &lt;circle cx='66' cy='208' r='26' fill='#AFC440' /&gt;&#10;                &lt;text x='66' y='218' fontFamily='Trebuchet MS' fontSize='24' fontWeight='bold' fill='#FFFFFF' textAnchor='middle'&gt;&#10;                    2&#10;                &lt;/text&gt;&#10;                &lt;text x='110' y='200' fontFamily='Trebuchet MS' fontSize='22' fontWeight='bold' fill='#51277C'&gt;&#10;                    Dikunci&#10;                &lt;/text&gt;&#10;                &lt;text x='110' y='232' fontFamily='Verdana' fontSize='15' fill='#6B6478'&gt;&#10;                    sudah tidak bisa diedit&#10;                &lt;/text&gt;&#10;&#10;                {/* 3 · terbit */}&#10;                &lt;rect x='18' y='290' width='394' height='126' rx='16' fill='#51277C' /&gt;&#10;                &lt;circle cx='66' cy='352' r='26' fill='#F3B26C' /&gt;&#10;                &lt;text x='66' y='362' fontFamily='Trebuchet MS' fontSize='24' fontWeight='bold' fill='#51277C' textAnchor='middle'&gt;&#10;                    3&#10;                &lt;/text&gt;&#10;                &lt;text x='110' y='344' fontFamily='Trebuchet MS' fontSize='22' fontWeight='bold' fill='#FFFFFF'&gt;&#10;                    Terbit ke orang tua&#10;                &lt;/text&gt;&#10;                &lt;text x='110' y='376' fontFamily='Verdana' fontSize='15' fill='#EFEAE1'&gt;&#10;                    tampil di HP mereka&#10;                &lt;/text&gt;&#10;                &lt;text x='110' y='400' fontFamily='Verdana' fontSize='14' fill='#F3B26C'&gt;&#10;                    revisi? minta admin membuka kunci&#10;                &lt;/text&gt;&#10;            &lt;/svg&gt;&#10;        &lt;/Box&gt;&#10;    &lt;/Box&gt;&#10;&#10;    {/* ── C · bilah kaki ── */}&#10;    &lt;Box&#10;        style={{&#10;            height: 40,&#10;            flexDirection: 'row',&#10;            alignItems: 'center',&#10;            justifyContent: 'space-between',&#10;        }}&#10;    &gt;&#10;        &lt;Text style={{ fontSize: 14, color: '#6B6478', fontFamily: 'Verdana' }}&gt;&#10;            Pizza Snack Play · Panduan Korlas &amp;amp; Admin&#10;        &lt;/Text&gt;&#10;        &lt;Text style={{ fontSize: 14, color: '#6B6478', fontFamily: 'Verdana' }}&gt;13 / 18&lt;/Text&gt;&#10;    &lt;/Box&gt;&#10;&lt;/Slide&gt;&#10;"/>
         <p:cNvGrpSpPr/>
         <p:nvPr/>
       </p:nvGrpSpPr>
@@ -3738,10 +3691,7 @@
         </p:spPr>
         <p:txBody>
           <a:bodyPr/>
-          <a:p>
-            <a:pPr/>
-            <a:endParaRPr/>
-          </a:p>
+          <a:p/>
         </p:txBody>
       </p:sp>
       <p:sp>
@@ -3802,10 +3752,7 @@
         </p:spPr>
         <p:txBody>
           <a:bodyPr/>
-          <a:p>
-            <a:pPr/>
-            <a:endParaRPr/>
-          </a:p>
+          <a:p/>
         </p:txBody>
       </p:sp>
       <p:sp>
@@ -3872,7 +3819,7 @@
                 <a:latin typeface="Verdana"/>
                 <a:ea typeface="Verdana"/>
               </a:rPr>
-              <a:t>13 / 17</a:t>
+              <a:t>13 / 18</a:t>
             </a:r>
             <a:endParaRPr/>
           </a:p>
@@ -4233,10 +4180,7 @@
         </p:spPr>
         <p:txBody>
           <a:bodyPr/>
-          <a:p>
-            <a:pPr/>
-            <a:endParaRPr/>
-          </a:p>
+          <a:p/>
         </p:txBody>
       </p:sp>
       <p:sp>
@@ -4354,10 +4298,7 @@
         </p:spPr>
         <p:txBody>
           <a:bodyPr/>
-          <a:p>
-            <a:pPr/>
-            <a:endParaRPr/>
-          </a:p>
+          <a:p/>
         </p:txBody>
       </p:sp>
       <p:sp>
@@ -4414,10 +4355,7 @@
         </p:spPr>
         <p:txBody>
           <a:bodyPr/>
-          <a:p>
-            <a:pPr/>
-            <a:endParaRPr/>
-          </a:p>
+          <a:p/>
         </p:txBody>
       </p:sp>
       <p:sp>
@@ -4482,10 +4420,7 @@
         </p:spPr>
         <p:txBody>
           <a:bodyPr/>
-          <a:p>
-            <a:pPr/>
-            <a:endParaRPr/>
-          </a:p>
+          <a:p/>
         </p:txBody>
       </p:sp>
       <p:pic>
@@ -4529,7 +4464,7 @@
   <p:cSld>
     <p:spTree>
       <p:nvGrpSpPr>
-        <p:cNvPr id="83" name=""/>
+        <p:cNvPr id="83" name="" descr="&lt;Slide&#10;    style={{&#10;        width: '1280px',&#10;        height: '720px',&#10;        background: '#FAF7F2',&#10;        paddingTop: 20,&#10;        paddingBottom: 20,&#10;        paddingLeft: 64,&#10;        paddingRight: 64,&#10;    }}&#10;&gt;&#10;    {/* ── A · blok judul ── */}&#10;    &lt;Box style={{ height: 110, justifyContent: 'center' }}&gt;&#10;        &lt;Text&#10;            style={{&#10;                fontSize: 34,&#10;                fontWeight: 'bold',&#10;                color: '#51277C',&#10;                fontFamily: 'Trebuchet MS',&#10;                lineHeight: 1.3,&#10;            }}&#10;        &gt;&#10;            Aksi massal: satu klik untuk banyak hari&#10;        &lt;/Text&gt;&#10;        &lt;Box style={{ marginTop: 10, width: 72, height: 6, borderRadius: 3, background: '#51277C' }} /&gt;&#10;    &lt;/Box&gt;&#10;&#10;    {/* ── B · area konten ── */}&#10;    &lt;Box style={{ height: 530, flexDirection: 'row', gap: 30 }}&gt;&#10;        {/* kiri 55% · tabel dengan kotak centang */}&#10;        &lt;Box&#10;            style={{&#10;                width: '55%',&#10;                height: '100%',&#10;                background: 'rgba(81,39,124,0.06)',&#10;                borderRadius: 20,&#10;                justifyContent: 'center',&#10;                alignItems: 'center',&#10;            }}&#10;        &gt;&#10;            &lt;svg width={560} height={440} viewBox='0 0 560 440'&gt;&#10;                {/* baris header minggu */}&#10;                &lt;rect x='10' y='8' width='540' height='44' rx='10' fill='#51277C' /&gt;&#10;                &lt;rect x='26' y='22' width='20' height='20' rx='5' fill='#F3B26C' /&gt;&#10;                &lt;path d='M31 32l4 4 8-9' fill='none' stroke='#51277C' strokeWidth='3' strokeLinecap='round' strokeLinejoin='round' /&gt;&#10;                &lt;text x='62' y='38' fontFamily='Verdana' fontSize='15' fill='#FFFFFF'&gt;Pilih minggu ini&lt;/text&gt;&#10;&#10;                {/* Senin — dicentang */}&#10;                &lt;rect x='10' y='62' width='540' height='46' rx='10' fill='#FFFFFF' stroke='#E6DFD2' strokeWidth='2' /&gt;&#10;                &lt;rect x='26' y='75' width='20' height='20' rx='5' fill='#51277C' stroke='#51277C' strokeWidth='2' /&gt;&#10;                &lt;path d='M31 85l4 4 8-9' fill='none' stroke='#FFFFFF' strokeWidth='3' strokeLinecap='round' strokeLinejoin='round' /&gt;&#10;                &lt;text x='62' y='92' fontFamily='Verdana' fontSize='15' fill='#2A2333'&gt;Senin, 5&lt;/text&gt;&#10;                &lt;rect x='436' y='73' width='98' height='24' rx='12' fill='#DED7CB' /&gt;&#10;&#10;                {/* Selasa — dicentang */}&#10;                &lt;rect x='10' y='116' width='540' height='46' rx='10' fill='#FFFFFF' stroke='#E6DFD2' strokeWidth='2' /&gt;&#10;                &lt;rect x='26' y='129' width='20' height='20' rx='5' fill='#51277C' stroke='#51277C' strokeWidth='2' /&gt;&#10;                &lt;path d='M31 139l4 4 8-9' fill='none' stroke='#FFFFFF' strokeWidth='3' strokeLinecap='round' strokeLinejoin='round' /&gt;&#10;                &lt;text x='62' y='146' fontFamily='Verdana' fontSize='15' fill='#2A2333'&gt;Selasa, 6&lt;/text&gt;&#10;                &lt;rect x='436' y='127' width='98' height='24' rx='12' fill='#DED7CB' /&gt;&#10;&#10;                {/* Rabu — dicentang */}&#10;                &lt;rect x='10' y='170' width='540' height='46' rx='10' fill='#FFFFFF' stroke='#E6DFD2' strokeWidth='2' /&gt;&#10;                &lt;rect x='26' y='183' width='20' height='20' rx='5' fill='#51277C' stroke='#51277C' strokeWidth='2' /&gt;&#10;                &lt;path d='M31 193l4 4 8-9' fill='none' stroke='#FFFFFF' strokeWidth='3' strokeLinecap='round' strokeLinejoin='round' /&gt;&#10;                &lt;text x='62' y='200' fontFamily='Verdana' fontSize='15' fill='#2A2333'&gt;Rabu, 7&lt;/text&gt;&#10;                &lt;rect x='436' y='181' width='98' height='24' rx='12' fill='#DED7CB' /&gt;&#10;&#10;                {/* Kamis — tidak dicentang */}&#10;                &lt;rect x='10' y='224' width='540' height='46' rx='10' fill='#FFFFFF' stroke='#E6DFD2' strokeWidth='2' /&gt;&#10;                &lt;rect x='26' y='237' width='20' height='20' rx='5' fill='#FFFFFF' stroke='#DED7CB' strokeWidth='2' /&gt;&#10;                &lt;text x='62' y='254' fontFamily='Verdana' fontSize='15' fill='#2A2333'&gt;Kamis, 8&lt;/text&gt;&#10;                &lt;rect x='436' y='235' width='98' height='24' rx='12' fill='#DED7CB' /&gt;&#10;&#10;                {/* Jumat — tidak dicentang */}&#10;                &lt;rect x='10' y='278' width='540' height='46' rx='10' fill='#FFFFFF' stroke='#E6DFD2' strokeWidth='2' /&gt;&#10;                &lt;rect x='26' y='291' width='20' height='20' rx='5' fill='#FFFFFF' stroke='#DED7CB' strokeWidth='2' /&gt;&#10;                &lt;text x='62' y='308' fontFamily='Verdana' fontSize='15' fill='#2A2333'&gt;Jumat, 9&lt;/text&gt;&#10;                &lt;rect x='436' y='289' width='98' height='24' rx='12' fill='#DED7CB' /&gt;&#10;&#10;                {/* bilah aksi */}&#10;                &lt;rect x='10' y='344' width='540' height='78' rx='14' fill='#51277C' /&gt;&#10;                &lt;rect x='28' y='364' width='120' height='38' rx='10' fill='#FFFFFF' /&gt;&#10;                &lt;text x='88' y='389' fontFamily='Verdana' fontSize='15' fontWeight='bold' fill='#51277C' textAnchor='middle'&gt;Kunci&lt;/text&gt;&#10;                &lt;rect x='160' y='364' width='120' height='38' rx='10' fill='rgba(255,255,255,0.25)' /&gt;&#10;                &lt;text x='220' y='389' fontFamily='Verdana' fontSize='15' fill='#EFEAE1' textAnchor='middle'&gt;Publikasi&lt;/text&gt;&#10;                &lt;rect x='292' y='364' width='120' height='38' rx='10' fill='rgba(255,255,255,0.25)' /&gt;&#10;                &lt;text x='352' y='389' fontFamily='Verdana' fontSize='15' fill='#EFEAE1' textAnchor='middle'&gt;Buka kunci&lt;/text&gt;&#10;                &lt;text x='470' y='389' fontFamily='Verdana' fontSize='14' fill='#F3B26C'&gt;3 dipilih&lt;/text&gt;&#10;            &lt;/svg&gt;&#10;        &lt;/Box&gt;&#10;&#10;        {/* kanan 45% · tiga keterangan */}&#10;        &lt;Box style={{ width: '45%', height: '100%', justifyContent: 'space-between' }}&gt;&#10;            {[&#10;                {&#10;                    t: 'Centang dulu, lalu pilih aksinya',&#10;                    d: 'Ada &quot;Pilih minggu ini&quot; di setiap blok minggu dan &quot;Pilih semua&quot; di bagian atas tabel.',&#10;                    g: 'Tidak satu per satu',&#10;                },&#10;                {&#10;                    t: 'Tombol menyesuaikan pilihan Anda',&#10;                    d: 'Bilah aksi di bawah layar hanya menghidupkan tombol yang cocok dengan status hari yang dicentang.',&#10;                    g: 'Tidak bisa salah klik',&#10;                },&#10;                {&#10;                    t: 'Buka kunci massal hanya admin',&#10;                    d: 'Korlas tetap terbatas kelasnya sendiri — hari dari kelas lain tidak ikut tersentuh.',&#10;                    g: 'Aman lintas kelas',&#10;                },&#10;            ].map((it, i) =&gt; (&#10;                &lt;Box&#10;                    key={i}&#10;                    style={{&#10;                        height: 166,&#10;                        background: '#FFFFFF',&#10;                        borderRadius: 16,&#10;                        boxShadow: '0 4px 20px rgba(0,0,0,0.08)',&#10;                        padding: 22,&#10;                        borderLeft: '8px solid #AFC440',&#10;                    }}&#10;                &gt;&#10;                    &lt;Text&#10;                        style={{&#10;                            fontSize: 24,&#10;                            fontWeight: 'bold',&#10;                            color: '#51277C',&#10;                            fontFamily: 'Trebuchet MS',&#10;                            lineHeight: 1.3,&#10;                        }}&#10;                    &gt;&#10;                        {it.t}&#10;                    &lt;/Text&gt;&#10;                    &lt;Text&#10;                        style={{&#10;                            marginTop: 10,&#10;                            fontSize: 17,&#10;                            color: '#6B6478',&#10;                            fontFamily: 'Verdana',&#10;                            lineHeight: 1.5,&#10;                        }}&#10;                    &gt;&#10;                        {it.d}&#10;                    &lt;/Text&gt;&#10;                    &lt;Box style={{ marginTop: 'auto' }}&gt;&#10;                        &lt;Text&#10;                            style={{&#10;                                fontSize: 16,&#10;                                color: '#51277C',&#10;                                fontFamily: 'Verdana',&#10;                                fontWeight: 'bold',&#10;                            }}&#10;                        &gt;&#10;                            {it.g}&#10;                        &lt;/Text&gt;&#10;                    &lt;/Box&gt;&#10;                &lt;/Box&gt;&#10;            ))}&#10;        &lt;/Box&gt;&#10;    &lt;/Box&gt;&#10;&#10;    {/* ── C · bilah kaki ── */}&#10;    &lt;Box&#10;        style={{&#10;            height: 40,&#10;            flexDirection: 'row',&#10;            alignItems: 'center',&#10;            justifyContent: 'space-between',&#10;        }}&#10;    &gt;&#10;        &lt;Text style={{ fontSize: 14, color: '#6B6478', fontFamily: 'Verdana' }}&gt;&#10;            Pizza Snack Play · Panduan Korlas &amp;amp; Admin&#10;        &lt;/Text&gt;&#10;        &lt;Text style={{ fontSize: 14, color: '#6B6478', fontFamily: 'Verdana' }}&gt;14 / 18&lt;/Text&gt;&#10;    &lt;/Box&gt;&#10;&lt;/Slide&gt;&#10;"/>
         <p:cNvGrpSpPr/>
         <p:nvPr/>
       </p:nvGrpSpPr>
@@ -4562,10 +4497,7 @@
         </p:spPr>
         <p:txBody>
           <a:bodyPr/>
-          <a:p>
-            <a:pPr/>
-            <a:endParaRPr/>
-          </a:p>
+          <a:p/>
         </p:txBody>
       </p:sp>
       <p:sp>
@@ -4626,10 +4558,7 @@
         </p:spPr>
         <p:txBody>
           <a:bodyPr/>
-          <a:p>
-            <a:pPr/>
-            <a:endParaRPr/>
-          </a:p>
+          <a:p/>
         </p:txBody>
       </p:sp>
       <p:sp>
@@ -4657,10 +4586,7 @@
         </p:spPr>
         <p:txBody>
           <a:bodyPr/>
-          <a:p>
-            <a:pPr/>
-            <a:endParaRPr/>
-          </a:p>
+          <a:p/>
         </p:txBody>
       </p:sp>
       <p:pic>
@@ -4724,10 +4650,7 @@
         </p:spPr>
         <p:txBody>
           <a:bodyPr/>
-          <a:p>
-            <a:pPr/>
-            <a:endParaRPr/>
-          </a:p>
+          <a:p/>
         </p:txBody>
       </p:sp>
       <p:sp>
@@ -4784,10 +4707,7 @@
         </p:spPr>
         <p:txBody>
           <a:bodyPr/>
-          <a:p>
-            <a:pPr/>
-            <a:endParaRPr/>
-          </a:p>
+          <a:p/>
         </p:txBody>
       </p:sp>
       <p:sp>
@@ -4927,10 +4847,7 @@
         </p:spPr>
         <p:txBody>
           <a:bodyPr/>
-          <a:p>
-            <a:pPr/>
-            <a:endParaRPr/>
-          </a:p>
+          <a:p/>
         </p:txBody>
       </p:sp>
       <p:sp>
@@ -4987,10 +4904,7 @@
         </p:spPr>
         <p:txBody>
           <a:bodyPr/>
-          <a:p>
-            <a:pPr/>
-            <a:endParaRPr/>
-          </a:p>
+          <a:p/>
         </p:txBody>
       </p:sp>
       <p:sp>
@@ -5130,10 +5044,7 @@
         </p:spPr>
         <p:txBody>
           <a:bodyPr/>
-          <a:p>
-            <a:pPr/>
-            <a:endParaRPr/>
-          </a:p>
+          <a:p/>
         </p:txBody>
       </p:sp>
       <p:sp>
@@ -5190,10 +5101,7 @@
         </p:spPr>
         <p:txBody>
           <a:bodyPr/>
-          <a:p>
-            <a:pPr/>
-            <a:endParaRPr/>
-          </a:p>
+          <a:p/>
         </p:txBody>
       </p:sp>
       <p:sp>
@@ -5367,7 +5275,7 @@
                 <a:latin typeface="Verdana"/>
                 <a:ea typeface="Verdana"/>
               </a:rPr>
-              <a:t>14 / 17</a:t>
+              <a:t>14 / 18</a:t>
             </a:r>
             <a:endParaRPr/>
           </a:p>
@@ -5379,11 +5287,11 @@
 </file>
 
 <file path=ppt/slides/slide15.xml><?xml version="1.0" encoding="utf-8"?>
-<p:sld xmlns:p="http://schemas.openxmlformats.org/presentationml/2006/main" xmlns:a="http://schemas.openxmlformats.org/drawingml/2006/main" xmlns:asvg="http://schemas.microsoft.com/office/drawing/2016/SVG/main" xmlns:r="http://schemas.openxmlformats.org/officeDocument/2006/relationships" xmlns:mc="http://schemas.openxmlformats.org/markup-compatibility/2006" mc:Ignorable="asvg">
+<p:sld xmlns:p="http://schemas.openxmlformats.org/presentationml/2006/main" xmlns:a="http://schemas.openxmlformats.org/drawingml/2006/main">
   <p:cSld>
     <p:spTree>
       <p:nvGrpSpPr>
-        <p:cNvPr id="106" name=""/>
+        <p:cNvPr id="106" name="" descr="&lt;Slide&#10;    style={{&#10;        width: '1280px',&#10;        height: '720px',&#10;        background: '#FAF7F2',&#10;        paddingTop: 20,&#10;        paddingBottom: 20,&#10;        paddingLeft: 64,&#10;        paddingRight: 64,&#10;    }}&#10;&gt;&#10;    {/* ── A · blok judul ── */}&#10;    &lt;Box style={{ height: 110, justifyContent: 'center' }}&gt;&#10;        &lt;Text&#10;            style={{&#10;                fontSize: 34,&#10;                fontWeight: 'bold',&#10;                color: '#51277C',&#10;                fontFamily: 'Trebuchet MS',&#10;                lineHeight: 1.3,&#10;            }}&#10;        &gt;&#10;            Keterangan bulan: sudah berapa yang terisi?&#10;        &lt;/Text&gt;&#10;        &lt;Box style={{ marginTop: 10, width: 72, height: 6, borderRadius: 3, background: '#AFC440' }} /&gt;&#10;    &lt;/Box&gt;&#10;&#10;    {/* ── B · area konten ── */}&#10;    &lt;Box style={{ height: 530, justifyContent: 'space-between' }}&gt;&#10;        {/* kartu besar · tiruan panel Keterangan */}&#10;        &lt;Box&#10;            style={{&#10;                height: 352,&#10;                background: '#FFFFFF',&#10;                borderRadius: 18,&#10;                boxShadow: '0 4px 20px rgba(0,0,0,0.08)',&#10;                borderTop: '8px solid #51277C',&#10;                padding: 26,&#10;            }}&#10;        &gt;&#10;            &lt;Text&#10;                style={{&#10;                    fontSize: 26,&#10;                    fontWeight: 'bold',&#10;                    color: '#51277C',&#10;                    fontFamily: 'Trebuchet MS',&#10;                    lineHeight: 1.3,&#10;                }}&#10;            &gt;&#10;                Keterangan September 2026&#10;            &lt;/Text&gt;&#10;            &lt;Text&#10;                style={{&#10;                    marginTop: 5,&#10;                    fontSize: 16,&#10;                    color: '#6B6478',&#10;                    fontFamily: 'Verdana',&#10;                    lineHeight: 1.45,&#10;                }}&#10;            &gt;&#10;                Kelas 1 · jumlah snack yang sudah diambil pada bulan ini&#10;            &lt;/Text&gt;&#10;&#10;            &lt;Box style={{ marginTop: 18, flexDirection: 'row', gap: 14 }}&gt;&#10;                {[&#10;                    { l: 'Sudah diambil', v: '12', c: '#51277C' },&#10;                    { l: 'Ditetapkan korlas', v: '5', c: '#AFC440' },&#10;                    { l: 'Masih kosong', v: '3', c: '#F3B26C' },&#10;                    { l: 'Total tanggal', v: '20', c: '#6B6478' },&#10;                ].map((it, i) =&gt; (&#10;                    &lt;Box&#10;                        key={i}&#10;                        style={{&#10;                            flex: 1,&#10;                            height: 112,&#10;                            background: 'rgba(81,39,124,0.05)',&#10;                            borderRadius: 14,&#10;                            borderTop: '4px solid ' + it.c,&#10;                            padding: 16,&#10;                        }}&#10;                    &gt;&#10;                        &lt;Text&#10;                            style={{&#10;                                fontSize: 15,&#10;                                color: '#6B6478',&#10;                                fontFamily: 'Verdana',&#10;                                lineHeight: 1.35,&#10;                            }}&#10;                        &gt;&#10;                            {it.l}&#10;                        &lt;/Text&gt;&#10;                        &lt;Text&#10;                            style={{&#10;                                marginTop: 6,&#10;                                fontSize: 36,&#10;                                fontWeight: 'bold',&#10;                                color: '#51277C',&#10;                                fontFamily: 'Trebuchet MS',&#10;                                lineHeight: 1.1,&#10;                            }}&#10;                        &gt;&#10;                            {it.v}&#10;                        &lt;/Text&gt;&#10;                    &lt;/Box&gt;&#10;                ))}&#10;            &lt;/Box&gt;&#10;&#10;            &lt;Box&#10;                style={{&#10;                    marginTop: 20,&#10;                    flexDirection: 'row',&#10;                    justifyContent: 'space-between',&#10;                    alignItems: 'flex-end',&#10;                }}&#10;            &gt;&#10;                &lt;Text style={{ fontSize: 15, color: '#6B6478', fontFamily: 'Verdana' }}&gt;&#10;                    17 dari 20 tanggal sudah ada petugas&#10;                &lt;/Text&gt;&#10;                &lt;Text&#10;                    style={{&#10;                        fontSize: 16,&#10;                        fontWeight: 'bold',&#10;                        color: '#2A2333',&#10;                        fontFamily: 'Verdana',&#10;                    }}&#10;                &gt;&#10;                    85%&#10;                &lt;/Text&gt;&#10;            &lt;/Box&gt;&#10;            &lt;Box&#10;                style={{&#10;                    marginTop: 8,&#10;                    height: 12,&#10;                    borderRadius: 6,&#10;                    background: '#EFEAE1',&#10;                    flexDirection: 'row',&#10;                }}&#10;            &gt;&#10;                &lt;Box style={{ width: '85%', height: 12, borderRadius: 6, background: '#AFC440' }} /&gt;&#10;            &lt;/Box&gt;&#10;        &lt;/Box&gt;&#10;&#10;        {/* jalur bawah · di mana panelnya &amp; siapa yang melihat */}&#10;        &lt;Box&#10;            style={{&#10;                height: 150,&#10;                background: 'rgba(81,39,124,0.06)',&#10;                borderRadius: 16,&#10;                borderLeft: '8px solid #F3B26C',&#10;                padding: 22,&#10;            }}&#10;        &gt;&#10;            &lt;Text&#10;                style={{&#10;                    fontSize: 21,&#10;                    fontWeight: 'bold',&#10;                    color: '#51277C',&#10;                    fontFamily: 'Trebuchet MS',&#10;                    lineHeight: 1.3,&#10;                }}&#10;            &gt;&#10;                Ada di halaman Pilih Jadwal — hanya korlas &amp;amp; admin&#10;            &lt;/Text&gt;&#10;            &lt;Text&#10;                style={{&#10;                    marginTop: 8,&#10;                    fontSize: 17,&#10;                    color: '#2A2333',&#10;                    fontFamily: 'Verdana',&#10;                    lineHeight: 1.5,&#10;                }}&#10;            &gt;&#10;                Orang tua tidak melihat panel ini: yang ia butuhkan cuma tanggal mana yang masih&#10;                kosong. Admin melihat panelnya tanpa papan tanggal, karena ia tidak ikut mengambil.&#10;            &lt;/Text&gt;&#10;        &lt;/Box&gt;&#10;    &lt;/Box&gt;&#10;&#10;    {/* ── C · bilah kaki ── */}&#10;    &lt;Box&#10;        style={{&#10;            height: 40,&#10;            flexDirection: 'row',&#10;            alignItems: 'center',&#10;            justifyContent: 'space-between',&#10;        }}&#10;    &gt;&#10;        &lt;Text style={{ fontSize: 14, color: '#6B6478', fontFamily: 'Verdana' }}&gt;&#10;            Pizza Snack Play · Panduan Korlas &amp;amp; Admin&#10;        &lt;/Text&gt;&#10;        &lt;Text style={{ fontSize: 14, color: '#6B6478', fontFamily: 'Verdana' }}&gt;15 / 18&lt;/Text&gt;&#10;    &lt;/Box&gt;&#10;&lt;/Slide&gt;&#10;"/>
         <p:cNvGrpSpPr/>
         <p:nvPr/>
       </p:nvGrpSpPr>
@@ -5416,10 +5324,7 @@
         </p:spPr>
         <p:txBody>
           <a:bodyPr/>
-          <a:p>
-            <a:pPr/>
-            <a:endParaRPr/>
-          </a:p>
+          <a:p/>
         </p:txBody>
       </p:sp>
       <p:sp>
@@ -5451,6 +5356,1242 @@
                 <a:latin typeface="Trebuchet MS"/>
                 <a:ea typeface="Trebuchet MS"/>
               </a:rPr>
+              <a:t>Keterangan bulan: sudah berapa yang terisi?</a:t>
+            </a:r>
+            <a:endParaRPr/>
+          </a:p>
+        </p:txBody>
+      </p:sp>
+      <p:sp>
+        <p:nvSpPr>
+          <p:cNvPr id="109" name=""/>
+          <p:cNvSpPr/>
+          <p:nvPr/>
+        </p:nvSpPr>
+        <p:spPr>
+          <a:xfrm rot="0" flipH="0" flipV="0">
+            <a:off x="609600" y="990600"/>
+            <a:ext cx="685800" cy="57150"/>
+          </a:xfrm>
+          <a:prstGeom prst="roundRect">
+            <a:avLst>
+              <a:gd name="adj" fmla="val 50000"/>
+            </a:avLst>
+          </a:prstGeom>
+          <a:solidFill>
+            <a:srgbClr val="AFC440"/>
+          </a:solidFill>
+          <a:ln/>
+        </p:spPr>
+        <p:txBody>
+          <a:bodyPr/>
+          <a:p/>
+        </p:txBody>
+      </p:sp>
+      <p:sp>
+        <p:nvSpPr>
+          <p:cNvPr id="110" name=""/>
+          <p:cNvSpPr/>
+          <p:nvPr/>
+        </p:nvSpPr>
+        <p:spPr>
+          <a:xfrm rot="0" flipH="0" flipV="0">
+            <a:off x="609600" y="1314450"/>
+            <a:ext cx="10972800" cy="3276600"/>
+          </a:xfrm>
+          <a:prstGeom prst="roundRect">
+            <a:avLst>
+              <a:gd name="adj" fmla="val 5233"/>
+            </a:avLst>
+          </a:prstGeom>
+          <a:solidFill>
+            <a:srgbClr val="FFFFFF"/>
+          </a:solidFill>
+          <a:ln/>
+          <a:effectLst>
+            <a:outerShdw blurRad="190500" dist="38100" dir="5400000">
+              <a:srgbClr val="000000">
+                <a:alpha val="8000"/>
+              </a:srgbClr>
+            </a:outerShdw>
+          </a:effectLst>
+        </p:spPr>
+        <p:txBody>
+          <a:bodyPr/>
+          <a:p/>
+        </p:txBody>
+      </p:sp>
+      <p:sp>
+        <p:nvSpPr>
+          <p:cNvPr id="111" name=""/>
+          <p:cNvSpPr/>
+          <p:nvPr/>
+        </p:nvSpPr>
+        <p:spPr>
+          <a:xfrm rot="0" flipH="0" flipV="0">
+            <a:off x="609600" y="1314450"/>
+            <a:ext cx="10972800" cy="3276600"/>
+          </a:xfrm>
+          <a:custGeom>
+            <a:pathLst>
+              <a:path w="1152" h="344">
+                <a:moveTo>
+                  <a:pt x="1135" y="0"/>
+                </a:moveTo>
+                <a:cubicBezTo>
+                  <a:pt x="1143" y="0"/>
+                  <a:pt x="1150" y="7"/>
+                  <a:pt x="1152" y="15"/>
+                </a:cubicBezTo>
+                <a:cubicBezTo>
+                  <a:pt x="1150" y="11"/>
+                  <a:pt x="1146" y="8"/>
+                  <a:pt x="1142" y="8"/>
+                </a:cubicBezTo>
+                <a:lnTo>
+                  <a:pt x="10" y="8"/>
+                </a:lnTo>
+                <a:cubicBezTo>
+                  <a:pt x="5" y="8"/>
+                  <a:pt x="1" y="11"/>
+                  <a:pt x="0" y="16"/>
+                </a:cubicBezTo>
+                <a:cubicBezTo>
+                  <a:pt x="1" y="7"/>
+                  <a:pt x="9" y="0"/>
+                  <a:pt x="18" y="0"/>
+                </a:cubicBezTo>
+                <a:lnTo>
+                  <a:pt x="1134" y="0"/>
+                </a:lnTo>
+                <a:close/>
+              </a:path>
+            </a:pathLst>
+          </a:custGeom>
+          <a:solidFill>
+            <a:srgbClr val="51277C"/>
+          </a:solidFill>
+          <a:ln/>
+        </p:spPr>
+        <p:txBody>
+          <a:bodyPr/>
+          <a:p/>
+        </p:txBody>
+      </p:sp>
+      <p:sp>
+        <p:nvSpPr>
+          <p:cNvPr id="112" name="" descr="{&quot;isTemplate&quot;:true,&quot;type&quot;:&quot;text&quot;}"/>
+          <p:cNvSpPr txBox="1"/>
+          <p:nvPr/>
+        </p:nvSpPr>
+        <p:spPr>
+          <a:xfrm rot="0" flipH="0" flipV="0">
+            <a:off x="857250" y="1562100"/>
+            <a:ext cx="10477500" cy="390525"/>
+          </a:xfrm>
+          <a:prstGeom prst="rect"/>
+        </p:spPr>
+        <p:txBody>
+          <a:bodyPr wrap="none" lIns="0" tIns="0" rIns="0" bIns="0"/>
+          <a:p>
+            <a:pPr>
+              <a:lnSpc>
+                <a:spcPct val="130000"/>
+              </a:lnSpc>
+            </a:pPr>
+            <a:r>
+              <a:rPr lang="en-US" sz="1950" b="1">
+                <a:solidFill>
+                  <a:srgbClr val="51277C"/>
+                </a:solidFill>
+                <a:latin typeface="Trebuchet MS"/>
+                <a:ea typeface="Trebuchet MS"/>
+              </a:rPr>
+              <a:t>Keterangan September 2026</a:t>
+            </a:r>
+            <a:endParaRPr/>
+          </a:p>
+        </p:txBody>
+      </p:sp>
+      <p:sp>
+        <p:nvSpPr>
+          <p:cNvPr id="113" name="" descr="{&quot;isTemplate&quot;:true,&quot;type&quot;:&quot;text&quot;}"/>
+          <p:cNvSpPr txBox="1"/>
+          <p:nvPr/>
+        </p:nvSpPr>
+        <p:spPr>
+          <a:xfrm rot="0" flipH="0" flipV="0">
+            <a:off x="857250" y="2000250"/>
+            <a:ext cx="10477500" cy="266700"/>
+          </a:xfrm>
+          <a:prstGeom prst="rect"/>
+        </p:spPr>
+        <p:txBody>
+          <a:bodyPr wrap="none" lIns="0" tIns="0" rIns="0" bIns="0"/>
+          <a:p>
+            <a:pPr>
+              <a:lnSpc>
+                <a:spcPct val="145000"/>
+              </a:lnSpc>
+            </a:pPr>
+            <a:r>
+              <a:rPr lang="en-US" sz="1200">
+                <a:solidFill>
+                  <a:srgbClr val="6B6478"/>
+                </a:solidFill>
+                <a:latin typeface="Verdana"/>
+                <a:ea typeface="Verdana"/>
+              </a:rPr>
+              <a:t>Kelas 1 · jumlah snack yang sudah diambil pada bulan ini</a:t>
+            </a:r>
+            <a:endParaRPr/>
+          </a:p>
+        </p:txBody>
+      </p:sp>
+      <p:sp>
+        <p:nvSpPr>
+          <p:cNvPr id="114" name=""/>
+          <p:cNvSpPr/>
+          <p:nvPr/>
+        </p:nvSpPr>
+        <p:spPr>
+          <a:xfrm rot="0" flipH="0" flipV="0">
+            <a:off x="857250" y="2476500"/>
+            <a:ext cx="2524125" cy="1028700"/>
+          </a:xfrm>
+          <a:prstGeom prst="roundRect">
+            <a:avLst>
+              <a:gd name="adj" fmla="val 12963"/>
+            </a:avLst>
+          </a:prstGeom>
+          <a:solidFill>
+            <a:srgbClr val="51277C">
+              <a:alpha val="5000"/>
+            </a:srgbClr>
+          </a:solidFill>
+          <a:ln/>
+        </p:spPr>
+        <p:txBody>
+          <a:bodyPr/>
+          <a:p/>
+        </p:txBody>
+      </p:sp>
+      <p:sp>
+        <p:nvSpPr>
+          <p:cNvPr id="115" name=""/>
+          <p:cNvSpPr/>
+          <p:nvPr/>
+        </p:nvSpPr>
+        <p:spPr>
+          <a:xfrm rot="0" flipH="0" flipV="0">
+            <a:off x="857250" y="2476500"/>
+            <a:ext cx="2524125" cy="1028700"/>
+          </a:xfrm>
+          <a:custGeom>
+            <a:pathLst>
+              <a:path w="265" h="108">
+                <a:moveTo>
+                  <a:pt x="252" y="0"/>
+                </a:moveTo>
+                <a:cubicBezTo>
+                  <a:pt x="258" y="0"/>
+                  <a:pt x="263" y="5"/>
+                  <a:pt x="265" y="11"/>
+                </a:cubicBezTo>
+                <a:cubicBezTo>
+                  <a:pt x="263" y="7"/>
+                  <a:pt x="259" y="4"/>
+                  <a:pt x="255" y="4"/>
+                </a:cubicBezTo>
+                <a:lnTo>
+                  <a:pt x="10" y="4"/>
+                </a:lnTo>
+                <a:cubicBezTo>
+                  <a:pt x="6" y="4"/>
+                  <a:pt x="2" y="7"/>
+                  <a:pt x="0" y="11"/>
+                </a:cubicBezTo>
+                <a:cubicBezTo>
+                  <a:pt x="2" y="5"/>
+                  <a:pt x="7" y="0"/>
+                  <a:pt x="14" y="0"/>
+                </a:cubicBezTo>
+                <a:lnTo>
+                  <a:pt x="251" y="0"/>
+                </a:lnTo>
+                <a:close/>
+              </a:path>
+            </a:pathLst>
+          </a:custGeom>
+          <a:solidFill>
+            <a:srgbClr val="51277C"/>
+          </a:solidFill>
+          <a:ln/>
+        </p:spPr>
+        <p:txBody>
+          <a:bodyPr/>
+          <a:p/>
+        </p:txBody>
+      </p:sp>
+      <p:sp>
+        <p:nvSpPr>
+          <p:cNvPr id="116" name="" descr="{&quot;isTemplate&quot;:true,&quot;type&quot;:&quot;text&quot;}"/>
+          <p:cNvSpPr txBox="1"/>
+          <p:nvPr/>
+        </p:nvSpPr>
+        <p:spPr>
+          <a:xfrm rot="0" flipH="0" flipV="0">
+            <a:off x="1009650" y="2628900"/>
+            <a:ext cx="2219325" cy="238125"/>
+          </a:xfrm>
+          <a:prstGeom prst="rect"/>
+        </p:spPr>
+        <p:txBody>
+          <a:bodyPr wrap="none" lIns="0" tIns="0" rIns="0" bIns="0"/>
+          <a:p>
+            <a:pPr>
+              <a:lnSpc>
+                <a:spcPct val="135000"/>
+              </a:lnSpc>
+            </a:pPr>
+            <a:r>
+              <a:rPr lang="en-US" sz="1125">
+                <a:solidFill>
+                  <a:srgbClr val="6B6478"/>
+                </a:solidFill>
+                <a:latin typeface="Verdana"/>
+                <a:ea typeface="Verdana"/>
+              </a:rPr>
+              <a:t>Sudah diambil</a:t>
+            </a:r>
+            <a:endParaRPr/>
+          </a:p>
+        </p:txBody>
+      </p:sp>
+      <p:sp>
+        <p:nvSpPr>
+          <p:cNvPr id="117" name="" descr="{&quot;isTemplate&quot;:true,&quot;type&quot;:&quot;text&quot;}"/>
+          <p:cNvSpPr txBox="1"/>
+          <p:nvPr/>
+        </p:nvSpPr>
+        <p:spPr>
+          <a:xfrm rot="0" flipH="0" flipV="0">
+            <a:off x="1009650" y="2924175"/>
+            <a:ext cx="2219325" cy="457200"/>
+          </a:xfrm>
+          <a:prstGeom prst="rect"/>
+        </p:spPr>
+        <p:txBody>
+          <a:bodyPr wrap="none" lIns="0" tIns="0" rIns="0" bIns="0"/>
+          <a:p>
+            <a:pPr>
+              <a:lnSpc>
+                <a:spcPct val="110000"/>
+              </a:lnSpc>
+            </a:pPr>
+            <a:r>
+              <a:rPr lang="en-US" sz="2700" b="1">
+                <a:solidFill>
+                  <a:srgbClr val="51277C"/>
+                </a:solidFill>
+                <a:latin typeface="Trebuchet MS"/>
+                <a:ea typeface="Trebuchet MS"/>
+              </a:rPr>
+              <a:t>12</a:t>
+            </a:r>
+            <a:endParaRPr/>
+          </a:p>
+        </p:txBody>
+      </p:sp>
+      <p:sp>
+        <p:nvSpPr>
+          <p:cNvPr id="118" name=""/>
+          <p:cNvSpPr/>
+          <p:nvPr/>
+        </p:nvSpPr>
+        <p:spPr>
+          <a:xfrm rot="0" flipH="0" flipV="0">
+            <a:off x="3514725" y="2476500"/>
+            <a:ext cx="2514600" cy="1028700"/>
+          </a:xfrm>
+          <a:prstGeom prst="roundRect">
+            <a:avLst>
+              <a:gd name="adj" fmla="val 12963"/>
+            </a:avLst>
+          </a:prstGeom>
+          <a:solidFill>
+            <a:srgbClr val="51277C">
+              <a:alpha val="5000"/>
+            </a:srgbClr>
+          </a:solidFill>
+          <a:ln/>
+        </p:spPr>
+        <p:txBody>
+          <a:bodyPr/>
+          <a:p/>
+        </p:txBody>
+      </p:sp>
+      <p:sp>
+        <p:nvSpPr>
+          <p:cNvPr id="119" name=""/>
+          <p:cNvSpPr/>
+          <p:nvPr/>
+        </p:nvSpPr>
+        <p:spPr>
+          <a:xfrm rot="0" flipH="0" flipV="0">
+            <a:off x="3514725" y="2476500"/>
+            <a:ext cx="2514600" cy="1028700"/>
+          </a:xfrm>
+          <a:custGeom>
+            <a:pathLst>
+              <a:path w="264" h="108">
+                <a:moveTo>
+                  <a:pt x="251" y="0"/>
+                </a:moveTo>
+                <a:cubicBezTo>
+                  <a:pt x="257" y="0"/>
+                  <a:pt x="262" y="5"/>
+                  <a:pt x="264" y="11"/>
+                </a:cubicBezTo>
+                <a:cubicBezTo>
+                  <a:pt x="262" y="7"/>
+                  <a:pt x="258" y="4"/>
+                  <a:pt x="254" y="4"/>
+                </a:cubicBezTo>
+                <a:lnTo>
+                  <a:pt x="10" y="4"/>
+                </a:lnTo>
+                <a:cubicBezTo>
+                  <a:pt x="6" y="4"/>
+                  <a:pt x="2" y="7"/>
+                  <a:pt x="0" y="11"/>
+                </a:cubicBezTo>
+                <a:cubicBezTo>
+                  <a:pt x="2" y="5"/>
+                  <a:pt x="7" y="0"/>
+                  <a:pt x="14" y="0"/>
+                </a:cubicBezTo>
+                <a:lnTo>
+                  <a:pt x="250" y="0"/>
+                </a:lnTo>
+                <a:close/>
+              </a:path>
+            </a:pathLst>
+          </a:custGeom>
+          <a:solidFill>
+            <a:srgbClr val="AFC440"/>
+          </a:solidFill>
+          <a:ln/>
+        </p:spPr>
+        <p:txBody>
+          <a:bodyPr/>
+          <a:p/>
+        </p:txBody>
+      </p:sp>
+      <p:sp>
+        <p:nvSpPr>
+          <p:cNvPr id="120" name="" descr="{&quot;isTemplate&quot;:true,&quot;type&quot;:&quot;text&quot;}"/>
+          <p:cNvSpPr txBox="1"/>
+          <p:nvPr/>
+        </p:nvSpPr>
+        <p:spPr>
+          <a:xfrm rot="0" flipH="0" flipV="0">
+            <a:off x="3667125" y="2628900"/>
+            <a:ext cx="2209800" cy="238125"/>
+          </a:xfrm>
+          <a:prstGeom prst="rect"/>
+        </p:spPr>
+        <p:txBody>
+          <a:bodyPr wrap="none" lIns="0" tIns="0" rIns="0" bIns="0"/>
+          <a:p>
+            <a:pPr>
+              <a:lnSpc>
+                <a:spcPct val="135000"/>
+              </a:lnSpc>
+            </a:pPr>
+            <a:r>
+              <a:rPr lang="en-US" sz="1125">
+                <a:solidFill>
+                  <a:srgbClr val="6B6478"/>
+                </a:solidFill>
+                <a:latin typeface="Verdana"/>
+                <a:ea typeface="Verdana"/>
+              </a:rPr>
+              <a:t>Ditetapkan korlas</a:t>
+            </a:r>
+            <a:endParaRPr/>
+          </a:p>
+        </p:txBody>
+      </p:sp>
+      <p:sp>
+        <p:nvSpPr>
+          <p:cNvPr id="121" name="" descr="{&quot;isTemplate&quot;:true,&quot;type&quot;:&quot;text&quot;}"/>
+          <p:cNvSpPr txBox="1"/>
+          <p:nvPr/>
+        </p:nvSpPr>
+        <p:spPr>
+          <a:xfrm rot="0" flipH="0" flipV="0">
+            <a:off x="3667125" y="2924175"/>
+            <a:ext cx="2209800" cy="457200"/>
+          </a:xfrm>
+          <a:prstGeom prst="rect"/>
+        </p:spPr>
+        <p:txBody>
+          <a:bodyPr wrap="none" lIns="0" tIns="0" rIns="0" bIns="0"/>
+          <a:p>
+            <a:pPr>
+              <a:lnSpc>
+                <a:spcPct val="110000"/>
+              </a:lnSpc>
+            </a:pPr>
+            <a:r>
+              <a:rPr lang="en-US" sz="2700" b="1">
+                <a:solidFill>
+                  <a:srgbClr val="51277C"/>
+                </a:solidFill>
+                <a:latin typeface="Trebuchet MS"/>
+                <a:ea typeface="Trebuchet MS"/>
+              </a:rPr>
+              <a:t>5</a:t>
+            </a:r>
+            <a:endParaRPr/>
+          </a:p>
+        </p:txBody>
+      </p:sp>
+      <p:sp>
+        <p:nvSpPr>
+          <p:cNvPr id="122" name=""/>
+          <p:cNvSpPr/>
+          <p:nvPr/>
+        </p:nvSpPr>
+        <p:spPr>
+          <a:xfrm rot="0" flipH="0" flipV="0">
+            <a:off x="6162675" y="2476500"/>
+            <a:ext cx="2524125" cy="1028700"/>
+          </a:xfrm>
+          <a:prstGeom prst="roundRect">
+            <a:avLst>
+              <a:gd name="adj" fmla="val 12963"/>
+            </a:avLst>
+          </a:prstGeom>
+          <a:solidFill>
+            <a:srgbClr val="51277C">
+              <a:alpha val="5000"/>
+            </a:srgbClr>
+          </a:solidFill>
+          <a:ln/>
+        </p:spPr>
+        <p:txBody>
+          <a:bodyPr/>
+          <a:p/>
+        </p:txBody>
+      </p:sp>
+      <p:sp>
+        <p:nvSpPr>
+          <p:cNvPr id="123" name=""/>
+          <p:cNvSpPr/>
+          <p:nvPr/>
+        </p:nvSpPr>
+        <p:spPr>
+          <a:xfrm rot="0" flipH="0" flipV="0">
+            <a:off x="6162675" y="2476500"/>
+            <a:ext cx="2524125" cy="1028700"/>
+          </a:xfrm>
+          <a:custGeom>
+            <a:pathLst>
+              <a:path w="265" h="108">
+                <a:moveTo>
+                  <a:pt x="252" y="0"/>
+                </a:moveTo>
+                <a:cubicBezTo>
+                  <a:pt x="258" y="0"/>
+                  <a:pt x="263" y="5"/>
+                  <a:pt x="265" y="11"/>
+                </a:cubicBezTo>
+                <a:cubicBezTo>
+                  <a:pt x="263" y="7"/>
+                  <a:pt x="259" y="4"/>
+                  <a:pt x="255" y="4"/>
+                </a:cubicBezTo>
+                <a:lnTo>
+                  <a:pt x="10" y="4"/>
+                </a:lnTo>
+                <a:cubicBezTo>
+                  <a:pt x="6" y="4"/>
+                  <a:pt x="2" y="7"/>
+                  <a:pt x="0" y="11"/>
+                </a:cubicBezTo>
+                <a:cubicBezTo>
+                  <a:pt x="2" y="5"/>
+                  <a:pt x="7" y="0"/>
+                  <a:pt x="14" y="0"/>
+                </a:cubicBezTo>
+                <a:lnTo>
+                  <a:pt x="251" y="0"/>
+                </a:lnTo>
+                <a:close/>
+              </a:path>
+            </a:pathLst>
+          </a:custGeom>
+          <a:solidFill>
+            <a:srgbClr val="F3B26C"/>
+          </a:solidFill>
+          <a:ln/>
+        </p:spPr>
+        <p:txBody>
+          <a:bodyPr/>
+          <a:p/>
+        </p:txBody>
+      </p:sp>
+      <p:sp>
+        <p:nvSpPr>
+          <p:cNvPr id="124" name="" descr="{&quot;isTemplate&quot;:true,&quot;type&quot;:&quot;text&quot;}"/>
+          <p:cNvSpPr txBox="1"/>
+          <p:nvPr/>
+        </p:nvSpPr>
+        <p:spPr>
+          <a:xfrm rot="0" flipH="0" flipV="0">
+            <a:off x="6315075" y="2628900"/>
+            <a:ext cx="2219325" cy="238125"/>
+          </a:xfrm>
+          <a:prstGeom prst="rect"/>
+        </p:spPr>
+        <p:txBody>
+          <a:bodyPr wrap="none" lIns="0" tIns="0" rIns="0" bIns="0"/>
+          <a:p>
+            <a:pPr>
+              <a:lnSpc>
+                <a:spcPct val="135000"/>
+              </a:lnSpc>
+            </a:pPr>
+            <a:r>
+              <a:rPr lang="en-US" sz="1125">
+                <a:solidFill>
+                  <a:srgbClr val="6B6478"/>
+                </a:solidFill>
+                <a:latin typeface="Verdana"/>
+                <a:ea typeface="Verdana"/>
+              </a:rPr>
+              <a:t>Masih kosong</a:t>
+            </a:r>
+            <a:endParaRPr/>
+          </a:p>
+        </p:txBody>
+      </p:sp>
+      <p:sp>
+        <p:nvSpPr>
+          <p:cNvPr id="125" name="" descr="{&quot;isTemplate&quot;:true,&quot;type&quot;:&quot;text&quot;}"/>
+          <p:cNvSpPr txBox="1"/>
+          <p:nvPr/>
+        </p:nvSpPr>
+        <p:spPr>
+          <a:xfrm rot="0" flipH="0" flipV="0">
+            <a:off x="6315075" y="2924175"/>
+            <a:ext cx="2219325" cy="457200"/>
+          </a:xfrm>
+          <a:prstGeom prst="rect"/>
+        </p:spPr>
+        <p:txBody>
+          <a:bodyPr wrap="none" lIns="0" tIns="0" rIns="0" bIns="0"/>
+          <a:p>
+            <a:pPr>
+              <a:lnSpc>
+                <a:spcPct val="110000"/>
+              </a:lnSpc>
+            </a:pPr>
+            <a:r>
+              <a:rPr lang="en-US" sz="2700" b="1">
+                <a:solidFill>
+                  <a:srgbClr val="51277C"/>
+                </a:solidFill>
+                <a:latin typeface="Trebuchet MS"/>
+                <a:ea typeface="Trebuchet MS"/>
+              </a:rPr>
+              <a:t>3</a:t>
+            </a:r>
+            <a:endParaRPr/>
+          </a:p>
+        </p:txBody>
+      </p:sp>
+      <p:sp>
+        <p:nvSpPr>
+          <p:cNvPr id="126" name=""/>
+          <p:cNvSpPr/>
+          <p:nvPr/>
+        </p:nvSpPr>
+        <p:spPr>
+          <a:xfrm rot="0" flipH="0" flipV="0">
+            <a:off x="8820150" y="2476500"/>
+            <a:ext cx="2514600" cy="1028700"/>
+          </a:xfrm>
+          <a:prstGeom prst="roundRect">
+            <a:avLst>
+              <a:gd name="adj" fmla="val 12963"/>
+            </a:avLst>
+          </a:prstGeom>
+          <a:solidFill>
+            <a:srgbClr val="51277C">
+              <a:alpha val="5000"/>
+            </a:srgbClr>
+          </a:solidFill>
+          <a:ln/>
+        </p:spPr>
+        <p:txBody>
+          <a:bodyPr/>
+          <a:p/>
+        </p:txBody>
+      </p:sp>
+      <p:sp>
+        <p:nvSpPr>
+          <p:cNvPr id="127" name=""/>
+          <p:cNvSpPr/>
+          <p:nvPr/>
+        </p:nvSpPr>
+        <p:spPr>
+          <a:xfrm rot="0" flipH="0" flipV="0">
+            <a:off x="8820150" y="2476500"/>
+            <a:ext cx="2514600" cy="1028700"/>
+          </a:xfrm>
+          <a:custGeom>
+            <a:pathLst>
+              <a:path w="264" h="108">
+                <a:moveTo>
+                  <a:pt x="251" y="0"/>
+                </a:moveTo>
+                <a:cubicBezTo>
+                  <a:pt x="257" y="0"/>
+                  <a:pt x="262" y="5"/>
+                  <a:pt x="264" y="11"/>
+                </a:cubicBezTo>
+                <a:cubicBezTo>
+                  <a:pt x="262" y="7"/>
+                  <a:pt x="258" y="4"/>
+                  <a:pt x="254" y="4"/>
+                </a:cubicBezTo>
+                <a:lnTo>
+                  <a:pt x="10" y="4"/>
+                </a:lnTo>
+                <a:cubicBezTo>
+                  <a:pt x="6" y="4"/>
+                  <a:pt x="2" y="7"/>
+                  <a:pt x="0" y="11"/>
+                </a:cubicBezTo>
+                <a:cubicBezTo>
+                  <a:pt x="2" y="5"/>
+                  <a:pt x="7" y="0"/>
+                  <a:pt x="14" y="0"/>
+                </a:cubicBezTo>
+                <a:lnTo>
+                  <a:pt x="250" y="0"/>
+                </a:lnTo>
+                <a:close/>
+              </a:path>
+            </a:pathLst>
+          </a:custGeom>
+          <a:solidFill>
+            <a:srgbClr val="6B6478"/>
+          </a:solidFill>
+          <a:ln/>
+        </p:spPr>
+        <p:txBody>
+          <a:bodyPr/>
+          <a:p/>
+        </p:txBody>
+      </p:sp>
+      <p:sp>
+        <p:nvSpPr>
+          <p:cNvPr id="128" name="" descr="{&quot;isTemplate&quot;:true,&quot;type&quot;:&quot;text&quot;}"/>
+          <p:cNvSpPr txBox="1"/>
+          <p:nvPr/>
+        </p:nvSpPr>
+        <p:spPr>
+          <a:xfrm rot="0" flipH="0" flipV="0">
+            <a:off x="8972550" y="2628900"/>
+            <a:ext cx="2209800" cy="238125"/>
+          </a:xfrm>
+          <a:prstGeom prst="rect"/>
+        </p:spPr>
+        <p:txBody>
+          <a:bodyPr wrap="none" lIns="0" tIns="0" rIns="0" bIns="0"/>
+          <a:p>
+            <a:pPr>
+              <a:lnSpc>
+                <a:spcPct val="135000"/>
+              </a:lnSpc>
+            </a:pPr>
+            <a:r>
+              <a:rPr lang="en-US" sz="1125">
+                <a:solidFill>
+                  <a:srgbClr val="6B6478"/>
+                </a:solidFill>
+                <a:latin typeface="Verdana"/>
+                <a:ea typeface="Verdana"/>
+              </a:rPr>
+              <a:t>Total tanggal</a:t>
+            </a:r>
+            <a:endParaRPr/>
+          </a:p>
+        </p:txBody>
+      </p:sp>
+      <p:sp>
+        <p:nvSpPr>
+          <p:cNvPr id="129" name="" descr="{&quot;isTemplate&quot;:true,&quot;type&quot;:&quot;text&quot;}"/>
+          <p:cNvSpPr txBox="1"/>
+          <p:nvPr/>
+        </p:nvSpPr>
+        <p:spPr>
+          <a:xfrm rot="0" flipH="0" flipV="0">
+            <a:off x="8972550" y="2924175"/>
+            <a:ext cx="2209800" cy="457200"/>
+          </a:xfrm>
+          <a:prstGeom prst="rect"/>
+        </p:spPr>
+        <p:txBody>
+          <a:bodyPr wrap="none" lIns="0" tIns="0" rIns="0" bIns="0"/>
+          <a:p>
+            <a:pPr>
+              <a:lnSpc>
+                <a:spcPct val="110000"/>
+              </a:lnSpc>
+            </a:pPr>
+            <a:r>
+              <a:rPr lang="en-US" sz="2700" b="1">
+                <a:solidFill>
+                  <a:srgbClr val="51277C"/>
+                </a:solidFill>
+                <a:latin typeface="Trebuchet MS"/>
+                <a:ea typeface="Trebuchet MS"/>
+              </a:rPr>
+              <a:t>20</a:t>
+            </a:r>
+            <a:endParaRPr/>
+          </a:p>
+        </p:txBody>
+      </p:sp>
+      <p:sp>
+        <p:nvSpPr>
+          <p:cNvPr id="130" name="" descr="{&quot;isTemplate&quot;:true,&quot;type&quot;:&quot;text&quot;}"/>
+          <p:cNvSpPr txBox="1"/>
+          <p:nvPr/>
+        </p:nvSpPr>
+        <p:spPr>
+          <a:xfrm rot="0" flipH="0" flipV="0">
+            <a:off x="857250" y="3714750"/>
+            <a:ext cx="2743200" cy="171450"/>
+          </a:xfrm>
+          <a:prstGeom prst="rect"/>
+        </p:spPr>
+        <p:txBody>
+          <a:bodyPr wrap="none" lIns="0" tIns="0" rIns="0" bIns="0"/>
+          <a:p>
+            <a:pPr>
+              <a:lnSpc>
+                <a:spcPct val="100000"/>
+              </a:lnSpc>
+            </a:pPr>
+            <a:r>
+              <a:rPr lang="en-US" sz="1125">
+                <a:solidFill>
+                  <a:srgbClr val="6B6478"/>
+                </a:solidFill>
+                <a:latin typeface="Verdana"/>
+                <a:ea typeface="Verdana"/>
+              </a:rPr>
+              <a:t>17 dari 20 tanggal sudah ada petugas</a:t>
+            </a:r>
+            <a:endParaRPr/>
+          </a:p>
+        </p:txBody>
+      </p:sp>
+      <p:sp>
+        <p:nvSpPr>
+          <p:cNvPr id="131" name="" descr="{&quot;isTemplate&quot;:true,&quot;type&quot;:&quot;text&quot;}"/>
+          <p:cNvSpPr txBox="1"/>
+          <p:nvPr/>
+        </p:nvSpPr>
+        <p:spPr>
+          <a:xfrm rot="0" flipH="0" flipV="0">
+            <a:off x="10915650" y="3695700"/>
+            <a:ext cx="419100" cy="190500"/>
+          </a:xfrm>
+          <a:prstGeom prst="rect"/>
+        </p:spPr>
+        <p:txBody>
+          <a:bodyPr wrap="none" lIns="0" tIns="0" rIns="0" bIns="0"/>
+          <a:p>
+            <a:pPr>
+              <a:lnSpc>
+                <a:spcPct val="100000"/>
+              </a:lnSpc>
+            </a:pPr>
+            <a:r>
+              <a:rPr lang="en-US" sz="1200" b="1">
+                <a:solidFill>
+                  <a:srgbClr val="2A2333"/>
+                </a:solidFill>
+                <a:latin typeface="Verdana"/>
+                <a:ea typeface="Verdana"/>
+              </a:rPr>
+              <a:t>85%</a:t>
+            </a:r>
+            <a:endParaRPr/>
+          </a:p>
+        </p:txBody>
+      </p:sp>
+      <p:sp>
+        <p:nvSpPr>
+          <p:cNvPr id="132" name=""/>
+          <p:cNvSpPr/>
+          <p:nvPr/>
+        </p:nvSpPr>
+        <p:spPr>
+          <a:xfrm rot="0" flipH="0" flipV="0">
+            <a:off x="857250" y="3962400"/>
+            <a:ext cx="10477500" cy="114300"/>
+          </a:xfrm>
+          <a:prstGeom prst="roundRect">
+            <a:avLst>
+              <a:gd name="adj" fmla="val 50000"/>
+            </a:avLst>
+          </a:prstGeom>
+          <a:solidFill>
+            <a:srgbClr val="EFEAE1"/>
+          </a:solidFill>
+          <a:ln/>
+        </p:spPr>
+        <p:txBody>
+          <a:bodyPr/>
+          <a:p/>
+        </p:txBody>
+      </p:sp>
+      <p:sp>
+        <p:nvSpPr>
+          <p:cNvPr id="133" name=""/>
+          <p:cNvSpPr/>
+          <p:nvPr/>
+        </p:nvSpPr>
+        <p:spPr>
+          <a:xfrm rot="0" flipH="0" flipV="0">
+            <a:off x="857250" y="3962400"/>
+            <a:ext cx="8905875" cy="114300"/>
+          </a:xfrm>
+          <a:prstGeom prst="roundRect">
+            <a:avLst>
+              <a:gd name="adj" fmla="val 50000"/>
+            </a:avLst>
+          </a:prstGeom>
+          <a:solidFill>
+            <a:srgbClr val="AFC440"/>
+          </a:solidFill>
+          <a:ln/>
+        </p:spPr>
+        <p:txBody>
+          <a:bodyPr/>
+          <a:p/>
+        </p:txBody>
+      </p:sp>
+      <p:sp>
+        <p:nvSpPr>
+          <p:cNvPr id="134" name=""/>
+          <p:cNvSpPr/>
+          <p:nvPr/>
+        </p:nvSpPr>
+        <p:spPr>
+          <a:xfrm rot="0" flipH="0" flipV="0">
+            <a:off x="685800" y="4857750"/>
+            <a:ext cx="10972800" cy="1428750"/>
+          </a:xfrm>
+          <a:prstGeom prst="roundRect">
+            <a:avLst>
+              <a:gd name="adj" fmla="val 10667"/>
+            </a:avLst>
+          </a:prstGeom>
+          <a:solidFill>
+            <a:srgbClr val="51277C">
+              <a:alpha val="6000"/>
+            </a:srgbClr>
+          </a:solidFill>
+          <a:ln/>
+        </p:spPr>
+        <p:txBody>
+          <a:bodyPr/>
+          <a:p/>
+        </p:txBody>
+      </p:sp>
+      <p:sp>
+        <p:nvSpPr>
+          <p:cNvPr id="135" name=""/>
+          <p:cNvSpPr/>
+          <p:nvPr/>
+        </p:nvSpPr>
+        <p:spPr>
+          <a:xfrm rot="0" flipH="0" flipV="0">
+            <a:off x="685800" y="4857750"/>
+            <a:ext cx="10972800" cy="1428750"/>
+          </a:xfrm>
+          <a:custGeom>
+            <a:pathLst>
+              <a:path w="1152" h="150">
+                <a:moveTo>
+                  <a:pt x="15" y="0"/>
+                </a:moveTo>
+                <a:cubicBezTo>
+                  <a:pt x="11" y="0"/>
+                  <a:pt x="8" y="4"/>
+                  <a:pt x="8" y="8"/>
+                </a:cubicBezTo>
+                <a:lnTo>
+                  <a:pt x="8" y="142"/>
+                </a:lnTo>
+                <a:cubicBezTo>
+                  <a:pt x="8" y="146"/>
+                  <a:pt x="11" y="149"/>
+                  <a:pt x="14" y="150"/>
+                </a:cubicBezTo>
+                <a:cubicBezTo>
+                  <a:pt x="6" y="149"/>
+                  <a:pt x="0" y="142"/>
+                  <a:pt x="0" y="134"/>
+                </a:cubicBezTo>
+                <a:lnTo>
+                  <a:pt x="0" y="16"/>
+                </a:lnTo>
+                <a:cubicBezTo>
+                  <a:pt x="0" y="7"/>
+                  <a:pt x="7" y="0"/>
+                  <a:pt x="16" y="0"/>
+                </a:cubicBezTo>
+                <a:close/>
+              </a:path>
+            </a:pathLst>
+          </a:custGeom>
+          <a:solidFill>
+            <a:srgbClr val="F3B26C"/>
+          </a:solidFill>
+          <a:ln/>
+        </p:spPr>
+        <p:txBody>
+          <a:bodyPr/>
+          <a:p/>
+        </p:txBody>
+      </p:sp>
+      <p:sp>
+        <p:nvSpPr>
+          <p:cNvPr id="136" name="" descr="{&quot;isTemplate&quot;:true,&quot;type&quot;:&quot;text&quot;}"/>
+          <p:cNvSpPr txBox="1"/>
+          <p:nvPr/>
+        </p:nvSpPr>
+        <p:spPr>
+          <a:xfrm rot="0" flipH="0" flipV="0">
+            <a:off x="895350" y="5067300"/>
+            <a:ext cx="10477500" cy="314325"/>
+          </a:xfrm>
+          <a:prstGeom prst="rect"/>
+        </p:spPr>
+        <p:txBody>
+          <a:bodyPr wrap="none" lIns="0" tIns="0" rIns="0" bIns="0"/>
+          <a:p>
+            <a:pPr>
+              <a:lnSpc>
+                <a:spcPct val="130000"/>
+              </a:lnSpc>
+            </a:pPr>
+            <a:r>
+              <a:rPr lang="en-US" sz="1575" b="1">
+                <a:solidFill>
+                  <a:srgbClr val="51277C"/>
+                </a:solidFill>
+                <a:latin typeface="Trebuchet MS"/>
+                <a:ea typeface="Trebuchet MS"/>
+              </a:rPr>
+              <a:t>Ada di halaman Pilih Jadwal — hanya korlas &amp; admin</a:t>
+            </a:r>
+            <a:endParaRPr/>
+          </a:p>
+        </p:txBody>
+      </p:sp>
+      <p:sp>
+        <p:nvSpPr>
+          <p:cNvPr id="137" name="" descr="{&quot;isTemplate&quot;:true,&quot;type&quot;:&quot;text&quot;}"/>
+          <p:cNvSpPr txBox="1"/>
+          <p:nvPr/>
+        </p:nvSpPr>
+        <p:spPr>
+          <a:xfrm rot="0" flipH="0" flipV="0">
+            <a:off x="895350" y="5457825"/>
+            <a:ext cx="10477500" cy="590550"/>
+          </a:xfrm>
+          <a:prstGeom prst="rect"/>
+        </p:spPr>
+        <p:txBody>
+          <a:bodyPr wrap="square" lIns="0" tIns="0" rIns="0" bIns="0">
+            <a:normAutofit/>
+          </a:bodyPr>
+          <a:p>
+            <a:pPr>
+              <a:lnSpc>
+                <a:spcPct val="150000"/>
+              </a:lnSpc>
+            </a:pPr>
+            <a:r>
+              <a:rPr lang="en-US" sz="1275">
+                <a:solidFill>
+                  <a:srgbClr val="2A2333"/>
+                </a:solidFill>
+                <a:latin typeface="Verdana"/>
+                <a:ea typeface="Verdana"/>
+              </a:rPr>
+              <a:t>Orang tua tidak melihat panel ini: yang ia butuhkan cuma tanggal mana yang masih kosong. Admin melihat panelnya tanpa papan tanggal, karena ia tidak ikut mengambil.</a:t>
+            </a:r>
+            <a:endParaRPr/>
+          </a:p>
+        </p:txBody>
+      </p:sp>
+      <p:sp>
+        <p:nvSpPr>
+          <p:cNvPr id="138" name="" descr="{&quot;isTemplate&quot;:true,&quot;type&quot;:&quot;text&quot;}"/>
+          <p:cNvSpPr txBox="1"/>
+          <p:nvPr/>
+        </p:nvSpPr>
+        <p:spPr>
+          <a:xfrm rot="0" flipH="0" flipV="0">
+            <a:off x="609600" y="6400800"/>
+            <a:ext cx="2905125" cy="161925"/>
+          </a:xfrm>
+          <a:prstGeom prst="rect"/>
+        </p:spPr>
+        <p:txBody>
+          <a:bodyPr wrap="none" lIns="0" tIns="0" rIns="0" bIns="0"/>
+          <a:p>
+            <a:pPr>
+              <a:lnSpc>
+                <a:spcPct val="100000"/>
+              </a:lnSpc>
+            </a:pPr>
+            <a:r>
+              <a:rPr lang="en-US" sz="1050">
+                <a:solidFill>
+                  <a:srgbClr val="6B6478"/>
+                </a:solidFill>
+                <a:latin typeface="Verdana"/>
+                <a:ea typeface="Verdana"/>
+              </a:rPr>
+              <a:t>Pizza Snack Play · Panduan Korlas &amp; Admin</a:t>
+            </a:r>
+            <a:endParaRPr/>
+          </a:p>
+        </p:txBody>
+      </p:sp>
+      <p:sp>
+        <p:nvSpPr>
+          <p:cNvPr id="139" name="" descr="{&quot;isTemplate&quot;:true,&quot;type&quot;:&quot;text&quot;}"/>
+          <p:cNvSpPr txBox="1"/>
+          <p:nvPr/>
+        </p:nvSpPr>
+        <p:spPr>
+          <a:xfrm rot="0" flipH="0" flipV="0">
+            <a:off x="11087100" y="6400800"/>
+            <a:ext cx="495300" cy="161925"/>
+          </a:xfrm>
+          <a:prstGeom prst="rect"/>
+        </p:spPr>
+        <p:txBody>
+          <a:bodyPr wrap="none" lIns="0" tIns="0" rIns="0" bIns="0"/>
+          <a:p>
+            <a:pPr>
+              <a:lnSpc>
+                <a:spcPct val="100000"/>
+              </a:lnSpc>
+            </a:pPr>
+            <a:r>
+              <a:rPr lang="en-US" sz="1050">
+                <a:solidFill>
+                  <a:srgbClr val="6B6478"/>
+                </a:solidFill>
+                <a:latin typeface="Verdana"/>
+                <a:ea typeface="Verdana"/>
+              </a:rPr>
+              <a:t>15 / 18</a:t>
+            </a:r>
+            <a:endParaRPr/>
+          </a:p>
+        </p:txBody>
+      </p:sp>
+    </p:spTree>
+  </p:cSld>
+</p:sld>
+</file>
+
+<file path=ppt/slides/slide16.xml><?xml version="1.0" encoding="utf-8"?>
+<p:sld xmlns:p="http://schemas.openxmlformats.org/presentationml/2006/main" xmlns:a="http://schemas.openxmlformats.org/drawingml/2006/main" xmlns:asvg="http://schemas.microsoft.com/office/drawing/2016/SVG/main" xmlns:r="http://schemas.openxmlformats.org/officeDocument/2006/relationships" xmlns:mc="http://schemas.openxmlformats.org/markup-compatibility/2006" mc:Ignorable="asvg">
+  <p:cSld>
+    <p:spTree>
+      <p:nvGrpSpPr>
+        <p:cNvPr id="140" name="" descr="&lt;Slide&#10;    style={{&#10;        width: '1280px',&#10;        height: '720px',&#10;        background: '#FAF7F2',&#10;        paddingTop: 20,&#10;        paddingBottom: 20,&#10;        paddingLeft: 64,&#10;        paddingRight: 64,&#10;        position: 'relative',&#10;        overflow: 'hidden',&#10;    }}&#10;&gt;&#10;    &lt;Box&#10;        style={{&#10;            position: 'absolute',&#10;            top: -150,&#10;            left: -120,&#10;            width: 440,&#10;            height: 440,&#10;            borderRadius: 220,&#10;            background: 'linear-gradient(135deg, #AFC440 0%, #F3B26C 100%)',&#10;            opacity: 0.14,&#10;        }}&#10;    /&gt;&#10;&#10;    {/* ── A · blok judul ── */}&#10;    &lt;Box style={{ height: 110, justifyContent: 'center' }}&gt;&#10;        &lt;Text&#10;            style={{&#10;                fontSize: 34,&#10;                fontWeight: 'bold',&#10;                color: '#51277C',&#10;                fontFamily: 'Trebuchet MS',&#10;                lineHeight: 1.3,&#10;            }}&#10;        &gt;&#10;            Laporan piket: sudah merata?&#10;        &lt;/Text&gt;&#10;        &lt;Box style={{ marginTop: 10, width: 72, height: 6, borderRadius: 3, background: '#F3B26C' }} /&gt;&#10;    &lt;/Box&gt;&#10;&#10;    {/* ── B · area konten ── */}&#10;    &lt;Box style={{ height: 530, flexDirection: 'row', gap: 34, position: 'relative', zIndex: 1 }}&gt;&#10;        {/* kiri 55% · frasa raksasa */}&#10;        &lt;Box style={{ width: '55%', height: '100%', justifyContent: 'center' }}&gt;&#10;            &lt;Text&#10;                style={{&#10;                    fontSize: 62,&#10;                    fontWeight: 'bold',&#10;                    color: '#51277C',&#10;                    fontFamily: 'Trebuchet MS',&#10;                    lineHeight: 1.1,&#10;                }}&#10;            &gt;&#10;                Merata,{'\n'}bukan sekadar penuh.&#10;            &lt;/Text&gt;&#10;&#10;            &lt;Text&#10;                style={{&#10;                    marginTop: 22,&#10;                    fontSize: 19,&#10;                    color: '#2A2333',&#10;                    fontFamily: 'Verdana',&#10;                    lineHeight: 1.55,&#10;                }}&#10;            &gt;&#10;                Menu Laporan menghitung berapa kali setiap orang tua sudah mengambil piket,&#10;                lengkap dengan tanggal dan menunya. Angkanya diambil dari tempat yang sama&#10;                dengan yang dipakai orang tua saat mengambil tanggal.&#10;            &lt;/Text&gt;&#10;&#10;            &lt;Box&#10;                style={{&#10;                    marginTop: 24,&#10;                    background: 'rgba(243,178,108,0.22)',&#10;                    borderRadius: 14,&#10;                    borderLeft: '8px solid #F3B26C',&#10;                    padding: 18,&#10;                }}&#10;            &gt;&#10;                &lt;Text&#10;                    style={{&#10;                        fontSize: 18,&#10;                        color: '#2A2333',&#10;                        fontFamily: 'Verdana',&#10;                        lineHeight: 1.5,&#10;                    }}&#10;                &gt;&#10;                    Yang paling berguna justru satu daftar ini:&#10;                &lt;/Text&gt;&#10;                &lt;Text&#10;                    style={{&#10;                        marginTop: 10,&#10;                        fontSize: 19,&#10;                        fontWeight: 'bold',&#10;                        color: '#51277C',&#10;                        fontFamily: 'Trebuchet MS',&#10;                        lineHeight: 1.35,&#10;                    }}&#10;                &gt;&#10;                    Belum pernah ambil&#10;                &lt;/Text&gt;&#10;                &lt;Text&#10;                    style={{&#10;                        marginTop: 4,&#10;                        fontSize: 17,&#10;                        color: '#2A2333',&#10;                        fontFamily: 'Verdana',&#10;                        lineHeight: 1.5,&#10;                    }}&#10;                &gt;&#10;                    merekalah yang bisa diajak lebih dulu bulan depan.&#10;                &lt;/Text&gt;&#10;            &lt;/Box&gt;&#10;        &lt;/Box&gt;&#10;&#10;        {/* kanan 45% · rekap per orang tua */}&#10;        &lt;Box&#10;            style={{&#10;                width: '45%',&#10;                height: '100%',&#10;                background: 'rgba(81,39,124,0.06)',&#10;                borderRadius: 20,&#10;                justifyContent: 'center',&#10;                alignItems: 'center',&#10;            }}&#10;        &gt;&#10;            &lt;svg width={430} height={430} viewBox='0 0 430 430'&gt;&#10;                &lt;text x='18' y='38' fontFamily='Trebuchet MS' fontSize='21' fontWeight='bold' fill='#51277C'&gt;&#10;                    Rekap ambil piket&#10;                &lt;/text&gt;&#10;                &lt;text x='18' y='62' fontFamily='Verdana' fontSize='14' fill='#6B6478'&gt;&#10;                    1 – 31 Oktober · Kelas 1&#10;                &lt;/text&gt;&#10;&#10;                {/* Sari · 4 */}&#10;                &lt;text x='18' y='120' fontFamily='Verdana' fontSize='15' fill='#2A2333'&gt;Sari&lt;/text&gt;&#10;                &lt;rect x='110' y='104' width='250' height='22' rx='11' fill='#EFEAE1' /&gt;&#10;                &lt;rect x='110' y='104' width='250' height='22' rx='11' fill='#51277C' /&gt;&#10;                &lt;text x='372' y='120' fontFamily='Trebuchet MS' fontSize='16' fontWeight='bold' fill='#51277C'&gt;4&lt;/text&gt;&#10;&#10;                {/* Budi · 3 */}&#10;                &lt;text x='18' y='176' fontFamily='Verdana' fontSize='15' fill='#2A2333'&gt;Budi&lt;/text&gt;&#10;                &lt;rect x='110' y='160' width='250' height='22' rx='11' fill='#EFEAE1' /&gt;&#10;                &lt;rect x='110' y='160' width='188' height='22' rx='11' fill='#51277C' /&gt;&#10;                &lt;text x='372' y='176' fontFamily='Trebuchet MS' fontSize='16' fontWeight='bold' fill='#51277C'&gt;3&lt;/text&gt;&#10;&#10;                {/* Dewi · 2 */}&#10;                &lt;text x='18' y='232' fontFamily='Verdana' fontSize='15' fill='#2A2333'&gt;Dewi&lt;/text&gt;&#10;                &lt;rect x='110' y='216' width='250' height='22' rx='11' fill='#EFEAE1' /&gt;&#10;                &lt;rect x='110' y='216' width='125' height='22' rx='11' fill='#51277C' /&gt;&#10;                &lt;text x='372' y='232' fontFamily='Trebuchet MS' fontSize='16' fontWeight='bold' fill='#51277C'&gt;2&lt;/text&gt;&#10;&#10;                {/* Rina · 1 */}&#10;                &lt;text x='18' y='288' fontFamily='Verdana' fontSize='15' fill='#2A2333'&gt;Rina&lt;/text&gt;&#10;                &lt;rect x='110' y='272' width='250' height='22' rx='11' fill='#EFEAE1' /&gt;&#10;                &lt;rect x='110' y='272' width='63' height='22' rx='11' fill='#51277C' /&gt;&#10;                &lt;text x='372' y='288' fontFamily='Trebuchet MS' fontSize='16' fontWeight='bold' fill='#51277C'&gt;1&lt;/text&gt;&#10;&#10;                {/* Anto · 0 — belum pernah */}&#10;                &lt;text x='18' y='344' fontFamily='Verdana' fontSize='15' fill='#2A2333'&gt;Anto&lt;/text&gt;&#10;                &lt;rect x='110' y='328' width='250' height='22' rx='11' fill='#EFEAE1' /&gt;&#10;                &lt;rect x='110' y='328' width='250' height='22' rx='11' fill='#F3B26C' opacity='0.35' /&gt;&#10;                &lt;text x='372' y='344' fontFamily='Trebuchet MS' fontSize='16' fontWeight='bold' fill='#F3B26C'&gt;0&lt;/text&gt;&#10;&#10;                {/* simpulan */}&#10;                &lt;rect x='18' y='374' width='394' height='48' rx='14' fill='#51277C' /&gt;&#10;                &lt;text x='38' y='396' fontFamily='Verdana' fontSize='15' fill='#F3B26C' fontWeight='bold'&gt;&#10;                    Belum pernah ambil: Anto&#10;                &lt;/text&gt;&#10;                &lt;text x='38' y='414' fontFamily='Verdana' fontSize='13' fill='#EFEAE1'&gt;&#10;                    ajak lebih dulu saat menyusun bulan depan&#10;                &lt;/text&gt;&#10;            &lt;/svg&gt;&#10;        &lt;/Box&gt;&#10;    &lt;/Box&gt;&#10;&#10;    {/* ── C · bilah kaki ── */}&#10;    &lt;Box&#10;        style={{&#10;            height: 40,&#10;            flexDirection: 'row',&#10;            alignItems: 'center',&#10;            justifyContent: 'space-between',&#10;        }}&#10;    &gt;&#10;        &lt;Text style={{ fontSize: 14, color: '#6B6478', fontFamily: 'Verdana' }}&gt;&#10;            Pizza Snack Play · Panduan Korlas &amp;amp; Admin&#10;        &lt;/Text&gt;&#10;        &lt;Text style={{ fontSize: 14, color: '#6B6478', fontFamily: 'Verdana' }}&gt;16 / 18&lt;/Text&gt;&#10;    &lt;/Box&gt;&#10;&lt;/Slide&gt;&#10;"/>
+        <p:cNvGrpSpPr/>
+        <p:nvPr/>
+      </p:nvGrpSpPr>
+      <p:grpSpPr>
+        <a:xfrm>
+          <a:off x="0" y="0"/>
+          <a:ext cx="0" cy="0"/>
+          <a:chOff x="0" y="0"/>
+          <a:chExt cx="0" cy="0"/>
+        </a:xfrm>
+      </p:grpSpPr>
+      <p:sp>
+        <p:nvSpPr>
+          <p:cNvPr id="141" name=""/>
+          <p:cNvSpPr/>
+          <p:nvPr/>
+        </p:nvSpPr>
+        <p:spPr>
+          <a:xfrm rot="0" flipH="0" flipV="0">
+            <a:off x="0" y="0"/>
+            <a:ext cx="12192000" cy="6858000"/>
+          </a:xfrm>
+          <a:prstGeom prst="rect">
+            <a:avLst/>
+          </a:prstGeom>
+          <a:solidFill>
+            <a:srgbClr val="FAF7F2"/>
+          </a:solidFill>
+          <a:ln/>
+        </p:spPr>
+        <p:txBody>
+          <a:bodyPr/>
+          <a:p/>
+        </p:txBody>
+      </p:sp>
+      <p:sp>
+        <p:nvSpPr>
+          <p:cNvPr id="142" name="" descr="{&quot;isTemplate&quot;:true,&quot;type&quot;:&quot;text&quot;}"/>
+          <p:cNvSpPr txBox="1"/>
+          <p:nvPr/>
+        </p:nvSpPr>
+        <p:spPr>
+          <a:xfrm rot="0" flipH="0" flipV="0">
+            <a:off x="609600" y="381000"/>
+            <a:ext cx="10972800" cy="514350"/>
+          </a:xfrm>
+          <a:prstGeom prst="rect"/>
+        </p:spPr>
+        <p:txBody>
+          <a:bodyPr wrap="none" lIns="0" tIns="0" rIns="0" bIns="0"/>
+          <a:p>
+            <a:pPr>
+              <a:lnSpc>
+                <a:spcPct val="130000"/>
+              </a:lnSpc>
+            </a:pPr>
+            <a:r>
+              <a:rPr lang="en-US" sz="2550" b="1">
+                <a:solidFill>
+                  <a:srgbClr val="51277C"/>
+                </a:solidFill>
+                <a:latin typeface="Trebuchet MS"/>
+                <a:ea typeface="Trebuchet MS"/>
+              </a:rPr>
               <a:t>Laporan piket: sudah merata?</a:t>
             </a:r>
             <a:endParaRPr/>
@@ -5459,7 +6600,7 @@
       </p:sp>
       <p:sp>
         <p:nvSpPr>
-          <p:cNvPr id="109" name=""/>
+          <p:cNvPr id="143" name=""/>
           <p:cNvSpPr/>
           <p:nvPr/>
         </p:nvSpPr>
@@ -5480,15 +6621,12 @@
         </p:spPr>
         <p:txBody>
           <a:bodyPr/>
-          <a:p>
-            <a:pPr/>
-            <a:endParaRPr/>
-          </a:p>
-        </p:txBody>
-      </p:sp>
-      <p:sp>
-        <p:nvSpPr>
-          <p:cNvPr id="110" name="" descr="{&quot;isTemplate&quot;:true,&quot;type&quot;:&quot;text&quot;}"/>
+          <a:p/>
+        </p:txBody>
+      </p:sp>
+      <p:sp>
+        <p:nvSpPr>
+          <p:cNvPr id="144" name="" descr="{&quot;isTemplate&quot;:true,&quot;type&quot;:&quot;text&quot;}"/>
           <p:cNvSpPr txBox="1"/>
           <p:nvPr/>
         </p:nvSpPr>
@@ -5523,7 +6661,7 @@
       </p:sp>
       <p:sp>
         <p:nvSpPr>
-          <p:cNvPr id="111" name="" descr="{&quot;isTemplate&quot;:true,&quot;type&quot;:&quot;text&quot;}"/>
+          <p:cNvPr id="145" name="" descr="{&quot;isTemplate&quot;:true,&quot;type&quot;:&quot;text&quot;}"/>
           <p:cNvSpPr txBox="1"/>
           <p:nvPr/>
         </p:nvSpPr>
@@ -5550,15 +6688,15 @@
                 <a:latin typeface="Verdana"/>
                 <a:ea typeface="Verdana"/>
               </a:rPr>
-              <a:t>15 / 17</a:t>
-            </a:r>
-            <a:endParaRPr/>
-          </a:p>
-        </p:txBody>
-      </p:sp>
-      <p:sp>
-        <p:nvSpPr>
-          <p:cNvPr id="112" name=""/>
+              <a:t>16 / 18</a:t>
+            </a:r>
+            <a:endParaRPr/>
+          </a:p>
+        </p:txBody>
+      </p:sp>
+      <p:sp>
+        <p:nvSpPr>
+          <p:cNvPr id="146" name=""/>
           <p:cNvSpPr/>
           <p:nvPr/>
         </p:nvSpPr>
@@ -5887,15 +7025,12 @@
         </p:spPr>
         <p:txBody>
           <a:bodyPr/>
-          <a:p>
-            <a:pPr/>
-            <a:endParaRPr/>
-          </a:p>
-        </p:txBody>
-      </p:sp>
-      <p:sp>
-        <p:nvSpPr>
-          <p:cNvPr id="113" name="" descr="{&quot;isTemplate&quot;:true,&quot;type&quot;:&quot;text&quot;}"/>
+          <a:p/>
+        </p:txBody>
+      </p:sp>
+      <p:sp>
+        <p:nvSpPr>
+          <p:cNvPr id="147" name="" descr="{&quot;isTemplate&quot;:true,&quot;type&quot;:&quot;text&quot;}"/>
           <p:cNvSpPr txBox="1"/>
           <p:nvPr/>
         </p:nvSpPr>
@@ -5950,7 +7085,7 @@
       </p:sp>
       <p:sp>
         <p:nvSpPr>
-          <p:cNvPr id="114" name="" descr="{&quot;isTemplate&quot;:true,&quot;type&quot;:&quot;text&quot;}"/>
+          <p:cNvPr id="148" name="" descr="{&quot;isTemplate&quot;:true,&quot;type&quot;:&quot;text&quot;}"/>
           <p:cNvSpPr txBox="1"/>
           <p:nvPr/>
         </p:nvSpPr>
@@ -5987,7 +7122,7 @@
       </p:sp>
       <p:sp>
         <p:nvSpPr>
-          <p:cNvPr id="115" name=""/>
+          <p:cNvPr id="149" name=""/>
           <p:cNvSpPr/>
           <p:nvPr/>
         </p:nvSpPr>
@@ -6010,15 +7145,12 @@
         </p:spPr>
         <p:txBody>
           <a:bodyPr/>
-          <a:p>
-            <a:pPr/>
-            <a:endParaRPr/>
-          </a:p>
-        </p:txBody>
-      </p:sp>
-      <p:sp>
-        <p:nvSpPr>
-          <p:cNvPr id="116" name=""/>
+          <a:p/>
+        </p:txBody>
+      </p:sp>
+      <p:sp>
+        <p:nvSpPr>
+          <p:cNvPr id="150" name=""/>
           <p:cNvSpPr/>
           <p:nvPr/>
         </p:nvSpPr>
@@ -6070,15 +7202,12 @@
         </p:spPr>
         <p:txBody>
           <a:bodyPr/>
-          <a:p>
-            <a:pPr/>
-            <a:endParaRPr/>
-          </a:p>
-        </p:txBody>
-      </p:sp>
-      <p:sp>
-        <p:nvSpPr>
-          <p:cNvPr id="117" name="" descr="{&quot;isTemplate&quot;:true,&quot;type&quot;:&quot;text&quot;}"/>
+          <a:p/>
+        </p:txBody>
+      </p:sp>
+      <p:sp>
+        <p:nvSpPr>
+          <p:cNvPr id="151" name="" descr="{&quot;isTemplate&quot;:true,&quot;type&quot;:&quot;text&quot;}"/>
           <p:cNvSpPr txBox="1"/>
           <p:nvPr/>
         </p:nvSpPr>
@@ -6113,7 +7242,7 @@
       </p:sp>
       <p:sp>
         <p:nvSpPr>
-          <p:cNvPr id="118" name="" descr="{&quot;isTemplate&quot;:true,&quot;type&quot;:&quot;text&quot;}"/>
+          <p:cNvPr id="152" name="" descr="{&quot;isTemplate&quot;:true,&quot;type&quot;:&quot;text&quot;}"/>
           <p:cNvSpPr txBox="1"/>
           <p:nvPr/>
         </p:nvSpPr>
@@ -6148,7 +7277,7 @@
       </p:sp>
       <p:sp>
         <p:nvSpPr>
-          <p:cNvPr id="119" name="" descr="{&quot;isTemplate&quot;:true,&quot;type&quot;:&quot;text&quot;}"/>
+          <p:cNvPr id="153" name="" descr="{&quot;isTemplate&quot;:true,&quot;type&quot;:&quot;text&quot;}"/>
           <p:cNvSpPr txBox="1"/>
           <p:nvPr/>
         </p:nvSpPr>
@@ -6183,7 +7312,7 @@
       </p:sp>
       <p:sp>
         <p:nvSpPr>
-          <p:cNvPr id="120" name=""/>
+          <p:cNvPr id="154" name=""/>
           <p:cNvSpPr/>
           <p:nvPr/>
         </p:nvSpPr>
@@ -6206,15 +7335,12 @@
         </p:spPr>
         <p:txBody>
           <a:bodyPr/>
-          <a:p>
-            <a:pPr/>
-            <a:endParaRPr/>
-          </a:p>
+          <a:p/>
         </p:txBody>
       </p:sp>
       <p:pic>
         <p:nvPicPr>
-          <p:cNvPr id="121" name=""/>
+          <p:cNvPr id="155" name=""/>
           <p:cNvPicPr>
             <a:picLocks noChangeAspect="1"/>
           </p:cNvPicPr>
@@ -6248,12 +7374,12 @@
 </p:sld>
 </file>
 
-<file path=ppt/slides/slide16.xml><?xml version="1.0" encoding="utf-8"?>
+<file path=ppt/slides/slide17.xml><?xml version="1.0" encoding="utf-8"?>
 <p:sld xmlns:p="http://schemas.openxmlformats.org/presentationml/2006/main" xmlns:a="http://schemas.openxmlformats.org/drawingml/2006/main" xmlns:asvg="http://schemas.microsoft.com/office/drawing/2016/SVG/main" xmlns:r="http://schemas.openxmlformats.org/officeDocument/2006/relationships" xmlns:mc="http://schemas.openxmlformats.org/markup-compatibility/2006" mc:Ignorable="asvg">
   <p:cSld>
     <p:spTree>
       <p:nvGrpSpPr>
-        <p:cNvPr id="122" name=""/>
+        <p:cNvPr id="156" name="" descr="&lt;Slide&#10;    style={{&#10;        width: '1280px',&#10;        height: '720px',&#10;        background: '#FAF7F2',&#10;        paddingTop: 20,&#10;        paddingBottom: 20,&#10;        paddingLeft: 64,&#10;        paddingRight: 64,&#10;    }}&#10;&gt;&#10;    {/* ── A · blok judul ── */}&#10;    &lt;Box style={{ height: 110, justifyContent: 'center' }}&gt;&#10;        &lt;Text&#10;            style={{&#10;                fontSize: 34,&#10;                fontWeight: 'bold',&#10;                color: '#51277C',&#10;                fontFamily: 'Trebuchet MS',&#10;                lineHeight: 1.3,&#10;            }}&#10;        &gt;&#10;            Empat hal yang perlu diingat&#10;        &lt;/Text&gt;&#10;        &lt;Box style={{ marginTop: 10, width: 72, height: 6, borderRadius: 3, background: '#51277C' }} /&gt;&#10;    &lt;/Box&gt;&#10;&#10;    {/* ── B · area konten ── */}&#10;    &lt;Box style={{ height: 530 }}&gt;&#10;        &lt;Box style={{ height: 470, flexDirection: 'row', gap: 18 }}&gt;&#10;            {[&#10;                {&#10;                    d: 'M7 2v3M17 2v3M3 9h18M5 5h14a2 2 0 0 1 2 2v12a2 2 0 0 1-2 2H5a2 2 0 0 1-2-2V7a2 2 0 0 1 2-2zM8 13h8',&#10;                    t: 'Kosongkan petugas sebelum terbit',&#10;                    d: 'Bila tanggalnya ingin direbut orang tua, biarkan petugas kosong sebelum dipublikasikan. Setelah terbit, yang masih bisa diisi hanya petugas — menu &amp; catatan tetap terkunci.',&#10;                    g: 'Tentukan sebelum kunci',&#10;                },&#10;                {&#10;                    d: 'M7 4h10a3 3 0 0 1 3 3v10a3 3 0 0 1-3 3H7a3 3 0 0 1-3-3V7a3 3 0 0 1 3-3zM7 11l2 2 3-4M8 16h7',&#10;                    t: 'Selesaikan semua dulu',&#10;                    d: 'Publikasi menolak selama masih ada hari yang belum dikunci. Periksa kartu status per kelas sebelum menekan tombolnya.',&#10;                    g: 'Jangan separuh jadi',&#10;                },&#10;                {&#10;                    d: 'M7 11h10a2 2 0 0 1 2 2v6a2 2 0 0 1-2 2H7a2 2 0 0 1-2-2v-6a2 2 0 0 1 2-2zM8 11V8a4 4 0 0 1 7.5-2',&#10;                    t: 'Revisi sesudah terbit: minta admin',&#10;                    d: 'Membuka kunci jadwal wewenang admin. Korlas tidak bisa mencairkan jadwal yang sudah dikunci atau terbit.',&#10;                    g: 'Sampaikan ke admin',&#10;                },&#10;                {&#10;                    d: 'M7 2v3M17 2v3M3 9h18M5 5h14a2 2 0 0 1 2 2v12a2 2 0 0 1-2 2H5a2 2 0 0 1-2-2V7a2 2 0 0 1 2-2zM9 14l6 6M15 14l-6 6',&#10;                    t: 'Hari libur sekolah wewenang admin',&#10;                    d: 'Korlas bisa menandai libur pada jadwal kelasnya sendiri. Hari libur yang berlaku untuk semua kelas ditambahkan admin.',&#10;                    g: 'Berlaku sekolah',&#10;                },&#10;            ].map((c, idx) =&gt; (&#10;                &lt;Box&#10;                    key={idx}&#10;                    style={{&#10;                        flex: 1,&#10;                        height: '100%',&#10;                        background: '#FFFFFF',&#10;                        borderRadius: 16,&#10;                        boxShadow: '0 4px 20px rgba(0,0,0,0.08)',&#10;                        padding: 24,&#10;                        borderTop: '8px solid #AFC440',&#10;                    }}&#10;                &gt;&#10;                    &lt;Box&#10;                        style={{&#10;                            width: 60,&#10;                            height: 60,&#10;                            borderRadius: 30,&#10;                            background: 'rgba(81,39,124,0.10)',&#10;                            justifyContent: 'center',&#10;                            alignItems: 'center',&#10;                        }}&#10;                    &gt;&#10;                        &lt;svg width={30} height={30} viewBox='0 0 24 24' xmlns=&quot;http://www.w3.org/2000/svg&quot;&gt;&#10;                            &lt;path&#10;                                fill='none'&#10;                                stroke='#51277C'&#10;                                strokeWidth='2'&#10;                                strokeLinecap='round'&#10;                                strokeLinejoin='round'&#10;                                d={c.d}&#10;                            /&gt;&#10;                        &lt;/svg&gt;&#10;                    &lt;/Box&gt;&#10;&#10;                    &lt;Text&#10;                        style={{&#10;                            marginTop: 16,&#10;                            fontSize: 23,&#10;                            fontWeight: 'bold',&#10;                            color: '#51277C',&#10;                            fontFamily: 'Trebuchet MS',&#10;                            lineHeight: 1.32,&#10;                        }}&#10;                    &gt;&#10;                        {c.t}&#10;                    &lt;/Text&gt;&#10;&#10;                    &lt;Box style={{ marginTop: 12, width: 44, height: 3, borderRadius: 2, background: '#AFC440' }} /&gt;&#10;&#10;                    &lt;Text&#10;                        style={{&#10;                            marginTop: 12,&#10;                            fontSize: 17,&#10;                            color: '#6B6478',&#10;                            fontFamily: 'Verdana',&#10;                            lineHeight: 1.5,&#10;                        }}&#10;                    &gt;&#10;                        {c.d}&#10;                    &lt;/Text&gt;&#10;&#10;                    &lt;Box style={{ marginTop: 'auto' }}&gt;&#10;                        &lt;Text&#10;                            style={{&#10;                                fontSize: 16,&#10;                                color: '#51277C',&#10;                                fontFamily: 'Verdana',&#10;                                fontWeight: 'bold',&#10;                            }}&#10;                        &gt;&#10;                            {c.g}&#10;                        &lt;/Text&gt;&#10;                    &lt;/Box&gt;&#10;                &lt;/Box&gt;&#10;            ))}&#10;        &lt;/Box&gt;&#10;&#10;        {/* simpulan */}&#10;        &lt;Box&#10;            style={{&#10;                marginTop: 14,&#10;                height: 46,&#10;                background: '#51277C',&#10;                borderRadius: 14,&#10;                justifyContent: 'center',&#10;                alignItems: 'center',&#10;            }}&#10;        &gt;&#10;            &lt;Text&#10;                style={{&#10;                    fontSize: 19,&#10;                    color: '#FFFFFF',&#10;                    fontFamily: 'Verdana',&#10;                    fontWeight: 'bold',&#10;                }}&#10;            &gt;&#10;                Intinya: susun, tentukan petugas, kunci, lalu terbitkan.&#10;            &lt;/Text&gt;&#10;        &lt;/Box&gt;&#10;    &lt;/Box&gt;&#10;&#10;    {/* ── C · bilah kaki ── */}&#10;    &lt;Box&#10;        style={{&#10;            height: 40,&#10;            flexDirection: 'row',&#10;            alignItems: 'center',&#10;            justifyContent: 'space-between',&#10;        }}&#10;    &gt;&#10;        &lt;Text style={{ fontSize: 14, color: '#6B6478', fontFamily: 'Verdana' }}&gt;&#10;            Pizza Snack Play · Panduan Korlas &amp;amp; Admin&#10;        &lt;/Text&gt;&#10;        &lt;Text style={{ fontSize: 14, color: '#6B6478', fontFamily: 'Verdana' }}&gt;17 / 18&lt;/Text&gt;&#10;    &lt;/Box&gt;&#10;&lt;/Slide&gt;&#10;"/>
         <p:cNvGrpSpPr/>
         <p:nvPr/>
       </p:nvGrpSpPr>
@@ -6267,7 +7393,7 @@
       </p:grpSpPr>
       <p:sp>
         <p:nvSpPr>
-          <p:cNvPr id="123" name=""/>
+          <p:cNvPr id="157" name=""/>
           <p:cNvSpPr/>
           <p:nvPr/>
         </p:nvSpPr>
@@ -6286,15 +7412,12 @@
         </p:spPr>
         <p:txBody>
           <a:bodyPr/>
-          <a:p>
-            <a:pPr/>
-            <a:endParaRPr/>
-          </a:p>
-        </p:txBody>
-      </p:sp>
-      <p:sp>
-        <p:nvSpPr>
-          <p:cNvPr id="124" name="" descr="{&quot;isTemplate&quot;:true,&quot;type&quot;:&quot;text&quot;}"/>
+          <a:p/>
+        </p:txBody>
+      </p:sp>
+      <p:sp>
+        <p:nvSpPr>
+          <p:cNvPr id="158" name="" descr="{&quot;isTemplate&quot;:true,&quot;type&quot;:&quot;text&quot;}"/>
           <p:cNvSpPr txBox="1"/>
           <p:nvPr/>
         </p:nvSpPr>
@@ -6329,7 +7452,7 @@
       </p:sp>
       <p:sp>
         <p:nvSpPr>
-          <p:cNvPr id="125" name=""/>
+          <p:cNvPr id="159" name=""/>
           <p:cNvSpPr/>
           <p:nvPr/>
         </p:nvSpPr>
@@ -6350,15 +7473,12 @@
         </p:spPr>
         <p:txBody>
           <a:bodyPr/>
-          <a:p>
-            <a:pPr/>
-            <a:endParaRPr/>
-          </a:p>
-        </p:txBody>
-      </p:sp>
-      <p:sp>
-        <p:nvSpPr>
-          <p:cNvPr id="126" name=""/>
+          <a:p/>
+        </p:txBody>
+      </p:sp>
+      <p:sp>
+        <p:nvSpPr>
+          <p:cNvPr id="160" name=""/>
           <p:cNvSpPr/>
           <p:nvPr/>
         </p:nvSpPr>
@@ -6386,15 +7506,12 @@
         </p:spPr>
         <p:txBody>
           <a:bodyPr/>
-          <a:p>
-            <a:pPr/>
-            <a:endParaRPr/>
-          </a:p>
-        </p:txBody>
-      </p:sp>
-      <p:sp>
-        <p:nvSpPr>
-          <p:cNvPr id="127" name=""/>
+          <a:p/>
+        </p:txBody>
+      </p:sp>
+      <p:sp>
+        <p:nvSpPr>
+          <p:cNvPr id="161" name=""/>
           <p:cNvSpPr/>
           <p:nvPr/>
         </p:nvSpPr>
@@ -6446,15 +7563,12 @@
         </p:spPr>
         <p:txBody>
           <a:bodyPr/>
-          <a:p>
-            <a:pPr/>
-            <a:endParaRPr/>
-          </a:p>
-        </p:txBody>
-      </p:sp>
-      <p:sp>
-        <p:nvSpPr>
-          <p:cNvPr id="128" name=""/>
+          <a:p/>
+        </p:txBody>
+      </p:sp>
+      <p:sp>
+        <p:nvSpPr>
+          <p:cNvPr id="162" name=""/>
           <p:cNvSpPr/>
           <p:nvPr/>
         </p:nvSpPr>
@@ -6477,15 +7591,12 @@
         </p:spPr>
         <p:txBody>
           <a:bodyPr/>
-          <a:p>
-            <a:pPr/>
-            <a:endParaRPr/>
-          </a:p>
+          <a:p/>
         </p:txBody>
       </p:sp>
       <p:pic>
         <p:nvPicPr>
-          <p:cNvPr id="129" name=""/>
+          <p:cNvPr id="163" name=""/>
           <p:cNvPicPr>
             <a:picLocks noChangeAspect="1"/>
           </p:cNvPicPr>
@@ -6516,7 +7627,7 @@
       </p:pic>
       <p:sp>
         <p:nvSpPr>
-          <p:cNvPr id="130" name="" descr="{&quot;isTemplate&quot;:true,&quot;type&quot;:&quot;text&quot;}"/>
+          <p:cNvPr id="164" name="" descr="{&quot;isTemplate&quot;:true,&quot;type&quot;:&quot;text&quot;}"/>
           <p:cNvSpPr txBox="1"/>
           <p:nvPr/>
         </p:nvSpPr>
@@ -6553,7 +7664,7 @@
       </p:sp>
       <p:sp>
         <p:nvSpPr>
-          <p:cNvPr id="131" name=""/>
+          <p:cNvPr id="165" name=""/>
           <p:cNvSpPr/>
           <p:nvPr/>
         </p:nvSpPr>
@@ -6574,15 +7685,12 @@
         </p:spPr>
         <p:txBody>
           <a:bodyPr/>
-          <a:p>
-            <a:pPr/>
-            <a:endParaRPr/>
-          </a:p>
-        </p:txBody>
-      </p:sp>
-      <p:sp>
-        <p:nvSpPr>
-          <p:cNvPr id="132" name="" descr="{&quot;isTemplate&quot;:true,&quot;type&quot;:&quot;text&quot;}"/>
+          <a:p/>
+        </p:txBody>
+      </p:sp>
+      <p:sp>
+        <p:nvSpPr>
+          <p:cNvPr id="166" name="" descr="{&quot;isTemplate&quot;:true,&quot;type&quot;:&quot;text&quot;}"/>
           <p:cNvSpPr txBox="1"/>
           <p:nvPr/>
         </p:nvSpPr>
@@ -6619,7 +7727,7 @@
       </p:sp>
       <p:sp>
         <p:nvSpPr>
-          <p:cNvPr id="133" name="" descr="{&quot;isTemplate&quot;:true,&quot;type&quot;:&quot;text&quot;}"/>
+          <p:cNvPr id="167" name="" descr="{&quot;isTemplate&quot;:true,&quot;type&quot;:&quot;text&quot;}"/>
           <p:cNvSpPr txBox="1"/>
           <p:nvPr/>
         </p:nvSpPr>
@@ -6654,7 +7762,7 @@
       </p:sp>
       <p:sp>
         <p:nvSpPr>
-          <p:cNvPr id="134" name=""/>
+          <p:cNvPr id="168" name=""/>
           <p:cNvSpPr/>
           <p:nvPr/>
         </p:nvSpPr>
@@ -6682,15 +7790,12 @@
         </p:spPr>
         <p:txBody>
           <a:bodyPr/>
-          <a:p>
-            <a:pPr/>
-            <a:endParaRPr/>
-          </a:p>
-        </p:txBody>
-      </p:sp>
-      <p:sp>
-        <p:nvSpPr>
-          <p:cNvPr id="135" name=""/>
+          <a:p/>
+        </p:txBody>
+      </p:sp>
+      <p:sp>
+        <p:nvSpPr>
+          <p:cNvPr id="169" name=""/>
           <p:cNvSpPr/>
           <p:nvPr/>
         </p:nvSpPr>
@@ -6742,15 +7847,12 @@
         </p:spPr>
         <p:txBody>
           <a:bodyPr/>
-          <a:p>
-            <a:pPr/>
-            <a:endParaRPr/>
-          </a:p>
-        </p:txBody>
-      </p:sp>
-      <p:sp>
-        <p:nvSpPr>
-          <p:cNvPr id="136" name=""/>
+          <a:p/>
+        </p:txBody>
+      </p:sp>
+      <p:sp>
+        <p:nvSpPr>
+          <p:cNvPr id="170" name=""/>
           <p:cNvSpPr/>
           <p:nvPr/>
         </p:nvSpPr>
@@ -6773,15 +7875,12 @@
         </p:spPr>
         <p:txBody>
           <a:bodyPr/>
-          <a:p>
-            <a:pPr/>
-            <a:endParaRPr/>
-          </a:p>
+          <a:p/>
         </p:txBody>
       </p:sp>
       <p:pic>
         <p:nvPicPr>
-          <p:cNvPr id="137" name=""/>
+          <p:cNvPr id="171" name=""/>
           <p:cNvPicPr>
             <a:picLocks noChangeAspect="1"/>
           </p:cNvPicPr>
@@ -6812,7 +7911,7 @@
       </p:pic>
       <p:sp>
         <p:nvSpPr>
-          <p:cNvPr id="138" name="" descr="{&quot;isTemplate&quot;:true,&quot;type&quot;:&quot;text&quot;}"/>
+          <p:cNvPr id="172" name="" descr="{&quot;isTemplate&quot;:true,&quot;type&quot;:&quot;text&quot;}"/>
           <p:cNvSpPr txBox="1"/>
           <p:nvPr/>
         </p:nvSpPr>
@@ -6849,7 +7948,7 @@
       </p:sp>
       <p:sp>
         <p:nvSpPr>
-          <p:cNvPr id="139" name=""/>
+          <p:cNvPr id="173" name=""/>
           <p:cNvSpPr/>
           <p:nvPr/>
         </p:nvSpPr>
@@ -6870,15 +7969,12 @@
         </p:spPr>
         <p:txBody>
           <a:bodyPr/>
-          <a:p>
-            <a:pPr/>
-            <a:endParaRPr/>
-          </a:p>
-        </p:txBody>
-      </p:sp>
-      <p:sp>
-        <p:nvSpPr>
-          <p:cNvPr id="140" name="" descr="{&quot;isTemplate&quot;:true,&quot;type&quot;:&quot;text&quot;}"/>
+          <a:p/>
+        </p:txBody>
+      </p:sp>
+      <p:sp>
+        <p:nvSpPr>
+          <p:cNvPr id="174" name="" descr="{&quot;isTemplate&quot;:true,&quot;type&quot;:&quot;text&quot;}"/>
           <p:cNvSpPr txBox="1"/>
           <p:nvPr/>
         </p:nvSpPr>
@@ -6915,7 +8011,7 @@
       </p:sp>
       <p:sp>
         <p:nvSpPr>
-          <p:cNvPr id="141" name="" descr="{&quot;isTemplate&quot;:true,&quot;type&quot;:&quot;text&quot;}"/>
+          <p:cNvPr id="175" name="" descr="{&quot;isTemplate&quot;:true,&quot;type&quot;:&quot;text&quot;}"/>
           <p:cNvSpPr txBox="1"/>
           <p:nvPr/>
         </p:nvSpPr>
@@ -6950,7 +8046,7 @@
       </p:sp>
       <p:sp>
         <p:nvSpPr>
-          <p:cNvPr id="142" name=""/>
+          <p:cNvPr id="176" name=""/>
           <p:cNvSpPr/>
           <p:nvPr/>
         </p:nvSpPr>
@@ -6978,15 +8074,12 @@
         </p:spPr>
         <p:txBody>
           <a:bodyPr/>
-          <a:p>
-            <a:pPr/>
-            <a:endParaRPr/>
-          </a:p>
-        </p:txBody>
-      </p:sp>
-      <p:sp>
-        <p:nvSpPr>
-          <p:cNvPr id="143" name=""/>
+          <a:p/>
+        </p:txBody>
+      </p:sp>
+      <p:sp>
+        <p:nvSpPr>
+          <p:cNvPr id="177" name=""/>
           <p:cNvSpPr/>
           <p:nvPr/>
         </p:nvSpPr>
@@ -7038,15 +8131,12 @@
         </p:spPr>
         <p:txBody>
           <a:bodyPr/>
-          <a:p>
-            <a:pPr/>
-            <a:endParaRPr/>
-          </a:p>
-        </p:txBody>
-      </p:sp>
-      <p:sp>
-        <p:nvSpPr>
-          <p:cNvPr id="144" name=""/>
+          <a:p/>
+        </p:txBody>
+      </p:sp>
+      <p:sp>
+        <p:nvSpPr>
+          <p:cNvPr id="178" name=""/>
           <p:cNvSpPr/>
           <p:nvPr/>
         </p:nvSpPr>
@@ -7069,15 +8159,12 @@
         </p:spPr>
         <p:txBody>
           <a:bodyPr/>
-          <a:p>
-            <a:pPr/>
-            <a:endParaRPr/>
-          </a:p>
+          <a:p/>
         </p:txBody>
       </p:sp>
       <p:pic>
         <p:nvPicPr>
-          <p:cNvPr id="145" name=""/>
+          <p:cNvPr id="179" name=""/>
           <p:cNvPicPr>
             <a:picLocks noChangeAspect="1"/>
           </p:cNvPicPr>
@@ -7108,7 +8195,7 @@
       </p:pic>
       <p:sp>
         <p:nvSpPr>
-          <p:cNvPr id="146" name="" descr="{&quot;isTemplate&quot;:true,&quot;type&quot;:&quot;text&quot;}"/>
+          <p:cNvPr id="180" name="" descr="{&quot;isTemplate&quot;:true,&quot;type&quot;:&quot;text&quot;}"/>
           <p:cNvSpPr txBox="1"/>
           <p:nvPr/>
         </p:nvSpPr>
@@ -7145,7 +8232,7 @@
       </p:sp>
       <p:sp>
         <p:nvSpPr>
-          <p:cNvPr id="147" name=""/>
+          <p:cNvPr id="181" name=""/>
           <p:cNvSpPr/>
           <p:nvPr/>
         </p:nvSpPr>
@@ -7166,15 +8253,12 @@
         </p:spPr>
         <p:txBody>
           <a:bodyPr/>
-          <a:p>
-            <a:pPr/>
-            <a:endParaRPr/>
-          </a:p>
-        </p:txBody>
-      </p:sp>
-      <p:sp>
-        <p:nvSpPr>
-          <p:cNvPr id="148" name="" descr="{&quot;isTemplate&quot;:true,&quot;type&quot;:&quot;text&quot;}"/>
+          <a:p/>
+        </p:txBody>
+      </p:sp>
+      <p:sp>
+        <p:nvSpPr>
+          <p:cNvPr id="182" name="" descr="{&quot;isTemplate&quot;:true,&quot;type&quot;:&quot;text&quot;}"/>
           <p:cNvSpPr txBox="1"/>
           <p:nvPr/>
         </p:nvSpPr>
@@ -7211,7 +8295,7 @@
       </p:sp>
       <p:sp>
         <p:nvSpPr>
-          <p:cNvPr id="149" name="" descr="{&quot;isTemplate&quot;:true,&quot;type&quot;:&quot;text&quot;}"/>
+          <p:cNvPr id="183" name="" descr="{&quot;isTemplate&quot;:true,&quot;type&quot;:&quot;text&quot;}"/>
           <p:cNvSpPr txBox="1"/>
           <p:nvPr/>
         </p:nvSpPr>
@@ -7246,7 +8330,7 @@
       </p:sp>
       <p:sp>
         <p:nvSpPr>
-          <p:cNvPr id="150" name=""/>
+          <p:cNvPr id="184" name=""/>
           <p:cNvSpPr/>
           <p:nvPr/>
         </p:nvSpPr>
@@ -7274,15 +8358,12 @@
         </p:spPr>
         <p:txBody>
           <a:bodyPr/>
-          <a:p>
-            <a:pPr/>
-            <a:endParaRPr/>
-          </a:p>
-        </p:txBody>
-      </p:sp>
-      <p:sp>
-        <p:nvSpPr>
-          <p:cNvPr id="151" name=""/>
+          <a:p/>
+        </p:txBody>
+      </p:sp>
+      <p:sp>
+        <p:nvSpPr>
+          <p:cNvPr id="185" name=""/>
           <p:cNvSpPr/>
           <p:nvPr/>
         </p:nvSpPr>
@@ -7334,15 +8415,12 @@
         </p:spPr>
         <p:txBody>
           <a:bodyPr/>
-          <a:p>
-            <a:pPr/>
-            <a:endParaRPr/>
-          </a:p>
-        </p:txBody>
-      </p:sp>
-      <p:sp>
-        <p:nvSpPr>
-          <p:cNvPr id="152" name=""/>
+          <a:p/>
+        </p:txBody>
+      </p:sp>
+      <p:sp>
+        <p:nvSpPr>
+          <p:cNvPr id="186" name=""/>
           <p:cNvSpPr/>
           <p:nvPr/>
         </p:nvSpPr>
@@ -7365,15 +8443,12 @@
         </p:spPr>
         <p:txBody>
           <a:bodyPr/>
-          <a:p>
-            <a:pPr/>
-            <a:endParaRPr/>
-          </a:p>
+          <a:p/>
         </p:txBody>
       </p:sp>
       <p:pic>
         <p:nvPicPr>
-          <p:cNvPr id="153" name=""/>
+          <p:cNvPr id="187" name=""/>
           <p:cNvPicPr>
             <a:picLocks noChangeAspect="1"/>
           </p:cNvPicPr>
@@ -7404,7 +8479,7 @@
       </p:pic>
       <p:sp>
         <p:nvSpPr>
-          <p:cNvPr id="154" name="" descr="{&quot;isTemplate&quot;:true,&quot;type&quot;:&quot;text&quot;}"/>
+          <p:cNvPr id="188" name="" descr="{&quot;isTemplate&quot;:true,&quot;type&quot;:&quot;text&quot;}"/>
           <p:cNvSpPr txBox="1"/>
           <p:nvPr/>
         </p:nvSpPr>
@@ -7441,7 +8516,7 @@
       </p:sp>
       <p:sp>
         <p:nvSpPr>
-          <p:cNvPr id="155" name=""/>
+          <p:cNvPr id="189" name=""/>
           <p:cNvSpPr/>
           <p:nvPr/>
         </p:nvSpPr>
@@ -7462,15 +8537,12 @@
         </p:spPr>
         <p:txBody>
           <a:bodyPr/>
-          <a:p>
-            <a:pPr/>
-            <a:endParaRPr/>
-          </a:p>
-        </p:txBody>
-      </p:sp>
-      <p:sp>
-        <p:nvSpPr>
-          <p:cNvPr id="156" name="" descr="{&quot;isTemplate&quot;:true,&quot;type&quot;:&quot;text&quot;}"/>
+          <a:p/>
+        </p:txBody>
+      </p:sp>
+      <p:sp>
+        <p:nvSpPr>
+          <p:cNvPr id="190" name="" descr="{&quot;isTemplate&quot;:true,&quot;type&quot;:&quot;text&quot;}"/>
           <p:cNvSpPr txBox="1"/>
           <p:nvPr/>
         </p:nvSpPr>
@@ -7507,7 +8579,7 @@
       </p:sp>
       <p:sp>
         <p:nvSpPr>
-          <p:cNvPr id="157" name="" descr="{&quot;isTemplate&quot;:true,&quot;type&quot;:&quot;text&quot;}"/>
+          <p:cNvPr id="191" name="" descr="{&quot;isTemplate&quot;:true,&quot;type&quot;:&quot;text&quot;}"/>
           <p:cNvSpPr txBox="1"/>
           <p:nvPr/>
         </p:nvSpPr>
@@ -7542,7 +8614,7 @@
       </p:sp>
       <p:sp>
         <p:nvSpPr>
-          <p:cNvPr id="158" name=""/>
+          <p:cNvPr id="192" name=""/>
           <p:cNvSpPr/>
           <p:nvPr/>
         </p:nvSpPr>
@@ -7563,15 +8635,12 @@
         </p:spPr>
         <p:txBody>
           <a:bodyPr/>
-          <a:p>
-            <a:pPr/>
-            <a:endParaRPr/>
-          </a:p>
-        </p:txBody>
-      </p:sp>
-      <p:sp>
-        <p:nvSpPr>
-          <p:cNvPr id="159" name="" descr="{&quot;isTemplate&quot;:true,&quot;type&quot;:&quot;text&quot;}"/>
+          <a:p/>
+        </p:txBody>
+      </p:sp>
+      <p:sp>
+        <p:nvSpPr>
+          <p:cNvPr id="193" name="" descr="{&quot;isTemplate&quot;:true,&quot;type&quot;:&quot;text&quot;}"/>
           <p:cNvSpPr txBox="1"/>
           <p:nvPr/>
         </p:nvSpPr>
@@ -7606,7 +8675,7 @@
       </p:sp>
       <p:sp>
         <p:nvSpPr>
-          <p:cNvPr id="160" name="" descr="{&quot;isTemplate&quot;:true,&quot;type&quot;:&quot;text&quot;}"/>
+          <p:cNvPr id="194" name="" descr="{&quot;isTemplate&quot;:true,&quot;type&quot;:&quot;text&quot;}"/>
           <p:cNvSpPr txBox="1"/>
           <p:nvPr/>
         </p:nvSpPr>
@@ -7641,7 +8710,7 @@
       </p:sp>
       <p:sp>
         <p:nvSpPr>
-          <p:cNvPr id="161" name="" descr="{&quot;isTemplate&quot;:true,&quot;type&quot;:&quot;text&quot;}"/>
+          <p:cNvPr id="195" name="" descr="{&quot;isTemplate&quot;:true,&quot;type&quot;:&quot;text&quot;}"/>
           <p:cNvSpPr txBox="1"/>
           <p:nvPr/>
         </p:nvSpPr>
@@ -7668,7 +8737,7 @@
                 <a:latin typeface="Verdana"/>
                 <a:ea typeface="Verdana"/>
               </a:rPr>
-              <a:t>16 / 17</a:t>
+              <a:t>17 / 18</a:t>
             </a:r>
             <a:endParaRPr/>
           </a:p>
@@ -7679,12 +8748,12 @@
 </p:sld>
 </file>
 
-<file path=ppt/slides/slide17.xml><?xml version="1.0" encoding="utf-8"?>
+<file path=ppt/slides/slide18.xml><?xml version="1.0" encoding="utf-8"?>
 <p:sld xmlns:p="http://schemas.openxmlformats.org/presentationml/2006/main" xmlns:a="http://schemas.openxmlformats.org/drawingml/2006/main" xmlns:asvg="http://schemas.microsoft.com/office/drawing/2016/SVG/main" xmlns:r="http://schemas.openxmlformats.org/officeDocument/2006/relationships" xmlns:mc="http://schemas.openxmlformats.org/markup-compatibility/2006" mc:Ignorable="asvg">
   <p:cSld>
     <p:spTree>
       <p:nvGrpSpPr>
-        <p:cNvPr id="162" name=""/>
+        <p:cNvPr id="196" name="" descr="&lt;Slide&#10;    style={{&#10;        width: '1280px',&#10;        height: '720px',&#10;        background: '#FAF7F2',&#10;        justifyContent: 'center',&#10;        alignItems: 'center',&#10;        position: 'relative',&#10;        overflow: 'hidden',&#10;    }}&#10;&gt;&#10;    &lt;Box&#10;        style={{&#10;            position: 'absolute',&#10;            top: 90,&#10;            width: 520,&#10;            height: 520,&#10;            borderRadius: 260,&#10;            background: 'linear-gradient(135deg, #51277C 0%, #7A45A8 100%)',&#10;            opacity: 0.10,&#10;        }}&#10;    /&gt;&#10;    &lt;Box&#10;        style={{&#10;            position: 'absolute',&#10;            bottom: -80,&#10;            left: -80,&#10;            width: 320,&#10;            height: 320,&#10;            borderRadius: 160,&#10;            background: 'linear-gradient(135deg, #AFC440 0%, #F3B26C 100%)',&#10;            opacity: 0.18,&#10;        }}&#10;    /&gt;&#10;&#10;    &lt;Box style={{ position: 'relative', zIndex: 1, alignItems: 'center', paddingLeft: 72, paddingRight: 72 }}&gt;&#10;        &lt;Image src=&quot;assets/app_logo.png&quot; style={{ width: 200, height: 194, objectFit: 'contain' }} /&gt;&#10;&#10;        &lt;Text&#10;            style={{&#10;                marginTop: 26,&#10;                fontSize: 60,&#10;                fontWeight: 'bold',&#10;                color: '#51277C',&#10;                fontFamily: 'Trebuchet MS',&#10;                lineHeight: 1.15,&#10;            }}&#10;        &gt;&#10;            Terima kasih&#10;        &lt;/Text&gt;&#10;&#10;        &lt;Box style={{ marginTop: 18, width: 96, height: 7, borderRadius: 4, background: '#AFC440' }} /&gt;&#10;&#10;        &lt;Text&#10;            style={{&#10;                marginTop: 22,&#10;                fontSize: 22,&#10;                color: '#2A2333',&#10;                fontFamily: 'Verdana',&#10;                lineHeight: 1.5,&#10;                textAlign: 'center',&#10;            }}&#10;        &gt;&#10;            Coba tempel jadwal dari teks sekolah minggu ini, lalu periksa Laporannya.&#10;        &lt;/Text&gt;&#10;&#10;        &lt;Text&#10;            style={{&#10;                marginTop: 14,&#10;                fontSize: 19,&#10;                color: '#6B6478',&#10;                fontFamily: 'Verdana',&#10;                lineHeight: 1.5,&#10;                textAlign: 'center',&#10;            }}&#10;        &gt;&#10;            Ada yang tidak beres? Sampaikan kepada admin sekolah.&#10;        &lt;/Text&gt;&#10;&#10;        &lt;Box&#10;            style={{&#10;                marginTop: 26,&#10;                flexDirection: 'row',&#10;                alignItems: 'center',&#10;                gap: 12,&#10;                background: '#F3B26C',&#10;                borderRadius: 999,&#10;                paddingTop: 13,&#10;                paddingBottom: 13,&#10;                paddingLeft: 28,&#10;                paddingRight: 30,&#10;            }}&#10;        &gt;&#10;            &lt;svg width={22} height={22} viewBox=&quot;0 0 576 512&quot; xmlns=&quot;http://www.w3.org/2000/svg&quot;&gt;&lt;path fill=&quot;#51277C&quot; d=&quot;M316.9 18C311.6 7 300.4 0 288.1 0s-23.4 7-28.8 18L195 150.3 51.4 171.5c-12 1.8-22 10.2-25.7 21.7s-.7 24.2 7.9 32.7L137.8 329 113.2 474.7c-2 12 3 24.2 12.9 31.3s23 8 33.8 2.3l128.3-68.5 128.3 68.5c10.8 5.7 23.9 4.9 33.8-2.3s14.9-19.3 12.9-31.3L438.5 329 542.7 225.9c8.6-8.5 11.7-21.2 7.9-32.7s-13.7-19.9-25.7-21.7L381.2 150.3 316.9 18z&quot; /&gt;&lt;/svg&gt;&#10;            &lt;Text style={{ fontSize: 19, color: '#51277C', fontFamily: 'Trebuchet MS', fontWeight: 'bold' }}&gt;&#10;                Pizza Snack Play&#10;            &lt;/Text&gt;&#10;        &lt;/Box&gt;&#10;    &lt;/Box&gt;&#10;&lt;/Slide&gt;&#10;"/>
         <p:cNvGrpSpPr/>
         <p:nvPr/>
       </p:nvGrpSpPr>
@@ -7698,7 +8767,7 @@
       </p:grpSpPr>
       <p:sp>
         <p:nvSpPr>
-          <p:cNvPr id="163" name=""/>
+          <p:cNvPr id="197" name=""/>
           <p:cNvSpPr/>
           <p:nvPr/>
         </p:nvSpPr>
@@ -7717,15 +8786,12 @@
         </p:spPr>
         <p:txBody>
           <a:bodyPr/>
-          <a:p>
-            <a:pPr/>
-            <a:endParaRPr/>
-          </a:p>
-        </p:txBody>
-      </p:sp>
-      <p:sp>
-        <p:nvSpPr>
-          <p:cNvPr id="164" name=""/>
+          <a:p/>
+        </p:txBody>
+      </p:sp>
+      <p:sp>
+        <p:nvSpPr>
+          <p:cNvPr id="198" name=""/>
           <p:cNvSpPr/>
           <p:nvPr/>
         </p:nvSpPr>
@@ -7758,15 +8824,12 @@
         </p:spPr>
         <p:txBody>
           <a:bodyPr/>
-          <a:p>
-            <a:pPr/>
-            <a:endParaRPr/>
-          </a:p>
-        </p:txBody>
-      </p:sp>
-      <p:sp>
-        <p:nvSpPr>
-          <p:cNvPr id="165" name=""/>
+          <a:p/>
+        </p:txBody>
+      </p:sp>
+      <p:sp>
+        <p:nvSpPr>
+          <p:cNvPr id="199" name=""/>
           <p:cNvSpPr/>
           <p:nvPr/>
         </p:nvSpPr>
@@ -7825,15 +8888,12 @@
         </p:spPr>
         <p:txBody>
           <a:bodyPr/>
-          <a:p>
-            <a:pPr/>
-            <a:endParaRPr/>
-          </a:p>
+          <a:p/>
         </p:txBody>
       </p:sp>
       <p:pic>
         <p:nvPicPr>
-          <p:cNvPr id="166" name=""/>
+          <p:cNvPr id="200" name=""/>
           <p:cNvPicPr>
             <a:picLocks noChangeAspect="1"/>
           </p:cNvPicPr>
@@ -7859,7 +8919,7 @@
       </p:pic>
       <p:sp>
         <p:nvSpPr>
-          <p:cNvPr id="167" name="" descr="{&quot;isTemplate&quot;:true,&quot;type&quot;:&quot;text&quot;}"/>
+          <p:cNvPr id="201" name="" descr="{&quot;isTemplate&quot;:true,&quot;type&quot;:&quot;text&quot;}"/>
           <p:cNvSpPr txBox="1"/>
           <p:nvPr/>
         </p:nvSpPr>
@@ -7894,7 +8954,7 @@
       </p:sp>
       <p:sp>
         <p:nvSpPr>
-          <p:cNvPr id="168" name=""/>
+          <p:cNvPr id="202" name=""/>
           <p:cNvSpPr/>
           <p:nvPr/>
         </p:nvSpPr>
@@ -7915,15 +8975,12 @@
         </p:spPr>
         <p:txBody>
           <a:bodyPr/>
-          <a:p>
-            <a:pPr/>
-            <a:endParaRPr/>
-          </a:p>
-        </p:txBody>
-      </p:sp>
-      <p:sp>
-        <p:nvSpPr>
-          <p:cNvPr id="169" name="" descr="{&quot;isTemplate&quot;:true,&quot;type&quot;:&quot;text&quot;}"/>
+          <a:p/>
+        </p:txBody>
+      </p:sp>
+      <p:sp>
+        <p:nvSpPr>
+          <p:cNvPr id="203" name="" descr="{&quot;isTemplate&quot;:true,&quot;type&quot;:&quot;text&quot;}"/>
           <p:cNvSpPr txBox="1"/>
           <p:nvPr/>
         </p:nvSpPr>
@@ -7958,7 +9015,7 @@
       </p:sp>
       <p:sp>
         <p:nvSpPr>
-          <p:cNvPr id="170" name="" descr="{&quot;isTemplate&quot;:true,&quot;type&quot;:&quot;text&quot;}"/>
+          <p:cNvPr id="204" name="" descr="{&quot;isTemplate&quot;:true,&quot;type&quot;:&quot;text&quot;}"/>
           <p:cNvSpPr txBox="1"/>
           <p:nvPr/>
         </p:nvSpPr>
@@ -7993,7 +9050,7 @@
       </p:sp>
       <p:sp>
         <p:nvSpPr>
-          <p:cNvPr id="171" name=""/>
+          <p:cNvPr id="205" name=""/>
           <p:cNvSpPr/>
           <p:nvPr/>
         </p:nvSpPr>
@@ -8014,15 +9071,12 @@
         </p:spPr>
         <p:txBody>
           <a:bodyPr/>
-          <a:p>
-            <a:pPr/>
-            <a:endParaRPr/>
-          </a:p>
+          <a:p/>
         </p:txBody>
       </p:sp>
       <p:pic>
         <p:nvPicPr>
-          <p:cNvPr id="172" name=""/>
+          <p:cNvPr id="206" name=""/>
           <p:cNvPicPr>
             <a:picLocks noChangeAspect="1"/>
           </p:cNvPicPr>
@@ -8053,7 +9107,7 @@
       </p:pic>
       <p:sp>
         <p:nvSpPr>
-          <p:cNvPr id="173" name="" descr="{&quot;isTemplate&quot;:true,&quot;type&quot;:&quot;text&quot;}"/>
+          <p:cNvPr id="207" name="" descr="{&quot;isTemplate&quot;:true,&quot;type&quot;:&quot;text&quot;}"/>
           <p:cNvSpPr txBox="1"/>
           <p:nvPr/>
         </p:nvSpPr>
@@ -8096,7 +9150,7 @@
   <p:cSld>
     <p:spTree>
       <p:nvGrpSpPr>
-        <p:cNvPr id="174" name=""/>
+        <p:cNvPr id="208" name="" descr="&lt;Slide&#10;    style={{&#10;        width: '1280px',&#10;        height: '720px',&#10;        background: '#FAF7F2',&#10;        paddingTop: 20,&#10;        paddingBottom: 20,&#10;        paddingLeft: 64,&#10;        paddingRight: 64,&#10;    }}&#10;&gt;&#10;    {/* ── A · blok judul ── */}&#10;    &lt;Box style={{ height: 110, justifyContent: 'center' }}&gt;&#10;        &lt;Text&#10;            style={{&#10;                fontSize: 34,&#10;                fontWeight: 'bold',&#10;                color: '#51277C',&#10;                fontFamily: 'Trebuchet MS',&#10;                lineHeight: 1.3,&#10;            }}&#10;        &gt;&#10;            Isi panduan ini&#10;        &lt;/Text&gt;&#10;        &lt;Box style={{ marginTop: 10, width: 72, height: 6, borderRadius: 3, background: '#51277C' }} /&gt;&#10;    &lt;/Box&gt;&#10;&#10;    {/* ── B · area konten ── */}&#10;    &lt;Box style={{ height: 530, flexDirection: 'row', gap: 28 }}&gt;&#10;        &lt;Box&#10;            style={{&#10;                width: '32%',&#10;                height: '100%',&#10;                background: 'linear-gradient(135deg, #51277C 0%, #7A45A8 100%)',&#10;                borderRadius: 18,&#10;                padding: 28,&#10;                justifyContent: 'space-between',&#10;            }}&#10;        &gt;&#10;            &lt;Box&gt;&#10;                &lt;Text&#10;                    style={{&#10;                        fontSize: 96,&#10;                        fontWeight: 'bold',&#10;                        color: '#FFFFFF',&#10;                        fontFamily: 'Trebuchet MS',&#10;                        lineHeight: 1,&#10;                    }}&#10;                &gt;&#10;                    4&#10;                &lt;/Text&gt;&#10;                &lt;Text&#10;                    style={{&#10;                        marginTop: 6,&#10;                        fontSize: 24,&#10;                        fontWeight: 'bold',&#10;                        color: '#F3B26C',&#10;                        fontFamily: 'Trebuchet MS',&#10;                    }}&#10;                &gt;&#10;                    bagian&#10;                &lt;/Text&gt;&#10;            &lt;/Box&gt;&#10;            &lt;Text&#10;                style={{&#10;                    fontSize: 17,&#10;                    color: 'rgba(255,255,255,0.88)',&#10;                    fontFamily: 'Verdana',&#10;                    lineHeight: 1.5,&#10;                }}&#10;            &gt;&#10;                Bagian 3 dan 4 yang dipakai setiap bulan, menjelang jadwal baru.&#10;            &lt;/Text&gt;&#10;        &lt;/Box&gt;&#10;&#10;        &lt;Box style={{ width: '68%', height: '100%', justifyContent: 'space-between' }}&gt;&#10;            {[&#10;                {&#10;                    n: '01',&#10;                    t: 'Peran Anda',&#10;                    d: 'Tiga tugas korlas, sesuai urutan mengerjakannya.',&#10;                    p: '4',&#10;                },&#10;                {&#10;                    n: '02',&#10;                    t: 'Akun &amp; wewenang',&#10;                    d: 'Batas wewenang, dan cara mengurus akun sekaligus.',&#10;                    p: '6–7',&#10;                },&#10;                {&#10;                    n: '03',&#10;                    t: 'Menyusun jadwal',&#10;                    d: 'Isi menu, salin Sepekan, atau tempel teks sekolah.',&#10;                    p: '9–11',&#10;                },&#10;                {&#10;                    n: '04',&#10;                    t: 'Kunci, publikasi &amp; laporan',&#10;                    d: 'Kunci–terbit, aksi massal, pantauan, lalu rekap piket.',&#10;                    p: '13–17',&#10;                },&#10;            ].map((it, i) =&gt; (&#10;                &lt;Box&#10;                    key={i}&#10;                    style={{&#10;                        flexDirection: 'row',&#10;                        alignItems: 'center',&#10;                        gap: 20,&#10;                        height: 122,&#10;                        background: '#FFFFFF',&#10;                        borderRadius: 16,&#10;                        boxShadow: '0 4px 20px rgba(0,0,0,0.08)',&#10;                        paddingLeft: 24,&#10;                        paddingRight: 28,&#10;                        borderLeft: '8px solid #AFC440',&#10;                    }}&#10;                &gt;&#10;                    &lt;Box&#10;                        style={{&#10;                            width: 56,&#10;                            height: 56,&#10;                            borderRadius: 28,&#10;                            background: 'rgba(81,39,124,0.09)',&#10;                            justifyContent: 'center',&#10;                            alignItems: 'center',&#10;                        }}&#10;                    &gt;&#10;                        &lt;Text&#10;                            style={{&#10;                                fontSize: 24,&#10;                                fontWeight: 'bold',&#10;                                color: '#51277C',&#10;                                fontFamily: 'Trebuchet MS',&#10;                            }}&#10;                        &gt;&#10;                            {it.n}&#10;                        &lt;/Text&gt;&#10;                    &lt;/Box&gt;&#10;                    &lt;Box style={{ flex: 1 }}&gt;&#10;                        &lt;Text&#10;                            style={{&#10;                                fontSize: 25,&#10;                                fontWeight: 'bold',&#10;                                color: '#2A2333',&#10;                                fontFamily: 'Trebuchet MS',&#10;                                lineHeight: 1.3,&#10;                            }}&#10;                        &gt;&#10;                            {it.t}&#10;                        &lt;/Text&gt;&#10;                        &lt;Text&#10;                            style={{&#10;                                marginTop: 5,&#10;                                fontSize: 18,&#10;                                color: '#6B6478',&#10;                                fontFamily: 'Verdana',&#10;                                lineHeight: 1.45,&#10;                            }}&#10;                        &gt;&#10;                            {it.d}&#10;                        &lt;/Text&gt;&#10;                    &lt;/Box&gt;&#10;                    &lt;Text&#10;                        style={{&#10;                            fontSize: 17,&#10;                            color: '#51277C',&#10;                            fontFamily: 'Verdana',&#10;                            fontWeight: 'bold',&#10;                        }}&#10;                    &gt;&#10;                        {it.p}&#10;                    &lt;/Text&gt;&#10;                &lt;/Box&gt;&#10;            ))}&#10;        &lt;/Box&gt;&#10;    &lt;/Box&gt;&#10;&#10;    {/* ── C · bilah kaki ── */}&#10;    &lt;Box&#10;        style={{&#10;            height: 40,&#10;            flexDirection: 'row',&#10;            alignItems: 'center',&#10;            justifyContent: 'space-between',&#10;        }}&#10;    &gt;&#10;        &lt;Text style={{ fontSize: 14, color: '#6B6478', fontFamily: 'Verdana' }}&gt;&#10;            Pizza Snack Play · Panduan Korlas &amp;amp; Admin&#10;        &lt;/Text&gt;&#10;        &lt;Text style={{ fontSize: 14, color: '#6B6478', fontFamily: 'Verdana' }}&gt;02 / 18&lt;/Text&gt;&#10;    &lt;/Box&gt;&#10;&lt;/Slide&gt;&#10;"/>
         <p:cNvGrpSpPr/>
         <p:nvPr/>
       </p:nvGrpSpPr>
@@ -8110,7 +9164,7 @@
       </p:grpSpPr>
       <p:sp>
         <p:nvSpPr>
-          <p:cNvPr id="175" name=""/>
+          <p:cNvPr id="209" name=""/>
           <p:cNvSpPr/>
           <p:nvPr/>
         </p:nvSpPr>
@@ -8129,15 +9183,12 @@
         </p:spPr>
         <p:txBody>
           <a:bodyPr/>
-          <a:p>
-            <a:pPr/>
-            <a:endParaRPr/>
-          </a:p>
-        </p:txBody>
-      </p:sp>
-      <p:sp>
-        <p:nvSpPr>
-          <p:cNvPr id="176" name="" descr="{&quot;isTemplate&quot;:true,&quot;type&quot;:&quot;text&quot;}"/>
+          <a:p/>
+        </p:txBody>
+      </p:sp>
+      <p:sp>
+        <p:nvSpPr>
+          <p:cNvPr id="210" name="" descr="{&quot;isTemplate&quot;:true,&quot;type&quot;:&quot;text&quot;}"/>
           <p:cNvSpPr txBox="1"/>
           <p:nvPr/>
         </p:nvSpPr>
@@ -8172,7 +9223,7 @@
       </p:sp>
       <p:sp>
         <p:nvSpPr>
-          <p:cNvPr id="177" name=""/>
+          <p:cNvPr id="211" name=""/>
           <p:cNvSpPr/>
           <p:nvPr/>
         </p:nvSpPr>
@@ -8193,15 +9244,12 @@
         </p:spPr>
         <p:txBody>
           <a:bodyPr/>
-          <a:p>
-            <a:pPr/>
-            <a:endParaRPr/>
-          </a:p>
-        </p:txBody>
-      </p:sp>
-      <p:sp>
-        <p:nvSpPr>
-          <p:cNvPr id="178" name=""/>
+          <a:p/>
+        </p:txBody>
+      </p:sp>
+      <p:sp>
+        <p:nvSpPr>
+          <p:cNvPr id="212" name=""/>
           <p:cNvSpPr/>
           <p:nvPr/>
         </p:nvSpPr>
@@ -8230,15 +9278,12 @@
         </p:spPr>
         <p:txBody>
           <a:bodyPr/>
-          <a:p>
-            <a:pPr/>
-            <a:endParaRPr/>
-          </a:p>
-        </p:txBody>
-      </p:sp>
-      <p:sp>
-        <p:nvSpPr>
-          <p:cNvPr id="179" name="" descr="{&quot;isTemplate&quot;:true,&quot;type&quot;:&quot;text&quot;}"/>
+          <a:p/>
+        </p:txBody>
+      </p:sp>
+      <p:sp>
+        <p:nvSpPr>
+          <p:cNvPr id="213" name="" descr="{&quot;isTemplate&quot;:true,&quot;type&quot;:&quot;text&quot;}"/>
           <p:cNvSpPr txBox="1"/>
           <p:nvPr/>
         </p:nvSpPr>
@@ -8273,7 +9318,7 @@
       </p:sp>
       <p:sp>
         <p:nvSpPr>
-          <p:cNvPr id="180" name="" descr="{&quot;isTemplate&quot;:true,&quot;type&quot;:&quot;text&quot;}"/>
+          <p:cNvPr id="214" name="" descr="{&quot;isTemplate&quot;:true,&quot;type&quot;:&quot;text&quot;}"/>
           <p:cNvSpPr txBox="1"/>
           <p:nvPr/>
         </p:nvSpPr>
@@ -8308,7 +9353,7 @@
       </p:sp>
       <p:sp>
         <p:nvSpPr>
-          <p:cNvPr id="181" name="" descr="{&quot;isTemplate&quot;:true,&quot;type&quot;:&quot;text&quot;}"/>
+          <p:cNvPr id="215" name="" descr="{&quot;isTemplate&quot;:true,&quot;type&quot;:&quot;text&quot;}"/>
           <p:cNvSpPr txBox="1"/>
           <p:nvPr/>
         </p:nvSpPr>
@@ -8347,7 +9392,7 @@
       </p:sp>
       <p:sp>
         <p:nvSpPr>
-          <p:cNvPr id="182" name=""/>
+          <p:cNvPr id="216" name=""/>
           <p:cNvSpPr/>
           <p:nvPr/>
         </p:nvSpPr>
@@ -8375,15 +9420,12 @@
         </p:spPr>
         <p:txBody>
           <a:bodyPr/>
-          <a:p>
-            <a:pPr/>
-            <a:endParaRPr/>
-          </a:p>
-        </p:txBody>
-      </p:sp>
-      <p:sp>
-        <p:nvSpPr>
-          <p:cNvPr id="183" name=""/>
+          <a:p/>
+        </p:txBody>
+      </p:sp>
+      <p:sp>
+        <p:nvSpPr>
+          <p:cNvPr id="217" name=""/>
           <p:cNvSpPr/>
           <p:nvPr/>
         </p:nvSpPr>
@@ -8435,15 +9477,12 @@
         </p:spPr>
         <p:txBody>
           <a:bodyPr/>
-          <a:p>
-            <a:pPr/>
-            <a:endParaRPr/>
-          </a:p>
-        </p:txBody>
-      </p:sp>
-      <p:sp>
-        <p:nvSpPr>
-          <p:cNvPr id="184" name=""/>
+          <a:p/>
+        </p:txBody>
+      </p:sp>
+      <p:sp>
+        <p:nvSpPr>
+          <p:cNvPr id="218" name=""/>
           <p:cNvSpPr/>
           <p:nvPr/>
         </p:nvSpPr>
@@ -8466,15 +9505,12 @@
         </p:spPr>
         <p:txBody>
           <a:bodyPr/>
-          <a:p>
-            <a:pPr/>
-            <a:endParaRPr/>
-          </a:p>
-        </p:txBody>
-      </p:sp>
-      <p:sp>
-        <p:nvSpPr>
-          <p:cNvPr id="185" name="" descr="{&quot;isTemplate&quot;:true,&quot;type&quot;:&quot;text&quot;}"/>
+          <a:p/>
+        </p:txBody>
+      </p:sp>
+      <p:sp>
+        <p:nvSpPr>
+          <p:cNvPr id="219" name="" descr="{&quot;isTemplate&quot;:true,&quot;type&quot;:&quot;text&quot;}"/>
           <p:cNvSpPr txBox="1"/>
           <p:nvPr/>
         </p:nvSpPr>
@@ -8509,7 +9545,7 @@
       </p:sp>
       <p:sp>
         <p:nvSpPr>
-          <p:cNvPr id="186" name="" descr="{&quot;isTemplate&quot;:true,&quot;type&quot;:&quot;text&quot;}"/>
+          <p:cNvPr id="220" name="" descr="{&quot;isTemplate&quot;:true,&quot;type&quot;:&quot;text&quot;}"/>
           <p:cNvSpPr txBox="1"/>
           <p:nvPr/>
         </p:nvSpPr>
@@ -8544,7 +9580,7 @@
       </p:sp>
       <p:sp>
         <p:nvSpPr>
-          <p:cNvPr id="187" name="" descr="{&quot;isTemplate&quot;:true,&quot;type&quot;:&quot;text&quot;}"/>
+          <p:cNvPr id="221" name="" descr="{&quot;isTemplate&quot;:true,&quot;type&quot;:&quot;text&quot;}"/>
           <p:cNvSpPr txBox="1"/>
           <p:nvPr/>
         </p:nvSpPr>
@@ -8579,7 +9615,7 @@
       </p:sp>
       <p:sp>
         <p:nvSpPr>
-          <p:cNvPr id="188" name="" descr="{&quot;isTemplate&quot;:true,&quot;type&quot;:&quot;text&quot;}"/>
+          <p:cNvPr id="222" name="" descr="{&quot;isTemplate&quot;:true,&quot;type&quot;:&quot;text&quot;}"/>
           <p:cNvSpPr txBox="1"/>
           <p:nvPr/>
         </p:nvSpPr>
@@ -8614,7 +9650,7 @@
       </p:sp>
       <p:sp>
         <p:nvSpPr>
-          <p:cNvPr id="189" name=""/>
+          <p:cNvPr id="223" name=""/>
           <p:cNvSpPr/>
           <p:nvPr/>
         </p:nvSpPr>
@@ -8642,15 +9678,12 @@
         </p:spPr>
         <p:txBody>
           <a:bodyPr/>
-          <a:p>
-            <a:pPr/>
-            <a:endParaRPr/>
-          </a:p>
-        </p:txBody>
-      </p:sp>
-      <p:sp>
-        <p:nvSpPr>
-          <p:cNvPr id="190" name=""/>
+          <a:p/>
+        </p:txBody>
+      </p:sp>
+      <p:sp>
+        <p:nvSpPr>
+          <p:cNvPr id="224" name=""/>
           <p:cNvSpPr/>
           <p:nvPr/>
         </p:nvSpPr>
@@ -8702,15 +9735,12 @@
         </p:spPr>
         <p:txBody>
           <a:bodyPr/>
-          <a:p>
-            <a:pPr/>
-            <a:endParaRPr/>
-          </a:p>
-        </p:txBody>
-      </p:sp>
-      <p:sp>
-        <p:nvSpPr>
-          <p:cNvPr id="191" name=""/>
+          <a:p/>
+        </p:txBody>
+      </p:sp>
+      <p:sp>
+        <p:nvSpPr>
+          <p:cNvPr id="225" name=""/>
           <p:cNvSpPr/>
           <p:nvPr/>
         </p:nvSpPr>
@@ -8733,15 +9763,12 @@
         </p:spPr>
         <p:txBody>
           <a:bodyPr/>
-          <a:p>
-            <a:pPr/>
-            <a:endParaRPr/>
-          </a:p>
-        </p:txBody>
-      </p:sp>
-      <p:sp>
-        <p:nvSpPr>
-          <p:cNvPr id="192" name="" descr="{&quot;isTemplate&quot;:true,&quot;type&quot;:&quot;text&quot;}"/>
+          <a:p/>
+        </p:txBody>
+      </p:sp>
+      <p:sp>
+        <p:nvSpPr>
+          <p:cNvPr id="226" name="" descr="{&quot;isTemplate&quot;:true,&quot;type&quot;:&quot;text&quot;}"/>
           <p:cNvSpPr txBox="1"/>
           <p:nvPr/>
         </p:nvSpPr>
@@ -8776,7 +9803,7 @@
       </p:sp>
       <p:sp>
         <p:nvSpPr>
-          <p:cNvPr id="193" name="" descr="{&quot;isTemplate&quot;:true,&quot;type&quot;:&quot;text&quot;}"/>
+          <p:cNvPr id="227" name="" descr="{&quot;isTemplate&quot;:true,&quot;type&quot;:&quot;text&quot;}"/>
           <p:cNvSpPr txBox="1"/>
           <p:nvPr/>
         </p:nvSpPr>
@@ -8811,7 +9838,7 @@
       </p:sp>
       <p:sp>
         <p:nvSpPr>
-          <p:cNvPr id="194" name="" descr="{&quot;isTemplate&quot;:true,&quot;type&quot;:&quot;text&quot;}"/>
+          <p:cNvPr id="228" name="" descr="{&quot;isTemplate&quot;:true,&quot;type&quot;:&quot;text&quot;}"/>
           <p:cNvSpPr txBox="1"/>
           <p:nvPr/>
         </p:nvSpPr>
@@ -8846,7 +9873,7 @@
       </p:sp>
       <p:sp>
         <p:nvSpPr>
-          <p:cNvPr id="195" name="" descr="{&quot;isTemplate&quot;:true,&quot;type&quot;:&quot;text&quot;}"/>
+          <p:cNvPr id="229" name="" descr="{&quot;isTemplate&quot;:true,&quot;type&quot;:&quot;text&quot;}"/>
           <p:cNvSpPr txBox="1"/>
           <p:nvPr/>
         </p:nvSpPr>
@@ -8881,7 +9908,7 @@
       </p:sp>
       <p:sp>
         <p:nvSpPr>
-          <p:cNvPr id="196" name=""/>
+          <p:cNvPr id="230" name=""/>
           <p:cNvSpPr/>
           <p:nvPr/>
         </p:nvSpPr>
@@ -8909,15 +9936,12 @@
         </p:spPr>
         <p:txBody>
           <a:bodyPr/>
-          <a:p>
-            <a:pPr/>
-            <a:endParaRPr/>
-          </a:p>
-        </p:txBody>
-      </p:sp>
-      <p:sp>
-        <p:nvSpPr>
-          <p:cNvPr id="197" name=""/>
+          <a:p/>
+        </p:txBody>
+      </p:sp>
+      <p:sp>
+        <p:nvSpPr>
+          <p:cNvPr id="231" name=""/>
           <p:cNvSpPr/>
           <p:nvPr/>
         </p:nvSpPr>
@@ -8969,15 +9993,12 @@
         </p:spPr>
         <p:txBody>
           <a:bodyPr/>
-          <a:p>
-            <a:pPr/>
-            <a:endParaRPr/>
-          </a:p>
-        </p:txBody>
-      </p:sp>
-      <p:sp>
-        <p:nvSpPr>
-          <p:cNvPr id="198" name=""/>
+          <a:p/>
+        </p:txBody>
+      </p:sp>
+      <p:sp>
+        <p:nvSpPr>
+          <p:cNvPr id="232" name=""/>
           <p:cNvSpPr/>
           <p:nvPr/>
         </p:nvSpPr>
@@ -9000,15 +10021,12 @@
         </p:spPr>
         <p:txBody>
           <a:bodyPr/>
-          <a:p>
-            <a:pPr/>
-            <a:endParaRPr/>
-          </a:p>
-        </p:txBody>
-      </p:sp>
-      <p:sp>
-        <p:nvSpPr>
-          <p:cNvPr id="199" name="" descr="{&quot;isTemplate&quot;:true,&quot;type&quot;:&quot;text&quot;}"/>
+          <a:p/>
+        </p:txBody>
+      </p:sp>
+      <p:sp>
+        <p:nvSpPr>
+          <p:cNvPr id="233" name="" descr="{&quot;isTemplate&quot;:true,&quot;type&quot;:&quot;text&quot;}"/>
           <p:cNvSpPr txBox="1"/>
           <p:nvPr/>
         </p:nvSpPr>
@@ -9043,7 +10061,7 @@
       </p:sp>
       <p:sp>
         <p:nvSpPr>
-          <p:cNvPr id="200" name="" descr="{&quot;isTemplate&quot;:true,&quot;type&quot;:&quot;text&quot;}"/>
+          <p:cNvPr id="234" name="" descr="{&quot;isTemplate&quot;:true,&quot;type&quot;:&quot;text&quot;}"/>
           <p:cNvSpPr txBox="1"/>
           <p:nvPr/>
         </p:nvSpPr>
@@ -9078,7 +10096,7 @@
       </p:sp>
       <p:sp>
         <p:nvSpPr>
-          <p:cNvPr id="201" name="" descr="{&quot;isTemplate&quot;:true,&quot;type&quot;:&quot;text&quot;}"/>
+          <p:cNvPr id="235" name="" descr="{&quot;isTemplate&quot;:true,&quot;type&quot;:&quot;text&quot;}"/>
           <p:cNvSpPr txBox="1"/>
           <p:nvPr/>
         </p:nvSpPr>
@@ -9113,7 +10131,7 @@
       </p:sp>
       <p:sp>
         <p:nvSpPr>
-          <p:cNvPr id="202" name="" descr="{&quot;isTemplate&quot;:true,&quot;type&quot;:&quot;text&quot;}"/>
+          <p:cNvPr id="236" name="" descr="{&quot;isTemplate&quot;:true,&quot;type&quot;:&quot;text&quot;}"/>
           <p:cNvSpPr txBox="1"/>
           <p:nvPr/>
         </p:nvSpPr>
@@ -9148,7 +10166,7 @@
       </p:sp>
       <p:sp>
         <p:nvSpPr>
-          <p:cNvPr id="203" name=""/>
+          <p:cNvPr id="237" name=""/>
           <p:cNvSpPr/>
           <p:nvPr/>
         </p:nvSpPr>
@@ -9176,15 +10194,12 @@
         </p:spPr>
         <p:txBody>
           <a:bodyPr/>
-          <a:p>
-            <a:pPr/>
-            <a:endParaRPr/>
-          </a:p>
-        </p:txBody>
-      </p:sp>
-      <p:sp>
-        <p:nvSpPr>
-          <p:cNvPr id="204" name=""/>
+          <a:p/>
+        </p:txBody>
+      </p:sp>
+      <p:sp>
+        <p:nvSpPr>
+          <p:cNvPr id="238" name=""/>
           <p:cNvSpPr/>
           <p:nvPr/>
         </p:nvSpPr>
@@ -9236,15 +10251,12 @@
         </p:spPr>
         <p:txBody>
           <a:bodyPr/>
-          <a:p>
-            <a:pPr/>
-            <a:endParaRPr/>
-          </a:p>
-        </p:txBody>
-      </p:sp>
-      <p:sp>
-        <p:nvSpPr>
-          <p:cNvPr id="205" name=""/>
+          <a:p/>
+        </p:txBody>
+      </p:sp>
+      <p:sp>
+        <p:nvSpPr>
+          <p:cNvPr id="239" name=""/>
           <p:cNvSpPr/>
           <p:nvPr/>
         </p:nvSpPr>
@@ -9267,15 +10279,12 @@
         </p:spPr>
         <p:txBody>
           <a:bodyPr/>
-          <a:p>
-            <a:pPr/>
-            <a:endParaRPr/>
-          </a:p>
-        </p:txBody>
-      </p:sp>
-      <p:sp>
-        <p:nvSpPr>
-          <p:cNvPr id="206" name="" descr="{&quot;isTemplate&quot;:true,&quot;type&quot;:&quot;text&quot;}"/>
+          <a:p/>
+        </p:txBody>
+      </p:sp>
+      <p:sp>
+        <p:nvSpPr>
+          <p:cNvPr id="240" name="" descr="{&quot;isTemplate&quot;:true,&quot;type&quot;:&quot;text&quot;}"/>
           <p:cNvSpPr txBox="1"/>
           <p:nvPr/>
         </p:nvSpPr>
@@ -9310,7 +10319,7 @@
       </p:sp>
       <p:sp>
         <p:nvSpPr>
-          <p:cNvPr id="207" name="" descr="{&quot;isTemplate&quot;:true,&quot;type&quot;:&quot;text&quot;}"/>
+          <p:cNvPr id="241" name="" descr="{&quot;isTemplate&quot;:true,&quot;type&quot;:&quot;text&quot;}"/>
           <p:cNvSpPr txBox="1"/>
           <p:nvPr/>
         </p:nvSpPr>
@@ -9345,21 +10354,19 @@
       </p:sp>
       <p:sp>
         <p:nvSpPr>
-          <p:cNvPr id="208" name="" descr="{&quot;isTemplate&quot;:true,&quot;type&quot;:&quot;text&quot;}"/>
+          <p:cNvPr id="242" name="" descr="{&quot;isTemplate&quot;:true,&quot;type&quot;:&quot;text&quot;}"/>
           <p:cNvSpPr txBox="1"/>
           <p:nvPr/>
         </p:nvSpPr>
         <p:spPr>
           <a:xfrm rot="0" flipH="0" flipV="0">
             <a:off x="5334000" y="5762625"/>
-            <a:ext cx="5210175" cy="600075"/>
-          </a:xfrm>
-          <a:prstGeom prst="rect"/>
-        </p:spPr>
-        <p:txBody>
-          <a:bodyPr wrap="square" lIns="0" tIns="0" rIns="0" bIns="0">
-            <a:normAutofit/>
-          </a:bodyPr>
+            <a:ext cx="5210175" cy="304800"/>
+          </a:xfrm>
+          <a:prstGeom prst="rect"/>
+        </p:spPr>
+        <p:txBody>
+          <a:bodyPr wrap="none" lIns="0" tIns="0" rIns="0" bIns="0"/>
           <a:p>
             <a:pPr>
               <a:lnSpc>
@@ -9374,15 +10381,15 @@
                 <a:latin typeface="Verdana"/>
                 <a:ea typeface="Verdana"/>
               </a:rPr>
-              <a:t>Urutan yang tidak bisa dibalik, aksi massal, lalu rekap piket.</a:t>
-            </a:r>
-            <a:endParaRPr/>
-          </a:p>
-        </p:txBody>
-      </p:sp>
-      <p:sp>
-        <p:nvSpPr>
-          <p:cNvPr id="209" name="" descr="{&quot;isTemplate&quot;:true,&quot;type&quot;:&quot;text&quot;}"/>
+              <a:t>Kunci–terbit, aksi massal, pantauan, lalu rekap piket.</a:t>
+            </a:r>
+            <a:endParaRPr/>
+          </a:p>
+        </p:txBody>
+      </p:sp>
+      <p:sp>
+        <p:nvSpPr>
+          <p:cNvPr id="243" name="" descr="{&quot;isTemplate&quot;:true,&quot;type&quot;:&quot;text&quot;}"/>
           <p:cNvSpPr txBox="1"/>
           <p:nvPr/>
         </p:nvSpPr>
@@ -9409,15 +10416,15 @@
                 <a:latin typeface="Verdana"/>
                 <a:ea typeface="Verdana"/>
               </a:rPr>
-              <a:t>13–16</a:t>
-            </a:r>
-            <a:endParaRPr/>
-          </a:p>
-        </p:txBody>
-      </p:sp>
-      <p:sp>
-        <p:nvSpPr>
-          <p:cNvPr id="210" name="" descr="{&quot;isTemplate&quot;:true,&quot;type&quot;:&quot;text&quot;}"/>
+              <a:t>13–17</a:t>
+            </a:r>
+            <a:endParaRPr/>
+          </a:p>
+        </p:txBody>
+      </p:sp>
+      <p:sp>
+        <p:nvSpPr>
+          <p:cNvPr id="244" name="" descr="{&quot;isTemplate&quot;:true,&quot;type&quot;:&quot;text&quot;}"/>
           <p:cNvSpPr txBox="1"/>
           <p:nvPr/>
         </p:nvSpPr>
@@ -9452,7 +10459,7 @@
       </p:sp>
       <p:sp>
         <p:nvSpPr>
-          <p:cNvPr id="211" name="" descr="{&quot;isTemplate&quot;:true,&quot;type&quot;:&quot;text&quot;}"/>
+          <p:cNvPr id="245" name="" descr="{&quot;isTemplate&quot;:true,&quot;type&quot;:&quot;text&quot;}"/>
           <p:cNvSpPr txBox="1"/>
           <p:nvPr/>
         </p:nvSpPr>
@@ -9479,7 +10486,7 @@
                 <a:latin typeface="Verdana"/>
                 <a:ea typeface="Verdana"/>
               </a:rPr>
-              <a:t>02 / 17</a:t>
+              <a:t>02 / 18</a:t>
             </a:r>
             <a:endParaRPr/>
           </a:p>
@@ -9495,7 +10502,7 @@
   <p:cSld>
     <p:spTree>
       <p:nvGrpSpPr>
-        <p:cNvPr id="212" name=""/>
+        <p:cNvPr id="246" name=""/>
         <p:cNvGrpSpPr/>
         <p:nvPr/>
       </p:nvGrpSpPr>
@@ -9509,7 +10516,7 @@
       </p:grpSpPr>
       <p:sp>
         <p:nvSpPr>
-          <p:cNvPr id="213" name=""/>
+          <p:cNvPr id="247" name=""/>
           <p:cNvSpPr/>
           <p:nvPr/>
         </p:nvSpPr>
@@ -9544,7 +10551,7 @@
       </p:sp>
       <p:sp>
         <p:nvSpPr>
-          <p:cNvPr id="214" name=""/>
+          <p:cNvPr id="248" name=""/>
           <p:cNvSpPr/>
           <p:nvPr/>
         </p:nvSpPr>
@@ -9943,7 +10950,7 @@
       </p:sp>
       <p:pic>
         <p:nvPicPr>
-          <p:cNvPr id="215" name=""/>
+          <p:cNvPr id="249" name=""/>
           <p:cNvPicPr>
             <a:picLocks noChangeAspect="1"/>
           </p:cNvPicPr>
@@ -9975,7 +10982,7 @@
       </p:pic>
       <p:sp>
         <p:nvSpPr>
-          <p:cNvPr id="216" name="" descr="{&quot;isTemplate&quot;:true,&quot;type&quot;:&quot;text&quot;}"/>
+          <p:cNvPr id="250" name="" descr="{&quot;isTemplate&quot;:true,&quot;type&quot;:&quot;text&quot;}"/>
           <p:cNvSpPr txBox="1"/>
           <p:nvPr/>
         </p:nvSpPr>
@@ -10010,7 +11017,7 @@
       </p:sp>
       <p:sp>
         <p:nvSpPr>
-          <p:cNvPr id="217" name=""/>
+          <p:cNvPr id="251" name=""/>
           <p:cNvSpPr/>
           <p:nvPr/>
         </p:nvSpPr>
@@ -10039,7 +11046,7 @@
       </p:sp>
       <p:sp>
         <p:nvSpPr>
-          <p:cNvPr id="218" name="" descr="{&quot;isTemplate&quot;:true,&quot;type&quot;:&quot;text&quot;}"/>
+          <p:cNvPr id="252" name="" descr="{&quot;isTemplate&quot;:true,&quot;type&quot;:&quot;text&quot;}"/>
           <p:cNvSpPr txBox="1"/>
           <p:nvPr/>
         </p:nvSpPr>
@@ -10076,7 +11083,7 @@
       </p:sp>
       <p:sp>
         <p:nvSpPr>
-          <p:cNvPr id="219" name="" descr="{&quot;isTemplate&quot;:true,&quot;type&quot;:&quot;text&quot;}"/>
+          <p:cNvPr id="253" name="" descr="{&quot;isTemplate&quot;:true,&quot;type&quot;:&quot;text&quot;}"/>
           <p:cNvSpPr txBox="1"/>
           <p:nvPr/>
         </p:nvSpPr>
@@ -10129,7 +11136,7 @@
       </p:sp>
       <p:sp>
         <p:nvSpPr>
-          <p:cNvPr id="220" name="" descr="{&quot;isTemplate&quot;:true,&quot;type&quot;:&quot;text&quot;}"/>
+          <p:cNvPr id="254" name="" descr="{&quot;isTemplate&quot;:true,&quot;type&quot;:&quot;text&quot;}"/>
           <p:cNvSpPr txBox="1"/>
           <p:nvPr/>
         </p:nvSpPr>
@@ -10176,7 +11183,7 @@
   <p:cSld>
     <p:spTree>
       <p:nvGrpSpPr>
-        <p:cNvPr id="221" name="" descr="&lt;Slide&#10;    style={{&#10;        width: '1280px',&#10;        height: '720px',&#10;        background: '#FAF7F2',&#10;        paddingTop: 20,&#10;        paddingBottom: 20,&#10;        paddingLeft: 64,&#10;        paddingRight: 64,&#10;    }}&#10;&gt;&#10;    {/* ── A · blok judul ── */}&#10;    &lt;Box style={{ height: 110, justifyContent: 'center' }}&gt;&#10;        &lt;Text&#10;            style={{&#10;                fontSize: 34,&#10;                fontWeight: 'bold',&#10;                color: '#51277C',&#10;                fontFamily: 'Trebuchet MS',&#10;                lineHeight: 1.3,&#10;            }}&#10;        &gt;&#10;            Tiga tugas Anda&#10;        &lt;/Text&gt;&#10;        &lt;Box style={{ marginTop: 10, width: 72, height: 6, borderRadius: 3, background: '#51277C' }} /&gt;&#10;    &lt;/Box&gt;&#10;&#10;    {/* ── B · area konten ── */}&#10;    &lt;Box style={{ height: 530, flexDirection: 'row', gap: 30 }}&gt;&#10;        {/* kiri 55% · alur tiga langkah */}&#10;        &lt;Box&#10;            style={{&#10;                width: '55%',&#10;                height: '100%',&#10;                background: 'rgba(81,39,124,0.06)',&#10;                borderRadius: 20,&#10;                justifyContent: 'center',&#10;                alignItems: 'center',&#10;            }}&#10;        &gt;&#10;            &lt;svg width={520} height={430} viewBox='0 0 520 430'&gt;&#10;                {/* langkah 1 */}&#10;                &lt;rect x='14' y='8' width='492' height='112' rx='16' fill='#FFFFFF' stroke='#E6DFD2' strokeWidth='2' /&gt;&#10;                &lt;circle cx='62' cy='64' r='28' fill='#51277C' /&gt;&#10;                &lt;text x='62' y='74' fontFamily='Trebuchet MS' fontSize='28' fontWeight='bold' fill='#FFFFFF' textAnchor='middle'&gt;&#10;                    1&#10;                &lt;/text&gt;&#10;                &lt;text x='112' y='54' fontFamily='Trebuchet MS' fontSize='24' fontWeight='bold' fill='#51277C'&gt;&#10;                    Susun&#10;                &lt;/text&gt;&#10;                &lt;text x='112' y='86' fontFamily='Verdana' fontSize='16' fill='#6B6478'&gt;&#10;                    Menu untuk Senin sampai Jumat&#10;                &lt;/text&gt;&#10;                {/* panah */}&#10;                &lt;path d='M260 126v30' stroke='#AFC440' strokeWidth='5' strokeLinecap='round' /&gt;&#10;                &lt;path d='M250 150l10 12 10-12' fill='none' stroke='#AFC440' strokeWidth='5' strokeLinecap='round' /&gt;&#10;&#10;                {/* langkah 2 */}&#10;                &lt;rect x='14' y='164' width='492' height='112' rx='16' fill='#FFFFFF' stroke='#E6DFD2' strokeWidth='2' /&gt;&#10;                &lt;circle cx='62' cy='220' r='28' fill='#51277C' /&gt;&#10;                &lt;text x='62' y='230' fontFamily='Trebuchet MS' fontSize='28' fontWeight='bold' fill='#FFFFFF' textAnchor='middle'&gt;&#10;                    2&#10;                &lt;/text&gt;&#10;                &lt;text x='112' y='210' fontFamily='Trebuchet MS' fontSize='24' fontWeight='bold' fill='#51277C'&gt;&#10;                    Tentukan petugas&#10;                &lt;/text&gt;&#10;                &lt;text x='112' y='242' fontFamily='Verdana' fontSize='16' fill='#6B6478'&gt;&#10;                    Atau biarkan kosong supaya direbut orang tua&#10;                &lt;/text&gt;&#10;                {/* panah */}&#10;                &lt;path d='M260 282v30' stroke='#AFC440' strokeWidth='5' strokeLinecap='round' /&gt;&#10;                &lt;path d='M250 306l10 12 10-12' fill='none' stroke='#AFC440' strokeWidth='5' strokeLinecap='round' /&gt;&#10;&#10;                {/* langkah 3 */}&#10;                &lt;rect x='14' y='320' width='492' height='104' rx='16' fill='#51277C' /&gt;&#10;                &lt;circle cx='62' cy='372' r='28' fill='#F3B26C' /&gt;&#10;                &lt;text x='62' y='382' fontFamily='Trebuchet MS' fontSize='28' fontWeight='bold' fill='#51277C' textAnchor='middle'&gt;&#10;                    3&#10;                &lt;/text&gt;&#10;                &lt;text x='112' y='362' fontFamily='Trebuchet MS' fontSize='24' fontWeight='bold' fill='#FFFFFF'&gt;&#10;                    Umumkan&#10;                &lt;/text&gt;&#10;                &lt;text x='112' y='394' fontFamily='Verdana' fontSize='16' fill='#EFEAE1'&gt;&#10;                    Kunci lebih dulu, baru terbit ke orang tua&#10;                &lt;/text&gt;&#10;            &lt;/svg&gt;&#10;        &lt;/Box&gt;&#10;&#10;        {/* kanan 45% · tiga keterangan */}&#10;        &lt;Box style={{ width: '45%', height: '100%', justifyContent: 'space-between' }}&gt;&#10;            {[&#10;                {&#10;                    t: 'Susun — isi menunya',&#10;                    d: 'Satu bulan lebih baik dikerjakan sekaligus. Tiga cara: ketik per hari, salin dari minggu lain, atau tempel teks dari sekolah.',&#10;                    g: 'Bagian 3',&#10;                },&#10;                {&#10;                    t: 'Petugas — siapa ambil snack',&#10;                    d: 'Pilih dari daftar siswa kelas Anda; nama orang tuanya terisi sendiri. Dikosongkan pun boleh.',&#10;                    g: 'Bisa dikosongkan',&#10;                },&#10;                {&#10;                    t: 'Umumkan — baru kelihatan',&#10;                    d: 'Sebelum diumumkan, orang tua tidak melihat apa pun. Jadi jangan khawatir kalau belum muncul.',&#10;                    g: 'Bagian 4',&#10;                },&#10;            ].map((it, i) =&gt; (&#10;                &lt;Box&#10;                    key={i}&#10;                    style={{&#10;                        height: 166,&#10;                        background: '#FFFFFF',&#10;                        borderRadius: 16,&#10;                        boxShadow: '0 4px 20px rgba(0,0,0,0.08)',&#10;                        padding: 22,&#10;                        borderLeft: i === 2 ? '8px solid #F3B26C' : '8px solid #AFC440',&#10;                    }}&#10;                &gt;&#10;                    &lt;Text&#10;                        style={{&#10;                            fontSize: 24,&#10;                            fontWeight: 'bold',&#10;                            color: '#51277C',&#10;                            fontFamily: 'Trebuchet MS',&#10;                            lineHeight: 1.3,&#10;                        }}&#10;                    &gt;&#10;                        {it.t}&#10;                    &lt;/Text&gt;&#10;                    &lt;Text&#10;                        style={{&#10;                            marginTop: 10,&#10;                            fontSize: 17,&#10;                            color: '#6B6478',&#10;                            fontFamily: 'Verdana',&#10;                            lineHeight: 1.5,&#10;                        }}&#10;                    &gt;&#10;                        {it.d}&#10;                    &lt;/Text&gt;&#10;                    &lt;Box style={{ marginTop: 'auto' }}&gt;&#10;                        &lt;Text&#10;                            style={{&#10;                                fontSize: 16,&#10;                                color: '#51277C',&#10;                                fontFamily: 'Verdana',&#10;                                fontWeight: 'bold',&#10;                            }}&#10;                        &gt;&#10;                            {it.g}&#10;                        &lt;/Text&gt;&#10;                    &lt;/Box&gt;&#10;                &lt;/Box&gt;&#10;            ))}&#10;        &lt;/Box&gt;&#10;    &lt;/Box&gt;&#10;&#10;    {/* ── C · bilah kaki ── */}&#10;    &lt;Box&#10;        style={{&#10;            height: 40,&#10;            flexDirection: 'row',&#10;            alignItems: 'center',&#10;            justifyContent: 'space-between',&#10;        }}&#10;    &gt;&#10;        &lt;Text style={{ fontSize: 14, color: '#6B6478', fontFamily: 'Verdana' }}&gt;&#10;            Pizza Snack Play · Panduan Korlas &amp;amp; Admin&#10;        &lt;/Text&gt;&#10;        &lt;Text style={{ fontSize: 14, color: '#6B6478', fontFamily: 'Verdana' }}&gt;04 / 17&lt;/Text&gt;&#10;    &lt;/Box&gt;&#10;&lt;/Slide&gt;&#10;"/>
+        <p:cNvPr id="255" name="" descr="&lt;Slide&#10;    style={{&#10;        width: '1280px',&#10;        height: '720px',&#10;        background: '#FAF7F2',&#10;        paddingTop: 20,&#10;        paddingBottom: 20,&#10;        paddingLeft: 64,&#10;        paddingRight: 64,&#10;    }}&#10;&gt;&#10;    {/* ── A · blok judul ── */}&#10;    &lt;Box style={{ height: 110, justifyContent: 'center' }}&gt;&#10;        &lt;Text&#10;            style={{&#10;                fontSize: 34,&#10;                fontWeight: 'bold',&#10;                color: '#51277C',&#10;                fontFamily: 'Trebuchet MS',&#10;                lineHeight: 1.3,&#10;            }}&#10;        &gt;&#10;            Tiga tugas Anda&#10;        &lt;/Text&gt;&#10;        &lt;Box style={{ marginTop: 10, width: 72, height: 6, borderRadius: 3, background: '#51277C' }} /&gt;&#10;    &lt;/Box&gt;&#10;&#10;    {/* ── B · area konten ── */}&#10;    &lt;Box style={{ height: 530, flexDirection: 'row', gap: 30 }}&gt;&#10;        {/* kiri 55% · alur tiga langkah */}&#10;        &lt;Box&#10;            style={{&#10;                width: '55%',&#10;                height: '100%',&#10;                background: 'rgba(81,39,124,0.06)',&#10;                borderRadius: 20,&#10;                justifyContent: 'center',&#10;                alignItems: 'center',&#10;            }}&#10;        &gt;&#10;            &lt;svg width={520} height={430} viewBox='0 0 520 430'&gt;&#10;                {/* langkah 1 */}&#10;                &lt;rect x='14' y='8' width='492' height='112' rx='16' fill='#FFFFFF' stroke='#E6DFD2' strokeWidth='2' /&gt;&#10;                &lt;circle cx='62' cy='64' r='28' fill='#51277C' /&gt;&#10;                &lt;text x='62' y='74' fontFamily='Trebuchet MS' fontSize='28' fontWeight='bold' fill='#FFFFFF' textAnchor='middle'&gt;&#10;                    1&#10;                &lt;/text&gt;&#10;                &lt;text x='112' y='54' fontFamily='Trebuchet MS' fontSize='24' fontWeight='bold' fill='#51277C'&gt;&#10;                    Susun&#10;                &lt;/text&gt;&#10;                &lt;text x='112' y='86' fontFamily='Verdana' fontSize='16' fill='#6B6478'&gt;&#10;                    Menu untuk Senin sampai Jumat&#10;                &lt;/text&gt;&#10;                {/* panah */}&#10;                &lt;path d='M260 126v30' stroke='#AFC440' strokeWidth='5' strokeLinecap='round' /&gt;&#10;                &lt;path d='M250 150l10 12 10-12' fill='none' stroke='#AFC440' strokeWidth='5' strokeLinecap='round' /&gt;&#10;&#10;                {/* langkah 2 */}&#10;                &lt;rect x='14' y='164' width='492' height='112' rx='16' fill='#FFFFFF' stroke='#E6DFD2' strokeWidth='2' /&gt;&#10;                &lt;circle cx='62' cy='220' r='28' fill='#51277C' /&gt;&#10;                &lt;text x='62' y='230' fontFamily='Trebuchet MS' fontSize='28' fontWeight='bold' fill='#FFFFFF' textAnchor='middle'&gt;&#10;                    2&#10;                &lt;/text&gt;&#10;                &lt;text x='112' y='210' fontFamily='Trebuchet MS' fontSize='24' fontWeight='bold' fill='#51277C'&gt;&#10;                    Tentukan petugas&#10;                &lt;/text&gt;&#10;                &lt;text x='112' y='242' fontFamily='Verdana' fontSize='16' fill='#6B6478'&gt;&#10;                    Atau biarkan kosong supaya direbut orang tua&#10;                &lt;/text&gt;&#10;                {/* panah */}&#10;                &lt;path d='M260 282v30' stroke='#AFC440' strokeWidth='5' strokeLinecap='round' /&gt;&#10;                &lt;path d='M250 306l10 12 10-12' fill='none' stroke='#AFC440' strokeWidth='5' strokeLinecap='round' /&gt;&#10;&#10;                {/* langkah 3 */}&#10;                &lt;rect x='14' y='320' width='492' height='104' rx='16' fill='#51277C' /&gt;&#10;                &lt;circle cx='62' cy='372' r='28' fill='#F3B26C' /&gt;&#10;                &lt;text x='62' y='382' fontFamily='Trebuchet MS' fontSize='28' fontWeight='bold' fill='#51277C' textAnchor='middle'&gt;&#10;                    3&#10;                &lt;/text&gt;&#10;                &lt;text x='112' y='362' fontFamily='Trebuchet MS' fontSize='24' fontWeight='bold' fill='#FFFFFF'&gt;&#10;                    Umumkan&#10;                &lt;/text&gt;&#10;                &lt;text x='112' y='394' fontFamily='Verdana' fontSize='16' fill='#EFEAE1'&gt;&#10;                    Kunci lebih dulu, baru terbit ke orang tua&#10;                &lt;/text&gt;&#10;            &lt;/svg&gt;&#10;        &lt;/Box&gt;&#10;&#10;        {/* kanan 45% · tiga keterangan */}&#10;        &lt;Box style={{ width: '45%', height: '100%', justifyContent: 'space-between' }}&gt;&#10;            {[&#10;                {&#10;                    t: 'Susun — isi menunya',&#10;                    d: 'Satu bulan lebih baik dikerjakan sekaligus. Tiga cara: ketik per hari, salin dari minggu lain, atau tempel teks dari sekolah.',&#10;                    g: 'Bagian 3',&#10;                },&#10;                {&#10;                    t: 'Petugas — siapa ambil snack',&#10;                    d: 'Pilih dari daftar siswa kelas Anda; nama orang tuanya terisi sendiri. Dikosongkan pun boleh.',&#10;                    g: 'Bisa dikosongkan',&#10;                },&#10;                {&#10;                    t: 'Umumkan — baru kelihatan',&#10;                    d: 'Sebelum diumumkan, orang tua tidak melihat apa pun. Jadi jangan khawatir kalau belum muncul.',&#10;                    g: 'Bagian 4',&#10;                },&#10;            ].map((it, i) =&gt; (&#10;                &lt;Box&#10;                    key={i}&#10;                    style={{&#10;                        height: 166,&#10;                        background: '#FFFFFF',&#10;                        borderRadius: 16,&#10;                        boxShadow: '0 4px 20px rgba(0,0,0,0.08)',&#10;                        padding: 22,&#10;                        borderLeft: i === 2 ? '8px solid #F3B26C' : '8px solid #AFC440',&#10;                    }}&#10;                &gt;&#10;                    &lt;Text&#10;                        style={{&#10;                            fontSize: 24,&#10;                            fontWeight: 'bold',&#10;                            color: '#51277C',&#10;                            fontFamily: 'Trebuchet MS',&#10;                            lineHeight: 1.3,&#10;                        }}&#10;                    &gt;&#10;                        {it.t}&#10;                    &lt;/Text&gt;&#10;                    &lt;Text&#10;                        style={{&#10;                            marginTop: 10,&#10;                            fontSize: 17,&#10;                            color: '#6B6478',&#10;                            fontFamily: 'Verdana',&#10;                            lineHeight: 1.5,&#10;                        }}&#10;                    &gt;&#10;                        {it.d}&#10;                    &lt;/Text&gt;&#10;                    &lt;Box style={{ marginTop: 'auto' }}&gt;&#10;                        &lt;Text&#10;                            style={{&#10;                                fontSize: 16,&#10;                                color: '#51277C',&#10;                                fontFamily: 'Verdana',&#10;                                fontWeight: 'bold',&#10;                            }}&#10;                        &gt;&#10;                            {it.g}&#10;                        &lt;/Text&gt;&#10;                    &lt;/Box&gt;&#10;                &lt;/Box&gt;&#10;            ))}&#10;        &lt;/Box&gt;&#10;    &lt;/Box&gt;&#10;&#10;    {/* ── C · bilah kaki ── */}&#10;    &lt;Box&#10;        style={{&#10;            height: 40,&#10;            flexDirection: 'row',&#10;            alignItems: 'center',&#10;            justifyContent: 'space-between',&#10;        }}&#10;    &gt;&#10;        &lt;Text style={{ fontSize: 14, color: '#6B6478', fontFamily: 'Verdana' }}&gt;&#10;            Pizza Snack Play · Panduan Korlas &amp;amp; Admin&#10;        &lt;/Text&gt;&#10;        &lt;Text style={{ fontSize: 14, color: '#6B6478', fontFamily: 'Verdana' }}&gt;04 / 18&lt;/Text&gt;&#10;    &lt;/Box&gt;&#10;&lt;/Slide&gt;&#10;"/>
         <p:cNvGrpSpPr/>
         <p:nvPr/>
       </p:nvGrpSpPr>
@@ -10190,7 +11197,7 @@
       </p:grpSpPr>
       <p:sp>
         <p:nvSpPr>
-          <p:cNvPr id="222" name=""/>
+          <p:cNvPr id="256" name=""/>
           <p:cNvSpPr/>
           <p:nvPr/>
         </p:nvSpPr>
@@ -10214,7 +11221,7 @@
       </p:sp>
       <p:sp>
         <p:nvSpPr>
-          <p:cNvPr id="223" name="" descr="{&quot;isTemplate&quot;:true,&quot;type&quot;:&quot;text&quot;}"/>
+          <p:cNvPr id="257" name="" descr="{&quot;isTemplate&quot;:true,&quot;type&quot;:&quot;text&quot;}"/>
           <p:cNvSpPr txBox="1"/>
           <p:nvPr/>
         </p:nvSpPr>
@@ -10249,7 +11256,7 @@
       </p:sp>
       <p:sp>
         <p:nvSpPr>
-          <p:cNvPr id="224" name=""/>
+          <p:cNvPr id="258" name=""/>
           <p:cNvSpPr/>
           <p:nvPr/>
         </p:nvSpPr>
@@ -10275,7 +11282,7 @@
       </p:sp>
       <p:sp>
         <p:nvSpPr>
-          <p:cNvPr id="225" name=""/>
+          <p:cNvPr id="259" name=""/>
           <p:cNvSpPr/>
           <p:nvPr/>
         </p:nvSpPr>
@@ -10303,7 +11310,7 @@
       </p:sp>
       <p:pic>
         <p:nvPicPr>
-          <p:cNvPr id="226" name=""/>
+          <p:cNvPr id="260" name=""/>
           <p:cNvPicPr>
             <a:picLocks noChangeAspect="1"/>
           </p:cNvPicPr>
@@ -10334,7 +11341,7 @@
       </p:pic>
       <p:sp>
         <p:nvSpPr>
-          <p:cNvPr id="227" name=""/>
+          <p:cNvPr id="261" name=""/>
           <p:cNvSpPr/>
           <p:nvPr/>
         </p:nvSpPr>
@@ -10367,7 +11374,7 @@
       </p:sp>
       <p:sp>
         <p:nvSpPr>
-          <p:cNvPr id="228" name=""/>
+          <p:cNvPr id="262" name=""/>
           <p:cNvSpPr/>
           <p:nvPr/>
         </p:nvSpPr>
@@ -10424,7 +11431,7 @@
       </p:sp>
       <p:sp>
         <p:nvSpPr>
-          <p:cNvPr id="229" name="" descr="{&quot;isTemplate&quot;:true,&quot;type&quot;:&quot;text&quot;}"/>
+          <p:cNvPr id="263" name="" descr="{&quot;isTemplate&quot;:true,&quot;type&quot;:&quot;text&quot;}"/>
           <p:cNvSpPr txBox="1"/>
           <p:nvPr/>
         </p:nvSpPr>
@@ -10459,7 +11466,7 @@
       </p:sp>
       <p:sp>
         <p:nvSpPr>
-          <p:cNvPr id="230" name="" descr="{&quot;isTemplate&quot;:true,&quot;type&quot;:&quot;text&quot;}"/>
+          <p:cNvPr id="264" name="" descr="{&quot;isTemplate&quot;:true,&quot;type&quot;:&quot;text&quot;}"/>
           <p:cNvSpPr txBox="1"/>
           <p:nvPr/>
         </p:nvSpPr>
@@ -10496,7 +11503,7 @@
       </p:sp>
       <p:sp>
         <p:nvSpPr>
-          <p:cNvPr id="231" name="" descr="{&quot;isTemplate&quot;:true,&quot;type&quot;:&quot;text&quot;}"/>
+          <p:cNvPr id="265" name="" descr="{&quot;isTemplate&quot;:true,&quot;type&quot;:&quot;text&quot;}"/>
           <p:cNvSpPr txBox="1"/>
           <p:nvPr/>
         </p:nvSpPr>
@@ -10531,7 +11538,7 @@
       </p:sp>
       <p:sp>
         <p:nvSpPr>
-          <p:cNvPr id="232" name=""/>
+          <p:cNvPr id="266" name=""/>
           <p:cNvSpPr/>
           <p:nvPr/>
         </p:nvSpPr>
@@ -10564,7 +11571,7 @@
       </p:sp>
       <p:sp>
         <p:nvSpPr>
-          <p:cNvPr id="233" name=""/>
+          <p:cNvPr id="267" name=""/>
           <p:cNvSpPr/>
           <p:nvPr/>
         </p:nvSpPr>
@@ -10621,7 +11628,7 @@
       </p:sp>
       <p:sp>
         <p:nvSpPr>
-          <p:cNvPr id="234" name="" descr="{&quot;isTemplate&quot;:true,&quot;type&quot;:&quot;text&quot;}"/>
+          <p:cNvPr id="268" name="" descr="{&quot;isTemplate&quot;:true,&quot;type&quot;:&quot;text&quot;}"/>
           <p:cNvSpPr txBox="1"/>
           <p:nvPr/>
         </p:nvSpPr>
@@ -10656,7 +11663,7 @@
       </p:sp>
       <p:sp>
         <p:nvSpPr>
-          <p:cNvPr id="235" name="" descr="{&quot;isTemplate&quot;:true,&quot;type&quot;:&quot;text&quot;}"/>
+          <p:cNvPr id="269" name="" descr="{&quot;isTemplate&quot;:true,&quot;type&quot;:&quot;text&quot;}"/>
           <p:cNvSpPr txBox="1"/>
           <p:nvPr/>
         </p:nvSpPr>
@@ -10693,7 +11700,7 @@
       </p:sp>
       <p:sp>
         <p:nvSpPr>
-          <p:cNvPr id="236" name="" descr="{&quot;isTemplate&quot;:true,&quot;type&quot;:&quot;text&quot;}"/>
+          <p:cNvPr id="270" name="" descr="{&quot;isTemplate&quot;:true,&quot;type&quot;:&quot;text&quot;}"/>
           <p:cNvSpPr txBox="1"/>
           <p:nvPr/>
         </p:nvSpPr>
@@ -10728,7 +11735,7 @@
       </p:sp>
       <p:sp>
         <p:nvSpPr>
-          <p:cNvPr id="237" name=""/>
+          <p:cNvPr id="271" name=""/>
           <p:cNvSpPr/>
           <p:nvPr/>
         </p:nvSpPr>
@@ -10761,7 +11768,7 @@
       </p:sp>
       <p:sp>
         <p:nvSpPr>
-          <p:cNvPr id="238" name=""/>
+          <p:cNvPr id="272" name=""/>
           <p:cNvSpPr/>
           <p:nvPr/>
         </p:nvSpPr>
@@ -10818,7 +11825,7 @@
       </p:sp>
       <p:sp>
         <p:nvSpPr>
-          <p:cNvPr id="239" name="" descr="{&quot;isTemplate&quot;:true,&quot;type&quot;:&quot;text&quot;}"/>
+          <p:cNvPr id="273" name="" descr="{&quot;isTemplate&quot;:true,&quot;type&quot;:&quot;text&quot;}"/>
           <p:cNvSpPr txBox="1"/>
           <p:nvPr/>
         </p:nvSpPr>
@@ -10853,7 +11860,7 @@
       </p:sp>
       <p:sp>
         <p:nvSpPr>
-          <p:cNvPr id="240" name="" descr="{&quot;isTemplate&quot;:true,&quot;type&quot;:&quot;text&quot;}"/>
+          <p:cNvPr id="274" name="" descr="{&quot;isTemplate&quot;:true,&quot;type&quot;:&quot;text&quot;}"/>
           <p:cNvSpPr txBox="1"/>
           <p:nvPr/>
         </p:nvSpPr>
@@ -10890,7 +11897,7 @@
       </p:sp>
       <p:sp>
         <p:nvSpPr>
-          <p:cNvPr id="241" name="" descr="{&quot;isTemplate&quot;:true,&quot;type&quot;:&quot;text&quot;}"/>
+          <p:cNvPr id="275" name="" descr="{&quot;isTemplate&quot;:true,&quot;type&quot;:&quot;text&quot;}"/>
           <p:cNvSpPr txBox="1"/>
           <p:nvPr/>
         </p:nvSpPr>
@@ -10925,7 +11932,7 @@
       </p:sp>
       <p:sp>
         <p:nvSpPr>
-          <p:cNvPr id="242" name="" descr="{&quot;isTemplate&quot;:true,&quot;type&quot;:&quot;text&quot;}"/>
+          <p:cNvPr id="276" name="" descr="{&quot;isTemplate&quot;:true,&quot;type&quot;:&quot;text&quot;}"/>
           <p:cNvSpPr txBox="1"/>
           <p:nvPr/>
         </p:nvSpPr>
@@ -10960,7 +11967,7 @@
       </p:sp>
       <p:sp>
         <p:nvSpPr>
-          <p:cNvPr id="243" name="" descr="{&quot;isTemplate&quot;:true,&quot;type&quot;:&quot;text&quot;}"/>
+          <p:cNvPr id="277" name="" descr="{&quot;isTemplate&quot;:true,&quot;type&quot;:&quot;text&quot;}"/>
           <p:cNvSpPr txBox="1"/>
           <p:nvPr/>
         </p:nvSpPr>
@@ -10987,7 +11994,7 @@
                 <a:latin typeface="Verdana"/>
                 <a:ea typeface="Verdana"/>
               </a:rPr>
-              <a:t>04 / 17</a:t>
+              <a:t>04 / 18</a:t>
             </a:r>
             <a:endParaRPr/>
           </a:p>
@@ -11003,7 +12010,7 @@
   <p:cSld>
     <p:spTree>
       <p:nvGrpSpPr>
-        <p:cNvPr id="244" name=""/>
+        <p:cNvPr id="278" name=""/>
         <p:cNvGrpSpPr/>
         <p:nvPr/>
       </p:nvGrpSpPr>
@@ -11017,7 +12024,7 @@
       </p:grpSpPr>
       <p:sp>
         <p:nvSpPr>
-          <p:cNvPr id="245" name=""/>
+          <p:cNvPr id="279" name=""/>
           <p:cNvSpPr/>
           <p:nvPr/>
         </p:nvSpPr>
@@ -11052,7 +12059,7 @@
       </p:sp>
       <p:sp>
         <p:nvSpPr>
-          <p:cNvPr id="246" name=""/>
+          <p:cNvPr id="280" name=""/>
           <p:cNvSpPr/>
           <p:nvPr/>
         </p:nvSpPr>
@@ -11451,7 +12458,7 @@
       </p:sp>
       <p:pic>
         <p:nvPicPr>
-          <p:cNvPr id="247" name=""/>
+          <p:cNvPr id="281" name=""/>
           <p:cNvPicPr>
             <a:picLocks noChangeAspect="1"/>
           </p:cNvPicPr>
@@ -11483,7 +12490,7 @@
       </p:pic>
       <p:sp>
         <p:nvSpPr>
-          <p:cNvPr id="248" name="" descr="{&quot;isTemplate&quot;:true,&quot;type&quot;:&quot;text&quot;}"/>
+          <p:cNvPr id="282" name="" descr="{&quot;isTemplate&quot;:true,&quot;type&quot;:&quot;text&quot;}"/>
           <p:cNvSpPr txBox="1"/>
           <p:nvPr/>
         </p:nvSpPr>
@@ -11518,7 +12525,7 @@
       </p:sp>
       <p:sp>
         <p:nvSpPr>
-          <p:cNvPr id="249" name=""/>
+          <p:cNvPr id="283" name=""/>
           <p:cNvSpPr/>
           <p:nvPr/>
         </p:nvSpPr>
@@ -11547,7 +12554,7 @@
       </p:sp>
       <p:sp>
         <p:nvSpPr>
-          <p:cNvPr id="250" name="" descr="{&quot;isTemplate&quot;:true,&quot;type&quot;:&quot;text&quot;}"/>
+          <p:cNvPr id="284" name="" descr="{&quot;isTemplate&quot;:true,&quot;type&quot;:&quot;text&quot;}"/>
           <p:cNvSpPr txBox="1"/>
           <p:nvPr/>
         </p:nvSpPr>
@@ -11584,7 +12591,7 @@
       </p:sp>
       <p:sp>
         <p:nvSpPr>
-          <p:cNvPr id="251" name="" descr="{&quot;isTemplate&quot;:true,&quot;type&quot;:&quot;text&quot;}"/>
+          <p:cNvPr id="285" name="" descr="{&quot;isTemplate&quot;:true,&quot;type&quot;:&quot;text&quot;}"/>
           <p:cNvSpPr txBox="1"/>
           <p:nvPr/>
         </p:nvSpPr>
@@ -11637,7 +12644,7 @@
       </p:sp>
       <p:sp>
         <p:nvSpPr>
-          <p:cNvPr id="252" name="" descr="{&quot;isTemplate&quot;:true,&quot;type&quot;:&quot;text&quot;}"/>
+          <p:cNvPr id="286" name="" descr="{&quot;isTemplate&quot;:true,&quot;type&quot;:&quot;text&quot;}"/>
           <p:cNvSpPr txBox="1"/>
           <p:nvPr/>
         </p:nvSpPr>
@@ -11684,7 +12691,7 @@
   <p:cSld>
     <p:spTree>
       <p:nvGrpSpPr>
-        <p:cNvPr id="253" name="" descr="&lt;Slide&#10;    style={{&#10;        width: '1280px',&#10;        height: '720px',&#10;        background: '#FAF7F2',&#10;        paddingTop: 20,&#10;        paddingBottom: 20,&#10;        paddingLeft: 64,&#10;        paddingRight: 64,&#10;    }}&#10;&gt;&#10;    {/* ── A · blok judul ── */}&#10;    &lt;Box style={{ height: 110, justifyContent: 'center' }}&gt;&#10;        &lt;Text&#10;            style={{&#10;                fontSize: 34,&#10;                fontWeight: 'bold',&#10;                color: '#51277C',&#10;                fontFamily: 'Trebuchet MS',&#10;                lineHeight: 1.3,&#10;            }}&#10;        &gt;&#10;            Admin &amp;amp; Korlas: bedanya di mana&#10;        &lt;/Text&gt;&#10;        &lt;Box style={{ marginTop: 10, width: 72, height: 6, borderRadius: 3, background: '#51277C' }} /&gt;&#10;    &lt;/Box&gt;&#10;&#10;    {/* ── B · area konten ── */}&#10;    &lt;Box style={{ height: 530, flexDirection: 'row', gap: 26 }}&gt;&#10;        {/* kiri 60% · dua kartu wewenang */}&#10;        &lt;Box style={{ width: '60%', height: '100%', justifyContent: 'space-between' }}&gt;&#10;            &lt;Box&#10;                style={{&#10;                    height: 258,&#10;                    background: '#FFFFFF',&#10;                    borderRadius: 16,&#10;                    boxShadow: '0 4px 20px rgba(0,0,0,0.08)',&#10;                    padding: 22,&#10;                    borderTop: '8px solid #AFC440',&#10;                }}&#10;            &gt;&#10;                &lt;Text&#10;                    style={{&#10;                        fontSize: 25,&#10;                        fontWeight: 'bold',&#10;                        color: '#51277C',&#10;                        fontFamily: 'Trebuchet MS',&#10;                    }}&#10;                &gt;&#10;                    Korlas boleh sendiri&#10;                &lt;/Text&gt;&#10;                &lt;Box style={{ marginTop: 12 }}&gt;&#10;                    {[&#10;                        'Menyusun &amp; mengubah jadwal kelasnya, selama belum dikunci',&#10;                        'Menentukan petugas, atau membiarkannya kosong',&#10;                        'Menyalin Sepekan &amp; menempel teks jadwal dari sekolah',&#10;                        'Mengunci lalu mempublikasikan jadwal kelasnya',&#10;                        'Mengambil tanggal piket seperti orang tua lainnya',&#10;                    ].map((s, i) =&gt; (&#10;                        &lt;Box key={i} style={{ flexDirection: 'row', alignItems: 'center', gap: 10, marginTop: 7 }}&gt;&#10;                            &lt;svg width={18} height={18} viewBox='0 0 24 24'&gt;&#10;                                &lt;path d='M5 13l4 4 10-11' fill='none' stroke='#AFC440' strokeWidth='3' strokeLinecap='round' strokeLinejoin='round' /&gt;&#10;                            &lt;/svg&gt;&#10;                            &lt;Text style={{ flex: 1, fontSize: 16, color: '#2A2333', fontFamily: 'Verdana', lineHeight: 1.45 }}&gt;&#10;                                {s}&#10;                            &lt;/Text&gt;&#10;                        &lt;/Box&gt;&#10;                    ))}&#10;                &lt;/Box&gt;&#10;            &lt;/Box&gt;&#10;&#10;            &lt;Box&#10;                style={{&#10;                    height: 254,&#10;                    background: '#FFFFFF',&#10;                    borderRadius: 16,&#10;                    boxShadow: '0 4px 20px rgba(0,0,0,0.08)',&#10;                    padding: 22,&#10;                    borderTop: '8px solid #F3B26C',&#10;                }}&#10;            &gt;&#10;                &lt;Text&#10;                    style={{&#10;                        fontSize: 25,&#10;                        fontWeight: 'bold',&#10;                        color: '#51277C',&#10;                        fontFamily: 'Trebuchet MS',&#10;                    }}&#10;                &gt;&#10;                    Tetap wewenang admin&#10;                &lt;/Text&gt;&#10;                &lt;Box style={{ marginTop: 12 }}&gt;&#10;                    {[&#10;                        'Mengelola katalog menu &amp; kategori',&#10;                        'Mengelola akun orang tua, termasuk mengangkat korlas',&#10;                        'Hari libur sekolah — berlaku untuk semua kelas',&#10;                        'Membuka kunci jadwal yang sudah dikunci atau terbit',&#10;                    ].map((s, i) =&gt; (&#10;                        &lt;Box key={i} style={{ flexDirection: 'row', alignItems: 'center', gap: 10, marginTop: 7 }}&gt;&#10;                            &lt;svg width={18} height={18} viewBox='0 0 24 24'&gt;&#10;                                &lt;path d='M7 7l10 10M17 7L7 17' fill='none' stroke='#F3B26C' strokeWidth='3' strokeLinecap='round' /&gt;&#10;                            &lt;/svg&gt;&#10;                            &lt;Text style={{ flex: 1, fontSize: 16, color: '#2A2333', fontFamily: 'Verdana', lineHeight: 1.45 }}&gt;&#10;                                {s}&#10;                            &lt;/Text&gt;&#10;                        &lt;/Box&gt;&#10;                    ))}&#10;                &lt;/Box&gt;&#10;            &lt;/Box&gt;&#10;        &lt;/Box&gt;&#10;&#10;        {/* kanan 40% · ilustrasi dua peran */}&#10;        &lt;Box&#10;            style={{&#10;                width: '40%',&#10;                height: '100%',&#10;                background: 'rgba(81,39,124,0.06)',&#10;                borderRadius: 20,&#10;                justifyContent: 'center',&#10;                alignItems: 'center',&#10;            }}&#10;        &gt;&#10;            &lt;svg width={360} height={400} viewBox='0 0 360 400'&gt;&#10;                {/* korlas */}&#10;                &lt;rect x='24' y='24' width='312' height='150' rx='18' fill='#FFFFFF' stroke='#AFC440' strokeWidth='3' /&gt;&#10;                &lt;circle cx='76' cy='78' r='30' fill='#AFC440' /&gt;&#10;                &lt;text x='76' y='90' fontFamily='Trebuchet MS' fontSize='30' fontWeight='bold' fill='#3F4718' textAnchor='middle'&gt;&#10;                    K&#10;                &lt;/text&gt;&#10;                &lt;text x='124' y='70' fontFamily='Trebuchet MS' fontSize='24' fontWeight='bold' fill='#51277C'&gt;&#10;                    Korlas&#10;                &lt;/text&gt;&#10;                &lt;text x='124' y='102' fontFamily='Verdana' fontSize='15' fill='#6B6478'&gt;&#10;                    satu kelas&#10;                &lt;/text&gt;&#10;                &lt;rect x='52' y='122' width='256' height='9' rx='5' fill='#DED7CB' /&gt;&#10;                &lt;rect x='52' y='140' width='196' height='9' rx='5' fill='#EDE8DF' /&gt;&#10;&#10;                {/* admin */}&#10;                &lt;rect x='24' y='196' width='312' height='150' rx='18' fill='#51277C' /&gt;&#10;                &lt;circle cx='76' cy='250' r='30' fill='#F3B26C' /&gt;&#10;                &lt;text x='76' y='262' fontFamily='Trebuchet MS' fontSize='30' fontWeight='bold' fill='#51277C' textAnchor='middle'&gt;&#10;                    A&#10;                &lt;/text&gt;&#10;                &lt;text x='124' y='242' fontFamily='Trebuchet MS' fontSize='24' fontWeight='bold' fill='#FFFFFF'&gt;&#10;                    Admin&#10;                &lt;/text&gt;&#10;                &lt;text x='124' y='274' fontFamily='Verdana' fontSize='15' fill='#EFEAE1'&gt;&#10;                    semua kelas&#10;                &lt;/text&gt;&#10;                &lt;rect x='52' y='294' width='256' height='9' rx='5' fill='rgba(255,255,255,0.5)' /&gt;&#10;                &lt;rect x='52' y='312' width='216' height='9' rx='5' fill='rgba(255,255,255,0.3)' /&gt;&#10;&#10;                &lt;text x='180' y='380' fontFamily='Verdana' fontSize='16' fill='#6B6478' textAnchor='middle'&gt;&#10;                    Admin melihat semua kelas&#10;                &lt;/text&gt;&#10;            &lt;/svg&gt;&#10;        &lt;/Box&gt;&#10;    &lt;/Box&gt;&#10;&#10;    {/* ── C · bilah kaki ── */}&#10;    &lt;Box&#10;        style={{&#10;            height: 40,&#10;            flexDirection: 'row',&#10;            alignItems: 'center',&#10;            justifyContent: 'space-between',&#10;        }}&#10;    &gt;&#10;        &lt;Text style={{ fontSize: 14, color: '#6B6478', fontFamily: 'Verdana' }}&gt;&#10;            Pizza Snack Play · Panduan Korlas &amp;amp; Admin&#10;        &lt;/Text&gt;&#10;        &lt;Text style={{ fontSize: 14, color: '#6B6478', fontFamily: 'Verdana' }}&gt;06 / 17&lt;/Text&gt;&#10;    &lt;/Box&gt;&#10;&lt;/Slide&gt;&#10;"/>
+        <p:cNvPr id="287" name="" descr="&lt;Slide&#10;    style={{&#10;        width: '1280px',&#10;        height: '720px',&#10;        background: '#FAF7F2',&#10;        paddingTop: 20,&#10;        paddingBottom: 20,&#10;        paddingLeft: 64,&#10;        paddingRight: 64,&#10;    }}&#10;&gt;&#10;    {/* ── A · blok judul ── */}&#10;    &lt;Box style={{ height: 110, justifyContent: 'center' }}&gt;&#10;        &lt;Text&#10;            style={{&#10;                fontSize: 34,&#10;                fontWeight: 'bold',&#10;                color: '#51277C',&#10;                fontFamily: 'Trebuchet MS',&#10;                lineHeight: 1.3,&#10;            }}&#10;        &gt;&#10;            Admin &amp;amp; Korlas: bedanya di mana&#10;        &lt;/Text&gt;&#10;        &lt;Box style={{ marginTop: 10, width: 72, height: 6, borderRadius: 3, background: '#51277C' }} /&gt;&#10;    &lt;/Box&gt;&#10;&#10;    {/* ── B · area konten ── */}&#10;    &lt;Box style={{ height: 530, flexDirection: 'row', gap: 26 }}&gt;&#10;        {/* kiri 60% · dua kartu wewenang */}&#10;        &lt;Box style={{ width: '60%', height: '100%', justifyContent: 'space-between' }}&gt;&#10;            &lt;Box&#10;                style={{&#10;                    height: 258,&#10;                    background: '#FFFFFF',&#10;                    borderRadius: 16,&#10;                    boxShadow: '0 4px 20px rgba(0,0,0,0.08)',&#10;                    padding: 22,&#10;                    borderTop: '8px solid #AFC440',&#10;                }}&#10;            &gt;&#10;                &lt;Text&#10;                    style={{&#10;                        fontSize: 25,&#10;                        fontWeight: 'bold',&#10;                        color: '#51277C',&#10;                        fontFamily: 'Trebuchet MS',&#10;                    }}&#10;                &gt;&#10;                    Korlas boleh sendiri&#10;                &lt;/Text&gt;&#10;                &lt;Box style={{ marginTop: 12 }}&gt;&#10;                    {[&#10;                        'Menyusun &amp; mengubah jadwal kelasnya, selama belum dikunci',&#10;                        'Menentukan petugas, atau membiarkannya kosong',&#10;                        'Menyalin Sepekan &amp; menempel teks jadwal dari sekolah',&#10;                        'Mengunci lalu mempublikasikan jadwal kelasnya',&#10;                        'Mengambil tanggal piket seperti orang tua lainnya',&#10;                    ].map((s, i) =&gt; (&#10;                        &lt;Box key={i} style={{ flexDirection: 'row', alignItems: 'center', gap: 10, marginTop: 7 }}&gt;&#10;                            &lt;svg width={18} height={18} viewBox='0 0 24 24'&gt;&#10;                                &lt;path d='M5 13l4 4 10-11' fill='none' stroke='#AFC440' strokeWidth='3' strokeLinecap='round' strokeLinejoin='round' /&gt;&#10;                            &lt;/svg&gt;&#10;                            &lt;Text style={{ flex: 1, fontSize: 16, color: '#2A2333', fontFamily: 'Verdana', lineHeight: 1.45 }}&gt;&#10;                                {s}&#10;                            &lt;/Text&gt;&#10;                        &lt;/Box&gt;&#10;                    ))}&#10;                &lt;/Box&gt;&#10;            &lt;/Box&gt;&#10;&#10;            &lt;Box&#10;                style={{&#10;                    height: 254,&#10;                    background: '#FFFFFF',&#10;                    borderRadius: 16,&#10;                    boxShadow: '0 4px 20px rgba(0,0,0,0.08)',&#10;                    padding: 22,&#10;                    borderTop: '8px solid #F3B26C',&#10;                }}&#10;            &gt;&#10;                &lt;Text&#10;                    style={{&#10;                        fontSize: 25,&#10;                        fontWeight: 'bold',&#10;                        color: '#51277C',&#10;                        fontFamily: 'Trebuchet MS',&#10;                    }}&#10;                &gt;&#10;                    Tetap wewenang admin&#10;                &lt;/Text&gt;&#10;                &lt;Box style={{ marginTop: 12 }}&gt;&#10;                    {[&#10;                        'Mengelola katalog menu, kategori, dan gambarnya',&#10;                        'Mengelola akun orang tua, termasuk mengangkat korlas',&#10;                        'Hari libur sekolah — berlaku untuk semua kelas',&#10;                        'Membuka kunci jadwal yang sudah dikunci atau terbit',&#10;                    ].map((s, i) =&gt; (&#10;                        &lt;Box key={i} style={{ flexDirection: 'row', alignItems: 'center', gap: 10, marginTop: 7 }}&gt;&#10;                            &lt;svg width={18} height={18} viewBox='0 0 24 24'&gt;&#10;                                &lt;path d='M7 7l10 10M17 7L7 17' fill='none' stroke='#F3B26C' strokeWidth='3' strokeLinecap='round' /&gt;&#10;                            &lt;/svg&gt;&#10;                            &lt;Text style={{ flex: 1, fontSize: 16, color: '#2A2333', fontFamily: 'Verdana', lineHeight: 1.45 }}&gt;&#10;                                {s}&#10;                            &lt;/Text&gt;&#10;                        &lt;/Box&gt;&#10;                    ))}&#10;                &lt;/Box&gt;&#10;            &lt;/Box&gt;&#10;        &lt;/Box&gt;&#10;&#10;        {/* kanan 40% · ilustrasi dua peran */}&#10;        &lt;Box&#10;            style={{&#10;                width: '40%',&#10;                height: '100%',&#10;                background: 'rgba(81,39,124,0.06)',&#10;                borderRadius: 20,&#10;                justifyContent: 'center',&#10;                alignItems: 'center',&#10;            }}&#10;        &gt;&#10;            &lt;svg width={360} height={400} viewBox='0 0 360 400'&gt;&#10;                {/* korlas */}&#10;                &lt;rect x='24' y='24' width='312' height='150' rx='18' fill='#FFFFFF' stroke='#AFC440' strokeWidth='3' /&gt;&#10;                &lt;circle cx='76' cy='78' r='30' fill='#AFC440' /&gt;&#10;                &lt;text x='76' y='90' fontFamily='Trebuchet MS' fontSize='30' fontWeight='bold' fill='#3F4718' textAnchor='middle'&gt;&#10;                    K&#10;                &lt;/text&gt;&#10;                &lt;text x='124' y='70' fontFamily='Trebuchet MS' fontSize='24' fontWeight='bold' fill='#51277C'&gt;&#10;                    Korlas&#10;                &lt;/text&gt;&#10;                &lt;text x='124' y='102' fontFamily='Verdana' fontSize='15' fill='#6B6478'&gt;&#10;                    satu kelas&#10;                &lt;/text&gt;&#10;                &lt;rect x='52' y='122' width='256' height='9' rx='5' fill='#DED7CB' /&gt;&#10;                &lt;rect x='52' y='140' width='196' height='9' rx='5' fill='#EDE8DF' /&gt;&#10;&#10;                {/* admin */}&#10;                &lt;rect x='24' y='196' width='312' height='150' rx='18' fill='#51277C' /&gt;&#10;                &lt;circle cx='76' cy='250' r='30' fill='#F3B26C' /&gt;&#10;                &lt;text x='76' y='262' fontFamily='Trebuchet MS' fontSize='30' fontWeight='bold' fill='#51277C' textAnchor='middle'&gt;&#10;                    A&#10;                &lt;/text&gt;&#10;                &lt;text x='124' y='242' fontFamily='Trebuchet MS' fontSize='24' fontWeight='bold' fill='#FFFFFF'&gt;&#10;                    Admin&#10;                &lt;/text&gt;&#10;                &lt;text x='124' y='274' fontFamily='Verdana' fontSize='15' fill='#EFEAE1'&gt;&#10;                    semua kelas&#10;                &lt;/text&gt;&#10;                &lt;rect x='52' y='294' width='256' height='9' rx='5' fill='rgba(255,255,255,0.5)' /&gt;&#10;                &lt;rect x='52' y='312' width='216' height='9' rx='5' fill='rgba(255,255,255,0.3)' /&gt;&#10;&#10;                &lt;text x='180' y='380' fontFamily='Verdana' fontSize='16' fill='#6B6478' textAnchor='middle'&gt;&#10;                    Admin melihat semua kelas&#10;                &lt;/text&gt;&#10;            &lt;/svg&gt;&#10;        &lt;/Box&gt;&#10;    &lt;/Box&gt;&#10;&#10;    {/* ── C · bilah kaki ── */}&#10;    &lt;Box&#10;        style={{&#10;            height: 40,&#10;            flexDirection: 'row',&#10;            alignItems: 'center',&#10;            justifyContent: 'space-between',&#10;        }}&#10;    &gt;&#10;        &lt;Text style={{ fontSize: 14, color: '#6B6478', fontFamily: 'Verdana' }}&gt;&#10;            Pizza Snack Play · Panduan Korlas &amp;amp; Admin&#10;        &lt;/Text&gt;&#10;        &lt;Text style={{ fontSize: 14, color: '#6B6478', fontFamily: 'Verdana' }}&gt;06 / 18&lt;/Text&gt;&#10;    &lt;/Box&gt;&#10;&lt;/Slide&gt;&#10;"/>
         <p:cNvGrpSpPr/>
         <p:nvPr/>
       </p:nvGrpSpPr>
@@ -11698,7 +12705,7 @@
       </p:grpSpPr>
       <p:sp>
         <p:nvSpPr>
-          <p:cNvPr id="254" name=""/>
+          <p:cNvPr id="288" name=""/>
           <p:cNvSpPr/>
           <p:nvPr/>
         </p:nvSpPr>
@@ -11722,7 +12729,7 @@
       </p:sp>
       <p:sp>
         <p:nvSpPr>
-          <p:cNvPr id="255" name="" descr="{&quot;isTemplate&quot;:true,&quot;type&quot;:&quot;text&quot;}"/>
+          <p:cNvPr id="289" name="" descr="{&quot;isTemplate&quot;:true,&quot;type&quot;:&quot;text&quot;}"/>
           <p:cNvSpPr txBox="1"/>
           <p:nvPr/>
         </p:nvSpPr>
@@ -11757,7 +12764,7 @@
       </p:sp>
       <p:sp>
         <p:nvSpPr>
-          <p:cNvPr id="256" name=""/>
+          <p:cNvPr id="290" name=""/>
           <p:cNvSpPr/>
           <p:nvPr/>
         </p:nvSpPr>
@@ -11783,7 +12790,7 @@
       </p:sp>
       <p:sp>
         <p:nvSpPr>
-          <p:cNvPr id="257" name=""/>
+          <p:cNvPr id="291" name=""/>
           <p:cNvSpPr/>
           <p:nvPr/>
         </p:nvSpPr>
@@ -11816,7 +12823,7 @@
       </p:sp>
       <p:sp>
         <p:nvSpPr>
-          <p:cNvPr id="258" name=""/>
+          <p:cNvPr id="292" name=""/>
           <p:cNvSpPr/>
           <p:nvPr/>
         </p:nvSpPr>
@@ -11873,7 +12880,7 @@
       </p:sp>
       <p:sp>
         <p:nvSpPr>
-          <p:cNvPr id="259" name="" descr="{&quot;isTemplate&quot;:true,&quot;type&quot;:&quot;text&quot;}"/>
+          <p:cNvPr id="293" name="" descr="{&quot;isTemplate&quot;:true,&quot;type&quot;:&quot;text&quot;}"/>
           <p:cNvSpPr txBox="1"/>
           <p:nvPr/>
         </p:nvSpPr>
@@ -11908,7 +12915,7 @@
       </p:sp>
       <p:pic>
         <p:nvPicPr>
-          <p:cNvPr id="260" name=""/>
+          <p:cNvPr id="294" name=""/>
           <p:cNvPicPr>
             <a:picLocks noChangeAspect="1"/>
           </p:cNvPicPr>
@@ -11939,7 +12946,7 @@
       </p:pic>
       <p:sp>
         <p:nvSpPr>
-          <p:cNvPr id="261" name="" descr="{&quot;isTemplate&quot;:true,&quot;type&quot;:&quot;text&quot;}"/>
+          <p:cNvPr id="295" name="" descr="{&quot;isTemplate&quot;:true,&quot;type&quot;:&quot;text&quot;}"/>
           <p:cNvSpPr txBox="1"/>
           <p:nvPr/>
         </p:nvSpPr>
@@ -11974,7 +12981,7 @@
       </p:sp>
       <p:pic>
         <p:nvPicPr>
-          <p:cNvPr id="262" name=""/>
+          <p:cNvPr id="296" name=""/>
           <p:cNvPicPr>
             <a:picLocks noChangeAspect="1"/>
           </p:cNvPicPr>
@@ -12005,7 +13012,7 @@
       </p:pic>
       <p:sp>
         <p:nvSpPr>
-          <p:cNvPr id="263" name="" descr="{&quot;isTemplate&quot;:true,&quot;type&quot;:&quot;text&quot;}"/>
+          <p:cNvPr id="297" name="" descr="{&quot;isTemplate&quot;:true,&quot;type&quot;:&quot;text&quot;}"/>
           <p:cNvSpPr txBox="1"/>
           <p:nvPr/>
         </p:nvSpPr>
@@ -12040,7 +13047,7 @@
       </p:sp>
       <p:pic>
         <p:nvPicPr>
-          <p:cNvPr id="264" name=""/>
+          <p:cNvPr id="298" name=""/>
           <p:cNvPicPr>
             <a:picLocks noChangeAspect="1"/>
           </p:cNvPicPr>
@@ -12071,7 +13078,7 @@
       </p:pic>
       <p:sp>
         <p:nvSpPr>
-          <p:cNvPr id="265" name="" descr="{&quot;isTemplate&quot;:true,&quot;type&quot;:&quot;text&quot;}"/>
+          <p:cNvPr id="299" name="" descr="{&quot;isTemplate&quot;:true,&quot;type&quot;:&quot;text&quot;}"/>
           <p:cNvSpPr txBox="1"/>
           <p:nvPr/>
         </p:nvSpPr>
@@ -12106,7 +13113,7 @@
       </p:sp>
       <p:pic>
         <p:nvPicPr>
-          <p:cNvPr id="266" name=""/>
+          <p:cNvPr id="300" name=""/>
           <p:cNvPicPr>
             <a:picLocks noChangeAspect="1"/>
           </p:cNvPicPr>
@@ -12137,7 +13144,7 @@
       </p:pic>
       <p:sp>
         <p:nvSpPr>
-          <p:cNvPr id="267" name="" descr="{&quot;isTemplate&quot;:true,&quot;type&quot;:&quot;text&quot;}"/>
+          <p:cNvPr id="301" name="" descr="{&quot;isTemplate&quot;:true,&quot;type&quot;:&quot;text&quot;}"/>
           <p:cNvSpPr txBox="1"/>
           <p:nvPr/>
         </p:nvSpPr>
@@ -12172,7 +13179,7 @@
       </p:sp>
       <p:pic>
         <p:nvPicPr>
-          <p:cNvPr id="268" name=""/>
+          <p:cNvPr id="302" name=""/>
           <p:cNvPicPr>
             <a:picLocks noChangeAspect="1"/>
           </p:cNvPicPr>
@@ -12203,7 +13210,7 @@
       </p:pic>
       <p:sp>
         <p:nvSpPr>
-          <p:cNvPr id="269" name="" descr="{&quot;isTemplate&quot;:true,&quot;type&quot;:&quot;text&quot;}"/>
+          <p:cNvPr id="303" name="" descr="{&quot;isTemplate&quot;:true,&quot;type&quot;:&quot;text&quot;}"/>
           <p:cNvSpPr txBox="1"/>
           <p:nvPr/>
         </p:nvSpPr>
@@ -12238,7 +13245,7 @@
       </p:sp>
       <p:sp>
         <p:nvSpPr>
-          <p:cNvPr id="270" name=""/>
+          <p:cNvPr id="304" name=""/>
           <p:cNvSpPr/>
           <p:nvPr/>
         </p:nvSpPr>
@@ -12271,7 +13278,7 @@
       </p:sp>
       <p:sp>
         <p:nvSpPr>
-          <p:cNvPr id="271" name=""/>
+          <p:cNvPr id="305" name=""/>
           <p:cNvSpPr/>
           <p:nvPr/>
         </p:nvSpPr>
@@ -12328,7 +13335,7 @@
       </p:sp>
       <p:sp>
         <p:nvSpPr>
-          <p:cNvPr id="272" name="" descr="{&quot;isTemplate&quot;:true,&quot;type&quot;:&quot;text&quot;}"/>
+          <p:cNvPr id="306" name="" descr="{&quot;isTemplate&quot;:true,&quot;type&quot;:&quot;text&quot;}"/>
           <p:cNvSpPr txBox="1"/>
           <p:nvPr/>
         </p:nvSpPr>
@@ -12363,7 +13370,7 @@
       </p:sp>
       <p:pic>
         <p:nvPicPr>
-          <p:cNvPr id="273" name=""/>
+          <p:cNvPr id="307" name=""/>
           <p:cNvPicPr>
             <a:picLocks noChangeAspect="1"/>
           </p:cNvPicPr>
@@ -12394,7 +13401,7 @@
       </p:pic>
       <p:sp>
         <p:nvSpPr>
-          <p:cNvPr id="274" name="" descr="{&quot;isTemplate&quot;:true,&quot;type&quot;:&quot;text&quot;}"/>
+          <p:cNvPr id="308" name="" descr="{&quot;isTemplate&quot;:true,&quot;type&quot;:&quot;text&quot;}"/>
           <p:cNvSpPr txBox="1"/>
           <p:nvPr/>
         </p:nvSpPr>
@@ -12421,7 +13428,7 @@
                 <a:latin typeface="Verdana"/>
                 <a:ea typeface="Verdana"/>
               </a:rPr>
-              <a:t>Mengelola katalog menu &amp; kategori</a:t>
+              <a:t>Mengelola katalog menu, kategori, dan gambarnya</a:t>
             </a:r>
             <a:endParaRPr/>
           </a:p>
@@ -12429,7 +13436,7 @@
       </p:sp>
       <p:pic>
         <p:nvPicPr>
-          <p:cNvPr id="275" name=""/>
+          <p:cNvPr id="309" name=""/>
           <p:cNvPicPr>
             <a:picLocks noChangeAspect="1"/>
           </p:cNvPicPr>
@@ -12460,7 +13467,7 @@
       </p:pic>
       <p:sp>
         <p:nvSpPr>
-          <p:cNvPr id="276" name="" descr="{&quot;isTemplate&quot;:true,&quot;type&quot;:&quot;text&quot;}"/>
+          <p:cNvPr id="310" name="" descr="{&quot;isTemplate&quot;:true,&quot;type&quot;:&quot;text&quot;}"/>
           <p:cNvSpPr txBox="1"/>
           <p:nvPr/>
         </p:nvSpPr>
@@ -12495,7 +13502,7 @@
       </p:sp>
       <p:pic>
         <p:nvPicPr>
-          <p:cNvPr id="277" name=""/>
+          <p:cNvPr id="311" name=""/>
           <p:cNvPicPr>
             <a:picLocks noChangeAspect="1"/>
           </p:cNvPicPr>
@@ -12526,7 +13533,7 @@
       </p:pic>
       <p:sp>
         <p:nvSpPr>
-          <p:cNvPr id="278" name="" descr="{&quot;isTemplate&quot;:true,&quot;type&quot;:&quot;text&quot;}"/>
+          <p:cNvPr id="312" name="" descr="{&quot;isTemplate&quot;:true,&quot;type&quot;:&quot;text&quot;}"/>
           <p:cNvSpPr txBox="1"/>
           <p:nvPr/>
         </p:nvSpPr>
@@ -12561,7 +13568,7 @@
       </p:sp>
       <p:pic>
         <p:nvPicPr>
-          <p:cNvPr id="279" name=""/>
+          <p:cNvPr id="313" name=""/>
           <p:cNvPicPr>
             <a:picLocks noChangeAspect="1"/>
           </p:cNvPicPr>
@@ -12592,7 +13599,7 @@
       </p:pic>
       <p:sp>
         <p:nvSpPr>
-          <p:cNvPr id="280" name="" descr="{&quot;isTemplate&quot;:true,&quot;type&quot;:&quot;text&quot;}"/>
+          <p:cNvPr id="314" name="" descr="{&quot;isTemplate&quot;:true,&quot;type&quot;:&quot;text&quot;}"/>
           <p:cNvSpPr txBox="1"/>
           <p:nvPr/>
         </p:nvSpPr>
@@ -12627,7 +13634,7 @@
       </p:sp>
       <p:sp>
         <p:nvSpPr>
-          <p:cNvPr id="281" name=""/>
+          <p:cNvPr id="315" name=""/>
           <p:cNvSpPr/>
           <p:nvPr/>
         </p:nvSpPr>
@@ -12655,7 +13662,7 @@
       </p:sp>
       <p:pic>
         <p:nvPicPr>
-          <p:cNvPr id="282" name=""/>
+          <p:cNvPr id="316" name=""/>
           <p:cNvPicPr>
             <a:picLocks noChangeAspect="1"/>
           </p:cNvPicPr>
@@ -12686,7 +13693,7 @@
       </p:pic>
       <p:sp>
         <p:nvSpPr>
-          <p:cNvPr id="283" name="" descr="{&quot;isTemplate&quot;:true,&quot;type&quot;:&quot;text&quot;}"/>
+          <p:cNvPr id="317" name="" descr="{&quot;isTemplate&quot;:true,&quot;type&quot;:&quot;text&quot;}"/>
           <p:cNvSpPr txBox="1"/>
           <p:nvPr/>
         </p:nvSpPr>
@@ -12721,7 +13728,7 @@
       </p:sp>
       <p:sp>
         <p:nvSpPr>
-          <p:cNvPr id="284" name="" descr="{&quot;isTemplate&quot;:true,&quot;type&quot;:&quot;text&quot;}"/>
+          <p:cNvPr id="318" name="" descr="{&quot;isTemplate&quot;:true,&quot;type&quot;:&quot;text&quot;}"/>
           <p:cNvSpPr txBox="1"/>
           <p:nvPr/>
         </p:nvSpPr>
@@ -12748,7 +13755,7 @@
                 <a:latin typeface="Verdana"/>
                 <a:ea typeface="Verdana"/>
               </a:rPr>
-              <a:t>06 / 17</a:t>
+              <a:t>06 / 18</a:t>
             </a:r>
             <a:endParaRPr/>
           </a:p>
@@ -12764,7 +13771,7 @@
   <p:cSld>
     <p:spTree>
       <p:nvGrpSpPr>
-        <p:cNvPr id="285" name=""/>
+        <p:cNvPr id="319" name="" descr="&lt;Slide&#10;    style={{&#10;        width: '1280px',&#10;        height: '720px',&#10;        background: '#FAF7F2',&#10;        paddingTop: 20,&#10;        paddingBottom: 20,&#10;        paddingLeft: 64,&#10;        paddingRight: 64,&#10;    }}&#10;&gt;&#10;    {/* ── A · blok judul ── */}&#10;    &lt;Box style={{ height: 110, justifyContent: 'center' }}&gt;&#10;        &lt;Text&#10;            style={{&#10;                fontSize: 34,&#10;                fontWeight: 'bold',&#10;                color: '#51277C',&#10;                fontFamily: 'Trebuchet MS',&#10;                lineHeight: 1.3,&#10;            }}&#10;        &gt;&#10;            Kelola akun orang tua sekaligus&#10;        &lt;/Text&gt;&#10;        &lt;Box style={{ marginTop: 10, width: 72, height: 6, borderRadius: 3, background: '#51277C' }} /&gt;&#10;    &lt;/Box&gt;&#10;&#10;    {/* ── B · area konten ── */}&#10;    &lt;Box style={{ height: 530, flexDirection: 'row', gap: 30 }}&gt;&#10;        {/* kiri 55% · alur berkas → pratinjau → daftar */}&#10;        &lt;Box&#10;            style={{&#10;                width: '55%',&#10;                height: '100%',&#10;                background: 'rgba(81,39,124,0.06)',&#10;                borderRadius: 20,&#10;                justifyContent: 'center',&#10;                alignItems: 'center',&#10;            }}&#10;        &gt;&#10;            &lt;svg width={520} height={430} viewBox='0 0 520 430'&gt;&#10;                {/* langkah 1 · berkas daftar akun */}&#10;                &lt;rect x='40' y='4' width='440' height='140' rx='14' fill='#FFFFFF' stroke='#E6DFD2' strokeWidth='2' /&gt;&#10;                &lt;rect x='40' y='4' width='440' height='36' rx='14' fill='#51277C' /&gt;&#10;                &lt;rect x='40' y='24' width='440' height='16' fill='#51277C' /&gt;&#10;                &lt;text x='62' y='29' fontFamily='Verdana' fontSize='13' fill='#FFFFFF'&gt;&#10;                    Nama orang tua&#10;                &lt;/text&gt;&#10;                &lt;text x='238' y='29' fontFamily='Verdana' fontSize='13' fill='#FFFFFF'&gt;&#10;                    Username&#10;                &lt;/text&gt;&#10;                &lt;text x='368' y='29' fontFamily='Verdana' fontSize='13' fill='#FFFFFF'&gt;&#10;                    Anak&#10;                &lt;/text&gt;&#10;&#10;                &lt;rect x='62' y='56' width='150' height='10' rx='5' fill='#DED7CB' /&gt;&#10;                &lt;rect x='238' y='56' width='110' height='10' rx='5' fill='#EDE8DF' /&gt;&#10;                &lt;rect x='368' y='56' width='90' height='10' rx='5' fill='#EDE8DF' /&gt;&#10;&#10;                &lt;rect x='62' y='80' width='150' height='10' rx='5' fill='#DED7CB' /&gt;&#10;                &lt;rect x='238' y='80' width='110' height='10' rx='5' fill='#EDE8DF' /&gt;&#10;                &lt;rect x='368' y='80' width='90' height='10' rx='5' fill='#EDE8DF' /&gt;&#10;&#10;                &lt;rect x='62' y='104' width='150' height='10' rx='5' fill='#DED7CB' /&gt;&#10;                &lt;rect x='238' y='104' width='110' height='10' rx='5' fill='#EDE8DF' /&gt;&#10;                &lt;rect x='368' y='104' width='90' height='10' rx='5' fill='#EDE8DF' /&gt;&#10;&#10;                &lt;rect x='62' y='128' width='150' height='10' rx='5' fill='#AFC440' /&gt;&#10;                &lt;rect x='238' y='128' width='110' height='10' rx='5' fill='#EDE8DF' /&gt;&#10;                &lt;rect x='368' y='128' width='90' height='10' rx='5' fill='#EDE8DF' /&gt;&#10;&#10;                {/* panah */}&#10;                &lt;path d='M260 148v20' stroke='#AFC440' strokeWidth='5' strokeLinecap='round' /&gt;&#10;                &lt;path d='M250 166l10 12 10-12' fill='none' stroke='#AFC440' strokeWidth='5' strokeLinecap='round' strokeLinejoin='round' /&gt;&#10;&#10;                {/* langkah 2 · pratinjau */}&#10;                &lt;rect x='40' y='190' width='440' height='132' rx='14' fill='#FFFFFF' stroke='#E6DFD2' strokeWidth='2' /&gt;&#10;                &lt;text x='64' y='222' fontFamily='Trebuchet MS' fontSize='20' fontWeight='bold' fill='#51277C'&gt;&#10;                    Pratinjau&#10;                &lt;/text&gt;&#10;                &lt;rect x='64' y='236' width='128' height='34' rx='10' fill='rgba(175,196,64,0.25)' /&gt;&#10;                &lt;text x='128' y='258' fontFamily='Verdana' fontSize='14' fill='#3F4718' textAnchor='middle'&gt;&#10;                    Dibuat 2&#10;                &lt;/text&gt;&#10;                &lt;rect x='200' y='236' width='152' height='34' rx='10' fill='rgba(81,39,124,0.12)' /&gt;&#10;                &lt;text x='276' y='258' fontFamily='Verdana' fontSize='14' fill='#51277C' textAnchor='middle'&gt;&#10;                    Diperbarui 34&#10;                &lt;/text&gt;&#10;                &lt;rect x='360' y='236' width='104' height='34' rx='10' fill='rgba(107,100,120,0.16)' /&gt;&#10;                &lt;text x='412' y='258' fontFamily='Verdana' fontSize='14' fill='#6B6478' textAnchor='middle'&gt;&#10;                    Dilewati 1&#10;                &lt;/text&gt;&#10;                &lt;rect x='320' y='282' width='136' height='30' rx='15' fill='#51277C' /&gt;&#10;                &lt;text x='388' y='302' fontFamily='Verdana' fontSize='14' fontWeight='bold' fill='#FFFFFF' textAnchor='middle'&gt;&#10;                    Terapkan&#10;                &lt;/text&gt;&#10;&#10;                {/* panah */}&#10;                &lt;path d='M260 326v18' stroke='#AFC440' strokeWidth='5' strokeLinecap='round' /&gt;&#10;                &lt;path d='M250 342l10 12 10-12' fill='none' stroke='#AFC440' strokeWidth='5' strokeLinecap='round' strokeLinejoin='round' /&gt;&#10;&#10;                {/* langkah 3 · hasil */}&#10;                &lt;rect x='40' y='366' width='440' height='56' rx='14' fill='#51277C' /&gt;&#10;                &lt;circle cx='76' cy='394' r='17' fill='#AFC440' /&gt;&#10;                &lt;path d='M68 394l6 6 11-12' fill='none' stroke='#3F4718' strokeWidth='4' strokeLinecap='round' strokeLinejoin='round' /&gt;&#10;                &lt;text x='106' y='390' fontFamily='Trebuchet MS' fontSize='19' fontWeight='bold' fill='#FFFFFF'&gt;&#10;                    Daftar akun diperbarui&#10;                &lt;/text&gt;&#10;                &lt;text x='106' y='410' fontFamily='Verdana' fontSize='13' fill='#EFEAE1'&gt;&#10;                    Langsung bisa dipakai masuk oleh orang tua&#10;                &lt;/text&gt;&#10;            &lt;/svg&gt;&#10;        &lt;/Box&gt;&#10;&#10;        {/* kanan 45% · tiga keterangan */}&#10;        &lt;Box style={{ width: '45%', height: '100%', justifyContent: 'space-between' }}&gt;&#10;            {[&#10;                {&#10;                    t: 'Satu berkas, dua arah',&#10;                    d: 'Unduh daftar akun sebagai Excel, sunting sebanyak yang perlu, lalu unggah kembali berkas yang sama.',&#10;                    g: 'Khusus admin',&#10;                },&#10;                {&#10;                    t: 'Ada ditimpa, baru ditambah',&#10;                    d: 'Username yang sudah terdaftar diperbarui; yang belum ada dibuatkan akun baru. Sel kosong tidak mengubah apa pun.',&#10;                    g: 'Dikunci pada username',&#10;                },&#10;                {&#10;                    t: 'Pratinjau sebelum berubah',&#10;                    d: 'Layar menunjukkan lebih dulu berapa akun dibuat, diperbarui, dan dilewati. Belum ada yang tersimpan.',&#10;                    g: 'Aman diulang',&#10;                },&#10;            ].map((it, i) =&gt; (&#10;                &lt;Box&#10;                    key={i}&#10;                    style={{&#10;                        height: 166,&#10;                        background: '#FFFFFF',&#10;                        borderRadius: 16,&#10;                        boxShadow: '0 4px 20px rgba(0,0,0,0.08)',&#10;                        padding: 22,&#10;                        borderLeft: i === 2 ? '8px solid #F3B26C' : '8px solid #AFC440',&#10;                    }}&#10;                &gt;&#10;                    &lt;Text&#10;                        style={{&#10;                            fontSize: 24,&#10;                            fontWeight: 'bold',&#10;                            color: '#51277C',&#10;                            fontFamily: 'Trebuchet MS',&#10;                            lineHeight: 1.3,&#10;                        }}&#10;                    &gt;&#10;                        {it.t}&#10;                    &lt;/Text&gt;&#10;                    &lt;Text&#10;                        style={{&#10;                            marginTop: 10,&#10;                            fontSize: 17,&#10;                            color: '#6B6478',&#10;                            fontFamily: 'Verdana',&#10;                            lineHeight: 1.5,&#10;                        }}&#10;                    &gt;&#10;                        {it.d}&#10;                    &lt;/Text&gt;&#10;                    &lt;Box style={{ marginTop: 'auto' }}&gt;&#10;                        &lt;Text&#10;                            style={{&#10;                                fontSize: 16,&#10;                                color: '#51277C',&#10;                                fontFamily: 'Verdana',&#10;                                fontWeight: 'bold',&#10;                            }}&#10;                        &gt;&#10;                            {it.g}&#10;                        &lt;/Text&gt;&#10;                    &lt;/Box&gt;&#10;                &lt;/Box&gt;&#10;            ))}&#10;        &lt;/Box&gt;&#10;    &lt;/Box&gt;&#10;&#10;    {/* ── C · bilah kaki ── */}&#10;    &lt;Box&#10;        style={{&#10;            height: 40,&#10;            flexDirection: 'row',&#10;            alignItems: 'center',&#10;            justifyContent: 'space-between',&#10;        }}&#10;    &gt;&#10;        &lt;Text style={{ fontSize: 14, color: '#6B6478', fontFamily: 'Verdana' }}&gt;&#10;            Pizza Snack Play · Panduan Korlas &amp;amp; Admin&#10;        &lt;/Text&gt;&#10;        &lt;Text style={{ fontSize: 14, color: '#6B6478', fontFamily: 'Verdana' }}&gt;07 / 18&lt;/Text&gt;&#10;    &lt;/Box&gt;&#10;&lt;/Slide&gt;&#10;"/>
         <p:cNvGrpSpPr/>
         <p:nvPr/>
       </p:nvGrpSpPr>
@@ -12778,7 +13785,7 @@
       </p:grpSpPr>
       <p:sp>
         <p:nvSpPr>
-          <p:cNvPr id="286" name=""/>
+          <p:cNvPr id="320" name=""/>
           <p:cNvSpPr/>
           <p:nvPr/>
         </p:nvSpPr>
@@ -12797,15 +13804,12 @@
         </p:spPr>
         <p:txBody>
           <a:bodyPr/>
-          <a:p>
-            <a:pPr/>
-            <a:endParaRPr/>
-          </a:p>
-        </p:txBody>
-      </p:sp>
-      <p:sp>
-        <p:nvSpPr>
-          <p:cNvPr id="287" name="" descr="{&quot;isTemplate&quot;:true,&quot;type&quot;:&quot;text&quot;}"/>
+          <a:p/>
+        </p:txBody>
+      </p:sp>
+      <p:sp>
+        <p:nvSpPr>
+          <p:cNvPr id="321" name="" descr="{&quot;isTemplate&quot;:true,&quot;type&quot;:&quot;text&quot;}"/>
           <p:cNvSpPr txBox="1"/>
           <p:nvPr/>
         </p:nvSpPr>
@@ -12840,7 +13844,7 @@
       </p:sp>
       <p:sp>
         <p:nvSpPr>
-          <p:cNvPr id="288" name=""/>
+          <p:cNvPr id="322" name=""/>
           <p:cNvSpPr/>
           <p:nvPr/>
         </p:nvSpPr>
@@ -12861,15 +13865,12 @@
         </p:spPr>
         <p:txBody>
           <a:bodyPr/>
-          <a:p>
-            <a:pPr/>
-            <a:endParaRPr/>
-          </a:p>
-        </p:txBody>
-      </p:sp>
-      <p:sp>
-        <p:nvSpPr>
-          <p:cNvPr id="289" name=""/>
+          <a:p/>
+        </p:txBody>
+      </p:sp>
+      <p:sp>
+        <p:nvSpPr>
+          <p:cNvPr id="323" name=""/>
           <p:cNvSpPr/>
           <p:nvPr/>
         </p:nvSpPr>
@@ -12892,15 +13893,12 @@
         </p:spPr>
         <p:txBody>
           <a:bodyPr/>
-          <a:p>
-            <a:pPr/>
-            <a:endParaRPr/>
-          </a:p>
+          <a:p/>
         </p:txBody>
       </p:sp>
       <p:pic>
         <p:nvPicPr>
-          <p:cNvPr id="290" name=""/>
+          <p:cNvPr id="324" name=""/>
           <p:cNvPicPr>
             <a:picLocks noChangeAspect="1"/>
           </p:cNvPicPr>
@@ -12931,7 +13929,7 @@
       </p:pic>
       <p:sp>
         <p:nvSpPr>
-          <p:cNvPr id="291" name=""/>
+          <p:cNvPr id="325" name=""/>
           <p:cNvSpPr/>
           <p:nvPr/>
         </p:nvSpPr>
@@ -12959,15 +13957,12 @@
         </p:spPr>
         <p:txBody>
           <a:bodyPr/>
-          <a:p>
-            <a:pPr/>
-            <a:endParaRPr/>
-          </a:p>
-        </p:txBody>
-      </p:sp>
-      <p:sp>
-        <p:nvSpPr>
-          <p:cNvPr id="292" name=""/>
+          <a:p/>
+        </p:txBody>
+      </p:sp>
+      <p:sp>
+        <p:nvSpPr>
+          <p:cNvPr id="326" name=""/>
           <p:cNvSpPr/>
           <p:nvPr/>
         </p:nvSpPr>
@@ -13019,15 +14014,12 @@
         </p:spPr>
         <p:txBody>
           <a:bodyPr/>
-          <a:p>
-            <a:pPr/>
-            <a:endParaRPr/>
-          </a:p>
-        </p:txBody>
-      </p:sp>
-      <p:sp>
-        <p:nvSpPr>
-          <p:cNvPr id="293" name="" descr="{&quot;isTemplate&quot;:true,&quot;type&quot;:&quot;text&quot;}"/>
+          <a:p/>
+        </p:txBody>
+      </p:sp>
+      <p:sp>
+        <p:nvSpPr>
+          <p:cNvPr id="327" name="" descr="{&quot;isTemplate&quot;:true,&quot;type&quot;:&quot;text&quot;}"/>
           <p:cNvSpPr txBox="1"/>
           <p:nvPr/>
         </p:nvSpPr>
@@ -13062,7 +14054,7 @@
       </p:sp>
       <p:sp>
         <p:nvSpPr>
-          <p:cNvPr id="294" name="" descr="{&quot;isTemplate&quot;:true,&quot;type&quot;:&quot;text&quot;}"/>
+          <p:cNvPr id="328" name="" descr="{&quot;isTemplate&quot;:true,&quot;type&quot;:&quot;text&quot;}"/>
           <p:cNvSpPr txBox="1"/>
           <p:nvPr/>
         </p:nvSpPr>
@@ -13099,7 +14091,7 @@
       </p:sp>
       <p:sp>
         <p:nvSpPr>
-          <p:cNvPr id="295" name="" descr="{&quot;isTemplate&quot;:true,&quot;type&quot;:&quot;text&quot;}"/>
+          <p:cNvPr id="329" name="" descr="{&quot;isTemplate&quot;:true,&quot;type&quot;:&quot;text&quot;}"/>
           <p:cNvSpPr txBox="1"/>
           <p:nvPr/>
         </p:nvSpPr>
@@ -13134,7 +14126,7 @@
       </p:sp>
       <p:sp>
         <p:nvSpPr>
-          <p:cNvPr id="296" name=""/>
+          <p:cNvPr id="330" name=""/>
           <p:cNvSpPr/>
           <p:nvPr/>
         </p:nvSpPr>
@@ -13162,15 +14154,12 @@
         </p:spPr>
         <p:txBody>
           <a:bodyPr/>
-          <a:p>
-            <a:pPr/>
-            <a:endParaRPr/>
-          </a:p>
-        </p:txBody>
-      </p:sp>
-      <p:sp>
-        <p:nvSpPr>
-          <p:cNvPr id="297" name=""/>
+          <a:p/>
+        </p:txBody>
+      </p:sp>
+      <p:sp>
+        <p:nvSpPr>
+          <p:cNvPr id="331" name=""/>
           <p:cNvSpPr/>
           <p:nvPr/>
         </p:nvSpPr>
@@ -13222,15 +14211,12 @@
         </p:spPr>
         <p:txBody>
           <a:bodyPr/>
-          <a:p>
-            <a:pPr/>
-            <a:endParaRPr/>
-          </a:p>
-        </p:txBody>
-      </p:sp>
-      <p:sp>
-        <p:nvSpPr>
-          <p:cNvPr id="298" name="" descr="{&quot;isTemplate&quot;:true,&quot;type&quot;:&quot;text&quot;}"/>
+          <a:p/>
+        </p:txBody>
+      </p:sp>
+      <p:sp>
+        <p:nvSpPr>
+          <p:cNvPr id="332" name="" descr="{&quot;isTemplate&quot;:true,&quot;type&quot;:&quot;text&quot;}"/>
           <p:cNvSpPr txBox="1"/>
           <p:nvPr/>
         </p:nvSpPr>
@@ -13265,7 +14251,7 @@
       </p:sp>
       <p:sp>
         <p:nvSpPr>
-          <p:cNvPr id="299" name="" descr="{&quot;isTemplate&quot;:true,&quot;type&quot;:&quot;text&quot;}"/>
+          <p:cNvPr id="333" name="" descr="{&quot;isTemplate&quot;:true,&quot;type&quot;:&quot;text&quot;}"/>
           <p:cNvSpPr txBox="1"/>
           <p:nvPr/>
         </p:nvSpPr>
@@ -13302,7 +14288,7 @@
       </p:sp>
       <p:sp>
         <p:nvSpPr>
-          <p:cNvPr id="300" name="" descr="{&quot;isTemplate&quot;:true,&quot;type&quot;:&quot;text&quot;}"/>
+          <p:cNvPr id="334" name="" descr="{&quot;isTemplate&quot;:true,&quot;type&quot;:&quot;text&quot;}"/>
           <p:cNvSpPr txBox="1"/>
           <p:nvPr/>
         </p:nvSpPr>
@@ -13337,7 +14323,7 @@
       </p:sp>
       <p:sp>
         <p:nvSpPr>
-          <p:cNvPr id="301" name=""/>
+          <p:cNvPr id="335" name=""/>
           <p:cNvSpPr/>
           <p:nvPr/>
         </p:nvSpPr>
@@ -13365,15 +14351,12 @@
         </p:spPr>
         <p:txBody>
           <a:bodyPr/>
-          <a:p>
-            <a:pPr/>
-            <a:endParaRPr/>
-          </a:p>
-        </p:txBody>
-      </p:sp>
-      <p:sp>
-        <p:nvSpPr>
-          <p:cNvPr id="302" name=""/>
+          <a:p/>
+        </p:txBody>
+      </p:sp>
+      <p:sp>
+        <p:nvSpPr>
+          <p:cNvPr id="336" name=""/>
           <p:cNvSpPr/>
           <p:nvPr/>
         </p:nvSpPr>
@@ -13425,15 +14408,12 @@
         </p:spPr>
         <p:txBody>
           <a:bodyPr/>
-          <a:p>
-            <a:pPr/>
-            <a:endParaRPr/>
-          </a:p>
-        </p:txBody>
-      </p:sp>
-      <p:sp>
-        <p:nvSpPr>
-          <p:cNvPr id="303" name="" descr="{&quot;isTemplate&quot;:true,&quot;type&quot;:&quot;text&quot;}"/>
+          <a:p/>
+        </p:txBody>
+      </p:sp>
+      <p:sp>
+        <p:nvSpPr>
+          <p:cNvPr id="337" name="" descr="{&quot;isTemplate&quot;:true,&quot;type&quot;:&quot;text&quot;}"/>
           <p:cNvSpPr txBox="1"/>
           <p:nvPr/>
         </p:nvSpPr>
@@ -13468,7 +14448,7 @@
       </p:sp>
       <p:sp>
         <p:nvSpPr>
-          <p:cNvPr id="304" name="" descr="{&quot;isTemplate&quot;:true,&quot;type&quot;:&quot;text&quot;}"/>
+          <p:cNvPr id="338" name="" descr="{&quot;isTemplate&quot;:true,&quot;type&quot;:&quot;text&quot;}"/>
           <p:cNvSpPr txBox="1"/>
           <p:nvPr/>
         </p:nvSpPr>
@@ -13505,7 +14485,7 @@
       </p:sp>
       <p:sp>
         <p:nvSpPr>
-          <p:cNvPr id="305" name="" descr="{&quot;isTemplate&quot;:true,&quot;type&quot;:&quot;text&quot;}"/>
+          <p:cNvPr id="339" name="" descr="{&quot;isTemplate&quot;:true,&quot;type&quot;:&quot;text&quot;}"/>
           <p:cNvSpPr txBox="1"/>
           <p:nvPr/>
         </p:nvSpPr>
@@ -13540,7 +14520,7 @@
       </p:sp>
       <p:sp>
         <p:nvSpPr>
-          <p:cNvPr id="306" name="" descr="{&quot;isTemplate&quot;:true,&quot;type&quot;:&quot;text&quot;}"/>
+          <p:cNvPr id="340" name="" descr="{&quot;isTemplate&quot;:true,&quot;type&quot;:&quot;text&quot;}"/>
           <p:cNvSpPr txBox="1"/>
           <p:nvPr/>
         </p:nvSpPr>
@@ -13575,7 +14555,7 @@
       </p:sp>
       <p:sp>
         <p:nvSpPr>
-          <p:cNvPr id="307" name="" descr="{&quot;isTemplate&quot;:true,&quot;type&quot;:&quot;text&quot;}"/>
+          <p:cNvPr id="341" name="" descr="{&quot;isTemplate&quot;:true,&quot;type&quot;:&quot;text&quot;}"/>
           <p:cNvSpPr txBox="1"/>
           <p:nvPr/>
         </p:nvSpPr>
@@ -13602,7 +14582,7 @@
                 <a:latin typeface="Verdana"/>
                 <a:ea typeface="Verdana"/>
               </a:rPr>
-              <a:t>07 / 17</a:t>
+              <a:t>07 / 18</a:t>
             </a:r>
             <a:endParaRPr/>
           </a:p>
@@ -13618,7 +14598,7 @@
   <p:cSld>
     <p:spTree>
       <p:nvGrpSpPr>
-        <p:cNvPr id="308" name=""/>
+        <p:cNvPr id="342" name=""/>
         <p:cNvGrpSpPr/>
         <p:nvPr/>
       </p:nvGrpSpPr>
@@ -13632,7 +14612,7 @@
       </p:grpSpPr>
       <p:sp>
         <p:nvSpPr>
-          <p:cNvPr id="309" name=""/>
+          <p:cNvPr id="343" name=""/>
           <p:cNvSpPr/>
           <p:nvPr/>
         </p:nvSpPr>
@@ -13667,7 +14647,7 @@
       </p:sp>
       <p:sp>
         <p:nvSpPr>
-          <p:cNvPr id="310" name=""/>
+          <p:cNvPr id="344" name=""/>
           <p:cNvSpPr/>
           <p:nvPr/>
         </p:nvSpPr>
@@ -14066,7 +15046,7 @@
       </p:sp>
       <p:pic>
         <p:nvPicPr>
-          <p:cNvPr id="311" name=""/>
+          <p:cNvPr id="345" name=""/>
           <p:cNvPicPr>
             <a:picLocks noChangeAspect="1"/>
           </p:cNvPicPr>
@@ -14098,7 +15078,7 @@
       </p:pic>
       <p:sp>
         <p:nvSpPr>
-          <p:cNvPr id="312" name="" descr="{&quot;isTemplate&quot;:true,&quot;type&quot;:&quot;text&quot;}"/>
+          <p:cNvPr id="346" name="" descr="{&quot;isTemplate&quot;:true,&quot;type&quot;:&quot;text&quot;}"/>
           <p:cNvSpPr txBox="1"/>
           <p:nvPr/>
         </p:nvSpPr>
@@ -14133,7 +15113,7 @@
       </p:sp>
       <p:sp>
         <p:nvSpPr>
-          <p:cNvPr id="313" name=""/>
+          <p:cNvPr id="347" name=""/>
           <p:cNvSpPr/>
           <p:nvPr/>
         </p:nvSpPr>
@@ -14162,7 +15142,7 @@
       </p:sp>
       <p:sp>
         <p:nvSpPr>
-          <p:cNvPr id="314" name="" descr="{&quot;isTemplate&quot;:true,&quot;type&quot;:&quot;text&quot;}"/>
+          <p:cNvPr id="348" name="" descr="{&quot;isTemplate&quot;:true,&quot;type&quot;:&quot;text&quot;}"/>
           <p:cNvSpPr txBox="1"/>
           <p:nvPr/>
         </p:nvSpPr>
@@ -14199,7 +15179,7 @@
       </p:sp>
       <p:sp>
         <p:nvSpPr>
-          <p:cNvPr id="315" name="" descr="{&quot;isTemplate&quot;:true,&quot;type&quot;:&quot;text&quot;}"/>
+          <p:cNvPr id="349" name="" descr="{&quot;isTemplate&quot;:true,&quot;type&quot;:&quot;text&quot;}"/>
           <p:cNvSpPr txBox="1"/>
           <p:nvPr/>
         </p:nvSpPr>
@@ -14252,7 +15232,7 @@
       </p:sp>
       <p:sp>
         <p:nvSpPr>
-          <p:cNvPr id="316" name="" descr="{&quot;isTemplate&quot;:true,&quot;type&quot;:&quot;text&quot;}"/>
+          <p:cNvPr id="350" name="" descr="{&quot;isTemplate&quot;:true,&quot;type&quot;:&quot;text&quot;}"/>
           <p:cNvSpPr txBox="1"/>
           <p:nvPr/>
         </p:nvSpPr>
@@ -14299,7 +15279,7 @@
   <p:cSld>
     <p:spTree>
       <p:nvGrpSpPr>
-        <p:cNvPr id="317" name=""/>
+        <p:cNvPr id="351" name="" descr="&lt;Slide&#10;    style={{&#10;        width: '1280px',&#10;        height: '720px',&#10;        background: '#FAF7F2',&#10;        paddingTop: 20,&#10;        paddingBottom: 20,&#10;        paddingLeft: 64,&#10;        paddingRight: 64,&#10;    }}&#10;&gt;&#10;    {/* ── A · blok judul ── */}&#10;    &lt;Box style={{ height: 110, justifyContent: 'center' }}&gt;&#10;        &lt;Text&#10;            style={{&#10;                fontSize: 34,&#10;                fontWeight: 'bold',&#10;                color: '#51277C',&#10;                fontFamily: 'Trebuchet MS',&#10;                lineHeight: 1.3,&#10;            }}&#10;        &gt;&#10;            Isi menu per hari&#10;        &lt;/Text&gt;&#10;        &lt;Box style={{ marginTop: 10, width: 72, height: 6, borderRadius: 3, background: '#51277C' }} /&gt;&#10;    &lt;/Box&gt;&#10;&#10;    {/* ── B · area konten ── */}&#10;    &lt;Box style={{ height: 530 }}&gt;&#10;        {/* atas · ilustrasi tabel jadwal */}&#10;        &lt;Box&#10;            style={{&#10;                height: 306,&#10;                background: 'rgba(81,39,124,0.06)',&#10;                borderRadius: 20,&#10;                justifyContent: 'center',&#10;                alignItems: 'center',&#10;            }}&#10;        &gt;&#10;            &lt;svg width={1100} height={270} viewBox='0 0 1100 270'&gt;&#10;                &lt;rect x='6' y='6' width='1088' height='46' rx='10' fill='#51277C' /&gt;&#10;                &lt;text x='46' y='37' fontFamily='Trebuchet MS' fontSize='20' fontWeight='bold' fill='#FFFFFF'&gt;&#10;                    Tanggal&#10;                &lt;/text&gt;&#10;                &lt;text x='330' y='37' fontFamily='Trebuchet MS' fontSize='20' fontWeight='bold' fill='#FFFFFF'&gt;&#10;                    Menu&#10;                &lt;/text&gt;&#10;                &lt;text x='760' y='37' fontFamily='Trebuchet MS' fontSize='20' fontWeight='bold' fill='#FFFFFF'&gt;&#10;                    Petugas&#10;                &lt;/text&gt;&#10;                &lt;text x='990' y='37' fontFamily='Trebuchet MS' fontSize='20' fontWeight='bold' fill='#FFFFFF'&gt;&#10;                    Status&#10;                &lt;/text&gt;&#10;&#10;                {/* Senin */}&#10;                &lt;rect x='6' y='60' width='1088' height='46' rx='10' fill='#FFFFFF' stroke='#E6DFD2' strokeWidth='2' /&gt;&#10;                &lt;text x='46' y='90' fontFamily='Verdana' fontSize='16' fill='#51277C'&gt;Senin, 5&lt;/text&gt;&#10;                &lt;text x='330' y='90' fontFamily='Verdana' fontSize='16' fill='#2A2333'&gt;Roti coklat + jeruk&lt;/text&gt;&#10;                &lt;text x='760' y='90' fontFamily='Verdana' fontSize='16' fill='#6B6478'&gt;Rafa&lt;/text&gt;&#10;                &lt;rect x='940' y='71' width='118' height='24' rx='12' fill='#DED7CB' /&gt;&#10;                &lt;text x='999' y='88' fontFamily='Verdana' fontSize='13' fill='#51277C' textAnchor='middle'&gt;bisa diubah&lt;/text&gt;&#10;&#10;                {/* Selasa */}&#10;                &lt;rect x='6' y='112' width='1088' height='46' rx='10' fill='#FFFFFF' stroke='#E6DFD2' strokeWidth='2' /&gt;&#10;                &lt;text x='46' y='142' fontFamily='Verdana' fontSize='16' fill='#51277C'&gt;Selasa, 6&lt;/text&gt;&#10;                &lt;text x='330' y='142' fontFamily='Verdana' fontSize='16' fill='#2A2333'&gt;Puding + pisang&lt;/text&gt;&#10;                &lt;text x='760' y='142' fontFamily='Verdana' fontSize='16' fill='#6B6478'&gt;—&lt;/text&gt;&#10;                &lt;rect x='940' y='123' width='118' height='24' rx='12' fill='#DED7CB' /&gt;&#10;                &lt;text x='999' y='140' fontFamily='Verdana' fontSize='13' fill='#51277C' textAnchor='middle'&gt;bisa diubah&lt;/text&gt;&#10;&#10;                {/* Rabu — libur */}&#10;                &lt;rect x='6' y='164' width='1088' height='46' rx='10' fill='#FFFFFF' stroke='#F3B26C' strokeWidth='2' /&gt;&#10;                &lt;text x='46' y='194' fontFamily='Verdana' fontSize='16' fill='#51277C'&gt;Rabu, 7&lt;/text&gt;&#10;                &lt;text x='330' y='194' fontFamily='Verdana' fontSize='16' fill='#2A2333'&gt;Libur&lt;/text&gt;&#10;                &lt;text x='760' y='194' fontFamily='Verdana' fontSize='16' fill='#6B6478'&gt;—&lt;/text&gt;&#10;                &lt;rect x='940' y='175' width='118' height='24' rx='12' fill='#F3B26C' /&gt;&#10;                &lt;text x='999' y='192' fontFamily='Verdana' fontSize='13' fill='#51277C' textAnchor='middle'&gt;libur&lt;/text&gt;&#10;&#10;                {/* Kamis — petugas kosong */}&#10;                &lt;rect x='6' y='216' width='1088' height='46' rx='10' fill='#FFFFFF' stroke='#AFC440' strokeWidth='3' /&gt;&#10;                &lt;text x='46' y='246' fontFamily='Verdana' fontSize='16' fill='#51277C'&gt;Kamis, 8&lt;/text&gt;&#10;                &lt;text x='330' y='246' fontFamily='Verdana' fontSize='16' fill='#2A2333'&gt;Donat + melon&lt;/text&gt;&#10;                &lt;text x='760' y='246' fontFamily='Verdana' fontSize='16' fill='#6B6478'&gt;—&lt;/text&gt;&#10;                &lt;rect x='940' y='227' width='118' height='24' rx='12' fill='#AFC440' /&gt;&#10;                &lt;text x='999' y='244' fontFamily='Verdana' fontSize='13' fill='#3F4718' textAnchor='middle'&gt;petugas kosong&lt;/text&gt;&#10;            &lt;/svg&gt;&#10;        &lt;/Box&gt;&#10;&#10;        {/* bawah · dua kartu 60:40 */}&#10;        &lt;Box style={{ marginTop: 18, height: 206, flexDirection: 'row', gap: 24 }}&gt;&#10;            &lt;Box&#10;                style={{&#10;                    width: '60%',&#10;                    background: '#FFFFFF',&#10;                    borderRadius: 16,&#10;                    boxShadow: '0 4px 20px rgba(0,0,0,0.08)',&#10;                    padding: 24,&#10;                    borderLeft: '8px solid #AFC440',&#10;                }}&#10;            &gt;&#10;                &lt;Text&#10;                    style={{&#10;                        fontSize: 26,&#10;                        fontWeight: 'bold',&#10;                        color: '#51277C',&#10;                        fontFamily: 'Trebuchet MS',&#10;                    }}&#10;                &gt;&#10;                    Pilih menu di setiap tanggal&#10;                &lt;/Text&gt;&#10;                &lt;Text&#10;                    style={{&#10;                        marginTop: 10,&#10;                        fontSize: 18,&#10;                        color: '#6B6478',&#10;                        fontFamily: 'Verdana',&#10;                        lineHeight: 1.5,&#10;                    }}&#10;                &gt;&#10;                    Satu hari berisi makanan utama dan buah pendamping. Hari yang tidak masuk&#10;                    sekolah cukup ditandai libur — menunya tidak perlu diisi.&#10;                &lt;/Text&gt;&#10;            &lt;/Box&gt;&#10;&#10;            &lt;Box&#10;                style={{&#10;                    width: '40%',&#10;                    background: '#FFFFFF',&#10;                    borderRadius: 16,&#10;                    boxShadow: '0 4px 20px rgba(0,0,0,0.08)',&#10;                    padding: 24,&#10;                    borderLeft: '8px solid #F3B26C',&#10;                }}&#10;            &gt;&#10;                &lt;Text&#10;                    style={{&#10;                        fontSize: 26,&#10;                        fontWeight: 'bold',&#10;                        color: '#51277C',&#10;                        fontFamily: 'Trebuchet MS',&#10;                    }}&#10;                &gt;&#10;                    Salin Sepekan&#10;                &lt;/Text&gt;&#10;                &lt;Text&#10;                    style={{&#10;                        marginTop: 10,&#10;                        fontSize: 18,&#10;                        color: '#6B6478',&#10;                        fontFamily: 'Verdana',&#10;                        lineHeight: 1.5,&#10;                    }}&#10;                &gt;&#10;                    Duplikasi Senin–Jumat ke minggu lain. Tanggal yang sudah terisi dilewati.&#10;                &lt;/Text&gt;&#10;            &lt;/Box&gt;&#10;        &lt;/Box&gt;&#10;    &lt;/Box&gt;&#10;&#10;    {/* ── C · bilah kaki ── */}&#10;    &lt;Box&#10;        style={{&#10;            height: 40,&#10;            flexDirection: 'row',&#10;            alignItems: 'center',&#10;            justifyContent: 'space-between',&#10;        }}&#10;    &gt;&#10;        &lt;Text style={{ fontSize: 14, color: '#6B6478', fontFamily: 'Verdana' }}&gt;&#10;            Pizza Snack Play · Panduan Korlas &amp;amp; Admin&#10;        &lt;/Text&gt;&#10;        &lt;Text style={{ fontSize: 14, color: '#6B6478', fontFamily: 'Verdana' }}&gt;09 / 18&lt;/Text&gt;&#10;    &lt;/Box&gt;&#10;&lt;/Slide&gt;&#10;"/>
         <p:cNvGrpSpPr/>
         <p:nvPr/>
       </p:nvGrpSpPr>
@@ -14313,7 +15293,7 @@
       </p:grpSpPr>
       <p:sp>
         <p:nvSpPr>
-          <p:cNvPr id="318" name=""/>
+          <p:cNvPr id="352" name=""/>
           <p:cNvSpPr/>
           <p:nvPr/>
         </p:nvSpPr>
@@ -14332,15 +15312,12 @@
         </p:spPr>
         <p:txBody>
           <a:bodyPr/>
-          <a:p>
-            <a:pPr/>
-            <a:endParaRPr/>
-          </a:p>
-        </p:txBody>
-      </p:sp>
-      <p:sp>
-        <p:nvSpPr>
-          <p:cNvPr id="319" name="" descr="{&quot;isTemplate&quot;:true,&quot;type&quot;:&quot;text&quot;}"/>
+          <a:p/>
+        </p:txBody>
+      </p:sp>
+      <p:sp>
+        <p:nvSpPr>
+          <p:cNvPr id="353" name="" descr="{&quot;isTemplate&quot;:true,&quot;type&quot;:&quot;text&quot;}"/>
           <p:cNvSpPr txBox="1"/>
           <p:nvPr/>
         </p:nvSpPr>
@@ -14375,7 +15352,7 @@
       </p:sp>
       <p:sp>
         <p:nvSpPr>
-          <p:cNvPr id="320" name=""/>
+          <p:cNvPr id="354" name=""/>
           <p:cNvSpPr/>
           <p:nvPr/>
         </p:nvSpPr>
@@ -14396,15 +15373,12 @@
         </p:spPr>
         <p:txBody>
           <a:bodyPr/>
-          <a:p>
-            <a:pPr/>
-            <a:endParaRPr/>
-          </a:p>
-        </p:txBody>
-      </p:sp>
-      <p:sp>
-        <p:nvSpPr>
-          <p:cNvPr id="321" name=""/>
+          <a:p/>
+        </p:txBody>
+      </p:sp>
+      <p:sp>
+        <p:nvSpPr>
+          <p:cNvPr id="355" name=""/>
           <p:cNvSpPr/>
           <p:nvPr/>
         </p:nvSpPr>
@@ -14427,15 +15401,12 @@
         </p:spPr>
         <p:txBody>
           <a:bodyPr/>
-          <a:p>
-            <a:pPr/>
-            <a:endParaRPr/>
-          </a:p>
+          <a:p/>
         </p:txBody>
       </p:sp>
       <p:pic>
         <p:nvPicPr>
-          <p:cNvPr id="322" name=""/>
+          <p:cNvPr id="356" name=""/>
           <p:cNvPicPr>
             <a:picLocks noChangeAspect="1"/>
           </p:cNvPicPr>
@@ -14466,7 +15437,7 @@
       </p:pic>
       <p:sp>
         <p:nvSpPr>
-          <p:cNvPr id="323" name=""/>
+          <p:cNvPr id="357" name=""/>
           <p:cNvSpPr/>
           <p:nvPr/>
         </p:nvSpPr>
@@ -14494,15 +15465,12 @@
         </p:spPr>
         <p:txBody>
           <a:bodyPr/>
-          <a:p>
-            <a:pPr/>
-            <a:endParaRPr/>
-          </a:p>
-        </p:txBody>
-      </p:sp>
-      <p:sp>
-        <p:nvSpPr>
-          <p:cNvPr id="324" name=""/>
+          <a:p/>
+        </p:txBody>
+      </p:sp>
+      <p:sp>
+        <p:nvSpPr>
+          <p:cNvPr id="358" name=""/>
           <p:cNvSpPr/>
           <p:nvPr/>
         </p:nvSpPr>
@@ -14554,15 +15522,12 @@
         </p:spPr>
         <p:txBody>
           <a:bodyPr/>
-          <a:p>
-            <a:pPr/>
-            <a:endParaRPr/>
-          </a:p>
-        </p:txBody>
-      </p:sp>
-      <p:sp>
-        <p:nvSpPr>
-          <p:cNvPr id="325" name="" descr="{&quot;isTemplate&quot;:true,&quot;type&quot;:&quot;text&quot;}"/>
+          <a:p/>
+        </p:txBody>
+      </p:sp>
+      <p:sp>
+        <p:nvSpPr>
+          <p:cNvPr id="359" name="" descr="{&quot;isTemplate&quot;:true,&quot;type&quot;:&quot;text&quot;}"/>
           <p:cNvSpPr txBox="1"/>
           <p:nvPr/>
         </p:nvSpPr>
@@ -14597,7 +15562,7 @@
       </p:sp>
       <p:sp>
         <p:nvSpPr>
-          <p:cNvPr id="326" name="" descr="{&quot;isTemplate&quot;:true,&quot;type&quot;:&quot;text&quot;}"/>
+          <p:cNvPr id="360" name="" descr="{&quot;isTemplate&quot;:true,&quot;type&quot;:&quot;text&quot;}"/>
           <p:cNvSpPr txBox="1"/>
           <p:nvPr/>
         </p:nvSpPr>
@@ -14634,7 +15599,7 @@
       </p:sp>
       <p:sp>
         <p:nvSpPr>
-          <p:cNvPr id="327" name=""/>
+          <p:cNvPr id="361" name=""/>
           <p:cNvSpPr/>
           <p:nvPr/>
         </p:nvSpPr>
@@ -14662,15 +15627,12 @@
         </p:spPr>
         <p:txBody>
           <a:bodyPr/>
-          <a:p>
-            <a:pPr/>
-            <a:endParaRPr/>
-          </a:p>
-        </p:txBody>
-      </p:sp>
-      <p:sp>
-        <p:nvSpPr>
-          <p:cNvPr id="328" name=""/>
+          <a:p/>
+        </p:txBody>
+      </p:sp>
+      <p:sp>
+        <p:nvSpPr>
+          <p:cNvPr id="362" name=""/>
           <p:cNvSpPr/>
           <p:nvPr/>
         </p:nvSpPr>
@@ -14722,15 +15684,12 @@
         </p:spPr>
         <p:txBody>
           <a:bodyPr/>
-          <a:p>
-            <a:pPr/>
-            <a:endParaRPr/>
-          </a:p>
-        </p:txBody>
-      </p:sp>
-      <p:sp>
-        <p:nvSpPr>
-          <p:cNvPr id="329" name="" descr="{&quot;isTemplate&quot;:true,&quot;type&quot;:&quot;text&quot;}"/>
+          <a:p/>
+        </p:txBody>
+      </p:sp>
+      <p:sp>
+        <p:nvSpPr>
+          <p:cNvPr id="363" name="" descr="{&quot;isTemplate&quot;:true,&quot;type&quot;:&quot;text&quot;}"/>
           <p:cNvSpPr txBox="1"/>
           <p:nvPr/>
         </p:nvSpPr>
@@ -14765,7 +15724,7 @@
       </p:sp>
       <p:sp>
         <p:nvSpPr>
-          <p:cNvPr id="330" name="" descr="{&quot;isTemplate&quot;:true,&quot;type&quot;:&quot;text&quot;}"/>
+          <p:cNvPr id="364" name="" descr="{&quot;isTemplate&quot;:true,&quot;type&quot;:&quot;text&quot;}"/>
           <p:cNvSpPr txBox="1"/>
           <p:nvPr/>
         </p:nvSpPr>
@@ -14802,7 +15761,7 @@
       </p:sp>
       <p:sp>
         <p:nvSpPr>
-          <p:cNvPr id="331" name="" descr="{&quot;isTemplate&quot;:true,&quot;type&quot;:&quot;text&quot;}"/>
+          <p:cNvPr id="365" name="" descr="{&quot;isTemplate&quot;:true,&quot;type&quot;:&quot;text&quot;}"/>
           <p:cNvSpPr txBox="1"/>
           <p:nvPr/>
         </p:nvSpPr>
@@ -14837,7 +15796,7 @@
       </p:sp>
       <p:sp>
         <p:nvSpPr>
-          <p:cNvPr id="332" name="" descr="{&quot;isTemplate&quot;:true,&quot;type&quot;:&quot;text&quot;}"/>
+          <p:cNvPr id="366" name="" descr="{&quot;isTemplate&quot;:true,&quot;type&quot;:&quot;text&quot;}"/>
           <p:cNvSpPr txBox="1"/>
           <p:nvPr/>
         </p:nvSpPr>
@@ -14864,7 +15823,7 @@
                 <a:latin typeface="Verdana"/>
                 <a:ea typeface="Verdana"/>
               </a:rPr>
-              <a:t>09 / 17</a:t>
+              <a:t>09 / 18</a:t>
             </a:r>
             <a:endParaRPr/>
           </a:p>
